--- a/userguide.pptx
+++ b/userguide.pptx
@@ -2452,7 +2452,7 @@
                   <a:srgbClr val="C0C8D8"/>
                 </a:solidFill>
               </a:rPr>
-              <a:t>Portfolio (1), (2), (3) metrics</a:t>
+              <a:t>Portfolio (0), (1), (2), (3) metrics</a:t>
             </a:r>
             <a:endParaRPr lang="en-US" sz="1000" dirty="0"/>
           </a:p>
@@ -4313,7 +4313,7 @@
                   <a:srgbClr val="4A9EFF"/>
                 </a:solidFill>
               </a:rPr>
-              <a:t>Three Portfolios</a:t>
+              <a:t>Four Portfolios</a:t>
             </a:r>
             <a:endParaRPr lang="en-US" sz="1100" dirty="0"/>
           </a:p>
@@ -4349,7 +4349,7 @@
                   <a:srgbClr val="C0C8D8"/>
                 </a:solidFill>
               </a:rPr>
-              <a:t>No derivative / With derivative / Same risk — three perspectives for each optimisation run</a:t>
+              <a:t>Markowitz MV / no-derivative / with-derivative / same-risk — four portfolios per run</a:t>
             </a:r>
             <a:endParaRPr lang="en-US" sz="950" dirty="0"/>
           </a:p>
@@ -4508,7 +4508,7 @@
         <p:spPr>
           <a:xfrm>
             <a:off x="365760" y="2834640"/>
-            <a:ext cx="8412480" cy="1508760"/>
+            <a:ext cx="8412480" cy="1725360"/>
           </a:xfrm>
           <a:prstGeom prst="rect">
             <a:avLst/>
@@ -4558,7 +4558,7 @@
                   <a:srgbClr val="4A9EFF"/>
                 </a:solidFill>
               </a:rPr>
-              <a:t>Three Portfolio Perspectives</a:t>
+              <a:t>Four Portfolio Perspectives</a:t>
             </a:r>
             <a:endParaRPr lang="en-US" sz="1100" dirty="0"/>
           </a:p>
@@ -4572,7 +4572,7 @@
         </p:nvSpPr>
         <p:spPr>
           <a:xfrm>
-            <a:off x="548640" y="3209544"/>
+            <a:off x="548640" y="3547872"/>
             <a:ext cx="502920" cy="292608"/>
           </a:xfrm>
           <a:prstGeom prst="roundRect">
@@ -4603,7 +4603,7 @@
         </p:nvSpPr>
         <p:spPr>
           <a:xfrm>
-            <a:off x="548640" y="3209544"/>
+            <a:off x="548640" y="3547872"/>
             <a:ext cx="502920" cy="292608"/>
           </a:xfrm>
           <a:prstGeom prst="rect">
@@ -4639,7 +4639,7 @@
         </p:nvSpPr>
         <p:spPr>
           <a:xfrm>
-            <a:off x="1143000" y="3209544"/>
+            <a:off x="1143000" y="3547872"/>
             <a:ext cx="2194560" cy="292608"/>
           </a:xfrm>
           <a:prstGeom prst="rect">
@@ -4675,7 +4675,7 @@
         </p:nvSpPr>
         <p:spPr>
           <a:xfrm>
-            <a:off x="3383280" y="3209544"/>
+            <a:off x="3383280" y="3547872"/>
             <a:ext cx="5212080" cy="292608"/>
           </a:xfrm>
           <a:prstGeom prst="rect">
@@ -4711,7 +4711,7 @@
         </p:nvSpPr>
         <p:spPr>
           <a:xfrm>
-            <a:off x="548640" y="3547872"/>
+            <a:off x="548640" y="3886200"/>
             <a:ext cx="502920" cy="292608"/>
           </a:xfrm>
           <a:prstGeom prst="roundRect">
@@ -4742,7 +4742,7 @@
         </p:nvSpPr>
         <p:spPr>
           <a:xfrm>
-            <a:off x="548640" y="3547872"/>
+            <a:off x="548640" y="3886200"/>
             <a:ext cx="502920" cy="292608"/>
           </a:xfrm>
           <a:prstGeom prst="rect">
@@ -4778,7 +4778,7 @@
         </p:nvSpPr>
         <p:spPr>
           <a:xfrm>
-            <a:off x="1143000" y="3547872"/>
+            <a:off x="1143000" y="3886200"/>
             <a:ext cx="2194560" cy="292608"/>
           </a:xfrm>
           <a:prstGeom prst="rect">
@@ -4814,7 +4814,7 @@
         </p:nvSpPr>
         <p:spPr>
           <a:xfrm>
-            <a:off x="3383280" y="3547872"/>
+            <a:off x="3383280" y="3886200"/>
             <a:ext cx="5212080" cy="292608"/>
           </a:xfrm>
           <a:prstGeom prst="rect">
@@ -4850,7 +4850,7 @@
         </p:nvSpPr>
         <p:spPr>
           <a:xfrm>
-            <a:off x="548640" y="3886200"/>
+            <a:off x="548640" y="4224528"/>
             <a:ext cx="502920" cy="292608"/>
           </a:xfrm>
           <a:prstGeom prst="roundRect">
@@ -4881,7 +4881,7 @@
         </p:nvSpPr>
         <p:spPr>
           <a:xfrm>
-            <a:off x="548640" y="3886200"/>
+            <a:off x="548640" y="4224528"/>
             <a:ext cx="502920" cy="292608"/>
           </a:xfrm>
           <a:prstGeom prst="rect">
@@ -4917,7 +4917,7 @@
         </p:nvSpPr>
         <p:spPr>
           <a:xfrm>
-            <a:off x="1143000" y="3886200"/>
+            <a:off x="1143000" y="4224528"/>
             <a:ext cx="2194560" cy="292608"/>
           </a:xfrm>
           <a:prstGeom prst="rect">
@@ -4953,7 +4953,7 @@
         </p:nvSpPr>
         <p:spPr>
           <a:xfrm>
-            <a:off x="3383280" y="3886200"/>
+            <a:off x="3383280" y="4224528"/>
             <a:ext cx="5212080" cy="292608"/>
           </a:xfrm>
           <a:prstGeom prst="rect">
@@ -5050,6 +5050,150 @@
               <a:t>Beyond Mean-Variance Portfolio Optimiser — User Guide</a:t>
             </a:r>
             <a:endParaRPr lang="en-US" sz="900" dirty="0"/>
+          </a:p>
+        </p:txBody>
+      </p:sp>
+      <p:sp>
+        <p:nvSpPr>
+          <p:cNvPr id="32" name="Rectangle 31"/>
+          <p:cNvSpPr/>
+          <p:nvPr/>
+        </p:nvSpPr>
+        <p:spPr>
+          <a:xfrm>
+            <a:off x="548640" y="3209544"/>
+            <a:ext cx="502920" cy="292608"/>
+          </a:xfrm>
+          <a:prstGeom prst="rect">
+            <a:avLst/>
+          </a:prstGeom>
+          <a:solidFill>
+            <a:srgbClr val="1A6BBF"/>
+          </a:solidFill>
+          <a:ln>
+            <a:noFill/>
+          </a:ln>
+          <a:effectLst/>
+        </p:spPr>
+        <p:style>
+          <a:lnRef idx="1">
+            <a:schemeClr val="accent1"/>
+          </a:lnRef>
+          <a:fillRef idx="3">
+            <a:schemeClr val="accent1"/>
+          </a:fillRef>
+          <a:effectRef idx="2">
+            <a:schemeClr val="accent1"/>
+          </a:effectRef>
+          <a:fontRef idx="minor">
+            <a:schemeClr val="lt1"/>
+          </a:fontRef>
+        </p:style>
+        <p:txBody>
+          <a:bodyPr rtlCol="0" anchor="ctr"/>
+          <a:lstStyle/>
+          <a:p>
+            <a:pPr algn="ctr"/>
+          </a:p>
+        </p:txBody>
+      </p:sp>
+      <p:sp>
+        <p:nvSpPr>
+          <p:cNvPr id="33" name="TextBox 32"/>
+          <p:cNvSpPr txBox="1"/>
+          <p:nvPr/>
+        </p:nvSpPr>
+        <p:spPr>
+          <a:xfrm>
+            <a:off x="548640" y="3209544"/>
+            <a:ext cx="502920" cy="292608"/>
+          </a:xfrm>
+          <a:prstGeom prst="rect">
+            <a:avLst/>
+          </a:prstGeom>
+          <a:noFill/>
+        </p:spPr>
+        <p:txBody>
+          <a:bodyPr wrap="square" lIns="0" rIns="0" tIns="0" bIns="0" anchor="ctr">
+            <a:spAutoFit/>
+          </a:bodyPr>
+          <a:lstStyle/>
+          <a:p>
+            <a:pPr algn="ctr"/>
+            <a:r>
+              <a:rPr sz="1100" b="1">
+                <a:solidFill>
+                  <a:srgbClr val="FFFFFF"/>
+                </a:solidFill>
+              </a:rPr>
+              <a:t>0</a:t>
+            </a:r>
+          </a:p>
+        </p:txBody>
+      </p:sp>
+      <p:sp>
+        <p:nvSpPr>
+          <p:cNvPr id="34" name="TextBox 33"/>
+          <p:cNvSpPr txBox="1"/>
+          <p:nvPr/>
+        </p:nvSpPr>
+        <p:spPr>
+          <a:xfrm>
+            <a:off x="1143000" y="3209544"/>
+            <a:ext cx="2194560" cy="292608"/>
+          </a:xfrm>
+          <a:prstGeom prst="rect">
+            <a:avLst/>
+          </a:prstGeom>
+          <a:noFill/>
+        </p:spPr>
+        <p:txBody>
+          <a:bodyPr wrap="square" lIns="0" rIns="0" tIns="0" bIns="0" anchor="ctr">
+            <a:spAutoFit/>
+          </a:bodyPr>
+          <a:lstStyle/>
+          <a:p>
+            <a:r>
+              <a:rPr sz="950" b="1">
+                <a:solidFill>
+                  <a:srgbClr val="A855F7"/>
+                </a:solidFill>
+              </a:rPr>
+              <a:t>Portfolio (0) — Markowitz MV:</a:t>
+            </a:r>
+          </a:p>
+        </p:txBody>
+      </p:sp>
+      <p:sp>
+        <p:nvSpPr>
+          <p:cNvPr id="35" name="TextBox 34"/>
+          <p:cNvSpPr txBox="1"/>
+          <p:nvPr/>
+        </p:nvSpPr>
+        <p:spPr>
+          <a:xfrm>
+            <a:off x="3383280" y="3209544"/>
+            <a:ext cx="5212080" cy="292608"/>
+          </a:xfrm>
+          <a:prstGeom prst="rect">
+            <a:avLst/>
+          </a:prstGeom>
+          <a:noFill/>
+        </p:spPr>
+        <p:txBody>
+          <a:bodyPr wrap="square" lIns="0" rIns="0" tIns="0" bIns="0" anchor="ctr">
+            <a:spAutoFit/>
+          </a:bodyPr>
+          <a:lstStyle/>
+          <a:p>
+            <a:r>
+              <a:rPr sz="900" b="0">
+                <a:solidFill>
+                  <a:srgbClr val="C0C8D8"/>
+                </a:solidFill>
+              </a:rPr>
+              <a:t>Min-variance portfolio at P(1)’s return — the MVT/MAT-equivalent Markowitz optimum.</a:t>
+            </a:r>
           </a:p>
         </p:txBody>
       </p:sp>
@@ -6924,7 +7068,7 @@
                   <a:srgbClr val="C0C8D8"/>
                 </a:solidFill>
               </a:rPr>
-              <a:t>The expected loss in the worst α% of scenarios below H must not exceed L.</a:t>
+              <a:t>Expected loss in the worst tail below H must be at least L.</a:t>
             </a:r>
             <a:endParaRPr lang="en-US" sz="900" dirty="0"/>
           </a:p>
@@ -6938,7 +7082,7 @@
                   <a:srgbClr val="C0C8D8"/>
                 </a:solidFill>
               </a:rPr>
-              <a:t>Set H, α, and L using the sliders.</a:t>
+              <a:t>Two modes: thesis-faithful (default) reproduces the original; Rigorous-ES truly maximises E[r] s.t. ES ≥ L.</a:t>
             </a:r>
             <a:endParaRPr lang="en-US" sz="900" dirty="0"/>
           </a:p>
@@ -7277,8 +7421,8 @@
         </p:nvSpPr>
         <p:spPr>
           <a:xfrm>
-            <a:off x="4251960" y="804672"/>
-            <a:ext cx="4572000" cy="1051560"/>
+            <a:off x="4251960" y="1700000"/>
+            <a:ext cx="4572000" cy="900000"/>
           </a:xfrm>
           <a:prstGeom prst="rect">
             <a:avLst/>
@@ -7306,7 +7450,7 @@
         </p:nvSpPr>
         <p:spPr>
           <a:xfrm>
-            <a:off x="4434840" y="877824"/>
+            <a:off x="4434840" y="1764000"/>
             <a:ext cx="4206240" cy="292608"/>
           </a:xfrm>
           <a:prstGeom prst="rect">
@@ -7342,7 +7486,7 @@
         </p:nvSpPr>
         <p:spPr>
           <a:xfrm>
-            <a:off x="4434840" y="1188720"/>
+            <a:off x="4434840" y="2060000"/>
             <a:ext cx="4206240" cy="228600"/>
           </a:xfrm>
           <a:prstGeom prst="rect">
@@ -7378,8 +7522,8 @@
         </p:nvSpPr>
         <p:spPr>
           <a:xfrm>
-            <a:off x="4434840" y="1426464"/>
-            <a:ext cx="4206240" cy="320040"/>
+            <a:off x="4434840" y="2300000"/>
+            <a:ext cx="4206240" cy="280000"/>
           </a:xfrm>
           <a:prstGeom prst="rect">
             <a:avLst/>
@@ -7414,8 +7558,8 @@
         </p:nvSpPr>
         <p:spPr>
           <a:xfrm>
-            <a:off x="4251960" y="1975104"/>
-            <a:ext cx="4572000" cy="1051560"/>
+            <a:off x="4251960" y="2660000"/>
+            <a:ext cx="4572000" cy="900000"/>
           </a:xfrm>
           <a:prstGeom prst="rect">
             <a:avLst/>
@@ -7443,7 +7587,7 @@
         </p:nvSpPr>
         <p:spPr>
           <a:xfrm>
-            <a:off x="4434840" y="2048256"/>
+            <a:off x="4434840" y="2724000"/>
             <a:ext cx="4206240" cy="292608"/>
           </a:xfrm>
           <a:prstGeom prst="rect">
@@ -7479,7 +7623,7 @@
         </p:nvSpPr>
         <p:spPr>
           <a:xfrm>
-            <a:off x="4434840" y="2359152"/>
+            <a:off x="4434840" y="3020000"/>
             <a:ext cx="4206240" cy="228600"/>
           </a:xfrm>
           <a:prstGeom prst="rect">
@@ -7515,8 +7659,8 @@
         </p:nvSpPr>
         <p:spPr>
           <a:xfrm>
-            <a:off x="4434840" y="2596896"/>
-            <a:ext cx="4206240" cy="320040"/>
+            <a:off x="4434840" y="3260000"/>
+            <a:ext cx="4206240" cy="280000"/>
           </a:xfrm>
           <a:prstGeom prst="rect">
             <a:avLst/>
@@ -7551,8 +7695,8 @@
         </p:nvSpPr>
         <p:spPr>
           <a:xfrm>
-            <a:off x="4251960" y="3145536"/>
-            <a:ext cx="4572000" cy="1051560"/>
+            <a:off x="4251960" y="3620000"/>
+            <a:ext cx="4572000" cy="900000"/>
           </a:xfrm>
           <a:prstGeom prst="rect">
             <a:avLst/>
@@ -7580,7 +7724,7 @@
         </p:nvSpPr>
         <p:spPr>
           <a:xfrm>
-            <a:off x="4434840" y="3218688"/>
+            <a:off x="4434840" y="3684000"/>
             <a:ext cx="4206240" cy="292608"/>
           </a:xfrm>
           <a:prstGeom prst="rect">
@@ -7616,7 +7760,7 @@
         </p:nvSpPr>
         <p:spPr>
           <a:xfrm>
-            <a:off x="4434840" y="3529584"/>
+            <a:off x="4434840" y="3980000"/>
             <a:ext cx="4206240" cy="228600"/>
           </a:xfrm>
           <a:prstGeom prst="rect">
@@ -7638,7 +7782,7 @@
                   <a:srgbClr val="556A8A"/>
                 </a:solidFill>
               </a:rPr>
-              <a:t>⏱ 1–2 hrs</a:t>
+              <a:t>⏱ ~15–30 min</a:t>
             </a:r>
             <a:endParaRPr lang="en-US" sz="950" dirty="0"/>
           </a:p>
@@ -7652,8 +7796,8 @@
         </p:nvSpPr>
         <p:spPr>
           <a:xfrm>
-            <a:off x="4434840" y="3767328"/>
-            <a:ext cx="4206240" cy="320040"/>
+            <a:off x="4434840" y="4220000"/>
+            <a:ext cx="4206240" cy="280000"/>
           </a:xfrm>
           <a:prstGeom prst="rect">
             <a:avLst/>
@@ -7776,6 +7920,151 @@
           </a:prstGeom>
         </p:spPr>
       </p:pic>
+      <p:sp>
+        <p:nvSpPr>
+          <p:cNvPr id="25" name="Rectangle 24"/>
+          <p:cNvSpPr/>
+          <p:nvPr/>
+        </p:nvSpPr>
+        <p:spPr>
+          <a:xfrm>
+            <a:off x="4251960" y="740000"/>
+            <a:ext cx="4572000" cy="900000"/>
+          </a:xfrm>
+          <a:prstGeom prst="rect">
+            <a:avLst/>
+          </a:prstGeom>
+          <a:solidFill>
+            <a:srgbClr val="0D1A2E"/>
+          </a:solidFill>
+          <a:ln w="15240">
+            <a:solidFill>
+              <a:srgbClr val="22D3EE"/>
+            </a:solidFill>
+          </a:ln>
+          <a:effectLst/>
+        </p:spPr>
+        <p:style>
+          <a:lnRef idx="1">
+            <a:schemeClr val="accent1"/>
+          </a:lnRef>
+          <a:fillRef idx="3">
+            <a:schemeClr val="accent1"/>
+          </a:fillRef>
+          <a:effectRef idx="2">
+            <a:schemeClr val="accent1"/>
+          </a:effectRef>
+          <a:fontRef idx="minor">
+            <a:schemeClr val="lt1"/>
+          </a:fontRef>
+        </p:style>
+        <p:txBody>
+          <a:bodyPr rtlCol="0" anchor="ctr"/>
+          <a:lstStyle/>
+          <a:p>
+            <a:pPr algn="ctr"/>
+          </a:p>
+        </p:txBody>
+      </p:sp>
+      <p:sp>
+        <p:nvSpPr>
+          <p:cNvPr id="26" name="TextBox 25"/>
+          <p:cNvSpPr txBox="1"/>
+          <p:nvPr/>
+        </p:nvSpPr>
+        <p:spPr>
+          <a:xfrm>
+            <a:off x="4434840" y="804000"/>
+            <a:ext cx="4206240" cy="292608"/>
+          </a:xfrm>
+          <a:prstGeom prst="rect">
+            <a:avLst/>
+          </a:prstGeom>
+          <a:noFill/>
+        </p:spPr>
+        <p:txBody>
+          <a:bodyPr wrap="square" lIns="0" rIns="0" tIns="0" bIns="0" anchor="ctr">
+            <a:spAutoFit/>
+          </a:bodyPr>
+          <a:lstStyle/>
+          <a:p>
+            <a:r>
+              <a:rPr sz="1050" b="1" i="0">
+                <a:solidFill>
+                  <a:srgbClr val="22D3EE"/>
+                </a:solidFill>
+              </a:rPr>
+              <a:t>🚀  Turbo  (m=51, coarse-to-fine)</a:t>
+            </a:r>
+          </a:p>
+        </p:txBody>
+      </p:sp>
+      <p:sp>
+        <p:nvSpPr>
+          <p:cNvPr id="27" name="TextBox 26"/>
+          <p:cNvSpPr txBox="1"/>
+          <p:nvPr/>
+        </p:nvSpPr>
+        <p:spPr>
+          <a:xfrm>
+            <a:off x="4434840" y="1100000"/>
+            <a:ext cx="4206240" cy="228600"/>
+          </a:xfrm>
+          <a:prstGeom prst="rect">
+            <a:avLst/>
+          </a:prstGeom>
+          <a:noFill/>
+        </p:spPr>
+        <p:txBody>
+          <a:bodyPr wrap="square" lIns="0" rIns="0" tIns="0" bIns="0" anchor="ctr">
+            <a:spAutoFit/>
+          </a:bodyPr>
+          <a:lstStyle/>
+          <a:p>
+            <a:r>
+              <a:rPr sz="950" b="0" i="1">
+                <a:solidFill>
+                  <a:srgbClr val="556A8A"/>
+                </a:solidFill>
+              </a:rPr>
+              <a:t>⏱ ~1–2 s · default</a:t>
+            </a:r>
+          </a:p>
+        </p:txBody>
+      </p:sp>
+      <p:sp>
+        <p:nvSpPr>
+          <p:cNvPr id="28" name="TextBox 27"/>
+          <p:cNvSpPr txBox="1"/>
+          <p:nvPr/>
+        </p:nvSpPr>
+        <p:spPr>
+          <a:xfrm>
+            <a:off x="4434840" y="1340000"/>
+            <a:ext cx="4206240" cy="280000"/>
+          </a:xfrm>
+          <a:prstGeom prst="rect">
+            <a:avLst/>
+          </a:prstGeom>
+          <a:noFill/>
+        </p:spPr>
+        <p:txBody>
+          <a:bodyPr wrap="square" lIns="0" rIns="0" tIns="0" bIns="0" anchor="ctr">
+            <a:spAutoFit/>
+          </a:bodyPr>
+          <a:lstStyle/>
+          <a:p>
+            <a:r>
+              <a:rPr sz="900" b="0" i="0">
+                <a:solidFill>
+                  <a:srgbClr val="C0C8D8"/>
+                </a:solidFill>
+              </a:rPr>
+              <a:t>Thesis-level VaR accuracy, ~60× faster (no-derivative, n ≤ 4)</a:t>
+            </a:r>
+          </a:p>
+        </p:txBody>
+      </p:sp>
     </p:spTree>
   </p:cSld>
   <p:clrMapOvr>
@@ -8733,7 +9022,7 @@
         </p:nvSpPr>
         <p:spPr>
           <a:xfrm>
-            <a:off x="5669280" y="2157984"/>
+            <a:off x="5669280" y="2505456"/>
             <a:ext cx="164592" cy="201168"/>
           </a:xfrm>
           <a:prstGeom prst="rect">
@@ -8762,7 +9051,7 @@
         </p:nvSpPr>
         <p:spPr>
           <a:xfrm>
-            <a:off x="5897880" y="2157984"/>
+            <a:off x="5897880" y="2505456"/>
             <a:ext cx="2926080" cy="201168"/>
           </a:xfrm>
           <a:prstGeom prst="rect">
@@ -8798,7 +9087,7 @@
         </p:nvSpPr>
         <p:spPr>
           <a:xfrm>
-            <a:off x="5897880" y="2340864"/>
+            <a:off x="5897880" y="2688336"/>
             <a:ext cx="2926080" cy="182880"/>
           </a:xfrm>
           <a:prstGeom prst="rect">
@@ -8834,7 +9123,7 @@
         </p:nvSpPr>
         <p:spPr>
           <a:xfrm>
-            <a:off x="5669280" y="2505456"/>
+            <a:off x="5669280" y="2852928"/>
             <a:ext cx="164592" cy="201168"/>
           </a:xfrm>
           <a:prstGeom prst="rect">
@@ -8863,7 +9152,7 @@
         </p:nvSpPr>
         <p:spPr>
           <a:xfrm>
-            <a:off x="5897880" y="2505456"/>
+            <a:off x="5897880" y="2852928"/>
             <a:ext cx="2926080" cy="201168"/>
           </a:xfrm>
           <a:prstGeom prst="rect">
@@ -8899,7 +9188,7 @@
         </p:nvSpPr>
         <p:spPr>
           <a:xfrm>
-            <a:off x="5897880" y="2688336"/>
+            <a:off x="5897880" y="3035808"/>
             <a:ext cx="2926080" cy="182880"/>
           </a:xfrm>
           <a:prstGeom prst="rect">
@@ -8935,7 +9224,7 @@
         </p:nvSpPr>
         <p:spPr>
           <a:xfrm>
-            <a:off x="5669280" y="2852928"/>
+            <a:off x="5669280" y="3200400"/>
             <a:ext cx="164592" cy="201168"/>
           </a:xfrm>
           <a:prstGeom prst="rect">
@@ -8964,7 +9253,7 @@
         </p:nvSpPr>
         <p:spPr>
           <a:xfrm>
-            <a:off x="5897880" y="2852928"/>
+            <a:off x="5897880" y="3200400"/>
             <a:ext cx="2926080" cy="201168"/>
           </a:xfrm>
           <a:prstGeom prst="rect">
@@ -9000,7 +9289,7 @@
         </p:nvSpPr>
         <p:spPr>
           <a:xfrm>
-            <a:off x="5897880" y="3035808"/>
+            <a:off x="5897880" y="3383280"/>
             <a:ext cx="2926080" cy="182880"/>
           </a:xfrm>
           <a:prstGeom prst="rect">
@@ -9165,16 +9454,128 @@
           </a:p>
         </p:txBody>
       </p:sp>
+      <p:sp>
+        <p:nvSpPr>
+          <p:cNvPr id="30" name="Rectangle 29"/>
+          <p:cNvSpPr/>
+          <p:nvPr/>
+        </p:nvSpPr>
+        <p:spPr>
+          <a:xfrm>
+            <a:off x="5669280" y="2157984"/>
+            <a:ext cx="164592" cy="201168"/>
+          </a:xfrm>
+          <a:prstGeom prst="rect">
+            <a:avLst/>
+          </a:prstGeom>
+          <a:solidFill>
+            <a:srgbClr val="A855F7"/>
+          </a:solidFill>
+          <a:ln w="12700">
+            <a:solidFill>
+              <a:srgbClr val="FFFFFF"/>
+            </a:solidFill>
+          </a:ln>
+          <a:effectLst/>
+        </p:spPr>
+        <p:style>
+          <a:lnRef idx="1">
+            <a:schemeClr val="accent1"/>
+          </a:lnRef>
+          <a:fillRef idx="3">
+            <a:schemeClr val="accent1"/>
+          </a:fillRef>
+          <a:effectRef idx="2">
+            <a:schemeClr val="accent1"/>
+          </a:effectRef>
+          <a:fontRef idx="minor">
+            <a:schemeClr val="lt1"/>
+          </a:fontRef>
+        </p:style>
+        <p:txBody>
+          <a:bodyPr rtlCol="0" anchor="ctr"/>
+          <a:lstStyle/>
+          <a:p>
+            <a:pPr algn="ctr"/>
+          </a:p>
+        </p:txBody>
+      </p:sp>
+      <p:sp>
+        <p:nvSpPr>
+          <p:cNvPr id="31" name="TextBox 30"/>
+          <p:cNvSpPr txBox="1"/>
+          <p:nvPr/>
+        </p:nvSpPr>
+        <p:spPr>
+          <a:xfrm>
+            <a:off x="5897880" y="2157984"/>
+            <a:ext cx="2926080" cy="201168"/>
+          </a:xfrm>
+          <a:prstGeom prst="rect">
+            <a:avLst/>
+          </a:prstGeom>
+          <a:noFill/>
+        </p:spPr>
+        <p:txBody>
+          <a:bodyPr wrap="square" lIns="0" rIns="0" tIns="0" bIns="0" anchor="ctr">
+            <a:spAutoFit/>
+          </a:bodyPr>
+          <a:lstStyle/>
+          <a:p>
+            <a:r>
+              <a:rPr sz="900" b="1">
+                <a:solidFill>
+                  <a:srgbClr val="FFFFFF"/>
+                </a:solidFill>
+              </a:rPr>
+              <a:t>Purple dot (white frame)</a:t>
+            </a:r>
+          </a:p>
+        </p:txBody>
+      </p:sp>
+      <p:sp>
+        <p:nvSpPr>
+          <p:cNvPr id="32" name="TextBox 31"/>
+          <p:cNvSpPr txBox="1"/>
+          <p:nvPr/>
+        </p:nvSpPr>
+        <p:spPr>
+          <a:xfrm>
+            <a:off x="5897880" y="2340864"/>
+            <a:ext cx="2926080" cy="182880"/>
+          </a:xfrm>
+          <a:prstGeom prst="rect">
+            <a:avLst/>
+          </a:prstGeom>
+          <a:noFill/>
+        </p:spPr>
+        <p:txBody>
+          <a:bodyPr wrap="square" lIns="0" rIns="0" tIns="0" bIns="0" anchor="ctr">
+            <a:spAutoFit/>
+          </a:bodyPr>
+          <a:lstStyle/>
+          <a:p>
+            <a:r>
+              <a:rPr sz="850" b="0">
+                <a:solidFill>
+                  <a:srgbClr val="556A8A"/>
+                </a:solidFill>
+              </a:rPr>
+              <a:t>Portfolio (0) — Markowitz MV optimum</a:t>
+            </a:r>
+          </a:p>
+        </p:txBody>
+      </p:sp>
       <p:pic>
         <p:nvPicPr>
-          <p:cNvPr id="29" name="Picture 28" descr="Slide8chart.png"/>
+          <p:cNvPr id="33" name="Picture 32" descr="Slide8chart.png"/>
           <p:cNvPicPr>
             <a:picLocks noChangeAspect="1"/>
           </p:cNvPicPr>
           <p:nvPr/>
         </p:nvPicPr>
         <p:blipFill>
-          <a:blip r:embed="rId3"/>
+          <a:blip r:embed="rId4"/>
           <a:stretch>
             <a:fillRect/>
           </a:stretch>
@@ -9182,7 +9583,7 @@
         <p:spPr>
           <a:xfrm>
             <a:off x="365760" y="1095744"/>
-            <a:ext cx="5120640" cy="2508528"/>
+            <a:ext cx="4986953" cy="2508528"/>
           </a:xfrm>
           <a:prstGeom prst="rect">
             <a:avLst/>
@@ -9638,15 +10039,15 @@
           <p:nvPr/>
         </p:nvPicPr>
         <p:blipFill>
-          <a:blip r:embed="rId3"/>
+          <a:blip r:embed="rId4"/>
           <a:stretch>
             <a:fillRect/>
           </a:stretch>
         </p:blipFill>
         <p:spPr>
           <a:xfrm>
-            <a:off x="3287216" y="749808"/>
-            <a:ext cx="2569568" cy="2286000"/>
+            <a:off x="3538728" y="749808"/>
+            <a:ext cx="2066544" cy="2286000"/>
           </a:xfrm>
           <a:prstGeom prst="rect">
             <a:avLst/>

--- a/userguide.pptx
+++ b/userguide.pptx
@@ -6,6 +6,7 @@
   </p:sldMasterIdLst>
   <p:sldIdLst>
     <p:sldId id="256" r:id="rId2"/>
+    <p:sldId id="268" r:id="rId19"/>
     <p:sldId id="257" r:id="rId3"/>
     <p:sldId id="258" r:id="rId4"/>
     <p:sldId id="259" r:id="rId5"/>
@@ -15,6 +16,8 @@
     <p:sldId id="263" r:id="rId9"/>
     <p:sldId id="264" r:id="rId10"/>
     <p:sldId id="265" r:id="rId11"/>
+    <p:sldId id="269" r:id="rId20"/>
+    <p:sldId id="270" r:id="rId21"/>
     <p:sldId id="266" r:id="rId12"/>
     <p:sldId id="267" r:id="rId13"/>
   </p:sldIdLst>
@@ -2113,7 +2116,7 @@
                   <a:srgbClr val="C0C8D8"/>
                 </a:solidFill>
               </a:rPr>
-              <a:t>   |   Senior Financial Services Executive   |   2025</a:t>
+              <a:t xml:space="preserve">   |   Senior Financial Services Executive   |   2025</a:t>
             </a:r>
             <a:endParaRPr lang="en-US" sz="1100" dirty="0"/>
           </a:p>
@@ -2347,7 +2350,7 @@
                   <a:srgbClr val="10B981"/>
                 </a:solidFill>
               </a:rPr>
-              <a:t>✓  </a:t>
+              <a:t xml:space="preserve">✓  </a:t>
             </a:r>
             <a:pPr indent="0" marL="0">
               <a:buNone/>
@@ -2394,7 +2397,7 @@
                   <a:srgbClr val="10B981"/>
                 </a:solidFill>
               </a:rPr>
-              <a:t>✓  </a:t>
+              <a:t xml:space="preserve">✓  </a:t>
             </a:r>
             <a:pPr indent="0" marL="0">
               <a:buNone/>
@@ -2441,7 +2444,7 @@
                   <a:srgbClr val="10B981"/>
                 </a:solidFill>
               </a:rPr>
-              <a:t>✓  </a:t>
+              <a:t xml:space="preserve">✓  </a:t>
             </a:r>
             <a:pPr indent="0" marL="0">
               <a:buNone/>
@@ -2452,7 +2455,7 @@
                   <a:srgbClr val="C0C8D8"/>
                 </a:solidFill>
               </a:rPr>
-              <a:t>Portfolio (0), (1), (2), (3) metrics</a:t>
+              <a:t>Portfolio (1), (2), (3) metrics</a:t>
             </a:r>
             <a:endParaRPr lang="en-US" sz="1000" dirty="0"/>
           </a:p>
@@ -2488,7 +2491,7 @@
                   <a:srgbClr val="10B981"/>
                 </a:solidFill>
               </a:rPr>
-              <a:t>✓  </a:t>
+              <a:t xml:space="preserve">✓  </a:t>
             </a:r>
             <a:pPr indent="0" marL="0">
               <a:buNone/>
@@ -2535,7 +2538,7 @@
                   <a:srgbClr val="10B981"/>
                 </a:solidFill>
               </a:rPr>
-              <a:t>✓  </a:t>
+              <a:t xml:space="preserve">✓  </a:t>
             </a:r>
             <a:pPr indent="0" marL="0">
               <a:buNone/>
@@ -2647,7 +2650,7 @@
                   <a:srgbClr val="556A8A"/>
                 </a:solidFill>
               </a:rPr>
-              <a:t>10 / 12</a:t>
+              <a:t>11 / 15</a:t>
             </a:r>
             <a:endParaRPr lang="en-US" sz="900" dirty="0"/>
           </a:p>
@@ -2905,7 +2908,7 @@
                   <a:srgbClr val="4A9EFF"/>
                 </a:solidFill>
               </a:rPr>
-              <a:t>▸  </a:t>
+              <a:t xml:space="preserve">▸  </a:t>
             </a:r>
             <a:pPr indent="0" marL="0">
               <a:buNone/>
@@ -2952,7 +2955,7 @@
                   <a:srgbClr val="4A9EFF"/>
                 </a:solidFill>
               </a:rPr>
-              <a:t>▸  </a:t>
+              <a:t xml:space="preserve">▸  </a:t>
             </a:r>
             <a:pPr indent="0" marL="0">
               <a:buNone/>
@@ -2999,7 +3002,7 @@
                   <a:srgbClr val="4A9EFF"/>
                 </a:solidFill>
               </a:rPr>
-              <a:t>▸  </a:t>
+              <a:t xml:space="preserve">▸  </a:t>
             </a:r>
             <a:pPr indent="0" marL="0">
               <a:buNone/>
@@ -3046,7 +3049,7 @@
                   <a:srgbClr val="4A9EFF"/>
                 </a:solidFill>
               </a:rPr>
-              <a:t>▸  </a:t>
+              <a:t xml:space="preserve">▸  </a:t>
             </a:r>
             <a:pPr indent="0" marL="0">
               <a:buNone/>
@@ -3158,7 +3161,7 @@
                   <a:srgbClr val="4A9EFF"/>
                 </a:solidFill>
               </a:rPr>
-              <a:t>▸  </a:t>
+              <a:t xml:space="preserve">▸  </a:t>
             </a:r>
             <a:pPr indent="0" marL="0">
               <a:buNone/>
@@ -3205,7 +3208,7 @@
                   <a:srgbClr val="4A9EFF"/>
                 </a:solidFill>
               </a:rPr>
-              <a:t>▸  </a:t>
+              <a:t xml:space="preserve">▸  </a:t>
             </a:r>
             <a:pPr indent="0" marL="0">
               <a:buNone/>
@@ -3252,7 +3255,7 @@
                   <a:srgbClr val="4A9EFF"/>
                 </a:solidFill>
               </a:rPr>
-              <a:t>▸  </a:t>
+              <a:t xml:space="preserve">▸  </a:t>
             </a:r>
             <a:pPr indent="0" marL="0">
               <a:buNone/>
@@ -3299,7 +3302,7 @@
                   <a:srgbClr val="4A9EFF"/>
                 </a:solidFill>
               </a:rPr>
-              <a:t>▸  </a:t>
+              <a:t xml:space="preserve">▸  </a:t>
             </a:r>
             <a:pPr indent="0" marL="0">
               <a:buNone/>
@@ -3346,7 +3349,7 @@
                   <a:srgbClr val="556A8A"/>
                 </a:solidFill>
               </a:rPr>
-              <a:t>11 / 12</a:t>
+              <a:t>14 / 15</a:t>
             </a:r>
             <a:endParaRPr lang="en-US" sz="900" dirty="0"/>
           </a:p>
@@ -3729,7 +3732,7 @@
                   <a:srgbClr val="4A9EFF"/>
                 </a:solidFill>
               </a:rPr>
-              <a:t>▸  </a:t>
+              <a:t xml:space="preserve">▸  </a:t>
             </a:r>
             <a:pPr indent="0" marL="0">
               <a:buNone/>
@@ -3776,7 +3779,7 @@
                   <a:srgbClr val="4A9EFF"/>
                 </a:solidFill>
               </a:rPr>
-              <a:t>▸  </a:t>
+              <a:t xml:space="preserve">▸  </a:t>
             </a:r>
             <a:pPr indent="0" marL="0">
               <a:buNone/>
@@ -3823,7 +3826,7 @@
                   <a:srgbClr val="4A9EFF"/>
                 </a:solidFill>
               </a:rPr>
-              <a:t>▸  </a:t>
+              <a:t xml:space="preserve">▸  </a:t>
             </a:r>
             <a:pPr indent="0" marL="0">
               <a:buNone/>
@@ -3870,7 +3873,7 @@
                   <a:srgbClr val="4A9EFF"/>
                 </a:solidFill>
               </a:rPr>
-              <a:t>🔗  </a:t>
+              <a:t xml:space="preserve">🔗  </a:t>
             </a:r>
             <a:pPr algn="ctr" indent="0" marL="0">
               <a:buNone/>
@@ -3891,8 +3894,9 @@
                 <a:solidFill>
                   <a:srgbClr val="556A8A"/>
                 </a:solidFill>
-              </a:rPr>
-              <a:t>   |   📧  sami.jeddou@protonmail.com</a:t>
+                <a:hlinkClick r:id="rId3"/>
+              </a:rPr>
+              <a:t xml:space="preserve">   |   🔗  LinkedIn</a:t>
             </a:r>
             <a:endParaRPr lang="en-US" sz="950" dirty="0"/>
           </a:p>
@@ -3928,7 +3932,7 @@
                   <a:srgbClr val="556A8A"/>
                 </a:solidFill>
               </a:rPr>
-              <a:t>12 / 12</a:t>
+              <a:t>15 / 15</a:t>
             </a:r>
             <a:endParaRPr lang="en-US" sz="900" dirty="0"/>
           </a:p>
@@ -3937,6 +3941,3255 @@
       <p:sp>
         <p:nvSpPr>
           <p:cNvPr id="14" name="Text 12"/>
+          <p:cNvSpPr/>
+          <p:nvPr/>
+        </p:nvSpPr>
+        <p:spPr>
+          <a:xfrm>
+            <a:off x="365760" y="4754880"/>
+            <a:ext cx="6400800" cy="274320"/>
+          </a:xfrm>
+          <a:prstGeom prst="rect">
+            <a:avLst/>
+          </a:prstGeom>
+          <a:noFill/>
+          <a:ln/>
+        </p:spPr>
+        <p:txBody>
+          <a:bodyPr wrap="square" rtlCol="0" anchor="ctr"/>
+          <a:lstStyle/>
+          <a:p>
+            <a:pPr algn="l" indent="0" marL="0">
+              <a:buNone/>
+            </a:pPr>
+            <a:r>
+              <a:rPr lang="en-US" sz="900" dirty="0">
+                <a:solidFill>
+                  <a:srgbClr val="556A8A"/>
+                </a:solidFill>
+              </a:rPr>
+              <a:t>Beyond Mean-Variance Portfolio Optimiser — User Guide</a:t>
+            </a:r>
+            <a:endParaRPr lang="en-US" sz="900" dirty="0"/>
+          </a:p>
+        </p:txBody>
+      </p:sp>
+    </p:spTree>
+  </p:cSld>
+  <p:clrMapOvr>
+    <a:masterClrMapping/>
+  </p:clrMapOvr>
+</p:sld>
+</file>
+
+<file path=ppt/slides/slide13.xml><?xml version="1.0" encoding="utf-8"?>
+<p:sld xmlns:a="http://schemas.openxmlformats.org/drawingml/2006/main" xmlns:r="http://schemas.openxmlformats.org/officeDocument/2006/relationships" xmlns:p="http://schemas.openxmlformats.org/presentationml/2006/main">
+  <p:cSld name="Slide 2">
+    <p:bg>
+      <p:bgPr>
+        <a:solidFill>
+          <a:srgbClr val="020C1B"/>
+        </a:solidFill>
+      </p:bgPr>
+    </p:bg>
+    <p:spTree>
+      <p:nvGrpSpPr>
+        <p:cNvPr id="1" name=""/>
+        <p:cNvGrpSpPr/>
+        <p:nvPr/>
+      </p:nvGrpSpPr>
+      <p:grpSpPr>
+        <a:xfrm>
+          <a:off x="0" y="0"/>
+          <a:ext cx="0" cy="0"/>
+          <a:chOff x="0" y="0"/>
+          <a:chExt cx="0" cy="0"/>
+        </a:xfrm>
+      </p:grpSpPr>
+      <p:sp>
+        <p:nvSpPr>
+          <p:cNvPr id="2" name="Shape 0"/>
+          <p:cNvSpPr/>
+          <p:nvPr/>
+        </p:nvSpPr>
+        <p:spPr>
+          <a:xfrm>
+            <a:off x="0" y="0"/>
+            <a:ext cx="9144000" cy="54864"/>
+          </a:xfrm>
+          <a:prstGeom prst="rect">
+            <a:avLst/>
+          </a:prstGeom>
+          <a:solidFill>
+            <a:srgbClr val="1A6BBF"/>
+          </a:solidFill>
+          <a:ln w="12700">
+            <a:solidFill>
+              <a:srgbClr val="1A6BBF"/>
+            </a:solidFill>
+            <a:prstDash val="solid"/>
+          </a:ln>
+        </p:spPr>
+        <p:txBody>
+          <a:bodyPr/>
+          <a:p/>
+        </p:txBody>
+      </p:sp>
+      <p:sp>
+        <p:nvSpPr>
+          <p:cNvPr id="3" name="Text 1"/>
+          <p:cNvSpPr/>
+          <p:nvPr/>
+        </p:nvSpPr>
+        <p:spPr>
+          <a:xfrm>
+            <a:off x="457200" y="164592"/>
+            <a:ext cx="8229600" cy="502920"/>
+          </a:xfrm>
+          <a:prstGeom prst="rect">
+            <a:avLst/>
+          </a:prstGeom>
+          <a:noFill/>
+          <a:ln/>
+        </p:spPr>
+        <p:txBody>
+          <a:bodyPr wrap="square" rtlCol="0" anchor="ctr"/>
+          <a:lstStyle/>
+          <a:p>
+            <a:pPr indent="0" marL="0">
+              <a:buNone/>
+            </a:pPr>
+            <a:r>
+              <a:rPr lang="en-US" sz="2600" b="1" dirty="0">
+                <a:solidFill>
+                  <a:srgbClr val="FFFFFF"/>
+                </a:solidFill>
+              </a:rPr>
+              <a:t>Home — choose a tool</a:t>
+            </a:r>
+            <a:endParaRPr lang="en-US" sz="2600" dirty="0"/>
+          </a:p>
+        </p:txBody>
+      </p:sp>
+      <p:sp>
+        <p:nvSpPr>
+          <p:cNvPr id="4" name="Shape 2"/>
+          <p:cNvSpPr/>
+          <p:nvPr/>
+        </p:nvSpPr>
+        <p:spPr>
+          <a:xfrm>
+            <a:off x="365760" y="868680"/>
+            <a:ext cx="2651760" cy="1828800"/>
+          </a:xfrm>
+          <a:prstGeom prst="rect">
+            <a:avLst/>
+          </a:prstGeom>
+          <a:solidFill>
+            <a:srgbClr val="0D1A2E"/>
+          </a:solidFill>
+          <a:ln w="12700">
+            <a:solidFill>
+              <a:srgbClr val="1A6BBF"/>
+            </a:solidFill>
+            <a:prstDash val="solid"/>
+          </a:ln>
+          <a:effectLst>
+            <a:outerShdw sx="100000" sy="100000" kx="0" ky="0" algn="bl" rotWithShape="0" blurRad="101600" dist="38100" dir="8100000">
+              <a:srgbClr val="000000">
+                <a:alpha val="18000"/>
+              </a:srgbClr>
+            </a:outerShdw>
+          </a:effectLst>
+        </p:spPr>
+        <p:txBody>
+          <a:bodyPr/>
+          <a:p/>
+        </p:txBody>
+      </p:sp>
+      <p:sp>
+        <p:nvSpPr>
+          <p:cNvPr id="5" name="Text 3"/>
+          <p:cNvSpPr/>
+          <p:nvPr/>
+        </p:nvSpPr>
+        <p:spPr>
+          <a:xfrm>
+            <a:off x="365760" y="960120"/>
+            <a:ext cx="2651760" cy="502920"/>
+          </a:xfrm>
+          <a:prstGeom prst="rect">
+            <a:avLst/>
+          </a:prstGeom>
+          <a:noFill/>
+          <a:ln/>
+        </p:spPr>
+        <p:txBody>
+          <a:bodyPr wrap="square" rtlCol="0" anchor="ctr"/>
+          <a:lstStyle/>
+          <a:p>
+            <a:pPr algn="ctr" indent="0" marL="0">
+              <a:buNone/>
+            </a:pPr>
+            <a:r>
+              <a:rPr lang="en-US" sz="2200" dirty="0">
+                <a:solidFill>
+                  <a:srgbClr val="000000"/>
+                </a:solidFill>
+              </a:rPr>
+              <a:t>📊</a:t>
+            </a:r>
+            <a:endParaRPr lang="en-US" sz="2200" dirty="0"/>
+          </a:p>
+        </p:txBody>
+      </p:sp>
+      <p:sp>
+        <p:nvSpPr>
+          <p:cNvPr id="6" name="Text 4"/>
+          <p:cNvSpPr/>
+          <p:nvPr/>
+        </p:nvSpPr>
+        <p:spPr>
+          <a:xfrm>
+            <a:off x="365760" y="1463040"/>
+            <a:ext cx="2651760" cy="365760"/>
+          </a:xfrm>
+          <a:prstGeom prst="rect">
+            <a:avLst/>
+          </a:prstGeom>
+          <a:noFill/>
+          <a:ln/>
+        </p:spPr>
+        <p:txBody>
+          <a:bodyPr wrap="square" rtlCol="0" anchor="ctr"/>
+          <a:lstStyle/>
+          <a:p>
+            <a:pPr algn="ctr" indent="0" marL="0">
+              <a:buNone/>
+            </a:pPr>
+            <a:r>
+              <a:rPr lang="en-US" sz="1100" b="1" dirty="0">
+                <a:solidFill>
+                  <a:srgbClr val="4A9EFF"/>
+                </a:solidFill>
+              </a:rPr>
+              <a:t>Exact Portfolio Optimiser</a:t>
+            </a:r>
+            <a:endParaRPr lang="en-US" sz="1100" dirty="0"/>
+          </a:p>
+        </p:txBody>
+      </p:sp>
+      <p:sp>
+        <p:nvSpPr>
+          <p:cNvPr id="7" name="Text 5"/>
+          <p:cNvSpPr/>
+          <p:nvPr/>
+        </p:nvSpPr>
+        <p:spPr>
+          <a:xfrm>
+            <a:off x="475488" y="1874520"/>
+            <a:ext cx="2432304" cy="731520"/>
+          </a:xfrm>
+          <a:prstGeom prst="rect">
+            <a:avLst/>
+          </a:prstGeom>
+          <a:noFill/>
+          <a:ln/>
+        </p:spPr>
+        <p:txBody>
+          <a:bodyPr wrap="square" rtlCol="0" anchor="t"/>
+          <a:lstStyle/>
+          <a:p>
+            <a:pPr algn="ctr" indent="0" marL="0">
+              <a:buNone/>
+            </a:pPr>
+            <a:r>
+              <a:rPr lang="en-US" sz="950" dirty="0">
+                <a:solidFill>
+                  <a:srgbClr val="C0C8D8"/>
+                </a:solidFill>
+              </a:rPr>
+              <a:t>Exact grid engine on the Das–Statman states — VaR, thesis-ES and rigorous-ES, with derivatives.</a:t>
+            </a:r>
+            <a:endParaRPr lang="en-US" sz="950" dirty="0"/>
+          </a:p>
+        </p:txBody>
+      </p:sp>
+      <p:sp>
+        <p:nvSpPr>
+          <p:cNvPr id="8" name="Shape 6"/>
+          <p:cNvSpPr/>
+          <p:nvPr/>
+        </p:nvSpPr>
+        <p:spPr>
+          <a:xfrm>
+            <a:off x="3200400" y="868680"/>
+            <a:ext cx="2651760" cy="1828800"/>
+          </a:xfrm>
+          <a:prstGeom prst="rect">
+            <a:avLst/>
+          </a:prstGeom>
+          <a:solidFill>
+            <a:srgbClr val="0D1A2E"/>
+          </a:solidFill>
+          <a:ln w="12700">
+            <a:solidFill>
+              <a:srgbClr val="1A6BBF"/>
+            </a:solidFill>
+            <a:prstDash val="solid"/>
+          </a:ln>
+          <a:effectLst>
+            <a:outerShdw sx="100000" sy="100000" kx="0" ky="0" algn="bl" rotWithShape="0" blurRad="101600" dist="38100" dir="8100000">
+              <a:srgbClr val="000000">
+                <a:alpha val="18000"/>
+              </a:srgbClr>
+            </a:outerShdw>
+          </a:effectLst>
+        </p:spPr>
+        <p:txBody>
+          <a:bodyPr/>
+          <a:p/>
+        </p:txBody>
+      </p:sp>
+      <p:sp>
+        <p:nvSpPr>
+          <p:cNvPr id="9" name="Text 7"/>
+          <p:cNvSpPr/>
+          <p:nvPr/>
+        </p:nvSpPr>
+        <p:spPr>
+          <a:xfrm>
+            <a:off x="3200400" y="960120"/>
+            <a:ext cx="2651760" cy="502920"/>
+          </a:xfrm>
+          <a:prstGeom prst="rect">
+            <a:avLst/>
+          </a:prstGeom>
+          <a:noFill/>
+          <a:ln/>
+        </p:spPr>
+        <p:txBody>
+          <a:bodyPr wrap="square" rtlCol="0" anchor="ctr"/>
+          <a:lstStyle/>
+          <a:p>
+            <a:pPr algn="ctr" indent="0" marL="0">
+              <a:buNone/>
+            </a:pPr>
+            <a:r>
+              <a:rPr lang="en-US" sz="2200" dirty="0">
+                <a:solidFill>
+                  <a:srgbClr val="000000"/>
+                </a:solidFill>
+              </a:rPr>
+              <a:t>🧮</a:t>
+            </a:r>
+            <a:endParaRPr lang="en-US" sz="2200" dirty="0"/>
+          </a:p>
+        </p:txBody>
+      </p:sp>
+      <p:sp>
+        <p:nvSpPr>
+          <p:cNvPr id="10" name="Text 8"/>
+          <p:cNvSpPr/>
+          <p:nvPr/>
+        </p:nvSpPr>
+        <p:spPr>
+          <a:xfrm>
+            <a:off x="3200400" y="1463040"/>
+            <a:ext cx="2651760" cy="365760"/>
+          </a:xfrm>
+          <a:prstGeom prst="rect">
+            <a:avLst/>
+          </a:prstGeom>
+          <a:noFill/>
+          <a:ln/>
+        </p:spPr>
+        <p:txBody>
+          <a:bodyPr wrap="square" rtlCol="0" anchor="ctr"/>
+          <a:lstStyle/>
+          <a:p>
+            <a:pPr algn="ctr" indent="0" marL="0">
+              <a:buNone/>
+            </a:pPr>
+            <a:r>
+              <a:rPr lang="en-US" sz="1100" b="1" dirty="0">
+                <a:solidFill>
+                  <a:srgbClr val="4A9EFF"/>
+                </a:solidFill>
+              </a:rPr>
+              <a:t>Scalable Portfolio Optimiser</a:t>
+            </a:r>
+            <a:endParaRPr lang="en-US" sz="1100" dirty="0"/>
+          </a:p>
+        </p:txBody>
+      </p:sp>
+      <p:sp>
+        <p:nvSpPr>
+          <p:cNvPr id="11" name="Text 9"/>
+          <p:cNvSpPr/>
+          <p:nvPr/>
+        </p:nvSpPr>
+        <p:spPr>
+          <a:xfrm>
+            <a:off x="3310128" y="1874520"/>
+            <a:ext cx="2432304" cy="731520"/>
+          </a:xfrm>
+          <a:prstGeom prst="rect">
+            <a:avLst/>
+          </a:prstGeom>
+          <a:noFill/>
+          <a:ln/>
+        </p:spPr>
+        <p:txBody>
+          <a:bodyPr wrap="square" rtlCol="0" anchor="t"/>
+          <a:lstStyle/>
+          <a:p>
+            <a:pPr algn="ctr" indent="0" marL="0">
+              <a:buNone/>
+            </a:pPr>
+            <a:r>
+              <a:rPr lang="en-US" sz="950" dirty="0">
+                <a:solidFill>
+                  <a:srgbClr val="C0C8D8"/>
+                </a:solidFill>
+              </a:rPr>
+              <a:t>Monte-Carlo scenarios + α-CVaR linear program — scales to large, multi-derivative portfolios.</a:t>
+            </a:r>
+            <a:endParaRPr lang="en-US" sz="950" dirty="0"/>
+          </a:p>
+        </p:txBody>
+      </p:sp>
+      <p:sp>
+        <p:nvSpPr>
+          <p:cNvPr id="12" name="Shape 10"/>
+          <p:cNvSpPr/>
+          <p:nvPr/>
+        </p:nvSpPr>
+        <p:spPr>
+          <a:xfrm>
+            <a:off x="6035040" y="868680"/>
+            <a:ext cx="2651760" cy="1828800"/>
+          </a:xfrm>
+          <a:prstGeom prst="rect">
+            <a:avLst/>
+          </a:prstGeom>
+          <a:solidFill>
+            <a:srgbClr val="0D1A2E"/>
+          </a:solidFill>
+          <a:ln w="12700">
+            <a:solidFill>
+              <a:srgbClr val="1A6BBF"/>
+            </a:solidFill>
+            <a:prstDash val="solid"/>
+          </a:ln>
+          <a:effectLst>
+            <a:outerShdw sx="100000" sy="100000" kx="0" ky="0" algn="bl" rotWithShape="0" blurRad="101600" dist="38100" dir="8100000">
+              <a:srgbClr val="000000">
+                <a:alpha val="18000"/>
+              </a:srgbClr>
+            </a:outerShdw>
+          </a:effectLst>
+        </p:spPr>
+        <p:txBody>
+          <a:bodyPr/>
+          <a:p/>
+        </p:txBody>
+      </p:sp>
+      <p:sp>
+        <p:nvSpPr>
+          <p:cNvPr id="13" name="Text 11"/>
+          <p:cNvSpPr/>
+          <p:nvPr/>
+        </p:nvSpPr>
+        <p:spPr>
+          <a:xfrm>
+            <a:off x="6035040" y="960120"/>
+            <a:ext cx="2651760" cy="502920"/>
+          </a:xfrm>
+          <a:prstGeom prst="rect">
+            <a:avLst/>
+          </a:prstGeom>
+          <a:noFill/>
+          <a:ln/>
+        </p:spPr>
+        <p:txBody>
+          <a:bodyPr wrap="square" rtlCol="0" anchor="ctr"/>
+          <a:lstStyle/>
+          <a:p>
+            <a:pPr algn="ctr" indent="0" marL="0">
+              <a:buNone/>
+            </a:pPr>
+            <a:r>
+              <a:rPr lang="en-US" sz="2200" dirty="0">
+                <a:solidFill>
+                  <a:srgbClr val="000000"/>
+                </a:solidFill>
+              </a:rPr>
+              <a:t>🔬</a:t>
+            </a:r>
+            <a:endParaRPr lang="en-US" sz="2200" dirty="0"/>
+          </a:p>
+        </p:txBody>
+      </p:sp>
+      <p:sp>
+        <p:nvSpPr>
+          <p:cNvPr id="14" name="Text 12"/>
+          <p:cNvSpPr/>
+          <p:nvPr/>
+        </p:nvSpPr>
+        <p:spPr>
+          <a:xfrm>
+            <a:off x="6035040" y="1463040"/>
+            <a:ext cx="2651760" cy="365760"/>
+          </a:xfrm>
+          <a:prstGeom prst="rect">
+            <a:avLst/>
+          </a:prstGeom>
+          <a:noFill/>
+          <a:ln/>
+        </p:spPr>
+        <p:txBody>
+          <a:bodyPr wrap="square" rtlCol="0" anchor="ctr"/>
+          <a:lstStyle/>
+          <a:p>
+            <a:pPr algn="ctr" indent="0" marL="0">
+              <a:buNone/>
+            </a:pPr>
+            <a:r>
+              <a:rPr lang="en-US" sz="1100" b="1" dirty="0">
+                <a:solidFill>
+                  <a:srgbClr val="4A9EFF"/>
+                </a:solidFill>
+              </a:rPr>
+              <a:t>Backtest</a:t>
+            </a:r>
+            <a:endParaRPr lang="en-US" sz="1100" dirty="0"/>
+          </a:p>
+        </p:txBody>
+      </p:sp>
+      <p:sp>
+        <p:nvSpPr>
+          <p:cNvPr id="15" name="Text 13"/>
+          <p:cNvSpPr/>
+          <p:nvPr/>
+        </p:nvSpPr>
+        <p:spPr>
+          <a:xfrm>
+            <a:off x="6144768" y="1874520"/>
+            <a:ext cx="2432304" cy="731520"/>
+          </a:xfrm>
+          <a:prstGeom prst="rect">
+            <a:avLst/>
+          </a:prstGeom>
+          <a:noFill/>
+          <a:ln/>
+        </p:spPr>
+        <p:txBody>
+          <a:bodyPr wrap="square" rtlCol="0" anchor="t"/>
+          <a:lstStyle/>
+          <a:p>
+            <a:pPr algn="ctr" indent="0" marL="0">
+              <a:buNone/>
+            </a:pPr>
+            <a:r>
+              <a:rPr lang="en-US" sz="950" dirty="0">
+                <a:solidFill>
+                  <a:srgbClr val="C0C8D8"/>
+                </a:solidFill>
+              </a:rPr>
+              <a:t>Out-of-sample walk-forward — expected vs realised, plus realised alpha &amp; beta.</a:t>
+            </a:r>
+            <a:endParaRPr lang="en-US" sz="950" dirty="0"/>
+          </a:p>
+        </p:txBody>
+      </p:sp>
+      <p:sp>
+        <p:nvSpPr>
+          <p:cNvPr id="16" name="Shape 14"/>
+          <p:cNvSpPr/>
+          <p:nvPr/>
+        </p:nvSpPr>
+        <p:spPr>
+          <a:xfrm>
+            <a:off x="365760" y="2834640"/>
+            <a:ext cx="8412480" cy="1508760"/>
+          </a:xfrm>
+          <a:prstGeom prst="rect">
+            <a:avLst/>
+          </a:prstGeom>
+          <a:solidFill>
+            <a:srgbClr val="0D1A2E"/>
+          </a:solidFill>
+          <a:ln w="12700">
+            <a:solidFill>
+              <a:srgbClr val="1A6BBF"/>
+            </a:solidFill>
+            <a:prstDash val="solid"/>
+          </a:ln>
+        </p:spPr>
+        <p:txBody>
+          <a:bodyPr/>
+          <a:p/>
+        </p:txBody>
+      </p:sp>
+      <p:sp>
+        <p:nvSpPr>
+          <p:cNvPr id="17" name="Text 15"/>
+          <p:cNvSpPr/>
+          <p:nvPr/>
+        </p:nvSpPr>
+        <p:spPr>
+          <a:xfrm>
+            <a:off x="548640" y="2880360"/>
+            <a:ext cx="8046720" cy="320040"/>
+          </a:xfrm>
+          <a:prstGeom prst="rect">
+            <a:avLst/>
+          </a:prstGeom>
+          <a:noFill/>
+          <a:ln/>
+        </p:spPr>
+        <p:txBody>
+          <a:bodyPr wrap="square" rtlCol="0" anchor="ctr"/>
+          <a:lstStyle/>
+          <a:p>
+            <a:pPr indent="0" marL="0">
+              <a:buNone/>
+            </a:pPr>
+            <a:r>
+              <a:rPr lang="en-US" sz="1100" b="1" dirty="0">
+                <a:solidFill>
+                  <a:srgbClr val="4A9EFF"/>
+                </a:solidFill>
+              </a:rPr>
+              <a:t>Reference &amp; navigation</a:t>
+            </a:r>
+            <a:endParaRPr lang="en-US" sz="1100" dirty="0"/>
+          </a:p>
+        </p:txBody>
+      </p:sp>
+      <p:sp>
+        <p:nvSpPr>
+          <p:cNvPr id="18" name="Shape 16"/>
+          <p:cNvSpPr/>
+          <p:nvPr/>
+        </p:nvSpPr>
+        <p:spPr>
+          <a:xfrm>
+            <a:off x="548640" y="3209544"/>
+            <a:ext cx="502920" cy="292608"/>
+          </a:xfrm>
+          <a:prstGeom prst="roundRect">
+            <a:avLst>
+              <a:gd name="adj" fmla="val 18750"/>
+            </a:avLst>
+          </a:prstGeom>
+          <a:solidFill>
+            <a:srgbClr val="1A6BBF"/>
+          </a:solidFill>
+          <a:ln w="12700">
+            <a:solidFill>
+              <a:srgbClr val="1A6BBF"/>
+            </a:solidFill>
+            <a:prstDash val="solid"/>
+          </a:ln>
+        </p:spPr>
+        <p:txBody>
+          <a:bodyPr/>
+          <a:p/>
+        </p:txBody>
+      </p:sp>
+      <p:sp>
+        <p:nvSpPr>
+          <p:cNvPr id="19" name="Text 17"/>
+          <p:cNvSpPr/>
+          <p:nvPr/>
+        </p:nvSpPr>
+        <p:spPr>
+          <a:xfrm>
+            <a:off x="548640" y="3209544"/>
+            <a:ext cx="502920" cy="292608"/>
+          </a:xfrm>
+          <a:prstGeom prst="rect">
+            <a:avLst/>
+          </a:prstGeom>
+          <a:noFill/>
+          <a:ln/>
+        </p:spPr>
+        <p:txBody>
+          <a:bodyPr wrap="square" lIns="0" tIns="0" rIns="0" bIns="0" rtlCol="0" anchor="ctr"/>
+          <a:lstStyle/>
+          <a:p>
+            <a:pPr algn="ctr" indent="0" marL="0">
+              <a:buNone/>
+            </a:pPr>
+            <a:r>
+              <a:rPr lang="en-US" sz="1100" b="1" dirty="0">
+                <a:solidFill>
+                  <a:srgbClr val="FFFFFF"/>
+                </a:solidFill>
+              </a:rPr>
+              <a:t>📖</a:t>
+            </a:r>
+            <a:endParaRPr lang="en-US" sz="1100" dirty="0"/>
+          </a:p>
+        </p:txBody>
+      </p:sp>
+      <p:sp>
+        <p:nvSpPr>
+          <p:cNvPr id="20" name="Text 18"/>
+          <p:cNvSpPr/>
+          <p:nvPr/>
+        </p:nvSpPr>
+        <p:spPr>
+          <a:xfrm>
+            <a:off x="1143000" y="3209544"/>
+            <a:ext cx="2194560" cy="292608"/>
+          </a:xfrm>
+          <a:prstGeom prst="rect">
+            <a:avLst/>
+          </a:prstGeom>
+          <a:noFill/>
+          <a:ln/>
+        </p:spPr>
+        <p:txBody>
+          <a:bodyPr wrap="square" lIns="0" tIns="0" rIns="0" bIns="0" rtlCol="0" anchor="ctr"/>
+          <a:lstStyle/>
+          <a:p>
+            <a:pPr indent="0" marL="0">
+              <a:buNone/>
+            </a:pPr>
+            <a:r>
+              <a:rPr lang="en-US" sz="950" b="1" dirty="0">
+                <a:solidFill>
+                  <a:srgbClr val="10B981"/>
+                </a:solidFill>
+              </a:rPr>
+              <a:t>About:</a:t>
+            </a:r>
+            <a:endParaRPr lang="en-US" sz="950" dirty="0"/>
+          </a:p>
+        </p:txBody>
+      </p:sp>
+      <p:sp>
+        <p:nvSpPr>
+          <p:cNvPr id="21" name="Text 19"/>
+          <p:cNvSpPr/>
+          <p:nvPr/>
+        </p:nvSpPr>
+        <p:spPr>
+          <a:xfrm>
+            <a:off x="3383280" y="3209544"/>
+            <a:ext cx="5212080" cy="292608"/>
+          </a:xfrm>
+          <a:prstGeom prst="rect">
+            <a:avLst/>
+          </a:prstGeom>
+          <a:noFill/>
+          <a:ln/>
+        </p:spPr>
+        <p:txBody>
+          <a:bodyPr wrap="square" lIns="0" tIns="0" rIns="0" bIns="0" rtlCol="0" anchor="ctr"/>
+          <a:lstStyle/>
+          <a:p>
+            <a:pPr indent="0" marL="0">
+              <a:buNone/>
+            </a:pPr>
+            <a:r>
+              <a:rPr lang="en-US" sz="900" dirty="0">
+                <a:solidFill>
+                  <a:srgbClr val="C0C8D8"/>
+                </a:solidFill>
+              </a:rPr>
+              <a:t>Methods, the mental-accounting framework and the research behind the app.</a:t>
+            </a:r>
+            <a:endParaRPr lang="en-US" sz="900" dirty="0"/>
+          </a:p>
+        </p:txBody>
+      </p:sp>
+      <p:sp>
+        <p:nvSpPr>
+          <p:cNvPr id="22" name="Shape 20"/>
+          <p:cNvSpPr/>
+          <p:nvPr/>
+        </p:nvSpPr>
+        <p:spPr>
+          <a:xfrm>
+            <a:off x="548640" y="3547872"/>
+            <a:ext cx="502920" cy="292608"/>
+          </a:xfrm>
+          <a:prstGeom prst="roundRect">
+            <a:avLst>
+              <a:gd name="adj" fmla="val 18750"/>
+            </a:avLst>
+          </a:prstGeom>
+          <a:solidFill>
+            <a:srgbClr val="1A6BBF"/>
+          </a:solidFill>
+          <a:ln w="12700">
+            <a:solidFill>
+              <a:srgbClr val="1A6BBF"/>
+            </a:solidFill>
+            <a:prstDash val="solid"/>
+          </a:ln>
+        </p:spPr>
+        <p:txBody>
+          <a:bodyPr/>
+          <a:p/>
+        </p:txBody>
+      </p:sp>
+      <p:sp>
+        <p:nvSpPr>
+          <p:cNvPr id="23" name="Text 21"/>
+          <p:cNvSpPr/>
+          <p:nvPr/>
+        </p:nvSpPr>
+        <p:spPr>
+          <a:xfrm>
+            <a:off x="548640" y="3547872"/>
+            <a:ext cx="502920" cy="292608"/>
+          </a:xfrm>
+          <a:prstGeom prst="rect">
+            <a:avLst/>
+          </a:prstGeom>
+          <a:noFill/>
+          <a:ln/>
+        </p:spPr>
+        <p:txBody>
+          <a:bodyPr wrap="square" lIns="0" tIns="0" rIns="0" bIns="0" rtlCol="0" anchor="ctr"/>
+          <a:lstStyle/>
+          <a:p>
+            <a:pPr algn="ctr" indent="0" marL="0">
+              <a:buNone/>
+            </a:pPr>
+            <a:r>
+              <a:rPr lang="en-US" sz="1100" b="1" dirty="0">
+                <a:solidFill>
+                  <a:srgbClr val="FFFFFF"/>
+                </a:solidFill>
+              </a:rPr>
+              <a:t>📚</a:t>
+            </a:r>
+            <a:endParaRPr lang="en-US" sz="1100" dirty="0"/>
+          </a:p>
+        </p:txBody>
+      </p:sp>
+      <p:sp>
+        <p:nvSpPr>
+          <p:cNvPr id="24" name="Text 22"/>
+          <p:cNvSpPr/>
+          <p:nvPr/>
+        </p:nvSpPr>
+        <p:spPr>
+          <a:xfrm>
+            <a:off x="1143000" y="3547872"/>
+            <a:ext cx="2194560" cy="292608"/>
+          </a:xfrm>
+          <a:prstGeom prst="rect">
+            <a:avLst/>
+          </a:prstGeom>
+          <a:noFill/>
+          <a:ln/>
+        </p:spPr>
+        <p:txBody>
+          <a:bodyPr wrap="square" lIns="0" tIns="0" rIns="0" bIns="0" rtlCol="0" anchor="ctr"/>
+          <a:lstStyle/>
+          <a:p>
+            <a:pPr indent="0" marL="0">
+              <a:buNone/>
+            </a:pPr>
+            <a:r>
+              <a:rPr lang="en-US" sz="950" b="1" dirty="0">
+                <a:solidFill>
+                  <a:srgbClr val="F59E0B"/>
+                </a:solidFill>
+              </a:rPr>
+              <a:t>Glossary:</a:t>
+            </a:r>
+            <a:endParaRPr lang="en-US" sz="950" dirty="0"/>
+          </a:p>
+        </p:txBody>
+      </p:sp>
+      <p:sp>
+        <p:nvSpPr>
+          <p:cNvPr id="25" name="Text 23"/>
+          <p:cNvSpPr/>
+          <p:nvPr/>
+        </p:nvSpPr>
+        <p:spPr>
+          <a:xfrm>
+            <a:off x="3383280" y="3547872"/>
+            <a:ext cx="5212080" cy="292608"/>
+          </a:xfrm>
+          <a:prstGeom prst="rect">
+            <a:avLst/>
+          </a:prstGeom>
+          <a:noFill/>
+          <a:ln/>
+        </p:spPr>
+        <p:txBody>
+          <a:bodyPr wrap="square" lIns="0" tIns="0" rIns="0" bIns="0" rtlCol="0" anchor="ctr"/>
+          <a:lstStyle/>
+          <a:p>
+            <a:pPr indent="0" marL="0">
+              <a:buNone/>
+            </a:pPr>
+            <a:r>
+              <a:rPr lang="en-US" sz="900" dirty="0">
+                <a:solidFill>
+                  <a:srgbClr val="C0C8D8"/>
+                </a:solidFill>
+              </a:rPr>
+              <a:t>Plain-language, AI-powered definitions — VaR, ES, α-CVaR, copulas, alpha &amp; beta.</a:t>
+            </a:r>
+            <a:endParaRPr lang="en-US" sz="900" dirty="0"/>
+          </a:p>
+        </p:txBody>
+      </p:sp>
+      <p:sp>
+        <p:nvSpPr>
+          <p:cNvPr id="26" name="Shape 24"/>
+          <p:cNvSpPr/>
+          <p:nvPr/>
+        </p:nvSpPr>
+        <p:spPr>
+          <a:xfrm>
+            <a:off x="548640" y="3886200"/>
+            <a:ext cx="502920" cy="292608"/>
+          </a:xfrm>
+          <a:prstGeom prst="roundRect">
+            <a:avLst>
+              <a:gd name="adj" fmla="val 18750"/>
+            </a:avLst>
+          </a:prstGeom>
+          <a:solidFill>
+            <a:srgbClr val="1A6BBF"/>
+          </a:solidFill>
+          <a:ln w="12700">
+            <a:solidFill>
+              <a:srgbClr val="1A6BBF"/>
+            </a:solidFill>
+            <a:prstDash val="solid"/>
+          </a:ln>
+        </p:spPr>
+        <p:txBody>
+          <a:bodyPr/>
+          <a:p/>
+        </p:txBody>
+      </p:sp>
+      <p:sp>
+        <p:nvSpPr>
+          <p:cNvPr id="27" name="Text 25"/>
+          <p:cNvSpPr/>
+          <p:nvPr/>
+        </p:nvSpPr>
+        <p:spPr>
+          <a:xfrm>
+            <a:off x="548640" y="3886200"/>
+            <a:ext cx="502920" cy="292608"/>
+          </a:xfrm>
+          <a:prstGeom prst="rect">
+            <a:avLst/>
+          </a:prstGeom>
+          <a:noFill/>
+          <a:ln/>
+        </p:spPr>
+        <p:txBody>
+          <a:bodyPr wrap="square" lIns="0" tIns="0" rIns="0" bIns="0" rtlCol="0" anchor="ctr"/>
+          <a:lstStyle/>
+          <a:p>
+            <a:pPr algn="ctr" indent="0" marL="0">
+              <a:buNone/>
+            </a:pPr>
+            <a:r>
+              <a:rPr lang="en-US" sz="1100" b="1" dirty="0">
+                <a:solidFill>
+                  <a:srgbClr val="FFFFFF"/>
+                </a:solidFill>
+              </a:rPr>
+              <a:t>💡</a:t>
+            </a:r>
+            <a:endParaRPr lang="en-US" sz="1100" dirty="0"/>
+          </a:p>
+        </p:txBody>
+      </p:sp>
+      <p:sp>
+        <p:nvSpPr>
+          <p:cNvPr id="28" name="Text 26"/>
+          <p:cNvSpPr/>
+          <p:nvPr/>
+        </p:nvSpPr>
+        <p:spPr>
+          <a:xfrm>
+            <a:off x="1143000" y="3886200"/>
+            <a:ext cx="2194560" cy="292608"/>
+          </a:xfrm>
+          <a:prstGeom prst="rect">
+            <a:avLst/>
+          </a:prstGeom>
+          <a:noFill/>
+          <a:ln/>
+        </p:spPr>
+        <p:txBody>
+          <a:bodyPr wrap="square" lIns="0" tIns="0" rIns="0" bIns="0" rtlCol="0" anchor="ctr"/>
+          <a:lstStyle/>
+          <a:p>
+            <a:pPr indent="0" marL="0">
+              <a:buNone/>
+            </a:pPr>
+            <a:r>
+              <a:rPr lang="en-US" sz="950" b="1" dirty="0">
+                <a:solidFill>
+                  <a:srgbClr val="E76F51"/>
+                </a:solidFill>
+              </a:rPr>
+              <a:t>Tip:</a:t>
+            </a:r>
+            <a:endParaRPr lang="en-US" sz="950" dirty="0"/>
+          </a:p>
+        </p:txBody>
+      </p:sp>
+      <p:sp>
+        <p:nvSpPr>
+          <p:cNvPr id="29" name="Text 27"/>
+          <p:cNvSpPr/>
+          <p:nvPr/>
+        </p:nvSpPr>
+        <p:spPr>
+          <a:xfrm>
+            <a:off x="3383280" y="3886200"/>
+            <a:ext cx="5212080" cy="292608"/>
+          </a:xfrm>
+          <a:prstGeom prst="rect">
+            <a:avLst/>
+          </a:prstGeom>
+          <a:noFill/>
+          <a:ln/>
+        </p:spPr>
+        <p:txBody>
+          <a:bodyPr wrap="square" lIns="0" tIns="0" rIns="0" bIns="0" rtlCol="0" anchor="ctr"/>
+          <a:lstStyle/>
+          <a:p>
+            <a:pPr indent="0" marL="0">
+              <a:buNone/>
+            </a:pPr>
+            <a:r>
+              <a:rPr lang="en-US" sz="900" dirty="0">
+                <a:solidFill>
+                  <a:srgbClr val="C0C8D8"/>
+                </a:solidFill>
+              </a:rPr>
+              <a:t>Each tile opens a tool; the Exact Portfolio Optimiser is the place to start.</a:t>
+            </a:r>
+            <a:endParaRPr lang="en-US" sz="900" dirty="0"/>
+          </a:p>
+        </p:txBody>
+      </p:sp>
+      <p:sp>
+        <p:nvSpPr>
+          <p:cNvPr id="30" name="Text 28"/>
+          <p:cNvSpPr/>
+          <p:nvPr/>
+        </p:nvSpPr>
+        <p:spPr>
+          <a:xfrm>
+            <a:off x="8046720" y="4754880"/>
+            <a:ext cx="914400" cy="274320"/>
+          </a:xfrm>
+          <a:prstGeom prst="rect">
+            <a:avLst/>
+          </a:prstGeom>
+          <a:noFill/>
+          <a:ln/>
+        </p:spPr>
+        <p:txBody>
+          <a:bodyPr wrap="square" rtlCol="0" anchor="ctr"/>
+          <a:lstStyle/>
+          <a:p>
+            <a:pPr algn="r" indent="0" marL="0">
+              <a:buNone/>
+            </a:pPr>
+            <a:r>
+              <a:rPr lang="en-US" sz="900" dirty="0">
+                <a:solidFill>
+                  <a:srgbClr val="556A8A"/>
+                </a:solidFill>
+              </a:rPr>
+              <a:t>2 / 15</a:t>
+            </a:r>
+            <a:endParaRPr lang="en-US" sz="900" dirty="0"/>
+          </a:p>
+        </p:txBody>
+      </p:sp>
+      <p:sp>
+        <p:nvSpPr>
+          <p:cNvPr id="31" name="Text 29"/>
+          <p:cNvSpPr/>
+          <p:nvPr/>
+        </p:nvSpPr>
+        <p:spPr>
+          <a:xfrm>
+            <a:off x="365760" y="4754880"/>
+            <a:ext cx="6400800" cy="274320"/>
+          </a:xfrm>
+          <a:prstGeom prst="rect">
+            <a:avLst/>
+          </a:prstGeom>
+          <a:noFill/>
+          <a:ln/>
+        </p:spPr>
+        <p:txBody>
+          <a:bodyPr wrap="square" rtlCol="0" anchor="ctr"/>
+          <a:lstStyle/>
+          <a:p>
+            <a:pPr algn="l" indent="0" marL="0">
+              <a:buNone/>
+            </a:pPr>
+            <a:r>
+              <a:rPr lang="en-US" sz="900" dirty="0">
+                <a:solidFill>
+                  <a:srgbClr val="556A8A"/>
+                </a:solidFill>
+              </a:rPr>
+              <a:t>Beyond Mean-Variance Portfolio Optimiser — User Guide</a:t>
+            </a:r>
+            <a:endParaRPr lang="en-US" sz="900" dirty="0"/>
+          </a:p>
+        </p:txBody>
+      </p:sp>
+    </p:spTree>
+  </p:cSld>
+  <p:clrMapOvr>
+    <a:masterClrMapping/>
+  </p:clrMapOvr>
+</p:sld>
+</file>
+
+<file path=ppt/slides/slide14.xml><?xml version="1.0" encoding="utf-8"?>
+<p:sld xmlns:a="http://schemas.openxmlformats.org/drawingml/2006/main" xmlns:r="http://schemas.openxmlformats.org/officeDocument/2006/relationships" xmlns:p="http://schemas.openxmlformats.org/presentationml/2006/main">
+  <p:cSld name="Slide 2">
+    <p:bg>
+      <p:bgPr>
+        <a:solidFill>
+          <a:srgbClr val="020C1B"/>
+        </a:solidFill>
+      </p:bgPr>
+    </p:bg>
+    <p:spTree>
+      <p:nvGrpSpPr>
+        <p:cNvPr id="1" name=""/>
+        <p:cNvGrpSpPr/>
+        <p:nvPr/>
+      </p:nvGrpSpPr>
+      <p:grpSpPr>
+        <a:xfrm>
+          <a:off x="0" y="0"/>
+          <a:ext cx="0" cy="0"/>
+          <a:chOff x="0" y="0"/>
+          <a:chExt cx="0" cy="0"/>
+        </a:xfrm>
+      </p:grpSpPr>
+      <p:sp>
+        <p:nvSpPr>
+          <p:cNvPr id="2" name="Shape 0"/>
+          <p:cNvSpPr/>
+          <p:nvPr/>
+        </p:nvSpPr>
+        <p:spPr>
+          <a:xfrm>
+            <a:off x="0" y="0"/>
+            <a:ext cx="9144000" cy="54864"/>
+          </a:xfrm>
+          <a:prstGeom prst="rect">
+            <a:avLst/>
+          </a:prstGeom>
+          <a:solidFill>
+            <a:srgbClr val="1A6BBF"/>
+          </a:solidFill>
+          <a:ln w="12700">
+            <a:solidFill>
+              <a:srgbClr val="1A6BBF"/>
+            </a:solidFill>
+            <a:prstDash val="solid"/>
+          </a:ln>
+        </p:spPr>
+        <p:txBody>
+          <a:bodyPr/>
+          <a:p/>
+        </p:txBody>
+      </p:sp>
+      <p:sp>
+        <p:nvSpPr>
+          <p:cNvPr id="3" name="Text 1"/>
+          <p:cNvSpPr/>
+          <p:nvPr/>
+        </p:nvSpPr>
+        <p:spPr>
+          <a:xfrm>
+            <a:off x="457200" y="164592"/>
+            <a:ext cx="8229600" cy="502920"/>
+          </a:xfrm>
+          <a:prstGeom prst="rect">
+            <a:avLst/>
+          </a:prstGeom>
+          <a:noFill/>
+          <a:ln/>
+        </p:spPr>
+        <p:txBody>
+          <a:bodyPr wrap="square" rtlCol="0" anchor="ctr"/>
+          <a:lstStyle/>
+          <a:p>
+            <a:pPr indent="0" marL="0">
+              <a:buNone/>
+            </a:pPr>
+            <a:r>
+              <a:rPr lang="en-US" sz="2600" b="1" dirty="0">
+                <a:solidFill>
+                  <a:srgbClr val="FFFFFF"/>
+                </a:solidFill>
+              </a:rPr>
+              <a:t>Scalable Portfolio Optimiser — Monte-Carlo + CVaR</a:t>
+            </a:r>
+            <a:endParaRPr lang="en-US" sz="2600" dirty="0"/>
+          </a:p>
+        </p:txBody>
+      </p:sp>
+      <p:sp>
+        <p:nvSpPr>
+          <p:cNvPr id="4" name="Shape 2"/>
+          <p:cNvSpPr/>
+          <p:nvPr/>
+        </p:nvSpPr>
+        <p:spPr>
+          <a:xfrm>
+            <a:off x="365760" y="868680"/>
+            <a:ext cx="2651760" cy="1828800"/>
+          </a:xfrm>
+          <a:prstGeom prst="rect">
+            <a:avLst/>
+          </a:prstGeom>
+          <a:solidFill>
+            <a:srgbClr val="0D1A2E"/>
+          </a:solidFill>
+          <a:ln w="12700">
+            <a:solidFill>
+              <a:srgbClr val="1A6BBF"/>
+            </a:solidFill>
+            <a:prstDash val="solid"/>
+          </a:ln>
+          <a:effectLst>
+            <a:outerShdw sx="100000" sy="100000" kx="0" ky="0" algn="bl" rotWithShape="0" blurRad="101600" dist="38100" dir="8100000">
+              <a:srgbClr val="000000">
+                <a:alpha val="18000"/>
+              </a:srgbClr>
+            </a:outerShdw>
+          </a:effectLst>
+        </p:spPr>
+        <p:txBody>
+          <a:bodyPr/>
+          <a:p/>
+        </p:txBody>
+      </p:sp>
+      <p:sp>
+        <p:nvSpPr>
+          <p:cNvPr id="5" name="Text 3"/>
+          <p:cNvSpPr/>
+          <p:nvPr/>
+        </p:nvSpPr>
+        <p:spPr>
+          <a:xfrm>
+            <a:off x="365760" y="960120"/>
+            <a:ext cx="2651760" cy="502920"/>
+          </a:xfrm>
+          <a:prstGeom prst="rect">
+            <a:avLst/>
+          </a:prstGeom>
+          <a:noFill/>
+          <a:ln/>
+        </p:spPr>
+        <p:txBody>
+          <a:bodyPr wrap="square" rtlCol="0" anchor="ctr"/>
+          <a:lstStyle/>
+          <a:p>
+            <a:pPr algn="ctr" indent="0" marL="0">
+              <a:buNone/>
+            </a:pPr>
+            <a:r>
+              <a:rPr lang="en-US" sz="2200" dirty="0">
+                <a:solidFill>
+                  <a:srgbClr val="000000"/>
+                </a:solidFill>
+              </a:rPr>
+              <a:t>🧮</a:t>
+            </a:r>
+            <a:endParaRPr lang="en-US" sz="2200" dirty="0"/>
+          </a:p>
+        </p:txBody>
+      </p:sp>
+      <p:sp>
+        <p:nvSpPr>
+          <p:cNvPr id="6" name="Text 4"/>
+          <p:cNvSpPr/>
+          <p:nvPr/>
+        </p:nvSpPr>
+        <p:spPr>
+          <a:xfrm>
+            <a:off x="365760" y="1463040"/>
+            <a:ext cx="2651760" cy="365760"/>
+          </a:xfrm>
+          <a:prstGeom prst="rect">
+            <a:avLst/>
+          </a:prstGeom>
+          <a:noFill/>
+          <a:ln/>
+        </p:spPr>
+        <p:txBody>
+          <a:bodyPr wrap="square" rtlCol="0" anchor="ctr"/>
+          <a:lstStyle/>
+          <a:p>
+            <a:pPr algn="ctr" indent="0" marL="0">
+              <a:buNone/>
+            </a:pPr>
+            <a:r>
+              <a:rPr lang="en-US" sz="1100" b="1" dirty="0">
+                <a:solidFill>
+                  <a:srgbClr val="4A9EFF"/>
+                </a:solidFill>
+              </a:rPr>
+              <a:t>Scenario engine</a:t>
+            </a:r>
+            <a:endParaRPr lang="en-US" sz="1100" dirty="0"/>
+          </a:p>
+        </p:txBody>
+      </p:sp>
+      <p:sp>
+        <p:nvSpPr>
+          <p:cNvPr id="7" name="Text 5"/>
+          <p:cNvSpPr/>
+          <p:nvPr/>
+        </p:nvSpPr>
+        <p:spPr>
+          <a:xfrm>
+            <a:off x="475488" y="1874520"/>
+            <a:ext cx="2432304" cy="731520"/>
+          </a:xfrm>
+          <a:prstGeom prst="rect">
+            <a:avLst/>
+          </a:prstGeom>
+          <a:noFill/>
+          <a:ln/>
+        </p:spPr>
+        <p:txBody>
+          <a:bodyPr wrap="square" rtlCol="0" anchor="t"/>
+          <a:lstStyle/>
+          <a:p>
+            <a:pPr algn="ctr" indent="0" marL="0">
+              <a:buNone/>
+            </a:pPr>
+            <a:r>
+              <a:rPr lang="en-US" sz="950" dirty="0">
+                <a:solidFill>
+                  <a:srgbClr val="C0C8D8"/>
+                </a:solidFill>
+              </a:rPr>
+              <a:t>Samples thousands of joint return scenarios through a Gaussian or Student-t copula.</a:t>
+            </a:r>
+            <a:endParaRPr lang="en-US" sz="950" dirty="0"/>
+          </a:p>
+        </p:txBody>
+      </p:sp>
+      <p:sp>
+        <p:nvSpPr>
+          <p:cNvPr id="8" name="Shape 6"/>
+          <p:cNvSpPr/>
+          <p:nvPr/>
+        </p:nvSpPr>
+        <p:spPr>
+          <a:xfrm>
+            <a:off x="3200400" y="868680"/>
+            <a:ext cx="2651760" cy="1828800"/>
+          </a:xfrm>
+          <a:prstGeom prst="rect">
+            <a:avLst/>
+          </a:prstGeom>
+          <a:solidFill>
+            <a:srgbClr val="0D1A2E"/>
+          </a:solidFill>
+          <a:ln w="12700">
+            <a:solidFill>
+              <a:srgbClr val="1A6BBF"/>
+            </a:solidFill>
+            <a:prstDash val="solid"/>
+          </a:ln>
+          <a:effectLst>
+            <a:outerShdw sx="100000" sy="100000" kx="0" ky="0" algn="bl" rotWithShape="0" blurRad="101600" dist="38100" dir="8100000">
+              <a:srgbClr val="000000">
+                <a:alpha val="18000"/>
+              </a:srgbClr>
+            </a:outerShdw>
+          </a:effectLst>
+        </p:spPr>
+        <p:txBody>
+          <a:bodyPr/>
+          <a:p/>
+        </p:txBody>
+      </p:sp>
+      <p:sp>
+        <p:nvSpPr>
+          <p:cNvPr id="9" name="Text 7"/>
+          <p:cNvSpPr/>
+          <p:nvPr/>
+        </p:nvSpPr>
+        <p:spPr>
+          <a:xfrm>
+            <a:off x="3200400" y="960120"/>
+            <a:ext cx="2651760" cy="502920"/>
+          </a:xfrm>
+          <a:prstGeom prst="rect">
+            <a:avLst/>
+          </a:prstGeom>
+          <a:noFill/>
+          <a:ln/>
+        </p:spPr>
+        <p:txBody>
+          <a:bodyPr wrap="square" rtlCol="0" anchor="ctr"/>
+          <a:lstStyle/>
+          <a:p>
+            <a:pPr algn="ctr" indent="0" marL="0">
+              <a:buNone/>
+            </a:pPr>
+            <a:r>
+              <a:rPr lang="en-US" sz="2200" dirty="0">
+                <a:solidFill>
+                  <a:srgbClr val="000000"/>
+                </a:solidFill>
+              </a:rPr>
+              <a:t>📐</a:t>
+            </a:r>
+            <a:endParaRPr lang="en-US" sz="2200" dirty="0"/>
+          </a:p>
+        </p:txBody>
+      </p:sp>
+      <p:sp>
+        <p:nvSpPr>
+          <p:cNvPr id="10" name="Text 8"/>
+          <p:cNvSpPr/>
+          <p:nvPr/>
+        </p:nvSpPr>
+        <p:spPr>
+          <a:xfrm>
+            <a:off x="3200400" y="1463040"/>
+            <a:ext cx="2651760" cy="365760"/>
+          </a:xfrm>
+          <a:prstGeom prst="rect">
+            <a:avLst/>
+          </a:prstGeom>
+          <a:noFill/>
+          <a:ln/>
+        </p:spPr>
+        <p:txBody>
+          <a:bodyPr wrap="square" rtlCol="0" anchor="ctr"/>
+          <a:lstStyle/>
+          <a:p>
+            <a:pPr algn="ctr" indent="0" marL="0">
+              <a:buNone/>
+            </a:pPr>
+            <a:r>
+              <a:rPr lang="en-US" sz="1100" b="1" dirty="0">
+                <a:solidFill>
+                  <a:srgbClr val="4A9EFF"/>
+                </a:solidFill>
+              </a:rPr>
+              <a:t>α-CVaR linear program</a:t>
+            </a:r>
+            <a:endParaRPr lang="en-US" sz="1100" dirty="0"/>
+          </a:p>
+        </p:txBody>
+      </p:sp>
+      <p:sp>
+        <p:nvSpPr>
+          <p:cNvPr id="11" name="Text 9"/>
+          <p:cNvSpPr/>
+          <p:nvPr/>
+        </p:nvSpPr>
+        <p:spPr>
+          <a:xfrm>
+            <a:off x="3310128" y="1874520"/>
+            <a:ext cx="2432304" cy="731520"/>
+          </a:xfrm>
+          <a:prstGeom prst="rect">
+            <a:avLst/>
+          </a:prstGeom>
+          <a:noFill/>
+          <a:ln/>
+        </p:spPr>
+        <p:txBody>
+          <a:bodyPr wrap="square" rtlCol="0" anchor="t"/>
+          <a:lstStyle/>
+          <a:p>
+            <a:pPr algn="ctr" indent="0" marL="0">
+              <a:buNone/>
+            </a:pPr>
+            <a:r>
+              <a:rPr lang="en-US" sz="950" dirty="0">
+                <a:solidFill>
+                  <a:srgbClr val="C0C8D8"/>
+                </a:solidFill>
+              </a:rPr>
+              <a:t>Maximises return subject to a CVaR (Expected-Shortfall) floor — Rockafellar–Uryasev.</a:t>
+            </a:r>
+            <a:endParaRPr lang="en-US" sz="950" dirty="0"/>
+          </a:p>
+        </p:txBody>
+      </p:sp>
+      <p:sp>
+        <p:nvSpPr>
+          <p:cNvPr id="12" name="Shape 10"/>
+          <p:cNvSpPr/>
+          <p:nvPr/>
+        </p:nvSpPr>
+        <p:spPr>
+          <a:xfrm>
+            <a:off x="6035040" y="868680"/>
+            <a:ext cx="2651760" cy="1828800"/>
+          </a:xfrm>
+          <a:prstGeom prst="rect">
+            <a:avLst/>
+          </a:prstGeom>
+          <a:solidFill>
+            <a:srgbClr val="0D1A2E"/>
+          </a:solidFill>
+          <a:ln w="12700">
+            <a:solidFill>
+              <a:srgbClr val="1A6BBF"/>
+            </a:solidFill>
+            <a:prstDash val="solid"/>
+          </a:ln>
+          <a:effectLst>
+            <a:outerShdw sx="100000" sy="100000" kx="0" ky="0" algn="bl" rotWithShape="0" blurRad="101600" dist="38100" dir="8100000">
+              <a:srgbClr val="000000">
+                <a:alpha val="18000"/>
+              </a:srgbClr>
+            </a:outerShdw>
+          </a:effectLst>
+        </p:spPr>
+        <p:txBody>
+          <a:bodyPr/>
+          <a:p/>
+        </p:txBody>
+      </p:sp>
+      <p:sp>
+        <p:nvSpPr>
+          <p:cNvPr id="13" name="Text 11"/>
+          <p:cNvSpPr/>
+          <p:nvPr/>
+        </p:nvSpPr>
+        <p:spPr>
+          <a:xfrm>
+            <a:off x="6035040" y="960120"/>
+            <a:ext cx="2651760" cy="502920"/>
+          </a:xfrm>
+          <a:prstGeom prst="rect">
+            <a:avLst/>
+          </a:prstGeom>
+          <a:noFill/>
+          <a:ln/>
+        </p:spPr>
+        <p:txBody>
+          <a:bodyPr wrap="square" rtlCol="0" anchor="ctr"/>
+          <a:lstStyle/>
+          <a:p>
+            <a:pPr algn="ctr" indent="0" marL="0">
+              <a:buNone/>
+            </a:pPr>
+            <a:r>
+              <a:rPr lang="en-US" sz="2200" dirty="0">
+                <a:solidFill>
+                  <a:srgbClr val="000000"/>
+                </a:solidFill>
+              </a:rPr>
+              <a:t>📈</a:t>
+            </a:r>
+            <a:endParaRPr lang="en-US" sz="2200" dirty="0"/>
+          </a:p>
+        </p:txBody>
+      </p:sp>
+      <p:sp>
+        <p:nvSpPr>
+          <p:cNvPr id="14" name="Text 12"/>
+          <p:cNvSpPr/>
+          <p:nvPr/>
+        </p:nvSpPr>
+        <p:spPr>
+          <a:xfrm>
+            <a:off x="6035040" y="1463040"/>
+            <a:ext cx="2651760" cy="365760"/>
+          </a:xfrm>
+          <a:prstGeom prst="rect">
+            <a:avLst/>
+          </a:prstGeom>
+          <a:noFill/>
+          <a:ln/>
+        </p:spPr>
+        <p:txBody>
+          <a:bodyPr wrap="square" rtlCol="0" anchor="ctr"/>
+          <a:lstStyle/>
+          <a:p>
+            <a:pPr algn="ctr" indent="0" marL="0">
+              <a:buNone/>
+            </a:pPr>
+            <a:r>
+              <a:rPr lang="en-US" sz="1100" b="1" dirty="0">
+                <a:solidFill>
+                  <a:srgbClr val="4A9EFF"/>
+                </a:solidFill>
+              </a:rPr>
+              <a:t>Institutional scale</a:t>
+            </a:r>
+            <a:endParaRPr lang="en-US" sz="1100" dirty="0"/>
+          </a:p>
+        </p:txBody>
+      </p:sp>
+      <p:sp>
+        <p:nvSpPr>
+          <p:cNvPr id="15" name="Text 13"/>
+          <p:cNvSpPr/>
+          <p:nvPr/>
+        </p:nvSpPr>
+        <p:spPr>
+          <a:xfrm>
+            <a:off x="6144768" y="1874520"/>
+            <a:ext cx="2432304" cy="731520"/>
+          </a:xfrm>
+          <a:prstGeom prst="rect">
+            <a:avLst/>
+          </a:prstGeom>
+          <a:noFill/>
+          <a:ln/>
+        </p:spPr>
+        <p:txBody>
+          <a:bodyPr wrap="square" rtlCol="0" anchor="t"/>
+          <a:lstStyle/>
+          <a:p>
+            <a:pPr algn="ctr" indent="0" marL="0">
+              <a:buNone/>
+            </a:pPr>
+            <a:r>
+              <a:rPr lang="en-US" sz="950" dirty="0">
+                <a:solidFill>
+                  <a:srgbClr val="C0C8D8"/>
+                </a:solidFill>
+              </a:rPr>
+              <a:t>Cost grows linearly in the number of assets — dozens of holdings, several derivatives at once.</a:t>
+            </a:r>
+            <a:endParaRPr lang="en-US" sz="950" dirty="0"/>
+          </a:p>
+        </p:txBody>
+      </p:sp>
+      <p:sp>
+        <p:nvSpPr>
+          <p:cNvPr id="16" name="Shape 14"/>
+          <p:cNvSpPr/>
+          <p:nvPr/>
+        </p:nvSpPr>
+        <p:spPr>
+          <a:xfrm>
+            <a:off x="365760" y="2834640"/>
+            <a:ext cx="8412480" cy="1508760"/>
+          </a:xfrm>
+          <a:prstGeom prst="rect">
+            <a:avLst/>
+          </a:prstGeom>
+          <a:solidFill>
+            <a:srgbClr val="0D1A2E"/>
+          </a:solidFill>
+          <a:ln w="12700">
+            <a:solidFill>
+              <a:srgbClr val="1A6BBF"/>
+            </a:solidFill>
+            <a:prstDash val="solid"/>
+          </a:ln>
+        </p:spPr>
+        <p:txBody>
+          <a:bodyPr/>
+          <a:p/>
+        </p:txBody>
+      </p:sp>
+      <p:sp>
+        <p:nvSpPr>
+          <p:cNvPr id="17" name="Text 15"/>
+          <p:cNvSpPr/>
+          <p:nvPr/>
+        </p:nvSpPr>
+        <p:spPr>
+          <a:xfrm>
+            <a:off x="548640" y="2880360"/>
+            <a:ext cx="8046720" cy="320040"/>
+          </a:xfrm>
+          <a:prstGeom prst="rect">
+            <a:avLst/>
+          </a:prstGeom>
+          <a:noFill/>
+          <a:ln/>
+        </p:spPr>
+        <p:txBody>
+          <a:bodyPr wrap="square" rtlCol="0" anchor="ctr"/>
+          <a:lstStyle/>
+          <a:p>
+            <a:pPr indent="0" marL="0">
+              <a:buNone/>
+            </a:pPr>
+            <a:r>
+              <a:rPr lang="en-US" sz="1100" b="1" dirty="0">
+                <a:solidFill>
+                  <a:srgbClr val="4A9EFF"/>
+                </a:solidFill>
+              </a:rPr>
+              <a:t>How to use it</a:t>
+            </a:r>
+            <a:endParaRPr lang="en-US" sz="1100" dirty="0"/>
+          </a:p>
+        </p:txBody>
+      </p:sp>
+      <p:sp>
+        <p:nvSpPr>
+          <p:cNvPr id="18" name="Shape 16"/>
+          <p:cNvSpPr/>
+          <p:nvPr/>
+        </p:nvSpPr>
+        <p:spPr>
+          <a:xfrm>
+            <a:off x="548640" y="3209544"/>
+            <a:ext cx="502920" cy="292608"/>
+          </a:xfrm>
+          <a:prstGeom prst="roundRect">
+            <a:avLst>
+              <a:gd name="adj" fmla="val 18750"/>
+            </a:avLst>
+          </a:prstGeom>
+          <a:solidFill>
+            <a:srgbClr val="1A6BBF"/>
+          </a:solidFill>
+          <a:ln w="12700">
+            <a:solidFill>
+              <a:srgbClr val="1A6BBF"/>
+            </a:solidFill>
+            <a:prstDash val="solid"/>
+          </a:ln>
+        </p:spPr>
+        <p:txBody>
+          <a:bodyPr/>
+          <a:p/>
+        </p:txBody>
+      </p:sp>
+      <p:sp>
+        <p:nvSpPr>
+          <p:cNvPr id="19" name="Text 17"/>
+          <p:cNvSpPr/>
+          <p:nvPr/>
+        </p:nvSpPr>
+        <p:spPr>
+          <a:xfrm>
+            <a:off x="548640" y="3209544"/>
+            <a:ext cx="502920" cy="292608"/>
+          </a:xfrm>
+          <a:prstGeom prst="rect">
+            <a:avLst/>
+          </a:prstGeom>
+          <a:noFill/>
+          <a:ln/>
+        </p:spPr>
+        <p:txBody>
+          <a:bodyPr wrap="square" lIns="0" tIns="0" rIns="0" bIns="0" rtlCol="0" anchor="ctr"/>
+          <a:lstStyle/>
+          <a:p>
+            <a:pPr algn="ctr" indent="0" marL="0">
+              <a:buNone/>
+            </a:pPr>
+            <a:r>
+              <a:rPr lang="en-US" sz="1100" b="1" dirty="0">
+                <a:solidFill>
+                  <a:srgbClr val="FFFFFF"/>
+                </a:solidFill>
+              </a:rPr>
+              <a:t>1</a:t>
+            </a:r>
+            <a:endParaRPr lang="en-US" sz="1100" dirty="0"/>
+          </a:p>
+        </p:txBody>
+      </p:sp>
+      <p:sp>
+        <p:nvSpPr>
+          <p:cNvPr id="20" name="Text 18"/>
+          <p:cNvSpPr/>
+          <p:nvPr/>
+        </p:nvSpPr>
+        <p:spPr>
+          <a:xfrm>
+            <a:off x="1143000" y="3209544"/>
+            <a:ext cx="2194560" cy="292608"/>
+          </a:xfrm>
+          <a:prstGeom prst="rect">
+            <a:avLst/>
+          </a:prstGeom>
+          <a:noFill/>
+          <a:ln/>
+        </p:spPr>
+        <p:txBody>
+          <a:bodyPr wrap="square" lIns="0" tIns="0" rIns="0" bIns="0" rtlCol="0" anchor="ctr"/>
+          <a:lstStyle/>
+          <a:p>
+            <a:pPr indent="0" marL="0">
+              <a:buNone/>
+            </a:pPr>
+            <a:r>
+              <a:rPr lang="en-US" sz="950" b="1" dirty="0">
+                <a:solidFill>
+                  <a:srgbClr val="10B981"/>
+                </a:solidFill>
+              </a:rPr>
+              <a:t>Pick assets &amp; scenarios:</a:t>
+            </a:r>
+            <a:endParaRPr lang="en-US" sz="950" dirty="0"/>
+          </a:p>
+        </p:txBody>
+      </p:sp>
+      <p:sp>
+        <p:nvSpPr>
+          <p:cNvPr id="21" name="Text 19"/>
+          <p:cNvSpPr/>
+          <p:nvPr/>
+        </p:nvSpPr>
+        <p:spPr>
+          <a:xfrm>
+            <a:off x="3383280" y="3209544"/>
+            <a:ext cx="5212080" cy="292608"/>
+          </a:xfrm>
+          <a:prstGeom prst="rect">
+            <a:avLst/>
+          </a:prstGeom>
+          <a:noFill/>
+          <a:ln/>
+        </p:spPr>
+        <p:txBody>
+          <a:bodyPr wrap="square" lIns="0" tIns="0" rIns="0" bIns="0" rtlCol="0" anchor="ctr"/>
+          <a:lstStyle/>
+          <a:p>
+            <a:pPr indent="0" marL="0">
+              <a:buNone/>
+            </a:pPr>
+            <a:r>
+              <a:rPr lang="en-US" sz="900" dirty="0">
+                <a:solidFill>
+                  <a:srgbClr val="C0C8D8"/>
+                </a:solidFill>
+              </a:rPr>
+              <a:t>Enter tickers and derivatives, choose the copula and the number of Monte-Carlo scenarios.</a:t>
+            </a:r>
+            <a:endParaRPr lang="en-US" sz="900" dirty="0"/>
+          </a:p>
+        </p:txBody>
+      </p:sp>
+      <p:sp>
+        <p:nvSpPr>
+          <p:cNvPr id="22" name="Shape 20"/>
+          <p:cNvSpPr/>
+          <p:nvPr/>
+        </p:nvSpPr>
+        <p:spPr>
+          <a:xfrm>
+            <a:off x="548640" y="3547872"/>
+            <a:ext cx="502920" cy="292608"/>
+          </a:xfrm>
+          <a:prstGeom prst="roundRect">
+            <a:avLst>
+              <a:gd name="adj" fmla="val 18750"/>
+            </a:avLst>
+          </a:prstGeom>
+          <a:solidFill>
+            <a:srgbClr val="1A6BBF"/>
+          </a:solidFill>
+          <a:ln w="12700">
+            <a:solidFill>
+              <a:srgbClr val="1A6BBF"/>
+            </a:solidFill>
+            <a:prstDash val="solid"/>
+          </a:ln>
+        </p:spPr>
+        <p:txBody>
+          <a:bodyPr/>
+          <a:p/>
+        </p:txBody>
+      </p:sp>
+      <p:sp>
+        <p:nvSpPr>
+          <p:cNvPr id="23" name="Text 21"/>
+          <p:cNvSpPr/>
+          <p:nvPr/>
+        </p:nvSpPr>
+        <p:spPr>
+          <a:xfrm>
+            <a:off x="548640" y="3547872"/>
+            <a:ext cx="502920" cy="292608"/>
+          </a:xfrm>
+          <a:prstGeom prst="rect">
+            <a:avLst/>
+          </a:prstGeom>
+          <a:noFill/>
+          <a:ln/>
+        </p:spPr>
+        <p:txBody>
+          <a:bodyPr wrap="square" lIns="0" tIns="0" rIns="0" bIns="0" rtlCol="0" anchor="ctr"/>
+          <a:lstStyle/>
+          <a:p>
+            <a:pPr algn="ctr" indent="0" marL="0">
+              <a:buNone/>
+            </a:pPr>
+            <a:r>
+              <a:rPr lang="en-US" sz="1100" b="1" dirty="0">
+                <a:solidFill>
+                  <a:srgbClr val="FFFFFF"/>
+                </a:solidFill>
+              </a:rPr>
+              <a:t>2</a:t>
+            </a:r>
+            <a:endParaRPr lang="en-US" sz="1100" dirty="0"/>
+          </a:p>
+        </p:txBody>
+      </p:sp>
+      <p:sp>
+        <p:nvSpPr>
+          <p:cNvPr id="24" name="Text 22"/>
+          <p:cNvSpPr/>
+          <p:nvPr/>
+        </p:nvSpPr>
+        <p:spPr>
+          <a:xfrm>
+            <a:off x="1143000" y="3547872"/>
+            <a:ext cx="2194560" cy="292608"/>
+          </a:xfrm>
+          <a:prstGeom prst="rect">
+            <a:avLst/>
+          </a:prstGeom>
+          <a:noFill/>
+          <a:ln/>
+        </p:spPr>
+        <p:txBody>
+          <a:bodyPr wrap="square" lIns="0" tIns="0" rIns="0" bIns="0" rtlCol="0" anchor="ctr"/>
+          <a:lstStyle/>
+          <a:p>
+            <a:pPr indent="0" marL="0">
+              <a:buNone/>
+            </a:pPr>
+            <a:r>
+              <a:rPr lang="en-US" sz="950" b="1" dirty="0">
+                <a:solidFill>
+                  <a:srgbClr val="F59E0B"/>
+                </a:solidFill>
+              </a:rPr>
+              <a:t>Set the ES floor:</a:t>
+            </a:r>
+            <a:endParaRPr lang="en-US" sz="950" dirty="0"/>
+          </a:p>
+        </p:txBody>
+      </p:sp>
+      <p:sp>
+        <p:nvSpPr>
+          <p:cNvPr id="25" name="Text 23"/>
+          <p:cNvSpPr/>
+          <p:nvPr/>
+        </p:nvSpPr>
+        <p:spPr>
+          <a:xfrm>
+            <a:off x="3383280" y="3547872"/>
+            <a:ext cx="5212080" cy="292608"/>
+          </a:xfrm>
+          <a:prstGeom prst="rect">
+            <a:avLst/>
+          </a:prstGeom>
+          <a:noFill/>
+          <a:ln/>
+        </p:spPr>
+        <p:txBody>
+          <a:bodyPr wrap="square" lIns="0" tIns="0" rIns="0" bIns="0" rtlCol="0" anchor="ctr"/>
+          <a:lstStyle/>
+          <a:p>
+            <a:pPr indent="0" marL="0">
+              <a:buNone/>
+            </a:pPr>
+            <a:r>
+              <a:rPr lang="en-US" sz="900" dirty="0">
+                <a:solidFill>
+                  <a:srgbClr val="C0C8D8"/>
+                </a:solidFill>
+              </a:rPr>
+              <a:t>Choose the loss level L; the engine sweeps the return / tail-risk frontier.</a:t>
+            </a:r>
+            <a:endParaRPr lang="en-US" sz="900" dirty="0"/>
+          </a:p>
+        </p:txBody>
+      </p:sp>
+      <p:sp>
+        <p:nvSpPr>
+          <p:cNvPr id="26" name="Shape 24"/>
+          <p:cNvSpPr/>
+          <p:nvPr/>
+        </p:nvSpPr>
+        <p:spPr>
+          <a:xfrm>
+            <a:off x="548640" y="3886200"/>
+            <a:ext cx="502920" cy="292608"/>
+          </a:xfrm>
+          <a:prstGeom prst="roundRect">
+            <a:avLst>
+              <a:gd name="adj" fmla="val 18750"/>
+            </a:avLst>
+          </a:prstGeom>
+          <a:solidFill>
+            <a:srgbClr val="1A6BBF"/>
+          </a:solidFill>
+          <a:ln w="12700">
+            <a:solidFill>
+              <a:srgbClr val="1A6BBF"/>
+            </a:solidFill>
+            <a:prstDash val="solid"/>
+          </a:ln>
+        </p:spPr>
+        <p:txBody>
+          <a:bodyPr/>
+          <a:p/>
+        </p:txBody>
+      </p:sp>
+      <p:sp>
+        <p:nvSpPr>
+          <p:cNvPr id="27" name="Text 25"/>
+          <p:cNvSpPr/>
+          <p:nvPr/>
+        </p:nvSpPr>
+        <p:spPr>
+          <a:xfrm>
+            <a:off x="548640" y="3886200"/>
+            <a:ext cx="502920" cy="292608"/>
+          </a:xfrm>
+          <a:prstGeom prst="rect">
+            <a:avLst/>
+          </a:prstGeom>
+          <a:noFill/>
+          <a:ln/>
+        </p:spPr>
+        <p:txBody>
+          <a:bodyPr wrap="square" lIns="0" tIns="0" rIns="0" bIns="0" rtlCol="0" anchor="ctr"/>
+          <a:lstStyle/>
+          <a:p>
+            <a:pPr algn="ctr" indent="0" marL="0">
+              <a:buNone/>
+            </a:pPr>
+            <a:r>
+              <a:rPr lang="en-US" sz="1100" b="1" dirty="0">
+                <a:solidFill>
+                  <a:srgbClr val="FFFFFF"/>
+                </a:solidFill>
+              </a:rPr>
+              <a:t>3</a:t>
+            </a:r>
+            <a:endParaRPr lang="en-US" sz="1100" dirty="0"/>
+          </a:p>
+        </p:txBody>
+      </p:sp>
+      <p:sp>
+        <p:nvSpPr>
+          <p:cNvPr id="28" name="Text 26"/>
+          <p:cNvSpPr/>
+          <p:nvPr/>
+        </p:nvSpPr>
+        <p:spPr>
+          <a:xfrm>
+            <a:off x="1143000" y="3886200"/>
+            <a:ext cx="2194560" cy="292608"/>
+          </a:xfrm>
+          <a:prstGeom prst="rect">
+            <a:avLst/>
+          </a:prstGeom>
+          <a:noFill/>
+          <a:ln/>
+        </p:spPr>
+        <p:txBody>
+          <a:bodyPr wrap="square" lIns="0" tIns="0" rIns="0" bIns="0" rtlCol="0" anchor="ctr"/>
+          <a:lstStyle/>
+          <a:p>
+            <a:pPr indent="0" marL="0">
+              <a:buNone/>
+            </a:pPr>
+            <a:r>
+              <a:rPr lang="en-US" sz="950" b="1" dirty="0">
+                <a:solidFill>
+                  <a:srgbClr val="E76F51"/>
+                </a:solidFill>
+              </a:rPr>
+              <a:t>Read the optimum:</a:t>
+            </a:r>
+            <a:endParaRPr lang="en-US" sz="950" dirty="0"/>
+          </a:p>
+        </p:txBody>
+      </p:sp>
+      <p:sp>
+        <p:nvSpPr>
+          <p:cNvPr id="29" name="Text 27"/>
+          <p:cNvSpPr/>
+          <p:nvPr/>
+        </p:nvSpPr>
+        <p:spPr>
+          <a:xfrm>
+            <a:off x="3383280" y="3886200"/>
+            <a:ext cx="5212080" cy="292608"/>
+          </a:xfrm>
+          <a:prstGeom prst="rect">
+            <a:avLst/>
+          </a:prstGeom>
+          <a:noFill/>
+          <a:ln/>
+        </p:spPr>
+        <p:txBody>
+          <a:bodyPr wrap="square" lIns="0" tIns="0" rIns="0" bIns="0" rtlCol="0" anchor="ctr"/>
+          <a:lstStyle/>
+          <a:p>
+            <a:pPr indent="0" marL="0">
+              <a:buNone/>
+            </a:pPr>
+            <a:r>
+              <a:rPr lang="en-US" sz="900" dirty="0">
+                <a:solidFill>
+                  <a:srgbClr val="C0C8D8"/>
+                </a:solidFill>
+              </a:rPr>
+              <a:t>★ marks the chosen portfolio; weights, E[r], realised ES, vol and skew are reported.</a:t>
+            </a:r>
+            <a:endParaRPr lang="en-US" sz="900" dirty="0"/>
+          </a:p>
+        </p:txBody>
+      </p:sp>
+      <p:sp>
+        <p:nvSpPr>
+          <p:cNvPr id="30" name="Text 28"/>
+          <p:cNvSpPr/>
+          <p:nvPr/>
+        </p:nvSpPr>
+        <p:spPr>
+          <a:xfrm>
+            <a:off x="8046720" y="4754880"/>
+            <a:ext cx="914400" cy="274320"/>
+          </a:xfrm>
+          <a:prstGeom prst="rect">
+            <a:avLst/>
+          </a:prstGeom>
+          <a:noFill/>
+          <a:ln/>
+        </p:spPr>
+        <p:txBody>
+          <a:bodyPr wrap="square" rtlCol="0" anchor="ctr"/>
+          <a:lstStyle/>
+          <a:p>
+            <a:pPr algn="r" indent="0" marL="0">
+              <a:buNone/>
+            </a:pPr>
+            <a:r>
+              <a:rPr lang="en-US" sz="900" dirty="0">
+                <a:solidFill>
+                  <a:srgbClr val="556A8A"/>
+                </a:solidFill>
+              </a:rPr>
+              <a:t>12 / 15</a:t>
+            </a:r>
+            <a:endParaRPr lang="en-US" sz="900" dirty="0"/>
+          </a:p>
+        </p:txBody>
+      </p:sp>
+      <p:sp>
+        <p:nvSpPr>
+          <p:cNvPr id="31" name="Text 29"/>
+          <p:cNvSpPr/>
+          <p:nvPr/>
+        </p:nvSpPr>
+        <p:spPr>
+          <a:xfrm>
+            <a:off x="365760" y="4754880"/>
+            <a:ext cx="6400800" cy="274320"/>
+          </a:xfrm>
+          <a:prstGeom prst="rect">
+            <a:avLst/>
+          </a:prstGeom>
+          <a:noFill/>
+          <a:ln/>
+        </p:spPr>
+        <p:txBody>
+          <a:bodyPr wrap="square" rtlCol="0" anchor="ctr"/>
+          <a:lstStyle/>
+          <a:p>
+            <a:pPr algn="l" indent="0" marL="0">
+              <a:buNone/>
+            </a:pPr>
+            <a:r>
+              <a:rPr lang="en-US" sz="900" dirty="0">
+                <a:solidFill>
+                  <a:srgbClr val="556A8A"/>
+                </a:solidFill>
+              </a:rPr>
+              <a:t>Beyond Mean-Variance Portfolio Optimiser — User Guide</a:t>
+            </a:r>
+            <a:endParaRPr lang="en-US" sz="900" dirty="0"/>
+          </a:p>
+        </p:txBody>
+      </p:sp>
+    </p:spTree>
+  </p:cSld>
+  <p:clrMapOvr>
+    <a:masterClrMapping/>
+  </p:clrMapOvr>
+</p:sld>
+</file>
+
+<file path=ppt/slides/slide15.xml><?xml version="1.0" encoding="utf-8"?>
+<p:sld xmlns:a="http://schemas.openxmlformats.org/drawingml/2006/main" xmlns:r="http://schemas.openxmlformats.org/officeDocument/2006/relationships" xmlns:p="http://schemas.openxmlformats.org/presentationml/2006/main">
+  <p:cSld name="Slide 2">
+    <p:bg>
+      <p:bgPr>
+        <a:solidFill>
+          <a:srgbClr val="020C1B"/>
+        </a:solidFill>
+      </p:bgPr>
+    </p:bg>
+    <p:spTree>
+      <p:nvGrpSpPr>
+        <p:cNvPr id="1" name=""/>
+        <p:cNvGrpSpPr/>
+        <p:nvPr/>
+      </p:nvGrpSpPr>
+      <p:grpSpPr>
+        <a:xfrm>
+          <a:off x="0" y="0"/>
+          <a:ext cx="0" cy="0"/>
+          <a:chOff x="0" y="0"/>
+          <a:chExt cx="0" cy="0"/>
+        </a:xfrm>
+      </p:grpSpPr>
+      <p:sp>
+        <p:nvSpPr>
+          <p:cNvPr id="2" name="Shape 0"/>
+          <p:cNvSpPr/>
+          <p:nvPr/>
+        </p:nvSpPr>
+        <p:spPr>
+          <a:xfrm>
+            <a:off x="0" y="0"/>
+            <a:ext cx="9144000" cy="54864"/>
+          </a:xfrm>
+          <a:prstGeom prst="rect">
+            <a:avLst/>
+          </a:prstGeom>
+          <a:solidFill>
+            <a:srgbClr val="1A6BBF"/>
+          </a:solidFill>
+          <a:ln w="12700">
+            <a:solidFill>
+              <a:srgbClr val="1A6BBF"/>
+            </a:solidFill>
+            <a:prstDash val="solid"/>
+          </a:ln>
+        </p:spPr>
+        <p:txBody>
+          <a:bodyPr/>
+          <a:p/>
+        </p:txBody>
+      </p:sp>
+      <p:sp>
+        <p:nvSpPr>
+          <p:cNvPr id="3" name="Text 1"/>
+          <p:cNvSpPr/>
+          <p:nvPr/>
+        </p:nvSpPr>
+        <p:spPr>
+          <a:xfrm>
+            <a:off x="457200" y="164592"/>
+            <a:ext cx="8229600" cy="502920"/>
+          </a:xfrm>
+          <a:prstGeom prst="rect">
+            <a:avLst/>
+          </a:prstGeom>
+          <a:noFill/>
+          <a:ln/>
+        </p:spPr>
+        <p:txBody>
+          <a:bodyPr wrap="square" rtlCol="0" anchor="ctr"/>
+          <a:lstStyle/>
+          <a:p>
+            <a:pPr indent="0" marL="0">
+              <a:buNone/>
+            </a:pPr>
+            <a:r>
+              <a:rPr lang="en-US" sz="2600" b="1" dirty="0">
+                <a:solidFill>
+                  <a:srgbClr val="FFFFFF"/>
+                </a:solidFill>
+              </a:rPr>
+              <a:t>Out-of-sample back-test</a:t>
+            </a:r>
+            <a:endParaRPr lang="en-US" sz="2600" dirty="0"/>
+          </a:p>
+        </p:txBody>
+      </p:sp>
+      <p:sp>
+        <p:nvSpPr>
+          <p:cNvPr id="4" name="Shape 2"/>
+          <p:cNvSpPr/>
+          <p:nvPr/>
+        </p:nvSpPr>
+        <p:spPr>
+          <a:xfrm>
+            <a:off x="365760" y="868680"/>
+            <a:ext cx="2651760" cy="1828800"/>
+          </a:xfrm>
+          <a:prstGeom prst="rect">
+            <a:avLst/>
+          </a:prstGeom>
+          <a:solidFill>
+            <a:srgbClr val="0D1A2E"/>
+          </a:solidFill>
+          <a:ln w="12700">
+            <a:solidFill>
+              <a:srgbClr val="1A6BBF"/>
+            </a:solidFill>
+            <a:prstDash val="solid"/>
+          </a:ln>
+          <a:effectLst>
+            <a:outerShdw sx="100000" sy="100000" kx="0" ky="0" algn="bl" rotWithShape="0" blurRad="101600" dist="38100" dir="8100000">
+              <a:srgbClr val="000000">
+                <a:alpha val="18000"/>
+              </a:srgbClr>
+            </a:outerShdw>
+          </a:effectLst>
+        </p:spPr>
+        <p:txBody>
+          <a:bodyPr/>
+          <a:p/>
+        </p:txBody>
+      </p:sp>
+      <p:sp>
+        <p:nvSpPr>
+          <p:cNvPr id="5" name="Text 3"/>
+          <p:cNvSpPr/>
+          <p:nvPr/>
+        </p:nvSpPr>
+        <p:spPr>
+          <a:xfrm>
+            <a:off x="365760" y="960120"/>
+            <a:ext cx="2651760" cy="502920"/>
+          </a:xfrm>
+          <a:prstGeom prst="rect">
+            <a:avLst/>
+          </a:prstGeom>
+          <a:noFill/>
+          <a:ln/>
+        </p:spPr>
+        <p:txBody>
+          <a:bodyPr wrap="square" rtlCol="0" anchor="ctr"/>
+          <a:lstStyle/>
+          <a:p>
+            <a:pPr algn="ctr" indent="0" marL="0">
+              <a:buNone/>
+            </a:pPr>
+            <a:r>
+              <a:rPr lang="en-US" sz="2200" dirty="0">
+                <a:solidFill>
+                  <a:srgbClr val="000000"/>
+                </a:solidFill>
+              </a:rPr>
+              <a:t>🪟</a:t>
+            </a:r>
+            <a:endParaRPr lang="en-US" sz="2200" dirty="0"/>
+          </a:p>
+        </p:txBody>
+      </p:sp>
+      <p:sp>
+        <p:nvSpPr>
+          <p:cNvPr id="6" name="Text 4"/>
+          <p:cNvSpPr/>
+          <p:nvPr/>
+        </p:nvSpPr>
+        <p:spPr>
+          <a:xfrm>
+            <a:off x="365760" y="1463040"/>
+            <a:ext cx="2651760" cy="365760"/>
+          </a:xfrm>
+          <a:prstGeom prst="rect">
+            <a:avLst/>
+          </a:prstGeom>
+          <a:noFill/>
+          <a:ln/>
+        </p:spPr>
+        <p:txBody>
+          <a:bodyPr wrap="square" rtlCol="0" anchor="ctr"/>
+          <a:lstStyle/>
+          <a:p>
+            <a:pPr algn="ctr" indent="0" marL="0">
+              <a:buNone/>
+            </a:pPr>
+            <a:r>
+              <a:rPr lang="en-US" sz="1100" b="1" dirty="0">
+                <a:solidFill>
+                  <a:srgbClr val="4A9EFF"/>
+                </a:solidFill>
+              </a:rPr>
+              <a:t>Two windows</a:t>
+            </a:r>
+            <a:endParaRPr lang="en-US" sz="1100" dirty="0"/>
+          </a:p>
+        </p:txBody>
+      </p:sp>
+      <p:sp>
+        <p:nvSpPr>
+          <p:cNvPr id="7" name="Text 5"/>
+          <p:cNvSpPr/>
+          <p:nvPr/>
+        </p:nvSpPr>
+        <p:spPr>
+          <a:xfrm>
+            <a:off x="475488" y="1874520"/>
+            <a:ext cx="2432304" cy="731520"/>
+          </a:xfrm>
+          <a:prstGeom prst="rect">
+            <a:avLst/>
+          </a:prstGeom>
+          <a:noFill/>
+          <a:ln/>
+        </p:spPr>
+        <p:txBody>
+          <a:bodyPr wrap="square" rtlCol="0" anchor="t"/>
+          <a:lstStyle/>
+          <a:p>
+            <a:pPr algn="ctr" indent="0" marL="0">
+              <a:buNone/>
+            </a:pPr>
+            <a:r>
+              <a:rPr lang="en-US" sz="950" dirty="0">
+                <a:solidFill>
+                  <a:srgbClr val="C0C8D8"/>
+                </a:solidFill>
+              </a:rPr>
+              <a:t>Build weights on a construction window, then buy-and-hold them through a later evaluation window.</a:t>
+            </a:r>
+            <a:endParaRPr lang="en-US" sz="950" dirty="0"/>
+          </a:p>
+        </p:txBody>
+      </p:sp>
+      <p:sp>
+        <p:nvSpPr>
+          <p:cNvPr id="8" name="Shape 6"/>
+          <p:cNvSpPr/>
+          <p:nvPr/>
+        </p:nvSpPr>
+        <p:spPr>
+          <a:xfrm>
+            <a:off x="3200400" y="868680"/>
+            <a:ext cx="2651760" cy="1828800"/>
+          </a:xfrm>
+          <a:prstGeom prst="rect">
+            <a:avLst/>
+          </a:prstGeom>
+          <a:solidFill>
+            <a:srgbClr val="0D1A2E"/>
+          </a:solidFill>
+          <a:ln w="12700">
+            <a:solidFill>
+              <a:srgbClr val="1A6BBF"/>
+            </a:solidFill>
+            <a:prstDash val="solid"/>
+          </a:ln>
+          <a:effectLst>
+            <a:outerShdw sx="100000" sy="100000" kx="0" ky="0" algn="bl" rotWithShape="0" blurRad="101600" dist="38100" dir="8100000">
+              <a:srgbClr val="000000">
+                <a:alpha val="18000"/>
+              </a:srgbClr>
+            </a:outerShdw>
+          </a:effectLst>
+        </p:spPr>
+        <p:txBody>
+          <a:bodyPr/>
+          <a:p/>
+        </p:txBody>
+      </p:sp>
+      <p:sp>
+        <p:nvSpPr>
+          <p:cNvPr id="9" name="Text 7"/>
+          <p:cNvSpPr/>
+          <p:nvPr/>
+        </p:nvSpPr>
+        <p:spPr>
+          <a:xfrm>
+            <a:off x="3200400" y="960120"/>
+            <a:ext cx="2651760" cy="502920"/>
+          </a:xfrm>
+          <a:prstGeom prst="rect">
+            <a:avLst/>
+          </a:prstGeom>
+          <a:noFill/>
+          <a:ln/>
+        </p:spPr>
+        <p:txBody>
+          <a:bodyPr wrap="square" rtlCol="0" anchor="ctr"/>
+          <a:lstStyle/>
+          <a:p>
+            <a:pPr algn="ctr" indent="0" marL="0">
+              <a:buNone/>
+            </a:pPr>
+            <a:r>
+              <a:rPr lang="en-US" sz="2200" dirty="0">
+                <a:solidFill>
+                  <a:srgbClr val="000000"/>
+                </a:solidFill>
+              </a:rPr>
+              <a:t>🔁</a:t>
+            </a:r>
+            <a:endParaRPr lang="en-US" sz="2200" dirty="0"/>
+          </a:p>
+        </p:txBody>
+      </p:sp>
+      <p:sp>
+        <p:nvSpPr>
+          <p:cNvPr id="10" name="Text 8"/>
+          <p:cNvSpPr/>
+          <p:nvPr/>
+        </p:nvSpPr>
+        <p:spPr>
+          <a:xfrm>
+            <a:off x="3200400" y="1463040"/>
+            <a:ext cx="2651760" cy="365760"/>
+          </a:xfrm>
+          <a:prstGeom prst="rect">
+            <a:avLst/>
+          </a:prstGeom>
+          <a:noFill/>
+          <a:ln/>
+        </p:spPr>
+        <p:txBody>
+          <a:bodyPr wrap="square" rtlCol="0" anchor="ctr"/>
+          <a:lstStyle/>
+          <a:p>
+            <a:pPr algn="ctr" indent="0" marL="0">
+              <a:buNone/>
+            </a:pPr>
+            <a:r>
+              <a:rPr lang="en-US" sz="1100" b="1" dirty="0">
+                <a:solidFill>
+                  <a:srgbClr val="4A9EFF"/>
+                </a:solidFill>
+              </a:rPr>
+              <a:t>Marked to market</a:t>
+            </a:r>
+            <a:endParaRPr lang="en-US" sz="1100" dirty="0"/>
+          </a:p>
+        </p:txBody>
+      </p:sp>
+      <p:sp>
+        <p:nvSpPr>
+          <p:cNvPr id="11" name="Text 9"/>
+          <p:cNvSpPr/>
+          <p:nvPr/>
+        </p:nvSpPr>
+        <p:spPr>
+          <a:xfrm>
+            <a:off x="3310128" y="1874520"/>
+            <a:ext cx="2432304" cy="731520"/>
+          </a:xfrm>
+          <a:prstGeom prst="rect">
+            <a:avLst/>
+          </a:prstGeom>
+          <a:noFill/>
+          <a:ln/>
+        </p:spPr>
+        <p:txBody>
+          <a:bodyPr wrap="square" rtlCol="0" anchor="t"/>
+          <a:lstStyle/>
+          <a:p>
+            <a:pPr algn="ctr" indent="0" marL="0">
+              <a:buNone/>
+            </a:pPr>
+            <a:r>
+              <a:rPr lang="en-US" sz="950" dirty="0">
+                <a:solidFill>
+                  <a:srgbClr val="C0C8D8"/>
+                </a:solidFill>
+              </a:rPr>
+              <a:t>The derivative is repriced each step with Black-Scholes, giving a full realised return path.</a:t>
+            </a:r>
+            <a:endParaRPr lang="en-US" sz="950" dirty="0"/>
+          </a:p>
+        </p:txBody>
+      </p:sp>
+      <p:sp>
+        <p:nvSpPr>
+          <p:cNvPr id="12" name="Shape 10"/>
+          <p:cNvSpPr/>
+          <p:nvPr/>
+        </p:nvSpPr>
+        <p:spPr>
+          <a:xfrm>
+            <a:off x="6035040" y="868680"/>
+            <a:ext cx="2651760" cy="1828800"/>
+          </a:xfrm>
+          <a:prstGeom prst="rect">
+            <a:avLst/>
+          </a:prstGeom>
+          <a:solidFill>
+            <a:srgbClr val="0D1A2E"/>
+          </a:solidFill>
+          <a:ln w="12700">
+            <a:solidFill>
+              <a:srgbClr val="1A6BBF"/>
+            </a:solidFill>
+            <a:prstDash val="solid"/>
+          </a:ln>
+          <a:effectLst>
+            <a:outerShdw sx="100000" sy="100000" kx="0" ky="0" algn="bl" rotWithShape="0" blurRad="101600" dist="38100" dir="8100000">
+              <a:srgbClr val="000000">
+                <a:alpha val="18000"/>
+              </a:srgbClr>
+            </a:outerShdw>
+          </a:effectLst>
+        </p:spPr>
+        <p:txBody>
+          <a:bodyPr/>
+          <a:p/>
+        </p:txBody>
+      </p:sp>
+      <p:sp>
+        <p:nvSpPr>
+          <p:cNvPr id="13" name="Text 11"/>
+          <p:cNvSpPr/>
+          <p:nvPr/>
+        </p:nvSpPr>
+        <p:spPr>
+          <a:xfrm>
+            <a:off x="6035040" y="960120"/>
+            <a:ext cx="2651760" cy="502920"/>
+          </a:xfrm>
+          <a:prstGeom prst="rect">
+            <a:avLst/>
+          </a:prstGeom>
+          <a:noFill/>
+          <a:ln/>
+        </p:spPr>
+        <p:txBody>
+          <a:bodyPr wrap="square" rtlCol="0" anchor="ctr"/>
+          <a:lstStyle/>
+          <a:p>
+            <a:pPr algn="ctr" indent="0" marL="0">
+              <a:buNone/>
+            </a:pPr>
+            <a:r>
+              <a:rPr lang="en-US" sz="2200" dirty="0">
+                <a:solidFill>
+                  <a:srgbClr val="000000"/>
+                </a:solidFill>
+              </a:rPr>
+              <a:t>📈</a:t>
+            </a:r>
+            <a:endParaRPr lang="en-US" sz="2200" dirty="0"/>
+          </a:p>
+        </p:txBody>
+      </p:sp>
+      <p:sp>
+        <p:nvSpPr>
+          <p:cNvPr id="14" name="Text 12"/>
+          <p:cNvSpPr/>
+          <p:nvPr/>
+        </p:nvSpPr>
+        <p:spPr>
+          <a:xfrm>
+            <a:off x="6035040" y="1463040"/>
+            <a:ext cx="2651760" cy="365760"/>
+          </a:xfrm>
+          <a:prstGeom prst="rect">
+            <a:avLst/>
+          </a:prstGeom>
+          <a:noFill/>
+          <a:ln/>
+        </p:spPr>
+        <p:txBody>
+          <a:bodyPr wrap="square" rtlCol="0" anchor="ctr"/>
+          <a:lstStyle/>
+          <a:p>
+            <a:pPr algn="ctr" indent="0" marL="0">
+              <a:buNone/>
+            </a:pPr>
+            <a:r>
+              <a:rPr lang="en-US" sz="1100" b="1" dirty="0">
+                <a:solidFill>
+                  <a:srgbClr val="4A9EFF"/>
+                </a:solidFill>
+              </a:rPr>
+              <a:t>Alpha &amp; beta</a:t>
+            </a:r>
+            <a:endParaRPr lang="en-US" sz="1100" dirty="0"/>
+          </a:p>
+        </p:txBody>
+      </p:sp>
+      <p:sp>
+        <p:nvSpPr>
+          <p:cNvPr id="15" name="Text 13"/>
+          <p:cNvSpPr/>
+          <p:nvPr/>
+        </p:nvSpPr>
+        <p:spPr>
+          <a:xfrm>
+            <a:off x="6144768" y="1874520"/>
+            <a:ext cx="2432304" cy="731520"/>
+          </a:xfrm>
+          <a:prstGeom prst="rect">
+            <a:avLst/>
+          </a:prstGeom>
+          <a:noFill/>
+          <a:ln/>
+        </p:spPr>
+        <p:txBody>
+          <a:bodyPr wrap="square" rtlCol="0" anchor="t"/>
+          <a:lstStyle/>
+          <a:p>
+            <a:pPr algn="ctr" indent="0" marL="0">
+              <a:buNone/>
+            </a:pPr>
+            <a:r>
+              <a:rPr lang="en-US" sz="950" dirty="0">
+                <a:solidFill>
+                  <a:srgbClr val="C0C8D8"/>
+                </a:solidFill>
+              </a:rPr>
+              <a:t>Realised alpha, beta and R² of each holding and of the portfolio vs a chosen benchmark.</a:t>
+            </a:r>
+            <a:endParaRPr lang="en-US" sz="950" dirty="0"/>
+          </a:p>
+        </p:txBody>
+      </p:sp>
+      <p:sp>
+        <p:nvSpPr>
+          <p:cNvPr id="16" name="Shape 14"/>
+          <p:cNvSpPr/>
+          <p:nvPr/>
+        </p:nvSpPr>
+        <p:spPr>
+          <a:xfrm>
+            <a:off x="365760" y="2834640"/>
+            <a:ext cx="8412480" cy="1508760"/>
+          </a:xfrm>
+          <a:prstGeom prst="rect">
+            <a:avLst/>
+          </a:prstGeom>
+          <a:solidFill>
+            <a:srgbClr val="0D1A2E"/>
+          </a:solidFill>
+          <a:ln w="12700">
+            <a:solidFill>
+              <a:srgbClr val="1A6BBF"/>
+            </a:solidFill>
+            <a:prstDash val="solid"/>
+          </a:ln>
+        </p:spPr>
+        <p:txBody>
+          <a:bodyPr/>
+          <a:p/>
+        </p:txBody>
+      </p:sp>
+      <p:sp>
+        <p:nvSpPr>
+          <p:cNvPr id="17" name="Text 15"/>
+          <p:cNvSpPr/>
+          <p:nvPr/>
+        </p:nvSpPr>
+        <p:spPr>
+          <a:xfrm>
+            <a:off x="548640" y="2880360"/>
+            <a:ext cx="8046720" cy="320040"/>
+          </a:xfrm>
+          <a:prstGeom prst="rect">
+            <a:avLst/>
+          </a:prstGeom>
+          <a:noFill/>
+          <a:ln/>
+        </p:spPr>
+        <p:txBody>
+          <a:bodyPr wrap="square" rtlCol="0" anchor="ctr"/>
+          <a:lstStyle/>
+          <a:p>
+            <a:pPr indent="0" marL="0">
+              <a:buNone/>
+            </a:pPr>
+            <a:r>
+              <a:rPr lang="en-US" sz="1100" b="1" dirty="0">
+                <a:solidFill>
+                  <a:srgbClr val="4A9EFF"/>
+                </a:solidFill>
+              </a:rPr>
+              <a:t>What you get</a:t>
+            </a:r>
+            <a:endParaRPr lang="en-US" sz="1100" dirty="0"/>
+          </a:p>
+        </p:txBody>
+      </p:sp>
+      <p:sp>
+        <p:nvSpPr>
+          <p:cNvPr id="18" name="Shape 16"/>
+          <p:cNvSpPr/>
+          <p:nvPr/>
+        </p:nvSpPr>
+        <p:spPr>
+          <a:xfrm>
+            <a:off x="548640" y="3209544"/>
+            <a:ext cx="502920" cy="292608"/>
+          </a:xfrm>
+          <a:prstGeom prst="roundRect">
+            <a:avLst>
+              <a:gd name="adj" fmla="val 18750"/>
+            </a:avLst>
+          </a:prstGeom>
+          <a:solidFill>
+            <a:srgbClr val="1A6BBF"/>
+          </a:solidFill>
+          <a:ln w="12700">
+            <a:solidFill>
+              <a:srgbClr val="1A6BBF"/>
+            </a:solidFill>
+            <a:prstDash val="solid"/>
+          </a:ln>
+        </p:spPr>
+        <p:txBody>
+          <a:bodyPr/>
+          <a:p/>
+        </p:txBody>
+      </p:sp>
+      <p:sp>
+        <p:nvSpPr>
+          <p:cNvPr id="19" name="Text 17"/>
+          <p:cNvSpPr/>
+          <p:nvPr/>
+        </p:nvSpPr>
+        <p:spPr>
+          <a:xfrm>
+            <a:off x="548640" y="3209544"/>
+            <a:ext cx="502920" cy="292608"/>
+          </a:xfrm>
+          <a:prstGeom prst="rect">
+            <a:avLst/>
+          </a:prstGeom>
+          <a:noFill/>
+          <a:ln/>
+        </p:spPr>
+        <p:txBody>
+          <a:bodyPr wrap="square" lIns="0" tIns="0" rIns="0" bIns="0" rtlCol="0" anchor="ctr"/>
+          <a:lstStyle/>
+          <a:p>
+            <a:pPr algn="ctr" indent="0" marL="0">
+              <a:buNone/>
+            </a:pPr>
+            <a:r>
+              <a:rPr lang="en-US" sz="1100" b="1" dirty="0">
+                <a:solidFill>
+                  <a:srgbClr val="FFFFFF"/>
+                </a:solidFill>
+              </a:rPr>
+              <a:t>1</a:t>
+            </a:r>
+            <a:endParaRPr lang="en-US" sz="1100" dirty="0"/>
+          </a:p>
+        </p:txBody>
+      </p:sp>
+      <p:sp>
+        <p:nvSpPr>
+          <p:cNvPr id="20" name="Text 18"/>
+          <p:cNvSpPr/>
+          <p:nvPr/>
+        </p:nvSpPr>
+        <p:spPr>
+          <a:xfrm>
+            <a:off x="1143000" y="3209544"/>
+            <a:ext cx="2194560" cy="292608"/>
+          </a:xfrm>
+          <a:prstGeom prst="rect">
+            <a:avLst/>
+          </a:prstGeom>
+          <a:noFill/>
+          <a:ln/>
+        </p:spPr>
+        <p:txBody>
+          <a:bodyPr wrap="square" lIns="0" tIns="0" rIns="0" bIns="0" rtlCol="0" anchor="ctr"/>
+          <a:lstStyle/>
+          <a:p>
+            <a:pPr indent="0" marL="0">
+              <a:buNone/>
+            </a:pPr>
+            <a:r>
+              <a:rPr lang="en-US" sz="950" b="1" dirty="0">
+                <a:solidFill>
+                  <a:srgbClr val="10B981"/>
+                </a:solidFill>
+              </a:rPr>
+              <a:t>Expected vs realised:</a:t>
+            </a:r>
+            <a:endParaRPr lang="en-US" sz="950" dirty="0"/>
+          </a:p>
+        </p:txBody>
+      </p:sp>
+      <p:sp>
+        <p:nvSpPr>
+          <p:cNvPr id="21" name="Text 19"/>
+          <p:cNvSpPr/>
+          <p:nvPr/>
+        </p:nvSpPr>
+        <p:spPr>
+          <a:xfrm>
+            <a:off x="3383280" y="3209544"/>
+            <a:ext cx="5212080" cy="292608"/>
+          </a:xfrm>
+          <a:prstGeom prst="rect">
+            <a:avLst/>
+          </a:prstGeom>
+          <a:noFill/>
+          <a:ln/>
+        </p:spPr>
+        <p:txBody>
+          <a:bodyPr wrap="square" lIns="0" tIns="0" rIns="0" bIns="0" rtlCol="0" anchor="ctr"/>
+          <a:lstStyle/>
+          <a:p>
+            <a:pPr indent="0" marL="0">
+              <a:buNone/>
+            </a:pPr>
+            <a:r>
+              <a:rPr lang="en-US" sz="900" dirty="0">
+                <a:solidFill>
+                  <a:srgbClr val="C0C8D8"/>
+                </a:solidFill>
+              </a:rPr>
+              <a:t>Return, volatility and the loss-threshold outcome, for P1 (no derivative) and P2 (with).</a:t>
+            </a:r>
+            <a:endParaRPr lang="en-US" sz="900" dirty="0"/>
+          </a:p>
+        </p:txBody>
+      </p:sp>
+      <p:sp>
+        <p:nvSpPr>
+          <p:cNvPr id="22" name="Shape 20"/>
+          <p:cNvSpPr/>
+          <p:nvPr/>
+        </p:nvSpPr>
+        <p:spPr>
+          <a:xfrm>
+            <a:off x="548640" y="3547872"/>
+            <a:ext cx="502920" cy="292608"/>
+          </a:xfrm>
+          <a:prstGeom prst="roundRect">
+            <a:avLst>
+              <a:gd name="adj" fmla="val 18750"/>
+            </a:avLst>
+          </a:prstGeom>
+          <a:solidFill>
+            <a:srgbClr val="1A6BBF"/>
+          </a:solidFill>
+          <a:ln w="12700">
+            <a:solidFill>
+              <a:srgbClr val="1A6BBF"/>
+            </a:solidFill>
+            <a:prstDash val="solid"/>
+          </a:ln>
+        </p:spPr>
+        <p:txBody>
+          <a:bodyPr/>
+          <a:p/>
+        </p:txBody>
+      </p:sp>
+      <p:sp>
+        <p:nvSpPr>
+          <p:cNvPr id="23" name="Text 21"/>
+          <p:cNvSpPr/>
+          <p:nvPr/>
+        </p:nvSpPr>
+        <p:spPr>
+          <a:xfrm>
+            <a:off x="548640" y="3547872"/>
+            <a:ext cx="502920" cy="292608"/>
+          </a:xfrm>
+          <a:prstGeom prst="rect">
+            <a:avLst/>
+          </a:prstGeom>
+          <a:noFill/>
+          <a:ln/>
+        </p:spPr>
+        <p:txBody>
+          <a:bodyPr wrap="square" lIns="0" tIns="0" rIns="0" bIns="0" rtlCol="0" anchor="ctr"/>
+          <a:lstStyle/>
+          <a:p>
+            <a:pPr algn="ctr" indent="0" marL="0">
+              <a:buNone/>
+            </a:pPr>
+            <a:r>
+              <a:rPr lang="en-US" sz="1100" b="1" dirty="0">
+                <a:solidFill>
+                  <a:srgbClr val="FFFFFF"/>
+                </a:solidFill>
+              </a:rPr>
+              <a:t>2</a:t>
+            </a:r>
+            <a:endParaRPr lang="en-US" sz="1100" dirty="0"/>
+          </a:p>
+        </p:txBody>
+      </p:sp>
+      <p:sp>
+        <p:nvSpPr>
+          <p:cNvPr id="24" name="Text 22"/>
+          <p:cNvSpPr/>
+          <p:nvPr/>
+        </p:nvSpPr>
+        <p:spPr>
+          <a:xfrm>
+            <a:off x="1143000" y="3547872"/>
+            <a:ext cx="2194560" cy="292608"/>
+          </a:xfrm>
+          <a:prstGeom prst="rect">
+            <a:avLst/>
+          </a:prstGeom>
+          <a:noFill/>
+          <a:ln/>
+        </p:spPr>
+        <p:txBody>
+          <a:bodyPr wrap="square" lIns="0" tIns="0" rIns="0" bIns="0" rtlCol="0" anchor="ctr"/>
+          <a:lstStyle/>
+          <a:p>
+            <a:pPr indent="0" marL="0">
+              <a:buNone/>
+            </a:pPr>
+            <a:r>
+              <a:rPr lang="en-US" sz="950" b="1" dirty="0">
+                <a:solidFill>
+                  <a:srgbClr val="F59E0B"/>
+                </a:solidFill>
+              </a:rPr>
+              <a:t>Alpha / beta table:</a:t>
+            </a:r>
+            <a:endParaRPr lang="en-US" sz="950" dirty="0"/>
+          </a:p>
+        </p:txBody>
+      </p:sp>
+      <p:sp>
+        <p:nvSpPr>
+          <p:cNvPr id="25" name="Text 23"/>
+          <p:cNvSpPr/>
+          <p:nvPr/>
+        </p:nvSpPr>
+        <p:spPr>
+          <a:xfrm>
+            <a:off x="3383280" y="3547872"/>
+            <a:ext cx="5212080" cy="292608"/>
+          </a:xfrm>
+          <a:prstGeom prst="rect">
+            <a:avLst/>
+          </a:prstGeom>
+          <a:noFill/>
+          <a:ln/>
+        </p:spPr>
+        <p:txBody>
+          <a:bodyPr wrap="square" lIns="0" tIns="0" rIns="0" bIns="0" rtlCol="0" anchor="ctr"/>
+          <a:lstStyle/>
+          <a:p>
+            <a:pPr indent="0" marL="0">
+              <a:buNone/>
+            </a:pPr>
+            <a:r>
+              <a:rPr lang="en-US" sz="900" dirty="0">
+                <a:solidFill>
+                  <a:srgbClr val="C0C8D8"/>
+                </a:solidFill>
+              </a:rPr>
+              <a:t>Per-security and portfolio beta (the regression slope) and annualised Jensen alpha, with R².</a:t>
+            </a:r>
+            <a:endParaRPr lang="en-US" sz="900" dirty="0"/>
+          </a:p>
+        </p:txBody>
+      </p:sp>
+      <p:sp>
+        <p:nvSpPr>
+          <p:cNvPr id="26" name="Shape 24"/>
+          <p:cNvSpPr/>
+          <p:nvPr/>
+        </p:nvSpPr>
+        <p:spPr>
+          <a:xfrm>
+            <a:off x="548640" y="3886200"/>
+            <a:ext cx="502920" cy="292608"/>
+          </a:xfrm>
+          <a:prstGeom prst="roundRect">
+            <a:avLst>
+              <a:gd name="adj" fmla="val 18750"/>
+            </a:avLst>
+          </a:prstGeom>
+          <a:solidFill>
+            <a:srgbClr val="1A6BBF"/>
+          </a:solidFill>
+          <a:ln w="12700">
+            <a:solidFill>
+              <a:srgbClr val="1A6BBF"/>
+            </a:solidFill>
+            <a:prstDash val="solid"/>
+          </a:ln>
+        </p:spPr>
+        <p:txBody>
+          <a:bodyPr/>
+          <a:p/>
+        </p:txBody>
+      </p:sp>
+      <p:sp>
+        <p:nvSpPr>
+          <p:cNvPr id="27" name="Text 25"/>
+          <p:cNvSpPr/>
+          <p:nvPr/>
+        </p:nvSpPr>
+        <p:spPr>
+          <a:xfrm>
+            <a:off x="548640" y="3886200"/>
+            <a:ext cx="502920" cy="292608"/>
+          </a:xfrm>
+          <a:prstGeom prst="rect">
+            <a:avLst/>
+          </a:prstGeom>
+          <a:noFill/>
+          <a:ln/>
+        </p:spPr>
+        <p:txBody>
+          <a:bodyPr wrap="square" lIns="0" tIns="0" rIns="0" bIns="0" rtlCol="0" anchor="ctr"/>
+          <a:lstStyle/>
+          <a:p>
+            <a:pPr algn="ctr" indent="0" marL="0">
+              <a:buNone/>
+            </a:pPr>
+            <a:r>
+              <a:rPr lang="en-US" sz="1100" b="1" dirty="0">
+                <a:solidFill>
+                  <a:srgbClr val="FFFFFF"/>
+                </a:solidFill>
+              </a:rPr>
+              <a:t>3</a:t>
+            </a:r>
+            <a:endParaRPr lang="en-US" sz="1100" dirty="0"/>
+          </a:p>
+        </p:txBody>
+      </p:sp>
+      <p:sp>
+        <p:nvSpPr>
+          <p:cNvPr id="28" name="Text 26"/>
+          <p:cNvSpPr/>
+          <p:nvPr/>
+        </p:nvSpPr>
+        <p:spPr>
+          <a:xfrm>
+            <a:off x="1143000" y="3886200"/>
+            <a:ext cx="2194560" cy="292608"/>
+          </a:xfrm>
+          <a:prstGeom prst="rect">
+            <a:avLst/>
+          </a:prstGeom>
+          <a:noFill/>
+          <a:ln/>
+        </p:spPr>
+        <p:txBody>
+          <a:bodyPr wrap="square" lIns="0" tIns="0" rIns="0" bIns="0" rtlCol="0" anchor="ctr"/>
+          <a:lstStyle/>
+          <a:p>
+            <a:pPr indent="0" marL="0">
+              <a:buNone/>
+            </a:pPr>
+            <a:r>
+              <a:rPr lang="en-US" sz="950" b="1" dirty="0">
+                <a:solidFill>
+                  <a:srgbClr val="E76F51"/>
+                </a:solidFill>
+              </a:rPr>
+              <a:t>Optional CAPM:</a:t>
+            </a:r>
+            <a:endParaRPr lang="en-US" sz="950" dirty="0"/>
+          </a:p>
+        </p:txBody>
+      </p:sp>
+      <p:sp>
+        <p:nvSpPr>
+          <p:cNvPr id="29" name="Text 27"/>
+          <p:cNvSpPr/>
+          <p:nvPr/>
+        </p:nvSpPr>
+        <p:spPr>
+          <a:xfrm>
+            <a:off x="3383280" y="3886200"/>
+            <a:ext cx="5212080" cy="292608"/>
+          </a:xfrm>
+          <a:prstGeom prst="rect">
+            <a:avLst/>
+          </a:prstGeom>
+          <a:noFill/>
+          <a:ln/>
+        </p:spPr>
+        <p:txBody>
+          <a:bodyPr wrap="square" lIns="0" tIns="0" rIns="0" bIns="0" rtlCol="0" anchor="ctr"/>
+          <a:lstStyle/>
+          <a:p>
+            <a:pPr indent="0" marL="0">
+              <a:buNone/>
+            </a:pPr>
+            <a:r>
+              <a:rPr lang="en-US" sz="900" dirty="0">
+                <a:solidFill>
+                  <a:srgbClr val="C0C8D8"/>
+                </a:solidFill>
+              </a:rPr>
+              <a:t>Enter an expected market return E[Rm] to add a CAPM required return and an ex-ante alpha.</a:t>
+            </a:r>
+            <a:endParaRPr lang="en-US" sz="900" dirty="0"/>
+          </a:p>
+        </p:txBody>
+      </p:sp>
+      <p:sp>
+        <p:nvSpPr>
+          <p:cNvPr id="30" name="Text 28"/>
+          <p:cNvSpPr/>
+          <p:nvPr/>
+        </p:nvSpPr>
+        <p:spPr>
+          <a:xfrm>
+            <a:off x="8046720" y="4754880"/>
+            <a:ext cx="914400" cy="274320"/>
+          </a:xfrm>
+          <a:prstGeom prst="rect">
+            <a:avLst/>
+          </a:prstGeom>
+          <a:noFill/>
+          <a:ln/>
+        </p:spPr>
+        <p:txBody>
+          <a:bodyPr wrap="square" rtlCol="0" anchor="ctr"/>
+          <a:lstStyle/>
+          <a:p>
+            <a:pPr algn="r" indent="0" marL="0">
+              <a:buNone/>
+            </a:pPr>
+            <a:r>
+              <a:rPr lang="en-US" sz="900" dirty="0">
+                <a:solidFill>
+                  <a:srgbClr val="556A8A"/>
+                </a:solidFill>
+              </a:rPr>
+              <a:t>13 / 15</a:t>
+            </a:r>
+            <a:endParaRPr lang="en-US" sz="900" dirty="0"/>
+          </a:p>
+        </p:txBody>
+      </p:sp>
+      <p:sp>
+        <p:nvSpPr>
+          <p:cNvPr id="31" name="Text 29"/>
           <p:cNvSpPr/>
           <p:nvPr/>
         </p:nvSpPr>
@@ -4061,7 +7314,7 @@
                   <a:srgbClr val="FFFFFF"/>
                 </a:solidFill>
               </a:rPr>
-              <a:t>Overview</a:t>
+              <a:t>Exact Portfolio Optimiser — overview</a:t>
             </a:r>
             <a:endParaRPr lang="en-US" sz="2600" dirty="0"/>
           </a:p>
@@ -4313,7 +7566,7 @@
                   <a:srgbClr val="4A9EFF"/>
                 </a:solidFill>
               </a:rPr>
-              <a:t>Four Portfolios</a:t>
+              <a:t>Three Portfolios</a:t>
             </a:r>
             <a:endParaRPr lang="en-US" sz="1100" dirty="0"/>
           </a:p>
@@ -4349,7 +7602,7 @@
                   <a:srgbClr val="C0C8D8"/>
                 </a:solidFill>
               </a:rPr>
-              <a:t>Markowitz MV / no-derivative / with-derivative / same-risk — four portfolios per run</a:t>
+              <a:t>No derivative / With derivative / Same risk — three perspectives for each optimisation run</a:t>
             </a:r>
             <a:endParaRPr lang="en-US" sz="950" dirty="0"/>
           </a:p>
@@ -4508,7 +7761,7 @@
         <p:spPr>
           <a:xfrm>
             <a:off x="365760" y="2834640"/>
-            <a:ext cx="8412480" cy="1725360"/>
+            <a:ext cx="8412480" cy="1580000"/>
           </a:xfrm>
           <a:prstGeom prst="rect">
             <a:avLst/>
@@ -4558,7 +7811,7 @@
                   <a:srgbClr val="4A9EFF"/>
                 </a:solidFill>
               </a:rPr>
-              <a:t>Four Portfolio Perspectives</a:t>
+              <a:t>Portfolio perspectives (0–3)</a:t>
             </a:r>
             <a:endParaRPr lang="en-US" sz="1100" dirty="0"/>
           </a:p>
@@ -4572,7 +7825,7 @@
         </p:nvSpPr>
         <p:spPr>
           <a:xfrm>
-            <a:off x="548640" y="3547872"/>
+            <a:off x="548640" y="3510000"/>
             <a:ext cx="502920" cy="292608"/>
           </a:xfrm>
           <a:prstGeom prst="roundRect">
@@ -4603,7 +7856,7 @@
         </p:nvSpPr>
         <p:spPr>
           <a:xfrm>
-            <a:off x="548640" y="3547872"/>
+            <a:off x="548640" y="3510000"/>
             <a:ext cx="502920" cy="292608"/>
           </a:xfrm>
           <a:prstGeom prst="rect">
@@ -4639,7 +7892,7 @@
         </p:nvSpPr>
         <p:spPr>
           <a:xfrm>
-            <a:off x="1143000" y="3547872"/>
+            <a:off x="1143000" y="3510000"/>
             <a:ext cx="2194560" cy="292608"/>
           </a:xfrm>
           <a:prstGeom prst="rect">
@@ -4675,7 +7928,7 @@
         </p:nvSpPr>
         <p:spPr>
           <a:xfrm>
-            <a:off x="3383280" y="3547872"/>
+            <a:off x="3383280" y="3510000"/>
             <a:ext cx="5212080" cy="292608"/>
           </a:xfrm>
           <a:prstGeom prst="rect">
@@ -4711,7 +7964,7 @@
         </p:nvSpPr>
         <p:spPr>
           <a:xfrm>
-            <a:off x="548640" y="3886200"/>
+            <a:off x="548640" y="3810000"/>
             <a:ext cx="502920" cy="292608"/>
           </a:xfrm>
           <a:prstGeom prst="roundRect">
@@ -4742,7 +7995,7 @@
         </p:nvSpPr>
         <p:spPr>
           <a:xfrm>
-            <a:off x="548640" y="3886200"/>
+            <a:off x="548640" y="3810000"/>
             <a:ext cx="502920" cy="292608"/>
           </a:xfrm>
           <a:prstGeom prst="rect">
@@ -4778,7 +8031,7 @@
         </p:nvSpPr>
         <p:spPr>
           <a:xfrm>
-            <a:off x="1143000" y="3886200"/>
+            <a:off x="1143000" y="3810000"/>
             <a:ext cx="2194560" cy="292608"/>
           </a:xfrm>
           <a:prstGeom prst="rect">
@@ -4814,7 +8067,7 @@
         </p:nvSpPr>
         <p:spPr>
           <a:xfrm>
-            <a:off x="3383280" y="3886200"/>
+            <a:off x="3383280" y="3810000"/>
             <a:ext cx="5212080" cy="292608"/>
           </a:xfrm>
           <a:prstGeom prst="rect">
@@ -4850,7 +8103,7 @@
         </p:nvSpPr>
         <p:spPr>
           <a:xfrm>
-            <a:off x="548640" y="4224528"/>
+            <a:off x="548640" y="4110000"/>
             <a:ext cx="502920" cy="292608"/>
           </a:xfrm>
           <a:prstGeom prst="roundRect">
@@ -4881,7 +8134,7 @@
         </p:nvSpPr>
         <p:spPr>
           <a:xfrm>
-            <a:off x="548640" y="4224528"/>
+            <a:off x="548640" y="4110000"/>
             <a:ext cx="502920" cy="292608"/>
           </a:xfrm>
           <a:prstGeom prst="rect">
@@ -4917,7 +8170,7 @@
         </p:nvSpPr>
         <p:spPr>
           <a:xfrm>
-            <a:off x="1143000" y="4224528"/>
+            <a:off x="1143000" y="4110000"/>
             <a:ext cx="2194560" cy="292608"/>
           </a:xfrm>
           <a:prstGeom prst="rect">
@@ -4953,7 +8206,7 @@
         </p:nvSpPr>
         <p:spPr>
           <a:xfrm>
-            <a:off x="3383280" y="4224528"/>
+            <a:off x="3383280" y="4110000"/>
             <a:ext cx="5212080" cy="292608"/>
           </a:xfrm>
           <a:prstGeom prst="rect">
@@ -5011,7 +8264,7 @@
                   <a:srgbClr val="556A8A"/>
                 </a:solidFill>
               </a:rPr>
-              <a:t>2 / 12</a:t>
+              <a:t>3 / 15</a:t>
             </a:r>
             <a:endParaRPr lang="en-US" sz="900" dirty="0"/>
           </a:p>
@@ -5055,145 +8308,140 @@
       </p:sp>
       <p:sp>
         <p:nvSpPr>
-          <p:cNvPr id="32" name="Rectangle 31"/>
-          <p:cNvSpPr/>
-          <p:nvPr/>
-        </p:nvSpPr>
-        <p:spPr>
-          <a:xfrm>
-            <a:off x="548640" y="3209544"/>
+          <p:cNvPr id="50" name="P0 badge"/>
+          <p:cNvSpPr/>
+          <p:nvPr/>
+        </p:nvSpPr>
+        <p:spPr>
+          <a:xfrm>
+            <a:off x="548640" y="3210000"/>
             <a:ext cx="502920" cy="292608"/>
           </a:xfrm>
-          <a:prstGeom prst="rect">
-            <a:avLst/>
+          <a:prstGeom prst="roundRect">
+            <a:avLst>
+              <a:gd name="adj" fmla="val 18750"/>
+            </a:avLst>
           </a:prstGeom>
           <a:solidFill>
             <a:srgbClr val="1A6BBF"/>
           </a:solidFill>
-          <a:ln>
-            <a:noFill/>
+          <a:ln w="12700">
+            <a:solidFill>
+              <a:srgbClr val="1A6BBF"/>
+            </a:solidFill>
+            <a:prstDash val="solid"/>
           </a:ln>
-          <a:effectLst/>
-        </p:spPr>
-        <p:style>
-          <a:lnRef idx="1">
-            <a:schemeClr val="accent1"/>
-          </a:lnRef>
-          <a:fillRef idx="3">
-            <a:schemeClr val="accent1"/>
-          </a:fillRef>
-          <a:effectRef idx="2">
-            <a:schemeClr val="accent1"/>
-          </a:effectRef>
-          <a:fontRef idx="minor">
-            <a:schemeClr val="lt1"/>
-          </a:fontRef>
-        </p:style>
-        <p:txBody>
-          <a:bodyPr rtlCol="0" anchor="ctr"/>
-          <a:lstStyle/>
-          <a:p>
-            <a:pPr algn="ctr"/>
-          </a:p>
-        </p:txBody>
-      </p:sp>
-      <p:sp>
-        <p:nvSpPr>
-          <p:cNvPr id="33" name="TextBox 32"/>
-          <p:cNvSpPr txBox="1"/>
-          <p:nvPr/>
-        </p:nvSpPr>
-        <p:spPr>
-          <a:xfrm>
-            <a:off x="548640" y="3209544"/>
+        </p:spPr>
+        <p:txBody>
+          <a:bodyPr/>
+          <a:p/>
+        </p:txBody>
+      </p:sp>
+      <p:sp>
+        <p:nvSpPr>
+          <p:cNvPr id="51" name="P0 num"/>
+          <p:cNvSpPr/>
+          <p:nvPr/>
+        </p:nvSpPr>
+        <p:spPr>
+          <a:xfrm>
+            <a:off x="548640" y="3210000"/>
             <a:ext cx="502920" cy="292608"/>
           </a:xfrm>
           <a:prstGeom prst="rect">
             <a:avLst/>
           </a:prstGeom>
           <a:noFill/>
-        </p:spPr>
-        <p:txBody>
-          <a:bodyPr wrap="square" lIns="0" rIns="0" tIns="0" bIns="0" anchor="ctr">
-            <a:spAutoFit/>
-          </a:bodyPr>
-          <a:lstStyle/>
-          <a:p>
-            <a:pPr algn="ctr"/>
-            <a:r>
-              <a:rPr sz="1100" b="1">
+          <a:ln/>
+        </p:spPr>
+        <p:txBody>
+          <a:bodyPr wrap="square" lIns="0" tIns="0" rIns="0" bIns="0" rtlCol="0" anchor="ctr"/>
+          <a:lstStyle/>
+          <a:p>
+            <a:pPr algn="ctr" indent="0" marL="0">
+              <a:buNone/>
+            </a:pPr>
+            <a:r>
+              <a:rPr lang="en-US" sz="1100" b="1" dirty="0">
                 <a:solidFill>
                   <a:srgbClr val="FFFFFF"/>
                 </a:solidFill>
               </a:rPr>
               <a:t>0</a:t>
             </a:r>
-          </a:p>
-        </p:txBody>
-      </p:sp>
-      <p:sp>
-        <p:nvSpPr>
-          <p:cNvPr id="34" name="TextBox 33"/>
-          <p:cNvSpPr txBox="1"/>
-          <p:nvPr/>
-        </p:nvSpPr>
-        <p:spPr>
-          <a:xfrm>
-            <a:off x="1143000" y="3209544"/>
+            <a:endParaRPr lang="en-US" sz="1100" dirty="0"/>
+          </a:p>
+        </p:txBody>
+      </p:sp>
+      <p:sp>
+        <p:nvSpPr>
+          <p:cNvPr id="52" name="P0 label"/>
+          <p:cNvSpPr/>
+          <p:nvPr/>
+        </p:nvSpPr>
+        <p:spPr>
+          <a:xfrm>
+            <a:off x="1143000" y="3210000"/>
             <a:ext cx="2194560" cy="292608"/>
           </a:xfrm>
           <a:prstGeom prst="rect">
             <a:avLst/>
           </a:prstGeom>
           <a:noFill/>
-        </p:spPr>
-        <p:txBody>
-          <a:bodyPr wrap="square" lIns="0" rIns="0" tIns="0" bIns="0" anchor="ctr">
-            <a:spAutoFit/>
-          </a:bodyPr>
-          <a:lstStyle/>
-          <a:p>
-            <a:r>
-              <a:rPr sz="950" b="1">
+          <a:ln/>
+        </p:spPr>
+        <p:txBody>
+          <a:bodyPr wrap="square" lIns="0" tIns="0" rIns="0" bIns="0" rtlCol="0" anchor="ctr"/>
+          <a:lstStyle/>
+          <a:p>
+            <a:pPr indent="0" marL="0">
+              <a:buNone/>
+            </a:pPr>
+            <a:r>
+              <a:rPr lang="en-US" sz="950" b="1" dirty="0">
                 <a:solidFill>
                   <a:srgbClr val="A855F7"/>
                 </a:solidFill>
               </a:rPr>
-              <a:t>Portfolio (0) — Markowitz MV:</a:t>
-            </a:r>
-          </a:p>
-        </p:txBody>
-      </p:sp>
-      <p:sp>
-        <p:nvSpPr>
-          <p:cNvPr id="35" name="TextBox 34"/>
-          <p:cNvSpPr txBox="1"/>
-          <p:nvPr/>
-        </p:nvSpPr>
-        <p:spPr>
-          <a:xfrm>
-            <a:off x="3383280" y="3209544"/>
+              <a:t>Portfolio (0) — Markowitz MV optimum:</a:t>
+            </a:r>
+            <a:endParaRPr lang="en-US" sz="950" dirty="0"/>
+          </a:p>
+        </p:txBody>
+      </p:sp>
+      <p:sp>
+        <p:nvSpPr>
+          <p:cNvPr id="53" name="P0 desc"/>
+          <p:cNvSpPr/>
+          <p:nvPr/>
+        </p:nvSpPr>
+        <p:spPr>
+          <a:xfrm>
+            <a:off x="3383280" y="3210000"/>
             <a:ext cx="5212080" cy="292608"/>
           </a:xfrm>
           <a:prstGeom prst="rect">
             <a:avLst/>
           </a:prstGeom>
           <a:noFill/>
-        </p:spPr>
-        <p:txBody>
-          <a:bodyPr wrap="square" lIns="0" rIns="0" tIns="0" bIns="0" anchor="ctr">
-            <a:spAutoFit/>
-          </a:bodyPr>
-          <a:lstStyle/>
-          <a:p>
-            <a:r>
-              <a:rPr sz="900" b="0">
+          <a:ln/>
+        </p:spPr>
+        <p:txBody>
+          <a:bodyPr wrap="square" lIns="0" tIns="0" rIns="0" bIns="0" rtlCol="0" anchor="ctr"/>
+          <a:lstStyle/>
+          <a:p>
+            <a:pPr indent="0" marL="0">
+              <a:buNone/>
+            </a:pPr>
+            <a:r>
+              <a:rPr lang="en-US" sz="900" dirty="0">
                 <a:solidFill>
                   <a:srgbClr val="C0C8D8"/>
                 </a:solidFill>
               </a:rPr>
-              <a:t>Min-variance portfolio at P(1)’s return — the MVT/MAT-equivalent Markowitz optimum.</a:t>
-            </a:r>
+              <a:t>Classical mean-variance solution; Portfolio (1) coincides with it.</a:t>
+            </a:r>
+            <a:endParaRPr lang="en-US" sz="900" dirty="0"/>
           </a:p>
         </p:txBody>
       </p:sp>
@@ -5795,7 +9043,7 @@
                   <a:srgbClr val="556A8A"/>
                 </a:solidFill>
               </a:rPr>
-              <a:t>3 / 12</a:t>
+              <a:t>4 / 15</a:t>
             </a:r>
             <a:endParaRPr lang="en-US" sz="900" dirty="0"/>
           </a:p>
@@ -6091,7 +9339,7 @@
                   <a:srgbClr val="4A9EFF"/>
                 </a:solidFill>
               </a:rPr>
-              <a:t>▸ </a:t>
+              <a:t xml:space="preserve">▸ </a:t>
             </a:r>
             <a:pPr indent="0" marL="0">
               <a:buNone/>
@@ -6102,7 +9350,7 @@
                   <a:srgbClr val="C0C8D8"/>
                 </a:solidFill>
               </a:rPr>
-              <a:t>Put option / Call option</a:t>
+              <a:t>Vanilla options — put, call</a:t>
             </a:r>
             <a:endParaRPr lang="en-US" sz="950" dirty="0"/>
           </a:p>
@@ -6138,7 +9386,7 @@
                   <a:srgbClr val="4A9EFF"/>
                 </a:solidFill>
               </a:rPr>
-              <a:t>▸ </a:t>
+              <a:t xml:space="preserve">▸ </a:t>
             </a:r>
             <a:pPr indent="0" marL="0">
               <a:buNone/>
@@ -6149,7 +9397,7 @@
                   <a:srgbClr val="C0C8D8"/>
                 </a:solidFill>
               </a:rPr>
-              <a:t>Safety collar (long put + short call)</a:t>
+              <a:t>Collars — safety, aggressive</a:t>
             </a:r>
             <a:endParaRPr lang="en-US" sz="950" dirty="0"/>
           </a:p>
@@ -6185,7 +9433,7 @@
                   <a:srgbClr val="4A9EFF"/>
                 </a:solidFill>
               </a:rPr>
-              <a:t>▸ </a:t>
+              <a:t xml:space="preserve">▸ </a:t>
             </a:r>
             <a:pPr indent="0" marL="0">
               <a:buNone/>
@@ -6196,7 +9444,7 @@
                   <a:srgbClr val="C0C8D8"/>
                 </a:solidFill>
               </a:rPr>
-              <a:t>Aggressive collar (long call + short put)</a:t>
+              <a:t>Volatility — straddle, strangle</a:t>
             </a:r>
             <a:endParaRPr lang="en-US" sz="950" dirty="0"/>
           </a:p>
@@ -6232,7 +9480,7 @@
                   <a:srgbClr val="4A9EFF"/>
                 </a:solidFill>
               </a:rPr>
-              <a:t>▸ </a:t>
+              <a:t xml:space="preserve">▸ </a:t>
             </a:r>
             <a:pPr indent="0" marL="0">
               <a:buNone/>
@@ -6243,7 +9491,7 @@
                   <a:srgbClr val="C0C8D8"/>
                 </a:solidFill>
               </a:rPr>
-              <a:t>Straddle (long call + long put)</a:t>
+              <a:t>Spreads — bull call, bear put</a:t>
             </a:r>
             <a:endParaRPr lang="en-US" sz="950" dirty="0"/>
           </a:p>
@@ -6279,7 +9527,7 @@
                   <a:srgbClr val="4A9EFF"/>
                 </a:solidFill>
               </a:rPr>
-              <a:t>▸ </a:t>
+              <a:t xml:space="preserve">▸ </a:t>
             </a:r>
             <a:pPr indent="0" marL="0">
               <a:buNone/>
@@ -6290,7 +9538,7 @@
                   <a:srgbClr val="C0C8D8"/>
                 </a:solidFill>
               </a:rPr>
-              <a:t>Strangle (long call + long put, diff strikes)</a:t>
+              <a:t>Butterfly &amp; condor — long butterfly, call condor</a:t>
             </a:r>
             <a:endParaRPr lang="en-US" sz="950" dirty="0"/>
           </a:p>
@@ -6326,7 +9574,7 @@
                   <a:srgbClr val="4A9EFF"/>
                 </a:solidFill>
               </a:rPr>
-              <a:t>▸ </a:t>
+              <a:t xml:space="preserve">▸ </a:t>
             </a:r>
             <a:pPr indent="0" marL="0">
               <a:buNone/>
@@ -6337,7 +9585,7 @@
                   <a:srgbClr val="C0C8D8"/>
                 </a:solidFill>
               </a:rPr>
-              <a:t>Capital-guaranteed note (capped or uncapped)</a:t>
+              <a:t>Capital-guaranteed note — capped or uncapped</a:t>
             </a:r>
             <a:endParaRPr lang="en-US" sz="950" dirty="0"/>
           </a:p>
@@ -6373,7 +9621,7 @@
                   <a:srgbClr val="4A9EFF"/>
                 </a:solidFill>
               </a:rPr>
-              <a:t>▸ </a:t>
+              <a:t xml:space="preserve">▸ </a:t>
             </a:r>
             <a:pPr indent="0" marL="0">
               <a:buNone/>
@@ -6384,7 +9632,7 @@
                   <a:srgbClr val="C0C8D8"/>
                 </a:solidFill>
               </a:rPr>
-              <a:t>Barrier-M note</a:t>
+              <a:t>Barrier-M note &amp; reverse convertible</a:t>
             </a:r>
             <a:endParaRPr lang="en-US" sz="950" dirty="0"/>
           </a:p>
@@ -6420,7 +9668,7 @@
                   <a:srgbClr val="4A9EFF"/>
                 </a:solidFill>
               </a:rPr>
-              <a:t>▸ </a:t>
+              <a:t xml:space="preserve">▸ </a:t>
             </a:r>
             <a:pPr indent="0" marL="0">
               <a:buNone/>
@@ -6431,7 +9679,7 @@
                   <a:srgbClr val="C0C8D8"/>
                 </a:solidFill>
               </a:rPr>
-              <a:t>Custom composer (calls, puts, digitals, ZCBs)</a:t>
+              <a:t>Discount &amp; outperformance certificates</a:t>
             </a:r>
             <a:endParaRPr lang="en-US" sz="950" dirty="0"/>
           </a:p>
@@ -6496,7 +9744,7 @@
                   <a:srgbClr val="10B981"/>
                 </a:solidFill>
               </a:rPr>
-              <a:t>💡  Select 'None' to optimise without derivatives — Portfolio (1) only</a:t>
+              <a:t>💡  Select 'None' for no derivatives, or 'Custom' to build your own (calls, puts, digitals, ZCBs).</a:t>
             </a:r>
             <a:endParaRPr lang="en-US" sz="900" dirty="0"/>
           </a:p>
@@ -6532,7 +9780,7 @@
                   <a:srgbClr val="556A8A"/>
                 </a:solidFill>
               </a:rPr>
-              <a:t>4 / 12</a:t>
+              <a:t>5 / 15</a:t>
             </a:r>
             <a:endParaRPr lang="en-US" sz="900" dirty="0"/>
           </a:p>
@@ -6732,7 +9980,7 @@
           <a:ln/>
         </p:spPr>
         <p:txBody>
-          <a:bodyPr wrap="square" lIns="0" tIns="0" rIns="0" bIns="0" rtlCol="0" anchor="ctr"/>
+          <a:bodyPr wrap="square" rtlCol="0" anchor="ctr"/>
           <a:lstStyle/>
           <a:p>
             <a:pPr algn="ctr" indent="0" marL="0">
@@ -6768,7 +10016,7 @@
           <a:ln/>
         </p:spPr>
         <p:txBody>
-          <a:bodyPr wrap="square" lIns="0" tIns="0" rIns="0" bIns="0" rtlCol="0" anchor="ctr"/>
+          <a:bodyPr wrap="square" rtlCol="0" anchor="ctr"/>
           <a:lstStyle/>
           <a:p>
             <a:pPr indent="0" marL="0">
@@ -6795,7 +10043,7 @@
         <p:spPr>
           <a:xfrm>
             <a:off x="4251960" y="749808"/>
-            <a:ext cx="4572000" cy="1371600"/>
+            <a:ext cx="4572000" cy="920000"/>
           </a:xfrm>
           <a:prstGeom prst="rect">
             <a:avLst/>
@@ -6823,7 +10071,7 @@
         </p:nvSpPr>
         <p:spPr>
           <a:xfrm>
-            <a:off x="4434840" y="804672"/>
+            <a:off x="4434840" y="794672"/>
             <a:ext cx="4206240" cy="292608"/>
           </a:xfrm>
           <a:prstGeom prst="rect">
@@ -6859,7 +10107,7 @@
         </p:nvSpPr>
         <p:spPr>
           <a:xfrm>
-            <a:off x="4434840" y="1097280"/>
+            <a:off x="4434840" y="1061280"/>
             <a:ext cx="4206240" cy="256032"/>
           </a:xfrm>
           <a:prstGeom prst="rect">
@@ -6895,8 +10143,8 @@
         </p:nvSpPr>
         <p:spPr>
           <a:xfrm>
-            <a:off x="4434840" y="1371600"/>
-            <a:ext cx="4206240" cy="640080"/>
+            <a:off x="4434840" y="1319808"/>
+            <a:ext cx="4206240" cy="256032"/>
           </a:xfrm>
           <a:prstGeom prst="rect">
             <a:avLst/>
@@ -6917,24 +10165,10 @@
                   <a:srgbClr val="C0C8D8"/>
                 </a:solidFill>
               </a:rPr>
-              <a:t>The probability of the portfolio return falling below threshold H must not exceed α.</a:t>
+              <a:t>Caps the probability of finishing below H at α.</a:t>
             </a:r>
             <a:endParaRPr lang="en-US" sz="900" dirty="0"/>
           </a:p>
-          <a:p>
-            <a:pPr indent="0" marL="0">
-              <a:buNone/>
-            </a:pPr>
-            <a:r>
-              <a:rPr lang="en-US" sz="900" dirty="0">
-                <a:solidFill>
-                  <a:srgbClr val="C0C8D8"/>
-                </a:solidFill>
-              </a:rPr>
-              <a:t>Set H (loss threshold) and α (max probability) using the sliders.</a:t>
-            </a:r>
-            <a:endParaRPr lang="en-US" sz="900" dirty="0"/>
-          </a:p>
         </p:txBody>
       </p:sp>
       <p:sp>
@@ -6945,8 +10179,8 @@
         </p:nvSpPr>
         <p:spPr>
           <a:xfrm>
-            <a:off x="4251960" y="2240280"/>
-            <a:ext cx="4572000" cy="1371600"/>
+            <a:off x="4251960" y="1729808"/>
+            <a:ext cx="4572000" cy="920000"/>
           </a:xfrm>
           <a:prstGeom prst="rect">
             <a:avLst/>
@@ -6974,7 +10208,7 @@
         </p:nvSpPr>
         <p:spPr>
           <a:xfrm>
-            <a:off x="4434840" y="2295144"/>
+            <a:off x="4434840" y="1774672"/>
             <a:ext cx="4206240" cy="292608"/>
           </a:xfrm>
           <a:prstGeom prst="rect">
@@ -7010,7 +10244,7 @@
         </p:nvSpPr>
         <p:spPr>
           <a:xfrm>
-            <a:off x="4434840" y="2587752"/>
+            <a:off x="4434840" y="2041280"/>
             <a:ext cx="4206240" cy="256032"/>
           </a:xfrm>
           <a:prstGeom prst="rect">
@@ -7046,8 +10280,8 @@
         </p:nvSpPr>
         <p:spPr>
           <a:xfrm>
-            <a:off x="4434840" y="2862072"/>
-            <a:ext cx="4206240" cy="640080"/>
+            <a:off x="4434840" y="2299808"/>
+            <a:ext cx="4206240" cy="256032"/>
           </a:xfrm>
           <a:prstGeom prst="rect">
             <a:avLst/>
@@ -7068,24 +10302,10 @@
                   <a:srgbClr val="C0C8D8"/>
                 </a:solidFill>
               </a:rPr>
-              <a:t>Expected loss in the worst tail below H must be at least L.</a:t>
+              <a:t>Floors the average tail loss below H at L (thesis).</a:t>
             </a:r>
             <a:endParaRPr lang="en-US" sz="900" dirty="0"/>
           </a:p>
-          <a:p>
-            <a:pPr indent="0" marL="0">
-              <a:buNone/>
-            </a:pPr>
-            <a:r>
-              <a:rPr lang="en-US" sz="900" dirty="0">
-                <a:solidFill>
-                  <a:srgbClr val="C0C8D8"/>
-                </a:solidFill>
-              </a:rPr>
-              <a:t>Two modes: thesis-faithful (default) reproduces the original; Rigorous-ES truly maximises E[r] s.t. ES ≥ L.</a:t>
-            </a:r>
-            <a:endParaRPr lang="en-US" sz="900" dirty="0"/>
-          </a:p>
         </p:txBody>
       </p:sp>
       <p:sp>
@@ -7096,7 +10316,7 @@
         </p:nvSpPr>
         <p:spPr>
           <a:xfrm>
-            <a:off x="4251960" y="3730752"/>
+            <a:off x="4251960" y="3689808"/>
             <a:ext cx="4572000" cy="658368"/>
           </a:xfrm>
           <a:prstGeom prst="rect">
@@ -7125,7 +10345,7 @@
         </p:nvSpPr>
         <p:spPr>
           <a:xfrm>
-            <a:off x="4343400" y="3730752"/>
+            <a:off x="4343400" y="3689808"/>
             <a:ext cx="4389120" cy="658368"/>
           </a:xfrm>
           <a:prstGeom prst="rect">
@@ -7135,7 +10355,7 @@
           <a:ln/>
         </p:spPr>
         <p:txBody>
-          <a:bodyPr wrap="square" rtlCol="0" anchor="ctr"/>
+          <a:bodyPr wrap="square" lIns="0" tIns="0" rIns="0" bIns="0" rtlCol="0" anchor="ctr"/>
           <a:lstStyle/>
           <a:p>
             <a:pPr indent="0" marL="0">
@@ -7183,7 +10403,7 @@
                   <a:srgbClr val="556A8A"/>
                 </a:solidFill>
               </a:rPr>
-              <a:t>5 / 12</a:t>
+              <a:t>6 / 15</a:t>
             </a:r>
             <a:endParaRPr lang="en-US" sz="900" dirty="0"/>
           </a:p>
@@ -7242,13 +10462,150 @@
         <p:spPr>
           <a:xfrm>
             <a:off x="1246830" y="749808"/>
-            <a:ext cx="1895459" cy="3657600"/>
+            <a:ext cx="1895459" cy="3816418"/>
           </a:xfrm>
           <a:prstGeom prst="rect">
             <a:avLst/>
           </a:prstGeom>
         </p:spPr>
       </p:pic>
+      <p:sp>
+        <p:nvSpPr>
+          <p:cNvPr id="60" name="Rig box"/>
+          <p:cNvSpPr/>
+          <p:nvPr/>
+        </p:nvSpPr>
+        <p:spPr>
+          <a:xfrm>
+            <a:off x="4251960" y="2709808"/>
+            <a:ext cx="4572000" cy="920000"/>
+          </a:xfrm>
+          <a:prstGeom prst="rect">
+            <a:avLst/>
+          </a:prstGeom>
+          <a:solidFill>
+            <a:srgbClr val="0D1A2E"/>
+          </a:solidFill>
+          <a:ln w="12700">
+            <a:solidFill>
+              <a:srgbClr val="1A6BBF"/>
+            </a:solidFill>
+            <a:prstDash val="solid"/>
+          </a:ln>
+        </p:spPr>
+        <p:txBody>
+          <a:bodyPr/>
+          <a:p/>
+        </p:txBody>
+      </p:sp>
+      <p:sp>
+        <p:nvSpPr>
+          <p:cNvPr id="61" name="Rig hdr"/>
+          <p:cNvSpPr/>
+          <p:nvPr/>
+        </p:nvSpPr>
+        <p:spPr>
+          <a:xfrm>
+            <a:off x="4434840" y="2754672"/>
+            <a:ext cx="4206240" cy="292608"/>
+          </a:xfrm>
+          <a:prstGeom prst="rect">
+            <a:avLst/>
+          </a:prstGeom>
+          <a:noFill/>
+          <a:ln/>
+        </p:spPr>
+        <p:txBody>
+          <a:bodyPr wrap="square" lIns="0" tIns="0" rIns="0" bIns="0" rtlCol="0" anchor="ctr"/>
+          <a:lstStyle/>
+          <a:p>
+            <a:pPr indent="0" marL="0">
+              <a:buNone/>
+            </a:pPr>
+            <a:r>
+              <a:rPr lang="en-US" sz="1100" b="1" dirty="0">
+                <a:solidFill>
+                  <a:srgbClr val="4A9EFF"/>
+                </a:solidFill>
+              </a:rPr>
+              <a:t>ES — Rigorous (beyond thesis)</a:t>
+            </a:r>
+            <a:endParaRPr lang="en-US" sz="1100" dirty="0"/>
+          </a:p>
+        </p:txBody>
+      </p:sp>
+      <p:sp>
+        <p:nvSpPr>
+          <p:cNvPr id="62" name="Rig formula"/>
+          <p:cNvSpPr/>
+          <p:nvPr/>
+        </p:nvSpPr>
+        <p:spPr>
+          <a:xfrm>
+            <a:off x="4434840" y="3021280"/>
+            <a:ext cx="4206240" cy="256032"/>
+          </a:xfrm>
+          <a:prstGeom prst="rect">
+            <a:avLst/>
+          </a:prstGeom>
+          <a:noFill/>
+          <a:ln/>
+        </p:spPr>
+        <p:txBody>
+          <a:bodyPr wrap="square" lIns="0" tIns="0" rIns="0" bIns="0" rtlCol="0" anchor="ctr"/>
+          <a:lstStyle/>
+          <a:p>
+            <a:pPr indent="0" marL="0">
+              <a:buNone/>
+            </a:pPr>
+            <a:r>
+              <a:rPr lang="en-US" sz="1100" i="1" dirty="0">
+                <a:solidFill>
+                  <a:srgbClr val="F59E0B"/>
+                </a:solidFill>
+              </a:rPr>
+              <a:t>E[r | r &lt; H] ≥ L  (enforced in the solve)</a:t>
+            </a:r>
+            <a:endParaRPr lang="en-US" sz="1100" dirty="0"/>
+          </a:p>
+        </p:txBody>
+      </p:sp>
+      <p:sp>
+        <p:nvSpPr>
+          <p:cNvPr id="63" name="Rig desc"/>
+          <p:cNvSpPr/>
+          <p:nvPr/>
+        </p:nvSpPr>
+        <p:spPr>
+          <a:xfrm>
+            <a:off x="4434840" y="3279808"/>
+            <a:ext cx="4206240" cy="256032"/>
+          </a:xfrm>
+          <a:prstGeom prst="rect">
+            <a:avLst/>
+          </a:prstGeom>
+          <a:noFill/>
+          <a:ln/>
+        </p:spPr>
+        <p:txBody>
+          <a:bodyPr wrap="square" lIns="0" tIns="0" rIns="0" bIns="0" rtlCol="0" anchor="ctr"/>
+          <a:lstStyle/>
+          <a:p>
+            <a:pPr indent="0" marL="0">
+              <a:buNone/>
+            </a:pPr>
+            <a:r>
+              <a:rPr lang="en-US" sz="900" dirty="0">
+                <a:solidFill>
+                  <a:srgbClr val="C0C8D8"/>
+                </a:solidFill>
+              </a:rPr>
+              <a:t>Enforces the ES floor in the optimisation itself.</a:t>
+            </a:r>
+            <a:endParaRPr lang="en-US" sz="900" dirty="0"/>
+          </a:p>
+        </p:txBody>
+      </p:sp>
     </p:spTree>
   </p:cSld>
   <p:clrMapOvr>
@@ -7421,8 +10778,8 @@
         </p:nvSpPr>
         <p:spPr>
           <a:xfrm>
-            <a:off x="4251960" y="1700000"/>
-            <a:ext cx="4572000" cy="900000"/>
+            <a:off x="4251960" y="804672"/>
+            <a:ext cx="4572000" cy="1051560"/>
           </a:xfrm>
           <a:prstGeom prst="rect">
             <a:avLst/>
@@ -7450,7 +10807,7 @@
         </p:nvSpPr>
         <p:spPr>
           <a:xfrm>
-            <a:off x="4434840" y="1764000"/>
+            <a:off x="4434840" y="877824"/>
             <a:ext cx="4206240" cy="292608"/>
           </a:xfrm>
           <a:prstGeom prst="rect">
@@ -7486,7 +10843,7 @@
         </p:nvSpPr>
         <p:spPr>
           <a:xfrm>
-            <a:off x="4434840" y="2060000"/>
+            <a:off x="4434840" y="1188720"/>
             <a:ext cx="4206240" cy="228600"/>
           </a:xfrm>
           <a:prstGeom prst="rect">
@@ -7508,7 +10865,7 @@
                   <a:srgbClr val="556A8A"/>
                 </a:solidFill>
               </a:rPr>
-              <a:t>⏱ ~1–2 min</a:t>
+              <a:t>⏱ ~1–2 min (or more depending on the portfolio size)</a:t>
             </a:r>
             <a:endParaRPr lang="en-US" sz="950" dirty="0"/>
           </a:p>
@@ -7522,8 +10879,8 @@
         </p:nvSpPr>
         <p:spPr>
           <a:xfrm>
-            <a:off x="4434840" y="2300000"/>
-            <a:ext cx="4206240" cy="280000"/>
+            <a:off x="4434840" y="1426464"/>
+            <a:ext cx="4206240" cy="320040"/>
           </a:xfrm>
           <a:prstGeom prst="rect">
             <a:avLst/>
@@ -7558,8 +10915,8 @@
         </p:nvSpPr>
         <p:spPr>
           <a:xfrm>
-            <a:off x="4251960" y="2660000"/>
-            <a:ext cx="4572000" cy="900000"/>
+            <a:off x="4251960" y="1975104"/>
+            <a:ext cx="4572000" cy="1051560"/>
           </a:xfrm>
           <a:prstGeom prst="rect">
             <a:avLst/>
@@ -7587,7 +10944,7 @@
         </p:nvSpPr>
         <p:spPr>
           <a:xfrm>
-            <a:off x="4434840" y="2724000"/>
+            <a:off x="4434840" y="2048256"/>
             <a:ext cx="4206240" cy="292608"/>
           </a:xfrm>
           <a:prstGeom prst="rect">
@@ -7623,7 +10980,7 @@
         </p:nvSpPr>
         <p:spPr>
           <a:xfrm>
-            <a:off x="4434840" y="3020000"/>
+            <a:off x="4434840" y="2359152"/>
             <a:ext cx="4206240" cy="228600"/>
           </a:xfrm>
           <a:prstGeom prst="rect">
@@ -7645,7 +11002,7 @@
                   <a:srgbClr val="556A8A"/>
                 </a:solidFill>
               </a:rPr>
-              <a:t>⏱ ~5–15 min</a:t>
+              <a:t>⏱ ~5–15 min (or more depending on the portfolio size)</a:t>
             </a:r>
             <a:endParaRPr lang="en-US" sz="950" dirty="0"/>
           </a:p>
@@ -7659,8 +11016,8 @@
         </p:nvSpPr>
         <p:spPr>
           <a:xfrm>
-            <a:off x="4434840" y="3260000"/>
-            <a:ext cx="4206240" cy="280000"/>
+            <a:off x="4434840" y="2596896"/>
+            <a:ext cx="4206240" cy="320040"/>
           </a:xfrm>
           <a:prstGeom prst="rect">
             <a:avLst/>
@@ -7695,8 +11052,8 @@
         </p:nvSpPr>
         <p:spPr>
           <a:xfrm>
-            <a:off x="4251960" y="3620000"/>
-            <a:ext cx="4572000" cy="900000"/>
+            <a:off x="4251960" y="3145536"/>
+            <a:ext cx="4572000" cy="1051560"/>
           </a:xfrm>
           <a:prstGeom prst="rect">
             <a:avLst/>
@@ -7724,7 +11081,7 @@
         </p:nvSpPr>
         <p:spPr>
           <a:xfrm>
-            <a:off x="4434840" y="3684000"/>
+            <a:off x="4434840" y="3218688"/>
             <a:ext cx="4206240" cy="292608"/>
           </a:xfrm>
           <a:prstGeom prst="rect">
@@ -7760,7 +11117,7 @@
         </p:nvSpPr>
         <p:spPr>
           <a:xfrm>
-            <a:off x="4434840" y="3980000"/>
+            <a:off x="4434840" y="3529584"/>
             <a:ext cx="4206240" cy="228600"/>
           </a:xfrm>
           <a:prstGeom prst="rect">
@@ -7782,7 +11139,7 @@
                   <a:srgbClr val="556A8A"/>
                 </a:solidFill>
               </a:rPr>
-              <a:t>⏱ ~15–30 min</a:t>
+              <a:t>⏱ 1–2 hrs (or more depending on the portfolio size)</a:t>
             </a:r>
             <a:endParaRPr lang="en-US" sz="950" dirty="0"/>
           </a:p>
@@ -7796,8 +11153,8 @@
         </p:nvSpPr>
         <p:spPr>
           <a:xfrm>
-            <a:off x="4434840" y="4220000"/>
-            <a:ext cx="4206240" cy="280000"/>
+            <a:off x="4434840" y="3767328"/>
+            <a:ext cx="4206240" cy="320040"/>
           </a:xfrm>
           <a:prstGeom prst="rect">
             <a:avLst/>
@@ -7854,7 +11211,7 @@
                   <a:srgbClr val="556A8A"/>
                 </a:solidFill>
               </a:rPr>
-              <a:t>6 / 12</a:t>
+              <a:t>7 / 15</a:t>
             </a:r>
             <a:endParaRPr lang="en-US" sz="900" dirty="0"/>
           </a:p>
@@ -7922,14 +11279,14 @@
       </p:pic>
       <p:sp>
         <p:nvSpPr>
-          <p:cNvPr id="25" name="Rectangle 24"/>
-          <p:cNvSpPr/>
-          <p:nvPr/>
-        </p:nvSpPr>
-        <p:spPr>
-          <a:xfrm>
-            <a:off x="4251960" y="740000"/>
-            <a:ext cx="4572000" cy="900000"/>
+          <p:cNvPr id="40" name="Also box"/>
+          <p:cNvSpPr/>
+          <p:nvPr/>
+        </p:nvSpPr>
+        <p:spPr>
+          <a:xfrm>
+            <a:off x="457200" y="3210000"/>
+            <a:ext cx="3520000" cy="1240000"/>
           </a:xfrm>
           <a:prstGeom prst="rect">
             <a:avLst/>
@@ -7937,131 +11294,146 @@
           <a:solidFill>
             <a:srgbClr val="0D1A2E"/>
           </a:solidFill>
-          <a:ln w="15240">
+          <a:ln w="12700">
             <a:solidFill>
-              <a:srgbClr val="22D3EE"/>
+              <a:srgbClr val="1A6BBF"/>
             </a:solidFill>
+            <a:prstDash val="solid"/>
           </a:ln>
-          <a:effectLst/>
-        </p:spPr>
-        <p:style>
-          <a:lnRef idx="1">
-            <a:schemeClr val="accent1"/>
-          </a:lnRef>
-          <a:fillRef idx="3">
-            <a:schemeClr val="accent1"/>
-          </a:fillRef>
-          <a:effectRef idx="2">
-            <a:schemeClr val="accent1"/>
-          </a:effectRef>
-          <a:fontRef idx="minor">
-            <a:schemeClr val="lt1"/>
-          </a:fontRef>
-        </p:style>
-        <p:txBody>
-          <a:bodyPr rtlCol="0" anchor="ctr"/>
-          <a:lstStyle/>
-          <a:p>
-            <a:pPr algn="ctr"/>
-          </a:p>
-        </p:txBody>
-      </p:sp>
-      <p:sp>
-        <p:nvSpPr>
-          <p:cNvPr id="26" name="TextBox 25"/>
-          <p:cNvSpPr txBox="1"/>
-          <p:nvPr/>
-        </p:nvSpPr>
-        <p:spPr>
-          <a:xfrm>
-            <a:off x="4434840" y="804000"/>
-            <a:ext cx="4206240" cy="292608"/>
-          </a:xfrm>
-          <a:prstGeom prst="rect">
-            <a:avLst/>
-          </a:prstGeom>
-          <a:noFill/>
-        </p:spPr>
-        <p:txBody>
-          <a:bodyPr wrap="square" lIns="0" rIns="0" tIns="0" bIns="0" anchor="ctr">
-            <a:spAutoFit/>
-          </a:bodyPr>
-          <a:lstStyle/>
-          <a:p>
-            <a:r>
-              <a:rPr sz="1050" b="1" i="0">
-                <a:solidFill>
-                  <a:srgbClr val="22D3EE"/>
-                </a:solidFill>
-              </a:rPr>
-              <a:t>🚀  Turbo  (m=51, coarse-to-fine)</a:t>
-            </a:r>
-          </a:p>
-        </p:txBody>
-      </p:sp>
-      <p:sp>
-        <p:nvSpPr>
-          <p:cNvPr id="27" name="TextBox 26"/>
-          <p:cNvSpPr txBox="1"/>
-          <p:nvPr/>
-        </p:nvSpPr>
-        <p:spPr>
-          <a:xfrm>
-            <a:off x="4434840" y="1100000"/>
-            <a:ext cx="4206240" cy="228600"/>
-          </a:xfrm>
-          <a:prstGeom prst="rect">
-            <a:avLst/>
-          </a:prstGeom>
-          <a:noFill/>
-        </p:spPr>
-        <p:txBody>
-          <a:bodyPr wrap="square" lIns="0" rIns="0" tIns="0" bIns="0" anchor="ctr">
-            <a:spAutoFit/>
-          </a:bodyPr>
-          <a:lstStyle/>
-          <a:p>
-            <a:r>
-              <a:rPr sz="950" b="0" i="1">
-                <a:solidFill>
-                  <a:srgbClr val="556A8A"/>
-                </a:solidFill>
-              </a:rPr>
-              <a:t>⏱ ~1–2 s · default</a:t>
-            </a:r>
-          </a:p>
-        </p:txBody>
-      </p:sp>
-      <p:sp>
-        <p:nvSpPr>
-          <p:cNvPr id="28" name="TextBox 27"/>
-          <p:cNvSpPr txBox="1"/>
-          <p:nvPr/>
-        </p:nvSpPr>
-        <p:spPr>
-          <a:xfrm>
-            <a:off x="4434840" y="1340000"/>
-            <a:ext cx="4206240" cy="280000"/>
-          </a:xfrm>
-          <a:prstGeom prst="rect">
-            <a:avLst/>
-          </a:prstGeom>
-          <a:noFill/>
-        </p:spPr>
-        <p:txBody>
-          <a:bodyPr wrap="square" lIns="0" rIns="0" tIns="0" bIns="0" anchor="ctr">
-            <a:spAutoFit/>
-          </a:bodyPr>
-          <a:lstStyle/>
-          <a:p>
-            <a:r>
-              <a:rPr sz="900" b="0" i="0">
+          <a:effectLst>
+            <a:outerShdw sx="100000" sy="100000" kx="0" ky="0" algn="bl" rotWithShape="0" blurRad="101600" dist="38100" dir="8100000">
+              <a:srgbClr val="000000">
+                <a:alpha val="18000"/>
+              </a:srgbClr>
+            </a:outerShdw>
+          </a:effectLst>
+        </p:spPr>
+        <p:txBody>
+          <a:bodyPr/>
+          <a:p/>
+        </p:txBody>
+      </p:sp>
+      <p:sp>
+        <p:nvSpPr>
+          <p:cNvPr id="41" name="Also hdr"/>
+          <p:cNvSpPr/>
+          <p:nvPr/>
+        </p:nvSpPr>
+        <p:spPr>
+          <a:xfrm>
+            <a:off x="640080" y="3290000"/>
+            <a:ext cx="3154240" cy="292608"/>
+          </a:xfrm>
+          <a:prstGeom prst="rect">
+            <a:avLst/>
+          </a:prstGeom>
+          <a:noFill/>
+          <a:ln/>
+        </p:spPr>
+        <p:txBody>
+          <a:bodyPr wrap="square" lIns="0" tIns="0" rIns="0" bIns="0" rtlCol="0" anchor="ctr"/>
+          <a:lstStyle/>
+          <a:p>
+            <a:pPr indent="0" marL="0">
+              <a:buNone/>
+            </a:pPr>
+            <a:r>
+              <a:rPr lang="en-US" sz="1100" b="1" dirty="0">
+                <a:solidFill>
+                  <a:srgbClr val="4A9EFF"/>
+                </a:solidFill>
+              </a:rPr>
+              <a:t>Also available</a:t>
+            </a:r>
+            <a:endParaRPr lang="en-US" sz="1100" dirty="0"/>
+          </a:p>
+        </p:txBody>
+      </p:sp>
+      <p:sp>
+        <p:nvSpPr>
+          <p:cNvPr id="42" name="Also turbo"/>
+          <p:cNvSpPr/>
+          <p:nvPr/>
+        </p:nvSpPr>
+        <p:spPr>
+          <a:xfrm>
+            <a:off x="640080" y="3610000"/>
+            <a:ext cx="3154240" cy="490000"/>
+          </a:xfrm>
+          <a:prstGeom prst="rect">
+            <a:avLst/>
+          </a:prstGeom>
+          <a:noFill/>
+          <a:ln/>
+        </p:spPr>
+        <p:txBody>
+          <a:bodyPr wrap="square" lIns="0" tIns="0" rIns="0" bIns="0" rtlCol="0" anchor="t"/>
+          <a:lstStyle/>
+          <a:p>
+            <a:pPr indent="0" marL="0">
+              <a:buNone/>
+            </a:pPr>
+            <a:r>
+              <a:rPr lang="en-US" sz="950" b="1" dirty="0">
+                <a:solidFill>
+                  <a:srgbClr val="F5B342"/>
+                </a:solidFill>
+              </a:rPr>
+              <a:t xml:space="preserve">🚀 Turbo — 4th resolution: </a:t>
+            </a:r>
+            <a:r>
+              <a:rPr lang="en-US" sz="950" dirty="0">
                 <a:solidFill>
                   <a:srgbClr val="C0C8D8"/>
                 </a:solidFill>
               </a:rPr>
-              <a:t>Thesis-level VaR accuracy, ~60× faster (no-derivative, n ≤ 4)</a:t>
-            </a:r>
+              <a:t>High-precision VaR accuracy in ~seconds (VaR-only, ≤4 assets, no derivative).</a:t>
+            </a:r>
+            <a:endParaRPr lang="en-US" sz="950" dirty="0"/>
+          </a:p>
+        </p:txBody>
+      </p:sp>
+      <p:sp>
+        <p:nvSpPr>
+          <p:cNvPr id="43" name="Also rig"/>
+          <p:cNvSpPr/>
+          <p:nvPr/>
+        </p:nvSpPr>
+        <p:spPr>
+          <a:xfrm>
+            <a:off x="640080" y="4110000"/>
+            <a:ext cx="3154240" cy="330000"/>
+          </a:xfrm>
+          <a:prstGeom prst="rect">
+            <a:avLst/>
+          </a:prstGeom>
+          <a:noFill/>
+          <a:ln/>
+        </p:spPr>
+        <p:txBody>
+          <a:bodyPr wrap="square" lIns="0" tIns="0" rIns="0" bIns="0" rtlCol="0" anchor="t"/>
+          <a:lstStyle/>
+          <a:p>
+            <a:pPr indent="0" marL="0">
+              <a:buNone/>
+            </a:pPr>
+            <a:r>
+              <a:rPr lang="en-US" sz="950" b="1" dirty="0">
+                <a:solidFill>
+                  <a:srgbClr val="34D399"/>
+                </a:solidFill>
+              </a:rPr>
+              <a:t xml:space="preserve">Rigorous ES: </a:t>
+            </a:r>
+            <a:r>
+              <a:rPr lang="en-US" sz="950" dirty="0">
+                <a:solidFill>
+                  <a:srgbClr val="C0C8D8"/>
+                </a:solidFill>
+              </a:rPr>
+              <a:t>a fixed high-precision grid (m=51); chosen in the Risk-measure step.</a:t>
+            </a:r>
+            <a:endParaRPr lang="en-US" sz="950" dirty="0"/>
           </a:p>
         </p:txBody>
       </p:sp>
@@ -8324,7 +11696,7 @@
                   <a:srgbClr val="4A9EFF"/>
                 </a:solidFill>
               </a:rPr>
-              <a:t>1.  </a:t>
+              <a:t xml:space="preserve">1.  </a:t>
             </a:r>
             <a:pPr indent="0" marL="0">
               <a:buNone/>
@@ -8371,7 +11743,7 @@
                   <a:srgbClr val="4A9EFF"/>
                 </a:solidFill>
               </a:rPr>
-              <a:t>2.  </a:t>
+              <a:t xml:space="preserve">2.  </a:t>
             </a:r>
             <a:pPr indent="0" marL="0">
               <a:buNone/>
@@ -8418,7 +11790,7 @@
                   <a:srgbClr val="4A9EFF"/>
                 </a:solidFill>
               </a:rPr>
-              <a:t>3.  </a:t>
+              <a:t xml:space="preserve">3.  </a:t>
             </a:r>
             <a:pPr indent="0" marL="0">
               <a:buNone/>
@@ -8465,7 +11837,7 @@
                   <a:srgbClr val="4A9EFF"/>
                 </a:solidFill>
               </a:rPr>
-              <a:t>4.  </a:t>
+              <a:t xml:space="preserve">4.  </a:t>
             </a:r>
             <a:pPr indent="0" marL="0">
               <a:buNone/>
@@ -8512,7 +11884,7 @@
                   <a:srgbClr val="556A8A"/>
                 </a:solidFill>
               </a:rPr>
-              <a:t>7 / 12</a:t>
+              <a:t>8 / 15</a:t>
             </a:r>
             <a:endParaRPr lang="en-US" sz="900" dirty="0"/>
           </a:p>
@@ -9022,7 +12394,7 @@
         </p:nvSpPr>
         <p:spPr>
           <a:xfrm>
-            <a:off x="5669280" y="2505456"/>
+            <a:off x="5669280" y="2157984"/>
             <a:ext cx="164592" cy="201168"/>
           </a:xfrm>
           <a:prstGeom prst="rect">
@@ -9051,7 +12423,7 @@
         </p:nvSpPr>
         <p:spPr>
           <a:xfrm>
-            <a:off x="5897880" y="2505456"/>
+            <a:off x="5897880" y="2157984"/>
             <a:ext cx="2926080" cy="201168"/>
           </a:xfrm>
           <a:prstGeom prst="rect">
@@ -9087,7 +12459,7 @@
         </p:nvSpPr>
         <p:spPr>
           <a:xfrm>
-            <a:off x="5897880" y="2688336"/>
+            <a:off x="5897880" y="2340864"/>
             <a:ext cx="2926080" cy="182880"/>
           </a:xfrm>
           <a:prstGeom prst="rect">
@@ -9123,7 +12495,7 @@
         </p:nvSpPr>
         <p:spPr>
           <a:xfrm>
-            <a:off x="5669280" y="2852928"/>
+            <a:off x="5669280" y="2505456"/>
             <a:ext cx="164592" cy="201168"/>
           </a:xfrm>
           <a:prstGeom prst="rect">
@@ -9152,7 +12524,7 @@
         </p:nvSpPr>
         <p:spPr>
           <a:xfrm>
-            <a:off x="5897880" y="2852928"/>
+            <a:off x="5897880" y="2505456"/>
             <a:ext cx="2926080" cy="201168"/>
           </a:xfrm>
           <a:prstGeom prst="rect">
@@ -9188,7 +12560,7 @@
         </p:nvSpPr>
         <p:spPr>
           <a:xfrm>
-            <a:off x="5897880" y="3035808"/>
+            <a:off x="5897880" y="2688336"/>
             <a:ext cx="2926080" cy="182880"/>
           </a:xfrm>
           <a:prstGeom prst="rect">
@@ -9224,7 +12596,7 @@
         </p:nvSpPr>
         <p:spPr>
           <a:xfrm>
-            <a:off x="5669280" y="3200400"/>
+            <a:off x="5669280" y="2852928"/>
             <a:ext cx="164592" cy="201168"/>
           </a:xfrm>
           <a:prstGeom prst="rect">
@@ -9253,7 +12625,7 @@
         </p:nvSpPr>
         <p:spPr>
           <a:xfrm>
-            <a:off x="5897880" y="3200400"/>
+            <a:off x="5897880" y="2852928"/>
             <a:ext cx="2926080" cy="201168"/>
           </a:xfrm>
           <a:prstGeom prst="rect">
@@ -9289,7 +12661,7 @@
         </p:nvSpPr>
         <p:spPr>
           <a:xfrm>
-            <a:off x="5897880" y="3383280"/>
+            <a:off x="5897880" y="3035808"/>
             <a:ext cx="2926080" cy="182880"/>
           </a:xfrm>
           <a:prstGeom prst="rect">
@@ -9412,7 +12784,7 @@
                   <a:srgbClr val="556A8A"/>
                 </a:solidFill>
               </a:rPr>
-              <a:t>8 / 12</a:t>
+              <a:t>9 / 15</a:t>
             </a:r>
             <a:endParaRPr lang="en-US" sz="900" dirty="0"/>
           </a:p>
@@ -9454,15 +12826,39 @@
           </a:p>
         </p:txBody>
       </p:sp>
-      <p:sp>
-        <p:nvSpPr>
-          <p:cNvPr id="30" name="Rectangle 29"/>
-          <p:cNvSpPr/>
-          <p:nvPr/>
-        </p:nvSpPr>
-        <p:spPr>
-          <a:xfrm>
-            <a:off x="5669280" y="2157984"/>
+      <p:pic>
+        <p:nvPicPr>
+          <p:cNvPr id="29" name="Picture 28" descr="Slide8chart.png"/>
+          <p:cNvPicPr>
+            <a:picLocks noChangeAspect="1"/>
+          </p:cNvPicPr>
+          <p:nvPr/>
+        </p:nvPicPr>
+        <p:blipFill>
+          <a:blip r:embed="rId3"/>
+          <a:stretch>
+            <a:fillRect/>
+          </a:stretch>
+        </p:blipFill>
+        <p:spPr>
+          <a:xfrm>
+            <a:off x="365760" y="1095744"/>
+            <a:ext cx="5120640" cy="2520165"/>
+          </a:xfrm>
+          <a:prstGeom prst="rect">
+            <a:avLst/>
+          </a:prstGeom>
+        </p:spPr>
+      </p:pic>
+      <p:sp>
+        <p:nvSpPr>
+          <p:cNvPr id="30" name="Swatch P0"/>
+          <p:cNvSpPr/>
+          <p:nvPr/>
+        </p:nvSpPr>
+        <p:spPr>
+          <a:xfrm>
+            <a:off x="5669280" y="3200400"/>
             <a:ext cx="164592" cy="201168"/>
           </a:xfrm>
           <a:prstGeom prst="rect">
@@ -9473,123 +12869,88 @@
           </a:solidFill>
           <a:ln w="12700">
             <a:solidFill>
-              <a:srgbClr val="FFFFFF"/>
+              <a:srgbClr val="A855F7"/>
             </a:solidFill>
+            <a:prstDash val="solid"/>
           </a:ln>
-          <a:effectLst/>
-        </p:spPr>
-        <p:style>
-          <a:lnRef idx="1">
-            <a:schemeClr val="accent1"/>
-          </a:lnRef>
-          <a:fillRef idx="3">
-            <a:schemeClr val="accent1"/>
-          </a:fillRef>
-          <a:effectRef idx="2">
-            <a:schemeClr val="accent1"/>
-          </a:effectRef>
-          <a:fontRef idx="minor">
-            <a:schemeClr val="lt1"/>
-          </a:fontRef>
-        </p:style>
-        <p:txBody>
-          <a:bodyPr rtlCol="0" anchor="ctr"/>
-          <a:lstStyle/>
-          <a:p>
-            <a:pPr algn="ctr"/>
-          </a:p>
-        </p:txBody>
-      </p:sp>
-      <p:sp>
-        <p:nvSpPr>
-          <p:cNvPr id="31" name="TextBox 30"/>
-          <p:cNvSpPr txBox="1"/>
-          <p:nvPr/>
-        </p:nvSpPr>
-        <p:spPr>
-          <a:xfrm>
-            <a:off x="5897880" y="2157984"/>
+        </p:spPr>
+        <p:txBody>
+          <a:bodyPr/>
+          <a:p/>
+        </p:txBody>
+      </p:sp>
+      <p:sp>
+        <p:nvSpPr>
+          <p:cNvPr id="31" name="Text P0"/>
+          <p:cNvSpPr/>
+          <p:nvPr/>
+        </p:nvSpPr>
+        <p:spPr>
+          <a:xfrm>
+            <a:off x="5897880" y="3200400"/>
             <a:ext cx="2926080" cy="201168"/>
           </a:xfrm>
           <a:prstGeom prst="rect">
             <a:avLst/>
           </a:prstGeom>
           <a:noFill/>
-        </p:spPr>
-        <p:txBody>
-          <a:bodyPr wrap="square" lIns="0" rIns="0" tIns="0" bIns="0" anchor="ctr">
-            <a:spAutoFit/>
-          </a:bodyPr>
-          <a:lstStyle/>
-          <a:p>
-            <a:r>
-              <a:rPr sz="900" b="1">
+          <a:ln/>
+        </p:spPr>
+        <p:txBody>
+          <a:bodyPr wrap="square" lIns="0" tIns="0" rIns="0" bIns="0" rtlCol="0" anchor="ctr"/>
+          <a:lstStyle/>
+          <a:p>
+            <a:pPr indent="0" marL="0">
+              <a:buNone/>
+            </a:pPr>
+            <a:r>
+              <a:rPr lang="en-US" sz="900" b="1" dirty="0">
                 <a:solidFill>
                   <a:srgbClr val="FFFFFF"/>
                 </a:solidFill>
               </a:rPr>
-              <a:t>Purple dot (white frame)</a:t>
-            </a:r>
-          </a:p>
-        </p:txBody>
-      </p:sp>
-      <p:sp>
-        <p:nvSpPr>
-          <p:cNvPr id="32" name="TextBox 31"/>
-          <p:cNvSpPr txBox="1"/>
-          <p:nvPr/>
-        </p:nvSpPr>
-        <p:spPr>
-          <a:xfrm>
-            <a:off x="5897880" y="2340864"/>
+              <a:t>Magenta circle</a:t>
+            </a:r>
+            <a:endParaRPr lang="en-US" sz="900" dirty="0"/>
+          </a:p>
+        </p:txBody>
+      </p:sp>
+      <p:sp>
+        <p:nvSpPr>
+          <p:cNvPr id="32" name="Desc P0"/>
+          <p:cNvSpPr/>
+          <p:nvPr/>
+        </p:nvSpPr>
+        <p:spPr>
+          <a:xfrm>
+            <a:off x="5897880" y="3383280"/>
             <a:ext cx="2926080" cy="182880"/>
           </a:xfrm>
           <a:prstGeom prst="rect">
             <a:avLst/>
           </a:prstGeom>
           <a:noFill/>
-        </p:spPr>
-        <p:txBody>
-          <a:bodyPr wrap="square" lIns="0" rIns="0" tIns="0" bIns="0" anchor="ctr">
-            <a:spAutoFit/>
-          </a:bodyPr>
-          <a:lstStyle/>
-          <a:p>
-            <a:r>
-              <a:rPr sz="850" b="0">
+          <a:ln/>
+        </p:spPr>
+        <p:txBody>
+          <a:bodyPr wrap="square" lIns="0" tIns="0" rIns="0" bIns="0" rtlCol="0" anchor="ctr"/>
+          <a:lstStyle/>
+          <a:p>
+            <a:pPr indent="0" marL="0">
+              <a:buNone/>
+            </a:pPr>
+            <a:r>
+              <a:rPr lang="en-US" sz="850" dirty="0">
                 <a:solidFill>
                   <a:srgbClr val="556A8A"/>
                 </a:solidFill>
               </a:rPr>
               <a:t>Portfolio (0) — Markowitz MV optimum</a:t>
             </a:r>
-          </a:p>
-        </p:txBody>
-      </p:sp>
-      <p:pic>
-        <p:nvPicPr>
-          <p:cNvPr id="33" name="Picture 32" descr="Slide8chart.png"/>
-          <p:cNvPicPr>
-            <a:picLocks noChangeAspect="1"/>
-          </p:cNvPicPr>
-          <p:nvPr/>
-        </p:nvPicPr>
-        <p:blipFill>
-          <a:blip r:embed="rId4"/>
-          <a:stretch>
-            <a:fillRect/>
-          </a:stretch>
-        </p:blipFill>
-        <p:spPr>
-          <a:xfrm>
-            <a:off x="365760" y="1095744"/>
-            <a:ext cx="4986953" cy="2508528"/>
-          </a:xfrm>
-          <a:prstGeom prst="rect">
-            <a:avLst/>
-          </a:prstGeom>
-        </p:spPr>
-      </p:pic>
+            <a:endParaRPr lang="en-US" sz="850" dirty="0"/>
+          </a:p>
+        </p:txBody>
+      </p:sp>
     </p:spTree>
   </p:cSld>
   <p:clrMapOvr>
@@ -9753,7 +13114,7 @@
                   <a:srgbClr val="FFFFFF"/>
                 </a:solidFill>
               </a:rPr>
-              <a:t>Expected return:  </a:t>
+              <a:t xml:space="preserve">Expected return:  </a:t>
             </a:r>
             <a:pPr indent="0" marL="0">
               <a:buNone/>
@@ -9800,7 +13161,7 @@
                   <a:srgbClr val="FFFFFF"/>
                 </a:solidFill>
               </a:rPr>
-              <a:t>Std deviation:  </a:t>
+              <a:t xml:space="preserve">Std deviation:  </a:t>
             </a:r>
             <a:pPr indent="0" marL="0">
               <a:buNone/>
@@ -9847,7 +13208,7 @@
                   <a:srgbClr val="FFFFFF"/>
                 </a:solidFill>
               </a:rPr>
-              <a:t>Skewness:  </a:t>
+              <a:t xml:space="preserve">Skewness:  </a:t>
             </a:r>
             <a:pPr indent="0" marL="0">
               <a:buNone/>
@@ -9894,7 +13255,7 @@
                   <a:srgbClr val="FFFFFF"/>
                 </a:solidFill>
               </a:rPr>
-              <a:t>Shortfall / ES:  </a:t>
+              <a:t xml:space="preserve">Shortfall / ES:  </a:t>
             </a:r>
             <a:pPr indent="0" marL="0">
               <a:buNone/>
@@ -9941,7 +13302,7 @@
                   <a:srgbClr val="FFFFFF"/>
                 </a:solidFill>
               </a:rPr>
-              <a:t>Portfolio weights:  </a:t>
+              <a:t xml:space="preserve">Portfolio weights:  </a:t>
             </a:r>
             <a:pPr indent="0" marL="0">
               <a:buNone/>
@@ -9988,7 +13349,7 @@
                   <a:srgbClr val="556A8A"/>
                 </a:solidFill>
               </a:rPr>
-              <a:t>9 / 12</a:t>
+              <a:t>10 / 15</a:t>
             </a:r>
             <a:endParaRPr lang="en-US" sz="900" dirty="0"/>
           </a:p>
@@ -10039,15 +13400,15 @@
           <p:nvPr/>
         </p:nvPicPr>
         <p:blipFill>
-          <a:blip r:embed="rId4"/>
+          <a:blip r:embed="rId3"/>
           <a:stretch>
             <a:fillRect/>
           </a:stretch>
         </p:blipFill>
         <p:spPr>
           <a:xfrm>
-            <a:off x="3538728" y="749808"/>
-            <a:ext cx="2066544" cy="2286000"/>
+            <a:off x="3555669" y="749808"/>
+            <a:ext cx="2032661" cy="2286000"/>
           </a:xfrm>
           <a:prstGeom prst="rect">
             <a:avLst/>

--- a/userguide.pptx
+++ b/userguide.pptx
@@ -4173,7 +4173,7 @@
                   <a:srgbClr val="4A9EFF"/>
                 </a:solidFill>
               </a:rPr>
-              <a:t>Exact Portfolio Optimiser</a:t>
+              <a:t>Grid Portfolio Optimiser</a:t>
             </a:r>
             <a:endParaRPr lang="en-US" sz="1100" dirty="0"/>
           </a:p>
@@ -4979,7 +4979,7 @@
                   <a:srgbClr val="C0C8D8"/>
                 </a:solidFill>
               </a:rPr>
-              <a:t>Each tile opens a tool; the Exact Portfolio Optimiser is the place to start.</a:t>
+              <a:t>Each tile opens a tool; the Grid Portfolio Optimiser is the place to start.</a:t>
             </a:r>
             <a:endParaRPr lang="en-US" sz="900" dirty="0"/>
           </a:p>
@@ -7314,7 +7314,7 @@
                   <a:srgbClr val="FFFFFF"/>
                 </a:solidFill>
               </a:rPr>
-              <a:t>Exact Portfolio Optimiser — overview</a:t>
+              <a:t>Grid Portfolio Optimiser — overview</a:t>
             </a:r>
             <a:endParaRPr lang="en-US" sz="2600" dirty="0"/>
           </a:p>

--- a/userguide.pptx
+++ b/userguide.pptx
@@ -17,7 +17,9 @@
     <p:sldId id="264" r:id="rId10"/>
     <p:sldId id="265" r:id="rId11"/>
     <p:sldId id="269" r:id="rId20"/>
+    <p:sldId id="271" r:id="rId22"/>
     <p:sldId id="270" r:id="rId21"/>
+    <p:sldId id="272" r:id="rId23"/>
     <p:sldId id="266" r:id="rId12"/>
     <p:sldId id="267" r:id="rId13"/>
   </p:sldIdLst>
@@ -2650,7 +2652,7 @@
                   <a:srgbClr val="556A8A"/>
                 </a:solidFill>
               </a:rPr>
-              <a:t>11 / 15</a:t>
+              <a:t>11 / 17</a:t>
             </a:r>
             <a:endParaRPr lang="en-US" sz="900" dirty="0"/>
           </a:p>
@@ -3349,7 +3351,7 @@
                   <a:srgbClr val="556A8A"/>
                 </a:solidFill>
               </a:rPr>
-              <a:t>14 / 15</a:t>
+              <a:t>16 / 17</a:t>
             </a:r>
             <a:endParaRPr lang="en-US" sz="900" dirty="0"/>
           </a:p>
@@ -3932,7 +3934,7 @@
                   <a:srgbClr val="556A8A"/>
                 </a:solidFill>
               </a:rPr>
-              <a:t>15 / 15</a:t>
+              <a:t>17 / 17</a:t>
             </a:r>
             <a:endParaRPr lang="en-US" sz="900" dirty="0"/>
           </a:p>
@@ -5015,7 +5017,7 @@
                   <a:srgbClr val="556A8A"/>
                 </a:solidFill>
               </a:rPr>
-              <a:t>2 / 15</a:t>
+              <a:t>2 / 17</a:t>
             </a:r>
             <a:endParaRPr lang="en-US" sz="900" dirty="0"/>
           </a:p>
@@ -6098,7 +6100,7 @@
                   <a:srgbClr val="556A8A"/>
                 </a:solidFill>
               </a:rPr>
-              <a:t>12 / 15</a:t>
+              <a:t>12 / 17</a:t>
             </a:r>
             <a:endParaRPr lang="en-US" sz="900" dirty="0"/>
           </a:p>
@@ -7181,7 +7183,7 @@
                   <a:srgbClr val="556A8A"/>
                 </a:solidFill>
               </a:rPr>
-              <a:t>13 / 15</a:t>
+              <a:t>14 / 17</a:t>
             </a:r>
             <a:endParaRPr lang="en-US" sz="900" dirty="0"/>
           </a:p>
@@ -7220,6 +7222,648 @@
               <a:t>Beyond Mean-Variance Portfolio Optimiser — User Guide</a:t>
             </a:r>
             <a:endParaRPr lang="en-US" sz="900" dirty="0"/>
+          </a:p>
+        </p:txBody>
+      </p:sp>
+    </p:spTree>
+  </p:cSld>
+  <p:clrMapOvr>
+    <a:masterClrMapping/>
+  </p:clrMapOvr>
+</p:sld>
+</file>
+
+<file path=ppt/slides/slide16.xml><?xml version="1.0" encoding="utf-8"?>
+<p:sld xmlns:a="http://schemas.openxmlformats.org/drawingml/2006/main" xmlns:r="http://schemas.openxmlformats.org/officeDocument/2006/relationships" xmlns:p="http://schemas.openxmlformats.org/presentationml/2006/main">
+  <p:cSld name="Slide 8">
+    <p:bg>
+      <p:bgPr>
+        <a:solidFill>
+          <a:srgbClr val="020C1B"/>
+        </a:solidFill>
+      </p:bgPr>
+    </p:bg>
+    <p:spTree>
+      <p:nvGrpSpPr>
+        <p:cNvPr id="1" name=""/>
+        <p:cNvGrpSpPr/>
+        <p:nvPr/>
+      </p:nvGrpSpPr>
+      <p:grpSpPr>
+        <a:xfrm>
+          <a:off x="0" y="0"/>
+          <a:ext cx="0" cy="0"/>
+          <a:chOff x="0" y="0"/>
+          <a:chExt cx="0" cy="0"/>
+        </a:xfrm>
+      </p:grpSpPr>
+      <p:sp>
+        <p:nvSpPr>
+          <p:cNvPr id="2" name="Shape 0"/>
+          <p:cNvSpPr/>
+          <p:nvPr/>
+        </p:nvSpPr>
+        <p:spPr>
+          <a:xfrm>
+            <a:off x="0" y="0"/>
+            <a:ext cx="9144000" cy="54864"/>
+          </a:xfrm>
+          <a:prstGeom prst="rect">
+            <a:avLst/>
+          </a:prstGeom>
+          <a:solidFill>
+            <a:srgbClr val="1A6BBF"/>
+          </a:solidFill>
+          <a:ln w="12700">
+            <a:solidFill>
+              <a:srgbClr val="1A6BBF"/>
+            </a:solidFill>
+            <a:prstDash val="solid"/>
+          </a:ln>
+        </p:spPr>
+        <p:txBody>
+          <a:bodyPr/>
+          <a:p/>
+        </p:txBody>
+      </p:sp>
+      <p:sp>
+        <p:nvSpPr>
+          <p:cNvPr id="3" name="Text 1"/>
+          <p:cNvSpPr/>
+          <p:nvPr/>
+        </p:nvSpPr>
+        <p:spPr>
+          <a:xfrm>
+            <a:off x="365760" y="164592"/>
+            <a:ext cx="8229600" cy="457200"/>
+          </a:xfrm>
+          <a:prstGeom prst="rect">
+            <a:avLst/>
+          </a:prstGeom>
+          <a:noFill/>
+          <a:ln/>
+        </p:spPr>
+        <p:txBody>
+          <a:bodyPr wrap="square" rtlCol="0" anchor="ctr"/>
+          <a:lstStyle/>
+          <a:p>
+            <a:pPr indent="0" marL="0">
+              <a:buNone/>
+            </a:pPr>
+            <a:r>
+              <a:rPr lang="en-US" sz="2200" b="1" dirty="0">
+                <a:solidFill>
+                  <a:srgbClr val="FFFFFF"/>
+                </a:solidFill>
+              </a:rPr>
+              <a:t>Reading the Scalable output</a:t>
+            </a:r>
+            <a:endParaRPr lang="en-US" sz="2200" dirty="0"/>
+          </a:p>
+        </p:txBody>
+      </p:sp>
+      <p:sp>
+        <p:nvSpPr>
+          <p:cNvPr id="27" name="Text 25"/>
+          <p:cNvSpPr/>
+          <p:nvPr/>
+        </p:nvSpPr>
+        <p:spPr>
+          <a:xfrm>
+            <a:off x="8046720" y="4754880"/>
+            <a:ext cx="914400" cy="274320"/>
+          </a:xfrm>
+          <a:prstGeom prst="rect">
+            <a:avLst/>
+          </a:prstGeom>
+          <a:noFill/>
+          <a:ln/>
+        </p:spPr>
+        <p:txBody>
+          <a:bodyPr wrap="square" rtlCol="0" anchor="ctr"/>
+          <a:lstStyle/>
+          <a:p>
+            <a:pPr algn="r" indent="0" marL="0">
+              <a:buNone/>
+            </a:pPr>
+            <a:r>
+              <a:rPr lang="en-US" sz="900" dirty="0">
+                <a:solidFill>
+                  <a:srgbClr val="556A8A"/>
+                </a:solidFill>
+              </a:rPr>
+              <a:t>13 / 17</a:t>
+            </a:r>
+            <a:endParaRPr lang="en-US" sz="900" dirty="0"/>
+          </a:p>
+        </p:txBody>
+      </p:sp>
+      <p:sp>
+        <p:nvSpPr>
+          <p:cNvPr id="28" name="Text 26"/>
+          <p:cNvSpPr/>
+          <p:nvPr/>
+        </p:nvSpPr>
+        <p:spPr>
+          <a:xfrm>
+            <a:off x="365760" y="4754880"/>
+            <a:ext cx="6400800" cy="274320"/>
+          </a:xfrm>
+          <a:prstGeom prst="rect">
+            <a:avLst/>
+          </a:prstGeom>
+          <a:noFill/>
+          <a:ln/>
+        </p:spPr>
+        <p:txBody>
+          <a:bodyPr wrap="square" rtlCol="0" anchor="ctr"/>
+          <a:lstStyle/>
+          <a:p>
+            <a:pPr algn="l" indent="0" marL="0">
+              <a:buNone/>
+            </a:pPr>
+            <a:r>
+              <a:rPr lang="en-US" sz="900" dirty="0">
+                <a:solidFill>
+                  <a:srgbClr val="556A8A"/>
+                </a:solidFill>
+              </a:rPr>
+              <a:t>Beyond Mean-Variance Portfolio Optimiser — User Guide</a:t>
+            </a:r>
+            <a:endParaRPr lang="en-US" sz="900" dirty="0"/>
+          </a:p>
+        </p:txBody>
+      </p:sp>
+      <p:pic>
+        <p:nvPicPr>
+          <p:cNvPr id="29" name="Picture 28" descr="Slide8chart.png"/>
+          <p:cNvPicPr>
+            <a:picLocks noChangeAspect="1"/>
+          </p:cNvPicPr>
+          <p:nvPr/>
+        </p:nvPicPr>
+        <p:blipFill>
+          <a:blip r:embed="rId3"/>
+          <a:stretch>
+            <a:fillRect/>
+          </a:stretch>
+        </p:blipFill>
+        <p:spPr>
+          <a:xfrm>
+            <a:off x="365760" y="1095744"/>
+            <a:ext cx="5120640" cy="2526650"/>
+          </a:xfrm>
+          <a:prstGeom prst="rect">
+            <a:avLst/>
+          </a:prstGeom>
+        </p:spPr>
+      </p:pic>
+      <p:sp>
+        <p:nvSpPr>
+          <p:cNvPr id="40" name="Cmt box"/>
+          <p:cNvSpPr/>
+          <p:nvPr/>
+        </p:nvSpPr>
+        <p:spPr>
+          <a:xfrm>
+            <a:off x="5669280" y="1095744"/>
+            <a:ext cx="3154240" cy="2526650"/>
+          </a:xfrm>
+          <a:prstGeom prst="rect">
+            <a:avLst/>
+          </a:prstGeom>
+          <a:solidFill>
+            <a:srgbClr val="0D1A2E"/>
+          </a:solidFill>
+          <a:ln w="12700">
+            <a:solidFill>
+              <a:srgbClr val="1A6BBF"/>
+            </a:solidFill>
+            <a:prstDash val="solid"/>
+          </a:ln>
+        </p:spPr>
+        <p:txBody>
+          <a:bodyPr/>
+          <a:p/>
+        </p:txBody>
+      </p:sp>
+      <p:sp>
+        <p:nvSpPr>
+          <p:cNvPr id="41" name="Cmt text"/>
+          <p:cNvSpPr/>
+          <p:nvPr/>
+        </p:nvSpPr>
+        <p:spPr>
+          <a:xfrm>
+            <a:off x="5852160" y="1188720"/>
+            <a:ext cx="2788480" cy="2360000"/>
+          </a:xfrm>
+          <a:prstGeom prst="rect">
+            <a:avLst/>
+          </a:prstGeom>
+          <a:noFill/>
+          <a:ln/>
+        </p:spPr>
+        <p:txBody>
+          <a:bodyPr wrap="square" lIns="0" tIns="0" rIns="0" bIns="0" rtlCol="0" anchor="t"/>
+          <a:lstStyle/>
+          <a:p>
+            <a:pPr indent="0" marL="0">
+              <a:buNone/>
+            </a:pPr>
+            <a:r>
+              <a:rPr lang="en-US" sz="1100" b="1" dirty="0">
+                <a:solidFill>
+                  <a:srgbClr val="4A9EFF"/>
+                </a:solidFill>
+              </a:rPr>
+              <a:t>What you’re seeing</a:t>
+            </a:r>
+          </a:p>
+          <a:p>
+            <a:pPr indent="0" marL="0">
+              <a:spcBef>
+                <a:spcPts val="900"/>
+              </a:spcBef>
+              <a:buNone/>
+            </a:pPr>
+            <a:r>
+              <a:rPr lang="en-US" sz="900" dirty="0">
+                <a:solidFill>
+                  <a:srgbClr val="C0C8D8"/>
+                </a:solidFill>
+              </a:rPr>
+              <a:t>•  Curve = the return / tail-risk frontier: the most expected return reachable for each Expected-Shortfall floor L.</a:t>
+            </a:r>
+          </a:p>
+          <a:p>
+            <a:pPr indent="0" marL="0">
+              <a:spcBef>
+                <a:spcPts val="900"/>
+              </a:spcBef>
+              <a:buNone/>
+            </a:pPr>
+            <a:r>
+              <a:rPr lang="en-US" sz="900" dirty="0">
+                <a:solidFill>
+                  <a:srgbClr val="C0C8D8"/>
+                </a:solidFill>
+              </a:rPr>
+              <a:t>•  A tighter floor (toward −10%) allows less tail loss and lowers return; a looser one (toward −30%) raises it.</a:t>
+            </a:r>
+          </a:p>
+          <a:p>
+            <a:pPr indent="0" marL="0">
+              <a:spcBef>
+                <a:spcPts val="900"/>
+              </a:spcBef>
+              <a:buNone/>
+            </a:pPr>
+            <a:r>
+              <a:rPr lang="en-US" sz="900" dirty="0">
+                <a:solidFill>
+                  <a:srgbClr val="C0C8D8"/>
+                </a:solidFill>
+              </a:rPr>
+              <a:t>•  The ★ is the optimum at your chosen floor (here L = −20%, E[r] = 24.6%).</a:t>
+            </a:r>
+          </a:p>
+          <a:p>
+            <a:pPr indent="0" marL="0">
+              <a:spcBef>
+                <a:spcPts val="900"/>
+              </a:spcBef>
+              <a:buNone/>
+            </a:pPr>
+            <a:r>
+              <a:rPr lang="en-US" sz="900" dirty="0">
+                <a:solidFill>
+                  <a:srgbClr val="C0C8D8"/>
+                </a:solidFill>
+              </a:rPr>
+              <a:t>•  Built from Monte-Carlo scenarios solved by a CVaR linear program, so it scales to many assets.</a:t>
+            </a:r>
+          </a:p>
+        </p:txBody>
+      </p:sp>
+    </p:spTree>
+  </p:cSld>
+  <p:clrMapOvr>
+    <a:masterClrMapping/>
+  </p:clrMapOvr>
+</p:sld>
+</file>
+
+<file path=ppt/slides/slide17.xml><?xml version="1.0" encoding="utf-8"?>
+<p:sld xmlns:a="http://schemas.openxmlformats.org/drawingml/2006/main" xmlns:r="http://schemas.openxmlformats.org/officeDocument/2006/relationships" xmlns:p="http://schemas.openxmlformats.org/presentationml/2006/main">
+  <p:cSld name="Slide 8">
+    <p:bg>
+      <p:bgPr>
+        <a:solidFill>
+          <a:srgbClr val="020C1B"/>
+        </a:solidFill>
+      </p:bgPr>
+    </p:bg>
+    <p:spTree>
+      <p:nvGrpSpPr>
+        <p:cNvPr id="1" name=""/>
+        <p:cNvGrpSpPr/>
+        <p:nvPr/>
+      </p:nvGrpSpPr>
+      <p:grpSpPr>
+        <a:xfrm>
+          <a:off x="0" y="0"/>
+          <a:ext cx="0" cy="0"/>
+          <a:chOff x="0" y="0"/>
+          <a:chExt cx="0" cy="0"/>
+        </a:xfrm>
+      </p:grpSpPr>
+      <p:sp>
+        <p:nvSpPr>
+          <p:cNvPr id="2" name="Shape 0"/>
+          <p:cNvSpPr/>
+          <p:nvPr/>
+        </p:nvSpPr>
+        <p:spPr>
+          <a:xfrm>
+            <a:off x="0" y="0"/>
+            <a:ext cx="9144000" cy="54864"/>
+          </a:xfrm>
+          <a:prstGeom prst="rect">
+            <a:avLst/>
+          </a:prstGeom>
+          <a:solidFill>
+            <a:srgbClr val="1A6BBF"/>
+          </a:solidFill>
+          <a:ln w="12700">
+            <a:solidFill>
+              <a:srgbClr val="1A6BBF"/>
+            </a:solidFill>
+            <a:prstDash val="solid"/>
+          </a:ln>
+        </p:spPr>
+        <p:txBody>
+          <a:bodyPr/>
+          <a:p/>
+        </p:txBody>
+      </p:sp>
+      <p:sp>
+        <p:nvSpPr>
+          <p:cNvPr id="3" name="Text 1"/>
+          <p:cNvSpPr/>
+          <p:nvPr/>
+        </p:nvSpPr>
+        <p:spPr>
+          <a:xfrm>
+            <a:off x="365760" y="164592"/>
+            <a:ext cx="8229600" cy="457200"/>
+          </a:xfrm>
+          <a:prstGeom prst="rect">
+            <a:avLst/>
+          </a:prstGeom>
+          <a:noFill/>
+          <a:ln/>
+        </p:spPr>
+        <p:txBody>
+          <a:bodyPr wrap="square" rtlCol="0" anchor="ctr"/>
+          <a:lstStyle/>
+          <a:p>
+            <a:pPr indent="0" marL="0">
+              <a:buNone/>
+            </a:pPr>
+            <a:r>
+              <a:rPr lang="en-US" sz="2200" b="1" dirty="0">
+                <a:solidFill>
+                  <a:srgbClr val="FFFFFF"/>
+                </a:solidFill>
+              </a:rPr>
+              <a:t>Reading the Backtest output</a:t>
+            </a:r>
+            <a:endParaRPr lang="en-US" sz="2200" dirty="0"/>
+          </a:p>
+        </p:txBody>
+      </p:sp>
+      <p:sp>
+        <p:nvSpPr>
+          <p:cNvPr id="27" name="Text 25"/>
+          <p:cNvSpPr/>
+          <p:nvPr/>
+        </p:nvSpPr>
+        <p:spPr>
+          <a:xfrm>
+            <a:off x="8046720" y="4754880"/>
+            <a:ext cx="914400" cy="274320"/>
+          </a:xfrm>
+          <a:prstGeom prst="rect">
+            <a:avLst/>
+          </a:prstGeom>
+          <a:noFill/>
+          <a:ln/>
+        </p:spPr>
+        <p:txBody>
+          <a:bodyPr wrap="square" rtlCol="0" anchor="ctr"/>
+          <a:lstStyle/>
+          <a:p>
+            <a:pPr algn="r" indent="0" marL="0">
+              <a:buNone/>
+            </a:pPr>
+            <a:r>
+              <a:rPr lang="en-US" sz="900" dirty="0">
+                <a:solidFill>
+                  <a:srgbClr val="556A8A"/>
+                </a:solidFill>
+              </a:rPr>
+              <a:t>15 / 17</a:t>
+            </a:r>
+            <a:endParaRPr lang="en-US" sz="900" dirty="0"/>
+          </a:p>
+        </p:txBody>
+      </p:sp>
+      <p:sp>
+        <p:nvSpPr>
+          <p:cNvPr id="28" name="Text 26"/>
+          <p:cNvSpPr/>
+          <p:nvPr/>
+        </p:nvSpPr>
+        <p:spPr>
+          <a:xfrm>
+            <a:off x="365760" y="4754880"/>
+            <a:ext cx="6400800" cy="274320"/>
+          </a:xfrm>
+          <a:prstGeom prst="rect">
+            <a:avLst/>
+          </a:prstGeom>
+          <a:noFill/>
+          <a:ln/>
+        </p:spPr>
+        <p:txBody>
+          <a:bodyPr wrap="square" rtlCol="0" anchor="ctr"/>
+          <a:lstStyle/>
+          <a:p>
+            <a:pPr algn="l" indent="0" marL="0">
+              <a:buNone/>
+            </a:pPr>
+            <a:r>
+              <a:rPr lang="en-US" sz="900" dirty="0">
+                <a:solidFill>
+                  <a:srgbClr val="556A8A"/>
+                </a:solidFill>
+              </a:rPr>
+              <a:t>Beyond Mean-Variance Portfolio Optimiser — User Guide</a:t>
+            </a:r>
+            <a:endParaRPr lang="en-US" sz="900" dirty="0"/>
+          </a:p>
+        </p:txBody>
+      </p:sp>
+      <p:pic>
+        <p:nvPicPr>
+          <p:cNvPr id="29" name="Picture 28" descr="Slide8chart.png"/>
+          <p:cNvPicPr>
+            <a:picLocks noChangeAspect="1"/>
+          </p:cNvPicPr>
+          <p:nvPr/>
+        </p:nvPicPr>
+        <p:blipFill>
+          <a:blip r:embed="rId3"/>
+          <a:stretch>
+            <a:fillRect/>
+          </a:stretch>
+        </p:blipFill>
+        <p:spPr>
+          <a:xfrm>
+            <a:off x="365760" y="1095744"/>
+            <a:ext cx="5120640" cy="2526650"/>
+          </a:xfrm>
+          <a:prstGeom prst="rect">
+            <a:avLst/>
+          </a:prstGeom>
+        </p:spPr>
+      </p:pic>
+      <p:sp>
+        <p:nvSpPr>
+          <p:cNvPr id="40" name="Cmt box"/>
+          <p:cNvSpPr/>
+          <p:nvPr/>
+        </p:nvSpPr>
+        <p:spPr>
+          <a:xfrm>
+            <a:off x="5669280" y="1095744"/>
+            <a:ext cx="3154240" cy="2526650"/>
+          </a:xfrm>
+          <a:prstGeom prst="rect">
+            <a:avLst/>
+          </a:prstGeom>
+          <a:solidFill>
+            <a:srgbClr val="0D1A2E"/>
+          </a:solidFill>
+          <a:ln w="12700">
+            <a:solidFill>
+              <a:srgbClr val="1A6BBF"/>
+            </a:solidFill>
+            <a:prstDash val="solid"/>
+          </a:ln>
+        </p:spPr>
+        <p:txBody>
+          <a:bodyPr/>
+          <a:p/>
+        </p:txBody>
+      </p:sp>
+      <p:sp>
+        <p:nvSpPr>
+          <p:cNvPr id="41" name="Cmt text"/>
+          <p:cNvSpPr/>
+          <p:nvPr/>
+        </p:nvSpPr>
+        <p:spPr>
+          <a:xfrm>
+            <a:off x="5852160" y="1188720"/>
+            <a:ext cx="2788480" cy="2360000"/>
+          </a:xfrm>
+          <a:prstGeom prst="rect">
+            <a:avLst/>
+          </a:prstGeom>
+          <a:noFill/>
+          <a:ln/>
+        </p:spPr>
+        <p:txBody>
+          <a:bodyPr wrap="square" lIns="0" tIns="0" rIns="0" bIns="0" rtlCol="0" anchor="t"/>
+          <a:lstStyle/>
+          <a:p>
+            <a:pPr indent="0" marL="0">
+              <a:buNone/>
+            </a:pPr>
+            <a:r>
+              <a:rPr lang="en-US" sz="1100" b="1" dirty="0">
+                <a:solidFill>
+                  <a:srgbClr val="4A9EFF"/>
+                </a:solidFill>
+              </a:rPr>
+              <a:t>What you’re seeing</a:t>
+            </a:r>
+          </a:p>
+          <a:p>
+            <a:pPr indent="0" marL="0">
+              <a:spcBef>
+                <a:spcPts val="900"/>
+              </a:spcBef>
+              <a:buNone/>
+            </a:pPr>
+            <a:r>
+              <a:rPr lang="en-US" sz="900" dirty="0">
+                <a:solidFill>
+                  <a:srgbClr val="C0C8D8"/>
+                </a:solidFill>
+              </a:rPr>
+              <a:t>•  Out-of-sample value of two optimiser portfolios, rebased to 100 at entry and marked to market.</a:t>
+            </a:r>
+          </a:p>
+          <a:p>
+            <a:pPr indent="0" marL="0">
+              <a:spcBef>
+                <a:spcPts val="900"/>
+              </a:spcBef>
+              <a:buNone/>
+            </a:pPr>
+            <a:r>
+              <a:rPr lang="en-US" sz="900" dirty="0">
+                <a:solidFill>
+                  <a:srgbClr val="C0C8D8"/>
+                </a:solidFill>
+              </a:rPr>
+              <a:t>•  Green = Portfolio (1), no derivative; orange = Portfolio (2), with the chosen derivative (a put).</a:t>
+            </a:r>
+          </a:p>
+          <a:p>
+            <a:pPr indent="0" marL="0">
+              <a:spcBef>
+                <a:spcPts val="900"/>
+              </a:spcBef>
+              <a:buNone/>
+            </a:pPr>
+            <a:r>
+              <a:rPr lang="en-US" sz="900" dirty="0">
+                <a:solidFill>
+                  <a:srgbClr val="C0C8D8"/>
+                </a:solidFill>
+              </a:rPr>
+              <a:t>•  The derivative line cushions drawdowns and ends higher — the realised hedging benefit on unseen data.</a:t>
+            </a:r>
+          </a:p>
+          <a:p>
+            <a:pPr indent="0" marL="0">
+              <a:spcBef>
+                <a:spcPts val="900"/>
+              </a:spcBef>
+              <a:buNone/>
+            </a:pPr>
+            <a:r>
+              <a:rPr lang="en-US" sz="900" dirty="0">
+                <a:solidFill>
+                  <a:srgbClr val="C0C8D8"/>
+                </a:solidFill>
+              </a:rPr>
+              <a:t>•  Realised alpha &amp; beta vs a benchmark are computed from these paths (table beneath the chart in the app).</a:t>
+            </a:r>
           </a:p>
         </p:txBody>
       </p:sp>
@@ -8264,7 +8908,7 @@
                   <a:srgbClr val="556A8A"/>
                 </a:solidFill>
               </a:rPr>
-              <a:t>3 / 15</a:t>
+              <a:t>3 / 17</a:t>
             </a:r>
             <a:endParaRPr lang="en-US" sz="900" dirty="0"/>
           </a:p>
@@ -9043,7 +9687,7 @@
                   <a:srgbClr val="556A8A"/>
                 </a:solidFill>
               </a:rPr>
-              <a:t>4 / 15</a:t>
+              <a:t>4 / 17</a:t>
             </a:r>
             <a:endParaRPr lang="en-US" sz="900" dirty="0"/>
           </a:p>
@@ -9780,7 +10424,7 @@
                   <a:srgbClr val="556A8A"/>
                 </a:solidFill>
               </a:rPr>
-              <a:t>5 / 15</a:t>
+              <a:t>5 / 17</a:t>
             </a:r>
             <a:endParaRPr lang="en-US" sz="900" dirty="0"/>
           </a:p>
@@ -10403,7 +11047,7 @@
                   <a:srgbClr val="556A8A"/>
                 </a:solidFill>
               </a:rPr>
-              <a:t>6 / 15</a:t>
+              <a:t>6 / 17</a:t>
             </a:r>
             <a:endParaRPr lang="en-US" sz="900" dirty="0"/>
           </a:p>
@@ -11211,7 +11855,7 @@
                   <a:srgbClr val="556A8A"/>
                 </a:solidFill>
               </a:rPr>
-              <a:t>7 / 15</a:t>
+              <a:t>7 / 17</a:t>
             </a:r>
             <a:endParaRPr lang="en-US" sz="900" dirty="0"/>
           </a:p>
@@ -11884,7 +12528,7 @@
                   <a:srgbClr val="556A8A"/>
                 </a:solidFill>
               </a:rPr>
-              <a:t>8 / 15</a:t>
+              <a:t>8 / 17</a:t>
             </a:r>
             <a:endParaRPr lang="en-US" sz="900" dirty="0"/>
           </a:p>
@@ -12784,7 +13428,7 @@
                   <a:srgbClr val="556A8A"/>
                 </a:solidFill>
               </a:rPr>
-              <a:t>9 / 15</a:t>
+              <a:t>9 / 17</a:t>
             </a:r>
             <a:endParaRPr lang="en-US" sz="900" dirty="0"/>
           </a:p>
@@ -13349,7 +13993,7 @@
                   <a:srgbClr val="556A8A"/>
                 </a:solidFill>
               </a:rPr>
-              <a:t>10 / 15</a:t>
+              <a:t>10 / 17</a:t>
             </a:r>
             <a:endParaRPr lang="en-US" sz="900" dirty="0"/>
           </a:p>

--- a/userguide.pptx
+++ b/userguide.pptx
@@ -2199,6 +2199,470 @@
 
 <file path=ppt/slides/slide10.xml><?xml version="1.0" encoding="utf-8"?>
 <p:sld xmlns:a="http://schemas.openxmlformats.org/drawingml/2006/main" xmlns:r="http://schemas.openxmlformats.org/officeDocument/2006/relationships" xmlns:p="http://schemas.openxmlformats.org/presentationml/2006/main">
+  <p:cSld name="Slide 9">
+    <p:bg>
+      <p:bgPr>
+        <a:solidFill>
+          <a:srgbClr val="020C1B"/>
+        </a:solidFill>
+      </p:bgPr>
+    </p:bg>
+    <p:spTree>
+      <p:nvGrpSpPr>
+        <p:cNvPr id="1" name=""/>
+        <p:cNvGrpSpPr/>
+        <p:nvPr/>
+      </p:nvGrpSpPr>
+      <p:grpSpPr>
+        <a:xfrm>
+          <a:off x="0" y="0"/>
+          <a:ext cx="0" cy="0"/>
+          <a:chOff x="0" y="0"/>
+          <a:chExt cx="0" cy="0"/>
+        </a:xfrm>
+      </p:grpSpPr>
+      <p:sp>
+        <p:nvSpPr>
+          <p:cNvPr id="2" name="Shape 0"/>
+          <p:cNvSpPr/>
+          <p:nvPr/>
+        </p:nvSpPr>
+        <p:spPr>
+          <a:xfrm>
+            <a:off x="0" y="0"/>
+            <a:ext cx="9144000" cy="54864"/>
+          </a:xfrm>
+          <a:prstGeom prst="rect">
+            <a:avLst/>
+          </a:prstGeom>
+          <a:solidFill>
+            <a:srgbClr val="1A6BBF"/>
+          </a:solidFill>
+          <a:ln w="12700">
+            <a:solidFill>
+              <a:srgbClr val="1A6BBF"/>
+            </a:solidFill>
+            <a:prstDash val="solid"/>
+          </a:ln>
+        </p:spPr>
+        <p:txBody>
+          <a:bodyPr/>
+          <a:p/>
+        </p:txBody>
+      </p:sp>
+      <p:sp>
+        <p:nvSpPr>
+          <p:cNvPr id="3" name="Text 1"/>
+          <p:cNvSpPr/>
+          <p:nvPr/>
+        </p:nvSpPr>
+        <p:spPr>
+          <a:xfrm>
+            <a:off x="365760" y="164592"/>
+            <a:ext cx="8229600" cy="457200"/>
+          </a:xfrm>
+          <a:prstGeom prst="rect">
+            <a:avLst/>
+          </a:prstGeom>
+          <a:noFill/>
+          <a:ln/>
+        </p:spPr>
+        <p:txBody>
+          <a:bodyPr wrap="square" rtlCol="0" anchor="ctr"/>
+          <a:lstStyle/>
+          <a:p>
+            <a:pPr indent="0" marL="0">
+              <a:buNone/>
+            </a:pPr>
+            <a:r>
+              <a:rPr lang="en-US" sz="2200" b="1" dirty="0">
+                <a:solidFill>
+                  <a:srgbClr val="FFFFFF"/>
+                </a:solidFill>
+              </a:rPr>
+              <a:t>Portfolio Results</a:t>
+            </a:r>
+            <a:endParaRPr lang="en-US" sz="2200" dirty="0"/>
+          </a:p>
+        </p:txBody>
+      </p:sp>
+      <p:sp>
+        <p:nvSpPr>
+          <p:cNvPr id="6" name="Text 4"/>
+          <p:cNvSpPr/>
+          <p:nvPr/>
+        </p:nvSpPr>
+        <p:spPr>
+          <a:xfrm>
+            <a:off x="365760" y="3154680"/>
+            <a:ext cx="8412480" cy="292608"/>
+          </a:xfrm>
+          <a:prstGeom prst="rect">
+            <a:avLst/>
+          </a:prstGeom>
+          <a:noFill/>
+          <a:ln/>
+        </p:spPr>
+        <p:txBody>
+          <a:bodyPr wrap="square" rtlCol="0" anchor="ctr"/>
+          <a:lstStyle/>
+          <a:p>
+            <a:pPr indent="0" marL="0">
+              <a:buNone/>
+            </a:pPr>
+            <a:r>
+              <a:rPr lang="en-US" sz="1100" b="1" dirty="0">
+                <a:solidFill>
+                  <a:srgbClr val="4A9EFF"/>
+                </a:solidFill>
+              </a:rPr>
+              <a:t>Key metrics</a:t>
+            </a:r>
+            <a:endParaRPr lang="en-US" sz="1100" dirty="0"/>
+          </a:p>
+        </p:txBody>
+      </p:sp>
+      <p:sp>
+        <p:nvSpPr>
+          <p:cNvPr id="7" name="Text 5"/>
+          <p:cNvSpPr/>
+          <p:nvPr/>
+        </p:nvSpPr>
+        <p:spPr>
+          <a:xfrm>
+            <a:off x="365760" y="3493008"/>
+            <a:ext cx="4114800" cy="274320"/>
+          </a:xfrm>
+          <a:prstGeom prst="rect">
+            <a:avLst/>
+          </a:prstGeom>
+          <a:noFill/>
+          <a:ln/>
+        </p:spPr>
+        <p:txBody>
+          <a:bodyPr wrap="square" rtlCol="0" anchor="ctr"/>
+          <a:lstStyle/>
+          <a:p>
+            <a:pPr indent="0" marL="0">
+              <a:buNone/>
+            </a:pPr>
+            <a:r>
+              <a:rPr lang="en-US" sz="900" b="1" dirty="0">
+                <a:solidFill>
+                  <a:srgbClr val="FFFFFF"/>
+                </a:solidFill>
+              </a:rPr>
+              <a:t xml:space="preserve">Expected return:  </a:t>
+            </a:r>
+            <a:pPr indent="0" marL="0">
+              <a:buNone/>
+            </a:pPr>
+            <a:r>
+              <a:rPr lang="en-US" sz="900" dirty="0">
+                <a:solidFill>
+                  <a:srgbClr val="C0C8D8"/>
+                </a:solidFill>
+              </a:rPr>
+              <a:t>Annualised mean return of the optimal portfolio</a:t>
+            </a:r>
+            <a:endParaRPr lang="en-US" sz="900" dirty="0"/>
+          </a:p>
+        </p:txBody>
+      </p:sp>
+      <p:sp>
+        <p:nvSpPr>
+          <p:cNvPr id="8" name="Text 6"/>
+          <p:cNvSpPr/>
+          <p:nvPr/>
+        </p:nvSpPr>
+        <p:spPr>
+          <a:xfrm>
+            <a:off x="365760" y="3803904"/>
+            <a:ext cx="4114800" cy="274320"/>
+          </a:xfrm>
+          <a:prstGeom prst="rect">
+            <a:avLst/>
+          </a:prstGeom>
+          <a:noFill/>
+          <a:ln/>
+        </p:spPr>
+        <p:txBody>
+          <a:bodyPr wrap="square" rtlCol="0" anchor="ctr"/>
+          <a:lstStyle/>
+          <a:p>
+            <a:pPr indent="0" marL="0">
+              <a:buNone/>
+            </a:pPr>
+            <a:r>
+              <a:rPr lang="en-US" sz="900" b="1" dirty="0">
+                <a:solidFill>
+                  <a:srgbClr val="FFFFFF"/>
+                </a:solidFill>
+              </a:rPr>
+              <a:t xml:space="preserve">Std deviation:  </a:t>
+            </a:r>
+            <a:pPr indent="0" marL="0">
+              <a:buNone/>
+            </a:pPr>
+            <a:r>
+              <a:rPr lang="en-US" sz="900" dirty="0">
+                <a:solidFill>
+                  <a:srgbClr val="C0C8D8"/>
+                </a:solidFill>
+              </a:rPr>
+              <a:t>Annualised portfolio volatility (risk measure)</a:t>
+            </a:r>
+            <a:endParaRPr lang="en-US" sz="900" dirty="0"/>
+          </a:p>
+        </p:txBody>
+      </p:sp>
+      <p:sp>
+        <p:nvSpPr>
+          <p:cNvPr id="9" name="Text 7"/>
+          <p:cNvSpPr/>
+          <p:nvPr/>
+        </p:nvSpPr>
+        <p:spPr>
+          <a:xfrm>
+            <a:off x="365760" y="4114800"/>
+            <a:ext cx="4114800" cy="274320"/>
+          </a:xfrm>
+          <a:prstGeom prst="rect">
+            <a:avLst/>
+          </a:prstGeom>
+          <a:noFill/>
+          <a:ln/>
+        </p:spPr>
+        <p:txBody>
+          <a:bodyPr wrap="square" rtlCol="0" anchor="ctr"/>
+          <a:lstStyle/>
+          <a:p>
+            <a:pPr indent="0" marL="0">
+              <a:buNone/>
+            </a:pPr>
+            <a:r>
+              <a:rPr lang="en-US" sz="900" b="1" dirty="0">
+                <a:solidFill>
+                  <a:srgbClr val="FFFFFF"/>
+                </a:solidFill>
+              </a:rPr>
+              <a:t xml:space="preserve">Skewness:  </a:t>
+            </a:r>
+            <a:pPr indent="0" marL="0">
+              <a:buNone/>
+            </a:pPr>
+            <a:r>
+              <a:rPr lang="en-US" sz="900" dirty="0">
+                <a:solidFill>
+                  <a:srgbClr val="C0C8D8"/>
+                </a:solidFill>
+              </a:rPr>
+              <a:t>Asymmetry of return distribution — positive = upside skew</a:t>
+            </a:r>
+            <a:endParaRPr lang="en-US" sz="900" dirty="0"/>
+          </a:p>
+        </p:txBody>
+      </p:sp>
+      <p:sp>
+        <p:nvSpPr>
+          <p:cNvPr id="10" name="Text 8"/>
+          <p:cNvSpPr/>
+          <p:nvPr/>
+        </p:nvSpPr>
+        <p:spPr>
+          <a:xfrm>
+            <a:off x="4663440" y="3493008"/>
+            <a:ext cx="4114800" cy="274320"/>
+          </a:xfrm>
+          <a:prstGeom prst="rect">
+            <a:avLst/>
+          </a:prstGeom>
+          <a:noFill/>
+          <a:ln/>
+        </p:spPr>
+        <p:txBody>
+          <a:bodyPr wrap="square" rtlCol="0" anchor="ctr"/>
+          <a:lstStyle/>
+          <a:p>
+            <a:pPr indent="0" marL="0">
+              <a:buNone/>
+            </a:pPr>
+            <a:r>
+              <a:rPr lang="en-US" sz="900" b="1" dirty="0">
+                <a:solidFill>
+                  <a:srgbClr val="FFFFFF"/>
+                </a:solidFill>
+              </a:rPr>
+              <a:t xml:space="preserve">Shortfall / ES:  </a:t>
+            </a:r>
+            <a:pPr indent="0" marL="0">
+              <a:buNone/>
+            </a:pPr>
+            <a:r>
+              <a:rPr lang="en-US" sz="900" dirty="0">
+                <a:solidFill>
+                  <a:srgbClr val="C0C8D8"/>
+                </a:solidFill>
+              </a:rPr>
+              <a:t>Expected loss in the tail (ES constraint value)</a:t>
+            </a:r>
+            <a:endParaRPr lang="en-US" sz="900" dirty="0"/>
+          </a:p>
+        </p:txBody>
+      </p:sp>
+      <p:sp>
+        <p:nvSpPr>
+          <p:cNvPr id="11" name="Text 9"/>
+          <p:cNvSpPr/>
+          <p:nvPr/>
+        </p:nvSpPr>
+        <p:spPr>
+          <a:xfrm>
+            <a:off x="4663440" y="3803904"/>
+            <a:ext cx="4114800" cy="274320"/>
+          </a:xfrm>
+          <a:prstGeom prst="rect">
+            <a:avLst/>
+          </a:prstGeom>
+          <a:noFill/>
+          <a:ln/>
+        </p:spPr>
+        <p:txBody>
+          <a:bodyPr wrap="square" rtlCol="0" anchor="ctr"/>
+          <a:lstStyle/>
+          <a:p>
+            <a:pPr indent="0" marL="0">
+              <a:buNone/>
+            </a:pPr>
+            <a:r>
+              <a:rPr lang="en-US" sz="900" b="1" dirty="0">
+                <a:solidFill>
+                  <a:srgbClr val="FFFFFF"/>
+                </a:solidFill>
+              </a:rPr>
+              <a:t xml:space="preserve">Portfolio weights:  </a:t>
+            </a:r>
+            <a:pPr indent="0" marL="0">
+              <a:buNone/>
+            </a:pPr>
+            <a:r>
+              <a:rPr lang="en-US" sz="900" dirty="0">
+                <a:solidFill>
+                  <a:srgbClr val="C0C8D8"/>
+                </a:solidFill>
+              </a:rPr>
+              <a:t>Allocation to each security and derivative</a:t>
+            </a:r>
+            <a:endParaRPr lang="en-US" sz="900" dirty="0"/>
+          </a:p>
+        </p:txBody>
+      </p:sp>
+      <p:sp>
+        <p:nvSpPr>
+          <p:cNvPr id="12" name="Text 10"/>
+          <p:cNvSpPr/>
+          <p:nvPr/>
+        </p:nvSpPr>
+        <p:spPr>
+          <a:xfrm>
+            <a:off x="8046720" y="4754880"/>
+            <a:ext cx="914400" cy="274320"/>
+          </a:xfrm>
+          <a:prstGeom prst="rect">
+            <a:avLst/>
+          </a:prstGeom>
+          <a:noFill/>
+          <a:ln/>
+        </p:spPr>
+        <p:txBody>
+          <a:bodyPr wrap="square" rtlCol="0" anchor="ctr"/>
+          <a:lstStyle/>
+          <a:p>
+            <a:pPr algn="r" indent="0" marL="0">
+              <a:buNone/>
+            </a:pPr>
+            <a:r>
+              <a:rPr lang="en-US" sz="900" dirty="0">
+                <a:solidFill>
+                  <a:srgbClr val="556A8A"/>
+                </a:solidFill>
+              </a:rPr>
+              <a:t>10 / 17</a:t>
+            </a:r>
+            <a:endParaRPr lang="en-US" sz="900" dirty="0"/>
+          </a:p>
+        </p:txBody>
+      </p:sp>
+      <p:sp>
+        <p:nvSpPr>
+          <p:cNvPr id="13" name="Text 11"/>
+          <p:cNvSpPr/>
+          <p:nvPr/>
+        </p:nvSpPr>
+        <p:spPr>
+          <a:xfrm>
+            <a:off x="365760" y="4754880"/>
+            <a:ext cx="6400800" cy="274320"/>
+          </a:xfrm>
+          <a:prstGeom prst="rect">
+            <a:avLst/>
+          </a:prstGeom>
+          <a:noFill/>
+          <a:ln/>
+        </p:spPr>
+        <p:txBody>
+          <a:bodyPr wrap="square" rtlCol="0" anchor="ctr"/>
+          <a:lstStyle/>
+          <a:p>
+            <a:pPr algn="l" indent="0" marL="0">
+              <a:buNone/>
+            </a:pPr>
+            <a:r>
+              <a:rPr lang="en-US" sz="900" dirty="0">
+                <a:solidFill>
+                  <a:srgbClr val="556A8A"/>
+                </a:solidFill>
+              </a:rPr>
+              <a:t>Beyond Mean-Variance Portfolio Optimiser — User Guide</a:t>
+            </a:r>
+            <a:endParaRPr lang="en-US" sz="900" dirty="0"/>
+          </a:p>
+        </p:txBody>
+      </p:sp>
+      <p:pic>
+        <p:nvPicPr>
+          <p:cNvPr id="14" name="Picture 13" descr="slide9results.png"/>
+          <p:cNvPicPr>
+            <a:picLocks noChangeAspect="1"/>
+          </p:cNvPicPr>
+          <p:nvPr/>
+        </p:nvPicPr>
+        <p:blipFill>
+          <a:blip r:embed="rId3"/>
+          <a:stretch>
+            <a:fillRect/>
+          </a:stretch>
+        </p:blipFill>
+        <p:spPr>
+          <a:xfrm>
+            <a:off x="3555669" y="749808"/>
+            <a:ext cx="2032661" cy="2286000"/>
+          </a:xfrm>
+          <a:prstGeom prst="rect">
+            <a:avLst/>
+          </a:prstGeom>
+        </p:spPr>
+      </p:pic>
+    </p:spTree>
+  </p:cSld>
+  <p:clrMapOvr>
+    <a:masterClrMapping/>
+  </p:clrMapOvr>
+</p:sld>
+</file>
+
+<file path=ppt/slides/slide11.xml><?xml version="1.0" encoding="utf-8"?>
+<p:sld xmlns:a="http://schemas.openxmlformats.org/drawingml/2006/main" xmlns:r="http://schemas.openxmlformats.org/officeDocument/2006/relationships" xmlns:p="http://schemas.openxmlformats.org/presentationml/2006/main">
   <p:cSld name="Slide 10">
     <p:bg>
       <p:bgPr>
@@ -2726,1265 +3190,7 @@
 </p:sld>
 </file>
 
-<file path=ppt/slides/slide11.xml><?xml version="1.0" encoding="utf-8"?>
-<p:sld xmlns:a="http://schemas.openxmlformats.org/drawingml/2006/main" xmlns:r="http://schemas.openxmlformats.org/officeDocument/2006/relationships" xmlns:p="http://schemas.openxmlformats.org/presentationml/2006/main">
-  <p:cSld name="Slide 11">
-    <p:bg>
-      <p:bgPr>
-        <a:solidFill>
-          <a:srgbClr val="020C1B"/>
-        </a:solidFill>
-      </p:bgPr>
-    </p:bg>
-    <p:spTree>
-      <p:nvGrpSpPr>
-        <p:cNvPr id="1" name=""/>
-        <p:cNvGrpSpPr/>
-        <p:nvPr/>
-      </p:nvGrpSpPr>
-      <p:grpSpPr>
-        <a:xfrm>
-          <a:off x="0" y="0"/>
-          <a:ext cx="0" cy="0"/>
-          <a:chOff x="0" y="0"/>
-          <a:chExt cx="0" cy="0"/>
-        </a:xfrm>
-      </p:grpSpPr>
-      <p:sp>
-        <p:nvSpPr>
-          <p:cNvPr id="2" name="Shape 0"/>
-          <p:cNvSpPr/>
-          <p:nvPr/>
-        </p:nvSpPr>
-        <p:spPr>
-          <a:xfrm>
-            <a:off x="0" y="0"/>
-            <a:ext cx="9144000" cy="54864"/>
-          </a:xfrm>
-          <a:prstGeom prst="rect">
-            <a:avLst/>
-          </a:prstGeom>
-          <a:solidFill>
-            <a:srgbClr val="1A6BBF"/>
-          </a:solidFill>
-          <a:ln w="12700">
-            <a:solidFill>
-              <a:srgbClr val="1A6BBF"/>
-            </a:solidFill>
-            <a:prstDash val="solid"/>
-          </a:ln>
-        </p:spPr>
-        <p:txBody>
-          <a:bodyPr/>
-          <a:p/>
-        </p:txBody>
-      </p:sp>
-      <p:sp>
-        <p:nvSpPr>
-          <p:cNvPr id="3" name="Text 1"/>
-          <p:cNvSpPr/>
-          <p:nvPr/>
-        </p:nvSpPr>
-        <p:spPr>
-          <a:xfrm>
-            <a:off x="365760" y="164592"/>
-            <a:ext cx="8229600" cy="457200"/>
-          </a:xfrm>
-          <a:prstGeom prst="rect">
-            <a:avLst/>
-          </a:prstGeom>
-          <a:noFill/>
-          <a:ln/>
-        </p:spPr>
-        <p:txBody>
-          <a:bodyPr wrap="square" rtlCol="0" anchor="ctr"/>
-          <a:lstStyle/>
-          <a:p>
-            <a:pPr indent="0" marL="0">
-              <a:buNone/>
-            </a:pPr>
-            <a:r>
-              <a:rPr lang="en-US" sz="2200" b="1" dirty="0">
-                <a:solidFill>
-                  <a:srgbClr val="FFFFFF"/>
-                </a:solidFill>
-              </a:rPr>
-              <a:t>About &amp; Glossary Tabs</a:t>
-            </a:r>
-            <a:endParaRPr lang="en-US" sz="2200" dirty="0"/>
-          </a:p>
-        </p:txBody>
-      </p:sp>
-      <p:sp>
-        <p:nvSpPr>
-          <p:cNvPr id="4" name="Shape 2"/>
-          <p:cNvSpPr/>
-          <p:nvPr/>
-        </p:nvSpPr>
-        <p:spPr>
-          <a:xfrm>
-            <a:off x="365760" y="749808"/>
-            <a:ext cx="4023360" cy="3474720"/>
-          </a:xfrm>
-          <a:prstGeom prst="rect">
-            <a:avLst/>
-          </a:prstGeom>
-          <a:solidFill>
-            <a:srgbClr val="0D1A2E"/>
-          </a:solidFill>
-          <a:ln w="12700">
-            <a:solidFill>
-              <a:srgbClr val="1A6BBF"/>
-            </a:solidFill>
-            <a:prstDash val="solid"/>
-          </a:ln>
-        </p:spPr>
-        <p:txBody>
-          <a:bodyPr/>
-          <a:p/>
-        </p:txBody>
-      </p:sp>
-      <p:sp>
-        <p:nvSpPr>
-          <p:cNvPr id="5" name="Text 3"/>
-          <p:cNvSpPr/>
-          <p:nvPr/>
-        </p:nvSpPr>
-        <p:spPr>
-          <a:xfrm>
-            <a:off x="548640" y="822960"/>
-            <a:ext cx="3657600" cy="320040"/>
-          </a:xfrm>
-          <a:prstGeom prst="rect">
-            <a:avLst/>
-          </a:prstGeom>
-          <a:noFill/>
-          <a:ln/>
-        </p:spPr>
-        <p:txBody>
-          <a:bodyPr wrap="square" lIns="0" tIns="0" rIns="0" bIns="0" rtlCol="0" anchor="ctr"/>
-          <a:lstStyle/>
-          <a:p>
-            <a:pPr indent="0" marL="0">
-              <a:buNone/>
-            </a:pPr>
-            <a:r>
-              <a:rPr lang="en-US" sz="1200" b="1" dirty="0">
-                <a:solidFill>
-                  <a:srgbClr val="4A9EFF"/>
-                </a:solidFill>
-              </a:rPr>
-              <a:t>📖  About Tab</a:t>
-            </a:r>
-            <a:endParaRPr lang="en-US" sz="1200" dirty="0"/>
-          </a:p>
-        </p:txBody>
-      </p:sp>
-      <p:sp>
-        <p:nvSpPr>
-          <p:cNvPr id="8" name="Text 6"/>
-          <p:cNvSpPr/>
-          <p:nvPr/>
-        </p:nvSpPr>
-        <p:spPr>
-          <a:xfrm>
-            <a:off x="548640" y="2880360"/>
-            <a:ext cx="3657600" cy="256032"/>
-          </a:xfrm>
-          <a:prstGeom prst="rect">
-            <a:avLst/>
-          </a:prstGeom>
-          <a:noFill/>
-          <a:ln/>
-        </p:spPr>
-        <p:txBody>
-          <a:bodyPr wrap="square" rtlCol="0" anchor="ctr"/>
-          <a:lstStyle/>
-          <a:p>
-            <a:pPr indent="0" marL="0">
-              <a:buNone/>
-            </a:pPr>
-            <a:r>
-              <a:rPr lang="en-US" sz="950" dirty="0">
-                <a:solidFill>
-                  <a:srgbClr val="4A9EFF"/>
-                </a:solidFill>
-              </a:rPr>
-              <a:t xml:space="preserve">▸  </a:t>
-            </a:r>
-            <a:pPr indent="0" marL="0">
-              <a:buNone/>
-            </a:pPr>
-            <a:r>
-              <a:rPr lang="en-US" sz="950" dirty="0">
-                <a:solidFill>
-                  <a:srgbClr val="C0C8D8"/>
-                </a:solidFill>
-              </a:rPr>
-              <a:t>Author background &amp; contact</a:t>
-            </a:r>
-            <a:endParaRPr lang="en-US" sz="950" dirty="0"/>
-          </a:p>
-        </p:txBody>
-      </p:sp>
-      <p:sp>
-        <p:nvSpPr>
-          <p:cNvPr id="9" name="Text 7"/>
-          <p:cNvSpPr/>
-          <p:nvPr/>
-        </p:nvSpPr>
-        <p:spPr>
-          <a:xfrm>
-            <a:off x="548640" y="3182112"/>
-            <a:ext cx="3657600" cy="256032"/>
-          </a:xfrm>
-          <a:prstGeom prst="rect">
-            <a:avLst/>
-          </a:prstGeom>
-          <a:noFill/>
-          <a:ln/>
-        </p:spPr>
-        <p:txBody>
-          <a:bodyPr wrap="square" rtlCol="0" anchor="ctr"/>
-          <a:lstStyle/>
-          <a:p>
-            <a:pPr indent="0" marL="0">
-              <a:buNone/>
-            </a:pPr>
-            <a:r>
-              <a:rPr lang="en-US" sz="950" dirty="0">
-                <a:solidFill>
-                  <a:srgbClr val="4A9EFF"/>
-                </a:solidFill>
-              </a:rPr>
-              <a:t xml:space="preserve">▸  </a:t>
-            </a:r>
-            <a:pPr indent="0" marL="0">
-              <a:buNone/>
-            </a:pPr>
-            <a:r>
-              <a:rPr lang="en-US" sz="950" dirty="0">
-                <a:solidFill>
-                  <a:srgbClr val="C0C8D8"/>
-                </a:solidFill>
-              </a:rPr>
-              <a:t>App description &amp; algorithm</a:t>
-            </a:r>
-            <a:endParaRPr lang="en-US" sz="950" dirty="0"/>
-          </a:p>
-        </p:txBody>
-      </p:sp>
-      <p:sp>
-        <p:nvSpPr>
-          <p:cNvPr id="10" name="Text 8"/>
-          <p:cNvSpPr/>
-          <p:nvPr/>
-        </p:nvSpPr>
-        <p:spPr>
-          <a:xfrm>
-            <a:off x="548640" y="3483864"/>
-            <a:ext cx="3657600" cy="256032"/>
-          </a:xfrm>
-          <a:prstGeom prst="rect">
-            <a:avLst/>
-          </a:prstGeom>
-          <a:noFill/>
-          <a:ln/>
-        </p:spPr>
-        <p:txBody>
-          <a:bodyPr wrap="square" rtlCol="0" anchor="ctr"/>
-          <a:lstStyle/>
-          <a:p>
-            <a:pPr indent="0" marL="0">
-              <a:buNone/>
-            </a:pPr>
-            <a:r>
-              <a:rPr lang="en-US" sz="950" dirty="0">
-                <a:solidFill>
-                  <a:srgbClr val="4A9EFF"/>
-                </a:solidFill>
-              </a:rPr>
-              <a:t xml:space="preserve">▸  </a:t>
-            </a:r>
-            <a:pPr indent="0" marL="0">
-              <a:buNone/>
-            </a:pPr>
-            <a:r>
-              <a:rPr lang="en-US" sz="950" dirty="0">
-                <a:solidFill>
-                  <a:srgbClr val="C0C8D8"/>
-                </a:solidFill>
-              </a:rPr>
-              <a:t>Academic references</a:t>
-            </a:r>
-            <a:endParaRPr lang="en-US" sz="950" dirty="0"/>
-          </a:p>
-        </p:txBody>
-      </p:sp>
-      <p:sp>
-        <p:nvSpPr>
-          <p:cNvPr id="11" name="Text 9"/>
-          <p:cNvSpPr/>
-          <p:nvPr/>
-        </p:nvSpPr>
-        <p:spPr>
-          <a:xfrm>
-            <a:off x="548640" y="3785616"/>
-            <a:ext cx="3657600" cy="256032"/>
-          </a:xfrm>
-          <a:prstGeom prst="rect">
-            <a:avLst/>
-          </a:prstGeom>
-          <a:noFill/>
-          <a:ln/>
-        </p:spPr>
-        <p:txBody>
-          <a:bodyPr wrap="square" rtlCol="0" anchor="ctr"/>
-          <a:lstStyle/>
-          <a:p>
-            <a:pPr indent="0" marL="0">
-              <a:buNone/>
-            </a:pPr>
-            <a:r>
-              <a:rPr lang="en-US" sz="950" dirty="0">
-                <a:solidFill>
-                  <a:srgbClr val="4A9EFF"/>
-                </a:solidFill>
-              </a:rPr>
-              <a:t xml:space="preserve">▸  </a:t>
-            </a:r>
-            <a:pPr indent="0" marL="0">
-              <a:buNone/>
-            </a:pPr>
-            <a:r>
-              <a:rPr lang="en-US" sz="950" dirty="0">
-                <a:solidFill>
-                  <a:srgbClr val="C0C8D8"/>
-                </a:solidFill>
-              </a:rPr>
-              <a:t>Legal disclaimer</a:t>
-            </a:r>
-            <a:endParaRPr lang="en-US" sz="950" dirty="0"/>
-          </a:p>
-        </p:txBody>
-      </p:sp>
-      <p:sp>
-        <p:nvSpPr>
-          <p:cNvPr id="12" name="Shape 10"/>
-          <p:cNvSpPr/>
-          <p:nvPr/>
-        </p:nvSpPr>
-        <p:spPr>
-          <a:xfrm>
-            <a:off x="4754880" y="749808"/>
-            <a:ext cx="4023360" cy="3474720"/>
-          </a:xfrm>
-          <a:prstGeom prst="rect">
-            <a:avLst/>
-          </a:prstGeom>
-          <a:solidFill>
-            <a:srgbClr val="0D1A2E"/>
-          </a:solidFill>
-          <a:ln w="12700">
-            <a:solidFill>
-              <a:srgbClr val="1A6BBF"/>
-            </a:solidFill>
-            <a:prstDash val="solid"/>
-          </a:ln>
-        </p:spPr>
-        <p:txBody>
-          <a:bodyPr/>
-          <a:p/>
-        </p:txBody>
-      </p:sp>
-      <p:sp>
-        <p:nvSpPr>
-          <p:cNvPr id="13" name="Text 11"/>
-          <p:cNvSpPr/>
-          <p:nvPr/>
-        </p:nvSpPr>
-        <p:spPr>
-          <a:xfrm>
-            <a:off x="4937760" y="822960"/>
-            <a:ext cx="3657600" cy="320040"/>
-          </a:xfrm>
-          <a:prstGeom prst="rect">
-            <a:avLst/>
-          </a:prstGeom>
-          <a:noFill/>
-          <a:ln/>
-        </p:spPr>
-        <p:txBody>
-          <a:bodyPr wrap="square" lIns="0" tIns="0" rIns="0" bIns="0" rtlCol="0" anchor="ctr"/>
-          <a:lstStyle/>
-          <a:p>
-            <a:pPr indent="0" marL="0">
-              <a:buNone/>
-            </a:pPr>
-            <a:r>
-              <a:rPr lang="en-US" sz="1200" b="1" dirty="0">
-                <a:solidFill>
-                  <a:srgbClr val="4A9EFF"/>
-                </a:solidFill>
-              </a:rPr>
-              <a:t>📚  Glossary Tab</a:t>
-            </a:r>
-            <a:endParaRPr lang="en-US" sz="1200" dirty="0"/>
-          </a:p>
-        </p:txBody>
-      </p:sp>
-      <p:sp>
-        <p:nvSpPr>
-          <p:cNvPr id="16" name="Text 14"/>
-          <p:cNvSpPr/>
-          <p:nvPr/>
-        </p:nvSpPr>
-        <p:spPr>
-          <a:xfrm>
-            <a:off x="4937760" y="2880360"/>
-            <a:ext cx="3657600" cy="256032"/>
-          </a:xfrm>
-          <a:prstGeom prst="rect">
-            <a:avLst/>
-          </a:prstGeom>
-          <a:noFill/>
-          <a:ln/>
-        </p:spPr>
-        <p:txBody>
-          <a:bodyPr wrap="square" rtlCol="0" anchor="ctr"/>
-          <a:lstStyle/>
-          <a:p>
-            <a:pPr indent="0" marL="0">
-              <a:buNone/>
-            </a:pPr>
-            <a:r>
-              <a:rPr lang="en-US" sz="950" dirty="0">
-                <a:solidFill>
-                  <a:srgbClr val="4A9EFF"/>
-                </a:solidFill>
-              </a:rPr>
-              <a:t xml:space="preserve">▸  </a:t>
-            </a:r>
-            <a:pPr indent="0" marL="0">
-              <a:buNone/>
-            </a:pPr>
-            <a:r>
-              <a:rPr lang="en-US" sz="950" dirty="0">
-                <a:solidFill>
-                  <a:srgbClr val="C0C8D8"/>
-                </a:solidFill>
-              </a:rPr>
-              <a:t>Click any term for AI explanation</a:t>
-            </a:r>
-            <a:endParaRPr lang="en-US" sz="950" dirty="0"/>
-          </a:p>
-        </p:txBody>
-      </p:sp>
-      <p:sp>
-        <p:nvSpPr>
-          <p:cNvPr id="17" name="Text 15"/>
-          <p:cNvSpPr/>
-          <p:nvPr/>
-        </p:nvSpPr>
-        <p:spPr>
-          <a:xfrm>
-            <a:off x="4937760" y="3182112"/>
-            <a:ext cx="3657600" cy="256032"/>
-          </a:xfrm>
-          <a:prstGeom prst="rect">
-            <a:avLst/>
-          </a:prstGeom>
-          <a:noFill/>
-          <a:ln/>
-        </p:spPr>
-        <p:txBody>
-          <a:bodyPr wrap="square" rtlCol="0" anchor="ctr"/>
-          <a:lstStyle/>
-          <a:p>
-            <a:pPr indent="0" marL="0">
-              <a:buNone/>
-            </a:pPr>
-            <a:r>
-              <a:rPr lang="en-US" sz="950" dirty="0">
-                <a:solidFill>
-                  <a:srgbClr val="4A9EFF"/>
-                </a:solidFill>
-              </a:rPr>
-              <a:t xml:space="preserve">▸  </a:t>
-            </a:r>
-            <a:pPr indent="0" marL="0">
-              <a:buNone/>
-            </a:pPr>
-            <a:r>
-              <a:rPr lang="en-US" sz="950" dirty="0">
-                <a:solidFill>
-                  <a:srgbClr val="C0C8D8"/>
-                </a:solidFill>
-              </a:rPr>
-              <a:t>Covers derivatives, risk, portfolio theory</a:t>
-            </a:r>
-            <a:endParaRPr lang="en-US" sz="950" dirty="0"/>
-          </a:p>
-        </p:txBody>
-      </p:sp>
-      <p:sp>
-        <p:nvSpPr>
-          <p:cNvPr id="18" name="Text 16"/>
-          <p:cNvSpPr/>
-          <p:nvPr/>
-        </p:nvSpPr>
-        <p:spPr>
-          <a:xfrm>
-            <a:off x="4937760" y="3483864"/>
-            <a:ext cx="3657600" cy="256032"/>
-          </a:xfrm>
-          <a:prstGeom prst="rect">
-            <a:avLst/>
-          </a:prstGeom>
-          <a:noFill/>
-          <a:ln/>
-        </p:spPr>
-        <p:txBody>
-          <a:bodyPr wrap="square" rtlCol="0" anchor="ctr"/>
-          <a:lstStyle/>
-          <a:p>
-            <a:pPr indent="0" marL="0">
-              <a:buNone/>
-            </a:pPr>
-            <a:r>
-              <a:rPr lang="en-US" sz="950" dirty="0">
-                <a:solidFill>
-                  <a:srgbClr val="4A9EFF"/>
-                </a:solidFill>
-              </a:rPr>
-              <a:t xml:space="preserve">▸  </a:t>
-            </a:r>
-            <a:pPr indent="0" marL="0">
-              <a:buNone/>
-            </a:pPr>
-            <a:r>
-              <a:rPr lang="en-US" sz="950" dirty="0">
-                <a:solidFill>
-                  <a:srgbClr val="C0C8D8"/>
-                </a:solidFill>
-              </a:rPr>
-              <a:t>Ask your own questions</a:t>
-            </a:r>
-            <a:endParaRPr lang="en-US" sz="950" dirty="0"/>
-          </a:p>
-        </p:txBody>
-      </p:sp>
-      <p:sp>
-        <p:nvSpPr>
-          <p:cNvPr id="19" name="Text 17"/>
-          <p:cNvSpPr/>
-          <p:nvPr/>
-        </p:nvSpPr>
-        <p:spPr>
-          <a:xfrm>
-            <a:off x="4937760" y="3785616"/>
-            <a:ext cx="3657600" cy="256032"/>
-          </a:xfrm>
-          <a:prstGeom prst="rect">
-            <a:avLst/>
-          </a:prstGeom>
-          <a:noFill/>
-          <a:ln/>
-        </p:spPr>
-        <p:txBody>
-          <a:bodyPr wrap="square" rtlCol="0" anchor="ctr"/>
-          <a:lstStyle/>
-          <a:p>
-            <a:pPr indent="0" marL="0">
-              <a:buNone/>
-            </a:pPr>
-            <a:r>
-              <a:rPr lang="en-US" sz="950" dirty="0">
-                <a:solidFill>
-                  <a:srgbClr val="4A9EFF"/>
-                </a:solidFill>
-              </a:rPr>
-              <a:t xml:space="preserve">▸  </a:t>
-            </a:r>
-            <a:pPr indent="0" marL="0">
-              <a:buNone/>
-            </a:pPr>
-            <a:r>
-              <a:rPr lang="en-US" sz="950" dirty="0">
-                <a:solidFill>
-                  <a:srgbClr val="C0C8D8"/>
-                </a:solidFill>
-              </a:rPr>
-              <a:t>Tailored to behavioural portfolio context</a:t>
-            </a:r>
-            <a:endParaRPr lang="en-US" sz="950" dirty="0"/>
-          </a:p>
-        </p:txBody>
-      </p:sp>
-      <p:sp>
-        <p:nvSpPr>
-          <p:cNvPr id="20" name="Text 18"/>
-          <p:cNvSpPr/>
-          <p:nvPr/>
-        </p:nvSpPr>
-        <p:spPr>
-          <a:xfrm>
-            <a:off x="8046720" y="4754880"/>
-            <a:ext cx="914400" cy="274320"/>
-          </a:xfrm>
-          <a:prstGeom prst="rect">
-            <a:avLst/>
-          </a:prstGeom>
-          <a:noFill/>
-          <a:ln/>
-        </p:spPr>
-        <p:txBody>
-          <a:bodyPr wrap="square" rtlCol="0" anchor="ctr"/>
-          <a:lstStyle/>
-          <a:p>
-            <a:pPr algn="r" indent="0" marL="0">
-              <a:buNone/>
-            </a:pPr>
-            <a:r>
-              <a:rPr lang="en-US" sz="900" dirty="0">
-                <a:solidFill>
-                  <a:srgbClr val="556A8A"/>
-                </a:solidFill>
-              </a:rPr>
-              <a:t>16 / 17</a:t>
-            </a:r>
-            <a:endParaRPr lang="en-US" sz="900" dirty="0"/>
-          </a:p>
-        </p:txBody>
-      </p:sp>
-      <p:sp>
-        <p:nvSpPr>
-          <p:cNvPr id="21" name="Text 19"/>
-          <p:cNvSpPr/>
-          <p:nvPr/>
-        </p:nvSpPr>
-        <p:spPr>
-          <a:xfrm>
-            <a:off x="365760" y="4754880"/>
-            <a:ext cx="6400800" cy="274320"/>
-          </a:xfrm>
-          <a:prstGeom prst="rect">
-            <a:avLst/>
-          </a:prstGeom>
-          <a:noFill/>
-          <a:ln/>
-        </p:spPr>
-        <p:txBody>
-          <a:bodyPr wrap="square" rtlCol="0" anchor="ctr"/>
-          <a:lstStyle/>
-          <a:p>
-            <a:pPr algn="l" indent="0" marL="0">
-              <a:buNone/>
-            </a:pPr>
-            <a:r>
-              <a:rPr lang="en-US" sz="900" dirty="0">
-                <a:solidFill>
-                  <a:srgbClr val="556A8A"/>
-                </a:solidFill>
-              </a:rPr>
-              <a:t>Beyond Mean-Variance Portfolio Optimiser — User Guide</a:t>
-            </a:r>
-            <a:endParaRPr lang="en-US" sz="900" dirty="0"/>
-          </a:p>
-        </p:txBody>
-      </p:sp>
-      <p:pic>
-        <p:nvPicPr>
-          <p:cNvPr id="22" name="Picture 21" descr="slide11about.png"/>
-          <p:cNvPicPr>
-            <a:picLocks noChangeAspect="1"/>
-          </p:cNvPicPr>
-          <p:nvPr/>
-        </p:nvPicPr>
-        <p:blipFill>
-          <a:blip r:embed="rId3"/>
-          <a:stretch>
-            <a:fillRect/>
-          </a:stretch>
-        </p:blipFill>
-        <p:spPr>
-          <a:xfrm>
-            <a:off x="774945" y="1188720"/>
-            <a:ext cx="3204989" cy="1645920"/>
-          </a:xfrm>
-          <a:prstGeom prst="rect">
-            <a:avLst/>
-          </a:prstGeom>
-        </p:spPr>
-      </p:pic>
-      <p:pic>
-        <p:nvPicPr>
-          <p:cNvPr id="23" name="Picture 22" descr="Slide11Glossary.png"/>
-          <p:cNvPicPr>
-            <a:picLocks noChangeAspect="1"/>
-          </p:cNvPicPr>
-          <p:nvPr/>
-        </p:nvPicPr>
-        <p:blipFill>
-          <a:blip r:embed="rId4"/>
-          <a:stretch>
-            <a:fillRect/>
-          </a:stretch>
-        </p:blipFill>
-        <p:spPr>
-          <a:xfrm>
-            <a:off x="4981315" y="1188720"/>
-            <a:ext cx="3570489" cy="1645920"/>
-          </a:xfrm>
-          <a:prstGeom prst="rect">
-            <a:avLst/>
-          </a:prstGeom>
-        </p:spPr>
-      </p:pic>
-    </p:spTree>
-  </p:cSld>
-  <p:clrMapOvr>
-    <a:masterClrMapping/>
-  </p:clrMapOvr>
-</p:sld>
-</file>
-
 <file path=ppt/slides/slide12.xml><?xml version="1.0" encoding="utf-8"?>
-<p:sld xmlns:a="http://schemas.openxmlformats.org/drawingml/2006/main" xmlns:r="http://schemas.openxmlformats.org/officeDocument/2006/relationships" xmlns:p="http://schemas.openxmlformats.org/presentationml/2006/main">
-  <p:cSld name="Slide 12">
-    <p:bg>
-      <p:bgPr>
-        <a:solidFill>
-          <a:srgbClr val="020C1B"/>
-        </a:solidFill>
-      </p:bgPr>
-    </p:bg>
-    <p:spTree>
-      <p:nvGrpSpPr>
-        <p:cNvPr id="1" name=""/>
-        <p:cNvGrpSpPr/>
-        <p:nvPr/>
-      </p:nvGrpSpPr>
-      <p:grpSpPr>
-        <a:xfrm>
-          <a:off x="0" y="0"/>
-          <a:ext cx="0" cy="0"/>
-          <a:chOff x="0" y="0"/>
-          <a:chExt cx="0" cy="0"/>
-        </a:xfrm>
-      </p:grpSpPr>
-      <p:sp>
-        <p:nvSpPr>
-          <p:cNvPr id="2" name="Shape 0"/>
-          <p:cNvSpPr/>
-          <p:nvPr/>
-        </p:nvSpPr>
-        <p:spPr>
-          <a:xfrm>
-            <a:off x="0" y="0"/>
-            <a:ext cx="9144000" cy="54864"/>
-          </a:xfrm>
-          <a:prstGeom prst="rect">
-            <a:avLst/>
-          </a:prstGeom>
-          <a:solidFill>
-            <a:srgbClr val="1A6BBF"/>
-          </a:solidFill>
-          <a:ln w="12700">
-            <a:solidFill>
-              <a:srgbClr val="1A6BBF"/>
-            </a:solidFill>
-            <a:prstDash val="solid"/>
-          </a:ln>
-        </p:spPr>
-        <p:txBody>
-          <a:bodyPr/>
-          <a:p/>
-        </p:txBody>
-      </p:sp>
-      <p:sp>
-        <p:nvSpPr>
-          <p:cNvPr id="3" name="Text 1"/>
-          <p:cNvSpPr/>
-          <p:nvPr/>
-        </p:nvSpPr>
-        <p:spPr>
-          <a:xfrm>
-            <a:off x="365760" y="164592"/>
-            <a:ext cx="8229600" cy="457200"/>
-          </a:xfrm>
-          <a:prstGeom prst="rect">
-            <a:avLst/>
-          </a:prstGeom>
-          <a:noFill/>
-          <a:ln/>
-        </p:spPr>
-        <p:txBody>
-          <a:bodyPr wrap="square" rtlCol="0" anchor="ctr"/>
-          <a:lstStyle/>
-          <a:p>
-            <a:pPr indent="0" marL="0">
-              <a:buNone/>
-            </a:pPr>
-            <a:r>
-              <a:rPr lang="en-US" sz="2200" b="1" dirty="0">
-                <a:solidFill>
-                  <a:srgbClr val="FFFFFF"/>
-                </a:solidFill>
-              </a:rPr>
-              <a:t>Disclaimer &amp; Contact</a:t>
-            </a:r>
-            <a:endParaRPr lang="en-US" sz="2200" dirty="0"/>
-          </a:p>
-        </p:txBody>
-      </p:sp>
-      <p:sp>
-        <p:nvSpPr>
-          <p:cNvPr id="4" name="Shape 2"/>
-          <p:cNvSpPr/>
-          <p:nvPr/>
-        </p:nvSpPr>
-        <p:spPr>
-          <a:xfrm>
-            <a:off x="365760" y="777240"/>
-            <a:ext cx="8412480" cy="1920240"/>
-          </a:xfrm>
-          <a:prstGeom prst="rect">
-            <a:avLst/>
-          </a:prstGeom>
-          <a:solidFill>
-            <a:srgbClr val="1A1200"/>
-          </a:solidFill>
-          <a:ln w="19050">
-            <a:solidFill>
-              <a:srgbClr val="F59E0B"/>
-            </a:solidFill>
-            <a:prstDash val="solid"/>
-          </a:ln>
-        </p:spPr>
-        <p:txBody>
-          <a:bodyPr/>
-          <a:p/>
-        </p:txBody>
-      </p:sp>
-      <p:sp>
-        <p:nvSpPr>
-          <p:cNvPr id="5" name="Text 3"/>
-          <p:cNvSpPr/>
-          <p:nvPr/>
-        </p:nvSpPr>
-        <p:spPr>
-          <a:xfrm>
-            <a:off x="548640" y="841248"/>
-            <a:ext cx="8046720" cy="320040"/>
-          </a:xfrm>
-          <a:prstGeom prst="rect">
-            <a:avLst/>
-          </a:prstGeom>
-          <a:noFill/>
-          <a:ln/>
-        </p:spPr>
-        <p:txBody>
-          <a:bodyPr wrap="square" lIns="0" tIns="0" rIns="0" bIns="0" rtlCol="0" anchor="ctr"/>
-          <a:lstStyle/>
-          <a:p>
-            <a:pPr indent="0" marL="0">
-              <a:buNone/>
-            </a:pPr>
-            <a:r>
-              <a:rPr lang="en-US" sz="1100" b="1" dirty="0">
-                <a:solidFill>
-                  <a:srgbClr val="F59E0B"/>
-                </a:solidFill>
-              </a:rPr>
-              <a:t>⚠️  Legal Disclaimer</a:t>
-            </a:r>
-            <a:endParaRPr lang="en-US" sz="1100" dirty="0"/>
-          </a:p>
-        </p:txBody>
-      </p:sp>
-      <p:sp>
-        <p:nvSpPr>
-          <p:cNvPr id="6" name="Text 4"/>
-          <p:cNvSpPr/>
-          <p:nvPr/>
-        </p:nvSpPr>
-        <p:spPr>
-          <a:xfrm>
-            <a:off x="548640" y="1188720"/>
-            <a:ext cx="8046720" cy="1371600"/>
-          </a:xfrm>
-          <a:prstGeom prst="rect">
-            <a:avLst/>
-          </a:prstGeom>
-          <a:noFill/>
-          <a:ln/>
-        </p:spPr>
-        <p:txBody>
-          <a:bodyPr wrap="square" lIns="0" tIns="0" rIns="0" bIns="0" rtlCol="0" anchor="ctr"/>
-          <a:lstStyle/>
-          <a:p>
-            <a:pPr indent="0" marL="0">
-              <a:buNone/>
-            </a:pPr>
-            <a:r>
-              <a:rPr lang="en-US" sz="950" dirty="0">
-                <a:solidFill>
-                  <a:srgbClr val="C0C8D8"/>
-                </a:solidFill>
-              </a:rPr>
-              <a:t>This application is based on the mental accounts portfolio optimisation framework of Das &amp; Statman (2009) and Das, Markowitz, Scheid &amp; Statman (2010), as extended in Jeddou (2012). It is provided for educational and research purposes only and does not constitute financial advice, investment recommendations, or a solicitation to buy or sell any financial instrument. Results are purely illustrative and should not be used as the basis for any investment decision.</a:t>
-            </a:r>
-            <a:endParaRPr lang="en-US" sz="950" dirty="0"/>
-          </a:p>
-        </p:txBody>
-      </p:sp>
-      <p:sp>
-        <p:nvSpPr>
-          <p:cNvPr id="7" name="Shape 5"/>
-          <p:cNvSpPr/>
-          <p:nvPr/>
-        </p:nvSpPr>
-        <p:spPr>
-          <a:xfrm>
-            <a:off x="365760" y="2834640"/>
-            <a:ext cx="8412480" cy="1234440"/>
-          </a:xfrm>
-          <a:prstGeom prst="rect">
-            <a:avLst/>
-          </a:prstGeom>
-          <a:solidFill>
-            <a:srgbClr val="0D1A2E"/>
-          </a:solidFill>
-          <a:ln w="12700">
-            <a:solidFill>
-              <a:srgbClr val="1A6BBF"/>
-            </a:solidFill>
-            <a:prstDash val="solid"/>
-          </a:ln>
-        </p:spPr>
-        <p:txBody>
-          <a:bodyPr/>
-          <a:p/>
-        </p:txBody>
-      </p:sp>
-      <p:sp>
-        <p:nvSpPr>
-          <p:cNvPr id="8" name="Text 6"/>
-          <p:cNvSpPr/>
-          <p:nvPr/>
-        </p:nvSpPr>
-        <p:spPr>
-          <a:xfrm>
-            <a:off x="548640" y="2889504"/>
-            <a:ext cx="8046720" cy="274320"/>
-          </a:xfrm>
-          <a:prstGeom prst="rect">
-            <a:avLst/>
-          </a:prstGeom>
-          <a:noFill/>
-          <a:ln/>
-        </p:spPr>
-        <p:txBody>
-          <a:bodyPr wrap="square" lIns="0" tIns="0" rIns="0" bIns="0" rtlCol="0" anchor="ctr"/>
-          <a:lstStyle/>
-          <a:p>
-            <a:pPr indent="0" marL="0">
-              <a:buNone/>
-            </a:pPr>
-            <a:r>
-              <a:rPr lang="en-US" sz="1000" b="1" dirty="0">
-                <a:solidFill>
-                  <a:srgbClr val="4A9EFF"/>
-                </a:solidFill>
-              </a:rPr>
-              <a:t>Academic References</a:t>
-            </a:r>
-            <a:endParaRPr lang="en-US" sz="1000" dirty="0"/>
-          </a:p>
-        </p:txBody>
-      </p:sp>
-      <p:sp>
-        <p:nvSpPr>
-          <p:cNvPr id="9" name="Text 7"/>
-          <p:cNvSpPr/>
-          <p:nvPr/>
-        </p:nvSpPr>
-        <p:spPr>
-          <a:xfrm>
-            <a:off x="548640" y="3200400"/>
-            <a:ext cx="8046720" cy="256032"/>
-          </a:xfrm>
-          <a:prstGeom prst="rect">
-            <a:avLst/>
-          </a:prstGeom>
-          <a:noFill/>
-          <a:ln/>
-        </p:spPr>
-        <p:txBody>
-          <a:bodyPr wrap="square" rtlCol="0" anchor="ctr"/>
-          <a:lstStyle/>
-          <a:p>
-            <a:pPr indent="0" marL="0">
-              <a:buNone/>
-            </a:pPr>
-            <a:r>
-              <a:rPr lang="en-US" sz="850" b="1" dirty="0">
-                <a:solidFill>
-                  <a:srgbClr val="4A9EFF"/>
-                </a:solidFill>
-              </a:rPr>
-              <a:t xml:space="preserve">▸  </a:t>
-            </a:r>
-            <a:pPr indent="0" marL="0">
-              <a:buNone/>
-            </a:pPr>
-            <a:r>
-              <a:rPr lang="en-US" sz="850" dirty="0">
-                <a:solidFill>
-                  <a:srgbClr val="C0C8D8"/>
-                </a:solidFill>
-              </a:rPr>
-              <a:t>Das, S. &amp; Statman, M. (2009) — Beyond Mean-Variance: Portfolios with Derivatives and Non-Normal Returns in Mental Accounts</a:t>
-            </a:r>
-            <a:endParaRPr lang="en-US" sz="850" dirty="0"/>
-          </a:p>
-        </p:txBody>
-      </p:sp>
-      <p:sp>
-        <p:nvSpPr>
-          <p:cNvPr id="10" name="Text 8"/>
-          <p:cNvSpPr/>
-          <p:nvPr/>
-        </p:nvSpPr>
-        <p:spPr>
-          <a:xfrm>
-            <a:off x="548640" y="3474720"/>
-            <a:ext cx="8046720" cy="256032"/>
-          </a:xfrm>
-          <a:prstGeom prst="rect">
-            <a:avLst/>
-          </a:prstGeom>
-          <a:noFill/>
-          <a:ln/>
-        </p:spPr>
-        <p:txBody>
-          <a:bodyPr wrap="square" rtlCol="0" anchor="ctr"/>
-          <a:lstStyle/>
-          <a:p>
-            <a:pPr indent="0" marL="0">
-              <a:buNone/>
-            </a:pPr>
-            <a:r>
-              <a:rPr lang="en-US" sz="850" b="1" dirty="0">
-                <a:solidFill>
-                  <a:srgbClr val="4A9EFF"/>
-                </a:solidFill>
-              </a:rPr>
-              <a:t xml:space="preserve">▸  </a:t>
-            </a:r>
-            <a:pPr indent="0" marL="0">
-              <a:buNone/>
-            </a:pPr>
-            <a:r>
-              <a:rPr lang="en-US" sz="850" dirty="0">
-                <a:solidFill>
-                  <a:srgbClr val="C0C8D8"/>
-                </a:solidFill>
-              </a:rPr>
-              <a:t>Das, S., Markowitz, H., Scheid, J. &amp; Statman, M. (2010) — Portfolio Optimization with Mental Accounts, JFQA Vol.45 No.2</a:t>
-            </a:r>
-            <a:endParaRPr lang="en-US" sz="850" dirty="0"/>
-          </a:p>
-        </p:txBody>
-      </p:sp>
-      <p:sp>
-        <p:nvSpPr>
-          <p:cNvPr id="11" name="Text 9"/>
-          <p:cNvSpPr/>
-          <p:nvPr/>
-        </p:nvSpPr>
-        <p:spPr>
-          <a:xfrm>
-            <a:off x="548640" y="3749040"/>
-            <a:ext cx="8046720" cy="256032"/>
-          </a:xfrm>
-          <a:prstGeom prst="rect">
-            <a:avLst/>
-          </a:prstGeom>
-          <a:noFill/>
-          <a:ln/>
-        </p:spPr>
-        <p:txBody>
-          <a:bodyPr wrap="square" rtlCol="0" anchor="ctr"/>
-          <a:lstStyle/>
-          <a:p>
-            <a:pPr indent="0" marL="0">
-              <a:buNone/>
-            </a:pPr>
-            <a:r>
-              <a:rPr lang="en-US" sz="850" b="1" dirty="0">
-                <a:solidFill>
-                  <a:srgbClr val="4A9EFF"/>
-                </a:solidFill>
-              </a:rPr>
-              <a:t xml:space="preserve">▸  </a:t>
-            </a:r>
-            <a:pPr indent="0" marL="0">
-              <a:buNone/>
-            </a:pPr>
-            <a:r>
-              <a:rPr lang="en-US" sz="850" dirty="0">
-                <a:solidFill>
-                  <a:srgbClr val="C0C8D8"/>
-                </a:solidFill>
-              </a:rPr>
-              <a:t>Jeddou, S. (2012) — Beyond Mean-Variance: Options and Structured Products in Behavioral Portfolios, MSc Finance, USI Lugano</a:t>
-            </a:r>
-            <a:endParaRPr lang="en-US" sz="850" dirty="0"/>
-          </a:p>
-        </p:txBody>
-      </p:sp>
-      <p:sp>
-        <p:nvSpPr>
-          <p:cNvPr id="12" name="Text 10"/>
-          <p:cNvSpPr/>
-          <p:nvPr/>
-        </p:nvSpPr>
-        <p:spPr>
-          <a:xfrm>
-            <a:off x="365760" y="4526280"/>
-            <a:ext cx="8412480" cy="320040"/>
-          </a:xfrm>
-          <a:prstGeom prst="rect">
-            <a:avLst/>
-          </a:prstGeom>
-          <a:noFill/>
-          <a:ln/>
-        </p:spPr>
-        <p:txBody>
-          <a:bodyPr wrap="square" rtlCol="0" anchor="ctr"/>
-          <a:lstStyle/>
-          <a:p>
-            <a:pPr algn="ctr" indent="0" marL="0">
-              <a:buNone/>
-            </a:pPr>
-            <a:r>
-              <a:rPr lang="en-US" sz="950" dirty="0">
-                <a:solidFill>
-                  <a:srgbClr val="4A9EFF"/>
-                </a:solidFill>
-              </a:rPr>
-              <a:t xml:space="preserve">🔗  </a:t>
-            </a:r>
-            <a:pPr algn="ctr" indent="0" marL="0">
-              <a:buNone/>
-            </a:pPr>
-            <a:r>
-              <a:rPr lang="en-US" sz="950" dirty="0">
-                <a:solidFill>
-                  <a:srgbClr val="4A9EFF"/>
-                </a:solidFill>
-              </a:rPr>
-              <a:t>sami-jeddou-behavioral-portfolio-optimizer.streamlit.app</a:t>
-            </a:r>
-            <a:pPr algn="ctr" indent="0" marL="0">
-              <a:buNone/>
-            </a:pPr>
-            <a:r>
-              <a:rPr lang="en-US" sz="950" dirty="0">
-                <a:solidFill>
-                  <a:srgbClr val="556A8A"/>
-                </a:solidFill>
-                <a:hlinkClick r:id="rId3"/>
-              </a:rPr>
-              <a:t xml:space="preserve">   |   🔗  LinkedIn</a:t>
-            </a:r>
-            <a:endParaRPr lang="en-US" sz="950" dirty="0"/>
-          </a:p>
-        </p:txBody>
-      </p:sp>
-      <p:sp>
-        <p:nvSpPr>
-          <p:cNvPr id="13" name="Text 11"/>
-          <p:cNvSpPr/>
-          <p:nvPr/>
-        </p:nvSpPr>
-        <p:spPr>
-          <a:xfrm>
-            <a:off x="8046720" y="4754880"/>
-            <a:ext cx="914400" cy="274320"/>
-          </a:xfrm>
-          <a:prstGeom prst="rect">
-            <a:avLst/>
-          </a:prstGeom>
-          <a:noFill/>
-          <a:ln/>
-        </p:spPr>
-        <p:txBody>
-          <a:bodyPr wrap="square" rtlCol="0" anchor="ctr"/>
-          <a:lstStyle/>
-          <a:p>
-            <a:pPr algn="r" indent="0" marL="0">
-              <a:buNone/>
-            </a:pPr>
-            <a:r>
-              <a:rPr lang="en-US" sz="900" dirty="0">
-                <a:solidFill>
-                  <a:srgbClr val="556A8A"/>
-                </a:solidFill>
-              </a:rPr>
-              <a:t>17 / 17</a:t>
-            </a:r>
-            <a:endParaRPr lang="en-US" sz="900" dirty="0"/>
-          </a:p>
-        </p:txBody>
-      </p:sp>
-      <p:sp>
-        <p:nvSpPr>
-          <p:cNvPr id="14" name="Text 12"/>
-          <p:cNvSpPr/>
-          <p:nvPr/>
-        </p:nvSpPr>
-        <p:spPr>
-          <a:xfrm>
-            <a:off x="365760" y="4754880"/>
-            <a:ext cx="6400800" cy="274320"/>
-          </a:xfrm>
-          <a:prstGeom prst="rect">
-            <a:avLst/>
-          </a:prstGeom>
-          <a:noFill/>
-          <a:ln/>
-        </p:spPr>
-        <p:txBody>
-          <a:bodyPr wrap="square" rtlCol="0" anchor="ctr"/>
-          <a:lstStyle/>
-          <a:p>
-            <a:pPr algn="l" indent="0" marL="0">
-              <a:buNone/>
-            </a:pPr>
-            <a:r>
-              <a:rPr lang="en-US" sz="900" dirty="0">
-                <a:solidFill>
-                  <a:srgbClr val="556A8A"/>
-                </a:solidFill>
-              </a:rPr>
-              <a:t>Beyond Mean-Variance Portfolio Optimiser — User Guide</a:t>
-            </a:r>
-            <a:endParaRPr lang="en-US" sz="900" dirty="0"/>
-          </a:p>
-        </p:txBody>
-      </p:sp>
-    </p:spTree>
-  </p:cSld>
-  <p:clrMapOvr>
-    <a:masterClrMapping/>
-  </p:clrMapOvr>
-</p:sld>
-</file>
-
-<file path=ppt/slides/slide13.xml><?xml version="1.0" encoding="utf-8"?>
 <p:sld xmlns:a="http://schemas.openxmlformats.org/drawingml/2006/main" xmlns:r="http://schemas.openxmlformats.org/officeDocument/2006/relationships" xmlns:p="http://schemas.openxmlformats.org/presentationml/2006/main">
   <p:cSld name="Slide 2">
     <p:bg>
@@ -4067,7 +3273,7 @@
                   <a:srgbClr val="FFFFFF"/>
                 </a:solidFill>
               </a:rPr>
-              <a:t>Home — choose a tool</a:t>
+              <a:t>Scalable Portfolio Optimiser — Monte-Carlo + CVaR</a:t>
             </a:r>
             <a:endParaRPr lang="en-US" sz="2600" dirty="0"/>
           </a:p>
@@ -4139,7 +3345,7 @@
                   <a:srgbClr val="000000"/>
                 </a:solidFill>
               </a:rPr>
-              <a:t>📊</a:t>
+              <a:t>🧮</a:t>
             </a:r>
             <a:endParaRPr lang="en-US" sz="2200" dirty="0"/>
           </a:p>
@@ -4175,7 +3381,7 @@
                   <a:srgbClr val="4A9EFF"/>
                 </a:solidFill>
               </a:rPr>
-              <a:t>Grid Portfolio Optimiser</a:t>
+              <a:t>Scenario engine</a:t>
             </a:r>
             <a:endParaRPr lang="en-US" sz="1100" dirty="0"/>
           </a:p>
@@ -4211,7 +3417,7 @@
                   <a:srgbClr val="C0C8D8"/>
                 </a:solidFill>
               </a:rPr>
-              <a:t>Exact grid engine on the Das–Statman states — VaR, thesis-ES and rigorous-ES, with derivatives.</a:t>
+              <a:t>Samples thousands of joint return scenarios through a Gaussian or Student-t copula.</a:t>
             </a:r>
             <a:endParaRPr lang="en-US" sz="950" dirty="0"/>
           </a:p>
@@ -4283,7 +3489,7 @@
                   <a:srgbClr val="000000"/>
                 </a:solidFill>
               </a:rPr>
-              <a:t>🧮</a:t>
+              <a:t>📐</a:t>
             </a:r>
             <a:endParaRPr lang="en-US" sz="2200" dirty="0"/>
           </a:p>
@@ -4319,7 +3525,7 @@
                   <a:srgbClr val="4A9EFF"/>
                 </a:solidFill>
               </a:rPr>
-              <a:t>Scalable Portfolio Optimiser</a:t>
+              <a:t>α-CVaR linear program</a:t>
             </a:r>
             <a:endParaRPr lang="en-US" sz="1100" dirty="0"/>
           </a:p>
@@ -4355,7 +3561,7 @@
                   <a:srgbClr val="C0C8D8"/>
                 </a:solidFill>
               </a:rPr>
-              <a:t>Monte-Carlo scenarios + α-CVaR linear program — scales to large, multi-derivative portfolios.</a:t>
+              <a:t>Maximises return subject to a CVaR (Expected-Shortfall) floor — Rockafellar–Uryasev.</a:t>
             </a:r>
             <a:endParaRPr lang="en-US" sz="950" dirty="0"/>
           </a:p>
@@ -4427,7 +3633,7 @@
                   <a:srgbClr val="000000"/>
                 </a:solidFill>
               </a:rPr>
-              <a:t>🔬</a:t>
+              <a:t>📈</a:t>
             </a:r>
             <a:endParaRPr lang="en-US" sz="2200" dirty="0"/>
           </a:p>
@@ -4463,7 +3669,7 @@
                   <a:srgbClr val="4A9EFF"/>
                 </a:solidFill>
               </a:rPr>
-              <a:t>Backtest</a:t>
+              <a:t>Institutional scale</a:t>
             </a:r>
             <a:endParaRPr lang="en-US" sz="1100" dirty="0"/>
           </a:p>
@@ -4499,7 +3705,7 @@
                   <a:srgbClr val="C0C8D8"/>
                 </a:solidFill>
               </a:rPr>
-              <a:t>Out-of-sample walk-forward — expected vs realised, plus realised alpha &amp; beta.</a:t>
+              <a:t>Cost grows linearly in the number of assets — dozens of holdings, several derivatives at once.</a:t>
             </a:r>
             <a:endParaRPr lang="en-US" sz="950" dirty="0"/>
           </a:p>
@@ -4564,7 +3770,7 @@
                   <a:srgbClr val="4A9EFF"/>
                 </a:solidFill>
               </a:rPr>
-              <a:t>Reference &amp; navigation</a:t>
+              <a:t>How to use it</a:t>
             </a:r>
             <a:endParaRPr lang="en-US" sz="1100" dirty="0"/>
           </a:p>
@@ -4631,7 +3837,7 @@
                   <a:srgbClr val="FFFFFF"/>
                 </a:solidFill>
               </a:rPr>
-              <a:t>📖</a:t>
+              <a:t>1</a:t>
             </a:r>
             <a:endParaRPr lang="en-US" sz="1100" dirty="0"/>
           </a:p>
@@ -4667,7 +3873,7 @@
                   <a:srgbClr val="10B981"/>
                 </a:solidFill>
               </a:rPr>
-              <a:t>About:</a:t>
+              <a:t>Pick assets &amp; scenarios:</a:t>
             </a:r>
             <a:endParaRPr lang="en-US" sz="950" dirty="0"/>
           </a:p>
@@ -4703,7 +3909,7 @@
                   <a:srgbClr val="C0C8D8"/>
                 </a:solidFill>
               </a:rPr>
-              <a:t>Methods, the mental-accounting framework and the research behind the app.</a:t>
+              <a:t>Enter tickers and derivatives, choose the copula and the number of Monte-Carlo scenarios.</a:t>
             </a:r>
             <a:endParaRPr lang="en-US" sz="900" dirty="0"/>
           </a:p>
@@ -4770,7 +3976,7 @@
                   <a:srgbClr val="FFFFFF"/>
                 </a:solidFill>
               </a:rPr>
-              <a:t>📚</a:t>
+              <a:t>2</a:t>
             </a:r>
             <a:endParaRPr lang="en-US" sz="1100" dirty="0"/>
           </a:p>
@@ -4806,7 +4012,7 @@
                   <a:srgbClr val="F59E0B"/>
                 </a:solidFill>
               </a:rPr>
-              <a:t>Glossary:</a:t>
+              <a:t>Set the ES floor:</a:t>
             </a:r>
             <a:endParaRPr lang="en-US" sz="950" dirty="0"/>
           </a:p>
@@ -4842,7 +4048,7 @@
                   <a:srgbClr val="C0C8D8"/>
                 </a:solidFill>
               </a:rPr>
-              <a:t>Plain-language, AI-powered definitions — VaR, ES, α-CVaR, copulas, alpha &amp; beta.</a:t>
+              <a:t>Choose the loss level L; the engine sweeps the return / tail-risk frontier.</a:t>
             </a:r>
             <a:endParaRPr lang="en-US" sz="900" dirty="0"/>
           </a:p>
@@ -4909,7 +4115,7 @@
                   <a:srgbClr val="FFFFFF"/>
                 </a:solidFill>
               </a:rPr>
-              <a:t>💡</a:t>
+              <a:t>3</a:t>
             </a:r>
             <a:endParaRPr lang="en-US" sz="1100" dirty="0"/>
           </a:p>
@@ -4945,7 +4151,7 @@
                   <a:srgbClr val="E76F51"/>
                 </a:solidFill>
               </a:rPr>
-              <a:t>Tip:</a:t>
+              <a:t>Read the optimum:</a:t>
             </a:r>
             <a:endParaRPr lang="en-US" sz="950" dirty="0"/>
           </a:p>
@@ -4981,7 +4187,7 @@
                   <a:srgbClr val="C0C8D8"/>
                 </a:solidFill>
               </a:rPr>
-              <a:t>Each tile opens a tool; the Grid Portfolio Optimiser is the place to start.</a:t>
+              <a:t>★ marks the chosen portfolio; weights, E[r], realised ES, vol and skew are reported.</a:t>
             </a:r>
             <a:endParaRPr lang="en-US" sz="900" dirty="0"/>
           </a:p>
@@ -5017,7 +4223,7 @@
                   <a:srgbClr val="556A8A"/>
                 </a:solidFill>
               </a:rPr>
-              <a:t>2 / 17</a:t>
+              <a:t>12 / 17</a:t>
             </a:r>
             <a:endParaRPr lang="en-US" sz="900" dirty="0"/>
           </a:p>
@@ -5056,6 +4262,327 @@
               <a:t>Beyond Mean-Variance Portfolio Optimiser — User Guide</a:t>
             </a:r>
             <a:endParaRPr lang="en-US" sz="900" dirty="0"/>
+          </a:p>
+        </p:txBody>
+      </p:sp>
+    </p:spTree>
+  </p:cSld>
+  <p:clrMapOvr>
+    <a:masterClrMapping/>
+  </p:clrMapOvr>
+</p:sld>
+</file>
+
+<file path=ppt/slides/slide13.xml><?xml version="1.0" encoding="utf-8"?>
+<p:sld xmlns:a="http://schemas.openxmlformats.org/drawingml/2006/main" xmlns:r="http://schemas.openxmlformats.org/officeDocument/2006/relationships" xmlns:p="http://schemas.openxmlformats.org/presentationml/2006/main">
+  <p:cSld name="Slide 8">
+    <p:bg>
+      <p:bgPr>
+        <a:solidFill>
+          <a:srgbClr val="020C1B"/>
+        </a:solidFill>
+      </p:bgPr>
+    </p:bg>
+    <p:spTree>
+      <p:nvGrpSpPr>
+        <p:cNvPr id="1" name=""/>
+        <p:cNvGrpSpPr/>
+        <p:nvPr/>
+      </p:nvGrpSpPr>
+      <p:grpSpPr>
+        <a:xfrm>
+          <a:off x="0" y="0"/>
+          <a:ext cx="0" cy="0"/>
+          <a:chOff x="0" y="0"/>
+          <a:chExt cx="0" cy="0"/>
+        </a:xfrm>
+      </p:grpSpPr>
+      <p:sp>
+        <p:nvSpPr>
+          <p:cNvPr id="2" name="Shape 0"/>
+          <p:cNvSpPr/>
+          <p:nvPr/>
+        </p:nvSpPr>
+        <p:spPr>
+          <a:xfrm>
+            <a:off x="0" y="0"/>
+            <a:ext cx="9144000" cy="54864"/>
+          </a:xfrm>
+          <a:prstGeom prst="rect">
+            <a:avLst/>
+          </a:prstGeom>
+          <a:solidFill>
+            <a:srgbClr val="1A6BBF"/>
+          </a:solidFill>
+          <a:ln w="12700">
+            <a:solidFill>
+              <a:srgbClr val="1A6BBF"/>
+            </a:solidFill>
+            <a:prstDash val="solid"/>
+          </a:ln>
+        </p:spPr>
+        <p:txBody>
+          <a:bodyPr/>
+          <a:p/>
+        </p:txBody>
+      </p:sp>
+      <p:sp>
+        <p:nvSpPr>
+          <p:cNvPr id="3" name="Text 1"/>
+          <p:cNvSpPr/>
+          <p:nvPr/>
+        </p:nvSpPr>
+        <p:spPr>
+          <a:xfrm>
+            <a:off x="365760" y="164592"/>
+            <a:ext cx="8229600" cy="457200"/>
+          </a:xfrm>
+          <a:prstGeom prst="rect">
+            <a:avLst/>
+          </a:prstGeom>
+          <a:noFill/>
+          <a:ln/>
+        </p:spPr>
+        <p:txBody>
+          <a:bodyPr wrap="square" rtlCol="0" anchor="ctr"/>
+          <a:lstStyle/>
+          <a:p>
+            <a:pPr indent="0" marL="0">
+              <a:buNone/>
+            </a:pPr>
+            <a:r>
+              <a:rPr lang="en-US" sz="2200" b="1" dirty="0">
+                <a:solidFill>
+                  <a:srgbClr val="FFFFFF"/>
+                </a:solidFill>
+              </a:rPr>
+              <a:t>Reading the Scalable output</a:t>
+            </a:r>
+            <a:endParaRPr lang="en-US" sz="2200" dirty="0"/>
+          </a:p>
+        </p:txBody>
+      </p:sp>
+      <p:sp>
+        <p:nvSpPr>
+          <p:cNvPr id="27" name="Text 25"/>
+          <p:cNvSpPr/>
+          <p:nvPr/>
+        </p:nvSpPr>
+        <p:spPr>
+          <a:xfrm>
+            <a:off x="8046720" y="4754880"/>
+            <a:ext cx="914400" cy="274320"/>
+          </a:xfrm>
+          <a:prstGeom prst="rect">
+            <a:avLst/>
+          </a:prstGeom>
+          <a:noFill/>
+          <a:ln/>
+        </p:spPr>
+        <p:txBody>
+          <a:bodyPr wrap="square" rtlCol="0" anchor="ctr"/>
+          <a:lstStyle/>
+          <a:p>
+            <a:pPr algn="r" indent="0" marL="0">
+              <a:buNone/>
+            </a:pPr>
+            <a:r>
+              <a:rPr lang="en-US" sz="900" dirty="0">
+                <a:solidFill>
+                  <a:srgbClr val="556A8A"/>
+                </a:solidFill>
+              </a:rPr>
+              <a:t>13 / 17</a:t>
+            </a:r>
+            <a:endParaRPr lang="en-US" sz="900" dirty="0"/>
+          </a:p>
+        </p:txBody>
+      </p:sp>
+      <p:sp>
+        <p:nvSpPr>
+          <p:cNvPr id="28" name="Text 26"/>
+          <p:cNvSpPr/>
+          <p:nvPr/>
+        </p:nvSpPr>
+        <p:spPr>
+          <a:xfrm>
+            <a:off x="365760" y="4754880"/>
+            <a:ext cx="6400800" cy="274320"/>
+          </a:xfrm>
+          <a:prstGeom prst="rect">
+            <a:avLst/>
+          </a:prstGeom>
+          <a:noFill/>
+          <a:ln/>
+        </p:spPr>
+        <p:txBody>
+          <a:bodyPr wrap="square" rtlCol="0" anchor="ctr"/>
+          <a:lstStyle/>
+          <a:p>
+            <a:pPr algn="l" indent="0" marL="0">
+              <a:buNone/>
+            </a:pPr>
+            <a:r>
+              <a:rPr lang="en-US" sz="900" dirty="0">
+                <a:solidFill>
+                  <a:srgbClr val="556A8A"/>
+                </a:solidFill>
+              </a:rPr>
+              <a:t>Beyond Mean-Variance Portfolio Optimiser — User Guide</a:t>
+            </a:r>
+            <a:endParaRPr lang="en-US" sz="900" dirty="0"/>
+          </a:p>
+        </p:txBody>
+      </p:sp>
+      <p:pic>
+        <p:nvPicPr>
+          <p:cNvPr id="29" name="Picture 28" descr="Slide8chart.png"/>
+          <p:cNvPicPr>
+            <a:picLocks noChangeAspect="1"/>
+          </p:cNvPicPr>
+          <p:nvPr/>
+        </p:nvPicPr>
+        <p:blipFill>
+          <a:blip r:embed="rId3"/>
+          <a:stretch>
+            <a:fillRect/>
+          </a:stretch>
+        </p:blipFill>
+        <p:spPr>
+          <a:xfrm>
+            <a:off x="365760" y="1095744"/>
+            <a:ext cx="5120640" cy="2526650"/>
+          </a:xfrm>
+          <a:prstGeom prst="rect">
+            <a:avLst/>
+          </a:prstGeom>
+        </p:spPr>
+      </p:pic>
+      <p:sp>
+        <p:nvSpPr>
+          <p:cNvPr id="40" name="Cmt box"/>
+          <p:cNvSpPr/>
+          <p:nvPr/>
+        </p:nvSpPr>
+        <p:spPr>
+          <a:xfrm>
+            <a:off x="5669280" y="1095744"/>
+            <a:ext cx="3154240" cy="2526650"/>
+          </a:xfrm>
+          <a:prstGeom prst="rect">
+            <a:avLst/>
+          </a:prstGeom>
+          <a:solidFill>
+            <a:srgbClr val="0D1A2E"/>
+          </a:solidFill>
+          <a:ln w="12700">
+            <a:solidFill>
+              <a:srgbClr val="1A6BBF"/>
+            </a:solidFill>
+            <a:prstDash val="solid"/>
+          </a:ln>
+        </p:spPr>
+        <p:txBody>
+          <a:bodyPr/>
+          <a:p/>
+        </p:txBody>
+      </p:sp>
+      <p:sp>
+        <p:nvSpPr>
+          <p:cNvPr id="41" name="Cmt text"/>
+          <p:cNvSpPr/>
+          <p:nvPr/>
+        </p:nvSpPr>
+        <p:spPr>
+          <a:xfrm>
+            <a:off x="5852160" y="1188720"/>
+            <a:ext cx="2788480" cy="2360000"/>
+          </a:xfrm>
+          <a:prstGeom prst="rect">
+            <a:avLst/>
+          </a:prstGeom>
+          <a:noFill/>
+          <a:ln/>
+        </p:spPr>
+        <p:txBody>
+          <a:bodyPr wrap="square" lIns="0" tIns="0" rIns="0" bIns="0" rtlCol="0" anchor="t"/>
+          <a:lstStyle/>
+          <a:p>
+            <a:pPr indent="0" marL="0">
+              <a:buNone/>
+            </a:pPr>
+            <a:r>
+              <a:rPr lang="en-US" sz="1100" b="1" dirty="0">
+                <a:solidFill>
+                  <a:srgbClr val="4A9EFF"/>
+                </a:solidFill>
+              </a:rPr>
+              <a:t>What you’re seeing</a:t>
+            </a:r>
+          </a:p>
+          <a:p>
+            <a:pPr indent="0" marL="0">
+              <a:spcBef>
+                <a:spcPts val="900"/>
+              </a:spcBef>
+              <a:buNone/>
+            </a:pPr>
+            <a:r>
+              <a:rPr lang="en-US" sz="900" dirty="0">
+                <a:solidFill>
+                  <a:srgbClr val="C0C8D8"/>
+                </a:solidFill>
+              </a:rPr>
+              <a:t>•  Curve = the return / tail-risk frontier: the most expected return reachable for each Expected-Shortfall floor L.</a:t>
+            </a:r>
+          </a:p>
+          <a:p>
+            <a:pPr indent="0" marL="0">
+              <a:spcBef>
+                <a:spcPts val="900"/>
+              </a:spcBef>
+              <a:buNone/>
+            </a:pPr>
+            <a:r>
+              <a:rPr lang="en-US" sz="900" dirty="0">
+                <a:solidFill>
+                  <a:srgbClr val="C0C8D8"/>
+                </a:solidFill>
+              </a:rPr>
+              <a:t>•  A tighter floor (toward −10%) allows less tail loss and lowers return; a looser one (toward −30%) raises it.</a:t>
+            </a:r>
+          </a:p>
+          <a:p>
+            <a:pPr indent="0" marL="0">
+              <a:spcBef>
+                <a:spcPts val="900"/>
+              </a:spcBef>
+              <a:buNone/>
+            </a:pPr>
+            <a:r>
+              <a:rPr lang="en-US" sz="900" dirty="0">
+                <a:solidFill>
+                  <a:srgbClr val="C0C8D8"/>
+                </a:solidFill>
+              </a:rPr>
+              <a:t>•  The ★ is the optimum at your chosen floor (here L = −20%, E[r] = 24.6%).</a:t>
+            </a:r>
+          </a:p>
+          <a:p>
+            <a:pPr indent="0" marL="0">
+              <a:spcBef>
+                <a:spcPts val="900"/>
+              </a:spcBef>
+              <a:buNone/>
+            </a:pPr>
+            <a:r>
+              <a:rPr lang="en-US" sz="900" dirty="0">
+                <a:solidFill>
+                  <a:srgbClr val="C0C8D8"/>
+                </a:solidFill>
+              </a:rPr>
+              <a:t>•  Built from Monte-Carlo scenarios solved by a CVaR linear program, so it scales to many assets.</a:t>
+            </a:r>
           </a:p>
         </p:txBody>
       </p:sp>
@@ -5150,7 +4677,7 @@
                   <a:srgbClr val="FFFFFF"/>
                 </a:solidFill>
               </a:rPr>
-              <a:t>Scalable Portfolio Optimiser — Monte-Carlo + CVaR</a:t>
+              <a:t>Out-of-sample back-test</a:t>
             </a:r>
             <a:endParaRPr lang="en-US" sz="2600" dirty="0"/>
           </a:p>
@@ -5222,7 +4749,7 @@
                   <a:srgbClr val="000000"/>
                 </a:solidFill>
               </a:rPr>
-              <a:t>🧮</a:t>
+              <a:t>🪟</a:t>
             </a:r>
             <a:endParaRPr lang="en-US" sz="2200" dirty="0"/>
           </a:p>
@@ -5258,7 +4785,7 @@
                   <a:srgbClr val="4A9EFF"/>
                 </a:solidFill>
               </a:rPr>
-              <a:t>Scenario engine</a:t>
+              <a:t>Two windows</a:t>
             </a:r>
             <a:endParaRPr lang="en-US" sz="1100" dirty="0"/>
           </a:p>
@@ -5294,7 +4821,7 @@
                   <a:srgbClr val="C0C8D8"/>
                 </a:solidFill>
               </a:rPr>
-              <a:t>Samples thousands of joint return scenarios through a Gaussian or Student-t copula.</a:t>
+              <a:t>Build weights on a construction window, then buy-and-hold them through a later evaluation window.</a:t>
             </a:r>
             <a:endParaRPr lang="en-US" sz="950" dirty="0"/>
           </a:p>
@@ -5366,7 +4893,7 @@
                   <a:srgbClr val="000000"/>
                 </a:solidFill>
               </a:rPr>
-              <a:t>📐</a:t>
+              <a:t>🔁</a:t>
             </a:r>
             <a:endParaRPr lang="en-US" sz="2200" dirty="0"/>
           </a:p>
@@ -5402,7 +4929,7 @@
                   <a:srgbClr val="4A9EFF"/>
                 </a:solidFill>
               </a:rPr>
-              <a:t>α-CVaR linear program</a:t>
+              <a:t>Marked to market</a:t>
             </a:r>
             <a:endParaRPr lang="en-US" sz="1100" dirty="0"/>
           </a:p>
@@ -5438,7 +4965,7 @@
                   <a:srgbClr val="C0C8D8"/>
                 </a:solidFill>
               </a:rPr>
-              <a:t>Maximises return subject to a CVaR (Expected-Shortfall) floor — Rockafellar–Uryasev.</a:t>
+              <a:t>The derivative is repriced each step with Black-Scholes, giving a full realised return path.</a:t>
             </a:r>
             <a:endParaRPr lang="en-US" sz="950" dirty="0"/>
           </a:p>
@@ -5546,7 +5073,7 @@
                   <a:srgbClr val="4A9EFF"/>
                 </a:solidFill>
               </a:rPr>
-              <a:t>Institutional scale</a:t>
+              <a:t>Alpha &amp; beta</a:t>
             </a:r>
             <a:endParaRPr lang="en-US" sz="1100" dirty="0"/>
           </a:p>
@@ -5582,7 +5109,7 @@
                   <a:srgbClr val="C0C8D8"/>
                 </a:solidFill>
               </a:rPr>
-              <a:t>Cost grows linearly in the number of assets — dozens of holdings, several derivatives at once.</a:t>
+              <a:t>Realised alpha, beta and R² of each holding and of the portfolio vs a chosen benchmark.</a:t>
             </a:r>
             <a:endParaRPr lang="en-US" sz="950" dirty="0"/>
           </a:p>
@@ -5647,7 +5174,7 @@
                   <a:srgbClr val="4A9EFF"/>
                 </a:solidFill>
               </a:rPr>
-              <a:t>How to use it</a:t>
+              <a:t>What you get</a:t>
             </a:r>
             <a:endParaRPr lang="en-US" sz="1100" dirty="0"/>
           </a:p>
@@ -5750,7 +5277,7 @@
                   <a:srgbClr val="10B981"/>
                 </a:solidFill>
               </a:rPr>
-              <a:t>Pick assets &amp; scenarios:</a:t>
+              <a:t>Expected vs realised:</a:t>
             </a:r>
             <a:endParaRPr lang="en-US" sz="950" dirty="0"/>
           </a:p>
@@ -5786,7 +5313,7 @@
                   <a:srgbClr val="C0C8D8"/>
                 </a:solidFill>
               </a:rPr>
-              <a:t>Enter tickers and derivatives, choose the copula and the number of Monte-Carlo scenarios.</a:t>
+              <a:t>Return, volatility and the loss-threshold outcome, for P1 (no derivative) and P2 (with).</a:t>
             </a:r>
             <a:endParaRPr lang="en-US" sz="900" dirty="0"/>
           </a:p>
@@ -5889,7 +5416,7 @@
                   <a:srgbClr val="F59E0B"/>
                 </a:solidFill>
               </a:rPr>
-              <a:t>Set the ES floor:</a:t>
+              <a:t>Alpha / beta table:</a:t>
             </a:r>
             <a:endParaRPr lang="en-US" sz="950" dirty="0"/>
           </a:p>
@@ -5925,7 +5452,7 @@
                   <a:srgbClr val="C0C8D8"/>
                 </a:solidFill>
               </a:rPr>
-              <a:t>Choose the loss level L; the engine sweeps the return / tail-risk frontier.</a:t>
+              <a:t>Per-security and portfolio beta (the regression slope) and annualised Jensen alpha, with R².</a:t>
             </a:r>
             <a:endParaRPr lang="en-US" sz="900" dirty="0"/>
           </a:p>
@@ -6028,7 +5555,7 @@
                   <a:srgbClr val="E76F51"/>
                 </a:solidFill>
               </a:rPr>
-              <a:t>Read the optimum:</a:t>
+              <a:t>Optional CAPM:</a:t>
             </a:r>
             <a:endParaRPr lang="en-US" sz="950" dirty="0"/>
           </a:p>
@@ -6064,7 +5591,7 @@
                   <a:srgbClr val="C0C8D8"/>
                 </a:solidFill>
               </a:rPr>
-              <a:t>★ marks the chosen portfolio; weights, E[r], realised ES, vol and skew are reported.</a:t>
+              <a:t>Enter an expected market return E[Rm] to add a CAPM required return and an ex-ante alpha.</a:t>
             </a:r>
             <a:endParaRPr lang="en-US" sz="900" dirty="0"/>
           </a:p>
@@ -6100,7 +5627,7 @@
                   <a:srgbClr val="556A8A"/>
                 </a:solidFill>
               </a:rPr>
-              <a:t>12 / 17</a:t>
+              <a:t>14 / 17</a:t>
             </a:r>
             <a:endParaRPr lang="en-US" sz="900" dirty="0"/>
           </a:p>
@@ -6151,1089 +5678,6 @@
 </file>
 
 <file path=ppt/slides/slide15.xml><?xml version="1.0" encoding="utf-8"?>
-<p:sld xmlns:a="http://schemas.openxmlformats.org/drawingml/2006/main" xmlns:r="http://schemas.openxmlformats.org/officeDocument/2006/relationships" xmlns:p="http://schemas.openxmlformats.org/presentationml/2006/main">
-  <p:cSld name="Slide 2">
-    <p:bg>
-      <p:bgPr>
-        <a:solidFill>
-          <a:srgbClr val="020C1B"/>
-        </a:solidFill>
-      </p:bgPr>
-    </p:bg>
-    <p:spTree>
-      <p:nvGrpSpPr>
-        <p:cNvPr id="1" name=""/>
-        <p:cNvGrpSpPr/>
-        <p:nvPr/>
-      </p:nvGrpSpPr>
-      <p:grpSpPr>
-        <a:xfrm>
-          <a:off x="0" y="0"/>
-          <a:ext cx="0" cy="0"/>
-          <a:chOff x="0" y="0"/>
-          <a:chExt cx="0" cy="0"/>
-        </a:xfrm>
-      </p:grpSpPr>
-      <p:sp>
-        <p:nvSpPr>
-          <p:cNvPr id="2" name="Shape 0"/>
-          <p:cNvSpPr/>
-          <p:nvPr/>
-        </p:nvSpPr>
-        <p:spPr>
-          <a:xfrm>
-            <a:off x="0" y="0"/>
-            <a:ext cx="9144000" cy="54864"/>
-          </a:xfrm>
-          <a:prstGeom prst="rect">
-            <a:avLst/>
-          </a:prstGeom>
-          <a:solidFill>
-            <a:srgbClr val="1A6BBF"/>
-          </a:solidFill>
-          <a:ln w="12700">
-            <a:solidFill>
-              <a:srgbClr val="1A6BBF"/>
-            </a:solidFill>
-            <a:prstDash val="solid"/>
-          </a:ln>
-        </p:spPr>
-        <p:txBody>
-          <a:bodyPr/>
-          <a:p/>
-        </p:txBody>
-      </p:sp>
-      <p:sp>
-        <p:nvSpPr>
-          <p:cNvPr id="3" name="Text 1"/>
-          <p:cNvSpPr/>
-          <p:nvPr/>
-        </p:nvSpPr>
-        <p:spPr>
-          <a:xfrm>
-            <a:off x="457200" y="164592"/>
-            <a:ext cx="8229600" cy="502920"/>
-          </a:xfrm>
-          <a:prstGeom prst="rect">
-            <a:avLst/>
-          </a:prstGeom>
-          <a:noFill/>
-          <a:ln/>
-        </p:spPr>
-        <p:txBody>
-          <a:bodyPr wrap="square" rtlCol="0" anchor="ctr"/>
-          <a:lstStyle/>
-          <a:p>
-            <a:pPr indent="0" marL="0">
-              <a:buNone/>
-            </a:pPr>
-            <a:r>
-              <a:rPr lang="en-US" sz="2600" b="1" dirty="0">
-                <a:solidFill>
-                  <a:srgbClr val="FFFFFF"/>
-                </a:solidFill>
-              </a:rPr>
-              <a:t>Out-of-sample back-test</a:t>
-            </a:r>
-            <a:endParaRPr lang="en-US" sz="2600" dirty="0"/>
-          </a:p>
-        </p:txBody>
-      </p:sp>
-      <p:sp>
-        <p:nvSpPr>
-          <p:cNvPr id="4" name="Shape 2"/>
-          <p:cNvSpPr/>
-          <p:nvPr/>
-        </p:nvSpPr>
-        <p:spPr>
-          <a:xfrm>
-            <a:off x="365760" y="868680"/>
-            <a:ext cx="2651760" cy="1828800"/>
-          </a:xfrm>
-          <a:prstGeom prst="rect">
-            <a:avLst/>
-          </a:prstGeom>
-          <a:solidFill>
-            <a:srgbClr val="0D1A2E"/>
-          </a:solidFill>
-          <a:ln w="12700">
-            <a:solidFill>
-              <a:srgbClr val="1A6BBF"/>
-            </a:solidFill>
-            <a:prstDash val="solid"/>
-          </a:ln>
-          <a:effectLst>
-            <a:outerShdw sx="100000" sy="100000" kx="0" ky="0" algn="bl" rotWithShape="0" blurRad="101600" dist="38100" dir="8100000">
-              <a:srgbClr val="000000">
-                <a:alpha val="18000"/>
-              </a:srgbClr>
-            </a:outerShdw>
-          </a:effectLst>
-        </p:spPr>
-        <p:txBody>
-          <a:bodyPr/>
-          <a:p/>
-        </p:txBody>
-      </p:sp>
-      <p:sp>
-        <p:nvSpPr>
-          <p:cNvPr id="5" name="Text 3"/>
-          <p:cNvSpPr/>
-          <p:nvPr/>
-        </p:nvSpPr>
-        <p:spPr>
-          <a:xfrm>
-            <a:off x="365760" y="960120"/>
-            <a:ext cx="2651760" cy="502920"/>
-          </a:xfrm>
-          <a:prstGeom prst="rect">
-            <a:avLst/>
-          </a:prstGeom>
-          <a:noFill/>
-          <a:ln/>
-        </p:spPr>
-        <p:txBody>
-          <a:bodyPr wrap="square" rtlCol="0" anchor="ctr"/>
-          <a:lstStyle/>
-          <a:p>
-            <a:pPr algn="ctr" indent="0" marL="0">
-              <a:buNone/>
-            </a:pPr>
-            <a:r>
-              <a:rPr lang="en-US" sz="2200" dirty="0">
-                <a:solidFill>
-                  <a:srgbClr val="000000"/>
-                </a:solidFill>
-              </a:rPr>
-              <a:t>🪟</a:t>
-            </a:r>
-            <a:endParaRPr lang="en-US" sz="2200" dirty="0"/>
-          </a:p>
-        </p:txBody>
-      </p:sp>
-      <p:sp>
-        <p:nvSpPr>
-          <p:cNvPr id="6" name="Text 4"/>
-          <p:cNvSpPr/>
-          <p:nvPr/>
-        </p:nvSpPr>
-        <p:spPr>
-          <a:xfrm>
-            <a:off x="365760" y="1463040"/>
-            <a:ext cx="2651760" cy="365760"/>
-          </a:xfrm>
-          <a:prstGeom prst="rect">
-            <a:avLst/>
-          </a:prstGeom>
-          <a:noFill/>
-          <a:ln/>
-        </p:spPr>
-        <p:txBody>
-          <a:bodyPr wrap="square" rtlCol="0" anchor="ctr"/>
-          <a:lstStyle/>
-          <a:p>
-            <a:pPr algn="ctr" indent="0" marL="0">
-              <a:buNone/>
-            </a:pPr>
-            <a:r>
-              <a:rPr lang="en-US" sz="1100" b="1" dirty="0">
-                <a:solidFill>
-                  <a:srgbClr val="4A9EFF"/>
-                </a:solidFill>
-              </a:rPr>
-              <a:t>Two windows</a:t>
-            </a:r>
-            <a:endParaRPr lang="en-US" sz="1100" dirty="0"/>
-          </a:p>
-        </p:txBody>
-      </p:sp>
-      <p:sp>
-        <p:nvSpPr>
-          <p:cNvPr id="7" name="Text 5"/>
-          <p:cNvSpPr/>
-          <p:nvPr/>
-        </p:nvSpPr>
-        <p:spPr>
-          <a:xfrm>
-            <a:off x="475488" y="1874520"/>
-            <a:ext cx="2432304" cy="731520"/>
-          </a:xfrm>
-          <a:prstGeom prst="rect">
-            <a:avLst/>
-          </a:prstGeom>
-          <a:noFill/>
-          <a:ln/>
-        </p:spPr>
-        <p:txBody>
-          <a:bodyPr wrap="square" rtlCol="0" anchor="t"/>
-          <a:lstStyle/>
-          <a:p>
-            <a:pPr algn="ctr" indent="0" marL="0">
-              <a:buNone/>
-            </a:pPr>
-            <a:r>
-              <a:rPr lang="en-US" sz="950" dirty="0">
-                <a:solidFill>
-                  <a:srgbClr val="C0C8D8"/>
-                </a:solidFill>
-              </a:rPr>
-              <a:t>Build weights on a construction window, then buy-and-hold them through a later evaluation window.</a:t>
-            </a:r>
-            <a:endParaRPr lang="en-US" sz="950" dirty="0"/>
-          </a:p>
-        </p:txBody>
-      </p:sp>
-      <p:sp>
-        <p:nvSpPr>
-          <p:cNvPr id="8" name="Shape 6"/>
-          <p:cNvSpPr/>
-          <p:nvPr/>
-        </p:nvSpPr>
-        <p:spPr>
-          <a:xfrm>
-            <a:off x="3200400" y="868680"/>
-            <a:ext cx="2651760" cy="1828800"/>
-          </a:xfrm>
-          <a:prstGeom prst="rect">
-            <a:avLst/>
-          </a:prstGeom>
-          <a:solidFill>
-            <a:srgbClr val="0D1A2E"/>
-          </a:solidFill>
-          <a:ln w="12700">
-            <a:solidFill>
-              <a:srgbClr val="1A6BBF"/>
-            </a:solidFill>
-            <a:prstDash val="solid"/>
-          </a:ln>
-          <a:effectLst>
-            <a:outerShdw sx="100000" sy="100000" kx="0" ky="0" algn="bl" rotWithShape="0" blurRad="101600" dist="38100" dir="8100000">
-              <a:srgbClr val="000000">
-                <a:alpha val="18000"/>
-              </a:srgbClr>
-            </a:outerShdw>
-          </a:effectLst>
-        </p:spPr>
-        <p:txBody>
-          <a:bodyPr/>
-          <a:p/>
-        </p:txBody>
-      </p:sp>
-      <p:sp>
-        <p:nvSpPr>
-          <p:cNvPr id="9" name="Text 7"/>
-          <p:cNvSpPr/>
-          <p:nvPr/>
-        </p:nvSpPr>
-        <p:spPr>
-          <a:xfrm>
-            <a:off x="3200400" y="960120"/>
-            <a:ext cx="2651760" cy="502920"/>
-          </a:xfrm>
-          <a:prstGeom prst="rect">
-            <a:avLst/>
-          </a:prstGeom>
-          <a:noFill/>
-          <a:ln/>
-        </p:spPr>
-        <p:txBody>
-          <a:bodyPr wrap="square" rtlCol="0" anchor="ctr"/>
-          <a:lstStyle/>
-          <a:p>
-            <a:pPr algn="ctr" indent="0" marL="0">
-              <a:buNone/>
-            </a:pPr>
-            <a:r>
-              <a:rPr lang="en-US" sz="2200" dirty="0">
-                <a:solidFill>
-                  <a:srgbClr val="000000"/>
-                </a:solidFill>
-              </a:rPr>
-              <a:t>🔁</a:t>
-            </a:r>
-            <a:endParaRPr lang="en-US" sz="2200" dirty="0"/>
-          </a:p>
-        </p:txBody>
-      </p:sp>
-      <p:sp>
-        <p:nvSpPr>
-          <p:cNvPr id="10" name="Text 8"/>
-          <p:cNvSpPr/>
-          <p:nvPr/>
-        </p:nvSpPr>
-        <p:spPr>
-          <a:xfrm>
-            <a:off x="3200400" y="1463040"/>
-            <a:ext cx="2651760" cy="365760"/>
-          </a:xfrm>
-          <a:prstGeom prst="rect">
-            <a:avLst/>
-          </a:prstGeom>
-          <a:noFill/>
-          <a:ln/>
-        </p:spPr>
-        <p:txBody>
-          <a:bodyPr wrap="square" rtlCol="0" anchor="ctr"/>
-          <a:lstStyle/>
-          <a:p>
-            <a:pPr algn="ctr" indent="0" marL="0">
-              <a:buNone/>
-            </a:pPr>
-            <a:r>
-              <a:rPr lang="en-US" sz="1100" b="1" dirty="0">
-                <a:solidFill>
-                  <a:srgbClr val="4A9EFF"/>
-                </a:solidFill>
-              </a:rPr>
-              <a:t>Marked to market</a:t>
-            </a:r>
-            <a:endParaRPr lang="en-US" sz="1100" dirty="0"/>
-          </a:p>
-        </p:txBody>
-      </p:sp>
-      <p:sp>
-        <p:nvSpPr>
-          <p:cNvPr id="11" name="Text 9"/>
-          <p:cNvSpPr/>
-          <p:nvPr/>
-        </p:nvSpPr>
-        <p:spPr>
-          <a:xfrm>
-            <a:off x="3310128" y="1874520"/>
-            <a:ext cx="2432304" cy="731520"/>
-          </a:xfrm>
-          <a:prstGeom prst="rect">
-            <a:avLst/>
-          </a:prstGeom>
-          <a:noFill/>
-          <a:ln/>
-        </p:spPr>
-        <p:txBody>
-          <a:bodyPr wrap="square" rtlCol="0" anchor="t"/>
-          <a:lstStyle/>
-          <a:p>
-            <a:pPr algn="ctr" indent="0" marL="0">
-              <a:buNone/>
-            </a:pPr>
-            <a:r>
-              <a:rPr lang="en-US" sz="950" dirty="0">
-                <a:solidFill>
-                  <a:srgbClr val="C0C8D8"/>
-                </a:solidFill>
-              </a:rPr>
-              <a:t>The derivative is repriced each step with Black-Scholes, giving a full realised return path.</a:t>
-            </a:r>
-            <a:endParaRPr lang="en-US" sz="950" dirty="0"/>
-          </a:p>
-        </p:txBody>
-      </p:sp>
-      <p:sp>
-        <p:nvSpPr>
-          <p:cNvPr id="12" name="Shape 10"/>
-          <p:cNvSpPr/>
-          <p:nvPr/>
-        </p:nvSpPr>
-        <p:spPr>
-          <a:xfrm>
-            <a:off x="6035040" y="868680"/>
-            <a:ext cx="2651760" cy="1828800"/>
-          </a:xfrm>
-          <a:prstGeom prst="rect">
-            <a:avLst/>
-          </a:prstGeom>
-          <a:solidFill>
-            <a:srgbClr val="0D1A2E"/>
-          </a:solidFill>
-          <a:ln w="12700">
-            <a:solidFill>
-              <a:srgbClr val="1A6BBF"/>
-            </a:solidFill>
-            <a:prstDash val="solid"/>
-          </a:ln>
-          <a:effectLst>
-            <a:outerShdw sx="100000" sy="100000" kx="0" ky="0" algn="bl" rotWithShape="0" blurRad="101600" dist="38100" dir="8100000">
-              <a:srgbClr val="000000">
-                <a:alpha val="18000"/>
-              </a:srgbClr>
-            </a:outerShdw>
-          </a:effectLst>
-        </p:spPr>
-        <p:txBody>
-          <a:bodyPr/>
-          <a:p/>
-        </p:txBody>
-      </p:sp>
-      <p:sp>
-        <p:nvSpPr>
-          <p:cNvPr id="13" name="Text 11"/>
-          <p:cNvSpPr/>
-          <p:nvPr/>
-        </p:nvSpPr>
-        <p:spPr>
-          <a:xfrm>
-            <a:off x="6035040" y="960120"/>
-            <a:ext cx="2651760" cy="502920"/>
-          </a:xfrm>
-          <a:prstGeom prst="rect">
-            <a:avLst/>
-          </a:prstGeom>
-          <a:noFill/>
-          <a:ln/>
-        </p:spPr>
-        <p:txBody>
-          <a:bodyPr wrap="square" rtlCol="0" anchor="ctr"/>
-          <a:lstStyle/>
-          <a:p>
-            <a:pPr algn="ctr" indent="0" marL="0">
-              <a:buNone/>
-            </a:pPr>
-            <a:r>
-              <a:rPr lang="en-US" sz="2200" dirty="0">
-                <a:solidFill>
-                  <a:srgbClr val="000000"/>
-                </a:solidFill>
-              </a:rPr>
-              <a:t>📈</a:t>
-            </a:r>
-            <a:endParaRPr lang="en-US" sz="2200" dirty="0"/>
-          </a:p>
-        </p:txBody>
-      </p:sp>
-      <p:sp>
-        <p:nvSpPr>
-          <p:cNvPr id="14" name="Text 12"/>
-          <p:cNvSpPr/>
-          <p:nvPr/>
-        </p:nvSpPr>
-        <p:spPr>
-          <a:xfrm>
-            <a:off x="6035040" y="1463040"/>
-            <a:ext cx="2651760" cy="365760"/>
-          </a:xfrm>
-          <a:prstGeom prst="rect">
-            <a:avLst/>
-          </a:prstGeom>
-          <a:noFill/>
-          <a:ln/>
-        </p:spPr>
-        <p:txBody>
-          <a:bodyPr wrap="square" rtlCol="0" anchor="ctr"/>
-          <a:lstStyle/>
-          <a:p>
-            <a:pPr algn="ctr" indent="0" marL="0">
-              <a:buNone/>
-            </a:pPr>
-            <a:r>
-              <a:rPr lang="en-US" sz="1100" b="1" dirty="0">
-                <a:solidFill>
-                  <a:srgbClr val="4A9EFF"/>
-                </a:solidFill>
-              </a:rPr>
-              <a:t>Alpha &amp; beta</a:t>
-            </a:r>
-            <a:endParaRPr lang="en-US" sz="1100" dirty="0"/>
-          </a:p>
-        </p:txBody>
-      </p:sp>
-      <p:sp>
-        <p:nvSpPr>
-          <p:cNvPr id="15" name="Text 13"/>
-          <p:cNvSpPr/>
-          <p:nvPr/>
-        </p:nvSpPr>
-        <p:spPr>
-          <a:xfrm>
-            <a:off x="6144768" y="1874520"/>
-            <a:ext cx="2432304" cy="731520"/>
-          </a:xfrm>
-          <a:prstGeom prst="rect">
-            <a:avLst/>
-          </a:prstGeom>
-          <a:noFill/>
-          <a:ln/>
-        </p:spPr>
-        <p:txBody>
-          <a:bodyPr wrap="square" rtlCol="0" anchor="t"/>
-          <a:lstStyle/>
-          <a:p>
-            <a:pPr algn="ctr" indent="0" marL="0">
-              <a:buNone/>
-            </a:pPr>
-            <a:r>
-              <a:rPr lang="en-US" sz="950" dirty="0">
-                <a:solidFill>
-                  <a:srgbClr val="C0C8D8"/>
-                </a:solidFill>
-              </a:rPr>
-              <a:t>Realised alpha, beta and R² of each holding and of the portfolio vs a chosen benchmark.</a:t>
-            </a:r>
-            <a:endParaRPr lang="en-US" sz="950" dirty="0"/>
-          </a:p>
-        </p:txBody>
-      </p:sp>
-      <p:sp>
-        <p:nvSpPr>
-          <p:cNvPr id="16" name="Shape 14"/>
-          <p:cNvSpPr/>
-          <p:nvPr/>
-        </p:nvSpPr>
-        <p:spPr>
-          <a:xfrm>
-            <a:off x="365760" y="2834640"/>
-            <a:ext cx="8412480" cy="1508760"/>
-          </a:xfrm>
-          <a:prstGeom prst="rect">
-            <a:avLst/>
-          </a:prstGeom>
-          <a:solidFill>
-            <a:srgbClr val="0D1A2E"/>
-          </a:solidFill>
-          <a:ln w="12700">
-            <a:solidFill>
-              <a:srgbClr val="1A6BBF"/>
-            </a:solidFill>
-            <a:prstDash val="solid"/>
-          </a:ln>
-        </p:spPr>
-        <p:txBody>
-          <a:bodyPr/>
-          <a:p/>
-        </p:txBody>
-      </p:sp>
-      <p:sp>
-        <p:nvSpPr>
-          <p:cNvPr id="17" name="Text 15"/>
-          <p:cNvSpPr/>
-          <p:nvPr/>
-        </p:nvSpPr>
-        <p:spPr>
-          <a:xfrm>
-            <a:off x="548640" y="2880360"/>
-            <a:ext cx="8046720" cy="320040"/>
-          </a:xfrm>
-          <a:prstGeom prst="rect">
-            <a:avLst/>
-          </a:prstGeom>
-          <a:noFill/>
-          <a:ln/>
-        </p:spPr>
-        <p:txBody>
-          <a:bodyPr wrap="square" rtlCol="0" anchor="ctr"/>
-          <a:lstStyle/>
-          <a:p>
-            <a:pPr indent="0" marL="0">
-              <a:buNone/>
-            </a:pPr>
-            <a:r>
-              <a:rPr lang="en-US" sz="1100" b="1" dirty="0">
-                <a:solidFill>
-                  <a:srgbClr val="4A9EFF"/>
-                </a:solidFill>
-              </a:rPr>
-              <a:t>What you get</a:t>
-            </a:r>
-            <a:endParaRPr lang="en-US" sz="1100" dirty="0"/>
-          </a:p>
-        </p:txBody>
-      </p:sp>
-      <p:sp>
-        <p:nvSpPr>
-          <p:cNvPr id="18" name="Shape 16"/>
-          <p:cNvSpPr/>
-          <p:nvPr/>
-        </p:nvSpPr>
-        <p:spPr>
-          <a:xfrm>
-            <a:off x="548640" y="3209544"/>
-            <a:ext cx="502920" cy="292608"/>
-          </a:xfrm>
-          <a:prstGeom prst="roundRect">
-            <a:avLst>
-              <a:gd name="adj" fmla="val 18750"/>
-            </a:avLst>
-          </a:prstGeom>
-          <a:solidFill>
-            <a:srgbClr val="1A6BBF"/>
-          </a:solidFill>
-          <a:ln w="12700">
-            <a:solidFill>
-              <a:srgbClr val="1A6BBF"/>
-            </a:solidFill>
-            <a:prstDash val="solid"/>
-          </a:ln>
-        </p:spPr>
-        <p:txBody>
-          <a:bodyPr/>
-          <a:p/>
-        </p:txBody>
-      </p:sp>
-      <p:sp>
-        <p:nvSpPr>
-          <p:cNvPr id="19" name="Text 17"/>
-          <p:cNvSpPr/>
-          <p:nvPr/>
-        </p:nvSpPr>
-        <p:spPr>
-          <a:xfrm>
-            <a:off x="548640" y="3209544"/>
-            <a:ext cx="502920" cy="292608"/>
-          </a:xfrm>
-          <a:prstGeom prst="rect">
-            <a:avLst/>
-          </a:prstGeom>
-          <a:noFill/>
-          <a:ln/>
-        </p:spPr>
-        <p:txBody>
-          <a:bodyPr wrap="square" lIns="0" tIns="0" rIns="0" bIns="0" rtlCol="0" anchor="ctr"/>
-          <a:lstStyle/>
-          <a:p>
-            <a:pPr algn="ctr" indent="0" marL="0">
-              <a:buNone/>
-            </a:pPr>
-            <a:r>
-              <a:rPr lang="en-US" sz="1100" b="1" dirty="0">
-                <a:solidFill>
-                  <a:srgbClr val="FFFFFF"/>
-                </a:solidFill>
-              </a:rPr>
-              <a:t>1</a:t>
-            </a:r>
-            <a:endParaRPr lang="en-US" sz="1100" dirty="0"/>
-          </a:p>
-        </p:txBody>
-      </p:sp>
-      <p:sp>
-        <p:nvSpPr>
-          <p:cNvPr id="20" name="Text 18"/>
-          <p:cNvSpPr/>
-          <p:nvPr/>
-        </p:nvSpPr>
-        <p:spPr>
-          <a:xfrm>
-            <a:off x="1143000" y="3209544"/>
-            <a:ext cx="2194560" cy="292608"/>
-          </a:xfrm>
-          <a:prstGeom prst="rect">
-            <a:avLst/>
-          </a:prstGeom>
-          <a:noFill/>
-          <a:ln/>
-        </p:spPr>
-        <p:txBody>
-          <a:bodyPr wrap="square" lIns="0" tIns="0" rIns="0" bIns="0" rtlCol="0" anchor="ctr"/>
-          <a:lstStyle/>
-          <a:p>
-            <a:pPr indent="0" marL="0">
-              <a:buNone/>
-            </a:pPr>
-            <a:r>
-              <a:rPr lang="en-US" sz="950" b="1" dirty="0">
-                <a:solidFill>
-                  <a:srgbClr val="10B981"/>
-                </a:solidFill>
-              </a:rPr>
-              <a:t>Expected vs realised:</a:t>
-            </a:r>
-            <a:endParaRPr lang="en-US" sz="950" dirty="0"/>
-          </a:p>
-        </p:txBody>
-      </p:sp>
-      <p:sp>
-        <p:nvSpPr>
-          <p:cNvPr id="21" name="Text 19"/>
-          <p:cNvSpPr/>
-          <p:nvPr/>
-        </p:nvSpPr>
-        <p:spPr>
-          <a:xfrm>
-            <a:off x="3383280" y="3209544"/>
-            <a:ext cx="5212080" cy="292608"/>
-          </a:xfrm>
-          <a:prstGeom prst="rect">
-            <a:avLst/>
-          </a:prstGeom>
-          <a:noFill/>
-          <a:ln/>
-        </p:spPr>
-        <p:txBody>
-          <a:bodyPr wrap="square" lIns="0" tIns="0" rIns="0" bIns="0" rtlCol="0" anchor="ctr"/>
-          <a:lstStyle/>
-          <a:p>
-            <a:pPr indent="0" marL="0">
-              <a:buNone/>
-            </a:pPr>
-            <a:r>
-              <a:rPr lang="en-US" sz="900" dirty="0">
-                <a:solidFill>
-                  <a:srgbClr val="C0C8D8"/>
-                </a:solidFill>
-              </a:rPr>
-              <a:t>Return, volatility and the loss-threshold outcome, for P1 (no derivative) and P2 (with).</a:t>
-            </a:r>
-            <a:endParaRPr lang="en-US" sz="900" dirty="0"/>
-          </a:p>
-        </p:txBody>
-      </p:sp>
-      <p:sp>
-        <p:nvSpPr>
-          <p:cNvPr id="22" name="Shape 20"/>
-          <p:cNvSpPr/>
-          <p:nvPr/>
-        </p:nvSpPr>
-        <p:spPr>
-          <a:xfrm>
-            <a:off x="548640" y="3547872"/>
-            <a:ext cx="502920" cy="292608"/>
-          </a:xfrm>
-          <a:prstGeom prst="roundRect">
-            <a:avLst>
-              <a:gd name="adj" fmla="val 18750"/>
-            </a:avLst>
-          </a:prstGeom>
-          <a:solidFill>
-            <a:srgbClr val="1A6BBF"/>
-          </a:solidFill>
-          <a:ln w="12700">
-            <a:solidFill>
-              <a:srgbClr val="1A6BBF"/>
-            </a:solidFill>
-            <a:prstDash val="solid"/>
-          </a:ln>
-        </p:spPr>
-        <p:txBody>
-          <a:bodyPr/>
-          <a:p/>
-        </p:txBody>
-      </p:sp>
-      <p:sp>
-        <p:nvSpPr>
-          <p:cNvPr id="23" name="Text 21"/>
-          <p:cNvSpPr/>
-          <p:nvPr/>
-        </p:nvSpPr>
-        <p:spPr>
-          <a:xfrm>
-            <a:off x="548640" y="3547872"/>
-            <a:ext cx="502920" cy="292608"/>
-          </a:xfrm>
-          <a:prstGeom prst="rect">
-            <a:avLst/>
-          </a:prstGeom>
-          <a:noFill/>
-          <a:ln/>
-        </p:spPr>
-        <p:txBody>
-          <a:bodyPr wrap="square" lIns="0" tIns="0" rIns="0" bIns="0" rtlCol="0" anchor="ctr"/>
-          <a:lstStyle/>
-          <a:p>
-            <a:pPr algn="ctr" indent="0" marL="0">
-              <a:buNone/>
-            </a:pPr>
-            <a:r>
-              <a:rPr lang="en-US" sz="1100" b="1" dirty="0">
-                <a:solidFill>
-                  <a:srgbClr val="FFFFFF"/>
-                </a:solidFill>
-              </a:rPr>
-              <a:t>2</a:t>
-            </a:r>
-            <a:endParaRPr lang="en-US" sz="1100" dirty="0"/>
-          </a:p>
-        </p:txBody>
-      </p:sp>
-      <p:sp>
-        <p:nvSpPr>
-          <p:cNvPr id="24" name="Text 22"/>
-          <p:cNvSpPr/>
-          <p:nvPr/>
-        </p:nvSpPr>
-        <p:spPr>
-          <a:xfrm>
-            <a:off x="1143000" y="3547872"/>
-            <a:ext cx="2194560" cy="292608"/>
-          </a:xfrm>
-          <a:prstGeom prst="rect">
-            <a:avLst/>
-          </a:prstGeom>
-          <a:noFill/>
-          <a:ln/>
-        </p:spPr>
-        <p:txBody>
-          <a:bodyPr wrap="square" lIns="0" tIns="0" rIns="0" bIns="0" rtlCol="0" anchor="ctr"/>
-          <a:lstStyle/>
-          <a:p>
-            <a:pPr indent="0" marL="0">
-              <a:buNone/>
-            </a:pPr>
-            <a:r>
-              <a:rPr lang="en-US" sz="950" b="1" dirty="0">
-                <a:solidFill>
-                  <a:srgbClr val="F59E0B"/>
-                </a:solidFill>
-              </a:rPr>
-              <a:t>Alpha / beta table:</a:t>
-            </a:r>
-            <a:endParaRPr lang="en-US" sz="950" dirty="0"/>
-          </a:p>
-        </p:txBody>
-      </p:sp>
-      <p:sp>
-        <p:nvSpPr>
-          <p:cNvPr id="25" name="Text 23"/>
-          <p:cNvSpPr/>
-          <p:nvPr/>
-        </p:nvSpPr>
-        <p:spPr>
-          <a:xfrm>
-            <a:off x="3383280" y="3547872"/>
-            <a:ext cx="5212080" cy="292608"/>
-          </a:xfrm>
-          <a:prstGeom prst="rect">
-            <a:avLst/>
-          </a:prstGeom>
-          <a:noFill/>
-          <a:ln/>
-        </p:spPr>
-        <p:txBody>
-          <a:bodyPr wrap="square" lIns="0" tIns="0" rIns="0" bIns="0" rtlCol="0" anchor="ctr"/>
-          <a:lstStyle/>
-          <a:p>
-            <a:pPr indent="0" marL="0">
-              <a:buNone/>
-            </a:pPr>
-            <a:r>
-              <a:rPr lang="en-US" sz="900" dirty="0">
-                <a:solidFill>
-                  <a:srgbClr val="C0C8D8"/>
-                </a:solidFill>
-              </a:rPr>
-              <a:t>Per-security and portfolio beta (the regression slope) and annualised Jensen alpha, with R².</a:t>
-            </a:r>
-            <a:endParaRPr lang="en-US" sz="900" dirty="0"/>
-          </a:p>
-        </p:txBody>
-      </p:sp>
-      <p:sp>
-        <p:nvSpPr>
-          <p:cNvPr id="26" name="Shape 24"/>
-          <p:cNvSpPr/>
-          <p:nvPr/>
-        </p:nvSpPr>
-        <p:spPr>
-          <a:xfrm>
-            <a:off x="548640" y="3886200"/>
-            <a:ext cx="502920" cy="292608"/>
-          </a:xfrm>
-          <a:prstGeom prst="roundRect">
-            <a:avLst>
-              <a:gd name="adj" fmla="val 18750"/>
-            </a:avLst>
-          </a:prstGeom>
-          <a:solidFill>
-            <a:srgbClr val="1A6BBF"/>
-          </a:solidFill>
-          <a:ln w="12700">
-            <a:solidFill>
-              <a:srgbClr val="1A6BBF"/>
-            </a:solidFill>
-            <a:prstDash val="solid"/>
-          </a:ln>
-        </p:spPr>
-        <p:txBody>
-          <a:bodyPr/>
-          <a:p/>
-        </p:txBody>
-      </p:sp>
-      <p:sp>
-        <p:nvSpPr>
-          <p:cNvPr id="27" name="Text 25"/>
-          <p:cNvSpPr/>
-          <p:nvPr/>
-        </p:nvSpPr>
-        <p:spPr>
-          <a:xfrm>
-            <a:off x="548640" y="3886200"/>
-            <a:ext cx="502920" cy="292608"/>
-          </a:xfrm>
-          <a:prstGeom prst="rect">
-            <a:avLst/>
-          </a:prstGeom>
-          <a:noFill/>
-          <a:ln/>
-        </p:spPr>
-        <p:txBody>
-          <a:bodyPr wrap="square" lIns="0" tIns="0" rIns="0" bIns="0" rtlCol="0" anchor="ctr"/>
-          <a:lstStyle/>
-          <a:p>
-            <a:pPr algn="ctr" indent="0" marL="0">
-              <a:buNone/>
-            </a:pPr>
-            <a:r>
-              <a:rPr lang="en-US" sz="1100" b="1" dirty="0">
-                <a:solidFill>
-                  <a:srgbClr val="FFFFFF"/>
-                </a:solidFill>
-              </a:rPr>
-              <a:t>3</a:t>
-            </a:r>
-            <a:endParaRPr lang="en-US" sz="1100" dirty="0"/>
-          </a:p>
-        </p:txBody>
-      </p:sp>
-      <p:sp>
-        <p:nvSpPr>
-          <p:cNvPr id="28" name="Text 26"/>
-          <p:cNvSpPr/>
-          <p:nvPr/>
-        </p:nvSpPr>
-        <p:spPr>
-          <a:xfrm>
-            <a:off x="1143000" y="3886200"/>
-            <a:ext cx="2194560" cy="292608"/>
-          </a:xfrm>
-          <a:prstGeom prst="rect">
-            <a:avLst/>
-          </a:prstGeom>
-          <a:noFill/>
-          <a:ln/>
-        </p:spPr>
-        <p:txBody>
-          <a:bodyPr wrap="square" lIns="0" tIns="0" rIns="0" bIns="0" rtlCol="0" anchor="ctr"/>
-          <a:lstStyle/>
-          <a:p>
-            <a:pPr indent="0" marL="0">
-              <a:buNone/>
-            </a:pPr>
-            <a:r>
-              <a:rPr lang="en-US" sz="950" b="1" dirty="0">
-                <a:solidFill>
-                  <a:srgbClr val="E76F51"/>
-                </a:solidFill>
-              </a:rPr>
-              <a:t>Optional CAPM:</a:t>
-            </a:r>
-            <a:endParaRPr lang="en-US" sz="950" dirty="0"/>
-          </a:p>
-        </p:txBody>
-      </p:sp>
-      <p:sp>
-        <p:nvSpPr>
-          <p:cNvPr id="29" name="Text 27"/>
-          <p:cNvSpPr/>
-          <p:nvPr/>
-        </p:nvSpPr>
-        <p:spPr>
-          <a:xfrm>
-            <a:off x="3383280" y="3886200"/>
-            <a:ext cx="5212080" cy="292608"/>
-          </a:xfrm>
-          <a:prstGeom prst="rect">
-            <a:avLst/>
-          </a:prstGeom>
-          <a:noFill/>
-          <a:ln/>
-        </p:spPr>
-        <p:txBody>
-          <a:bodyPr wrap="square" lIns="0" tIns="0" rIns="0" bIns="0" rtlCol="0" anchor="ctr"/>
-          <a:lstStyle/>
-          <a:p>
-            <a:pPr indent="0" marL="0">
-              <a:buNone/>
-            </a:pPr>
-            <a:r>
-              <a:rPr lang="en-US" sz="900" dirty="0">
-                <a:solidFill>
-                  <a:srgbClr val="C0C8D8"/>
-                </a:solidFill>
-              </a:rPr>
-              <a:t>Enter an expected market return E[Rm] to add a CAPM required return and an ex-ante alpha.</a:t>
-            </a:r>
-            <a:endParaRPr lang="en-US" sz="900" dirty="0"/>
-          </a:p>
-        </p:txBody>
-      </p:sp>
-      <p:sp>
-        <p:nvSpPr>
-          <p:cNvPr id="30" name="Text 28"/>
-          <p:cNvSpPr/>
-          <p:nvPr/>
-        </p:nvSpPr>
-        <p:spPr>
-          <a:xfrm>
-            <a:off x="8046720" y="4754880"/>
-            <a:ext cx="914400" cy="274320"/>
-          </a:xfrm>
-          <a:prstGeom prst="rect">
-            <a:avLst/>
-          </a:prstGeom>
-          <a:noFill/>
-          <a:ln/>
-        </p:spPr>
-        <p:txBody>
-          <a:bodyPr wrap="square" rtlCol="0" anchor="ctr"/>
-          <a:lstStyle/>
-          <a:p>
-            <a:pPr algn="r" indent="0" marL="0">
-              <a:buNone/>
-            </a:pPr>
-            <a:r>
-              <a:rPr lang="en-US" sz="900" dirty="0">
-                <a:solidFill>
-                  <a:srgbClr val="556A8A"/>
-                </a:solidFill>
-              </a:rPr>
-              <a:t>14 / 17</a:t>
-            </a:r>
-            <a:endParaRPr lang="en-US" sz="900" dirty="0"/>
-          </a:p>
-        </p:txBody>
-      </p:sp>
-      <p:sp>
-        <p:nvSpPr>
-          <p:cNvPr id="31" name="Text 29"/>
-          <p:cNvSpPr/>
-          <p:nvPr/>
-        </p:nvSpPr>
-        <p:spPr>
-          <a:xfrm>
-            <a:off x="365760" y="4754880"/>
-            <a:ext cx="6400800" cy="274320"/>
-          </a:xfrm>
-          <a:prstGeom prst="rect">
-            <a:avLst/>
-          </a:prstGeom>
-          <a:noFill/>
-          <a:ln/>
-        </p:spPr>
-        <p:txBody>
-          <a:bodyPr wrap="square" rtlCol="0" anchor="ctr"/>
-          <a:lstStyle/>
-          <a:p>
-            <a:pPr algn="l" indent="0" marL="0">
-              <a:buNone/>
-            </a:pPr>
-            <a:r>
-              <a:rPr lang="en-US" sz="900" dirty="0">
-                <a:solidFill>
-                  <a:srgbClr val="556A8A"/>
-                </a:solidFill>
-              </a:rPr>
-              <a:t>Beyond Mean-Variance Portfolio Optimiser — User Guide</a:t>
-            </a:r>
-            <a:endParaRPr lang="en-US" sz="900" dirty="0"/>
-          </a:p>
-        </p:txBody>
-      </p:sp>
-    </p:spTree>
-  </p:cSld>
-  <p:clrMapOvr>
-    <a:masterClrMapping/>
-  </p:clrMapOvr>
-</p:sld>
-</file>
-
-<file path=ppt/slides/slide16.xml><?xml version="1.0" encoding="utf-8"?>
 <p:sld xmlns:a="http://schemas.openxmlformats.org/drawingml/2006/main" xmlns:r="http://schemas.openxmlformats.org/officeDocument/2006/relationships" xmlns:p="http://schemas.openxmlformats.org/presentationml/2006/main">
   <p:cSld name="Slide 8">
     <p:bg>
@@ -7316,7 +5760,7 @@
                   <a:srgbClr val="FFFFFF"/>
                 </a:solidFill>
               </a:rPr>
-              <a:t>Reading the Scalable output</a:t>
+              <a:t>Reading the Backtest output</a:t>
             </a:r>
             <a:endParaRPr lang="en-US" sz="2200" dirty="0"/>
           </a:p>
@@ -7352,7 +5796,7 @@
                   <a:srgbClr val="556A8A"/>
                 </a:solidFill>
               </a:rPr>
-              <a:t>13 / 17</a:t>
+              <a:t>15 / 17</a:t>
             </a:r>
             <a:endParaRPr lang="en-US" sz="900" dirty="0"/>
           </a:p>
@@ -7493,7 +5937,7 @@
                   <a:srgbClr val="C0C8D8"/>
                 </a:solidFill>
               </a:rPr>
-              <a:t>•  Curve = the return / tail-risk frontier: the most expected return reachable for each Expected-Shortfall floor L.</a:t>
+              <a:t>•  Out-of-sample value of two optimiser portfolios, rebased to 100 at entry and marked to market.</a:t>
             </a:r>
           </a:p>
           <a:p>
@@ -7509,7 +5953,7 @@
                   <a:srgbClr val="C0C8D8"/>
                 </a:solidFill>
               </a:rPr>
-              <a:t>•  A tighter floor (toward −10%) allows less tail loss and lowers return; a looser one (toward −30%) raises it.</a:t>
+              <a:t>•  Green = Portfolio (1), no derivative; orange = Portfolio (2), with the chosen derivative (a put).</a:t>
             </a:r>
           </a:p>
           <a:p>
@@ -7525,7 +5969,7 @@
                   <a:srgbClr val="C0C8D8"/>
                 </a:solidFill>
               </a:rPr>
-              <a:t>•  The ★ is the optimum at your chosen floor (here L = −20%, E[r] = 24.6%).</a:t>
+              <a:t>•  The derivative line cushions drawdowns and ends higher — the realised hedging benefit on unseen data.</a:t>
             </a:r>
           </a:p>
           <a:p>
@@ -7541,7 +5985,7 @@
                   <a:srgbClr val="C0C8D8"/>
                 </a:solidFill>
               </a:rPr>
-              <a:t>•  Built from Monte-Carlo scenarios solved by a CVaR linear program, so it scales to many assets.</a:t>
+              <a:t>•  Realised alpha &amp; beta vs a benchmark are computed from these paths (table beneath the chart in the app).</a:t>
             </a:r>
           </a:p>
         </p:txBody>
@@ -7554,9 +5998,9 @@
 </p:sld>
 </file>
 
-<file path=ppt/slides/slide17.xml><?xml version="1.0" encoding="utf-8"?>
+<file path=ppt/slides/slide16.xml><?xml version="1.0" encoding="utf-8"?>
 <p:sld xmlns:a="http://schemas.openxmlformats.org/drawingml/2006/main" xmlns:r="http://schemas.openxmlformats.org/officeDocument/2006/relationships" xmlns:p="http://schemas.openxmlformats.org/presentationml/2006/main">
-  <p:cSld name="Slide 8">
+  <p:cSld name="Slide 11">
     <p:bg>
       <p:bgPr>
         <a:solidFill>
@@ -7637,7 +6081,7 @@
                   <a:srgbClr val="FFFFFF"/>
                 </a:solidFill>
               </a:rPr>
-              <a:t>Reading the Backtest output</a:t>
+              <a:t>About &amp; Glossary Tabs</a:t>
             </a:r>
             <a:endParaRPr lang="en-US" sz="2200" dirty="0"/>
           </a:p>
@@ -7645,110 +6089,14 @@
       </p:sp>
       <p:sp>
         <p:nvSpPr>
-          <p:cNvPr id="27" name="Text 25"/>
-          <p:cNvSpPr/>
-          <p:nvPr/>
-        </p:nvSpPr>
-        <p:spPr>
-          <a:xfrm>
-            <a:off x="8046720" y="4754880"/>
-            <a:ext cx="914400" cy="274320"/>
-          </a:xfrm>
-          <a:prstGeom prst="rect">
-            <a:avLst/>
-          </a:prstGeom>
-          <a:noFill/>
-          <a:ln/>
-        </p:spPr>
-        <p:txBody>
-          <a:bodyPr wrap="square" rtlCol="0" anchor="ctr"/>
-          <a:lstStyle/>
-          <a:p>
-            <a:pPr algn="r" indent="0" marL="0">
-              <a:buNone/>
-            </a:pPr>
-            <a:r>
-              <a:rPr lang="en-US" sz="900" dirty="0">
-                <a:solidFill>
-                  <a:srgbClr val="556A8A"/>
-                </a:solidFill>
-              </a:rPr>
-              <a:t>15 / 17</a:t>
-            </a:r>
-            <a:endParaRPr lang="en-US" sz="900" dirty="0"/>
-          </a:p>
-        </p:txBody>
-      </p:sp>
-      <p:sp>
-        <p:nvSpPr>
-          <p:cNvPr id="28" name="Text 26"/>
-          <p:cNvSpPr/>
-          <p:nvPr/>
-        </p:nvSpPr>
-        <p:spPr>
-          <a:xfrm>
-            <a:off x="365760" y="4754880"/>
-            <a:ext cx="6400800" cy="274320"/>
-          </a:xfrm>
-          <a:prstGeom prst="rect">
-            <a:avLst/>
-          </a:prstGeom>
-          <a:noFill/>
-          <a:ln/>
-        </p:spPr>
-        <p:txBody>
-          <a:bodyPr wrap="square" rtlCol="0" anchor="ctr"/>
-          <a:lstStyle/>
-          <a:p>
-            <a:pPr algn="l" indent="0" marL="0">
-              <a:buNone/>
-            </a:pPr>
-            <a:r>
-              <a:rPr lang="en-US" sz="900" dirty="0">
-                <a:solidFill>
-                  <a:srgbClr val="556A8A"/>
-                </a:solidFill>
-              </a:rPr>
-              <a:t>Beyond Mean-Variance Portfolio Optimiser — User Guide</a:t>
-            </a:r>
-            <a:endParaRPr lang="en-US" sz="900" dirty="0"/>
-          </a:p>
-        </p:txBody>
-      </p:sp>
-      <p:pic>
-        <p:nvPicPr>
-          <p:cNvPr id="29" name="Picture 28" descr="Slide8chart.png"/>
-          <p:cNvPicPr>
-            <a:picLocks noChangeAspect="1"/>
-          </p:cNvPicPr>
-          <p:nvPr/>
-        </p:nvPicPr>
-        <p:blipFill>
-          <a:blip r:embed="rId3"/>
-          <a:stretch>
-            <a:fillRect/>
-          </a:stretch>
-        </p:blipFill>
-        <p:spPr>
-          <a:xfrm>
-            <a:off x="365760" y="1095744"/>
-            <a:ext cx="5120640" cy="2526650"/>
-          </a:xfrm>
-          <a:prstGeom prst="rect">
-            <a:avLst/>
-          </a:prstGeom>
-        </p:spPr>
-      </p:pic>
-      <p:sp>
-        <p:nvSpPr>
-          <p:cNvPr id="40" name="Cmt box"/>
-          <p:cNvSpPr/>
-          <p:nvPr/>
-        </p:nvSpPr>
-        <p:spPr>
-          <a:xfrm>
-            <a:off x="5669280" y="1095744"/>
-            <a:ext cx="3154240" cy="2526650"/>
+          <p:cNvPr id="4" name="Shape 2"/>
+          <p:cNvSpPr/>
+          <p:nvPr/>
+        </p:nvSpPr>
+        <p:spPr>
+          <a:xfrm>
+            <a:off x="365760" y="749808"/>
+            <a:ext cx="4023360" cy="3474720"/>
           </a:xfrm>
           <a:prstGeom prst="rect">
             <a:avLst/>
@@ -7770,23 +6118,746 @@
       </p:sp>
       <p:sp>
         <p:nvSpPr>
-          <p:cNvPr id="41" name="Cmt text"/>
-          <p:cNvSpPr/>
-          <p:nvPr/>
-        </p:nvSpPr>
-        <p:spPr>
-          <a:xfrm>
-            <a:off x="5852160" y="1188720"/>
-            <a:ext cx="2788480" cy="2360000"/>
-          </a:xfrm>
-          <a:prstGeom prst="rect">
-            <a:avLst/>
-          </a:prstGeom>
-          <a:noFill/>
-          <a:ln/>
-        </p:spPr>
-        <p:txBody>
-          <a:bodyPr wrap="square" lIns="0" tIns="0" rIns="0" bIns="0" rtlCol="0" anchor="t"/>
+          <p:cNvPr id="5" name="Text 3"/>
+          <p:cNvSpPr/>
+          <p:nvPr/>
+        </p:nvSpPr>
+        <p:spPr>
+          <a:xfrm>
+            <a:off x="548640" y="822960"/>
+            <a:ext cx="3657600" cy="320040"/>
+          </a:xfrm>
+          <a:prstGeom prst="rect">
+            <a:avLst/>
+          </a:prstGeom>
+          <a:noFill/>
+          <a:ln/>
+        </p:spPr>
+        <p:txBody>
+          <a:bodyPr wrap="square" lIns="0" tIns="0" rIns="0" bIns="0" rtlCol="0" anchor="ctr"/>
+          <a:lstStyle/>
+          <a:p>
+            <a:pPr indent="0" marL="0">
+              <a:buNone/>
+            </a:pPr>
+            <a:r>
+              <a:rPr lang="en-US" sz="1200" b="1" dirty="0">
+                <a:solidFill>
+                  <a:srgbClr val="4A9EFF"/>
+                </a:solidFill>
+              </a:rPr>
+              <a:t>📖  About Tab</a:t>
+            </a:r>
+            <a:endParaRPr lang="en-US" sz="1200" dirty="0"/>
+          </a:p>
+        </p:txBody>
+      </p:sp>
+      <p:sp>
+        <p:nvSpPr>
+          <p:cNvPr id="8" name="Text 6"/>
+          <p:cNvSpPr/>
+          <p:nvPr/>
+        </p:nvSpPr>
+        <p:spPr>
+          <a:xfrm>
+            <a:off x="548640" y="2880360"/>
+            <a:ext cx="3657600" cy="256032"/>
+          </a:xfrm>
+          <a:prstGeom prst="rect">
+            <a:avLst/>
+          </a:prstGeom>
+          <a:noFill/>
+          <a:ln/>
+        </p:spPr>
+        <p:txBody>
+          <a:bodyPr wrap="square" rtlCol="0" anchor="ctr"/>
+          <a:lstStyle/>
+          <a:p>
+            <a:pPr indent="0" marL="0">
+              <a:buNone/>
+            </a:pPr>
+            <a:r>
+              <a:rPr lang="en-US" sz="950" dirty="0">
+                <a:solidFill>
+                  <a:srgbClr val="4A9EFF"/>
+                </a:solidFill>
+              </a:rPr>
+              <a:t xml:space="preserve">▸  </a:t>
+            </a:r>
+            <a:pPr indent="0" marL="0">
+              <a:buNone/>
+            </a:pPr>
+            <a:r>
+              <a:rPr lang="en-US" sz="950" dirty="0">
+                <a:solidFill>
+                  <a:srgbClr val="C0C8D8"/>
+                </a:solidFill>
+              </a:rPr>
+              <a:t>Author background &amp; contact</a:t>
+            </a:r>
+            <a:endParaRPr lang="en-US" sz="950" dirty="0"/>
+          </a:p>
+        </p:txBody>
+      </p:sp>
+      <p:sp>
+        <p:nvSpPr>
+          <p:cNvPr id="9" name="Text 7"/>
+          <p:cNvSpPr/>
+          <p:nvPr/>
+        </p:nvSpPr>
+        <p:spPr>
+          <a:xfrm>
+            <a:off x="548640" y="3182112"/>
+            <a:ext cx="3657600" cy="256032"/>
+          </a:xfrm>
+          <a:prstGeom prst="rect">
+            <a:avLst/>
+          </a:prstGeom>
+          <a:noFill/>
+          <a:ln/>
+        </p:spPr>
+        <p:txBody>
+          <a:bodyPr wrap="square" rtlCol="0" anchor="ctr"/>
+          <a:lstStyle/>
+          <a:p>
+            <a:pPr indent="0" marL="0">
+              <a:buNone/>
+            </a:pPr>
+            <a:r>
+              <a:rPr lang="en-US" sz="950" dirty="0">
+                <a:solidFill>
+                  <a:srgbClr val="4A9EFF"/>
+                </a:solidFill>
+              </a:rPr>
+              <a:t xml:space="preserve">▸  </a:t>
+            </a:r>
+            <a:pPr indent="0" marL="0">
+              <a:buNone/>
+            </a:pPr>
+            <a:r>
+              <a:rPr lang="en-US" sz="950" dirty="0">
+                <a:solidFill>
+                  <a:srgbClr val="C0C8D8"/>
+                </a:solidFill>
+              </a:rPr>
+              <a:t>App description &amp; algorithm</a:t>
+            </a:r>
+            <a:endParaRPr lang="en-US" sz="950" dirty="0"/>
+          </a:p>
+        </p:txBody>
+      </p:sp>
+      <p:sp>
+        <p:nvSpPr>
+          <p:cNvPr id="10" name="Text 8"/>
+          <p:cNvSpPr/>
+          <p:nvPr/>
+        </p:nvSpPr>
+        <p:spPr>
+          <a:xfrm>
+            <a:off x="548640" y="3483864"/>
+            <a:ext cx="3657600" cy="256032"/>
+          </a:xfrm>
+          <a:prstGeom prst="rect">
+            <a:avLst/>
+          </a:prstGeom>
+          <a:noFill/>
+          <a:ln/>
+        </p:spPr>
+        <p:txBody>
+          <a:bodyPr wrap="square" rtlCol="0" anchor="ctr"/>
+          <a:lstStyle/>
+          <a:p>
+            <a:pPr indent="0" marL="0">
+              <a:buNone/>
+            </a:pPr>
+            <a:r>
+              <a:rPr lang="en-US" sz="950" dirty="0">
+                <a:solidFill>
+                  <a:srgbClr val="4A9EFF"/>
+                </a:solidFill>
+              </a:rPr>
+              <a:t xml:space="preserve">▸  </a:t>
+            </a:r>
+            <a:pPr indent="0" marL="0">
+              <a:buNone/>
+            </a:pPr>
+            <a:r>
+              <a:rPr lang="en-US" sz="950" dirty="0">
+                <a:solidFill>
+                  <a:srgbClr val="C0C8D8"/>
+                </a:solidFill>
+              </a:rPr>
+              <a:t>Academic references</a:t>
+            </a:r>
+            <a:endParaRPr lang="en-US" sz="950" dirty="0"/>
+          </a:p>
+        </p:txBody>
+      </p:sp>
+      <p:sp>
+        <p:nvSpPr>
+          <p:cNvPr id="11" name="Text 9"/>
+          <p:cNvSpPr/>
+          <p:nvPr/>
+        </p:nvSpPr>
+        <p:spPr>
+          <a:xfrm>
+            <a:off x="548640" y="3785616"/>
+            <a:ext cx="3657600" cy="256032"/>
+          </a:xfrm>
+          <a:prstGeom prst="rect">
+            <a:avLst/>
+          </a:prstGeom>
+          <a:noFill/>
+          <a:ln/>
+        </p:spPr>
+        <p:txBody>
+          <a:bodyPr wrap="square" rtlCol="0" anchor="ctr"/>
+          <a:lstStyle/>
+          <a:p>
+            <a:pPr indent="0" marL="0">
+              <a:buNone/>
+            </a:pPr>
+            <a:r>
+              <a:rPr lang="en-US" sz="950" dirty="0">
+                <a:solidFill>
+                  <a:srgbClr val="4A9EFF"/>
+                </a:solidFill>
+              </a:rPr>
+              <a:t xml:space="preserve">▸  </a:t>
+            </a:r>
+            <a:pPr indent="0" marL="0">
+              <a:buNone/>
+            </a:pPr>
+            <a:r>
+              <a:rPr lang="en-US" sz="950" dirty="0">
+                <a:solidFill>
+                  <a:srgbClr val="C0C8D8"/>
+                </a:solidFill>
+              </a:rPr>
+              <a:t>Legal disclaimer</a:t>
+            </a:r>
+            <a:endParaRPr lang="en-US" sz="950" dirty="0"/>
+          </a:p>
+        </p:txBody>
+      </p:sp>
+      <p:sp>
+        <p:nvSpPr>
+          <p:cNvPr id="12" name="Shape 10"/>
+          <p:cNvSpPr/>
+          <p:nvPr/>
+        </p:nvSpPr>
+        <p:spPr>
+          <a:xfrm>
+            <a:off x="4754880" y="749808"/>
+            <a:ext cx="4023360" cy="3474720"/>
+          </a:xfrm>
+          <a:prstGeom prst="rect">
+            <a:avLst/>
+          </a:prstGeom>
+          <a:solidFill>
+            <a:srgbClr val="0D1A2E"/>
+          </a:solidFill>
+          <a:ln w="12700">
+            <a:solidFill>
+              <a:srgbClr val="1A6BBF"/>
+            </a:solidFill>
+            <a:prstDash val="solid"/>
+          </a:ln>
+        </p:spPr>
+        <p:txBody>
+          <a:bodyPr/>
+          <a:p/>
+        </p:txBody>
+      </p:sp>
+      <p:sp>
+        <p:nvSpPr>
+          <p:cNvPr id="13" name="Text 11"/>
+          <p:cNvSpPr/>
+          <p:nvPr/>
+        </p:nvSpPr>
+        <p:spPr>
+          <a:xfrm>
+            <a:off x="4937760" y="822960"/>
+            <a:ext cx="3657600" cy="320040"/>
+          </a:xfrm>
+          <a:prstGeom prst="rect">
+            <a:avLst/>
+          </a:prstGeom>
+          <a:noFill/>
+          <a:ln/>
+        </p:spPr>
+        <p:txBody>
+          <a:bodyPr wrap="square" lIns="0" tIns="0" rIns="0" bIns="0" rtlCol="0" anchor="ctr"/>
+          <a:lstStyle/>
+          <a:p>
+            <a:pPr indent="0" marL="0">
+              <a:buNone/>
+            </a:pPr>
+            <a:r>
+              <a:rPr lang="en-US" sz="1200" b="1" dirty="0">
+                <a:solidFill>
+                  <a:srgbClr val="4A9EFF"/>
+                </a:solidFill>
+              </a:rPr>
+              <a:t>📚  Glossary Tab</a:t>
+            </a:r>
+            <a:endParaRPr lang="en-US" sz="1200" dirty="0"/>
+          </a:p>
+        </p:txBody>
+      </p:sp>
+      <p:sp>
+        <p:nvSpPr>
+          <p:cNvPr id="16" name="Text 14"/>
+          <p:cNvSpPr/>
+          <p:nvPr/>
+        </p:nvSpPr>
+        <p:spPr>
+          <a:xfrm>
+            <a:off x="4937760" y="2880360"/>
+            <a:ext cx="3657600" cy="256032"/>
+          </a:xfrm>
+          <a:prstGeom prst="rect">
+            <a:avLst/>
+          </a:prstGeom>
+          <a:noFill/>
+          <a:ln/>
+        </p:spPr>
+        <p:txBody>
+          <a:bodyPr wrap="square" rtlCol="0" anchor="ctr"/>
+          <a:lstStyle/>
+          <a:p>
+            <a:pPr indent="0" marL="0">
+              <a:buNone/>
+            </a:pPr>
+            <a:r>
+              <a:rPr lang="en-US" sz="950" dirty="0">
+                <a:solidFill>
+                  <a:srgbClr val="4A9EFF"/>
+                </a:solidFill>
+              </a:rPr>
+              <a:t xml:space="preserve">▸  </a:t>
+            </a:r>
+            <a:pPr indent="0" marL="0">
+              <a:buNone/>
+            </a:pPr>
+            <a:r>
+              <a:rPr lang="en-US" sz="950" dirty="0">
+                <a:solidFill>
+                  <a:srgbClr val="C0C8D8"/>
+                </a:solidFill>
+              </a:rPr>
+              <a:t>Click any term for AI explanation</a:t>
+            </a:r>
+            <a:endParaRPr lang="en-US" sz="950" dirty="0"/>
+          </a:p>
+        </p:txBody>
+      </p:sp>
+      <p:sp>
+        <p:nvSpPr>
+          <p:cNvPr id="17" name="Text 15"/>
+          <p:cNvSpPr/>
+          <p:nvPr/>
+        </p:nvSpPr>
+        <p:spPr>
+          <a:xfrm>
+            <a:off x="4937760" y="3182112"/>
+            <a:ext cx="3657600" cy="256032"/>
+          </a:xfrm>
+          <a:prstGeom prst="rect">
+            <a:avLst/>
+          </a:prstGeom>
+          <a:noFill/>
+          <a:ln/>
+        </p:spPr>
+        <p:txBody>
+          <a:bodyPr wrap="square" rtlCol="0" anchor="ctr"/>
+          <a:lstStyle/>
+          <a:p>
+            <a:pPr indent="0" marL="0">
+              <a:buNone/>
+            </a:pPr>
+            <a:r>
+              <a:rPr lang="en-US" sz="950" dirty="0">
+                <a:solidFill>
+                  <a:srgbClr val="4A9EFF"/>
+                </a:solidFill>
+              </a:rPr>
+              <a:t xml:space="preserve">▸  </a:t>
+            </a:r>
+            <a:pPr indent="0" marL="0">
+              <a:buNone/>
+            </a:pPr>
+            <a:r>
+              <a:rPr lang="en-US" sz="950" dirty="0">
+                <a:solidFill>
+                  <a:srgbClr val="C0C8D8"/>
+                </a:solidFill>
+              </a:rPr>
+              <a:t>Covers derivatives, risk, portfolio theory</a:t>
+            </a:r>
+            <a:endParaRPr lang="en-US" sz="950" dirty="0"/>
+          </a:p>
+        </p:txBody>
+      </p:sp>
+      <p:sp>
+        <p:nvSpPr>
+          <p:cNvPr id="18" name="Text 16"/>
+          <p:cNvSpPr/>
+          <p:nvPr/>
+        </p:nvSpPr>
+        <p:spPr>
+          <a:xfrm>
+            <a:off x="4937760" y="3483864"/>
+            <a:ext cx="3657600" cy="256032"/>
+          </a:xfrm>
+          <a:prstGeom prst="rect">
+            <a:avLst/>
+          </a:prstGeom>
+          <a:noFill/>
+          <a:ln/>
+        </p:spPr>
+        <p:txBody>
+          <a:bodyPr wrap="square" rtlCol="0" anchor="ctr"/>
+          <a:lstStyle/>
+          <a:p>
+            <a:pPr indent="0" marL="0">
+              <a:buNone/>
+            </a:pPr>
+            <a:r>
+              <a:rPr lang="en-US" sz="950" dirty="0">
+                <a:solidFill>
+                  <a:srgbClr val="4A9EFF"/>
+                </a:solidFill>
+              </a:rPr>
+              <a:t xml:space="preserve">▸  </a:t>
+            </a:r>
+            <a:pPr indent="0" marL="0">
+              <a:buNone/>
+            </a:pPr>
+            <a:r>
+              <a:rPr lang="en-US" sz="950" dirty="0">
+                <a:solidFill>
+                  <a:srgbClr val="C0C8D8"/>
+                </a:solidFill>
+              </a:rPr>
+              <a:t>Ask your own questions</a:t>
+            </a:r>
+            <a:endParaRPr lang="en-US" sz="950" dirty="0"/>
+          </a:p>
+        </p:txBody>
+      </p:sp>
+      <p:sp>
+        <p:nvSpPr>
+          <p:cNvPr id="19" name="Text 17"/>
+          <p:cNvSpPr/>
+          <p:nvPr/>
+        </p:nvSpPr>
+        <p:spPr>
+          <a:xfrm>
+            <a:off x="4937760" y="3785616"/>
+            <a:ext cx="3657600" cy="256032"/>
+          </a:xfrm>
+          <a:prstGeom prst="rect">
+            <a:avLst/>
+          </a:prstGeom>
+          <a:noFill/>
+          <a:ln/>
+        </p:spPr>
+        <p:txBody>
+          <a:bodyPr wrap="square" rtlCol="0" anchor="ctr"/>
+          <a:lstStyle/>
+          <a:p>
+            <a:pPr indent="0" marL="0">
+              <a:buNone/>
+            </a:pPr>
+            <a:r>
+              <a:rPr lang="en-US" sz="950" dirty="0">
+                <a:solidFill>
+                  <a:srgbClr val="4A9EFF"/>
+                </a:solidFill>
+              </a:rPr>
+              <a:t xml:space="preserve">▸  </a:t>
+            </a:r>
+            <a:pPr indent="0" marL="0">
+              <a:buNone/>
+            </a:pPr>
+            <a:r>
+              <a:rPr lang="en-US" sz="950" dirty="0">
+                <a:solidFill>
+                  <a:srgbClr val="C0C8D8"/>
+                </a:solidFill>
+              </a:rPr>
+              <a:t>Tailored to behavioural portfolio context</a:t>
+            </a:r>
+            <a:endParaRPr lang="en-US" sz="950" dirty="0"/>
+          </a:p>
+        </p:txBody>
+      </p:sp>
+      <p:sp>
+        <p:nvSpPr>
+          <p:cNvPr id="20" name="Text 18"/>
+          <p:cNvSpPr/>
+          <p:nvPr/>
+        </p:nvSpPr>
+        <p:spPr>
+          <a:xfrm>
+            <a:off x="8046720" y="4754880"/>
+            <a:ext cx="914400" cy="274320"/>
+          </a:xfrm>
+          <a:prstGeom prst="rect">
+            <a:avLst/>
+          </a:prstGeom>
+          <a:noFill/>
+          <a:ln/>
+        </p:spPr>
+        <p:txBody>
+          <a:bodyPr wrap="square" rtlCol="0" anchor="ctr"/>
+          <a:lstStyle/>
+          <a:p>
+            <a:pPr algn="r" indent="0" marL="0">
+              <a:buNone/>
+            </a:pPr>
+            <a:r>
+              <a:rPr lang="en-US" sz="900" dirty="0">
+                <a:solidFill>
+                  <a:srgbClr val="556A8A"/>
+                </a:solidFill>
+              </a:rPr>
+              <a:t>16 / 17</a:t>
+            </a:r>
+            <a:endParaRPr lang="en-US" sz="900" dirty="0"/>
+          </a:p>
+        </p:txBody>
+      </p:sp>
+      <p:sp>
+        <p:nvSpPr>
+          <p:cNvPr id="21" name="Text 19"/>
+          <p:cNvSpPr/>
+          <p:nvPr/>
+        </p:nvSpPr>
+        <p:spPr>
+          <a:xfrm>
+            <a:off x="365760" y="4754880"/>
+            <a:ext cx="6400800" cy="274320"/>
+          </a:xfrm>
+          <a:prstGeom prst="rect">
+            <a:avLst/>
+          </a:prstGeom>
+          <a:noFill/>
+          <a:ln/>
+        </p:spPr>
+        <p:txBody>
+          <a:bodyPr wrap="square" rtlCol="0" anchor="ctr"/>
+          <a:lstStyle/>
+          <a:p>
+            <a:pPr algn="l" indent="0" marL="0">
+              <a:buNone/>
+            </a:pPr>
+            <a:r>
+              <a:rPr lang="en-US" sz="900" dirty="0">
+                <a:solidFill>
+                  <a:srgbClr val="556A8A"/>
+                </a:solidFill>
+              </a:rPr>
+              <a:t>Beyond Mean-Variance Portfolio Optimiser — User Guide</a:t>
+            </a:r>
+            <a:endParaRPr lang="en-US" sz="900" dirty="0"/>
+          </a:p>
+        </p:txBody>
+      </p:sp>
+      <p:pic>
+        <p:nvPicPr>
+          <p:cNvPr id="22" name="Picture 21" descr="slide11about.png"/>
+          <p:cNvPicPr>
+            <a:picLocks noChangeAspect="1"/>
+          </p:cNvPicPr>
+          <p:nvPr/>
+        </p:nvPicPr>
+        <p:blipFill>
+          <a:blip r:embed="rId3"/>
+          <a:stretch>
+            <a:fillRect/>
+          </a:stretch>
+        </p:blipFill>
+        <p:spPr>
+          <a:xfrm>
+            <a:off x="774945" y="1188720"/>
+            <a:ext cx="3204989" cy="1645920"/>
+          </a:xfrm>
+          <a:prstGeom prst="rect">
+            <a:avLst/>
+          </a:prstGeom>
+        </p:spPr>
+      </p:pic>
+      <p:pic>
+        <p:nvPicPr>
+          <p:cNvPr id="23" name="Picture 22" descr="Slide11Glossary.png"/>
+          <p:cNvPicPr>
+            <a:picLocks noChangeAspect="1"/>
+          </p:cNvPicPr>
+          <p:nvPr/>
+        </p:nvPicPr>
+        <p:blipFill>
+          <a:blip r:embed="rId4"/>
+          <a:stretch>
+            <a:fillRect/>
+          </a:stretch>
+        </p:blipFill>
+        <p:spPr>
+          <a:xfrm>
+            <a:off x="4981315" y="1188720"/>
+            <a:ext cx="3570489" cy="1645920"/>
+          </a:xfrm>
+          <a:prstGeom prst="rect">
+            <a:avLst/>
+          </a:prstGeom>
+        </p:spPr>
+      </p:pic>
+    </p:spTree>
+  </p:cSld>
+  <p:clrMapOvr>
+    <a:masterClrMapping/>
+  </p:clrMapOvr>
+</p:sld>
+</file>
+
+<file path=ppt/slides/slide17.xml><?xml version="1.0" encoding="utf-8"?>
+<p:sld xmlns:a="http://schemas.openxmlformats.org/drawingml/2006/main" xmlns:r="http://schemas.openxmlformats.org/officeDocument/2006/relationships" xmlns:p="http://schemas.openxmlformats.org/presentationml/2006/main">
+  <p:cSld name="Slide 12">
+    <p:bg>
+      <p:bgPr>
+        <a:solidFill>
+          <a:srgbClr val="020C1B"/>
+        </a:solidFill>
+      </p:bgPr>
+    </p:bg>
+    <p:spTree>
+      <p:nvGrpSpPr>
+        <p:cNvPr id="1" name=""/>
+        <p:cNvGrpSpPr/>
+        <p:nvPr/>
+      </p:nvGrpSpPr>
+      <p:grpSpPr>
+        <a:xfrm>
+          <a:off x="0" y="0"/>
+          <a:ext cx="0" cy="0"/>
+          <a:chOff x="0" y="0"/>
+          <a:chExt cx="0" cy="0"/>
+        </a:xfrm>
+      </p:grpSpPr>
+      <p:sp>
+        <p:nvSpPr>
+          <p:cNvPr id="2" name="Shape 0"/>
+          <p:cNvSpPr/>
+          <p:nvPr/>
+        </p:nvSpPr>
+        <p:spPr>
+          <a:xfrm>
+            <a:off x="0" y="0"/>
+            <a:ext cx="9144000" cy="54864"/>
+          </a:xfrm>
+          <a:prstGeom prst="rect">
+            <a:avLst/>
+          </a:prstGeom>
+          <a:solidFill>
+            <a:srgbClr val="1A6BBF"/>
+          </a:solidFill>
+          <a:ln w="12700">
+            <a:solidFill>
+              <a:srgbClr val="1A6BBF"/>
+            </a:solidFill>
+            <a:prstDash val="solid"/>
+          </a:ln>
+        </p:spPr>
+        <p:txBody>
+          <a:bodyPr/>
+          <a:p/>
+        </p:txBody>
+      </p:sp>
+      <p:sp>
+        <p:nvSpPr>
+          <p:cNvPr id="3" name="Text 1"/>
+          <p:cNvSpPr/>
+          <p:nvPr/>
+        </p:nvSpPr>
+        <p:spPr>
+          <a:xfrm>
+            <a:off x="365760" y="164592"/>
+            <a:ext cx="8229600" cy="457200"/>
+          </a:xfrm>
+          <a:prstGeom prst="rect">
+            <a:avLst/>
+          </a:prstGeom>
+          <a:noFill/>
+          <a:ln/>
+        </p:spPr>
+        <p:txBody>
+          <a:bodyPr wrap="square" rtlCol="0" anchor="ctr"/>
+          <a:lstStyle/>
+          <a:p>
+            <a:pPr indent="0" marL="0">
+              <a:buNone/>
+            </a:pPr>
+            <a:r>
+              <a:rPr lang="en-US" sz="2200" b="1" dirty="0">
+                <a:solidFill>
+                  <a:srgbClr val="FFFFFF"/>
+                </a:solidFill>
+              </a:rPr>
+              <a:t>Disclaimer &amp; Contact</a:t>
+            </a:r>
+            <a:endParaRPr lang="en-US" sz="2200" dirty="0"/>
+          </a:p>
+        </p:txBody>
+      </p:sp>
+      <p:sp>
+        <p:nvSpPr>
+          <p:cNvPr id="4" name="Shape 2"/>
+          <p:cNvSpPr/>
+          <p:nvPr/>
+        </p:nvSpPr>
+        <p:spPr>
+          <a:xfrm>
+            <a:off x="365760" y="777240"/>
+            <a:ext cx="8412480" cy="1920240"/>
+          </a:xfrm>
+          <a:prstGeom prst="rect">
+            <a:avLst/>
+          </a:prstGeom>
+          <a:solidFill>
+            <a:srgbClr val="1A1200"/>
+          </a:solidFill>
+          <a:ln w="19050">
+            <a:solidFill>
+              <a:srgbClr val="F59E0B"/>
+            </a:solidFill>
+            <a:prstDash val="solid"/>
+          </a:ln>
+        </p:spPr>
+        <p:txBody>
+          <a:bodyPr/>
+          <a:p/>
+        </p:txBody>
+      </p:sp>
+      <p:sp>
+        <p:nvSpPr>
+          <p:cNvPr id="5" name="Text 3"/>
+          <p:cNvSpPr/>
+          <p:nvPr/>
+        </p:nvSpPr>
+        <p:spPr>
+          <a:xfrm>
+            <a:off x="548640" y="841248"/>
+            <a:ext cx="8046720" cy="320040"/>
+          </a:xfrm>
+          <a:prstGeom prst="rect">
+            <a:avLst/>
+          </a:prstGeom>
+          <a:noFill/>
+          <a:ln/>
+        </p:spPr>
+        <p:txBody>
+          <a:bodyPr wrap="square" lIns="0" tIns="0" rIns="0" bIns="0" rtlCol="0" anchor="ctr"/>
           <a:lstStyle/>
           <a:p>
             <a:pPr indent="0" marL="0">
@@ -7795,75 +6866,385 @@
             <a:r>
               <a:rPr lang="en-US" sz="1100" b="1" dirty="0">
                 <a:solidFill>
+                  <a:srgbClr val="F59E0B"/>
+                </a:solidFill>
+              </a:rPr>
+              <a:t>⚠️  Legal Disclaimer</a:t>
+            </a:r>
+            <a:endParaRPr lang="en-US" sz="1100" dirty="0"/>
+          </a:p>
+        </p:txBody>
+      </p:sp>
+      <p:sp>
+        <p:nvSpPr>
+          <p:cNvPr id="6" name="Text 4"/>
+          <p:cNvSpPr/>
+          <p:nvPr/>
+        </p:nvSpPr>
+        <p:spPr>
+          <a:xfrm>
+            <a:off x="548640" y="1188720"/>
+            <a:ext cx="8046720" cy="1371600"/>
+          </a:xfrm>
+          <a:prstGeom prst="rect">
+            <a:avLst/>
+          </a:prstGeom>
+          <a:noFill/>
+          <a:ln/>
+        </p:spPr>
+        <p:txBody>
+          <a:bodyPr wrap="square" lIns="0" tIns="0" rIns="0" bIns="0" rtlCol="0" anchor="ctr"/>
+          <a:lstStyle/>
+          <a:p>
+            <a:pPr indent="0" marL="0">
+              <a:buNone/>
+            </a:pPr>
+            <a:r>
+              <a:rPr lang="en-US" sz="950" dirty="0">
+                <a:solidFill>
+                  <a:srgbClr val="C0C8D8"/>
+                </a:solidFill>
+              </a:rPr>
+              <a:t>This application is based on the mental accounts portfolio optimisation framework of Das &amp; Statman (2009) and Das, Markowitz, Scheid &amp; Statman (2010), as extended in Jeddou (2012). It is provided for educational and research purposes only and does not constitute financial advice, investment recommendations, or a solicitation to buy or sell any financial instrument. Results are purely illustrative and should not be used as the basis for any investment decision.</a:t>
+            </a:r>
+            <a:endParaRPr lang="en-US" sz="950" dirty="0"/>
+          </a:p>
+        </p:txBody>
+      </p:sp>
+      <p:sp>
+        <p:nvSpPr>
+          <p:cNvPr id="7" name="Shape 5"/>
+          <p:cNvSpPr/>
+          <p:nvPr/>
+        </p:nvSpPr>
+        <p:spPr>
+          <a:xfrm>
+            <a:off x="365760" y="2834640"/>
+            <a:ext cx="8412480" cy="1234440"/>
+          </a:xfrm>
+          <a:prstGeom prst="rect">
+            <a:avLst/>
+          </a:prstGeom>
+          <a:solidFill>
+            <a:srgbClr val="0D1A2E"/>
+          </a:solidFill>
+          <a:ln w="12700">
+            <a:solidFill>
+              <a:srgbClr val="1A6BBF"/>
+            </a:solidFill>
+            <a:prstDash val="solid"/>
+          </a:ln>
+        </p:spPr>
+        <p:txBody>
+          <a:bodyPr/>
+          <a:p/>
+        </p:txBody>
+      </p:sp>
+      <p:sp>
+        <p:nvSpPr>
+          <p:cNvPr id="8" name="Text 6"/>
+          <p:cNvSpPr/>
+          <p:nvPr/>
+        </p:nvSpPr>
+        <p:spPr>
+          <a:xfrm>
+            <a:off x="548640" y="2889504"/>
+            <a:ext cx="8046720" cy="274320"/>
+          </a:xfrm>
+          <a:prstGeom prst="rect">
+            <a:avLst/>
+          </a:prstGeom>
+          <a:noFill/>
+          <a:ln/>
+        </p:spPr>
+        <p:txBody>
+          <a:bodyPr wrap="square" lIns="0" tIns="0" rIns="0" bIns="0" rtlCol="0" anchor="ctr"/>
+          <a:lstStyle/>
+          <a:p>
+            <a:pPr indent="0" marL="0">
+              <a:buNone/>
+            </a:pPr>
+            <a:r>
+              <a:rPr lang="en-US" sz="1000" b="1" dirty="0">
+                <a:solidFill>
                   <a:srgbClr val="4A9EFF"/>
                 </a:solidFill>
               </a:rPr>
-              <a:t>What you’re seeing</a:t>
-            </a:r>
-          </a:p>
-          <a:p>
-            <a:pPr indent="0" marL="0">
-              <a:spcBef>
-                <a:spcPts val="900"/>
-              </a:spcBef>
+              <a:t>Academic References</a:t>
+            </a:r>
+            <a:endParaRPr lang="en-US" sz="1000" dirty="0"/>
+          </a:p>
+        </p:txBody>
+      </p:sp>
+      <p:sp>
+        <p:nvSpPr>
+          <p:cNvPr id="9" name="Text 7"/>
+          <p:cNvSpPr/>
+          <p:nvPr/>
+        </p:nvSpPr>
+        <p:spPr>
+          <a:xfrm>
+            <a:off x="548640" y="3200400"/>
+            <a:ext cx="8046720" cy="256032"/>
+          </a:xfrm>
+          <a:prstGeom prst="rect">
+            <a:avLst/>
+          </a:prstGeom>
+          <a:noFill/>
+          <a:ln/>
+        </p:spPr>
+        <p:txBody>
+          <a:bodyPr wrap="square" rtlCol="0" anchor="ctr"/>
+          <a:lstStyle/>
+          <a:p>
+            <a:pPr indent="0" marL="0">
+              <a:buNone/>
+            </a:pPr>
+            <a:r>
+              <a:rPr lang="en-US" sz="850" b="1" dirty="0">
+                <a:solidFill>
+                  <a:srgbClr val="4A9EFF"/>
+                </a:solidFill>
+              </a:rPr>
+              <a:t xml:space="preserve">▸  </a:t>
+            </a:r>
+            <a:pPr indent="0" marL="0">
+              <a:buNone/>
+            </a:pPr>
+            <a:r>
+              <a:rPr lang="en-US" sz="850" dirty="0">
+                <a:solidFill>
+                  <a:srgbClr val="C0C8D8"/>
+                </a:solidFill>
+              </a:rPr>
+              <a:t>Das, S. &amp; Statman, M. (2009) — Beyond Mean-Variance: Portfolios with Derivatives and Non-Normal Returns in Mental Accounts</a:t>
+            </a:r>
+            <a:endParaRPr lang="en-US" sz="850" dirty="0"/>
+          </a:p>
+        </p:txBody>
+      </p:sp>
+      <p:sp>
+        <p:nvSpPr>
+          <p:cNvPr id="10" name="Text 8"/>
+          <p:cNvSpPr/>
+          <p:nvPr/>
+        </p:nvSpPr>
+        <p:spPr>
+          <a:xfrm>
+            <a:off x="548640" y="3474720"/>
+            <a:ext cx="8046720" cy="256032"/>
+          </a:xfrm>
+          <a:prstGeom prst="rect">
+            <a:avLst/>
+          </a:prstGeom>
+          <a:noFill/>
+          <a:ln/>
+        </p:spPr>
+        <p:txBody>
+          <a:bodyPr wrap="square" rtlCol="0" anchor="ctr"/>
+          <a:lstStyle/>
+          <a:p>
+            <a:pPr indent="0" marL="0">
+              <a:buNone/>
+            </a:pPr>
+            <a:r>
+              <a:rPr lang="en-US" sz="850" b="1" dirty="0">
+                <a:solidFill>
+                  <a:srgbClr val="4A9EFF"/>
+                </a:solidFill>
+              </a:rPr>
+              <a:t xml:space="preserve">▸  </a:t>
+            </a:r>
+            <a:pPr indent="0" marL="0">
+              <a:buNone/>
+            </a:pPr>
+            <a:r>
+              <a:rPr lang="en-US" sz="850" dirty="0">
+                <a:solidFill>
+                  <a:srgbClr val="C0C8D8"/>
+                </a:solidFill>
+              </a:rPr>
+              <a:t>Das, S., Markowitz, H., Scheid, J. &amp; Statman, M. (2010) — Portfolio Optimization with Mental Accounts, JFQA Vol.45 No.2</a:t>
+            </a:r>
+            <a:endParaRPr lang="en-US" sz="850" dirty="0"/>
+          </a:p>
+        </p:txBody>
+      </p:sp>
+      <p:sp>
+        <p:nvSpPr>
+          <p:cNvPr id="11" name="Text 9"/>
+          <p:cNvSpPr/>
+          <p:nvPr/>
+        </p:nvSpPr>
+        <p:spPr>
+          <a:xfrm>
+            <a:off x="548640" y="3749040"/>
+            <a:ext cx="8046720" cy="256032"/>
+          </a:xfrm>
+          <a:prstGeom prst="rect">
+            <a:avLst/>
+          </a:prstGeom>
+          <a:noFill/>
+          <a:ln/>
+        </p:spPr>
+        <p:txBody>
+          <a:bodyPr wrap="square" rtlCol="0" anchor="ctr"/>
+          <a:lstStyle/>
+          <a:p>
+            <a:pPr indent="0" marL="0">
+              <a:buNone/>
+            </a:pPr>
+            <a:r>
+              <a:rPr lang="en-US" sz="850" b="1" dirty="0">
+                <a:solidFill>
+                  <a:srgbClr val="4A9EFF"/>
+                </a:solidFill>
+              </a:rPr>
+              <a:t xml:space="preserve">▸  </a:t>
+            </a:r>
+            <a:pPr indent="0" marL="0">
+              <a:buNone/>
+            </a:pPr>
+            <a:r>
+              <a:rPr lang="en-US" sz="850" dirty="0">
+                <a:solidFill>
+                  <a:srgbClr val="C0C8D8"/>
+                </a:solidFill>
+              </a:rPr>
+              <a:t>Jeddou, S. (2012) — Beyond Mean-Variance: Options and Structured Products in Behavioral Portfolios, MSc Finance, USI Lugano</a:t>
+            </a:r>
+            <a:endParaRPr lang="en-US" sz="850" dirty="0"/>
+          </a:p>
+        </p:txBody>
+      </p:sp>
+      <p:sp>
+        <p:nvSpPr>
+          <p:cNvPr id="12" name="Text 10"/>
+          <p:cNvSpPr/>
+          <p:nvPr/>
+        </p:nvSpPr>
+        <p:spPr>
+          <a:xfrm>
+            <a:off x="365760" y="4526280"/>
+            <a:ext cx="8412480" cy="320040"/>
+          </a:xfrm>
+          <a:prstGeom prst="rect">
+            <a:avLst/>
+          </a:prstGeom>
+          <a:noFill/>
+          <a:ln/>
+        </p:spPr>
+        <p:txBody>
+          <a:bodyPr wrap="square" rtlCol="0" anchor="ctr"/>
+          <a:lstStyle/>
+          <a:p>
+            <a:pPr algn="ctr" indent="0" marL="0">
+              <a:buNone/>
+            </a:pPr>
+            <a:r>
+              <a:rPr lang="en-US" sz="950" dirty="0">
+                <a:solidFill>
+                  <a:srgbClr val="4A9EFF"/>
+                </a:solidFill>
+              </a:rPr>
+              <a:t xml:space="preserve">🔗  </a:t>
+            </a:r>
+            <a:pPr algn="ctr" indent="0" marL="0">
+              <a:buNone/>
+            </a:pPr>
+            <a:r>
+              <a:rPr lang="en-US" sz="950" dirty="0">
+                <a:solidFill>
+                  <a:srgbClr val="4A9EFF"/>
+                </a:solidFill>
+              </a:rPr>
+              <a:t>sami-jeddou-behavioral-portfolio-optimizer.streamlit.app</a:t>
+            </a:r>
+            <a:pPr algn="ctr" indent="0" marL="0">
+              <a:buNone/>
+            </a:pPr>
+            <a:r>
+              <a:rPr lang="en-US" sz="950" dirty="0">
+                <a:solidFill>
+                  <a:srgbClr val="556A8A"/>
+                </a:solidFill>
+                <a:hlinkClick r:id="rId3"/>
+              </a:rPr>
+              <a:t xml:space="preserve">   |   🔗  LinkedIn</a:t>
+            </a:r>
+            <a:endParaRPr lang="en-US" sz="950" dirty="0"/>
+          </a:p>
+        </p:txBody>
+      </p:sp>
+      <p:sp>
+        <p:nvSpPr>
+          <p:cNvPr id="13" name="Text 11"/>
+          <p:cNvSpPr/>
+          <p:nvPr/>
+        </p:nvSpPr>
+        <p:spPr>
+          <a:xfrm>
+            <a:off x="8046720" y="4754880"/>
+            <a:ext cx="914400" cy="274320"/>
+          </a:xfrm>
+          <a:prstGeom prst="rect">
+            <a:avLst/>
+          </a:prstGeom>
+          <a:noFill/>
+          <a:ln/>
+        </p:spPr>
+        <p:txBody>
+          <a:bodyPr wrap="square" rtlCol="0" anchor="ctr"/>
+          <a:lstStyle/>
+          <a:p>
+            <a:pPr algn="r" indent="0" marL="0">
               <a:buNone/>
             </a:pPr>
             <a:r>
               <a:rPr lang="en-US" sz="900" dirty="0">
                 <a:solidFill>
-                  <a:srgbClr val="C0C8D8"/>
-                </a:solidFill>
-              </a:rPr>
-              <a:t>•  Out-of-sample value of two optimiser portfolios, rebased to 100 at entry and marked to market.</a:t>
-            </a:r>
-          </a:p>
-          <a:p>
-            <a:pPr indent="0" marL="0">
-              <a:spcBef>
-                <a:spcPts val="900"/>
-              </a:spcBef>
+                  <a:srgbClr val="556A8A"/>
+                </a:solidFill>
+              </a:rPr>
+              <a:t>17 / 17</a:t>
+            </a:r>
+            <a:endParaRPr lang="en-US" sz="900" dirty="0"/>
+          </a:p>
+        </p:txBody>
+      </p:sp>
+      <p:sp>
+        <p:nvSpPr>
+          <p:cNvPr id="14" name="Text 12"/>
+          <p:cNvSpPr/>
+          <p:nvPr/>
+        </p:nvSpPr>
+        <p:spPr>
+          <a:xfrm>
+            <a:off x="365760" y="4754880"/>
+            <a:ext cx="6400800" cy="274320"/>
+          </a:xfrm>
+          <a:prstGeom prst="rect">
+            <a:avLst/>
+          </a:prstGeom>
+          <a:noFill/>
+          <a:ln/>
+        </p:spPr>
+        <p:txBody>
+          <a:bodyPr wrap="square" rtlCol="0" anchor="ctr"/>
+          <a:lstStyle/>
+          <a:p>
+            <a:pPr algn="l" indent="0" marL="0">
               <a:buNone/>
             </a:pPr>
             <a:r>
               <a:rPr lang="en-US" sz="900" dirty="0">
                 <a:solidFill>
-                  <a:srgbClr val="C0C8D8"/>
-                </a:solidFill>
-              </a:rPr>
-              <a:t>•  Green = Portfolio (1), no derivative; orange = Portfolio (2), with the chosen derivative (a put).</a:t>
-            </a:r>
-          </a:p>
-          <a:p>
-            <a:pPr indent="0" marL="0">
-              <a:spcBef>
-                <a:spcPts val="900"/>
-              </a:spcBef>
-              <a:buNone/>
-            </a:pPr>
-            <a:r>
-              <a:rPr lang="en-US" sz="900" dirty="0">
-                <a:solidFill>
-                  <a:srgbClr val="C0C8D8"/>
-                </a:solidFill>
-              </a:rPr>
-              <a:t>•  The derivative line cushions drawdowns and ends higher — the realised hedging benefit on unseen data.</a:t>
-            </a:r>
-          </a:p>
-          <a:p>
-            <a:pPr indent="0" marL="0">
-              <a:spcBef>
-                <a:spcPts val="900"/>
-              </a:spcBef>
-              <a:buNone/>
-            </a:pPr>
-            <a:r>
-              <a:rPr lang="en-US" sz="900" dirty="0">
-                <a:solidFill>
-                  <a:srgbClr val="C0C8D8"/>
-                </a:solidFill>
-              </a:rPr>
-              <a:t>•  Realised alpha &amp; beta vs a benchmark are computed from these paths (table beneath the chart in the app).</a:t>
-            </a:r>
+                  <a:srgbClr val="556A8A"/>
+                </a:solidFill>
+              </a:rPr>
+              <a:t>Beyond Mean-Variance Portfolio Optimiser — User Guide</a:t>
+            </a:r>
+            <a:endParaRPr lang="en-US" sz="900" dirty="0"/>
           </a:p>
         </p:txBody>
       </p:sp>
@@ -7958,7 +7339,7 @@
                   <a:srgbClr val="FFFFFF"/>
                 </a:solidFill>
               </a:rPr>
-              <a:t>Grid Portfolio Optimiser — overview</a:t>
+              <a:t>Home — choose a tool</a:t>
             </a:r>
             <a:endParaRPr lang="en-US" sz="2600" dirty="0"/>
           </a:p>
@@ -8066,7 +7447,7 @@
                   <a:srgbClr val="4A9EFF"/>
                 </a:solidFill>
               </a:rPr>
-              <a:t>Interactive Frontiers</a:t>
+              <a:t>Grid Portfolio Optimiser</a:t>
             </a:r>
             <a:endParaRPr lang="en-US" sz="1100" dirty="0"/>
           </a:p>
@@ -8102,7 +7483,7 @@
                   <a:srgbClr val="C0C8D8"/>
                 </a:solidFill>
               </a:rPr>
-              <a:t>MV vs Behavioural vs Derivative frontier — visualised side by side on a single chart</a:t>
+              <a:t>Exact grid engine on the Das–Statman states — VaR, thesis-ES and rigorous-ES, with derivatives.</a:t>
             </a:r>
             <a:endParaRPr lang="en-US" sz="950" dirty="0"/>
           </a:p>
@@ -8174,7 +7555,7 @@
                   <a:srgbClr val="000000"/>
                 </a:solidFill>
               </a:rPr>
-              <a:t>🎯</a:t>
+              <a:t>🧮</a:t>
             </a:r>
             <a:endParaRPr lang="en-US" sz="2200" dirty="0"/>
           </a:p>
@@ -8210,7 +7591,7 @@
                   <a:srgbClr val="4A9EFF"/>
                 </a:solidFill>
               </a:rPr>
-              <a:t>Three Portfolios</a:t>
+              <a:t>Scalable Portfolio Optimiser</a:t>
             </a:r>
             <a:endParaRPr lang="en-US" sz="1100" dirty="0"/>
           </a:p>
@@ -8246,7 +7627,7 @@
                   <a:srgbClr val="C0C8D8"/>
                 </a:solidFill>
               </a:rPr>
-              <a:t>No derivative / With derivative / Same risk — three perspectives for each optimisation run</a:t>
+              <a:t>Monte-Carlo scenarios + α-CVaR linear program — scales to large, multi-derivative portfolios.</a:t>
             </a:r>
             <a:endParaRPr lang="en-US" sz="950" dirty="0"/>
           </a:p>
@@ -8318,7 +7699,7 @@
                   <a:srgbClr val="000000"/>
                 </a:solidFill>
               </a:rPr>
-              <a:t>🤖</a:t>
+              <a:t>🔬</a:t>
             </a:r>
             <a:endParaRPr lang="en-US" sz="2200" dirty="0"/>
           </a:p>
@@ -8354,7 +7735,7 @@
                   <a:srgbClr val="4A9EFF"/>
                 </a:solidFill>
               </a:rPr>
-              <a:t>AI-Powered</a:t>
+              <a:t>Backtest</a:t>
             </a:r>
             <a:endParaRPr lang="en-US" sz="1100" dirty="0"/>
           </a:p>
@@ -8390,7 +7771,7 @@
                   <a:srgbClr val="C0C8D8"/>
                 </a:solidFill>
               </a:rPr>
-              <a:t>On-demand explanations for every parameter, constraint, derivative type, and result</a:t>
+              <a:t>Out-of-sample walk-forward — expected vs realised, plus realised alpha &amp; beta.</a:t>
             </a:r>
             <a:endParaRPr lang="en-US" sz="950" dirty="0"/>
           </a:p>
@@ -8405,7 +7786,7 @@
         <p:spPr>
           <a:xfrm>
             <a:off x="365760" y="2834640"/>
-            <a:ext cx="8412480" cy="1580000"/>
+            <a:ext cx="8412480" cy="1508760"/>
           </a:xfrm>
           <a:prstGeom prst="rect">
             <a:avLst/>
@@ -8455,7 +7836,7 @@
                   <a:srgbClr val="4A9EFF"/>
                 </a:solidFill>
               </a:rPr>
-              <a:t>Portfolio perspectives (0–3)</a:t>
+              <a:t>Reference &amp; navigation</a:t>
             </a:r>
             <a:endParaRPr lang="en-US" sz="1100" dirty="0"/>
           </a:p>
@@ -8469,7 +7850,7 @@
         </p:nvSpPr>
         <p:spPr>
           <a:xfrm>
-            <a:off x="548640" y="3510000"/>
+            <a:off x="548640" y="3209544"/>
             <a:ext cx="502920" cy="292608"/>
           </a:xfrm>
           <a:prstGeom prst="roundRect">
@@ -8500,7 +7881,7 @@
         </p:nvSpPr>
         <p:spPr>
           <a:xfrm>
-            <a:off x="548640" y="3510000"/>
+            <a:off x="548640" y="3209544"/>
             <a:ext cx="502920" cy="292608"/>
           </a:xfrm>
           <a:prstGeom prst="rect">
@@ -8522,7 +7903,7 @@
                   <a:srgbClr val="FFFFFF"/>
                 </a:solidFill>
               </a:rPr>
-              <a:t>1</a:t>
+              <a:t>📖</a:t>
             </a:r>
             <a:endParaRPr lang="en-US" sz="1100" dirty="0"/>
           </a:p>
@@ -8536,7 +7917,7 @@
         </p:nvSpPr>
         <p:spPr>
           <a:xfrm>
-            <a:off x="1143000" y="3510000"/>
+            <a:off x="1143000" y="3209544"/>
             <a:ext cx="2194560" cy="292608"/>
           </a:xfrm>
           <a:prstGeom prst="rect">
@@ -8558,7 +7939,7 @@
                   <a:srgbClr val="10B981"/>
                 </a:solidFill>
               </a:rPr>
-              <a:t>Portfolio (1) — No derivative:</a:t>
+              <a:t>About:</a:t>
             </a:r>
             <a:endParaRPr lang="en-US" sz="950" dirty="0"/>
           </a:p>
@@ -8572,7 +7953,7 @@
         </p:nvSpPr>
         <p:spPr>
           <a:xfrm>
-            <a:off x="3383280" y="3510000"/>
+            <a:off x="3383280" y="3209544"/>
             <a:ext cx="5212080" cy="292608"/>
           </a:xfrm>
           <a:prstGeom prst="rect">
@@ -8594,7 +7975,7 @@
                   <a:srgbClr val="C0C8D8"/>
                 </a:solidFill>
               </a:rPr>
-              <a:t>Equivalent to MV optimum — confirms MVT/MAT equivalence. Most classical optimisers stop here.</a:t>
+              <a:t>Methods, the mental-accounting framework and the research behind the app.</a:t>
             </a:r>
             <a:endParaRPr lang="en-US" sz="900" dirty="0"/>
           </a:p>
@@ -8608,7 +7989,7 @@
         </p:nvSpPr>
         <p:spPr>
           <a:xfrm>
-            <a:off x="548640" y="3810000"/>
+            <a:off x="548640" y="3547872"/>
             <a:ext cx="502920" cy="292608"/>
           </a:xfrm>
           <a:prstGeom prst="roundRect">
@@ -8639,7 +8020,7 @@
         </p:nvSpPr>
         <p:spPr>
           <a:xfrm>
-            <a:off x="548640" y="3810000"/>
+            <a:off x="548640" y="3547872"/>
             <a:ext cx="502920" cy="292608"/>
           </a:xfrm>
           <a:prstGeom prst="rect">
@@ -8661,7 +8042,7 @@
                   <a:srgbClr val="FFFFFF"/>
                 </a:solidFill>
               </a:rPr>
-              <a:t>2</a:t>
+              <a:t>📚</a:t>
             </a:r>
             <a:endParaRPr lang="en-US" sz="1100" dirty="0"/>
           </a:p>
@@ -8675,7 +8056,7 @@
         </p:nvSpPr>
         <p:spPr>
           <a:xfrm>
-            <a:off x="1143000" y="3810000"/>
+            <a:off x="1143000" y="3547872"/>
             <a:ext cx="2194560" cy="292608"/>
           </a:xfrm>
           <a:prstGeom prst="rect">
@@ -8697,7 +8078,7 @@
                   <a:srgbClr val="F59E0B"/>
                 </a:solidFill>
               </a:rPr>
-              <a:t>Portfolio (2) — With derivative:</a:t>
+              <a:t>Glossary:</a:t>
             </a:r>
             <a:endParaRPr lang="en-US" sz="950" dirty="0"/>
           </a:p>
@@ -8711,7 +8092,7 @@
         </p:nvSpPr>
         <p:spPr>
           <a:xfrm>
-            <a:off x="3383280" y="3810000"/>
+            <a:off x="3383280" y="3547872"/>
             <a:ext cx="5212080" cy="292608"/>
           </a:xfrm>
           <a:prstGeom prst="rect">
@@ -8733,7 +8114,7 @@
                   <a:srgbClr val="C0C8D8"/>
                 </a:solidFill>
               </a:rPr>
-              <a:t>Same implied λ and downside constraint (H,α or H,α,L) — shows return uplift from derivatives.</a:t>
+              <a:t>Plain-language, AI-powered definitions — VaR, ES, α-CVaR, copulas, alpha &amp; beta.</a:t>
             </a:r>
             <a:endParaRPr lang="en-US" sz="900" dirty="0"/>
           </a:p>
@@ -8747,7 +8128,7 @@
         </p:nvSpPr>
         <p:spPr>
           <a:xfrm>
-            <a:off x="548640" y="4110000"/>
+            <a:off x="548640" y="3886200"/>
             <a:ext cx="502920" cy="292608"/>
           </a:xfrm>
           <a:prstGeom prst="roundRect">
@@ -8778,7 +8159,7 @@
         </p:nvSpPr>
         <p:spPr>
           <a:xfrm>
-            <a:off x="548640" y="4110000"/>
+            <a:off x="548640" y="3886200"/>
             <a:ext cx="502920" cy="292608"/>
           </a:xfrm>
           <a:prstGeom prst="rect">
@@ -8800,7 +8181,7 @@
                   <a:srgbClr val="FFFFFF"/>
                 </a:solidFill>
               </a:rPr>
-              <a:t>3</a:t>
+              <a:t>💡</a:t>
             </a:r>
             <a:endParaRPr lang="en-US" sz="1100" dirty="0"/>
           </a:p>
@@ -8814,7 +8195,7 @@
         </p:nvSpPr>
         <p:spPr>
           <a:xfrm>
-            <a:off x="1143000" y="4110000"/>
+            <a:off x="1143000" y="3886200"/>
             <a:ext cx="2194560" cy="292608"/>
           </a:xfrm>
           <a:prstGeom prst="rect">
@@ -8836,7 +8217,7 @@
                   <a:srgbClr val="E76F51"/>
                 </a:solidFill>
               </a:rPr>
-              <a:t>Portfolio (3) — Same risk as (1):</a:t>
+              <a:t>Tip:</a:t>
             </a:r>
             <a:endParaRPr lang="en-US" sz="950" dirty="0"/>
           </a:p>
@@ -8850,7 +8231,7 @@
         </p:nvSpPr>
         <p:spPr>
           <a:xfrm>
-            <a:off x="3383280" y="4110000"/>
+            <a:off x="3383280" y="3886200"/>
             <a:ext cx="5212080" cy="292608"/>
           </a:xfrm>
           <a:prstGeom prst="rect">
@@ -8872,7 +8253,7 @@
                   <a:srgbClr val="C0C8D8"/>
                 </a:solidFill>
               </a:rPr>
-              <a:t>Interpolated at P(1) std dev — direct comparison of return gain at equivalent risk (indicative).</a:t>
+              <a:t>Each tile opens a tool; the Grid Portfolio Optimiser is the place to start.</a:t>
             </a:r>
             <a:endParaRPr lang="en-US" sz="900" dirty="0"/>
           </a:p>
@@ -8908,7 +8289,7 @@
                   <a:srgbClr val="556A8A"/>
                 </a:solidFill>
               </a:rPr>
-              <a:t>3 / 17</a:t>
+              <a:t>2 / 17</a:t>
             </a:r>
             <a:endParaRPr lang="en-US" sz="900" dirty="0"/>
           </a:p>
@@ -8950,21 +8331,51 @@
           </a:p>
         </p:txBody>
       </p:sp>
-      <p:sp>
-        <p:nvSpPr>
-          <p:cNvPr id="50" name="P0 badge"/>
-          <p:cNvSpPr/>
-          <p:nvPr/>
-        </p:nvSpPr>
-        <p:spPr>
-          <a:xfrm>
-            <a:off x="548640" y="3210000"/>
-            <a:ext cx="502920" cy="292608"/>
-          </a:xfrm>
-          <a:prstGeom prst="roundRect">
-            <a:avLst>
-              <a:gd name="adj" fmla="val 18750"/>
-            </a:avLst>
+    </p:spTree>
+  </p:cSld>
+  <p:clrMapOvr>
+    <a:masterClrMapping/>
+  </p:clrMapOvr>
+</p:sld>
+</file>
+
+<file path=ppt/slides/slide3.xml><?xml version="1.0" encoding="utf-8"?>
+<p:sld xmlns:a="http://schemas.openxmlformats.org/drawingml/2006/main" xmlns:r="http://schemas.openxmlformats.org/officeDocument/2006/relationships" xmlns:p="http://schemas.openxmlformats.org/presentationml/2006/main">
+  <p:cSld name="Slide 2">
+    <p:bg>
+      <p:bgPr>
+        <a:solidFill>
+          <a:srgbClr val="020C1B"/>
+        </a:solidFill>
+      </p:bgPr>
+    </p:bg>
+    <p:spTree>
+      <p:nvGrpSpPr>
+        <p:cNvPr id="1" name=""/>
+        <p:cNvGrpSpPr/>
+        <p:nvPr/>
+      </p:nvGrpSpPr>
+      <p:grpSpPr>
+        <a:xfrm>
+          <a:off x="0" y="0"/>
+          <a:ext cx="0" cy="0"/>
+          <a:chOff x="0" y="0"/>
+          <a:chExt cx="0" cy="0"/>
+        </a:xfrm>
+      </p:grpSpPr>
+      <p:sp>
+        <p:nvSpPr>
+          <p:cNvPr id="2" name="Shape 0"/>
+          <p:cNvSpPr/>
+          <p:nvPr/>
+        </p:nvSpPr>
+        <p:spPr>
+          <a:xfrm>
+            <a:off x="0" y="0"/>
+            <a:ext cx="9144000" cy="54864"/>
+          </a:xfrm>
+          <a:prstGeom prst="rect">
+            <a:avLst/>
           </a:prstGeom>
           <a:solidFill>
             <a:srgbClr val="1A6BBF"/>
@@ -8983,7 +8394,1029 @@
       </p:sp>
       <p:sp>
         <p:nvSpPr>
-          <p:cNvPr id="51" name="P0 num"/>
+          <p:cNvPr id="3" name="Text 1"/>
+          <p:cNvSpPr/>
+          <p:nvPr/>
+        </p:nvSpPr>
+        <p:spPr>
+          <a:xfrm>
+            <a:off x="457200" y="164592"/>
+            <a:ext cx="8229600" cy="502920"/>
+          </a:xfrm>
+          <a:prstGeom prst="rect">
+            <a:avLst/>
+          </a:prstGeom>
+          <a:noFill/>
+          <a:ln/>
+        </p:spPr>
+        <p:txBody>
+          <a:bodyPr wrap="square" rtlCol="0" anchor="ctr"/>
+          <a:lstStyle/>
+          <a:p>
+            <a:pPr indent="0" marL="0">
+              <a:buNone/>
+            </a:pPr>
+            <a:r>
+              <a:rPr lang="en-US" sz="2600" b="1" dirty="0">
+                <a:solidFill>
+                  <a:srgbClr val="FFFFFF"/>
+                </a:solidFill>
+              </a:rPr>
+              <a:t>Grid Portfolio Optimiser — overview</a:t>
+            </a:r>
+            <a:endParaRPr lang="en-US" sz="2600" dirty="0"/>
+          </a:p>
+        </p:txBody>
+      </p:sp>
+      <p:sp>
+        <p:nvSpPr>
+          <p:cNvPr id="4" name="Shape 2"/>
+          <p:cNvSpPr/>
+          <p:nvPr/>
+        </p:nvSpPr>
+        <p:spPr>
+          <a:xfrm>
+            <a:off x="365760" y="868680"/>
+            <a:ext cx="2651760" cy="1828800"/>
+          </a:xfrm>
+          <a:prstGeom prst="rect">
+            <a:avLst/>
+          </a:prstGeom>
+          <a:solidFill>
+            <a:srgbClr val="0D1A2E"/>
+          </a:solidFill>
+          <a:ln w="12700">
+            <a:solidFill>
+              <a:srgbClr val="1A6BBF"/>
+            </a:solidFill>
+            <a:prstDash val="solid"/>
+          </a:ln>
+          <a:effectLst>
+            <a:outerShdw sx="100000" sy="100000" kx="0" ky="0" algn="bl" rotWithShape="0" blurRad="101600" dist="38100" dir="8100000">
+              <a:srgbClr val="000000">
+                <a:alpha val="18000"/>
+              </a:srgbClr>
+            </a:outerShdw>
+          </a:effectLst>
+        </p:spPr>
+        <p:txBody>
+          <a:bodyPr/>
+          <a:p/>
+        </p:txBody>
+      </p:sp>
+      <p:sp>
+        <p:nvSpPr>
+          <p:cNvPr id="5" name="Text 3"/>
+          <p:cNvSpPr/>
+          <p:nvPr/>
+        </p:nvSpPr>
+        <p:spPr>
+          <a:xfrm>
+            <a:off x="365760" y="960120"/>
+            <a:ext cx="2651760" cy="502920"/>
+          </a:xfrm>
+          <a:prstGeom prst="rect">
+            <a:avLst/>
+          </a:prstGeom>
+          <a:noFill/>
+          <a:ln/>
+        </p:spPr>
+        <p:txBody>
+          <a:bodyPr wrap="square" rtlCol="0" anchor="ctr"/>
+          <a:lstStyle/>
+          <a:p>
+            <a:pPr algn="ctr" indent="0" marL="0">
+              <a:buNone/>
+            </a:pPr>
+            <a:r>
+              <a:rPr lang="en-US" sz="2200" dirty="0">
+                <a:solidFill>
+                  <a:srgbClr val="000000"/>
+                </a:solidFill>
+              </a:rPr>
+              <a:t>📊</a:t>
+            </a:r>
+            <a:endParaRPr lang="en-US" sz="2200" dirty="0"/>
+          </a:p>
+        </p:txBody>
+      </p:sp>
+      <p:sp>
+        <p:nvSpPr>
+          <p:cNvPr id="6" name="Text 4"/>
+          <p:cNvSpPr/>
+          <p:nvPr/>
+        </p:nvSpPr>
+        <p:spPr>
+          <a:xfrm>
+            <a:off x="365760" y="1463040"/>
+            <a:ext cx="2651760" cy="365760"/>
+          </a:xfrm>
+          <a:prstGeom prst="rect">
+            <a:avLst/>
+          </a:prstGeom>
+          <a:noFill/>
+          <a:ln/>
+        </p:spPr>
+        <p:txBody>
+          <a:bodyPr wrap="square" rtlCol="0" anchor="ctr"/>
+          <a:lstStyle/>
+          <a:p>
+            <a:pPr algn="ctr" indent="0" marL="0">
+              <a:buNone/>
+            </a:pPr>
+            <a:r>
+              <a:rPr lang="en-US" sz="1100" b="1" dirty="0">
+                <a:solidFill>
+                  <a:srgbClr val="4A9EFF"/>
+                </a:solidFill>
+              </a:rPr>
+              <a:t>Interactive Frontiers</a:t>
+            </a:r>
+            <a:endParaRPr lang="en-US" sz="1100" dirty="0"/>
+          </a:p>
+        </p:txBody>
+      </p:sp>
+      <p:sp>
+        <p:nvSpPr>
+          <p:cNvPr id="7" name="Text 5"/>
+          <p:cNvSpPr/>
+          <p:nvPr/>
+        </p:nvSpPr>
+        <p:spPr>
+          <a:xfrm>
+            <a:off x="475488" y="1874520"/>
+            <a:ext cx="2432304" cy="731520"/>
+          </a:xfrm>
+          <a:prstGeom prst="rect">
+            <a:avLst/>
+          </a:prstGeom>
+          <a:noFill/>
+          <a:ln/>
+        </p:spPr>
+        <p:txBody>
+          <a:bodyPr wrap="square" rtlCol="0" anchor="t"/>
+          <a:lstStyle/>
+          <a:p>
+            <a:pPr algn="ctr" indent="0" marL="0">
+              <a:buNone/>
+            </a:pPr>
+            <a:r>
+              <a:rPr lang="en-US" sz="950" dirty="0">
+                <a:solidFill>
+                  <a:srgbClr val="C0C8D8"/>
+                </a:solidFill>
+              </a:rPr>
+              <a:t>MV vs Behavioural vs Derivative frontier — visualised side by side on a single chart</a:t>
+            </a:r>
+            <a:endParaRPr lang="en-US" sz="950" dirty="0"/>
+          </a:p>
+        </p:txBody>
+      </p:sp>
+      <p:sp>
+        <p:nvSpPr>
+          <p:cNvPr id="8" name="Shape 6"/>
+          <p:cNvSpPr/>
+          <p:nvPr/>
+        </p:nvSpPr>
+        <p:spPr>
+          <a:xfrm>
+            <a:off x="3200400" y="868680"/>
+            <a:ext cx="2651760" cy="1828800"/>
+          </a:xfrm>
+          <a:prstGeom prst="rect">
+            <a:avLst/>
+          </a:prstGeom>
+          <a:solidFill>
+            <a:srgbClr val="0D1A2E"/>
+          </a:solidFill>
+          <a:ln w="12700">
+            <a:solidFill>
+              <a:srgbClr val="1A6BBF"/>
+            </a:solidFill>
+            <a:prstDash val="solid"/>
+          </a:ln>
+          <a:effectLst>
+            <a:outerShdw sx="100000" sy="100000" kx="0" ky="0" algn="bl" rotWithShape="0" blurRad="101600" dist="38100" dir="8100000">
+              <a:srgbClr val="000000">
+                <a:alpha val="18000"/>
+              </a:srgbClr>
+            </a:outerShdw>
+          </a:effectLst>
+        </p:spPr>
+        <p:txBody>
+          <a:bodyPr/>
+          <a:p/>
+        </p:txBody>
+      </p:sp>
+      <p:sp>
+        <p:nvSpPr>
+          <p:cNvPr id="9" name="Text 7"/>
+          <p:cNvSpPr/>
+          <p:nvPr/>
+        </p:nvSpPr>
+        <p:spPr>
+          <a:xfrm>
+            <a:off x="3200400" y="960120"/>
+            <a:ext cx="2651760" cy="502920"/>
+          </a:xfrm>
+          <a:prstGeom prst="rect">
+            <a:avLst/>
+          </a:prstGeom>
+          <a:noFill/>
+          <a:ln/>
+        </p:spPr>
+        <p:txBody>
+          <a:bodyPr wrap="square" rtlCol="0" anchor="ctr"/>
+          <a:lstStyle/>
+          <a:p>
+            <a:pPr algn="ctr" indent="0" marL="0">
+              <a:buNone/>
+            </a:pPr>
+            <a:r>
+              <a:rPr lang="en-US" sz="2200" dirty="0">
+                <a:solidFill>
+                  <a:srgbClr val="000000"/>
+                </a:solidFill>
+              </a:rPr>
+              <a:t>🎯</a:t>
+            </a:r>
+            <a:endParaRPr lang="en-US" sz="2200" dirty="0"/>
+          </a:p>
+        </p:txBody>
+      </p:sp>
+      <p:sp>
+        <p:nvSpPr>
+          <p:cNvPr id="10" name="Text 8"/>
+          <p:cNvSpPr/>
+          <p:nvPr/>
+        </p:nvSpPr>
+        <p:spPr>
+          <a:xfrm>
+            <a:off x="3200400" y="1463040"/>
+            <a:ext cx="2651760" cy="365760"/>
+          </a:xfrm>
+          <a:prstGeom prst="rect">
+            <a:avLst/>
+          </a:prstGeom>
+          <a:noFill/>
+          <a:ln/>
+        </p:spPr>
+        <p:txBody>
+          <a:bodyPr wrap="square" rtlCol="0" anchor="ctr"/>
+          <a:lstStyle/>
+          <a:p>
+            <a:pPr algn="ctr" indent="0" marL="0">
+              <a:buNone/>
+            </a:pPr>
+            <a:r>
+              <a:rPr lang="en-US" sz="1100" b="1" dirty="0">
+                <a:solidFill>
+                  <a:srgbClr val="4A9EFF"/>
+                </a:solidFill>
+              </a:rPr>
+              <a:t>Three Portfolios</a:t>
+            </a:r>
+            <a:endParaRPr lang="en-US" sz="1100" dirty="0"/>
+          </a:p>
+        </p:txBody>
+      </p:sp>
+      <p:sp>
+        <p:nvSpPr>
+          <p:cNvPr id="11" name="Text 9"/>
+          <p:cNvSpPr/>
+          <p:nvPr/>
+        </p:nvSpPr>
+        <p:spPr>
+          <a:xfrm>
+            <a:off x="3310128" y="1874520"/>
+            <a:ext cx="2432304" cy="731520"/>
+          </a:xfrm>
+          <a:prstGeom prst="rect">
+            <a:avLst/>
+          </a:prstGeom>
+          <a:noFill/>
+          <a:ln/>
+        </p:spPr>
+        <p:txBody>
+          <a:bodyPr wrap="square" rtlCol="0" anchor="t"/>
+          <a:lstStyle/>
+          <a:p>
+            <a:pPr algn="ctr" indent="0" marL="0">
+              <a:buNone/>
+            </a:pPr>
+            <a:r>
+              <a:rPr lang="en-US" sz="950" dirty="0">
+                <a:solidFill>
+                  <a:srgbClr val="C0C8D8"/>
+                </a:solidFill>
+              </a:rPr>
+              <a:t>No derivative / With derivative / Same risk — three perspectives for each optimisation run</a:t>
+            </a:r>
+            <a:endParaRPr lang="en-US" sz="950" dirty="0"/>
+          </a:p>
+        </p:txBody>
+      </p:sp>
+      <p:sp>
+        <p:nvSpPr>
+          <p:cNvPr id="12" name="Shape 10"/>
+          <p:cNvSpPr/>
+          <p:nvPr/>
+        </p:nvSpPr>
+        <p:spPr>
+          <a:xfrm>
+            <a:off x="6035040" y="868680"/>
+            <a:ext cx="2651760" cy="1828800"/>
+          </a:xfrm>
+          <a:prstGeom prst="rect">
+            <a:avLst/>
+          </a:prstGeom>
+          <a:solidFill>
+            <a:srgbClr val="0D1A2E"/>
+          </a:solidFill>
+          <a:ln w="12700">
+            <a:solidFill>
+              <a:srgbClr val="1A6BBF"/>
+            </a:solidFill>
+            <a:prstDash val="solid"/>
+          </a:ln>
+          <a:effectLst>
+            <a:outerShdw sx="100000" sy="100000" kx="0" ky="0" algn="bl" rotWithShape="0" blurRad="101600" dist="38100" dir="8100000">
+              <a:srgbClr val="000000">
+                <a:alpha val="18000"/>
+              </a:srgbClr>
+            </a:outerShdw>
+          </a:effectLst>
+        </p:spPr>
+        <p:txBody>
+          <a:bodyPr/>
+          <a:p/>
+        </p:txBody>
+      </p:sp>
+      <p:sp>
+        <p:nvSpPr>
+          <p:cNvPr id="13" name="Text 11"/>
+          <p:cNvSpPr/>
+          <p:nvPr/>
+        </p:nvSpPr>
+        <p:spPr>
+          <a:xfrm>
+            <a:off x="6035040" y="960120"/>
+            <a:ext cx="2651760" cy="502920"/>
+          </a:xfrm>
+          <a:prstGeom prst="rect">
+            <a:avLst/>
+          </a:prstGeom>
+          <a:noFill/>
+          <a:ln/>
+        </p:spPr>
+        <p:txBody>
+          <a:bodyPr wrap="square" rtlCol="0" anchor="ctr"/>
+          <a:lstStyle/>
+          <a:p>
+            <a:pPr algn="ctr" indent="0" marL="0">
+              <a:buNone/>
+            </a:pPr>
+            <a:r>
+              <a:rPr lang="en-US" sz="2200" dirty="0">
+                <a:solidFill>
+                  <a:srgbClr val="000000"/>
+                </a:solidFill>
+              </a:rPr>
+              <a:t>🤖</a:t>
+            </a:r>
+            <a:endParaRPr lang="en-US" sz="2200" dirty="0"/>
+          </a:p>
+        </p:txBody>
+      </p:sp>
+      <p:sp>
+        <p:nvSpPr>
+          <p:cNvPr id="14" name="Text 12"/>
+          <p:cNvSpPr/>
+          <p:nvPr/>
+        </p:nvSpPr>
+        <p:spPr>
+          <a:xfrm>
+            <a:off x="6035040" y="1463040"/>
+            <a:ext cx="2651760" cy="365760"/>
+          </a:xfrm>
+          <a:prstGeom prst="rect">
+            <a:avLst/>
+          </a:prstGeom>
+          <a:noFill/>
+          <a:ln/>
+        </p:spPr>
+        <p:txBody>
+          <a:bodyPr wrap="square" rtlCol="0" anchor="ctr"/>
+          <a:lstStyle/>
+          <a:p>
+            <a:pPr algn="ctr" indent="0" marL="0">
+              <a:buNone/>
+            </a:pPr>
+            <a:r>
+              <a:rPr lang="en-US" sz="1100" b="1" dirty="0">
+                <a:solidFill>
+                  <a:srgbClr val="4A9EFF"/>
+                </a:solidFill>
+              </a:rPr>
+              <a:t>AI-Powered</a:t>
+            </a:r>
+            <a:endParaRPr lang="en-US" sz="1100" dirty="0"/>
+          </a:p>
+        </p:txBody>
+      </p:sp>
+      <p:sp>
+        <p:nvSpPr>
+          <p:cNvPr id="15" name="Text 13"/>
+          <p:cNvSpPr/>
+          <p:nvPr/>
+        </p:nvSpPr>
+        <p:spPr>
+          <a:xfrm>
+            <a:off x="6144768" y="1874520"/>
+            <a:ext cx="2432304" cy="731520"/>
+          </a:xfrm>
+          <a:prstGeom prst="rect">
+            <a:avLst/>
+          </a:prstGeom>
+          <a:noFill/>
+          <a:ln/>
+        </p:spPr>
+        <p:txBody>
+          <a:bodyPr wrap="square" rtlCol="0" anchor="t"/>
+          <a:lstStyle/>
+          <a:p>
+            <a:pPr algn="ctr" indent="0" marL="0">
+              <a:buNone/>
+            </a:pPr>
+            <a:r>
+              <a:rPr lang="en-US" sz="950" dirty="0">
+                <a:solidFill>
+                  <a:srgbClr val="C0C8D8"/>
+                </a:solidFill>
+              </a:rPr>
+              <a:t>On-demand explanations for every parameter, constraint, derivative type, and result</a:t>
+            </a:r>
+            <a:endParaRPr lang="en-US" sz="950" dirty="0"/>
+          </a:p>
+        </p:txBody>
+      </p:sp>
+      <p:sp>
+        <p:nvSpPr>
+          <p:cNvPr id="16" name="Shape 14"/>
+          <p:cNvSpPr/>
+          <p:nvPr/>
+        </p:nvSpPr>
+        <p:spPr>
+          <a:xfrm>
+            <a:off x="365760" y="2834640"/>
+            <a:ext cx="8412480" cy="1580000"/>
+          </a:xfrm>
+          <a:prstGeom prst="rect">
+            <a:avLst/>
+          </a:prstGeom>
+          <a:solidFill>
+            <a:srgbClr val="0D1A2E"/>
+          </a:solidFill>
+          <a:ln w="12700">
+            <a:solidFill>
+              <a:srgbClr val="1A6BBF"/>
+            </a:solidFill>
+            <a:prstDash val="solid"/>
+          </a:ln>
+        </p:spPr>
+        <p:txBody>
+          <a:bodyPr/>
+          <a:p/>
+        </p:txBody>
+      </p:sp>
+      <p:sp>
+        <p:nvSpPr>
+          <p:cNvPr id="17" name="Text 15"/>
+          <p:cNvSpPr/>
+          <p:nvPr/>
+        </p:nvSpPr>
+        <p:spPr>
+          <a:xfrm>
+            <a:off x="548640" y="2880360"/>
+            <a:ext cx="8046720" cy="320040"/>
+          </a:xfrm>
+          <a:prstGeom prst="rect">
+            <a:avLst/>
+          </a:prstGeom>
+          <a:noFill/>
+          <a:ln/>
+        </p:spPr>
+        <p:txBody>
+          <a:bodyPr wrap="square" rtlCol="0" anchor="ctr"/>
+          <a:lstStyle/>
+          <a:p>
+            <a:pPr indent="0" marL="0">
+              <a:buNone/>
+            </a:pPr>
+            <a:r>
+              <a:rPr lang="en-US" sz="1100" b="1" dirty="0">
+                <a:solidFill>
+                  <a:srgbClr val="4A9EFF"/>
+                </a:solidFill>
+              </a:rPr>
+              <a:t>Portfolio perspectives (0–3)</a:t>
+            </a:r>
+            <a:endParaRPr lang="en-US" sz="1100" dirty="0"/>
+          </a:p>
+        </p:txBody>
+      </p:sp>
+      <p:sp>
+        <p:nvSpPr>
+          <p:cNvPr id="18" name="Shape 16"/>
+          <p:cNvSpPr/>
+          <p:nvPr/>
+        </p:nvSpPr>
+        <p:spPr>
+          <a:xfrm>
+            <a:off x="548640" y="3510000"/>
+            <a:ext cx="502920" cy="292608"/>
+          </a:xfrm>
+          <a:prstGeom prst="roundRect">
+            <a:avLst>
+              <a:gd name="adj" fmla="val 18750"/>
+            </a:avLst>
+          </a:prstGeom>
+          <a:solidFill>
+            <a:srgbClr val="1A6BBF"/>
+          </a:solidFill>
+          <a:ln w="12700">
+            <a:solidFill>
+              <a:srgbClr val="1A6BBF"/>
+            </a:solidFill>
+            <a:prstDash val="solid"/>
+          </a:ln>
+        </p:spPr>
+        <p:txBody>
+          <a:bodyPr/>
+          <a:p/>
+        </p:txBody>
+      </p:sp>
+      <p:sp>
+        <p:nvSpPr>
+          <p:cNvPr id="19" name="Text 17"/>
+          <p:cNvSpPr/>
+          <p:nvPr/>
+        </p:nvSpPr>
+        <p:spPr>
+          <a:xfrm>
+            <a:off x="548640" y="3564864"/>
+            <a:ext cx="502920" cy="182880"/>
+          </a:xfrm>
+          <a:prstGeom prst="rect">
+            <a:avLst/>
+          </a:prstGeom>
+          <a:noFill/>
+          <a:ln/>
+        </p:spPr>
+        <p:txBody>
+          <a:bodyPr wrap="square" lIns="0" tIns="0" rIns="0" bIns="0" rtlCol="0" anchor="ctr"/>
+          <a:lstStyle/>
+          <a:p>
+            <a:pPr algn="ctr" indent="0" marL="0">
+              <a:buNone/>
+            </a:pPr>
+            <a:r>
+              <a:rPr lang="en-US" sz="1100" b="1" dirty="0">
+                <a:solidFill>
+                  <a:srgbClr val="FFFFFF"/>
+                </a:solidFill>
+              </a:rPr>
+              <a:t>1</a:t>
+            </a:r>
+            <a:endParaRPr lang="en-US" sz="1100" dirty="0"/>
+          </a:p>
+        </p:txBody>
+      </p:sp>
+      <p:sp>
+        <p:nvSpPr>
+          <p:cNvPr id="20" name="Text 18"/>
+          <p:cNvSpPr/>
+          <p:nvPr/>
+        </p:nvSpPr>
+        <p:spPr>
+          <a:xfrm>
+            <a:off x="1143000" y="3510000"/>
+            <a:ext cx="2194560" cy="292608"/>
+          </a:xfrm>
+          <a:prstGeom prst="rect">
+            <a:avLst/>
+          </a:prstGeom>
+          <a:noFill/>
+          <a:ln/>
+        </p:spPr>
+        <p:txBody>
+          <a:bodyPr wrap="square" lIns="0" tIns="0" rIns="0" bIns="0" rtlCol="0" anchor="ctr"/>
+          <a:lstStyle/>
+          <a:p>
+            <a:pPr indent="0" marL="0">
+              <a:buNone/>
+            </a:pPr>
+            <a:r>
+              <a:rPr lang="en-US" sz="950" b="1" dirty="0">
+                <a:solidFill>
+                  <a:srgbClr val="10B981"/>
+                </a:solidFill>
+              </a:rPr>
+              <a:t>Portfolio (1) — No derivative:</a:t>
+            </a:r>
+            <a:endParaRPr lang="en-US" sz="950" dirty="0"/>
+          </a:p>
+        </p:txBody>
+      </p:sp>
+      <p:sp>
+        <p:nvSpPr>
+          <p:cNvPr id="21" name="Text 19"/>
+          <p:cNvSpPr/>
+          <p:nvPr/>
+        </p:nvSpPr>
+        <p:spPr>
+          <a:xfrm>
+            <a:off x="3383280" y="3510000"/>
+            <a:ext cx="5212080" cy="292608"/>
+          </a:xfrm>
+          <a:prstGeom prst="rect">
+            <a:avLst/>
+          </a:prstGeom>
+          <a:noFill/>
+          <a:ln/>
+        </p:spPr>
+        <p:txBody>
+          <a:bodyPr wrap="square" lIns="0" tIns="0" rIns="0" bIns="0" rtlCol="0" anchor="ctr"/>
+          <a:lstStyle/>
+          <a:p>
+            <a:pPr indent="0" marL="0">
+              <a:buNone/>
+            </a:pPr>
+            <a:r>
+              <a:rPr lang="en-US" sz="900" dirty="0">
+                <a:solidFill>
+                  <a:srgbClr val="C0C8D8"/>
+                </a:solidFill>
+              </a:rPr>
+              <a:t>Equivalent to MV optimum — confirms MVT/MAT equivalence. Most classical optimisers stop here.</a:t>
+            </a:r>
+            <a:endParaRPr lang="en-US" sz="900" dirty="0"/>
+          </a:p>
+        </p:txBody>
+      </p:sp>
+      <p:sp>
+        <p:nvSpPr>
+          <p:cNvPr id="22" name="Shape 20"/>
+          <p:cNvSpPr/>
+          <p:nvPr/>
+        </p:nvSpPr>
+        <p:spPr>
+          <a:xfrm>
+            <a:off x="548640" y="3810000"/>
+            <a:ext cx="502920" cy="292608"/>
+          </a:xfrm>
+          <a:prstGeom prst="roundRect">
+            <a:avLst>
+              <a:gd name="adj" fmla="val 18750"/>
+            </a:avLst>
+          </a:prstGeom>
+          <a:solidFill>
+            <a:srgbClr val="1A6BBF"/>
+          </a:solidFill>
+          <a:ln w="12700">
+            <a:solidFill>
+              <a:srgbClr val="1A6BBF"/>
+            </a:solidFill>
+            <a:prstDash val="solid"/>
+          </a:ln>
+        </p:spPr>
+        <p:txBody>
+          <a:bodyPr/>
+          <a:p/>
+        </p:txBody>
+      </p:sp>
+      <p:sp>
+        <p:nvSpPr>
+          <p:cNvPr id="23" name="Text 21"/>
+          <p:cNvSpPr/>
+          <p:nvPr/>
+        </p:nvSpPr>
+        <p:spPr>
+          <a:xfrm>
+            <a:off x="548640" y="3864864"/>
+            <a:ext cx="502920" cy="182880"/>
+          </a:xfrm>
+          <a:prstGeom prst="rect">
+            <a:avLst/>
+          </a:prstGeom>
+          <a:noFill/>
+          <a:ln/>
+        </p:spPr>
+        <p:txBody>
+          <a:bodyPr wrap="square" lIns="0" tIns="0" rIns="0" bIns="0" rtlCol="0" anchor="ctr"/>
+          <a:lstStyle/>
+          <a:p>
+            <a:pPr algn="ctr" indent="0" marL="0">
+              <a:buNone/>
+            </a:pPr>
+            <a:r>
+              <a:rPr lang="en-US" sz="1100" b="1" dirty="0">
+                <a:solidFill>
+                  <a:srgbClr val="FFFFFF"/>
+                </a:solidFill>
+              </a:rPr>
+              <a:t>2</a:t>
+            </a:r>
+            <a:endParaRPr lang="en-US" sz="1100" dirty="0"/>
+          </a:p>
+        </p:txBody>
+      </p:sp>
+      <p:sp>
+        <p:nvSpPr>
+          <p:cNvPr id="24" name="Text 22"/>
+          <p:cNvSpPr/>
+          <p:nvPr/>
+        </p:nvSpPr>
+        <p:spPr>
+          <a:xfrm>
+            <a:off x="1143000" y="3810000"/>
+            <a:ext cx="2194560" cy="292608"/>
+          </a:xfrm>
+          <a:prstGeom prst="rect">
+            <a:avLst/>
+          </a:prstGeom>
+          <a:noFill/>
+          <a:ln/>
+        </p:spPr>
+        <p:txBody>
+          <a:bodyPr wrap="square" lIns="0" tIns="0" rIns="0" bIns="0" rtlCol="0" anchor="ctr"/>
+          <a:lstStyle/>
+          <a:p>
+            <a:pPr indent="0" marL="0">
+              <a:buNone/>
+            </a:pPr>
+            <a:r>
+              <a:rPr lang="en-US" sz="950" b="1" dirty="0">
+                <a:solidFill>
+                  <a:srgbClr val="F59E0B"/>
+                </a:solidFill>
+              </a:rPr>
+              <a:t>Portfolio (2) — With derivative:</a:t>
+            </a:r>
+            <a:endParaRPr lang="en-US" sz="950" dirty="0"/>
+          </a:p>
+        </p:txBody>
+      </p:sp>
+      <p:sp>
+        <p:nvSpPr>
+          <p:cNvPr id="25" name="Text 23"/>
+          <p:cNvSpPr/>
+          <p:nvPr/>
+        </p:nvSpPr>
+        <p:spPr>
+          <a:xfrm>
+            <a:off x="3383280" y="3810000"/>
+            <a:ext cx="5212080" cy="292608"/>
+          </a:xfrm>
+          <a:prstGeom prst="rect">
+            <a:avLst/>
+          </a:prstGeom>
+          <a:noFill/>
+          <a:ln/>
+        </p:spPr>
+        <p:txBody>
+          <a:bodyPr wrap="square" lIns="0" tIns="0" rIns="0" bIns="0" rtlCol="0" anchor="ctr"/>
+          <a:lstStyle/>
+          <a:p>
+            <a:pPr indent="0" marL="0">
+              <a:buNone/>
+            </a:pPr>
+            <a:r>
+              <a:rPr lang="en-US" sz="900" dirty="0">
+                <a:solidFill>
+                  <a:srgbClr val="C0C8D8"/>
+                </a:solidFill>
+              </a:rPr>
+              <a:t>Same implied λ and downside constraint (H,α or H,α,L) — shows return uplift from derivatives.</a:t>
+            </a:r>
+            <a:endParaRPr lang="en-US" sz="900" dirty="0"/>
+          </a:p>
+        </p:txBody>
+      </p:sp>
+      <p:sp>
+        <p:nvSpPr>
+          <p:cNvPr id="26" name="Shape 24"/>
+          <p:cNvSpPr/>
+          <p:nvPr/>
+        </p:nvSpPr>
+        <p:spPr>
+          <a:xfrm>
+            <a:off x="548640" y="4110000"/>
+            <a:ext cx="502920" cy="292608"/>
+          </a:xfrm>
+          <a:prstGeom prst="roundRect">
+            <a:avLst>
+              <a:gd name="adj" fmla="val 18750"/>
+            </a:avLst>
+          </a:prstGeom>
+          <a:solidFill>
+            <a:srgbClr val="1A6BBF"/>
+          </a:solidFill>
+          <a:ln w="12700">
+            <a:solidFill>
+              <a:srgbClr val="1A6BBF"/>
+            </a:solidFill>
+            <a:prstDash val="solid"/>
+          </a:ln>
+        </p:spPr>
+        <p:txBody>
+          <a:bodyPr/>
+          <a:p/>
+        </p:txBody>
+      </p:sp>
+      <p:sp>
+        <p:nvSpPr>
+          <p:cNvPr id="27" name="Text 25"/>
+          <p:cNvSpPr/>
+          <p:nvPr/>
+        </p:nvSpPr>
+        <p:spPr>
+          <a:xfrm>
+            <a:off x="548640" y="4164864"/>
+            <a:ext cx="502920" cy="182880"/>
+          </a:xfrm>
+          <a:prstGeom prst="rect">
+            <a:avLst/>
+          </a:prstGeom>
+          <a:noFill/>
+          <a:ln/>
+        </p:spPr>
+        <p:txBody>
+          <a:bodyPr wrap="square" lIns="0" tIns="0" rIns="0" bIns="0" rtlCol="0" anchor="ctr"/>
+          <a:lstStyle/>
+          <a:p>
+            <a:pPr algn="ctr" indent="0" marL="0">
+              <a:buNone/>
+            </a:pPr>
+            <a:r>
+              <a:rPr lang="en-US" sz="1100" b="1" dirty="0">
+                <a:solidFill>
+                  <a:srgbClr val="FFFFFF"/>
+                </a:solidFill>
+              </a:rPr>
+              <a:t>3</a:t>
+            </a:r>
+            <a:endParaRPr lang="en-US" sz="1100" dirty="0"/>
+          </a:p>
+        </p:txBody>
+      </p:sp>
+      <p:sp>
+        <p:nvSpPr>
+          <p:cNvPr id="28" name="Text 26"/>
+          <p:cNvSpPr/>
+          <p:nvPr/>
+        </p:nvSpPr>
+        <p:spPr>
+          <a:xfrm>
+            <a:off x="1143000" y="4110000"/>
+            <a:ext cx="2194560" cy="292608"/>
+          </a:xfrm>
+          <a:prstGeom prst="rect">
+            <a:avLst/>
+          </a:prstGeom>
+          <a:noFill/>
+          <a:ln/>
+        </p:spPr>
+        <p:txBody>
+          <a:bodyPr wrap="square" lIns="0" tIns="0" rIns="0" bIns="0" rtlCol="0" anchor="ctr"/>
+          <a:lstStyle/>
+          <a:p>
+            <a:pPr indent="0" marL="0">
+              <a:buNone/>
+            </a:pPr>
+            <a:r>
+              <a:rPr lang="en-US" sz="950" b="1" dirty="0">
+                <a:solidFill>
+                  <a:srgbClr val="E76F51"/>
+                </a:solidFill>
+              </a:rPr>
+              <a:t>Portfolio (3) — Same risk as (1):</a:t>
+            </a:r>
+            <a:endParaRPr lang="en-US" sz="950" dirty="0"/>
+          </a:p>
+        </p:txBody>
+      </p:sp>
+      <p:sp>
+        <p:nvSpPr>
+          <p:cNvPr id="29" name="Text 27"/>
+          <p:cNvSpPr/>
+          <p:nvPr/>
+        </p:nvSpPr>
+        <p:spPr>
+          <a:xfrm>
+            <a:off x="3383280" y="4110000"/>
+            <a:ext cx="5212080" cy="292608"/>
+          </a:xfrm>
+          <a:prstGeom prst="rect">
+            <a:avLst/>
+          </a:prstGeom>
+          <a:noFill/>
+          <a:ln/>
+        </p:spPr>
+        <p:txBody>
+          <a:bodyPr wrap="square" lIns="0" tIns="0" rIns="0" bIns="0" rtlCol="0" anchor="ctr"/>
+          <a:lstStyle/>
+          <a:p>
+            <a:pPr indent="0" marL="0">
+              <a:buNone/>
+            </a:pPr>
+            <a:r>
+              <a:rPr lang="en-US" sz="900" dirty="0">
+                <a:solidFill>
+                  <a:srgbClr val="C0C8D8"/>
+                </a:solidFill>
+              </a:rPr>
+              <a:t>Interpolated at P(1) std dev — direct comparison of return gain at equivalent risk (indicative).</a:t>
+            </a:r>
+            <a:endParaRPr lang="en-US" sz="900" dirty="0"/>
+          </a:p>
+        </p:txBody>
+      </p:sp>
+      <p:sp>
+        <p:nvSpPr>
+          <p:cNvPr id="30" name="Text 28"/>
+          <p:cNvSpPr/>
+          <p:nvPr/>
+        </p:nvSpPr>
+        <p:spPr>
+          <a:xfrm>
+            <a:off x="8046720" y="4754880"/>
+            <a:ext cx="914400" cy="274320"/>
+          </a:xfrm>
+          <a:prstGeom prst="rect">
+            <a:avLst/>
+          </a:prstGeom>
+          <a:noFill/>
+          <a:ln/>
+        </p:spPr>
+        <p:txBody>
+          <a:bodyPr wrap="square" rtlCol="0" anchor="ctr"/>
+          <a:lstStyle/>
+          <a:p>
+            <a:pPr algn="r" indent="0" marL="0">
+              <a:buNone/>
+            </a:pPr>
+            <a:r>
+              <a:rPr lang="en-US" sz="900" dirty="0">
+                <a:solidFill>
+                  <a:srgbClr val="556A8A"/>
+                </a:solidFill>
+              </a:rPr>
+              <a:t>3 / 17</a:t>
+            </a:r>
+            <a:endParaRPr lang="en-US" sz="900" dirty="0"/>
+          </a:p>
+        </p:txBody>
+      </p:sp>
+      <p:sp>
+        <p:nvSpPr>
+          <p:cNvPr id="31" name="Text 29"/>
+          <p:cNvSpPr/>
+          <p:nvPr/>
+        </p:nvSpPr>
+        <p:spPr>
+          <a:xfrm>
+            <a:off x="365760" y="4754880"/>
+            <a:ext cx="6400800" cy="274320"/>
+          </a:xfrm>
+          <a:prstGeom prst="rect">
+            <a:avLst/>
+          </a:prstGeom>
+          <a:noFill/>
+          <a:ln/>
+        </p:spPr>
+        <p:txBody>
+          <a:bodyPr wrap="square" rtlCol="0" anchor="ctr"/>
+          <a:lstStyle/>
+          <a:p>
+            <a:pPr algn="l" indent="0" marL="0">
+              <a:buNone/>
+            </a:pPr>
+            <a:r>
+              <a:rPr lang="en-US" sz="900" dirty="0">
+                <a:solidFill>
+                  <a:srgbClr val="556A8A"/>
+                </a:solidFill>
+              </a:rPr>
+              <a:t>Beyond Mean-Variance Portfolio Optimiser — User Guide</a:t>
+            </a:r>
+            <a:endParaRPr lang="en-US" sz="900" dirty="0"/>
+          </a:p>
+        </p:txBody>
+      </p:sp>
+      <p:sp>
+        <p:nvSpPr>
+          <p:cNvPr id="50" name="P0 badge"/>
           <p:cNvSpPr/>
           <p:nvPr/>
         </p:nvSpPr>
@@ -8991,6 +9424,37 @@
           <a:xfrm>
             <a:off x="548640" y="3210000"/>
             <a:ext cx="502920" cy="292608"/>
+          </a:xfrm>
+          <a:prstGeom prst="roundRect">
+            <a:avLst>
+              <a:gd name="adj" fmla="val 18750"/>
+            </a:avLst>
+          </a:prstGeom>
+          <a:solidFill>
+            <a:srgbClr val="1A6BBF"/>
+          </a:solidFill>
+          <a:ln w="12700">
+            <a:solidFill>
+              <a:srgbClr val="1A6BBF"/>
+            </a:solidFill>
+            <a:prstDash val="solid"/>
+          </a:ln>
+        </p:spPr>
+        <p:txBody>
+          <a:bodyPr/>
+          <a:p/>
+        </p:txBody>
+      </p:sp>
+      <p:sp>
+        <p:nvSpPr>
+          <p:cNvPr id="51" name="P0 num"/>
+          <p:cNvSpPr/>
+          <p:nvPr/>
+        </p:nvSpPr>
+        <p:spPr>
+          <a:xfrm>
+            <a:off x="548640" y="3264864"/>
+            <a:ext cx="502920" cy="182880"/>
           </a:xfrm>
           <a:prstGeom prst="rect">
             <a:avLst/>
@@ -9097,7 +9561,7 @@
 </p:sld>
 </file>
 
-<file path=ppt/slides/slide3.xml><?xml version="1.0" encoding="utf-8"?>
+<file path=ppt/slides/slide4.xml><?xml version="1.0" encoding="utf-8"?>
 <p:sld xmlns:a="http://schemas.openxmlformats.org/drawingml/2006/main" xmlns:r="http://schemas.openxmlformats.org/officeDocument/2006/relationships" xmlns:p="http://schemas.openxmlformats.org/presentationml/2006/main">
   <p:cSld name="Slide 3">
     <p:bg>
@@ -9761,7 +10225,7 @@
 </p:sld>
 </file>
 
-<file path=ppt/slides/slide4.xml><?xml version="1.0" encoding="utf-8"?>
+<file path=ppt/slides/slide5.xml><?xml version="1.0" encoding="utf-8"?>
 <p:sld xmlns:a="http://schemas.openxmlformats.org/drawingml/2006/main" xmlns:r="http://schemas.openxmlformats.org/officeDocument/2006/relationships" xmlns:p="http://schemas.openxmlformats.org/presentationml/2006/main">
   <p:cSld name="Slide 4">
     <p:bg>
@@ -10522,7 +10986,7 @@
 </p:sld>
 </file>
 
-<file path=ppt/slides/slide5.xml><?xml version="1.0" encoding="utf-8"?>
+<file path=ppt/slides/slide6.xml><?xml version="1.0" encoding="utf-8"?>
 <p:sld xmlns:a="http://schemas.openxmlformats.org/drawingml/2006/main" xmlns:r="http://schemas.openxmlformats.org/officeDocument/2006/relationships" xmlns:p="http://schemas.openxmlformats.org/presentationml/2006/main">
   <p:cSld name="Slide 5">
     <p:bg>
@@ -11258,7 +11722,7 @@
 </p:sld>
 </file>
 
-<file path=ppt/slides/slide6.xml><?xml version="1.0" encoding="utf-8"?>
+<file path=ppt/slides/slide7.xml><?xml version="1.0" encoding="utf-8"?>
 <p:sld xmlns:a="http://schemas.openxmlformats.org/drawingml/2006/main" xmlns:r="http://schemas.openxmlformats.org/officeDocument/2006/relationships" xmlns:p="http://schemas.openxmlformats.org/presentationml/2006/main">
   <p:cSld name="Slide 6">
     <p:bg>
@@ -12089,7 +12553,7 @@
 </p:sld>
 </file>
 
-<file path=ppt/slides/slide7.xml><?xml version="1.0" encoding="utf-8"?>
+<file path=ppt/slides/slide8.xml><?xml version="1.0" encoding="utf-8"?>
 <p:sld xmlns:a="http://schemas.openxmlformats.org/drawingml/2006/main" xmlns:r="http://schemas.openxmlformats.org/officeDocument/2006/relationships" xmlns:p="http://schemas.openxmlformats.org/presentationml/2006/main">
   <p:cSld name="Slide 7">
     <p:bg>
@@ -12602,7 +13066,7 @@
 </p:sld>
 </file>
 
-<file path=ppt/slides/slide8.xml><?xml version="1.0" encoding="utf-8"?>
+<file path=ppt/slides/slide9.xml><?xml version="1.0" encoding="utf-8"?>
 <p:sld xmlns:a="http://schemas.openxmlformats.org/drawingml/2006/main" xmlns:r="http://schemas.openxmlformats.org/officeDocument/2006/relationships" xmlns:p="http://schemas.openxmlformats.org/presentationml/2006/main">
   <p:cSld name="Slide 8">
     <p:bg>
@@ -13595,470 +14059,6 @@
           </a:p>
         </p:txBody>
       </p:sp>
-    </p:spTree>
-  </p:cSld>
-  <p:clrMapOvr>
-    <a:masterClrMapping/>
-  </p:clrMapOvr>
-</p:sld>
-</file>
-
-<file path=ppt/slides/slide9.xml><?xml version="1.0" encoding="utf-8"?>
-<p:sld xmlns:a="http://schemas.openxmlformats.org/drawingml/2006/main" xmlns:r="http://schemas.openxmlformats.org/officeDocument/2006/relationships" xmlns:p="http://schemas.openxmlformats.org/presentationml/2006/main">
-  <p:cSld name="Slide 9">
-    <p:bg>
-      <p:bgPr>
-        <a:solidFill>
-          <a:srgbClr val="020C1B"/>
-        </a:solidFill>
-      </p:bgPr>
-    </p:bg>
-    <p:spTree>
-      <p:nvGrpSpPr>
-        <p:cNvPr id="1" name=""/>
-        <p:cNvGrpSpPr/>
-        <p:nvPr/>
-      </p:nvGrpSpPr>
-      <p:grpSpPr>
-        <a:xfrm>
-          <a:off x="0" y="0"/>
-          <a:ext cx="0" cy="0"/>
-          <a:chOff x="0" y="0"/>
-          <a:chExt cx="0" cy="0"/>
-        </a:xfrm>
-      </p:grpSpPr>
-      <p:sp>
-        <p:nvSpPr>
-          <p:cNvPr id="2" name="Shape 0"/>
-          <p:cNvSpPr/>
-          <p:nvPr/>
-        </p:nvSpPr>
-        <p:spPr>
-          <a:xfrm>
-            <a:off x="0" y="0"/>
-            <a:ext cx="9144000" cy="54864"/>
-          </a:xfrm>
-          <a:prstGeom prst="rect">
-            <a:avLst/>
-          </a:prstGeom>
-          <a:solidFill>
-            <a:srgbClr val="1A6BBF"/>
-          </a:solidFill>
-          <a:ln w="12700">
-            <a:solidFill>
-              <a:srgbClr val="1A6BBF"/>
-            </a:solidFill>
-            <a:prstDash val="solid"/>
-          </a:ln>
-        </p:spPr>
-        <p:txBody>
-          <a:bodyPr/>
-          <a:p/>
-        </p:txBody>
-      </p:sp>
-      <p:sp>
-        <p:nvSpPr>
-          <p:cNvPr id="3" name="Text 1"/>
-          <p:cNvSpPr/>
-          <p:nvPr/>
-        </p:nvSpPr>
-        <p:spPr>
-          <a:xfrm>
-            <a:off x="365760" y="164592"/>
-            <a:ext cx="8229600" cy="457200"/>
-          </a:xfrm>
-          <a:prstGeom prst="rect">
-            <a:avLst/>
-          </a:prstGeom>
-          <a:noFill/>
-          <a:ln/>
-        </p:spPr>
-        <p:txBody>
-          <a:bodyPr wrap="square" rtlCol="0" anchor="ctr"/>
-          <a:lstStyle/>
-          <a:p>
-            <a:pPr indent="0" marL="0">
-              <a:buNone/>
-            </a:pPr>
-            <a:r>
-              <a:rPr lang="en-US" sz="2200" b="1" dirty="0">
-                <a:solidFill>
-                  <a:srgbClr val="FFFFFF"/>
-                </a:solidFill>
-              </a:rPr>
-              <a:t>Portfolio Results</a:t>
-            </a:r>
-            <a:endParaRPr lang="en-US" sz="2200" dirty="0"/>
-          </a:p>
-        </p:txBody>
-      </p:sp>
-      <p:sp>
-        <p:nvSpPr>
-          <p:cNvPr id="6" name="Text 4"/>
-          <p:cNvSpPr/>
-          <p:nvPr/>
-        </p:nvSpPr>
-        <p:spPr>
-          <a:xfrm>
-            <a:off x="365760" y="3154680"/>
-            <a:ext cx="8412480" cy="292608"/>
-          </a:xfrm>
-          <a:prstGeom prst="rect">
-            <a:avLst/>
-          </a:prstGeom>
-          <a:noFill/>
-          <a:ln/>
-        </p:spPr>
-        <p:txBody>
-          <a:bodyPr wrap="square" rtlCol="0" anchor="ctr"/>
-          <a:lstStyle/>
-          <a:p>
-            <a:pPr indent="0" marL="0">
-              <a:buNone/>
-            </a:pPr>
-            <a:r>
-              <a:rPr lang="en-US" sz="1100" b="1" dirty="0">
-                <a:solidFill>
-                  <a:srgbClr val="4A9EFF"/>
-                </a:solidFill>
-              </a:rPr>
-              <a:t>Key metrics</a:t>
-            </a:r>
-            <a:endParaRPr lang="en-US" sz="1100" dirty="0"/>
-          </a:p>
-        </p:txBody>
-      </p:sp>
-      <p:sp>
-        <p:nvSpPr>
-          <p:cNvPr id="7" name="Text 5"/>
-          <p:cNvSpPr/>
-          <p:nvPr/>
-        </p:nvSpPr>
-        <p:spPr>
-          <a:xfrm>
-            <a:off x="365760" y="3493008"/>
-            <a:ext cx="4114800" cy="274320"/>
-          </a:xfrm>
-          <a:prstGeom prst="rect">
-            <a:avLst/>
-          </a:prstGeom>
-          <a:noFill/>
-          <a:ln/>
-        </p:spPr>
-        <p:txBody>
-          <a:bodyPr wrap="square" rtlCol="0" anchor="ctr"/>
-          <a:lstStyle/>
-          <a:p>
-            <a:pPr indent="0" marL="0">
-              <a:buNone/>
-            </a:pPr>
-            <a:r>
-              <a:rPr lang="en-US" sz="900" b="1" dirty="0">
-                <a:solidFill>
-                  <a:srgbClr val="FFFFFF"/>
-                </a:solidFill>
-              </a:rPr>
-              <a:t xml:space="preserve">Expected return:  </a:t>
-            </a:r>
-            <a:pPr indent="0" marL="0">
-              <a:buNone/>
-            </a:pPr>
-            <a:r>
-              <a:rPr lang="en-US" sz="900" dirty="0">
-                <a:solidFill>
-                  <a:srgbClr val="C0C8D8"/>
-                </a:solidFill>
-              </a:rPr>
-              <a:t>Annualised mean return of the optimal portfolio</a:t>
-            </a:r>
-            <a:endParaRPr lang="en-US" sz="900" dirty="0"/>
-          </a:p>
-        </p:txBody>
-      </p:sp>
-      <p:sp>
-        <p:nvSpPr>
-          <p:cNvPr id="8" name="Text 6"/>
-          <p:cNvSpPr/>
-          <p:nvPr/>
-        </p:nvSpPr>
-        <p:spPr>
-          <a:xfrm>
-            <a:off x="365760" y="3803904"/>
-            <a:ext cx="4114800" cy="274320"/>
-          </a:xfrm>
-          <a:prstGeom prst="rect">
-            <a:avLst/>
-          </a:prstGeom>
-          <a:noFill/>
-          <a:ln/>
-        </p:spPr>
-        <p:txBody>
-          <a:bodyPr wrap="square" rtlCol="0" anchor="ctr"/>
-          <a:lstStyle/>
-          <a:p>
-            <a:pPr indent="0" marL="0">
-              <a:buNone/>
-            </a:pPr>
-            <a:r>
-              <a:rPr lang="en-US" sz="900" b="1" dirty="0">
-                <a:solidFill>
-                  <a:srgbClr val="FFFFFF"/>
-                </a:solidFill>
-              </a:rPr>
-              <a:t xml:space="preserve">Std deviation:  </a:t>
-            </a:r>
-            <a:pPr indent="0" marL="0">
-              <a:buNone/>
-            </a:pPr>
-            <a:r>
-              <a:rPr lang="en-US" sz="900" dirty="0">
-                <a:solidFill>
-                  <a:srgbClr val="C0C8D8"/>
-                </a:solidFill>
-              </a:rPr>
-              <a:t>Annualised portfolio volatility (risk measure)</a:t>
-            </a:r>
-            <a:endParaRPr lang="en-US" sz="900" dirty="0"/>
-          </a:p>
-        </p:txBody>
-      </p:sp>
-      <p:sp>
-        <p:nvSpPr>
-          <p:cNvPr id="9" name="Text 7"/>
-          <p:cNvSpPr/>
-          <p:nvPr/>
-        </p:nvSpPr>
-        <p:spPr>
-          <a:xfrm>
-            <a:off x="365760" y="4114800"/>
-            <a:ext cx="4114800" cy="274320"/>
-          </a:xfrm>
-          <a:prstGeom prst="rect">
-            <a:avLst/>
-          </a:prstGeom>
-          <a:noFill/>
-          <a:ln/>
-        </p:spPr>
-        <p:txBody>
-          <a:bodyPr wrap="square" rtlCol="0" anchor="ctr"/>
-          <a:lstStyle/>
-          <a:p>
-            <a:pPr indent="0" marL="0">
-              <a:buNone/>
-            </a:pPr>
-            <a:r>
-              <a:rPr lang="en-US" sz="900" b="1" dirty="0">
-                <a:solidFill>
-                  <a:srgbClr val="FFFFFF"/>
-                </a:solidFill>
-              </a:rPr>
-              <a:t xml:space="preserve">Skewness:  </a:t>
-            </a:r>
-            <a:pPr indent="0" marL="0">
-              <a:buNone/>
-            </a:pPr>
-            <a:r>
-              <a:rPr lang="en-US" sz="900" dirty="0">
-                <a:solidFill>
-                  <a:srgbClr val="C0C8D8"/>
-                </a:solidFill>
-              </a:rPr>
-              <a:t>Asymmetry of return distribution — positive = upside skew</a:t>
-            </a:r>
-            <a:endParaRPr lang="en-US" sz="900" dirty="0"/>
-          </a:p>
-        </p:txBody>
-      </p:sp>
-      <p:sp>
-        <p:nvSpPr>
-          <p:cNvPr id="10" name="Text 8"/>
-          <p:cNvSpPr/>
-          <p:nvPr/>
-        </p:nvSpPr>
-        <p:spPr>
-          <a:xfrm>
-            <a:off x="4663440" y="3493008"/>
-            <a:ext cx="4114800" cy="274320"/>
-          </a:xfrm>
-          <a:prstGeom prst="rect">
-            <a:avLst/>
-          </a:prstGeom>
-          <a:noFill/>
-          <a:ln/>
-        </p:spPr>
-        <p:txBody>
-          <a:bodyPr wrap="square" rtlCol="0" anchor="ctr"/>
-          <a:lstStyle/>
-          <a:p>
-            <a:pPr indent="0" marL="0">
-              <a:buNone/>
-            </a:pPr>
-            <a:r>
-              <a:rPr lang="en-US" sz="900" b="1" dirty="0">
-                <a:solidFill>
-                  <a:srgbClr val="FFFFFF"/>
-                </a:solidFill>
-              </a:rPr>
-              <a:t xml:space="preserve">Shortfall / ES:  </a:t>
-            </a:r>
-            <a:pPr indent="0" marL="0">
-              <a:buNone/>
-            </a:pPr>
-            <a:r>
-              <a:rPr lang="en-US" sz="900" dirty="0">
-                <a:solidFill>
-                  <a:srgbClr val="C0C8D8"/>
-                </a:solidFill>
-              </a:rPr>
-              <a:t>Expected loss in the tail (ES constraint value)</a:t>
-            </a:r>
-            <a:endParaRPr lang="en-US" sz="900" dirty="0"/>
-          </a:p>
-        </p:txBody>
-      </p:sp>
-      <p:sp>
-        <p:nvSpPr>
-          <p:cNvPr id="11" name="Text 9"/>
-          <p:cNvSpPr/>
-          <p:nvPr/>
-        </p:nvSpPr>
-        <p:spPr>
-          <a:xfrm>
-            <a:off x="4663440" y="3803904"/>
-            <a:ext cx="4114800" cy="274320"/>
-          </a:xfrm>
-          <a:prstGeom prst="rect">
-            <a:avLst/>
-          </a:prstGeom>
-          <a:noFill/>
-          <a:ln/>
-        </p:spPr>
-        <p:txBody>
-          <a:bodyPr wrap="square" rtlCol="0" anchor="ctr"/>
-          <a:lstStyle/>
-          <a:p>
-            <a:pPr indent="0" marL="0">
-              <a:buNone/>
-            </a:pPr>
-            <a:r>
-              <a:rPr lang="en-US" sz="900" b="1" dirty="0">
-                <a:solidFill>
-                  <a:srgbClr val="FFFFFF"/>
-                </a:solidFill>
-              </a:rPr>
-              <a:t xml:space="preserve">Portfolio weights:  </a:t>
-            </a:r>
-            <a:pPr indent="0" marL="0">
-              <a:buNone/>
-            </a:pPr>
-            <a:r>
-              <a:rPr lang="en-US" sz="900" dirty="0">
-                <a:solidFill>
-                  <a:srgbClr val="C0C8D8"/>
-                </a:solidFill>
-              </a:rPr>
-              <a:t>Allocation to each security and derivative</a:t>
-            </a:r>
-            <a:endParaRPr lang="en-US" sz="900" dirty="0"/>
-          </a:p>
-        </p:txBody>
-      </p:sp>
-      <p:sp>
-        <p:nvSpPr>
-          <p:cNvPr id="12" name="Text 10"/>
-          <p:cNvSpPr/>
-          <p:nvPr/>
-        </p:nvSpPr>
-        <p:spPr>
-          <a:xfrm>
-            <a:off x="8046720" y="4754880"/>
-            <a:ext cx="914400" cy="274320"/>
-          </a:xfrm>
-          <a:prstGeom prst="rect">
-            <a:avLst/>
-          </a:prstGeom>
-          <a:noFill/>
-          <a:ln/>
-        </p:spPr>
-        <p:txBody>
-          <a:bodyPr wrap="square" rtlCol="0" anchor="ctr"/>
-          <a:lstStyle/>
-          <a:p>
-            <a:pPr algn="r" indent="0" marL="0">
-              <a:buNone/>
-            </a:pPr>
-            <a:r>
-              <a:rPr lang="en-US" sz="900" dirty="0">
-                <a:solidFill>
-                  <a:srgbClr val="556A8A"/>
-                </a:solidFill>
-              </a:rPr>
-              <a:t>10 / 17</a:t>
-            </a:r>
-            <a:endParaRPr lang="en-US" sz="900" dirty="0"/>
-          </a:p>
-        </p:txBody>
-      </p:sp>
-      <p:sp>
-        <p:nvSpPr>
-          <p:cNvPr id="13" name="Text 11"/>
-          <p:cNvSpPr/>
-          <p:nvPr/>
-        </p:nvSpPr>
-        <p:spPr>
-          <a:xfrm>
-            <a:off x="365760" y="4754880"/>
-            <a:ext cx="6400800" cy="274320"/>
-          </a:xfrm>
-          <a:prstGeom prst="rect">
-            <a:avLst/>
-          </a:prstGeom>
-          <a:noFill/>
-          <a:ln/>
-        </p:spPr>
-        <p:txBody>
-          <a:bodyPr wrap="square" rtlCol="0" anchor="ctr"/>
-          <a:lstStyle/>
-          <a:p>
-            <a:pPr algn="l" indent="0" marL="0">
-              <a:buNone/>
-            </a:pPr>
-            <a:r>
-              <a:rPr lang="en-US" sz="900" dirty="0">
-                <a:solidFill>
-                  <a:srgbClr val="556A8A"/>
-                </a:solidFill>
-              </a:rPr>
-              <a:t>Beyond Mean-Variance Portfolio Optimiser — User Guide</a:t>
-            </a:r>
-            <a:endParaRPr lang="en-US" sz="900" dirty="0"/>
-          </a:p>
-        </p:txBody>
-      </p:sp>
-      <p:pic>
-        <p:nvPicPr>
-          <p:cNvPr id="14" name="Picture 13" descr="slide9results.png"/>
-          <p:cNvPicPr>
-            <a:picLocks noChangeAspect="1"/>
-          </p:cNvPicPr>
-          <p:nvPr/>
-        </p:nvPicPr>
-        <p:blipFill>
-          <a:blip r:embed="rId3"/>
-          <a:stretch>
-            <a:fillRect/>
-          </a:stretch>
-        </p:blipFill>
-        <p:spPr>
-          <a:xfrm>
-            <a:off x="3555669" y="749808"/>
-            <a:ext cx="2032661" cy="2286000"/>
-          </a:xfrm>
-          <a:prstGeom prst="rect">
-            <a:avLst/>
-          </a:prstGeom>
-        </p:spPr>
-      </p:pic>
     </p:spTree>
   </p:cSld>
   <p:clrMapOvr>

--- a/userguide.pptx
+++ b/userguide.pptx
@@ -8933,8 +8933,8 @@
         </p:nvSpPr>
         <p:spPr>
           <a:xfrm>
-            <a:off x="548640" y="3510000"/>
-            <a:ext cx="502920" cy="292608"/>
+            <a:off x="548640" y="3564864"/>
+            <a:ext cx="502920" cy="182880"/>
           </a:xfrm>
           <a:prstGeom prst="roundRect">
             <a:avLst>
@@ -9072,8 +9072,8 @@
         </p:nvSpPr>
         <p:spPr>
           <a:xfrm>
-            <a:off x="548640" y="3810000"/>
-            <a:ext cx="502920" cy="292608"/>
+            <a:off x="548640" y="3864864"/>
+            <a:ext cx="502920" cy="182880"/>
           </a:xfrm>
           <a:prstGeom prst="roundRect">
             <a:avLst>
@@ -9211,8 +9211,8 @@
         </p:nvSpPr>
         <p:spPr>
           <a:xfrm>
-            <a:off x="548640" y="4110000"/>
-            <a:ext cx="502920" cy="292608"/>
+            <a:off x="548640" y="4164864"/>
+            <a:ext cx="502920" cy="182880"/>
           </a:xfrm>
           <a:prstGeom prst="roundRect">
             <a:avLst>
@@ -9422,8 +9422,8 @@
         </p:nvSpPr>
         <p:spPr>
           <a:xfrm>
-            <a:off x="548640" y="3210000"/>
-            <a:ext cx="502920" cy="292608"/>
+            <a:off x="548640" y="3264864"/>
+            <a:ext cx="502920" cy="182880"/>
           </a:xfrm>
           <a:prstGeom prst="roundRect">
             <a:avLst>

--- a/userguide.pptx
+++ b/userguide.pptx
@@ -2153,6 +2153,7 @@
                 <a:solidFill>
                   <a:srgbClr val="4A9EFF"/>
                 </a:solidFill>
+                <a:hlinkClick r:id="rId3"/>
               </a:rPr>
               <a:t>🔗  sami-jeddou-behavioral-portfolio-optimizer.streamlit.app</a:t>
             </a:r>
@@ -7157,6 +7158,7 @@
                 <a:solidFill>
                   <a:srgbClr val="4A9EFF"/>
                 </a:solidFill>
+                <a:hlinkClick r:id="rId4"/>
               </a:rPr>
               <a:t>sami-jeddou-behavioral-portfolio-optimizer.streamlit.app</a:t>
             </a:r>

--- a/userguide.pptx
+++ b/userguide.pptx
@@ -6,6 +6,7 @@
   </p:sldMasterIdLst>
   <p:sldIdLst>
     <p:sldId id="256" r:id="rId2"/>
+    <p:sldId id="273" r:id="rId24"/>
     <p:sldId id="268" r:id="rId19"/>
     <p:sldId id="257" r:id="rId3"/>
     <p:sldId id="258" r:id="rId4"/>
@@ -2588,7 +2589,7 @@
                   <a:srgbClr val="556A8A"/>
                 </a:solidFill>
               </a:rPr>
-              <a:t>10 / 17</a:t>
+              <a:t>11 / 18</a:t>
             </a:r>
             <a:endParaRPr lang="en-US" sz="900" dirty="0"/>
           </a:p>
@@ -3117,7 +3118,7 @@
                   <a:srgbClr val="556A8A"/>
                 </a:solidFill>
               </a:rPr>
-              <a:t>11 / 17</a:t>
+              <a:t>12 / 18</a:t>
             </a:r>
             <a:endParaRPr lang="en-US" sz="900" dirty="0"/>
           </a:p>
@@ -4224,7 +4225,7 @@
                   <a:srgbClr val="556A8A"/>
                 </a:solidFill>
               </a:rPr>
-              <a:t>12 / 17</a:t>
+              <a:t>13 / 18</a:t>
             </a:r>
             <a:endParaRPr lang="en-US" sz="900" dirty="0"/>
           </a:p>
@@ -4393,7 +4394,7 @@
                   <a:srgbClr val="556A8A"/>
                 </a:solidFill>
               </a:rPr>
-              <a:t>13 / 17</a:t>
+              <a:t>14 / 18</a:t>
             </a:r>
             <a:endParaRPr lang="en-US" sz="900" dirty="0"/>
           </a:p>
@@ -5628,7 +5629,7 @@
                   <a:srgbClr val="556A8A"/>
                 </a:solidFill>
               </a:rPr>
-              <a:t>14 / 17</a:t>
+              <a:t>15 / 18</a:t>
             </a:r>
             <a:endParaRPr lang="en-US" sz="900" dirty="0"/>
           </a:p>
@@ -5797,7 +5798,7 @@
                   <a:srgbClr val="556A8A"/>
                 </a:solidFill>
               </a:rPr>
-              <a:t>15 / 17</a:t>
+              <a:t>16 / 18</a:t>
             </a:r>
             <a:endParaRPr lang="en-US" sz="900" dirty="0"/>
           </a:p>
@@ -6624,7 +6625,7 @@
                   <a:srgbClr val="556A8A"/>
                 </a:solidFill>
               </a:rPr>
-              <a:t>16 / 17</a:t>
+              <a:t>17 / 18</a:t>
             </a:r>
             <a:endParaRPr lang="en-US" sz="900" dirty="0"/>
           </a:p>
@@ -7208,7 +7209,7 @@
                   <a:srgbClr val="556A8A"/>
                 </a:solidFill>
               </a:rPr>
-              <a:t>17 / 17</a:t>
+              <a:t>18 / 18</a:t>
             </a:r>
             <a:endParaRPr lang="en-US" sz="900" dirty="0"/>
           </a:p>
@@ -7250,6 +7251,230 @@
           </a:p>
         </p:txBody>
       </p:sp>
+    </p:spTree>
+  </p:cSld>
+  <p:clrMapOvr>
+    <a:masterClrMapping/>
+  </p:clrMapOvr>
+</p:sld>
+</file>
+
+<file path=ppt/slides/slide18.xml><?xml version="1.0" encoding="utf-8"?>
+<p:sld xmlns:a="http://schemas.openxmlformats.org/drawingml/2006/main" xmlns:p="http://schemas.openxmlformats.org/presentationml/2006/main" xmlns:r="http://schemas.openxmlformats.org/officeDocument/2006/relationships">
+  <p:cSld>
+    <p:bg>
+      <p:bgPr>
+        <a:solidFill>
+          <a:srgbClr val="020C1B"/>
+        </a:solidFill>
+      </p:bgPr>
+    </p:bg>
+    <p:spTree>
+      <p:nvGrpSpPr>
+        <p:cNvPr id="1" name=""/>
+        <p:cNvGrpSpPr/>
+        <p:nvPr/>
+      </p:nvGrpSpPr>
+      <p:grpSpPr/>
+      <p:sp>
+        <p:nvSpPr>
+          <p:cNvPr id="2" name="Shape 0"/>
+          <p:cNvSpPr/>
+          <p:nvPr/>
+        </p:nvSpPr>
+        <p:spPr>
+          <a:xfrm>
+            <a:off x="0" y="0"/>
+            <a:ext cx="9144000" cy="54864"/>
+          </a:xfrm>
+          <a:prstGeom prst="rect">
+            <a:avLst/>
+          </a:prstGeom>
+          <a:solidFill>
+            <a:srgbClr val="1A6BBF"/>
+          </a:solidFill>
+          <a:ln w="12700">
+            <a:solidFill>
+              <a:srgbClr val="1A6BBF"/>
+            </a:solidFill>
+            <a:prstDash val="solid"/>
+          </a:ln>
+        </p:spPr>
+        <p:txBody>
+          <a:bodyPr/>
+          <a:p/>
+        </p:txBody>
+      </p:sp>
+      <p:sp>
+        <p:nvSpPr>
+          <p:cNvPr id="3" name="Text 1"/>
+          <p:cNvSpPr/>
+          <p:nvPr/>
+        </p:nvSpPr>
+        <p:spPr>
+          <a:xfrm>
+            <a:off x="457200" y="164592"/>
+            <a:ext cx="8229600" cy="502920"/>
+          </a:xfrm>
+          <a:prstGeom prst="rect">
+            <a:avLst/>
+          </a:prstGeom>
+          <a:noFill/>
+          <a:ln/>
+        </p:spPr>
+        <p:txBody>
+          <a:bodyPr wrap="square" rtlCol="0" anchor="ctr"/>
+          <a:lstStyle/>
+          <a:p>
+            <a:pPr indent="0" marL="0">
+              <a:buNone/>
+            </a:pPr>
+            <a:r>
+              <a:rPr lang="en-US" sz="2600" b="1" dirty="0">
+                <a:solidFill>
+                  <a:srgbClr val="FFFFFF"/>
+                </a:solidFill>
+              </a:rPr>
+              <a:t>Home</a:t>
+            </a:r>
+            <a:endParaRPr lang="en-US" sz="2600" dirty="0"/>
+          </a:p>
+        </p:txBody>
+      </p:sp>
+      <p:sp>
+        <p:nvSpPr>
+          <p:cNvPr id="30" name="Text 28"/>
+          <p:cNvSpPr/>
+          <p:nvPr/>
+        </p:nvSpPr>
+        <p:spPr>
+          <a:xfrm>
+            <a:off x="8046720" y="4754880"/>
+            <a:ext cx="914400" cy="274320"/>
+          </a:xfrm>
+          <a:prstGeom prst="rect">
+            <a:avLst/>
+          </a:prstGeom>
+          <a:noFill/>
+          <a:ln/>
+        </p:spPr>
+        <p:txBody>
+          <a:bodyPr wrap="square" rtlCol="0" anchor="ctr"/>
+          <a:lstStyle/>
+          <a:p>
+            <a:pPr algn="r" indent="0" marL="0">
+              <a:buNone/>
+            </a:pPr>
+            <a:r>
+              <a:rPr lang="en-US" sz="900" dirty="0">
+                <a:solidFill>
+                  <a:srgbClr val="556A8A"/>
+                </a:solidFill>
+              </a:rPr>
+              <a:t>2 / 18</a:t>
+            </a:r>
+            <a:endParaRPr lang="en-US" sz="900" dirty="0"/>
+          </a:p>
+        </p:txBody>
+      </p:sp>
+      <p:sp>
+        <p:nvSpPr>
+          <p:cNvPr id="31" name="Text 29"/>
+          <p:cNvSpPr/>
+          <p:nvPr/>
+        </p:nvSpPr>
+        <p:spPr>
+          <a:xfrm>
+            <a:off x="365760" y="4754880"/>
+            <a:ext cx="6400800" cy="274320"/>
+          </a:xfrm>
+          <a:prstGeom prst="rect">
+            <a:avLst/>
+          </a:prstGeom>
+          <a:noFill/>
+          <a:ln/>
+        </p:spPr>
+        <p:txBody>
+          <a:bodyPr wrap="square" rtlCol="0" anchor="ctr"/>
+          <a:lstStyle/>
+          <a:p>
+            <a:pPr algn="l" indent="0" marL="0">
+              <a:buNone/>
+            </a:pPr>
+            <a:r>
+              <a:rPr lang="en-US" sz="900" dirty="0">
+                <a:solidFill>
+                  <a:srgbClr val="556A8A"/>
+                </a:solidFill>
+              </a:rPr>
+              <a:t>Beyond Mean-Variance Portfolio Optimiser — User Guide</a:t>
+            </a:r>
+            <a:endParaRPr lang="en-US" sz="900" dirty="0"/>
+          </a:p>
+        </p:txBody>
+      </p:sp>
+      <p:sp>
+        <p:nvSpPr>
+          <p:cNvPr id="32" name="TextBox 31"/>
+          <p:cNvSpPr txBox="1"/>
+          <p:nvPr/>
+        </p:nvSpPr>
+        <p:spPr>
+          <a:xfrm>
+            <a:off x="457200" y="731520"/>
+            <a:ext cx="8229600" cy="457200"/>
+          </a:xfrm>
+          <a:prstGeom prst="rect">
+            <a:avLst/>
+          </a:prstGeom>
+          <a:noFill/>
+        </p:spPr>
+        <p:txBody>
+          <a:bodyPr wrap="square">
+            <a:spAutoFit/>
+          </a:bodyPr>
+          <a:lstStyle/>
+          <a:p>
+            <a:r>
+              <a:rPr sz="1150">
+                <a:solidFill>
+                  <a:srgbClr val="C0C8D8"/>
+                </a:solidFill>
+              </a:rPr>
+              <a:t>The landing screen — your starting point: the three tools across the top, with the reference shelf (About · Glossary · User Guide) below.</a:t>
+            </a:r>
+          </a:p>
+        </p:txBody>
+      </p:sp>
+      <p:pic>
+        <p:nvPicPr>
+          <p:cNvPr id="33" name="Picture 32" descr="1781032026523_image.png"/>
+          <p:cNvPicPr>
+            <a:picLocks noChangeAspect="1"/>
+          </p:cNvPicPr>
+          <p:nvPr/>
+        </p:nvPicPr>
+        <p:blipFill>
+          <a:blip r:embed="rId2"/>
+          <a:stretch>
+            <a:fillRect/>
+          </a:stretch>
+        </p:blipFill>
+        <p:spPr>
+          <a:xfrm>
+            <a:off x="1399032" y="1280160"/>
+            <a:ext cx="6355080" cy="3291840"/>
+          </a:xfrm>
+          <a:prstGeom prst="rect">
+            <a:avLst/>
+          </a:prstGeom>
+          <a:ln w="12700">
+            <a:solidFill>
+              <a:srgbClr val="2A3A55"/>
+            </a:solidFill>
+          </a:ln>
+        </p:spPr>
+      </p:pic>
     </p:spTree>
   </p:cSld>
   <p:clrMapOvr>
@@ -8291,7 +8516,7 @@
                   <a:srgbClr val="556A8A"/>
                 </a:solidFill>
               </a:rPr>
-              <a:t>2 / 17</a:t>
+              <a:t>3 / 18</a:t>
             </a:r>
             <a:endParaRPr lang="en-US" sz="900" dirty="0"/>
           </a:p>
@@ -9374,7 +9599,7 @@
                   <a:srgbClr val="556A8A"/>
                 </a:solidFill>
               </a:rPr>
-              <a:t>3 / 17</a:t>
+              <a:t>4 / 18</a:t>
             </a:r>
             <a:endParaRPr lang="en-US" sz="900" dirty="0"/>
           </a:p>
@@ -10153,7 +10378,7 @@
                   <a:srgbClr val="556A8A"/>
                 </a:solidFill>
               </a:rPr>
-              <a:t>4 / 17</a:t>
+              <a:t>5 / 18</a:t>
             </a:r>
             <a:endParaRPr lang="en-US" sz="900" dirty="0"/>
           </a:p>
@@ -10890,7 +11115,7 @@
                   <a:srgbClr val="556A8A"/>
                 </a:solidFill>
               </a:rPr>
-              <a:t>5 / 17</a:t>
+              <a:t>6 / 18</a:t>
             </a:r>
             <a:endParaRPr lang="en-US" sz="900" dirty="0"/>
           </a:p>
@@ -11513,7 +11738,7 @@
                   <a:srgbClr val="556A8A"/>
                 </a:solidFill>
               </a:rPr>
-              <a:t>6 / 17</a:t>
+              <a:t>7 / 18</a:t>
             </a:r>
             <a:endParaRPr lang="en-US" sz="900" dirty="0"/>
           </a:p>
@@ -12321,7 +12546,7 @@
                   <a:srgbClr val="556A8A"/>
                 </a:solidFill>
               </a:rPr>
-              <a:t>7 / 17</a:t>
+              <a:t>8 / 18</a:t>
             </a:r>
             <a:endParaRPr lang="en-US" sz="900" dirty="0"/>
           </a:p>
@@ -12994,7 +13219,7 @@
                   <a:srgbClr val="556A8A"/>
                 </a:solidFill>
               </a:rPr>
-              <a:t>8 / 17</a:t>
+              <a:t>9 / 18</a:t>
             </a:r>
             <a:endParaRPr lang="en-US" sz="900" dirty="0"/>
           </a:p>
@@ -13894,7 +14119,7 @@
                   <a:srgbClr val="556A8A"/>
                 </a:solidFill>
               </a:rPr>
-              <a:t>9 / 17</a:t>
+              <a:t>10 / 18</a:t>
             </a:r>
             <a:endParaRPr lang="en-US" sz="900" dirty="0"/>
           </a:p>

--- a/userguide.pptx
+++ b/userguide.pptx
@@ -19,6 +19,7 @@
     <p:sldId id="265" r:id="rId11"/>
     <p:sldId id="269" r:id="rId20"/>
     <p:sldId id="271" r:id="rId22"/>
+    <p:sldId id="274" r:id="rId25"/>
     <p:sldId id="270" r:id="rId21"/>
     <p:sldId id="272" r:id="rId23"/>
     <p:sldId id="266" r:id="rId12"/>
@@ -2119,7 +2120,7 @@
                   <a:srgbClr val="C0C8D8"/>
                 </a:solidFill>
               </a:rPr>
-              <a:t xml:space="preserve">   |   Senior Financial Services Executive   |   2025</a:t>
+              <a:t xml:space="preserve">   |   Senior Financial Services Executive   |   2026</a:t>
             </a:r>
             <a:endParaRPr lang="en-US" sz="1100" dirty="0"/>
           </a:p>
@@ -2156,7 +2157,7 @@
                 </a:solidFill>
                 <a:hlinkClick r:id="rId3"/>
               </a:rPr>
-              <a:t>🔗  sami-jeddou-behavioral-portfolio-optimizer.streamlit.app</a:t>
+              <a:t>sami-jeddou-behavioral-portfolio-optimizer.streamlit.app</a:t>
             </a:r>
             <a:endParaRPr lang="en-US" sz="900" dirty="0"/>
           </a:p>
@@ -2200,6 +2201,1007 @@
 </file>
 
 <file path=ppt/slides/slide10.xml><?xml version="1.0" encoding="utf-8"?>
+<p:sld xmlns:a="http://schemas.openxmlformats.org/drawingml/2006/main" xmlns:r="http://schemas.openxmlformats.org/officeDocument/2006/relationships" xmlns:p="http://schemas.openxmlformats.org/presentationml/2006/main">
+  <p:cSld name="Slide 8">
+    <p:bg>
+      <p:bgPr>
+        <a:solidFill>
+          <a:srgbClr val="020C1B"/>
+        </a:solidFill>
+      </p:bgPr>
+    </p:bg>
+    <p:spTree>
+      <p:nvGrpSpPr>
+        <p:cNvPr id="1" name=""/>
+        <p:cNvGrpSpPr/>
+        <p:nvPr/>
+      </p:nvGrpSpPr>
+      <p:grpSpPr>
+        <a:xfrm>
+          <a:off x="0" y="0"/>
+          <a:ext cx="0" cy="0"/>
+          <a:chOff x="0" y="0"/>
+          <a:chExt cx="0" cy="0"/>
+        </a:xfrm>
+      </p:grpSpPr>
+      <p:sp>
+        <p:nvSpPr>
+          <p:cNvPr id="2" name="Shape 0"/>
+          <p:cNvSpPr/>
+          <p:nvPr/>
+        </p:nvSpPr>
+        <p:spPr>
+          <a:xfrm>
+            <a:off x="0" y="0"/>
+            <a:ext cx="9144000" cy="54864"/>
+          </a:xfrm>
+          <a:prstGeom prst="rect">
+            <a:avLst/>
+          </a:prstGeom>
+          <a:solidFill>
+            <a:srgbClr val="1A6BBF"/>
+          </a:solidFill>
+          <a:ln w="12700">
+            <a:solidFill>
+              <a:srgbClr val="1A6BBF"/>
+            </a:solidFill>
+            <a:prstDash val="solid"/>
+          </a:ln>
+        </p:spPr>
+        <p:txBody>
+          <a:bodyPr/>
+          <a:p/>
+        </p:txBody>
+      </p:sp>
+      <p:sp>
+        <p:nvSpPr>
+          <p:cNvPr id="3" name="Text 1"/>
+          <p:cNvSpPr/>
+          <p:nvPr/>
+        </p:nvSpPr>
+        <p:spPr>
+          <a:xfrm>
+            <a:off x="365760" y="164592"/>
+            <a:ext cx="8229600" cy="457200"/>
+          </a:xfrm>
+          <a:prstGeom prst="rect">
+            <a:avLst/>
+          </a:prstGeom>
+          <a:noFill/>
+          <a:ln/>
+        </p:spPr>
+        <p:txBody>
+          <a:bodyPr wrap="square" rtlCol="0" anchor="ctr"/>
+          <a:lstStyle/>
+          <a:p>
+            <a:pPr indent="0" marL="0">
+              <a:buNone/>
+            </a:pPr>
+            <a:r>
+              <a:rPr lang="en-US" sz="2200" b="1" dirty="0">
+                <a:solidFill>
+                  <a:srgbClr val="FFFFFF"/>
+                </a:solidFill>
+              </a:rPr>
+              <a:t>Reading the Chart</a:t>
+            </a:r>
+            <a:endParaRPr lang="en-US" sz="2200" dirty="0"/>
+          </a:p>
+        </p:txBody>
+      </p:sp>
+      <p:sp>
+        <p:nvSpPr>
+          <p:cNvPr id="6" name="Text 4"/>
+          <p:cNvSpPr/>
+          <p:nvPr/>
+        </p:nvSpPr>
+        <p:spPr>
+          <a:xfrm>
+            <a:off x="5669280" y="749808"/>
+            <a:ext cx="3200400" cy="320040"/>
+          </a:xfrm>
+          <a:prstGeom prst="rect">
+            <a:avLst/>
+          </a:prstGeom>
+          <a:noFill/>
+          <a:ln/>
+        </p:spPr>
+        <p:txBody>
+          <a:bodyPr wrap="square" rtlCol="0" anchor="ctr"/>
+          <a:lstStyle/>
+          <a:p>
+            <a:pPr indent="0" marL="0">
+              <a:buNone/>
+            </a:pPr>
+            <a:r>
+              <a:rPr lang="en-US" sz="1100" b="1" dirty="0">
+                <a:solidFill>
+                  <a:srgbClr val="4A9EFF"/>
+                </a:solidFill>
+              </a:rPr>
+              <a:t>Chart legend</a:t>
+            </a:r>
+            <a:endParaRPr lang="en-US" sz="1100" dirty="0"/>
+          </a:p>
+        </p:txBody>
+      </p:sp>
+      <p:sp>
+        <p:nvSpPr>
+          <p:cNvPr id="7" name="Shape 5"/>
+          <p:cNvSpPr/>
+          <p:nvPr/>
+        </p:nvSpPr>
+        <p:spPr>
+          <a:xfrm>
+            <a:off x="5669280" y="1115568"/>
+            <a:ext cx="164592" cy="201168"/>
+          </a:xfrm>
+          <a:prstGeom prst="rect">
+            <a:avLst/>
+          </a:prstGeom>
+          <a:solidFill>
+            <a:srgbClr val="7C3AED"/>
+          </a:solidFill>
+          <a:ln w="12700">
+            <a:solidFill>
+              <a:srgbClr val="7C3AED"/>
+            </a:solidFill>
+            <a:prstDash val="solid"/>
+          </a:ln>
+        </p:spPr>
+        <p:txBody>
+          <a:bodyPr/>
+          <a:p/>
+        </p:txBody>
+      </p:sp>
+      <p:sp>
+        <p:nvSpPr>
+          <p:cNvPr id="8" name="Text 6"/>
+          <p:cNvSpPr/>
+          <p:nvPr/>
+        </p:nvSpPr>
+        <p:spPr>
+          <a:xfrm>
+            <a:off x="5897880" y="1115568"/>
+            <a:ext cx="2926080" cy="201168"/>
+          </a:xfrm>
+          <a:prstGeom prst="rect">
+            <a:avLst/>
+          </a:prstGeom>
+          <a:noFill/>
+          <a:ln/>
+        </p:spPr>
+        <p:txBody>
+          <a:bodyPr wrap="square" lIns="0" tIns="0" rIns="0" bIns="0" rtlCol="0" anchor="ctr"/>
+          <a:lstStyle/>
+          <a:p>
+            <a:pPr indent="0" marL="0">
+              <a:buNone/>
+            </a:pPr>
+            <a:r>
+              <a:rPr lang="en-US" sz="900" b="1" dirty="0">
+                <a:solidFill>
+                  <a:srgbClr val="FFFFFF"/>
+                </a:solidFill>
+              </a:rPr>
+              <a:t>Purple dashed</a:t>
+            </a:r>
+            <a:endParaRPr lang="en-US" sz="900" dirty="0"/>
+          </a:p>
+        </p:txBody>
+      </p:sp>
+      <p:sp>
+        <p:nvSpPr>
+          <p:cNvPr id="9" name="Text 7"/>
+          <p:cNvSpPr/>
+          <p:nvPr/>
+        </p:nvSpPr>
+        <p:spPr>
+          <a:xfrm>
+            <a:off x="5897880" y="1298448"/>
+            <a:ext cx="2926080" cy="182880"/>
+          </a:xfrm>
+          <a:prstGeom prst="rect">
+            <a:avLst/>
+          </a:prstGeom>
+          <a:noFill/>
+          <a:ln/>
+        </p:spPr>
+        <p:txBody>
+          <a:bodyPr wrap="square" lIns="0" tIns="0" rIns="0" bIns="0" rtlCol="0" anchor="ctr"/>
+          <a:lstStyle/>
+          <a:p>
+            <a:pPr indent="0" marL="0">
+              <a:buNone/>
+            </a:pPr>
+            <a:r>
+              <a:rPr lang="en-US" sz="850" dirty="0">
+                <a:solidFill>
+                  <a:srgbClr val="556A8A"/>
+                </a:solidFill>
+              </a:rPr>
+              <a:t>Mean-variance efficient frontier (Markowitz)</a:t>
+            </a:r>
+            <a:endParaRPr lang="en-US" sz="850" dirty="0"/>
+          </a:p>
+        </p:txBody>
+      </p:sp>
+      <p:sp>
+        <p:nvSpPr>
+          <p:cNvPr id="10" name="Shape 8"/>
+          <p:cNvSpPr/>
+          <p:nvPr/>
+        </p:nvSpPr>
+        <p:spPr>
+          <a:xfrm>
+            <a:off x="5669280" y="1463040"/>
+            <a:ext cx="164592" cy="201168"/>
+          </a:xfrm>
+          <a:prstGeom prst="rect">
+            <a:avLst/>
+          </a:prstGeom>
+          <a:solidFill>
+            <a:srgbClr val="4A9EFF"/>
+          </a:solidFill>
+          <a:ln w="12700">
+            <a:solidFill>
+              <a:srgbClr val="4A9EFF"/>
+            </a:solidFill>
+            <a:prstDash val="solid"/>
+          </a:ln>
+        </p:spPr>
+        <p:txBody>
+          <a:bodyPr/>
+          <a:p/>
+        </p:txBody>
+      </p:sp>
+      <p:sp>
+        <p:nvSpPr>
+          <p:cNvPr id="11" name="Text 9"/>
+          <p:cNvSpPr/>
+          <p:nvPr/>
+        </p:nvSpPr>
+        <p:spPr>
+          <a:xfrm>
+            <a:off x="5897880" y="1463040"/>
+            <a:ext cx="2926080" cy="201168"/>
+          </a:xfrm>
+          <a:prstGeom prst="rect">
+            <a:avLst/>
+          </a:prstGeom>
+          <a:noFill/>
+          <a:ln/>
+        </p:spPr>
+        <p:txBody>
+          <a:bodyPr wrap="square" lIns="0" tIns="0" rIns="0" bIns="0" rtlCol="0" anchor="ctr"/>
+          <a:lstStyle/>
+          <a:p>
+            <a:pPr indent="0" marL="0">
+              <a:buNone/>
+            </a:pPr>
+            <a:r>
+              <a:rPr lang="en-US" sz="900" b="1" dirty="0">
+                <a:solidFill>
+                  <a:srgbClr val="FFFFFF"/>
+                </a:solidFill>
+              </a:rPr>
+              <a:t>Blue dots</a:t>
+            </a:r>
+            <a:endParaRPr lang="en-US" sz="900" dirty="0"/>
+          </a:p>
+        </p:txBody>
+      </p:sp>
+      <p:sp>
+        <p:nvSpPr>
+          <p:cNvPr id="12" name="Text 10"/>
+          <p:cNvSpPr/>
+          <p:nvPr/>
+        </p:nvSpPr>
+        <p:spPr>
+          <a:xfrm>
+            <a:off x="5897880" y="1645920"/>
+            <a:ext cx="2926080" cy="182880"/>
+          </a:xfrm>
+          <a:prstGeom prst="rect">
+            <a:avLst/>
+          </a:prstGeom>
+          <a:noFill/>
+          <a:ln/>
+        </p:spPr>
+        <p:txBody>
+          <a:bodyPr wrap="square" lIns="0" tIns="0" rIns="0" bIns="0" rtlCol="0" anchor="ctr"/>
+          <a:lstStyle/>
+          <a:p>
+            <a:pPr indent="0" marL="0">
+              <a:buNone/>
+            </a:pPr>
+            <a:r>
+              <a:rPr lang="en-US" sz="850" dirty="0">
+                <a:solidFill>
+                  <a:srgbClr val="556A8A"/>
+                </a:solidFill>
+              </a:rPr>
+              <a:t>Behavioural efficient frontier — no derivative</a:t>
+            </a:r>
+            <a:endParaRPr lang="en-US" sz="850" dirty="0"/>
+          </a:p>
+        </p:txBody>
+      </p:sp>
+      <p:sp>
+        <p:nvSpPr>
+          <p:cNvPr id="13" name="Shape 11"/>
+          <p:cNvSpPr/>
+          <p:nvPr/>
+        </p:nvSpPr>
+        <p:spPr>
+          <a:xfrm>
+            <a:off x="5669280" y="1810512"/>
+            <a:ext cx="164592" cy="201168"/>
+          </a:xfrm>
+          <a:prstGeom prst="rect">
+            <a:avLst/>
+          </a:prstGeom>
+          <a:solidFill>
+            <a:srgbClr val="F59E0B"/>
+          </a:solidFill>
+          <a:ln w="12700">
+            <a:solidFill>
+              <a:srgbClr val="F59E0B"/>
+            </a:solidFill>
+            <a:prstDash val="solid"/>
+          </a:ln>
+        </p:spPr>
+        <p:txBody>
+          <a:bodyPr/>
+          <a:p/>
+        </p:txBody>
+      </p:sp>
+      <p:sp>
+        <p:nvSpPr>
+          <p:cNvPr id="14" name="Text 12"/>
+          <p:cNvSpPr/>
+          <p:nvPr/>
+        </p:nvSpPr>
+        <p:spPr>
+          <a:xfrm>
+            <a:off x="5897880" y="1810512"/>
+            <a:ext cx="2926080" cy="201168"/>
+          </a:xfrm>
+          <a:prstGeom prst="rect">
+            <a:avLst/>
+          </a:prstGeom>
+          <a:noFill/>
+          <a:ln/>
+        </p:spPr>
+        <p:txBody>
+          <a:bodyPr wrap="square" lIns="0" tIns="0" rIns="0" bIns="0" rtlCol="0" anchor="ctr"/>
+          <a:lstStyle/>
+          <a:p>
+            <a:pPr indent="0" marL="0">
+              <a:buNone/>
+            </a:pPr>
+            <a:r>
+              <a:rPr lang="en-US" sz="900" b="1" dirty="0">
+                <a:solidFill>
+                  <a:srgbClr val="FFFFFF"/>
+                </a:solidFill>
+              </a:rPr>
+              <a:t>Gold squares</a:t>
+            </a:r>
+            <a:endParaRPr lang="en-US" sz="900" dirty="0"/>
+          </a:p>
+        </p:txBody>
+      </p:sp>
+      <p:sp>
+        <p:nvSpPr>
+          <p:cNvPr id="15" name="Text 13"/>
+          <p:cNvSpPr/>
+          <p:nvPr/>
+        </p:nvSpPr>
+        <p:spPr>
+          <a:xfrm>
+            <a:off x="5897880" y="1993392"/>
+            <a:ext cx="2926080" cy="182880"/>
+          </a:xfrm>
+          <a:prstGeom prst="rect">
+            <a:avLst/>
+          </a:prstGeom>
+          <a:noFill/>
+          <a:ln/>
+        </p:spPr>
+        <p:txBody>
+          <a:bodyPr wrap="square" lIns="0" tIns="0" rIns="0" bIns="0" rtlCol="0" anchor="ctr"/>
+          <a:lstStyle/>
+          <a:p>
+            <a:pPr indent="0" marL="0">
+              <a:buNone/>
+            </a:pPr>
+            <a:r>
+              <a:rPr lang="en-US" sz="850" dirty="0">
+                <a:solidFill>
+                  <a:srgbClr val="556A8A"/>
+                </a:solidFill>
+              </a:rPr>
+              <a:t>Behavioural optimum — derivative frontier</a:t>
+            </a:r>
+            <a:endParaRPr lang="en-US" sz="850" dirty="0"/>
+          </a:p>
+        </p:txBody>
+      </p:sp>
+      <p:sp>
+        <p:nvSpPr>
+          <p:cNvPr id="16" name="Shape 14"/>
+          <p:cNvSpPr/>
+          <p:nvPr/>
+        </p:nvSpPr>
+        <p:spPr>
+          <a:xfrm>
+            <a:off x="5669280" y="2157984"/>
+            <a:ext cx="164592" cy="201168"/>
+          </a:xfrm>
+          <a:prstGeom prst="rect">
+            <a:avLst/>
+          </a:prstGeom>
+          <a:solidFill>
+            <a:srgbClr val="10B981"/>
+          </a:solidFill>
+          <a:ln w="12700">
+            <a:solidFill>
+              <a:srgbClr val="10B981"/>
+            </a:solidFill>
+            <a:prstDash val="solid"/>
+          </a:ln>
+        </p:spPr>
+        <p:txBody>
+          <a:bodyPr/>
+          <a:p/>
+        </p:txBody>
+      </p:sp>
+      <p:sp>
+        <p:nvSpPr>
+          <p:cNvPr id="17" name="Text 15"/>
+          <p:cNvSpPr/>
+          <p:nvPr/>
+        </p:nvSpPr>
+        <p:spPr>
+          <a:xfrm>
+            <a:off x="5897880" y="2157984"/>
+            <a:ext cx="2926080" cy="201168"/>
+          </a:xfrm>
+          <a:prstGeom prst="rect">
+            <a:avLst/>
+          </a:prstGeom>
+          <a:noFill/>
+          <a:ln/>
+        </p:spPr>
+        <p:txBody>
+          <a:bodyPr wrap="square" lIns="0" tIns="0" rIns="0" bIns="0" rtlCol="0" anchor="ctr"/>
+          <a:lstStyle/>
+          <a:p>
+            <a:pPr indent="0" marL="0">
+              <a:buNone/>
+            </a:pPr>
+            <a:r>
+              <a:rPr lang="en-US" sz="900" b="1" dirty="0">
+                <a:solidFill>
+                  <a:srgbClr val="FFFFFF"/>
+                </a:solidFill>
+              </a:rPr>
+              <a:t>Green diamond</a:t>
+            </a:r>
+            <a:endParaRPr lang="en-US" sz="900" dirty="0"/>
+          </a:p>
+        </p:txBody>
+      </p:sp>
+      <p:sp>
+        <p:nvSpPr>
+          <p:cNvPr id="18" name="Text 16"/>
+          <p:cNvSpPr/>
+          <p:nvPr/>
+        </p:nvSpPr>
+        <p:spPr>
+          <a:xfrm>
+            <a:off x="5897880" y="2340864"/>
+            <a:ext cx="2926080" cy="182880"/>
+          </a:xfrm>
+          <a:prstGeom prst="rect">
+            <a:avLst/>
+          </a:prstGeom>
+          <a:noFill/>
+          <a:ln/>
+        </p:spPr>
+        <p:txBody>
+          <a:bodyPr wrap="square" lIns="0" tIns="0" rIns="0" bIns="0" rtlCol="0" anchor="ctr"/>
+          <a:lstStyle/>
+          <a:p>
+            <a:pPr indent="0" marL="0">
+              <a:buNone/>
+            </a:pPr>
+            <a:r>
+              <a:rPr lang="en-US" sz="850" dirty="0">
+                <a:solidFill>
+                  <a:srgbClr val="556A8A"/>
+                </a:solidFill>
+              </a:rPr>
+              <a:t>Portfolio (1) — no derivative optimum</a:t>
+            </a:r>
+            <a:endParaRPr lang="en-US" sz="850" dirty="0"/>
+          </a:p>
+        </p:txBody>
+      </p:sp>
+      <p:sp>
+        <p:nvSpPr>
+          <p:cNvPr id="19" name="Shape 17"/>
+          <p:cNvSpPr/>
+          <p:nvPr/>
+        </p:nvSpPr>
+        <p:spPr>
+          <a:xfrm>
+            <a:off x="5669280" y="2505456"/>
+            <a:ext cx="164592" cy="201168"/>
+          </a:xfrm>
+          <a:prstGeom prst="rect">
+            <a:avLst/>
+          </a:prstGeom>
+          <a:solidFill>
+            <a:srgbClr val="F59E0B"/>
+          </a:solidFill>
+          <a:ln w="12700">
+            <a:solidFill>
+              <a:srgbClr val="F59E0B"/>
+            </a:solidFill>
+            <a:prstDash val="solid"/>
+          </a:ln>
+        </p:spPr>
+        <p:txBody>
+          <a:bodyPr/>
+          <a:p/>
+        </p:txBody>
+      </p:sp>
+      <p:sp>
+        <p:nvSpPr>
+          <p:cNvPr id="20" name="Text 18"/>
+          <p:cNvSpPr/>
+          <p:nvPr/>
+        </p:nvSpPr>
+        <p:spPr>
+          <a:xfrm>
+            <a:off x="5897880" y="2505456"/>
+            <a:ext cx="2926080" cy="201168"/>
+          </a:xfrm>
+          <a:prstGeom prst="rect">
+            <a:avLst/>
+          </a:prstGeom>
+          <a:noFill/>
+          <a:ln/>
+        </p:spPr>
+        <p:txBody>
+          <a:bodyPr wrap="square" lIns="0" tIns="0" rIns="0" bIns="0" rtlCol="0" anchor="ctr"/>
+          <a:lstStyle/>
+          <a:p>
+            <a:pPr indent="0" marL="0">
+              <a:buNone/>
+            </a:pPr>
+            <a:r>
+              <a:rPr lang="en-US" sz="900" b="1" dirty="0">
+                <a:solidFill>
+                  <a:srgbClr val="FFFFFF"/>
+                </a:solidFill>
+              </a:rPr>
+              <a:t>Orange square</a:t>
+            </a:r>
+            <a:endParaRPr lang="en-US" sz="900" dirty="0"/>
+          </a:p>
+        </p:txBody>
+      </p:sp>
+      <p:sp>
+        <p:nvSpPr>
+          <p:cNvPr id="21" name="Text 19"/>
+          <p:cNvSpPr/>
+          <p:nvPr/>
+        </p:nvSpPr>
+        <p:spPr>
+          <a:xfrm>
+            <a:off x="5897880" y="2688336"/>
+            <a:ext cx="2926080" cy="182880"/>
+          </a:xfrm>
+          <a:prstGeom prst="rect">
+            <a:avLst/>
+          </a:prstGeom>
+          <a:noFill/>
+          <a:ln/>
+        </p:spPr>
+        <p:txBody>
+          <a:bodyPr wrap="square" lIns="0" tIns="0" rIns="0" bIns="0" rtlCol="0" anchor="ctr"/>
+          <a:lstStyle/>
+          <a:p>
+            <a:pPr indent="0" marL="0">
+              <a:buNone/>
+            </a:pPr>
+            <a:r>
+              <a:rPr lang="en-US" sz="850" dirty="0">
+                <a:solidFill>
+                  <a:srgbClr val="556A8A"/>
+                </a:solidFill>
+              </a:rPr>
+              <a:t>Portfolio (2) — with derivative, same λ</a:t>
+            </a:r>
+            <a:endParaRPr lang="en-US" sz="850" dirty="0"/>
+          </a:p>
+        </p:txBody>
+      </p:sp>
+      <p:sp>
+        <p:nvSpPr>
+          <p:cNvPr id="22" name="Shape 20"/>
+          <p:cNvSpPr/>
+          <p:nvPr/>
+        </p:nvSpPr>
+        <p:spPr>
+          <a:xfrm>
+            <a:off x="5669280" y="2852928"/>
+            <a:ext cx="164592" cy="201168"/>
+          </a:xfrm>
+          <a:prstGeom prst="rect">
+            <a:avLst/>
+          </a:prstGeom>
+          <a:solidFill>
+            <a:srgbClr val="E76F51"/>
+          </a:solidFill>
+          <a:ln w="12700">
+            <a:solidFill>
+              <a:srgbClr val="E76F51"/>
+            </a:solidFill>
+            <a:prstDash val="solid"/>
+          </a:ln>
+        </p:spPr>
+        <p:txBody>
+          <a:bodyPr/>
+          <a:p/>
+        </p:txBody>
+      </p:sp>
+      <p:sp>
+        <p:nvSpPr>
+          <p:cNvPr id="23" name="Text 21"/>
+          <p:cNvSpPr/>
+          <p:nvPr/>
+        </p:nvSpPr>
+        <p:spPr>
+          <a:xfrm>
+            <a:off x="5897880" y="2852928"/>
+            <a:ext cx="2926080" cy="201168"/>
+          </a:xfrm>
+          <a:prstGeom prst="rect">
+            <a:avLst/>
+          </a:prstGeom>
+          <a:noFill/>
+          <a:ln/>
+        </p:spPr>
+        <p:txBody>
+          <a:bodyPr wrap="square" lIns="0" tIns="0" rIns="0" bIns="0" rtlCol="0" anchor="ctr"/>
+          <a:lstStyle/>
+          <a:p>
+            <a:pPr indent="0" marL="0">
+              <a:buNone/>
+            </a:pPr>
+            <a:r>
+              <a:rPr lang="en-US" sz="900" b="1" dirty="0">
+                <a:solidFill>
+                  <a:srgbClr val="FFFFFF"/>
+                </a:solidFill>
+              </a:rPr>
+              <a:t>Coral star</a:t>
+            </a:r>
+            <a:endParaRPr lang="en-US" sz="900" dirty="0"/>
+          </a:p>
+        </p:txBody>
+      </p:sp>
+      <p:sp>
+        <p:nvSpPr>
+          <p:cNvPr id="24" name="Text 22"/>
+          <p:cNvSpPr/>
+          <p:nvPr/>
+        </p:nvSpPr>
+        <p:spPr>
+          <a:xfrm>
+            <a:off x="5897880" y="3035808"/>
+            <a:ext cx="2926080" cy="182880"/>
+          </a:xfrm>
+          <a:prstGeom prst="rect">
+            <a:avLst/>
+          </a:prstGeom>
+          <a:noFill/>
+          <a:ln/>
+        </p:spPr>
+        <p:txBody>
+          <a:bodyPr wrap="square" lIns="0" tIns="0" rIns="0" bIns="0" rtlCol="0" anchor="ctr"/>
+          <a:lstStyle/>
+          <a:p>
+            <a:pPr indent="0" marL="0">
+              <a:buNone/>
+            </a:pPr>
+            <a:r>
+              <a:rPr lang="en-US" sz="850" dirty="0">
+                <a:solidFill>
+                  <a:srgbClr val="556A8A"/>
+                </a:solidFill>
+              </a:rPr>
+              <a:t>Portfolio (3) — same variance as P(1)</a:t>
+            </a:r>
+            <a:endParaRPr lang="en-US" sz="850" dirty="0"/>
+          </a:p>
+        </p:txBody>
+      </p:sp>
+      <p:sp>
+        <p:nvSpPr>
+          <p:cNvPr id="25" name="Shape 23"/>
+          <p:cNvSpPr/>
+          <p:nvPr/>
+        </p:nvSpPr>
+        <p:spPr>
+          <a:xfrm>
+            <a:off x="365760" y="4078224"/>
+            <a:ext cx="8412480" cy="658368"/>
+          </a:xfrm>
+          <a:prstGeom prst="rect">
+            <a:avLst/>
+          </a:prstGeom>
+          <a:solidFill>
+            <a:srgbClr val="0D1A2E"/>
+          </a:solidFill>
+          <a:ln w="10160">
+            <a:solidFill>
+              <a:srgbClr val="1A6BBF"/>
+            </a:solidFill>
+            <a:prstDash val="solid"/>
+          </a:ln>
+        </p:spPr>
+        <p:txBody>
+          <a:bodyPr/>
+          <a:p/>
+        </p:txBody>
+      </p:sp>
+      <p:sp>
+        <p:nvSpPr>
+          <p:cNvPr id="26" name="Text 24"/>
+          <p:cNvSpPr/>
+          <p:nvPr/>
+        </p:nvSpPr>
+        <p:spPr>
+          <a:xfrm>
+            <a:off x="502920" y="4078224"/>
+            <a:ext cx="8229600" cy="658368"/>
+          </a:xfrm>
+          <a:prstGeom prst="rect">
+            <a:avLst/>
+          </a:prstGeom>
+          <a:noFill/>
+          <a:ln/>
+        </p:spPr>
+        <p:txBody>
+          <a:bodyPr wrap="square" rtlCol="0" anchor="ctr"/>
+          <a:lstStyle/>
+          <a:p>
+            <a:pPr algn="ctr" indent="0" marL="0">
+              <a:buNone/>
+            </a:pPr>
+            <a:r>
+              <a:rPr lang="en-US" sz="950" dirty="0">
+                <a:solidFill>
+                  <a:srgbClr val="C0C8D8"/>
+                </a:solidFill>
+              </a:rPr>
+              <a:t>X-axis: Portfolio Risk (Standard Deviation %)   |   Y-axis: Expected Return (%)</a:t>
+            </a:r>
+            <a:endParaRPr lang="en-US" sz="950" dirty="0"/>
+          </a:p>
+        </p:txBody>
+      </p:sp>
+      <p:sp>
+        <p:nvSpPr>
+          <p:cNvPr id="27" name="Text 25"/>
+          <p:cNvSpPr/>
+          <p:nvPr/>
+        </p:nvSpPr>
+        <p:spPr>
+          <a:xfrm>
+            <a:off x="8046720" y="4754880"/>
+            <a:ext cx="914400" cy="274320"/>
+          </a:xfrm>
+          <a:prstGeom prst="rect">
+            <a:avLst/>
+          </a:prstGeom>
+          <a:noFill/>
+          <a:ln/>
+        </p:spPr>
+        <p:txBody>
+          <a:bodyPr wrap="square" rtlCol="0" anchor="ctr"/>
+          <a:lstStyle/>
+          <a:p>
+            <a:pPr algn="r" indent="0" marL="0">
+              <a:buNone/>
+            </a:pPr>
+            <a:r>
+              <a:rPr lang="en-US" sz="900" dirty="0">
+                <a:solidFill>
+                  <a:srgbClr val="556A8A"/>
+                </a:solidFill>
+              </a:rPr>
+              <a:t>10 / 19</a:t>
+            </a:r>
+            <a:endParaRPr lang="en-US" sz="900" dirty="0"/>
+          </a:p>
+        </p:txBody>
+      </p:sp>
+      <p:sp>
+        <p:nvSpPr>
+          <p:cNvPr id="28" name="Text 26"/>
+          <p:cNvSpPr/>
+          <p:nvPr/>
+        </p:nvSpPr>
+        <p:spPr>
+          <a:xfrm>
+            <a:off x="365760" y="4754880"/>
+            <a:ext cx="6400800" cy="274320"/>
+          </a:xfrm>
+          <a:prstGeom prst="rect">
+            <a:avLst/>
+          </a:prstGeom>
+          <a:noFill/>
+          <a:ln/>
+        </p:spPr>
+        <p:txBody>
+          <a:bodyPr wrap="square" rtlCol="0" anchor="ctr"/>
+          <a:lstStyle/>
+          <a:p>
+            <a:pPr algn="l" indent="0" marL="0">
+              <a:buNone/>
+            </a:pPr>
+            <a:r>
+              <a:rPr lang="en-US" sz="900" dirty="0">
+                <a:solidFill>
+                  <a:srgbClr val="556A8A"/>
+                </a:solidFill>
+              </a:rPr>
+              <a:t>Beyond Mean-Variance Portfolio Optimiser — User Guide</a:t>
+            </a:r>
+            <a:endParaRPr lang="en-US" sz="900" dirty="0"/>
+          </a:p>
+        </p:txBody>
+      </p:sp>
+      <p:sp>
+        <p:nvSpPr>
+          <p:cNvPr id="30" name="Swatch P0"/>
+          <p:cNvSpPr/>
+          <p:nvPr/>
+        </p:nvSpPr>
+        <p:spPr>
+          <a:xfrm>
+            <a:off x="5669280" y="3200400"/>
+            <a:ext cx="164592" cy="201168"/>
+          </a:xfrm>
+          <a:prstGeom prst="rect">
+            <a:avLst/>
+          </a:prstGeom>
+          <a:solidFill>
+            <a:srgbClr val="A855F7"/>
+          </a:solidFill>
+          <a:ln w="12700">
+            <a:solidFill>
+              <a:srgbClr val="A855F7"/>
+            </a:solidFill>
+            <a:prstDash val="solid"/>
+          </a:ln>
+        </p:spPr>
+        <p:txBody>
+          <a:bodyPr/>
+          <a:p/>
+        </p:txBody>
+      </p:sp>
+      <p:sp>
+        <p:nvSpPr>
+          <p:cNvPr id="31" name="Text P0"/>
+          <p:cNvSpPr/>
+          <p:nvPr/>
+        </p:nvSpPr>
+        <p:spPr>
+          <a:xfrm>
+            <a:off x="5897880" y="3200400"/>
+            <a:ext cx="2926080" cy="201168"/>
+          </a:xfrm>
+          <a:prstGeom prst="rect">
+            <a:avLst/>
+          </a:prstGeom>
+          <a:noFill/>
+          <a:ln/>
+        </p:spPr>
+        <p:txBody>
+          <a:bodyPr wrap="square" lIns="0" tIns="0" rIns="0" bIns="0" rtlCol="0" anchor="ctr"/>
+          <a:lstStyle/>
+          <a:p>
+            <a:pPr indent="0" marL="0">
+              <a:buNone/>
+            </a:pPr>
+            <a:r>
+              <a:rPr lang="en-US" sz="900" b="1" dirty="0">
+                <a:solidFill>
+                  <a:srgbClr val="FFFFFF"/>
+                </a:solidFill>
+              </a:rPr>
+              <a:t>Magenta circle</a:t>
+            </a:r>
+            <a:endParaRPr lang="en-US" sz="900" dirty="0"/>
+          </a:p>
+        </p:txBody>
+      </p:sp>
+      <p:sp>
+        <p:nvSpPr>
+          <p:cNvPr id="32" name="Desc P0"/>
+          <p:cNvSpPr/>
+          <p:nvPr/>
+        </p:nvSpPr>
+        <p:spPr>
+          <a:xfrm>
+            <a:off x="5897880" y="3383280"/>
+            <a:ext cx="2926080" cy="182880"/>
+          </a:xfrm>
+          <a:prstGeom prst="rect">
+            <a:avLst/>
+          </a:prstGeom>
+          <a:noFill/>
+          <a:ln/>
+        </p:spPr>
+        <p:txBody>
+          <a:bodyPr wrap="square" lIns="0" tIns="0" rIns="0" bIns="0" rtlCol="0" anchor="ctr"/>
+          <a:lstStyle/>
+          <a:p>
+            <a:pPr indent="0" marL="0">
+              <a:buNone/>
+            </a:pPr>
+            <a:r>
+              <a:rPr lang="en-US" sz="850" dirty="0">
+                <a:solidFill>
+                  <a:srgbClr val="556A8A"/>
+                </a:solidFill>
+              </a:rPr>
+              <a:t>Portfolio (0) — Markowitz MV optimum</a:t>
+            </a:r>
+            <a:endParaRPr lang="en-US" sz="850" dirty="0"/>
+          </a:p>
+        </p:txBody>
+      </p:sp>
+      <p:pic>
+        <p:nvPicPr>
+          <p:cNvPr id="33" name="Picture 32" descr="chart.png"/>
+          <p:cNvPicPr>
+            <a:picLocks noChangeAspect="1"/>
+          </p:cNvPicPr>
+          <p:nvPr/>
+        </p:nvPicPr>
+        <p:blipFill>
+          <a:blip r:embed="rId4"/>
+          <a:stretch>
+            <a:fillRect/>
+          </a:stretch>
+        </p:blipFill>
+        <p:spPr>
+          <a:xfrm>
+            <a:off x="365760" y="1376493"/>
+            <a:ext cx="5120640" cy="1958666"/>
+          </a:xfrm>
+          <a:prstGeom prst="rect">
+            <a:avLst/>
+          </a:prstGeom>
+        </p:spPr>
+      </p:pic>
+    </p:spTree>
+  </p:cSld>
+  <p:clrMapOvr>
+    <a:masterClrMapping/>
+  </p:clrMapOvr>
+</p:sld>
+</file>
+
+<file path=ppt/slides/slide11.xml><?xml version="1.0" encoding="utf-8"?>
 <p:sld xmlns:a="http://schemas.openxmlformats.org/drawingml/2006/main" xmlns:r="http://schemas.openxmlformats.org/officeDocument/2006/relationships" xmlns:p="http://schemas.openxmlformats.org/presentationml/2006/main">
   <p:cSld name="Slide 9">
     <p:bg>
@@ -2589,7 +3591,7 @@
                   <a:srgbClr val="556A8A"/>
                 </a:solidFill>
               </a:rPr>
-              <a:t>11 / 18</a:t>
+              <a:t>11 / 19</a:t>
             </a:r>
             <a:endParaRPr lang="en-US" sz="900" dirty="0"/>
           </a:p>
@@ -2633,22 +3635,22 @@
       </p:sp>
       <p:pic>
         <p:nvPicPr>
-          <p:cNvPr id="14" name="Picture 13" descr="slide9results.png"/>
+          <p:cNvPr id="14" name="Picture 13" descr="results.png"/>
           <p:cNvPicPr>
             <a:picLocks noChangeAspect="1"/>
           </p:cNvPicPr>
           <p:nvPr/>
         </p:nvPicPr>
         <p:blipFill>
-          <a:blip r:embed="rId3"/>
+          <a:blip r:embed="rId4"/>
           <a:stretch>
             <a:fillRect/>
           </a:stretch>
         </p:blipFill>
         <p:spPr>
           <a:xfrm>
-            <a:off x="3555669" y="749808"/>
-            <a:ext cx="2032661" cy="2286000"/>
+            <a:off x="640080" y="914400"/>
+            <a:ext cx="7863840" cy="1447521"/>
           </a:xfrm>
           <a:prstGeom prst="rect">
             <a:avLst/>
@@ -2663,7 +3665,7 @@
 </p:sld>
 </file>
 
-<file path=ppt/slides/slide11.xml><?xml version="1.0" encoding="utf-8"?>
+<file path=ppt/slides/slide12.xml><?xml version="1.0" encoding="utf-8"?>
 <p:sld xmlns:a="http://schemas.openxmlformats.org/drawingml/2006/main" xmlns:r="http://schemas.openxmlformats.org/officeDocument/2006/relationships" xmlns:p="http://schemas.openxmlformats.org/presentationml/2006/main">
   <p:cSld name="Slide 10">
     <p:bg>
@@ -3118,7 +4120,7 @@
                   <a:srgbClr val="556A8A"/>
                 </a:solidFill>
               </a:rPr>
-              <a:t>12 / 18</a:t>
+              <a:t>12 / 19</a:t>
             </a:r>
             <a:endParaRPr lang="en-US" sz="900" dirty="0"/>
           </a:p>
@@ -3162,22 +4164,22 @@
       </p:sp>
       <p:pic>
         <p:nvPicPr>
-          <p:cNvPr id="16" name="Picture 15" descr="Slide10pdf.png"/>
+          <p:cNvPr id="16" name="Picture 15" descr="pdf_export.png"/>
           <p:cNvPicPr>
             <a:picLocks noChangeAspect="1"/>
           </p:cNvPicPr>
           <p:nvPr/>
         </p:nvPicPr>
         <p:blipFill>
-          <a:blip r:embed="rId3"/>
+          <a:blip r:embed="rId4"/>
           <a:stretch>
             <a:fillRect/>
           </a:stretch>
         </p:blipFill>
         <p:spPr>
           <a:xfrm>
-            <a:off x="365760" y="1949164"/>
-            <a:ext cx="5120640" cy="801687"/>
+            <a:off x="548855" y="1949164"/>
+            <a:ext cx="4754449" cy="801687"/>
           </a:xfrm>
           <a:prstGeom prst="rect">
             <a:avLst/>
@@ -3192,7 +4194,7 @@
 </p:sld>
 </file>
 
-<file path=ppt/slides/slide12.xml><?xml version="1.0" encoding="utf-8"?>
+<file path=ppt/slides/slide13.xml><?xml version="1.0" encoding="utf-8"?>
 <p:sld xmlns:a="http://schemas.openxmlformats.org/drawingml/2006/main" xmlns:r="http://schemas.openxmlformats.org/officeDocument/2006/relationships" xmlns:p="http://schemas.openxmlformats.org/presentationml/2006/main">
   <p:cSld name="Slide 2">
     <p:bg>
@@ -3319,42 +4321,6 @@
       </p:sp>
       <p:sp>
         <p:nvSpPr>
-          <p:cNvPr id="5" name="Text 3"/>
-          <p:cNvSpPr/>
-          <p:nvPr/>
-        </p:nvSpPr>
-        <p:spPr>
-          <a:xfrm>
-            <a:off x="365760" y="960120"/>
-            <a:ext cx="2651760" cy="502920"/>
-          </a:xfrm>
-          <a:prstGeom prst="rect">
-            <a:avLst/>
-          </a:prstGeom>
-          <a:noFill/>
-          <a:ln/>
-        </p:spPr>
-        <p:txBody>
-          <a:bodyPr wrap="square" rtlCol="0" anchor="ctr"/>
-          <a:lstStyle/>
-          <a:p>
-            <a:pPr algn="ctr" indent="0" marL="0">
-              <a:buNone/>
-            </a:pPr>
-            <a:r>
-              <a:rPr lang="en-US" sz="2200" dirty="0">
-                <a:solidFill>
-                  <a:srgbClr val="000000"/>
-                </a:solidFill>
-              </a:rPr>
-              <a:t>🧮</a:t>
-            </a:r>
-            <a:endParaRPr lang="en-US" sz="2200" dirty="0"/>
-          </a:p>
-        </p:txBody>
-      </p:sp>
-      <p:sp>
-        <p:nvSpPr>
           <p:cNvPr id="6" name="Text 4"/>
           <p:cNvSpPr/>
           <p:nvPr/>
@@ -3463,42 +4429,6 @@
       </p:sp>
       <p:sp>
         <p:nvSpPr>
-          <p:cNvPr id="9" name="Text 7"/>
-          <p:cNvSpPr/>
-          <p:nvPr/>
-        </p:nvSpPr>
-        <p:spPr>
-          <a:xfrm>
-            <a:off x="3200400" y="960120"/>
-            <a:ext cx="2651760" cy="502920"/>
-          </a:xfrm>
-          <a:prstGeom prst="rect">
-            <a:avLst/>
-          </a:prstGeom>
-          <a:noFill/>
-          <a:ln/>
-        </p:spPr>
-        <p:txBody>
-          <a:bodyPr wrap="square" rtlCol="0" anchor="ctr"/>
-          <a:lstStyle/>
-          <a:p>
-            <a:pPr algn="ctr" indent="0" marL="0">
-              <a:buNone/>
-            </a:pPr>
-            <a:r>
-              <a:rPr lang="en-US" sz="2200" dirty="0">
-                <a:solidFill>
-                  <a:srgbClr val="000000"/>
-                </a:solidFill>
-              </a:rPr>
-              <a:t>📐</a:t>
-            </a:r>
-            <a:endParaRPr lang="en-US" sz="2200" dirty="0"/>
-          </a:p>
-        </p:txBody>
-      </p:sp>
-      <p:sp>
-        <p:nvSpPr>
           <p:cNvPr id="10" name="Text 8"/>
           <p:cNvSpPr/>
           <p:nvPr/>
@@ -3607,42 +4537,6 @@
       </p:sp>
       <p:sp>
         <p:nvSpPr>
-          <p:cNvPr id="13" name="Text 11"/>
-          <p:cNvSpPr/>
-          <p:nvPr/>
-        </p:nvSpPr>
-        <p:spPr>
-          <a:xfrm>
-            <a:off x="6035040" y="960120"/>
-            <a:ext cx="2651760" cy="502920"/>
-          </a:xfrm>
-          <a:prstGeom prst="rect">
-            <a:avLst/>
-          </a:prstGeom>
-          <a:noFill/>
-          <a:ln/>
-        </p:spPr>
-        <p:txBody>
-          <a:bodyPr wrap="square" rtlCol="0" anchor="ctr"/>
-          <a:lstStyle/>
-          <a:p>
-            <a:pPr algn="ctr" indent="0" marL="0">
-              <a:buNone/>
-            </a:pPr>
-            <a:r>
-              <a:rPr lang="en-US" sz="2200" dirty="0">
-                <a:solidFill>
-                  <a:srgbClr val="000000"/>
-                </a:solidFill>
-              </a:rPr>
-              <a:t>📈</a:t>
-            </a:r>
-            <a:endParaRPr lang="en-US" sz="2200" dirty="0"/>
-          </a:p>
-        </p:txBody>
-      </p:sp>
-      <p:sp>
-        <p:nvSpPr>
           <p:cNvPr id="14" name="Text 12"/>
           <p:cNvSpPr/>
           <p:nvPr/>
@@ -4225,7 +5119,7 @@
                   <a:srgbClr val="556A8A"/>
                 </a:solidFill>
               </a:rPr>
-              <a:t>13 / 18</a:t>
+              <a:t>13 / 19</a:t>
             </a:r>
             <a:endParaRPr lang="en-US" sz="900" dirty="0"/>
           </a:p>
@@ -4267,6 +5161,78 @@
           </a:p>
         </p:txBody>
       </p:sp>
+      <p:pic>
+        <p:nvPicPr>
+          <p:cNvPr id="32" name="Picture 31" descr="grid3_4a9eff_0.png"/>
+          <p:cNvPicPr>
+            <a:picLocks noChangeAspect="1"/>
+          </p:cNvPicPr>
+          <p:nvPr/>
+        </p:nvPicPr>
+        <p:blipFill>
+          <a:blip r:embed="rId2"/>
+          <a:stretch>
+            <a:fillRect/>
+          </a:stretch>
+        </p:blipFill>
+        <p:spPr>
+          <a:xfrm>
+            <a:off x="1577340" y="1097280"/>
+            <a:ext cx="228600" cy="228600"/>
+          </a:xfrm>
+          <a:prstGeom prst="rect">
+            <a:avLst/>
+          </a:prstGeom>
+        </p:spPr>
+      </p:pic>
+      <p:pic>
+        <p:nvPicPr>
+          <p:cNvPr id="33" name="Picture 32" descr="ruler_4a9eff_0.png"/>
+          <p:cNvPicPr>
+            <a:picLocks noChangeAspect="1"/>
+          </p:cNvPicPr>
+          <p:nvPr/>
+        </p:nvPicPr>
+        <p:blipFill>
+          <a:blip r:embed="rId3"/>
+          <a:stretch>
+            <a:fillRect/>
+          </a:stretch>
+        </p:blipFill>
+        <p:spPr>
+          <a:xfrm>
+            <a:off x="4411980" y="1097280"/>
+            <a:ext cx="228600" cy="228600"/>
+          </a:xfrm>
+          <a:prstGeom prst="rect">
+            <a:avLst/>
+          </a:prstGeom>
+        </p:spPr>
+      </p:pic>
+      <p:pic>
+        <p:nvPicPr>
+          <p:cNvPr id="34" name="Picture 33" descr="trending_4a9eff_0.png"/>
+          <p:cNvPicPr>
+            <a:picLocks noChangeAspect="1"/>
+          </p:cNvPicPr>
+          <p:nvPr/>
+        </p:nvPicPr>
+        <p:blipFill>
+          <a:blip r:embed="rId4"/>
+          <a:stretch>
+            <a:fillRect/>
+          </a:stretch>
+        </p:blipFill>
+        <p:spPr>
+          <a:xfrm>
+            <a:off x="7246620" y="1097280"/>
+            <a:ext cx="228600" cy="228600"/>
+          </a:xfrm>
+          <a:prstGeom prst="rect">
+            <a:avLst/>
+          </a:prstGeom>
+        </p:spPr>
+      </p:pic>
     </p:spTree>
   </p:cSld>
   <p:clrMapOvr>
@@ -4275,7 +5241,7 @@
 </p:sld>
 </file>
 
-<file path=ppt/slides/slide13.xml><?xml version="1.0" encoding="utf-8"?>
+<file path=ppt/slides/slide14.xml><?xml version="1.0" encoding="utf-8"?>
 <p:sld xmlns:a="http://schemas.openxmlformats.org/drawingml/2006/main" xmlns:r="http://schemas.openxmlformats.org/officeDocument/2006/relationships" xmlns:p="http://schemas.openxmlformats.org/presentationml/2006/main">
   <p:cSld name="Slide 8">
     <p:bg>
@@ -4394,7 +5360,7 @@
                   <a:srgbClr val="556A8A"/>
                 </a:solidFill>
               </a:rPr>
-              <a:t>14 / 18</a:t>
+              <a:t>14 / 19</a:t>
             </a:r>
             <a:endParaRPr lang="en-US" sz="900" dirty="0"/>
           </a:p>
@@ -4436,30 +5402,6 @@
           </a:p>
         </p:txBody>
       </p:sp>
-      <p:pic>
-        <p:nvPicPr>
-          <p:cNvPr id="29" name="Picture 28" descr="Slide8chart.png"/>
-          <p:cNvPicPr>
-            <a:picLocks noChangeAspect="1"/>
-          </p:cNvPicPr>
-          <p:nvPr/>
-        </p:nvPicPr>
-        <p:blipFill>
-          <a:blip r:embed="rId3"/>
-          <a:stretch>
-            <a:fillRect/>
-          </a:stretch>
-        </p:blipFill>
-        <p:spPr>
-          <a:xfrm>
-            <a:off x="365760" y="1095744"/>
-            <a:ext cx="5120640" cy="2526650"/>
-          </a:xfrm>
-          <a:prstGeom prst="rect">
-            <a:avLst/>
-          </a:prstGeom>
-        </p:spPr>
-      </p:pic>
       <p:sp>
         <p:nvSpPr>
           <p:cNvPr id="40" name="Cmt box"/>
@@ -4588,6 +5530,30 @@
           </a:p>
         </p:txBody>
       </p:sp>
+      <p:pic>
+        <p:nvPicPr>
+          <p:cNvPr id="42" name="Picture 41" descr="scalable_output.png"/>
+          <p:cNvPicPr>
+            <a:picLocks noChangeAspect="1"/>
+          </p:cNvPicPr>
+          <p:nvPr/>
+        </p:nvPicPr>
+        <p:blipFill>
+          <a:blip r:embed="rId2"/>
+          <a:stretch>
+            <a:fillRect/>
+          </a:stretch>
+        </p:blipFill>
+        <p:spPr>
+          <a:xfrm>
+            <a:off x="365760" y="1377377"/>
+            <a:ext cx="5120640" cy="1963383"/>
+          </a:xfrm>
+          <a:prstGeom prst="rect">
+            <a:avLst/>
+          </a:prstGeom>
+        </p:spPr>
+      </p:pic>
     </p:spTree>
   </p:cSld>
   <p:clrMapOvr>
@@ -4596,7 +5562,241 @@
 </p:sld>
 </file>
 
-<file path=ppt/slides/slide14.xml><?xml version="1.0" encoding="utf-8"?>
+<file path=ppt/slides/slide15.xml><?xml version="1.0" encoding="utf-8"?>
+<p:sld xmlns:a="http://schemas.openxmlformats.org/drawingml/2006/main" xmlns:p="http://schemas.openxmlformats.org/presentationml/2006/main" xmlns:r="http://schemas.openxmlformats.org/officeDocument/2006/relationships">
+  <p:cSld>
+    <p:bg>
+      <p:bgPr>
+        <a:solidFill>
+          <a:srgbClr val="020C1B"/>
+        </a:solidFill>
+      </p:bgPr>
+    </p:bg>
+    <p:spTree>
+      <p:nvGrpSpPr>
+        <p:cNvPr id="1" name=""/>
+        <p:cNvGrpSpPr/>
+        <p:nvPr/>
+      </p:nvGrpSpPr>
+      <p:grpSpPr/>
+      <p:sp>
+        <p:nvSpPr>
+          <p:cNvPr id="2" name="Shape 0"/>
+          <p:cNvSpPr/>
+          <p:nvPr/>
+        </p:nvSpPr>
+        <p:spPr>
+          <a:xfrm>
+            <a:off x="0" y="0"/>
+            <a:ext cx="9144000" cy="54864"/>
+          </a:xfrm>
+          <a:prstGeom prst="rect">
+            <a:avLst/>
+          </a:prstGeom>
+          <a:solidFill>
+            <a:srgbClr val="1A6BBF"/>
+          </a:solidFill>
+          <a:ln w="12700">
+            <a:solidFill>
+              <a:srgbClr val="1A6BBF"/>
+            </a:solidFill>
+            <a:prstDash val="solid"/>
+          </a:ln>
+        </p:spPr>
+        <p:txBody>
+          <a:bodyPr/>
+          <a:p/>
+        </p:txBody>
+      </p:sp>
+      <p:sp>
+        <p:nvSpPr>
+          <p:cNvPr id="3" name="Text 1"/>
+          <p:cNvSpPr/>
+          <p:nvPr/>
+        </p:nvSpPr>
+        <p:spPr>
+          <a:xfrm>
+            <a:off x="365760" y="164592"/>
+            <a:ext cx="8229600" cy="457200"/>
+          </a:xfrm>
+          <a:prstGeom prst="rect">
+            <a:avLst/>
+          </a:prstGeom>
+          <a:noFill/>
+          <a:ln/>
+        </p:spPr>
+        <p:txBody>
+          <a:bodyPr wrap="square" rtlCol="0" anchor="ctr"/>
+          <a:lstStyle/>
+          <a:p>
+            <a:pPr indent="0" marL="0">
+              <a:buNone/>
+            </a:pPr>
+            <a:r>
+              <a:rPr lang="en-US" sz="2200" b="1" dirty="0">
+                <a:solidFill>
+                  <a:srgbClr val="FFFFFF"/>
+                </a:solidFill>
+              </a:rPr>
+              <a:t>Reading the Scalable output — detail</a:t>
+            </a:r>
+            <a:endParaRPr lang="en-US" sz="2200" dirty="0"/>
+          </a:p>
+        </p:txBody>
+      </p:sp>
+      <p:sp>
+        <p:nvSpPr>
+          <p:cNvPr id="27" name="Text 25"/>
+          <p:cNvSpPr/>
+          <p:nvPr/>
+        </p:nvSpPr>
+        <p:spPr>
+          <a:xfrm>
+            <a:off x="8046720" y="4754880"/>
+            <a:ext cx="914400" cy="274320"/>
+          </a:xfrm>
+          <a:prstGeom prst="rect">
+            <a:avLst/>
+          </a:prstGeom>
+          <a:noFill/>
+          <a:ln/>
+        </p:spPr>
+        <p:txBody>
+          <a:bodyPr wrap="square" rtlCol="0" anchor="ctr"/>
+          <a:lstStyle/>
+          <a:p>
+            <a:pPr algn="r" indent="0" marL="0">
+              <a:buNone/>
+            </a:pPr>
+            <a:r>
+              <a:rPr lang="en-US" sz="900" dirty="0">
+                <a:solidFill>
+                  <a:srgbClr val="556A8A"/>
+                </a:solidFill>
+              </a:rPr>
+              <a:t>15 / 19</a:t>
+            </a:r>
+            <a:endParaRPr lang="en-US" sz="900" dirty="0"/>
+          </a:p>
+        </p:txBody>
+      </p:sp>
+      <p:sp>
+        <p:nvSpPr>
+          <p:cNvPr id="28" name="Text 26"/>
+          <p:cNvSpPr/>
+          <p:nvPr/>
+        </p:nvSpPr>
+        <p:spPr>
+          <a:xfrm>
+            <a:off x="365760" y="4754880"/>
+            <a:ext cx="6400800" cy="274320"/>
+          </a:xfrm>
+          <a:prstGeom prst="rect">
+            <a:avLst/>
+          </a:prstGeom>
+          <a:noFill/>
+          <a:ln/>
+        </p:spPr>
+        <p:txBody>
+          <a:bodyPr wrap="square" rtlCol="0" anchor="ctr"/>
+          <a:lstStyle/>
+          <a:p>
+            <a:pPr algn="l" indent="0" marL="0">
+              <a:buNone/>
+            </a:pPr>
+            <a:r>
+              <a:rPr lang="en-US" sz="900" dirty="0">
+                <a:solidFill>
+                  <a:srgbClr val="556A8A"/>
+                </a:solidFill>
+              </a:rPr>
+              <a:t>Beyond Mean-Variance Portfolio Optimiser — User Guide</a:t>
+            </a:r>
+            <a:endParaRPr lang="en-US" sz="900" dirty="0"/>
+          </a:p>
+        </p:txBody>
+      </p:sp>
+      <p:pic>
+        <p:nvPicPr>
+          <p:cNvPr id="29" name="Picture 28" descr="scalable_output4.png"/>
+          <p:cNvPicPr>
+            <a:picLocks noChangeAspect="1"/>
+          </p:cNvPicPr>
+          <p:nvPr/>
+        </p:nvPicPr>
+        <p:blipFill>
+          <a:blip r:embed="rId2"/>
+          <a:stretch>
+            <a:fillRect/>
+          </a:stretch>
+        </p:blipFill>
+        <p:spPr>
+          <a:xfrm>
+            <a:off x="2689412" y="960120"/>
+            <a:ext cx="3765176" cy="1143000"/>
+          </a:xfrm>
+          <a:prstGeom prst="rect">
+            <a:avLst/>
+          </a:prstGeom>
+        </p:spPr>
+      </p:pic>
+      <p:pic>
+        <p:nvPicPr>
+          <p:cNvPr id="30" name="Picture 29" descr="scalable_output2.png"/>
+          <p:cNvPicPr>
+            <a:picLocks noChangeAspect="1"/>
+          </p:cNvPicPr>
+          <p:nvPr/>
+        </p:nvPicPr>
+        <p:blipFill>
+          <a:blip r:embed="rId3"/>
+          <a:stretch>
+            <a:fillRect/>
+          </a:stretch>
+        </p:blipFill>
+        <p:spPr>
+          <a:xfrm>
+            <a:off x="2308194" y="2194560"/>
+            <a:ext cx="4527611" cy="1143000"/>
+          </a:xfrm>
+          <a:prstGeom prst="rect">
+            <a:avLst/>
+          </a:prstGeom>
+        </p:spPr>
+      </p:pic>
+      <p:pic>
+        <p:nvPicPr>
+          <p:cNvPr id="31" name="Picture 30" descr="scalable_output3.png"/>
+          <p:cNvPicPr>
+            <a:picLocks noChangeAspect="1"/>
+          </p:cNvPicPr>
+          <p:nvPr/>
+        </p:nvPicPr>
+        <p:blipFill>
+          <a:blip r:embed="rId4"/>
+          <a:stretch>
+            <a:fillRect/>
+          </a:stretch>
+        </p:blipFill>
+        <p:spPr>
+          <a:xfrm>
+            <a:off x="2322509" y="3429000"/>
+            <a:ext cx="4498982" cy="1143000"/>
+          </a:xfrm>
+          <a:prstGeom prst="rect">
+            <a:avLst/>
+          </a:prstGeom>
+        </p:spPr>
+      </p:pic>
+    </p:spTree>
+  </p:cSld>
+  <p:clrMapOvr>
+    <a:masterClrMapping/>
+  </p:clrMapOvr>
+</p:sld>
+</file>
+
+<file path=ppt/slides/slide16.xml><?xml version="1.0" encoding="utf-8"?>
 <p:sld xmlns:a="http://schemas.openxmlformats.org/drawingml/2006/main" xmlns:r="http://schemas.openxmlformats.org/officeDocument/2006/relationships" xmlns:p="http://schemas.openxmlformats.org/presentationml/2006/main">
   <p:cSld name="Slide 2">
     <p:bg>
@@ -4723,42 +5923,6 @@
       </p:sp>
       <p:sp>
         <p:nvSpPr>
-          <p:cNvPr id="5" name="Text 3"/>
-          <p:cNvSpPr/>
-          <p:nvPr/>
-        </p:nvSpPr>
-        <p:spPr>
-          <a:xfrm>
-            <a:off x="365760" y="960120"/>
-            <a:ext cx="2651760" cy="502920"/>
-          </a:xfrm>
-          <a:prstGeom prst="rect">
-            <a:avLst/>
-          </a:prstGeom>
-          <a:noFill/>
-          <a:ln/>
-        </p:spPr>
-        <p:txBody>
-          <a:bodyPr wrap="square" rtlCol="0" anchor="ctr"/>
-          <a:lstStyle/>
-          <a:p>
-            <a:pPr algn="ctr" indent="0" marL="0">
-              <a:buNone/>
-            </a:pPr>
-            <a:r>
-              <a:rPr lang="en-US" sz="2200" dirty="0">
-                <a:solidFill>
-                  <a:srgbClr val="000000"/>
-                </a:solidFill>
-              </a:rPr>
-              <a:t>🪟</a:t>
-            </a:r>
-            <a:endParaRPr lang="en-US" sz="2200" dirty="0"/>
-          </a:p>
-        </p:txBody>
-      </p:sp>
-      <p:sp>
-        <p:nvSpPr>
           <p:cNvPr id="6" name="Text 4"/>
           <p:cNvSpPr/>
           <p:nvPr/>
@@ -4867,42 +6031,6 @@
       </p:sp>
       <p:sp>
         <p:nvSpPr>
-          <p:cNvPr id="9" name="Text 7"/>
-          <p:cNvSpPr/>
-          <p:nvPr/>
-        </p:nvSpPr>
-        <p:spPr>
-          <a:xfrm>
-            <a:off x="3200400" y="960120"/>
-            <a:ext cx="2651760" cy="502920"/>
-          </a:xfrm>
-          <a:prstGeom prst="rect">
-            <a:avLst/>
-          </a:prstGeom>
-          <a:noFill/>
-          <a:ln/>
-        </p:spPr>
-        <p:txBody>
-          <a:bodyPr wrap="square" rtlCol="0" anchor="ctr"/>
-          <a:lstStyle/>
-          <a:p>
-            <a:pPr algn="ctr" indent="0" marL="0">
-              <a:buNone/>
-            </a:pPr>
-            <a:r>
-              <a:rPr lang="en-US" sz="2200" dirty="0">
-                <a:solidFill>
-                  <a:srgbClr val="000000"/>
-                </a:solidFill>
-              </a:rPr>
-              <a:t>🔁</a:t>
-            </a:r>
-            <a:endParaRPr lang="en-US" sz="2200" dirty="0"/>
-          </a:p>
-        </p:txBody>
-      </p:sp>
-      <p:sp>
-        <p:nvSpPr>
           <p:cNvPr id="10" name="Text 8"/>
           <p:cNvSpPr/>
           <p:nvPr/>
@@ -5011,42 +6139,6 @@
       </p:sp>
       <p:sp>
         <p:nvSpPr>
-          <p:cNvPr id="13" name="Text 11"/>
-          <p:cNvSpPr/>
-          <p:nvPr/>
-        </p:nvSpPr>
-        <p:spPr>
-          <a:xfrm>
-            <a:off x="6035040" y="960120"/>
-            <a:ext cx="2651760" cy="502920"/>
-          </a:xfrm>
-          <a:prstGeom prst="rect">
-            <a:avLst/>
-          </a:prstGeom>
-          <a:noFill/>
-          <a:ln/>
-        </p:spPr>
-        <p:txBody>
-          <a:bodyPr wrap="square" rtlCol="0" anchor="ctr"/>
-          <a:lstStyle/>
-          <a:p>
-            <a:pPr algn="ctr" indent="0" marL="0">
-              <a:buNone/>
-            </a:pPr>
-            <a:r>
-              <a:rPr lang="en-US" sz="2200" dirty="0">
-                <a:solidFill>
-                  <a:srgbClr val="000000"/>
-                </a:solidFill>
-              </a:rPr>
-              <a:t>📈</a:t>
-            </a:r>
-            <a:endParaRPr lang="en-US" sz="2200" dirty="0"/>
-          </a:p>
-        </p:txBody>
-      </p:sp>
-      <p:sp>
-        <p:nvSpPr>
           <p:cNvPr id="14" name="Text 12"/>
           <p:cNvSpPr/>
           <p:nvPr/>
@@ -5629,7 +6721,7 @@
                   <a:srgbClr val="556A8A"/>
                 </a:solidFill>
               </a:rPr>
-              <a:t>15 / 18</a:t>
+              <a:t>16 / 19</a:t>
             </a:r>
             <a:endParaRPr lang="en-US" sz="900" dirty="0"/>
           </a:p>
@@ -5671,6 +6763,78 @@
           </a:p>
         </p:txBody>
       </p:sp>
+      <p:pic>
+        <p:nvPicPr>
+          <p:cNvPr id="32" name="Picture 31" descr="window_4a9eff_0.png"/>
+          <p:cNvPicPr>
+            <a:picLocks noChangeAspect="1"/>
+          </p:cNvPicPr>
+          <p:nvPr/>
+        </p:nvPicPr>
+        <p:blipFill>
+          <a:blip r:embed="rId2"/>
+          <a:stretch>
+            <a:fillRect/>
+          </a:stretch>
+        </p:blipFill>
+        <p:spPr>
+          <a:xfrm>
+            <a:off x="1577340" y="1097280"/>
+            <a:ext cx="228600" cy="228600"/>
+          </a:xfrm>
+          <a:prstGeom prst="rect">
+            <a:avLst/>
+          </a:prstGeom>
+        </p:spPr>
+      </p:pic>
+      <p:pic>
+        <p:nvPicPr>
+          <p:cNvPr id="33" name="Picture 32" descr="repeat_4a9eff_0.png"/>
+          <p:cNvPicPr>
+            <a:picLocks noChangeAspect="1"/>
+          </p:cNvPicPr>
+          <p:nvPr/>
+        </p:nvPicPr>
+        <p:blipFill>
+          <a:blip r:embed="rId3"/>
+          <a:stretch>
+            <a:fillRect/>
+          </a:stretch>
+        </p:blipFill>
+        <p:spPr>
+          <a:xfrm>
+            <a:off x="4411980" y="1097280"/>
+            <a:ext cx="228600" cy="228600"/>
+          </a:xfrm>
+          <a:prstGeom prst="rect">
+            <a:avLst/>
+          </a:prstGeom>
+        </p:spPr>
+      </p:pic>
+      <p:pic>
+        <p:nvPicPr>
+          <p:cNvPr id="34" name="Picture 33" descr="trending_4a9eff_0.png"/>
+          <p:cNvPicPr>
+            <a:picLocks noChangeAspect="1"/>
+          </p:cNvPicPr>
+          <p:nvPr/>
+        </p:nvPicPr>
+        <p:blipFill>
+          <a:blip r:embed="rId4"/>
+          <a:stretch>
+            <a:fillRect/>
+          </a:stretch>
+        </p:blipFill>
+        <p:spPr>
+          <a:xfrm>
+            <a:off x="7246620" y="1097280"/>
+            <a:ext cx="228600" cy="228600"/>
+          </a:xfrm>
+          <a:prstGeom prst="rect">
+            <a:avLst/>
+          </a:prstGeom>
+        </p:spPr>
+      </p:pic>
     </p:spTree>
   </p:cSld>
   <p:clrMapOvr>
@@ -5679,7 +6843,7 @@
 </p:sld>
 </file>
 
-<file path=ppt/slides/slide15.xml><?xml version="1.0" encoding="utf-8"?>
+<file path=ppt/slides/slide17.xml><?xml version="1.0" encoding="utf-8"?>
 <p:sld xmlns:a="http://schemas.openxmlformats.org/drawingml/2006/main" xmlns:r="http://schemas.openxmlformats.org/officeDocument/2006/relationships" xmlns:p="http://schemas.openxmlformats.org/presentationml/2006/main">
   <p:cSld name="Slide 8">
     <p:bg>
@@ -5798,7 +6962,7 @@
                   <a:srgbClr val="556A8A"/>
                 </a:solidFill>
               </a:rPr>
-              <a:t>16 / 18</a:t>
+              <a:t>17 / 19</a:t>
             </a:r>
             <a:endParaRPr lang="en-US" sz="900" dirty="0"/>
           </a:p>
@@ -5840,30 +7004,6 @@
           </a:p>
         </p:txBody>
       </p:sp>
-      <p:pic>
-        <p:nvPicPr>
-          <p:cNvPr id="29" name="Picture 28" descr="Slide8chart.png"/>
-          <p:cNvPicPr>
-            <a:picLocks noChangeAspect="1"/>
-          </p:cNvPicPr>
-          <p:nvPr/>
-        </p:nvPicPr>
-        <p:blipFill>
-          <a:blip r:embed="rId3"/>
-          <a:stretch>
-            <a:fillRect/>
-          </a:stretch>
-        </p:blipFill>
-        <p:spPr>
-          <a:xfrm>
-            <a:off x="365760" y="1095744"/>
-            <a:ext cx="5120640" cy="2526650"/>
-          </a:xfrm>
-          <a:prstGeom prst="rect">
-            <a:avLst/>
-          </a:prstGeom>
-        </p:spPr>
-      </p:pic>
       <p:sp>
         <p:nvSpPr>
           <p:cNvPr id="40" name="Cmt box"/>
@@ -5992,6 +7132,30 @@
           </a:p>
         </p:txBody>
       </p:sp>
+      <p:pic>
+        <p:nvPicPr>
+          <p:cNvPr id="42" name="Picture 41" descr="backtest_output.png"/>
+          <p:cNvPicPr>
+            <a:picLocks noChangeAspect="1"/>
+          </p:cNvPicPr>
+          <p:nvPr/>
+        </p:nvPicPr>
+        <p:blipFill>
+          <a:blip r:embed="rId2"/>
+          <a:stretch>
+            <a:fillRect/>
+          </a:stretch>
+        </p:blipFill>
+        <p:spPr>
+          <a:xfrm>
+            <a:off x="365760" y="1348822"/>
+            <a:ext cx="5120640" cy="2020493"/>
+          </a:xfrm>
+          <a:prstGeom prst="rect">
+            <a:avLst/>
+          </a:prstGeom>
+        </p:spPr>
+      </p:pic>
     </p:spTree>
   </p:cSld>
   <p:clrMapOvr>
@@ -6000,7 +7164,7 @@
 </p:sld>
 </file>
 
-<file path=ppt/slides/slide16.xml><?xml version="1.0" encoding="utf-8"?>
+<file path=ppt/slides/slide18.xml><?xml version="1.0" encoding="utf-8"?>
 <p:sld xmlns:a="http://schemas.openxmlformats.org/drawingml/2006/main" xmlns:r="http://schemas.openxmlformats.org/officeDocument/2006/relationships" xmlns:p="http://schemas.openxmlformats.org/presentationml/2006/main">
   <p:cSld name="Slide 11">
     <p:bg>
@@ -6126,8 +7290,8 @@
         </p:nvSpPr>
         <p:spPr>
           <a:xfrm>
-            <a:off x="548640" y="822960"/>
-            <a:ext cx="3657600" cy="320040"/>
+            <a:off x="804672" y="822960"/>
+            <a:ext cx="3401568" cy="320040"/>
           </a:xfrm>
           <a:prstGeom prst="rect">
             <a:avLst/>
@@ -6148,7 +7312,7 @@
                   <a:srgbClr val="4A9EFF"/>
                 </a:solidFill>
               </a:rPr>
-              <a:t>📖  About Tab</a:t>
+              <a:t>About Tab</a:t>
             </a:r>
             <a:endParaRPr lang="en-US" sz="1200" dirty="0"/>
           </a:p>
@@ -6379,8 +7543,8 @@
         </p:nvSpPr>
         <p:spPr>
           <a:xfrm>
-            <a:off x="4937760" y="822960"/>
-            <a:ext cx="3657600" cy="320040"/>
+            <a:off x="5193792" y="822960"/>
+            <a:ext cx="3401568" cy="320040"/>
           </a:xfrm>
           <a:prstGeom prst="rect">
             <a:avLst/>
@@ -6401,7 +7565,7 @@
                   <a:srgbClr val="4A9EFF"/>
                 </a:solidFill>
               </a:rPr>
-              <a:t>📚  Glossary Tab</a:t>
+              <a:t>Glossary Tab</a:t>
             </a:r>
             <a:endParaRPr lang="en-US" sz="1200" dirty="0"/>
           </a:p>
@@ -6625,7 +7789,7 @@
                   <a:srgbClr val="556A8A"/>
                 </a:solidFill>
               </a:rPr>
-              <a:t>17 / 18</a:t>
+              <a:t>18 / 19</a:t>
             </a:r>
             <a:endParaRPr lang="en-US" sz="900" dirty="0"/>
           </a:p>
@@ -6669,22 +7833,22 @@
       </p:sp>
       <p:pic>
         <p:nvPicPr>
-          <p:cNvPr id="22" name="Picture 21" descr="slide11about.png"/>
+          <p:cNvPr id="24" name="Picture 23" descr="about.png"/>
           <p:cNvPicPr>
             <a:picLocks noChangeAspect="1"/>
           </p:cNvPicPr>
           <p:nvPr/>
         </p:nvPicPr>
         <p:blipFill>
-          <a:blip r:embed="rId3"/>
+          <a:blip r:embed="rId5"/>
           <a:stretch>
             <a:fillRect/>
           </a:stretch>
         </p:blipFill>
         <p:spPr>
           <a:xfrm>
-            <a:off x="774945" y="1188720"/>
-            <a:ext cx="3204989" cy="1645920"/>
+            <a:off x="774945" y="1402439"/>
+            <a:ext cx="3204989" cy="1218482"/>
           </a:xfrm>
           <a:prstGeom prst="rect">
             <a:avLst/>
@@ -6693,22 +7857,70 @@
       </p:pic>
       <p:pic>
         <p:nvPicPr>
-          <p:cNvPr id="23" name="Picture 22" descr="Slide11Glossary.png"/>
+          <p:cNvPr id="25" name="Picture 24" descr="glossary.png"/>
           <p:cNvPicPr>
             <a:picLocks noChangeAspect="1"/>
           </p:cNvPicPr>
           <p:nvPr/>
         </p:nvPicPr>
         <p:blipFill>
-          <a:blip r:embed="rId4"/>
+          <a:blip r:embed="rId6"/>
           <a:stretch>
             <a:fillRect/>
           </a:stretch>
         </p:blipFill>
         <p:spPr>
           <a:xfrm>
-            <a:off x="4981315" y="1188720"/>
-            <a:ext cx="3570489" cy="1645920"/>
+            <a:off x="4981315" y="1247534"/>
+            <a:ext cx="3570489" cy="1528292"/>
+          </a:xfrm>
+          <a:prstGeom prst="rect">
+            <a:avLst/>
+          </a:prstGeom>
+        </p:spPr>
+      </p:pic>
+      <p:pic>
+        <p:nvPicPr>
+          <p:cNvPr id="26" name="Picture 25" descr="info_4a9eff_0.png"/>
+          <p:cNvPicPr>
+            <a:picLocks noChangeAspect="1"/>
+          </p:cNvPicPr>
+          <p:nvPr/>
+        </p:nvPicPr>
+        <p:blipFill>
+          <a:blip r:embed="rId7"/>
+          <a:stretch>
+            <a:fillRect/>
+          </a:stretch>
+        </p:blipFill>
+        <p:spPr>
+          <a:xfrm>
+            <a:off x="548640" y="850392"/>
+            <a:ext cx="182880" cy="182880"/>
+          </a:xfrm>
+          <a:prstGeom prst="rect">
+            <a:avLst/>
+          </a:prstGeom>
+        </p:spPr>
+      </p:pic>
+      <p:pic>
+        <p:nvPicPr>
+          <p:cNvPr id="27" name="Picture 26" descr="book_4a9eff_0.png"/>
+          <p:cNvPicPr>
+            <a:picLocks noChangeAspect="1"/>
+          </p:cNvPicPr>
+          <p:nvPr/>
+        </p:nvPicPr>
+        <p:blipFill>
+          <a:blip r:embed="rId8"/>
+          <a:stretch>
+            <a:fillRect/>
+          </a:stretch>
+        </p:blipFill>
+        <p:spPr>
+          <a:xfrm>
+            <a:off x="4937760" y="850392"/>
+            <a:ext cx="182880" cy="182880"/>
           </a:xfrm>
           <a:prstGeom prst="rect">
             <a:avLst/>
@@ -6723,7 +7935,7 @@
 </p:sld>
 </file>
 
-<file path=ppt/slides/slide17.xml><?xml version="1.0" encoding="utf-8"?>
+<file path=ppt/slides/slide19.xml><?xml version="1.0" encoding="utf-8"?>
 <p:sld xmlns:a="http://schemas.openxmlformats.org/drawingml/2006/main" xmlns:r="http://schemas.openxmlformats.org/officeDocument/2006/relationships" xmlns:p="http://schemas.openxmlformats.org/presentationml/2006/main">
   <p:cSld name="Slide 12">
     <p:bg>
@@ -7209,7 +8421,7 @@
                   <a:srgbClr val="556A8A"/>
                 </a:solidFill>
               </a:rPr>
-              <a:t>18 / 18</a:t>
+              <a:t>19 / 19</a:t>
             </a:r>
             <a:endParaRPr lang="en-US" sz="900" dirty="0"/>
           </a:p>
@@ -7259,7 +8471,7 @@
 </p:sld>
 </file>
 
-<file path=ppt/slides/slide18.xml><?xml version="1.0" encoding="utf-8"?>
+<file path=ppt/slides/slide2.xml><?xml version="1.0" encoding="utf-8"?>
 <p:sld xmlns:a="http://schemas.openxmlformats.org/drawingml/2006/main" xmlns:p="http://schemas.openxmlformats.org/presentationml/2006/main" xmlns:r="http://schemas.openxmlformats.org/officeDocument/2006/relationships">
   <p:cSld>
     <p:bg>
@@ -7371,7 +8583,7 @@
                   <a:srgbClr val="556A8A"/>
                 </a:solidFill>
               </a:rPr>
-              <a:t>2 / 18</a:t>
+              <a:t>2 / 19</a:t>
             </a:r>
             <a:endParaRPr lang="en-US" sz="900" dirty="0"/>
           </a:p>
@@ -7448,1116 +8660,28 @@
       </p:sp>
       <p:pic>
         <p:nvPicPr>
-          <p:cNvPr id="33" name="Picture 32" descr="1781032026523_image.png"/>
+          <p:cNvPr id="33" name="Picture 32" descr="home.png"/>
           <p:cNvPicPr>
             <a:picLocks noChangeAspect="1"/>
           </p:cNvPicPr>
           <p:nvPr/>
         </p:nvPicPr>
         <p:blipFill>
-          <a:blip r:embed="rId2"/>
+          <a:blip r:embed="rId3"/>
           <a:stretch>
             <a:fillRect/>
           </a:stretch>
         </p:blipFill>
         <p:spPr>
           <a:xfrm>
-            <a:off x="1399032" y="1280160"/>
-            <a:ext cx="6355080" cy="3291840"/>
-          </a:xfrm>
-          <a:prstGeom prst="rect">
-            <a:avLst/>
-          </a:prstGeom>
-          <a:ln w="12700">
-            <a:solidFill>
-              <a:srgbClr val="2A3A55"/>
-            </a:solidFill>
-          </a:ln>
+            <a:off x="1399032" y="1457185"/>
+            <a:ext cx="6355080" cy="2937789"/>
+          </a:xfrm>
+          <a:prstGeom prst="rect">
+            <a:avLst/>
+          </a:prstGeom>
         </p:spPr>
       </p:pic>
-    </p:spTree>
-  </p:cSld>
-  <p:clrMapOvr>
-    <a:masterClrMapping/>
-  </p:clrMapOvr>
-</p:sld>
-</file>
-
-<file path=ppt/slides/slide2.xml><?xml version="1.0" encoding="utf-8"?>
-<p:sld xmlns:a="http://schemas.openxmlformats.org/drawingml/2006/main" xmlns:r="http://schemas.openxmlformats.org/officeDocument/2006/relationships" xmlns:p="http://schemas.openxmlformats.org/presentationml/2006/main">
-  <p:cSld name="Slide 2">
-    <p:bg>
-      <p:bgPr>
-        <a:solidFill>
-          <a:srgbClr val="020C1B"/>
-        </a:solidFill>
-      </p:bgPr>
-    </p:bg>
-    <p:spTree>
-      <p:nvGrpSpPr>
-        <p:cNvPr id="1" name=""/>
-        <p:cNvGrpSpPr/>
-        <p:nvPr/>
-      </p:nvGrpSpPr>
-      <p:grpSpPr>
-        <a:xfrm>
-          <a:off x="0" y="0"/>
-          <a:ext cx="0" cy="0"/>
-          <a:chOff x="0" y="0"/>
-          <a:chExt cx="0" cy="0"/>
-        </a:xfrm>
-      </p:grpSpPr>
-      <p:sp>
-        <p:nvSpPr>
-          <p:cNvPr id="2" name="Shape 0"/>
-          <p:cNvSpPr/>
-          <p:nvPr/>
-        </p:nvSpPr>
-        <p:spPr>
-          <a:xfrm>
-            <a:off x="0" y="0"/>
-            <a:ext cx="9144000" cy="54864"/>
-          </a:xfrm>
-          <a:prstGeom prst="rect">
-            <a:avLst/>
-          </a:prstGeom>
-          <a:solidFill>
-            <a:srgbClr val="1A6BBF"/>
-          </a:solidFill>
-          <a:ln w="12700">
-            <a:solidFill>
-              <a:srgbClr val="1A6BBF"/>
-            </a:solidFill>
-            <a:prstDash val="solid"/>
-          </a:ln>
-        </p:spPr>
-        <p:txBody>
-          <a:bodyPr/>
-          <a:p/>
-        </p:txBody>
-      </p:sp>
-      <p:sp>
-        <p:nvSpPr>
-          <p:cNvPr id="3" name="Text 1"/>
-          <p:cNvSpPr/>
-          <p:nvPr/>
-        </p:nvSpPr>
-        <p:spPr>
-          <a:xfrm>
-            <a:off x="457200" y="164592"/>
-            <a:ext cx="8229600" cy="502920"/>
-          </a:xfrm>
-          <a:prstGeom prst="rect">
-            <a:avLst/>
-          </a:prstGeom>
-          <a:noFill/>
-          <a:ln/>
-        </p:spPr>
-        <p:txBody>
-          <a:bodyPr wrap="square" rtlCol="0" anchor="ctr"/>
-          <a:lstStyle/>
-          <a:p>
-            <a:pPr indent="0" marL="0">
-              <a:buNone/>
-            </a:pPr>
-            <a:r>
-              <a:rPr lang="en-US" sz="2600" b="1" dirty="0">
-                <a:solidFill>
-                  <a:srgbClr val="FFFFFF"/>
-                </a:solidFill>
-              </a:rPr>
-              <a:t>Home — choose a tool</a:t>
-            </a:r>
-            <a:endParaRPr lang="en-US" sz="2600" dirty="0"/>
-          </a:p>
-        </p:txBody>
-      </p:sp>
-      <p:sp>
-        <p:nvSpPr>
-          <p:cNvPr id="4" name="Shape 2"/>
-          <p:cNvSpPr/>
-          <p:nvPr/>
-        </p:nvSpPr>
-        <p:spPr>
-          <a:xfrm>
-            <a:off x="365760" y="868680"/>
-            <a:ext cx="2651760" cy="1828800"/>
-          </a:xfrm>
-          <a:prstGeom prst="rect">
-            <a:avLst/>
-          </a:prstGeom>
-          <a:solidFill>
-            <a:srgbClr val="0D1A2E"/>
-          </a:solidFill>
-          <a:ln w="12700">
-            <a:solidFill>
-              <a:srgbClr val="1A6BBF"/>
-            </a:solidFill>
-            <a:prstDash val="solid"/>
-          </a:ln>
-          <a:effectLst>
-            <a:outerShdw sx="100000" sy="100000" kx="0" ky="0" algn="bl" rotWithShape="0" blurRad="101600" dist="38100" dir="8100000">
-              <a:srgbClr val="000000">
-                <a:alpha val="18000"/>
-              </a:srgbClr>
-            </a:outerShdw>
-          </a:effectLst>
-        </p:spPr>
-        <p:txBody>
-          <a:bodyPr/>
-          <a:p/>
-        </p:txBody>
-      </p:sp>
-      <p:sp>
-        <p:nvSpPr>
-          <p:cNvPr id="5" name="Text 3"/>
-          <p:cNvSpPr/>
-          <p:nvPr/>
-        </p:nvSpPr>
-        <p:spPr>
-          <a:xfrm>
-            <a:off x="365760" y="960120"/>
-            <a:ext cx="2651760" cy="502920"/>
-          </a:xfrm>
-          <a:prstGeom prst="rect">
-            <a:avLst/>
-          </a:prstGeom>
-          <a:noFill/>
-          <a:ln/>
-        </p:spPr>
-        <p:txBody>
-          <a:bodyPr wrap="square" rtlCol="0" anchor="ctr"/>
-          <a:lstStyle/>
-          <a:p>
-            <a:pPr algn="ctr" indent="0" marL="0">
-              <a:buNone/>
-            </a:pPr>
-            <a:r>
-              <a:rPr lang="en-US" sz="2200" dirty="0">
-                <a:solidFill>
-                  <a:srgbClr val="000000"/>
-                </a:solidFill>
-              </a:rPr>
-              <a:t>📊</a:t>
-            </a:r>
-            <a:endParaRPr lang="en-US" sz="2200" dirty="0"/>
-          </a:p>
-        </p:txBody>
-      </p:sp>
-      <p:sp>
-        <p:nvSpPr>
-          <p:cNvPr id="6" name="Text 4"/>
-          <p:cNvSpPr/>
-          <p:nvPr/>
-        </p:nvSpPr>
-        <p:spPr>
-          <a:xfrm>
-            <a:off x="365760" y="1463040"/>
-            <a:ext cx="2651760" cy="365760"/>
-          </a:xfrm>
-          <a:prstGeom prst="rect">
-            <a:avLst/>
-          </a:prstGeom>
-          <a:noFill/>
-          <a:ln/>
-        </p:spPr>
-        <p:txBody>
-          <a:bodyPr wrap="square" rtlCol="0" anchor="ctr"/>
-          <a:lstStyle/>
-          <a:p>
-            <a:pPr algn="ctr" indent="0" marL="0">
-              <a:buNone/>
-            </a:pPr>
-            <a:r>
-              <a:rPr lang="en-US" sz="1100" b="1" dirty="0">
-                <a:solidFill>
-                  <a:srgbClr val="4A9EFF"/>
-                </a:solidFill>
-              </a:rPr>
-              <a:t>Grid Portfolio Optimiser</a:t>
-            </a:r>
-            <a:endParaRPr lang="en-US" sz="1100" dirty="0"/>
-          </a:p>
-        </p:txBody>
-      </p:sp>
-      <p:sp>
-        <p:nvSpPr>
-          <p:cNvPr id="7" name="Text 5"/>
-          <p:cNvSpPr/>
-          <p:nvPr/>
-        </p:nvSpPr>
-        <p:spPr>
-          <a:xfrm>
-            <a:off x="475488" y="1874520"/>
-            <a:ext cx="2432304" cy="731520"/>
-          </a:xfrm>
-          <a:prstGeom prst="rect">
-            <a:avLst/>
-          </a:prstGeom>
-          <a:noFill/>
-          <a:ln/>
-        </p:spPr>
-        <p:txBody>
-          <a:bodyPr wrap="square" rtlCol="0" anchor="t"/>
-          <a:lstStyle/>
-          <a:p>
-            <a:pPr algn="ctr" indent="0" marL="0">
-              <a:buNone/>
-            </a:pPr>
-            <a:r>
-              <a:rPr lang="en-US" sz="950" dirty="0">
-                <a:solidFill>
-                  <a:srgbClr val="C0C8D8"/>
-                </a:solidFill>
-              </a:rPr>
-              <a:t>Exact grid engine on the Das–Statman states — VaR, thesis-ES and rigorous-ES, with derivatives.</a:t>
-            </a:r>
-            <a:endParaRPr lang="en-US" sz="950" dirty="0"/>
-          </a:p>
-        </p:txBody>
-      </p:sp>
-      <p:sp>
-        <p:nvSpPr>
-          <p:cNvPr id="8" name="Shape 6"/>
-          <p:cNvSpPr/>
-          <p:nvPr/>
-        </p:nvSpPr>
-        <p:spPr>
-          <a:xfrm>
-            <a:off x="3200400" y="868680"/>
-            <a:ext cx="2651760" cy="1828800"/>
-          </a:xfrm>
-          <a:prstGeom prst="rect">
-            <a:avLst/>
-          </a:prstGeom>
-          <a:solidFill>
-            <a:srgbClr val="0D1A2E"/>
-          </a:solidFill>
-          <a:ln w="12700">
-            <a:solidFill>
-              <a:srgbClr val="1A6BBF"/>
-            </a:solidFill>
-            <a:prstDash val="solid"/>
-          </a:ln>
-          <a:effectLst>
-            <a:outerShdw sx="100000" sy="100000" kx="0" ky="0" algn="bl" rotWithShape="0" blurRad="101600" dist="38100" dir="8100000">
-              <a:srgbClr val="000000">
-                <a:alpha val="18000"/>
-              </a:srgbClr>
-            </a:outerShdw>
-          </a:effectLst>
-        </p:spPr>
-        <p:txBody>
-          <a:bodyPr/>
-          <a:p/>
-        </p:txBody>
-      </p:sp>
-      <p:sp>
-        <p:nvSpPr>
-          <p:cNvPr id="9" name="Text 7"/>
-          <p:cNvSpPr/>
-          <p:nvPr/>
-        </p:nvSpPr>
-        <p:spPr>
-          <a:xfrm>
-            <a:off x="3200400" y="960120"/>
-            <a:ext cx="2651760" cy="502920"/>
-          </a:xfrm>
-          <a:prstGeom prst="rect">
-            <a:avLst/>
-          </a:prstGeom>
-          <a:noFill/>
-          <a:ln/>
-        </p:spPr>
-        <p:txBody>
-          <a:bodyPr wrap="square" rtlCol="0" anchor="ctr"/>
-          <a:lstStyle/>
-          <a:p>
-            <a:pPr algn="ctr" indent="0" marL="0">
-              <a:buNone/>
-            </a:pPr>
-            <a:r>
-              <a:rPr lang="en-US" sz="2200" dirty="0">
-                <a:solidFill>
-                  <a:srgbClr val="000000"/>
-                </a:solidFill>
-              </a:rPr>
-              <a:t>🧮</a:t>
-            </a:r>
-            <a:endParaRPr lang="en-US" sz="2200" dirty="0"/>
-          </a:p>
-        </p:txBody>
-      </p:sp>
-      <p:sp>
-        <p:nvSpPr>
-          <p:cNvPr id="10" name="Text 8"/>
-          <p:cNvSpPr/>
-          <p:nvPr/>
-        </p:nvSpPr>
-        <p:spPr>
-          <a:xfrm>
-            <a:off x="3200400" y="1463040"/>
-            <a:ext cx="2651760" cy="365760"/>
-          </a:xfrm>
-          <a:prstGeom prst="rect">
-            <a:avLst/>
-          </a:prstGeom>
-          <a:noFill/>
-          <a:ln/>
-        </p:spPr>
-        <p:txBody>
-          <a:bodyPr wrap="square" rtlCol="0" anchor="ctr"/>
-          <a:lstStyle/>
-          <a:p>
-            <a:pPr algn="ctr" indent="0" marL="0">
-              <a:buNone/>
-            </a:pPr>
-            <a:r>
-              <a:rPr lang="en-US" sz="1100" b="1" dirty="0">
-                <a:solidFill>
-                  <a:srgbClr val="4A9EFF"/>
-                </a:solidFill>
-              </a:rPr>
-              <a:t>Scalable Portfolio Optimiser</a:t>
-            </a:r>
-            <a:endParaRPr lang="en-US" sz="1100" dirty="0"/>
-          </a:p>
-        </p:txBody>
-      </p:sp>
-      <p:sp>
-        <p:nvSpPr>
-          <p:cNvPr id="11" name="Text 9"/>
-          <p:cNvSpPr/>
-          <p:nvPr/>
-        </p:nvSpPr>
-        <p:spPr>
-          <a:xfrm>
-            <a:off x="3310128" y="1874520"/>
-            <a:ext cx="2432304" cy="731520"/>
-          </a:xfrm>
-          <a:prstGeom prst="rect">
-            <a:avLst/>
-          </a:prstGeom>
-          <a:noFill/>
-          <a:ln/>
-        </p:spPr>
-        <p:txBody>
-          <a:bodyPr wrap="square" rtlCol="0" anchor="t"/>
-          <a:lstStyle/>
-          <a:p>
-            <a:pPr algn="ctr" indent="0" marL="0">
-              <a:buNone/>
-            </a:pPr>
-            <a:r>
-              <a:rPr lang="en-US" sz="950" dirty="0">
-                <a:solidFill>
-                  <a:srgbClr val="C0C8D8"/>
-                </a:solidFill>
-              </a:rPr>
-              <a:t>Monte-Carlo scenarios + α-CVaR linear program — scales to large, multi-derivative portfolios.</a:t>
-            </a:r>
-            <a:endParaRPr lang="en-US" sz="950" dirty="0"/>
-          </a:p>
-        </p:txBody>
-      </p:sp>
-      <p:sp>
-        <p:nvSpPr>
-          <p:cNvPr id="12" name="Shape 10"/>
-          <p:cNvSpPr/>
-          <p:nvPr/>
-        </p:nvSpPr>
-        <p:spPr>
-          <a:xfrm>
-            <a:off x="6035040" y="868680"/>
-            <a:ext cx="2651760" cy="1828800"/>
-          </a:xfrm>
-          <a:prstGeom prst="rect">
-            <a:avLst/>
-          </a:prstGeom>
-          <a:solidFill>
-            <a:srgbClr val="0D1A2E"/>
-          </a:solidFill>
-          <a:ln w="12700">
-            <a:solidFill>
-              <a:srgbClr val="1A6BBF"/>
-            </a:solidFill>
-            <a:prstDash val="solid"/>
-          </a:ln>
-          <a:effectLst>
-            <a:outerShdw sx="100000" sy="100000" kx="0" ky="0" algn="bl" rotWithShape="0" blurRad="101600" dist="38100" dir="8100000">
-              <a:srgbClr val="000000">
-                <a:alpha val="18000"/>
-              </a:srgbClr>
-            </a:outerShdw>
-          </a:effectLst>
-        </p:spPr>
-        <p:txBody>
-          <a:bodyPr/>
-          <a:p/>
-        </p:txBody>
-      </p:sp>
-      <p:sp>
-        <p:nvSpPr>
-          <p:cNvPr id="13" name="Text 11"/>
-          <p:cNvSpPr/>
-          <p:nvPr/>
-        </p:nvSpPr>
-        <p:spPr>
-          <a:xfrm>
-            <a:off x="6035040" y="960120"/>
-            <a:ext cx="2651760" cy="502920"/>
-          </a:xfrm>
-          <a:prstGeom prst="rect">
-            <a:avLst/>
-          </a:prstGeom>
-          <a:noFill/>
-          <a:ln/>
-        </p:spPr>
-        <p:txBody>
-          <a:bodyPr wrap="square" rtlCol="0" anchor="ctr"/>
-          <a:lstStyle/>
-          <a:p>
-            <a:pPr algn="ctr" indent="0" marL="0">
-              <a:buNone/>
-            </a:pPr>
-            <a:r>
-              <a:rPr lang="en-US" sz="2200" dirty="0">
-                <a:solidFill>
-                  <a:srgbClr val="000000"/>
-                </a:solidFill>
-              </a:rPr>
-              <a:t>🔬</a:t>
-            </a:r>
-            <a:endParaRPr lang="en-US" sz="2200" dirty="0"/>
-          </a:p>
-        </p:txBody>
-      </p:sp>
-      <p:sp>
-        <p:nvSpPr>
-          <p:cNvPr id="14" name="Text 12"/>
-          <p:cNvSpPr/>
-          <p:nvPr/>
-        </p:nvSpPr>
-        <p:spPr>
-          <a:xfrm>
-            <a:off x="6035040" y="1463040"/>
-            <a:ext cx="2651760" cy="365760"/>
-          </a:xfrm>
-          <a:prstGeom prst="rect">
-            <a:avLst/>
-          </a:prstGeom>
-          <a:noFill/>
-          <a:ln/>
-        </p:spPr>
-        <p:txBody>
-          <a:bodyPr wrap="square" rtlCol="0" anchor="ctr"/>
-          <a:lstStyle/>
-          <a:p>
-            <a:pPr algn="ctr" indent="0" marL="0">
-              <a:buNone/>
-            </a:pPr>
-            <a:r>
-              <a:rPr lang="en-US" sz="1100" b="1" dirty="0">
-                <a:solidFill>
-                  <a:srgbClr val="4A9EFF"/>
-                </a:solidFill>
-              </a:rPr>
-              <a:t>Backtest</a:t>
-            </a:r>
-            <a:endParaRPr lang="en-US" sz="1100" dirty="0"/>
-          </a:p>
-        </p:txBody>
-      </p:sp>
-      <p:sp>
-        <p:nvSpPr>
-          <p:cNvPr id="15" name="Text 13"/>
-          <p:cNvSpPr/>
-          <p:nvPr/>
-        </p:nvSpPr>
-        <p:spPr>
-          <a:xfrm>
-            <a:off x="6144768" y="1874520"/>
-            <a:ext cx="2432304" cy="731520"/>
-          </a:xfrm>
-          <a:prstGeom prst="rect">
-            <a:avLst/>
-          </a:prstGeom>
-          <a:noFill/>
-          <a:ln/>
-        </p:spPr>
-        <p:txBody>
-          <a:bodyPr wrap="square" rtlCol="0" anchor="t"/>
-          <a:lstStyle/>
-          <a:p>
-            <a:pPr algn="ctr" indent="0" marL="0">
-              <a:buNone/>
-            </a:pPr>
-            <a:r>
-              <a:rPr lang="en-US" sz="950" dirty="0">
-                <a:solidFill>
-                  <a:srgbClr val="C0C8D8"/>
-                </a:solidFill>
-              </a:rPr>
-              <a:t>Out-of-sample walk-forward — expected vs realised, plus realised alpha &amp; beta.</a:t>
-            </a:r>
-            <a:endParaRPr lang="en-US" sz="950" dirty="0"/>
-          </a:p>
-        </p:txBody>
-      </p:sp>
-      <p:sp>
-        <p:nvSpPr>
-          <p:cNvPr id="16" name="Shape 14"/>
-          <p:cNvSpPr/>
-          <p:nvPr/>
-        </p:nvSpPr>
-        <p:spPr>
-          <a:xfrm>
-            <a:off x="365760" y="2834640"/>
-            <a:ext cx="8412480" cy="1508760"/>
-          </a:xfrm>
-          <a:prstGeom prst="rect">
-            <a:avLst/>
-          </a:prstGeom>
-          <a:solidFill>
-            <a:srgbClr val="0D1A2E"/>
-          </a:solidFill>
-          <a:ln w="12700">
-            <a:solidFill>
-              <a:srgbClr val="1A6BBF"/>
-            </a:solidFill>
-            <a:prstDash val="solid"/>
-          </a:ln>
-        </p:spPr>
-        <p:txBody>
-          <a:bodyPr/>
-          <a:p/>
-        </p:txBody>
-      </p:sp>
-      <p:sp>
-        <p:nvSpPr>
-          <p:cNvPr id="17" name="Text 15"/>
-          <p:cNvSpPr/>
-          <p:nvPr/>
-        </p:nvSpPr>
-        <p:spPr>
-          <a:xfrm>
-            <a:off x="548640" y="2880360"/>
-            <a:ext cx="8046720" cy="320040"/>
-          </a:xfrm>
-          <a:prstGeom prst="rect">
-            <a:avLst/>
-          </a:prstGeom>
-          <a:noFill/>
-          <a:ln/>
-        </p:spPr>
-        <p:txBody>
-          <a:bodyPr wrap="square" rtlCol="0" anchor="ctr"/>
-          <a:lstStyle/>
-          <a:p>
-            <a:pPr indent="0" marL="0">
-              <a:buNone/>
-            </a:pPr>
-            <a:r>
-              <a:rPr lang="en-US" sz="1100" b="1" dirty="0">
-                <a:solidFill>
-                  <a:srgbClr val="4A9EFF"/>
-                </a:solidFill>
-              </a:rPr>
-              <a:t>Reference &amp; navigation</a:t>
-            </a:r>
-            <a:endParaRPr lang="en-US" sz="1100" dirty="0"/>
-          </a:p>
-        </p:txBody>
-      </p:sp>
-      <p:sp>
-        <p:nvSpPr>
-          <p:cNvPr id="18" name="Shape 16"/>
-          <p:cNvSpPr/>
-          <p:nvPr/>
-        </p:nvSpPr>
-        <p:spPr>
-          <a:xfrm>
-            <a:off x="548640" y="3209544"/>
-            <a:ext cx="502920" cy="292608"/>
-          </a:xfrm>
-          <a:prstGeom prst="roundRect">
-            <a:avLst>
-              <a:gd name="adj" fmla="val 18750"/>
-            </a:avLst>
-          </a:prstGeom>
-          <a:solidFill>
-            <a:srgbClr val="1A6BBF"/>
-          </a:solidFill>
-          <a:ln w="12700">
-            <a:solidFill>
-              <a:srgbClr val="1A6BBF"/>
-            </a:solidFill>
-            <a:prstDash val="solid"/>
-          </a:ln>
-        </p:spPr>
-        <p:txBody>
-          <a:bodyPr/>
-          <a:p/>
-        </p:txBody>
-      </p:sp>
-      <p:sp>
-        <p:nvSpPr>
-          <p:cNvPr id="19" name="Text 17"/>
-          <p:cNvSpPr/>
-          <p:nvPr/>
-        </p:nvSpPr>
-        <p:spPr>
-          <a:xfrm>
-            <a:off x="548640" y="3209544"/>
-            <a:ext cx="502920" cy="292608"/>
-          </a:xfrm>
-          <a:prstGeom prst="rect">
-            <a:avLst/>
-          </a:prstGeom>
-          <a:noFill/>
-          <a:ln/>
-        </p:spPr>
-        <p:txBody>
-          <a:bodyPr wrap="square" lIns="0" tIns="0" rIns="0" bIns="0" rtlCol="0" anchor="ctr"/>
-          <a:lstStyle/>
-          <a:p>
-            <a:pPr algn="ctr" indent="0" marL="0">
-              <a:buNone/>
-            </a:pPr>
-            <a:r>
-              <a:rPr lang="en-US" sz="1100" b="1" dirty="0">
-                <a:solidFill>
-                  <a:srgbClr val="FFFFFF"/>
-                </a:solidFill>
-              </a:rPr>
-              <a:t>📖</a:t>
-            </a:r>
-            <a:endParaRPr lang="en-US" sz="1100" dirty="0"/>
-          </a:p>
-        </p:txBody>
-      </p:sp>
-      <p:sp>
-        <p:nvSpPr>
-          <p:cNvPr id="20" name="Text 18"/>
-          <p:cNvSpPr/>
-          <p:nvPr/>
-        </p:nvSpPr>
-        <p:spPr>
-          <a:xfrm>
-            <a:off x="1143000" y="3209544"/>
-            <a:ext cx="2194560" cy="292608"/>
-          </a:xfrm>
-          <a:prstGeom prst="rect">
-            <a:avLst/>
-          </a:prstGeom>
-          <a:noFill/>
-          <a:ln/>
-        </p:spPr>
-        <p:txBody>
-          <a:bodyPr wrap="square" lIns="0" tIns="0" rIns="0" bIns="0" rtlCol="0" anchor="ctr"/>
-          <a:lstStyle/>
-          <a:p>
-            <a:pPr indent="0" marL="0">
-              <a:buNone/>
-            </a:pPr>
-            <a:r>
-              <a:rPr lang="en-US" sz="950" b="1" dirty="0">
-                <a:solidFill>
-                  <a:srgbClr val="10B981"/>
-                </a:solidFill>
-              </a:rPr>
-              <a:t>About:</a:t>
-            </a:r>
-            <a:endParaRPr lang="en-US" sz="950" dirty="0"/>
-          </a:p>
-        </p:txBody>
-      </p:sp>
-      <p:sp>
-        <p:nvSpPr>
-          <p:cNvPr id="21" name="Text 19"/>
-          <p:cNvSpPr/>
-          <p:nvPr/>
-        </p:nvSpPr>
-        <p:spPr>
-          <a:xfrm>
-            <a:off x="3383280" y="3209544"/>
-            <a:ext cx="5212080" cy="292608"/>
-          </a:xfrm>
-          <a:prstGeom prst="rect">
-            <a:avLst/>
-          </a:prstGeom>
-          <a:noFill/>
-          <a:ln/>
-        </p:spPr>
-        <p:txBody>
-          <a:bodyPr wrap="square" lIns="0" tIns="0" rIns="0" bIns="0" rtlCol="0" anchor="ctr"/>
-          <a:lstStyle/>
-          <a:p>
-            <a:pPr indent="0" marL="0">
-              <a:buNone/>
-            </a:pPr>
-            <a:r>
-              <a:rPr lang="en-US" sz="900" dirty="0">
-                <a:solidFill>
-                  <a:srgbClr val="C0C8D8"/>
-                </a:solidFill>
-              </a:rPr>
-              <a:t>Methods, the mental-accounting framework and the research behind the app.</a:t>
-            </a:r>
-            <a:endParaRPr lang="en-US" sz="900" dirty="0"/>
-          </a:p>
-        </p:txBody>
-      </p:sp>
-      <p:sp>
-        <p:nvSpPr>
-          <p:cNvPr id="22" name="Shape 20"/>
-          <p:cNvSpPr/>
-          <p:nvPr/>
-        </p:nvSpPr>
-        <p:spPr>
-          <a:xfrm>
-            <a:off x="548640" y="3547872"/>
-            <a:ext cx="502920" cy="292608"/>
-          </a:xfrm>
-          <a:prstGeom prst="roundRect">
-            <a:avLst>
-              <a:gd name="adj" fmla="val 18750"/>
-            </a:avLst>
-          </a:prstGeom>
-          <a:solidFill>
-            <a:srgbClr val="1A6BBF"/>
-          </a:solidFill>
-          <a:ln w="12700">
-            <a:solidFill>
-              <a:srgbClr val="1A6BBF"/>
-            </a:solidFill>
-            <a:prstDash val="solid"/>
-          </a:ln>
-        </p:spPr>
-        <p:txBody>
-          <a:bodyPr/>
-          <a:p/>
-        </p:txBody>
-      </p:sp>
-      <p:sp>
-        <p:nvSpPr>
-          <p:cNvPr id="23" name="Text 21"/>
-          <p:cNvSpPr/>
-          <p:nvPr/>
-        </p:nvSpPr>
-        <p:spPr>
-          <a:xfrm>
-            <a:off x="548640" y="3547872"/>
-            <a:ext cx="502920" cy="292608"/>
-          </a:xfrm>
-          <a:prstGeom prst="rect">
-            <a:avLst/>
-          </a:prstGeom>
-          <a:noFill/>
-          <a:ln/>
-        </p:spPr>
-        <p:txBody>
-          <a:bodyPr wrap="square" lIns="0" tIns="0" rIns="0" bIns="0" rtlCol="0" anchor="ctr"/>
-          <a:lstStyle/>
-          <a:p>
-            <a:pPr algn="ctr" indent="0" marL="0">
-              <a:buNone/>
-            </a:pPr>
-            <a:r>
-              <a:rPr lang="en-US" sz="1100" b="1" dirty="0">
-                <a:solidFill>
-                  <a:srgbClr val="FFFFFF"/>
-                </a:solidFill>
-              </a:rPr>
-              <a:t>📚</a:t>
-            </a:r>
-            <a:endParaRPr lang="en-US" sz="1100" dirty="0"/>
-          </a:p>
-        </p:txBody>
-      </p:sp>
-      <p:sp>
-        <p:nvSpPr>
-          <p:cNvPr id="24" name="Text 22"/>
-          <p:cNvSpPr/>
-          <p:nvPr/>
-        </p:nvSpPr>
-        <p:spPr>
-          <a:xfrm>
-            <a:off x="1143000" y="3547872"/>
-            <a:ext cx="2194560" cy="292608"/>
-          </a:xfrm>
-          <a:prstGeom prst="rect">
-            <a:avLst/>
-          </a:prstGeom>
-          <a:noFill/>
-          <a:ln/>
-        </p:spPr>
-        <p:txBody>
-          <a:bodyPr wrap="square" lIns="0" tIns="0" rIns="0" bIns="0" rtlCol="0" anchor="ctr"/>
-          <a:lstStyle/>
-          <a:p>
-            <a:pPr indent="0" marL="0">
-              <a:buNone/>
-            </a:pPr>
-            <a:r>
-              <a:rPr lang="en-US" sz="950" b="1" dirty="0">
-                <a:solidFill>
-                  <a:srgbClr val="F59E0B"/>
-                </a:solidFill>
-              </a:rPr>
-              <a:t>Glossary:</a:t>
-            </a:r>
-            <a:endParaRPr lang="en-US" sz="950" dirty="0"/>
-          </a:p>
-        </p:txBody>
-      </p:sp>
-      <p:sp>
-        <p:nvSpPr>
-          <p:cNvPr id="25" name="Text 23"/>
-          <p:cNvSpPr/>
-          <p:nvPr/>
-        </p:nvSpPr>
-        <p:spPr>
-          <a:xfrm>
-            <a:off x="3383280" y="3547872"/>
-            <a:ext cx="5212080" cy="292608"/>
-          </a:xfrm>
-          <a:prstGeom prst="rect">
-            <a:avLst/>
-          </a:prstGeom>
-          <a:noFill/>
-          <a:ln/>
-        </p:spPr>
-        <p:txBody>
-          <a:bodyPr wrap="square" lIns="0" tIns="0" rIns="0" bIns="0" rtlCol="0" anchor="ctr"/>
-          <a:lstStyle/>
-          <a:p>
-            <a:pPr indent="0" marL="0">
-              <a:buNone/>
-            </a:pPr>
-            <a:r>
-              <a:rPr lang="en-US" sz="900" dirty="0">
-                <a:solidFill>
-                  <a:srgbClr val="C0C8D8"/>
-                </a:solidFill>
-              </a:rPr>
-              <a:t>Plain-language, AI-powered definitions — VaR, ES, α-CVaR, copulas, alpha &amp; beta.</a:t>
-            </a:r>
-            <a:endParaRPr lang="en-US" sz="900" dirty="0"/>
-          </a:p>
-        </p:txBody>
-      </p:sp>
-      <p:sp>
-        <p:nvSpPr>
-          <p:cNvPr id="26" name="Shape 24"/>
-          <p:cNvSpPr/>
-          <p:nvPr/>
-        </p:nvSpPr>
-        <p:spPr>
-          <a:xfrm>
-            <a:off x="548640" y="3886200"/>
-            <a:ext cx="502920" cy="292608"/>
-          </a:xfrm>
-          <a:prstGeom prst="roundRect">
-            <a:avLst>
-              <a:gd name="adj" fmla="val 18750"/>
-            </a:avLst>
-          </a:prstGeom>
-          <a:solidFill>
-            <a:srgbClr val="1A6BBF"/>
-          </a:solidFill>
-          <a:ln w="12700">
-            <a:solidFill>
-              <a:srgbClr val="1A6BBF"/>
-            </a:solidFill>
-            <a:prstDash val="solid"/>
-          </a:ln>
-        </p:spPr>
-        <p:txBody>
-          <a:bodyPr/>
-          <a:p/>
-        </p:txBody>
-      </p:sp>
-      <p:sp>
-        <p:nvSpPr>
-          <p:cNvPr id="27" name="Text 25"/>
-          <p:cNvSpPr/>
-          <p:nvPr/>
-        </p:nvSpPr>
-        <p:spPr>
-          <a:xfrm>
-            <a:off x="548640" y="3886200"/>
-            <a:ext cx="502920" cy="292608"/>
-          </a:xfrm>
-          <a:prstGeom prst="rect">
-            <a:avLst/>
-          </a:prstGeom>
-          <a:noFill/>
-          <a:ln/>
-        </p:spPr>
-        <p:txBody>
-          <a:bodyPr wrap="square" lIns="0" tIns="0" rIns="0" bIns="0" rtlCol="0" anchor="ctr"/>
-          <a:lstStyle/>
-          <a:p>
-            <a:pPr algn="ctr" indent="0" marL="0">
-              <a:buNone/>
-            </a:pPr>
-            <a:r>
-              <a:rPr lang="en-US" sz="1100" b="1" dirty="0">
-                <a:solidFill>
-                  <a:srgbClr val="FFFFFF"/>
-                </a:solidFill>
-              </a:rPr>
-              <a:t>💡</a:t>
-            </a:r>
-            <a:endParaRPr lang="en-US" sz="1100" dirty="0"/>
-          </a:p>
-        </p:txBody>
-      </p:sp>
-      <p:sp>
-        <p:nvSpPr>
-          <p:cNvPr id="28" name="Text 26"/>
-          <p:cNvSpPr/>
-          <p:nvPr/>
-        </p:nvSpPr>
-        <p:spPr>
-          <a:xfrm>
-            <a:off x="1143000" y="3886200"/>
-            <a:ext cx="2194560" cy="292608"/>
-          </a:xfrm>
-          <a:prstGeom prst="rect">
-            <a:avLst/>
-          </a:prstGeom>
-          <a:noFill/>
-          <a:ln/>
-        </p:spPr>
-        <p:txBody>
-          <a:bodyPr wrap="square" lIns="0" tIns="0" rIns="0" bIns="0" rtlCol="0" anchor="ctr"/>
-          <a:lstStyle/>
-          <a:p>
-            <a:pPr indent="0" marL="0">
-              <a:buNone/>
-            </a:pPr>
-            <a:r>
-              <a:rPr lang="en-US" sz="950" b="1" dirty="0">
-                <a:solidFill>
-                  <a:srgbClr val="E76F51"/>
-                </a:solidFill>
-              </a:rPr>
-              <a:t>Tip:</a:t>
-            </a:r>
-            <a:endParaRPr lang="en-US" sz="950" dirty="0"/>
-          </a:p>
-        </p:txBody>
-      </p:sp>
-      <p:sp>
-        <p:nvSpPr>
-          <p:cNvPr id="29" name="Text 27"/>
-          <p:cNvSpPr/>
-          <p:nvPr/>
-        </p:nvSpPr>
-        <p:spPr>
-          <a:xfrm>
-            <a:off x="3383280" y="3886200"/>
-            <a:ext cx="5212080" cy="292608"/>
-          </a:xfrm>
-          <a:prstGeom prst="rect">
-            <a:avLst/>
-          </a:prstGeom>
-          <a:noFill/>
-          <a:ln/>
-        </p:spPr>
-        <p:txBody>
-          <a:bodyPr wrap="square" lIns="0" tIns="0" rIns="0" bIns="0" rtlCol="0" anchor="ctr"/>
-          <a:lstStyle/>
-          <a:p>
-            <a:pPr indent="0" marL="0">
-              <a:buNone/>
-            </a:pPr>
-            <a:r>
-              <a:rPr lang="en-US" sz="900" dirty="0">
-                <a:solidFill>
-                  <a:srgbClr val="C0C8D8"/>
-                </a:solidFill>
-              </a:rPr>
-              <a:t>Each tile opens a tool; the Grid Portfolio Optimiser is the place to start.</a:t>
-            </a:r>
-            <a:endParaRPr lang="en-US" sz="900" dirty="0"/>
-          </a:p>
-        </p:txBody>
-      </p:sp>
-      <p:sp>
-        <p:nvSpPr>
-          <p:cNvPr id="30" name="Text 28"/>
-          <p:cNvSpPr/>
-          <p:nvPr/>
-        </p:nvSpPr>
-        <p:spPr>
-          <a:xfrm>
-            <a:off x="8046720" y="4754880"/>
-            <a:ext cx="914400" cy="274320"/>
-          </a:xfrm>
-          <a:prstGeom prst="rect">
-            <a:avLst/>
-          </a:prstGeom>
-          <a:noFill/>
-          <a:ln/>
-        </p:spPr>
-        <p:txBody>
-          <a:bodyPr wrap="square" rtlCol="0" anchor="ctr"/>
-          <a:lstStyle/>
-          <a:p>
-            <a:pPr algn="r" indent="0" marL="0">
-              <a:buNone/>
-            </a:pPr>
-            <a:r>
-              <a:rPr lang="en-US" sz="900" dirty="0">
-                <a:solidFill>
-                  <a:srgbClr val="556A8A"/>
-                </a:solidFill>
-              </a:rPr>
-              <a:t>3 / 18</a:t>
-            </a:r>
-            <a:endParaRPr lang="en-US" sz="900" dirty="0"/>
-          </a:p>
-        </p:txBody>
-      </p:sp>
-      <p:sp>
-        <p:nvSpPr>
-          <p:cNvPr id="31" name="Text 29"/>
-          <p:cNvSpPr/>
-          <p:nvPr/>
-        </p:nvSpPr>
-        <p:spPr>
-          <a:xfrm>
-            <a:off x="365760" y="4754880"/>
-            <a:ext cx="6400800" cy="274320"/>
-          </a:xfrm>
-          <a:prstGeom prst="rect">
-            <a:avLst/>
-          </a:prstGeom>
-          <a:noFill/>
-          <a:ln/>
-        </p:spPr>
-        <p:txBody>
-          <a:bodyPr wrap="square" rtlCol="0" anchor="ctr"/>
-          <a:lstStyle/>
-          <a:p>
-            <a:pPr algn="l" indent="0" marL="0">
-              <a:buNone/>
-            </a:pPr>
-            <a:r>
-              <a:rPr lang="en-US" sz="900" dirty="0">
-                <a:solidFill>
-                  <a:srgbClr val="556A8A"/>
-                </a:solidFill>
-              </a:rPr>
-              <a:t>Beyond Mean-Variance Portfolio Optimiser — User Guide</a:t>
-            </a:r>
-            <a:endParaRPr lang="en-US" sz="900" dirty="0"/>
-          </a:p>
-        </p:txBody>
-      </p:sp>
     </p:spTree>
   </p:cSld>
   <p:clrMapOvr>
@@ -8649,7 +8773,7 @@
                   <a:srgbClr val="FFFFFF"/>
                 </a:solidFill>
               </a:rPr>
-              <a:t>Grid Portfolio Optimiser — overview</a:t>
+              <a:t>Home — choose a tool</a:t>
             </a:r>
             <a:endParaRPr lang="en-US" sz="2600" dirty="0"/>
           </a:p>
@@ -8693,42 +8817,6 @@
       </p:sp>
       <p:sp>
         <p:nvSpPr>
-          <p:cNvPr id="5" name="Text 3"/>
-          <p:cNvSpPr/>
-          <p:nvPr/>
-        </p:nvSpPr>
-        <p:spPr>
-          <a:xfrm>
-            <a:off x="365760" y="960120"/>
-            <a:ext cx="2651760" cy="502920"/>
-          </a:xfrm>
-          <a:prstGeom prst="rect">
-            <a:avLst/>
-          </a:prstGeom>
-          <a:noFill/>
-          <a:ln/>
-        </p:spPr>
-        <p:txBody>
-          <a:bodyPr wrap="square" rtlCol="0" anchor="ctr"/>
-          <a:lstStyle/>
-          <a:p>
-            <a:pPr algn="ctr" indent="0" marL="0">
-              <a:buNone/>
-            </a:pPr>
-            <a:r>
-              <a:rPr lang="en-US" sz="2200" dirty="0">
-                <a:solidFill>
-                  <a:srgbClr val="000000"/>
-                </a:solidFill>
-              </a:rPr>
-              <a:t>📊</a:t>
-            </a:r>
-            <a:endParaRPr lang="en-US" sz="2200" dirty="0"/>
-          </a:p>
-        </p:txBody>
-      </p:sp>
-      <p:sp>
-        <p:nvSpPr>
           <p:cNvPr id="6" name="Text 4"/>
           <p:cNvSpPr/>
           <p:nvPr/>
@@ -8757,7 +8845,7 @@
                   <a:srgbClr val="4A9EFF"/>
                 </a:solidFill>
               </a:rPr>
-              <a:t>Interactive Frontiers</a:t>
+              <a:t>Grid Portfolio Optimiser</a:t>
             </a:r>
             <a:endParaRPr lang="en-US" sz="1100" dirty="0"/>
           </a:p>
@@ -8793,7 +8881,7 @@
                   <a:srgbClr val="C0C8D8"/>
                 </a:solidFill>
               </a:rPr>
-              <a:t>MV vs Behavioural vs Derivative frontier — visualised side by side on a single chart</a:t>
+              <a:t>Exact grid engine on the Das–Statman states — VaR, thesis-ES and rigorous-ES, with derivatives.</a:t>
             </a:r>
             <a:endParaRPr lang="en-US" sz="950" dirty="0"/>
           </a:p>
@@ -8837,42 +8925,6 @@
       </p:sp>
       <p:sp>
         <p:nvSpPr>
-          <p:cNvPr id="9" name="Text 7"/>
-          <p:cNvSpPr/>
-          <p:nvPr/>
-        </p:nvSpPr>
-        <p:spPr>
-          <a:xfrm>
-            <a:off x="3200400" y="960120"/>
-            <a:ext cx="2651760" cy="502920"/>
-          </a:xfrm>
-          <a:prstGeom prst="rect">
-            <a:avLst/>
-          </a:prstGeom>
-          <a:noFill/>
-          <a:ln/>
-        </p:spPr>
-        <p:txBody>
-          <a:bodyPr wrap="square" rtlCol="0" anchor="ctr"/>
-          <a:lstStyle/>
-          <a:p>
-            <a:pPr algn="ctr" indent="0" marL="0">
-              <a:buNone/>
-            </a:pPr>
-            <a:r>
-              <a:rPr lang="en-US" sz="2200" dirty="0">
-                <a:solidFill>
-                  <a:srgbClr val="000000"/>
-                </a:solidFill>
-              </a:rPr>
-              <a:t>🎯</a:t>
-            </a:r>
-            <a:endParaRPr lang="en-US" sz="2200" dirty="0"/>
-          </a:p>
-        </p:txBody>
-      </p:sp>
-      <p:sp>
-        <p:nvSpPr>
           <p:cNvPr id="10" name="Text 8"/>
           <p:cNvSpPr/>
           <p:nvPr/>
@@ -8901,7 +8953,7 @@
                   <a:srgbClr val="4A9EFF"/>
                 </a:solidFill>
               </a:rPr>
-              <a:t>Three Portfolios</a:t>
+              <a:t>Scalable Portfolio Optimiser</a:t>
             </a:r>
             <a:endParaRPr lang="en-US" sz="1100" dirty="0"/>
           </a:p>
@@ -8937,7 +8989,7 @@
                   <a:srgbClr val="C0C8D8"/>
                 </a:solidFill>
               </a:rPr>
-              <a:t>No derivative / With derivative / Same risk — three perspectives for each optimisation run</a:t>
+              <a:t>Monte-Carlo scenarios + α-CVaR linear program — scales to large, multi-derivative portfolios.</a:t>
             </a:r>
             <a:endParaRPr lang="en-US" sz="950" dirty="0"/>
           </a:p>
@@ -8981,42 +9033,6 @@
       </p:sp>
       <p:sp>
         <p:nvSpPr>
-          <p:cNvPr id="13" name="Text 11"/>
-          <p:cNvSpPr/>
-          <p:nvPr/>
-        </p:nvSpPr>
-        <p:spPr>
-          <a:xfrm>
-            <a:off x="6035040" y="960120"/>
-            <a:ext cx="2651760" cy="502920"/>
-          </a:xfrm>
-          <a:prstGeom prst="rect">
-            <a:avLst/>
-          </a:prstGeom>
-          <a:noFill/>
-          <a:ln/>
-        </p:spPr>
-        <p:txBody>
-          <a:bodyPr wrap="square" rtlCol="0" anchor="ctr"/>
-          <a:lstStyle/>
-          <a:p>
-            <a:pPr algn="ctr" indent="0" marL="0">
-              <a:buNone/>
-            </a:pPr>
-            <a:r>
-              <a:rPr lang="en-US" sz="2200" dirty="0">
-                <a:solidFill>
-                  <a:srgbClr val="000000"/>
-                </a:solidFill>
-              </a:rPr>
-              <a:t>🤖</a:t>
-            </a:r>
-            <a:endParaRPr lang="en-US" sz="2200" dirty="0"/>
-          </a:p>
-        </p:txBody>
-      </p:sp>
-      <p:sp>
-        <p:nvSpPr>
           <p:cNvPr id="14" name="Text 12"/>
           <p:cNvSpPr/>
           <p:nvPr/>
@@ -9045,7 +9061,7 @@
                   <a:srgbClr val="4A9EFF"/>
                 </a:solidFill>
               </a:rPr>
-              <a:t>AI-Powered</a:t>
+              <a:t>Backtest</a:t>
             </a:r>
             <a:endParaRPr lang="en-US" sz="1100" dirty="0"/>
           </a:p>
@@ -9081,7 +9097,7 @@
                   <a:srgbClr val="C0C8D8"/>
                 </a:solidFill>
               </a:rPr>
-              <a:t>On-demand explanations for every parameter, constraint, derivative type, and result</a:t>
+              <a:t>Out-of-sample walk-forward — expected vs realised, plus realised alpha &amp; beta.</a:t>
             </a:r>
             <a:endParaRPr lang="en-US" sz="950" dirty="0"/>
           </a:p>
@@ -9096,7 +9112,7 @@
         <p:spPr>
           <a:xfrm>
             <a:off x="365760" y="2834640"/>
-            <a:ext cx="8412480" cy="1580000"/>
+            <a:ext cx="8412480" cy="1508760"/>
           </a:xfrm>
           <a:prstGeom prst="rect">
             <a:avLst/>
@@ -9146,7 +9162,7 @@
                   <a:srgbClr val="4A9EFF"/>
                 </a:solidFill>
               </a:rPr>
-              <a:t>Portfolio perspectives (0–3)</a:t>
+              <a:t>Reference &amp; navigation</a:t>
             </a:r>
             <a:endParaRPr lang="en-US" sz="1100" dirty="0"/>
           </a:p>
@@ -9160,8 +9176,8 @@
         </p:nvSpPr>
         <p:spPr>
           <a:xfrm>
-            <a:off x="548640" y="3564864"/>
-            <a:ext cx="502920" cy="182880"/>
+            <a:off x="548640" y="3209544"/>
+            <a:ext cx="502920" cy="292608"/>
           </a:xfrm>
           <a:prstGeom prst="roundRect">
             <a:avLst>
@@ -9185,14 +9201,14 @@
       </p:sp>
       <p:sp>
         <p:nvSpPr>
-          <p:cNvPr id="19" name="Text 17"/>
-          <p:cNvSpPr/>
-          <p:nvPr/>
-        </p:nvSpPr>
-        <p:spPr>
-          <a:xfrm>
-            <a:off x="548640" y="3564864"/>
-            <a:ext cx="502920" cy="182880"/>
+          <p:cNvPr id="20" name="Text 18"/>
+          <p:cNvSpPr/>
+          <p:nvPr/>
+        </p:nvSpPr>
+        <p:spPr>
+          <a:xfrm>
+            <a:off x="1143000" y="3209544"/>
+            <a:ext cx="2194560" cy="292608"/>
           </a:xfrm>
           <a:prstGeom prst="rect">
             <a:avLst/>
@@ -9204,31 +9220,31 @@
           <a:bodyPr wrap="square" lIns="0" tIns="0" rIns="0" bIns="0" rtlCol="0" anchor="ctr"/>
           <a:lstStyle/>
           <a:p>
-            <a:pPr algn="ctr" indent="0" marL="0">
-              <a:buNone/>
-            </a:pPr>
-            <a:r>
-              <a:rPr lang="en-US" sz="1100" b="1" dirty="0">
-                <a:solidFill>
-                  <a:srgbClr val="FFFFFF"/>
-                </a:solidFill>
-              </a:rPr>
-              <a:t>1</a:t>
-            </a:r>
-            <a:endParaRPr lang="en-US" sz="1100" dirty="0"/>
-          </a:p>
-        </p:txBody>
-      </p:sp>
-      <p:sp>
-        <p:nvSpPr>
-          <p:cNvPr id="20" name="Text 18"/>
-          <p:cNvSpPr/>
-          <p:nvPr/>
-        </p:nvSpPr>
-        <p:spPr>
-          <a:xfrm>
-            <a:off x="1143000" y="3510000"/>
-            <a:ext cx="2194560" cy="292608"/>
+            <a:pPr indent="0" marL="0">
+              <a:buNone/>
+            </a:pPr>
+            <a:r>
+              <a:rPr lang="en-US" sz="950" b="1" dirty="0">
+                <a:solidFill>
+                  <a:srgbClr val="10B981"/>
+                </a:solidFill>
+              </a:rPr>
+              <a:t>About:</a:t>
+            </a:r>
+            <a:endParaRPr lang="en-US" sz="950" dirty="0"/>
+          </a:p>
+        </p:txBody>
+      </p:sp>
+      <p:sp>
+        <p:nvSpPr>
+          <p:cNvPr id="21" name="Text 19"/>
+          <p:cNvSpPr/>
+          <p:nvPr/>
+        </p:nvSpPr>
+        <p:spPr>
+          <a:xfrm>
+            <a:off x="3383280" y="3209544"/>
+            <a:ext cx="5212080" cy="292608"/>
           </a:xfrm>
           <a:prstGeom prst="rect">
             <a:avLst/>
@@ -9244,48 +9260,12 @@
               <a:buNone/>
             </a:pPr>
             <a:r>
-              <a:rPr lang="en-US" sz="950" b="1" dirty="0">
-                <a:solidFill>
-                  <a:srgbClr val="10B981"/>
-                </a:solidFill>
-              </a:rPr>
-              <a:t>Portfolio (1) — No derivative:</a:t>
-            </a:r>
-            <a:endParaRPr lang="en-US" sz="950" dirty="0"/>
-          </a:p>
-        </p:txBody>
-      </p:sp>
-      <p:sp>
-        <p:nvSpPr>
-          <p:cNvPr id="21" name="Text 19"/>
-          <p:cNvSpPr/>
-          <p:nvPr/>
-        </p:nvSpPr>
-        <p:spPr>
-          <a:xfrm>
-            <a:off x="3383280" y="3510000"/>
-            <a:ext cx="5212080" cy="292608"/>
-          </a:xfrm>
-          <a:prstGeom prst="rect">
-            <a:avLst/>
-          </a:prstGeom>
-          <a:noFill/>
-          <a:ln/>
-        </p:spPr>
-        <p:txBody>
-          <a:bodyPr wrap="square" lIns="0" tIns="0" rIns="0" bIns="0" rtlCol="0" anchor="ctr"/>
-          <a:lstStyle/>
-          <a:p>
-            <a:pPr indent="0" marL="0">
-              <a:buNone/>
-            </a:pPr>
-            <a:r>
               <a:rPr lang="en-US" sz="900" dirty="0">
                 <a:solidFill>
                   <a:srgbClr val="C0C8D8"/>
                 </a:solidFill>
               </a:rPr>
-              <a:t>Equivalent to MV optimum — confirms MVT/MAT equivalence. Most classical optimisers stop here.</a:t>
+              <a:t>Methods, the mental-accounting framework and the research behind the app.</a:t>
             </a:r>
             <a:endParaRPr lang="en-US" sz="900" dirty="0"/>
           </a:p>
@@ -9299,8 +9279,8 @@
         </p:nvSpPr>
         <p:spPr>
           <a:xfrm>
-            <a:off x="548640" y="3864864"/>
-            <a:ext cx="502920" cy="182880"/>
+            <a:off x="548640" y="3547872"/>
+            <a:ext cx="502920" cy="292608"/>
           </a:xfrm>
           <a:prstGeom prst="roundRect">
             <a:avLst>
@@ -9324,14 +9304,14 @@
       </p:sp>
       <p:sp>
         <p:nvSpPr>
-          <p:cNvPr id="23" name="Text 21"/>
-          <p:cNvSpPr/>
-          <p:nvPr/>
-        </p:nvSpPr>
-        <p:spPr>
-          <a:xfrm>
-            <a:off x="548640" y="3864864"/>
-            <a:ext cx="502920" cy="182880"/>
+          <p:cNvPr id="24" name="Text 22"/>
+          <p:cNvSpPr/>
+          <p:nvPr/>
+        </p:nvSpPr>
+        <p:spPr>
+          <a:xfrm>
+            <a:off x="1143000" y="3547872"/>
+            <a:ext cx="2194560" cy="292608"/>
           </a:xfrm>
           <a:prstGeom prst="rect">
             <a:avLst/>
@@ -9343,31 +9323,31 @@
           <a:bodyPr wrap="square" lIns="0" tIns="0" rIns="0" bIns="0" rtlCol="0" anchor="ctr"/>
           <a:lstStyle/>
           <a:p>
-            <a:pPr algn="ctr" indent="0" marL="0">
-              <a:buNone/>
-            </a:pPr>
-            <a:r>
-              <a:rPr lang="en-US" sz="1100" b="1" dirty="0">
-                <a:solidFill>
-                  <a:srgbClr val="FFFFFF"/>
-                </a:solidFill>
-              </a:rPr>
-              <a:t>2</a:t>
-            </a:r>
-            <a:endParaRPr lang="en-US" sz="1100" dirty="0"/>
-          </a:p>
-        </p:txBody>
-      </p:sp>
-      <p:sp>
-        <p:nvSpPr>
-          <p:cNvPr id="24" name="Text 22"/>
-          <p:cNvSpPr/>
-          <p:nvPr/>
-        </p:nvSpPr>
-        <p:spPr>
-          <a:xfrm>
-            <a:off x="1143000" y="3810000"/>
-            <a:ext cx="2194560" cy="292608"/>
+            <a:pPr indent="0" marL="0">
+              <a:buNone/>
+            </a:pPr>
+            <a:r>
+              <a:rPr lang="en-US" sz="950" b="1" dirty="0">
+                <a:solidFill>
+                  <a:srgbClr val="F59E0B"/>
+                </a:solidFill>
+              </a:rPr>
+              <a:t>Glossary:</a:t>
+            </a:r>
+            <a:endParaRPr lang="en-US" sz="950" dirty="0"/>
+          </a:p>
+        </p:txBody>
+      </p:sp>
+      <p:sp>
+        <p:nvSpPr>
+          <p:cNvPr id="25" name="Text 23"/>
+          <p:cNvSpPr/>
+          <p:nvPr/>
+        </p:nvSpPr>
+        <p:spPr>
+          <a:xfrm>
+            <a:off x="3383280" y="3547872"/>
+            <a:ext cx="5212080" cy="292608"/>
           </a:xfrm>
           <a:prstGeom prst="rect">
             <a:avLst/>
@@ -9383,48 +9363,12 @@
               <a:buNone/>
             </a:pPr>
             <a:r>
-              <a:rPr lang="en-US" sz="950" b="1" dirty="0">
-                <a:solidFill>
-                  <a:srgbClr val="F59E0B"/>
-                </a:solidFill>
-              </a:rPr>
-              <a:t>Portfolio (2) — With derivative:</a:t>
-            </a:r>
-            <a:endParaRPr lang="en-US" sz="950" dirty="0"/>
-          </a:p>
-        </p:txBody>
-      </p:sp>
-      <p:sp>
-        <p:nvSpPr>
-          <p:cNvPr id="25" name="Text 23"/>
-          <p:cNvSpPr/>
-          <p:nvPr/>
-        </p:nvSpPr>
-        <p:spPr>
-          <a:xfrm>
-            <a:off x="3383280" y="3810000"/>
-            <a:ext cx="5212080" cy="292608"/>
-          </a:xfrm>
-          <a:prstGeom prst="rect">
-            <a:avLst/>
-          </a:prstGeom>
-          <a:noFill/>
-          <a:ln/>
-        </p:spPr>
-        <p:txBody>
-          <a:bodyPr wrap="square" lIns="0" tIns="0" rIns="0" bIns="0" rtlCol="0" anchor="ctr"/>
-          <a:lstStyle/>
-          <a:p>
-            <a:pPr indent="0" marL="0">
-              <a:buNone/>
-            </a:pPr>
-            <a:r>
               <a:rPr lang="en-US" sz="900" dirty="0">
                 <a:solidFill>
                   <a:srgbClr val="C0C8D8"/>
                 </a:solidFill>
               </a:rPr>
-              <a:t>Same implied λ and downside constraint (H,α or H,α,L) — shows return uplift from derivatives.</a:t>
+              <a:t>Plain-language, AI-powered definitions — VaR, ES, α-CVaR, copulas, alpha &amp; beta.</a:t>
             </a:r>
             <a:endParaRPr lang="en-US" sz="900" dirty="0"/>
           </a:p>
@@ -9438,8 +9382,8 @@
         </p:nvSpPr>
         <p:spPr>
           <a:xfrm>
-            <a:off x="548640" y="4164864"/>
-            <a:ext cx="502920" cy="182880"/>
+            <a:off x="548640" y="3886200"/>
+            <a:ext cx="502920" cy="292608"/>
           </a:xfrm>
           <a:prstGeom prst="roundRect">
             <a:avLst>
@@ -9463,14 +9407,14 @@
       </p:sp>
       <p:sp>
         <p:nvSpPr>
-          <p:cNvPr id="27" name="Text 25"/>
-          <p:cNvSpPr/>
-          <p:nvPr/>
-        </p:nvSpPr>
-        <p:spPr>
-          <a:xfrm>
-            <a:off x="548640" y="4164864"/>
-            <a:ext cx="502920" cy="182880"/>
+          <p:cNvPr id="28" name="Text 26"/>
+          <p:cNvSpPr/>
+          <p:nvPr/>
+        </p:nvSpPr>
+        <p:spPr>
+          <a:xfrm>
+            <a:off x="1143000" y="3886200"/>
+            <a:ext cx="2194560" cy="292608"/>
           </a:xfrm>
           <a:prstGeom prst="rect">
             <a:avLst/>
@@ -9482,31 +9426,31 @@
           <a:bodyPr wrap="square" lIns="0" tIns="0" rIns="0" bIns="0" rtlCol="0" anchor="ctr"/>
           <a:lstStyle/>
           <a:p>
-            <a:pPr algn="ctr" indent="0" marL="0">
-              <a:buNone/>
-            </a:pPr>
-            <a:r>
-              <a:rPr lang="en-US" sz="1100" b="1" dirty="0">
-                <a:solidFill>
-                  <a:srgbClr val="FFFFFF"/>
-                </a:solidFill>
-              </a:rPr>
-              <a:t>3</a:t>
-            </a:r>
-            <a:endParaRPr lang="en-US" sz="1100" dirty="0"/>
-          </a:p>
-        </p:txBody>
-      </p:sp>
-      <p:sp>
-        <p:nvSpPr>
-          <p:cNvPr id="28" name="Text 26"/>
-          <p:cNvSpPr/>
-          <p:nvPr/>
-        </p:nvSpPr>
-        <p:spPr>
-          <a:xfrm>
-            <a:off x="1143000" y="4110000"/>
-            <a:ext cx="2194560" cy="292608"/>
+            <a:pPr indent="0" marL="0">
+              <a:buNone/>
+            </a:pPr>
+            <a:r>
+              <a:rPr lang="en-US" sz="950" b="1" dirty="0">
+                <a:solidFill>
+                  <a:srgbClr val="E76F51"/>
+                </a:solidFill>
+              </a:rPr>
+              <a:t>Tip:</a:t>
+            </a:r>
+            <a:endParaRPr lang="en-US" sz="950" dirty="0"/>
+          </a:p>
+        </p:txBody>
+      </p:sp>
+      <p:sp>
+        <p:nvSpPr>
+          <p:cNvPr id="29" name="Text 27"/>
+          <p:cNvSpPr/>
+          <p:nvPr/>
+        </p:nvSpPr>
+        <p:spPr>
+          <a:xfrm>
+            <a:off x="3383280" y="3886200"/>
+            <a:ext cx="5212080" cy="292608"/>
           </a:xfrm>
           <a:prstGeom prst="rect">
             <a:avLst/>
@@ -9522,48 +9466,12 @@
               <a:buNone/>
             </a:pPr>
             <a:r>
-              <a:rPr lang="en-US" sz="950" b="1" dirty="0">
-                <a:solidFill>
-                  <a:srgbClr val="E76F51"/>
-                </a:solidFill>
-              </a:rPr>
-              <a:t>Portfolio (3) — Same risk as (1):</a:t>
-            </a:r>
-            <a:endParaRPr lang="en-US" sz="950" dirty="0"/>
-          </a:p>
-        </p:txBody>
-      </p:sp>
-      <p:sp>
-        <p:nvSpPr>
-          <p:cNvPr id="29" name="Text 27"/>
-          <p:cNvSpPr/>
-          <p:nvPr/>
-        </p:nvSpPr>
-        <p:spPr>
-          <a:xfrm>
-            <a:off x="3383280" y="4110000"/>
-            <a:ext cx="5212080" cy="292608"/>
-          </a:xfrm>
-          <a:prstGeom prst="rect">
-            <a:avLst/>
-          </a:prstGeom>
-          <a:noFill/>
-          <a:ln/>
-        </p:spPr>
-        <p:txBody>
-          <a:bodyPr wrap="square" lIns="0" tIns="0" rIns="0" bIns="0" rtlCol="0" anchor="ctr"/>
-          <a:lstStyle/>
-          <a:p>
-            <a:pPr indent="0" marL="0">
-              <a:buNone/>
-            </a:pPr>
-            <a:r>
               <a:rPr lang="en-US" sz="900" dirty="0">
                 <a:solidFill>
                   <a:srgbClr val="C0C8D8"/>
                 </a:solidFill>
               </a:rPr>
-              <a:t>Interpolated at P(1) std dev — direct comparison of return gain at equivalent risk (indicative).</a:t>
+              <a:t>Each tile opens a tool; the Grid Portfolio Optimiser is the place to start.</a:t>
             </a:r>
             <a:endParaRPr lang="en-US" sz="900" dirty="0"/>
           </a:p>
@@ -9599,7 +9507,7 @@
                   <a:srgbClr val="556A8A"/>
                 </a:solidFill>
               </a:rPr>
-              <a:t>4 / 18</a:t>
+              <a:t>3 / 19</a:t>
             </a:r>
             <a:endParaRPr lang="en-US" sz="900" dirty="0"/>
           </a:p>
@@ -9641,21 +9549,195 @@
           </a:p>
         </p:txBody>
       </p:sp>
-      <p:sp>
-        <p:nvSpPr>
-          <p:cNvPr id="50" name="P0 badge"/>
-          <p:cNvSpPr/>
-          <p:nvPr/>
-        </p:nvSpPr>
-        <p:spPr>
-          <a:xfrm>
-            <a:off x="548640" y="3264864"/>
-            <a:ext cx="502920" cy="182880"/>
-          </a:xfrm>
-          <a:prstGeom prst="roundRect">
-            <a:avLst>
-              <a:gd name="adj" fmla="val 18750"/>
-            </a:avLst>
+      <p:pic>
+        <p:nvPicPr>
+          <p:cNvPr id="32" name="Picture 31" descr="grid_4a9eff_0.png"/>
+          <p:cNvPicPr>
+            <a:picLocks noChangeAspect="1"/>
+          </p:cNvPicPr>
+          <p:nvPr/>
+        </p:nvPicPr>
+        <p:blipFill>
+          <a:blip r:embed="rId2"/>
+          <a:stretch>
+            <a:fillRect/>
+          </a:stretch>
+        </p:blipFill>
+        <p:spPr>
+          <a:xfrm>
+            <a:off x="1577340" y="1097280"/>
+            <a:ext cx="228600" cy="228600"/>
+          </a:xfrm>
+          <a:prstGeom prst="rect">
+            <a:avLst/>
+          </a:prstGeom>
+        </p:spPr>
+      </p:pic>
+      <p:pic>
+        <p:nvPicPr>
+          <p:cNvPr id="33" name="Picture 32" descr="layers_f5b942_0.png"/>
+          <p:cNvPicPr>
+            <a:picLocks noChangeAspect="1"/>
+          </p:cNvPicPr>
+          <p:nvPr/>
+        </p:nvPicPr>
+        <p:blipFill>
+          <a:blip r:embed="rId3"/>
+          <a:stretch>
+            <a:fillRect/>
+          </a:stretch>
+        </p:blipFill>
+        <p:spPr>
+          <a:xfrm>
+            <a:off x="4411980" y="1097280"/>
+            <a:ext cx="228600" cy="228600"/>
+          </a:xfrm>
+          <a:prstGeom prst="rect">
+            <a:avLst/>
+          </a:prstGeom>
+        </p:spPr>
+      </p:pic>
+      <p:pic>
+        <p:nvPicPr>
+          <p:cNvPr id="34" name="Picture 33" descr="activity_26a641_0.png"/>
+          <p:cNvPicPr>
+            <a:picLocks noChangeAspect="1"/>
+          </p:cNvPicPr>
+          <p:nvPr/>
+        </p:nvPicPr>
+        <p:blipFill>
+          <a:blip r:embed="rId4"/>
+          <a:stretch>
+            <a:fillRect/>
+          </a:stretch>
+        </p:blipFill>
+        <p:spPr>
+          <a:xfrm>
+            <a:off x="7246620" y="1097280"/>
+            <a:ext cx="228600" cy="228600"/>
+          </a:xfrm>
+          <a:prstGeom prst="rect">
+            <a:avLst/>
+          </a:prstGeom>
+        </p:spPr>
+      </p:pic>
+      <p:pic>
+        <p:nvPicPr>
+          <p:cNvPr id="35" name="Picture 34" descr="info_ffffff_0.png"/>
+          <p:cNvPicPr>
+            <a:picLocks noChangeAspect="1"/>
+          </p:cNvPicPr>
+          <p:nvPr/>
+        </p:nvPicPr>
+        <p:blipFill>
+          <a:blip r:embed="rId5"/>
+          <a:stretch>
+            <a:fillRect/>
+          </a:stretch>
+        </p:blipFill>
+        <p:spPr>
+          <a:xfrm>
+            <a:off x="653796" y="3209544"/>
+            <a:ext cx="292608" cy="292608"/>
+          </a:xfrm>
+          <a:prstGeom prst="rect">
+            <a:avLst/>
+          </a:prstGeom>
+        </p:spPr>
+      </p:pic>
+      <p:pic>
+        <p:nvPicPr>
+          <p:cNvPr id="36" name="Picture 35" descr="book_ffffff_0.png"/>
+          <p:cNvPicPr>
+            <a:picLocks noChangeAspect="1"/>
+          </p:cNvPicPr>
+          <p:nvPr/>
+        </p:nvPicPr>
+        <p:blipFill>
+          <a:blip r:embed="rId6"/>
+          <a:stretch>
+            <a:fillRect/>
+          </a:stretch>
+        </p:blipFill>
+        <p:spPr>
+          <a:xfrm>
+            <a:off x="653796" y="3547872"/>
+            <a:ext cx="292608" cy="292608"/>
+          </a:xfrm>
+          <a:prstGeom prst="rect">
+            <a:avLst/>
+          </a:prstGeom>
+        </p:spPr>
+      </p:pic>
+      <p:pic>
+        <p:nvPicPr>
+          <p:cNvPr id="37" name="Picture 36" descr="bulb_ffffff_0.png"/>
+          <p:cNvPicPr>
+            <a:picLocks noChangeAspect="1"/>
+          </p:cNvPicPr>
+          <p:nvPr/>
+        </p:nvPicPr>
+        <p:blipFill>
+          <a:blip r:embed="rId7"/>
+          <a:stretch>
+            <a:fillRect/>
+          </a:stretch>
+        </p:blipFill>
+        <p:spPr>
+          <a:xfrm>
+            <a:off x="653796" y="3886200"/>
+            <a:ext cx="292608" cy="292608"/>
+          </a:xfrm>
+          <a:prstGeom prst="rect">
+            <a:avLst/>
+          </a:prstGeom>
+        </p:spPr>
+      </p:pic>
+    </p:spTree>
+  </p:cSld>
+  <p:clrMapOvr>
+    <a:masterClrMapping/>
+  </p:clrMapOvr>
+</p:sld>
+</file>
+
+<file path=ppt/slides/slide4.xml><?xml version="1.0" encoding="utf-8"?>
+<p:sld xmlns:a="http://schemas.openxmlformats.org/drawingml/2006/main" xmlns:r="http://schemas.openxmlformats.org/officeDocument/2006/relationships" xmlns:p="http://schemas.openxmlformats.org/presentationml/2006/main">
+  <p:cSld name="Slide 2">
+    <p:bg>
+      <p:bgPr>
+        <a:solidFill>
+          <a:srgbClr val="020C1B"/>
+        </a:solidFill>
+      </p:bgPr>
+    </p:bg>
+    <p:spTree>
+      <p:nvGrpSpPr>
+        <p:cNvPr id="1" name=""/>
+        <p:cNvGrpSpPr/>
+        <p:nvPr/>
+      </p:nvGrpSpPr>
+      <p:grpSpPr>
+        <a:xfrm>
+          <a:off x="0" y="0"/>
+          <a:ext cx="0" cy="0"/>
+          <a:chOff x="0" y="0"/>
+          <a:chExt cx="0" cy="0"/>
+        </a:xfrm>
+      </p:grpSpPr>
+      <p:sp>
+        <p:nvSpPr>
+          <p:cNvPr id="2" name="Shape 0"/>
+          <p:cNvSpPr/>
+          <p:nvPr/>
+        </p:nvSpPr>
+        <p:spPr>
+          <a:xfrm>
+            <a:off x="0" y="0"/>
+            <a:ext cx="9144000" cy="54864"/>
+          </a:xfrm>
+          <a:prstGeom prst="rect">
+            <a:avLst/>
           </a:prstGeom>
           <a:solidFill>
             <a:srgbClr val="1A6BBF"/>
@@ -9674,7 +9756,921 @@
       </p:sp>
       <p:sp>
         <p:nvSpPr>
-          <p:cNvPr id="51" name="P0 num"/>
+          <p:cNvPr id="3" name="Text 1"/>
+          <p:cNvSpPr/>
+          <p:nvPr/>
+        </p:nvSpPr>
+        <p:spPr>
+          <a:xfrm>
+            <a:off x="457200" y="164592"/>
+            <a:ext cx="8229600" cy="502920"/>
+          </a:xfrm>
+          <a:prstGeom prst="rect">
+            <a:avLst/>
+          </a:prstGeom>
+          <a:noFill/>
+          <a:ln/>
+        </p:spPr>
+        <p:txBody>
+          <a:bodyPr wrap="square" rtlCol="0" anchor="ctr"/>
+          <a:lstStyle/>
+          <a:p>
+            <a:pPr indent="0" marL="0">
+              <a:buNone/>
+            </a:pPr>
+            <a:r>
+              <a:rPr lang="en-US" sz="2600" b="1" dirty="0">
+                <a:solidFill>
+                  <a:srgbClr val="FFFFFF"/>
+                </a:solidFill>
+              </a:rPr>
+              <a:t>Grid Portfolio Optimiser — overview</a:t>
+            </a:r>
+            <a:endParaRPr lang="en-US" sz="2600" dirty="0"/>
+          </a:p>
+        </p:txBody>
+      </p:sp>
+      <p:sp>
+        <p:nvSpPr>
+          <p:cNvPr id="4" name="Shape 2"/>
+          <p:cNvSpPr/>
+          <p:nvPr/>
+        </p:nvSpPr>
+        <p:spPr>
+          <a:xfrm>
+            <a:off x="365760" y="868680"/>
+            <a:ext cx="2651760" cy="1828800"/>
+          </a:xfrm>
+          <a:prstGeom prst="rect">
+            <a:avLst/>
+          </a:prstGeom>
+          <a:solidFill>
+            <a:srgbClr val="0D1A2E"/>
+          </a:solidFill>
+          <a:ln w="12700">
+            <a:solidFill>
+              <a:srgbClr val="1A6BBF"/>
+            </a:solidFill>
+            <a:prstDash val="solid"/>
+          </a:ln>
+          <a:effectLst>
+            <a:outerShdw sx="100000" sy="100000" kx="0" ky="0" algn="bl" rotWithShape="0" blurRad="101600" dist="38100" dir="8100000">
+              <a:srgbClr val="000000">
+                <a:alpha val="18000"/>
+              </a:srgbClr>
+            </a:outerShdw>
+          </a:effectLst>
+        </p:spPr>
+        <p:txBody>
+          <a:bodyPr/>
+          <a:p/>
+        </p:txBody>
+      </p:sp>
+      <p:sp>
+        <p:nvSpPr>
+          <p:cNvPr id="6" name="Text 4"/>
+          <p:cNvSpPr/>
+          <p:nvPr/>
+        </p:nvSpPr>
+        <p:spPr>
+          <a:xfrm>
+            <a:off x="365760" y="1463040"/>
+            <a:ext cx="2651760" cy="365760"/>
+          </a:xfrm>
+          <a:prstGeom prst="rect">
+            <a:avLst/>
+          </a:prstGeom>
+          <a:noFill/>
+          <a:ln/>
+        </p:spPr>
+        <p:txBody>
+          <a:bodyPr wrap="square" rtlCol="0" anchor="ctr"/>
+          <a:lstStyle/>
+          <a:p>
+            <a:pPr algn="ctr" indent="0" marL="0">
+              <a:buNone/>
+            </a:pPr>
+            <a:r>
+              <a:rPr lang="en-US" sz="1100" b="1" dirty="0">
+                <a:solidFill>
+                  <a:srgbClr val="4A9EFF"/>
+                </a:solidFill>
+              </a:rPr>
+              <a:t>Interactive Frontiers</a:t>
+            </a:r>
+            <a:endParaRPr lang="en-US" sz="1100" dirty="0"/>
+          </a:p>
+        </p:txBody>
+      </p:sp>
+      <p:sp>
+        <p:nvSpPr>
+          <p:cNvPr id="7" name="Text 5"/>
+          <p:cNvSpPr/>
+          <p:nvPr/>
+        </p:nvSpPr>
+        <p:spPr>
+          <a:xfrm>
+            <a:off x="475488" y="1874520"/>
+            <a:ext cx="2432304" cy="731520"/>
+          </a:xfrm>
+          <a:prstGeom prst="rect">
+            <a:avLst/>
+          </a:prstGeom>
+          <a:noFill/>
+          <a:ln/>
+        </p:spPr>
+        <p:txBody>
+          <a:bodyPr wrap="square" rtlCol="0" anchor="t"/>
+          <a:lstStyle/>
+          <a:p>
+            <a:pPr algn="ctr" indent="0" marL="0">
+              <a:buNone/>
+            </a:pPr>
+            <a:r>
+              <a:rPr lang="en-US" sz="950" dirty="0">
+                <a:solidFill>
+                  <a:srgbClr val="C0C8D8"/>
+                </a:solidFill>
+              </a:rPr>
+              <a:t>MV vs Behavioural vs Derivative frontier — visualised side by side on a single chart</a:t>
+            </a:r>
+            <a:endParaRPr lang="en-US" sz="950" dirty="0"/>
+          </a:p>
+        </p:txBody>
+      </p:sp>
+      <p:sp>
+        <p:nvSpPr>
+          <p:cNvPr id="8" name="Shape 6"/>
+          <p:cNvSpPr/>
+          <p:nvPr/>
+        </p:nvSpPr>
+        <p:spPr>
+          <a:xfrm>
+            <a:off x="3200400" y="868680"/>
+            <a:ext cx="2651760" cy="1828800"/>
+          </a:xfrm>
+          <a:prstGeom prst="rect">
+            <a:avLst/>
+          </a:prstGeom>
+          <a:solidFill>
+            <a:srgbClr val="0D1A2E"/>
+          </a:solidFill>
+          <a:ln w="12700">
+            <a:solidFill>
+              <a:srgbClr val="1A6BBF"/>
+            </a:solidFill>
+            <a:prstDash val="solid"/>
+          </a:ln>
+          <a:effectLst>
+            <a:outerShdw sx="100000" sy="100000" kx="0" ky="0" algn="bl" rotWithShape="0" blurRad="101600" dist="38100" dir="8100000">
+              <a:srgbClr val="000000">
+                <a:alpha val="18000"/>
+              </a:srgbClr>
+            </a:outerShdw>
+          </a:effectLst>
+        </p:spPr>
+        <p:txBody>
+          <a:bodyPr/>
+          <a:p/>
+        </p:txBody>
+      </p:sp>
+      <p:sp>
+        <p:nvSpPr>
+          <p:cNvPr id="10" name="Text 8"/>
+          <p:cNvSpPr/>
+          <p:nvPr/>
+        </p:nvSpPr>
+        <p:spPr>
+          <a:xfrm>
+            <a:off x="3200400" y="1463040"/>
+            <a:ext cx="2651760" cy="365760"/>
+          </a:xfrm>
+          <a:prstGeom prst="rect">
+            <a:avLst/>
+          </a:prstGeom>
+          <a:noFill/>
+          <a:ln/>
+        </p:spPr>
+        <p:txBody>
+          <a:bodyPr wrap="square" rtlCol="0" anchor="ctr"/>
+          <a:lstStyle/>
+          <a:p>
+            <a:pPr algn="ctr" indent="0" marL="0">
+              <a:buNone/>
+            </a:pPr>
+            <a:r>
+              <a:rPr lang="en-US" sz="1100" b="1" dirty="0">
+                <a:solidFill>
+                  <a:srgbClr val="4A9EFF"/>
+                </a:solidFill>
+              </a:rPr>
+              <a:t>Three Portfolios</a:t>
+            </a:r>
+            <a:endParaRPr lang="en-US" sz="1100" dirty="0"/>
+          </a:p>
+        </p:txBody>
+      </p:sp>
+      <p:sp>
+        <p:nvSpPr>
+          <p:cNvPr id="11" name="Text 9"/>
+          <p:cNvSpPr/>
+          <p:nvPr/>
+        </p:nvSpPr>
+        <p:spPr>
+          <a:xfrm>
+            <a:off x="3310128" y="1874520"/>
+            <a:ext cx="2432304" cy="731520"/>
+          </a:xfrm>
+          <a:prstGeom prst="rect">
+            <a:avLst/>
+          </a:prstGeom>
+          <a:noFill/>
+          <a:ln/>
+        </p:spPr>
+        <p:txBody>
+          <a:bodyPr wrap="square" rtlCol="0" anchor="t"/>
+          <a:lstStyle/>
+          <a:p>
+            <a:pPr algn="ctr" indent="0" marL="0">
+              <a:buNone/>
+            </a:pPr>
+            <a:r>
+              <a:rPr lang="en-US" sz="950" dirty="0">
+                <a:solidFill>
+                  <a:srgbClr val="C0C8D8"/>
+                </a:solidFill>
+              </a:rPr>
+              <a:t>No derivative / With derivative / Same risk — three perspectives for each optimisation run</a:t>
+            </a:r>
+            <a:endParaRPr lang="en-US" sz="950" dirty="0"/>
+          </a:p>
+        </p:txBody>
+      </p:sp>
+      <p:sp>
+        <p:nvSpPr>
+          <p:cNvPr id="12" name="Shape 10"/>
+          <p:cNvSpPr/>
+          <p:nvPr/>
+        </p:nvSpPr>
+        <p:spPr>
+          <a:xfrm>
+            <a:off x="6035040" y="868680"/>
+            <a:ext cx="2651760" cy="1828800"/>
+          </a:xfrm>
+          <a:prstGeom prst="rect">
+            <a:avLst/>
+          </a:prstGeom>
+          <a:solidFill>
+            <a:srgbClr val="0D1A2E"/>
+          </a:solidFill>
+          <a:ln w="12700">
+            <a:solidFill>
+              <a:srgbClr val="1A6BBF"/>
+            </a:solidFill>
+            <a:prstDash val="solid"/>
+          </a:ln>
+          <a:effectLst>
+            <a:outerShdw sx="100000" sy="100000" kx="0" ky="0" algn="bl" rotWithShape="0" blurRad="101600" dist="38100" dir="8100000">
+              <a:srgbClr val="000000">
+                <a:alpha val="18000"/>
+              </a:srgbClr>
+            </a:outerShdw>
+          </a:effectLst>
+        </p:spPr>
+        <p:txBody>
+          <a:bodyPr/>
+          <a:p/>
+        </p:txBody>
+      </p:sp>
+      <p:sp>
+        <p:nvSpPr>
+          <p:cNvPr id="14" name="Text 12"/>
+          <p:cNvSpPr/>
+          <p:nvPr/>
+        </p:nvSpPr>
+        <p:spPr>
+          <a:xfrm>
+            <a:off x="6035040" y="1463040"/>
+            <a:ext cx="2651760" cy="365760"/>
+          </a:xfrm>
+          <a:prstGeom prst="rect">
+            <a:avLst/>
+          </a:prstGeom>
+          <a:noFill/>
+          <a:ln/>
+        </p:spPr>
+        <p:txBody>
+          <a:bodyPr wrap="square" rtlCol="0" anchor="ctr"/>
+          <a:lstStyle/>
+          <a:p>
+            <a:pPr algn="ctr" indent="0" marL="0">
+              <a:buNone/>
+            </a:pPr>
+            <a:r>
+              <a:rPr lang="en-US" sz="1100" b="1" dirty="0">
+                <a:solidFill>
+                  <a:srgbClr val="4A9EFF"/>
+                </a:solidFill>
+              </a:rPr>
+              <a:t>AI-Powered</a:t>
+            </a:r>
+            <a:endParaRPr lang="en-US" sz="1100" dirty="0"/>
+          </a:p>
+        </p:txBody>
+      </p:sp>
+      <p:sp>
+        <p:nvSpPr>
+          <p:cNvPr id="15" name="Text 13"/>
+          <p:cNvSpPr/>
+          <p:nvPr/>
+        </p:nvSpPr>
+        <p:spPr>
+          <a:xfrm>
+            <a:off x="6144768" y="1874520"/>
+            <a:ext cx="2432304" cy="731520"/>
+          </a:xfrm>
+          <a:prstGeom prst="rect">
+            <a:avLst/>
+          </a:prstGeom>
+          <a:noFill/>
+          <a:ln/>
+        </p:spPr>
+        <p:txBody>
+          <a:bodyPr wrap="square" rtlCol="0" anchor="t"/>
+          <a:lstStyle/>
+          <a:p>
+            <a:pPr algn="ctr" indent="0" marL="0">
+              <a:buNone/>
+            </a:pPr>
+            <a:r>
+              <a:rPr lang="en-US" sz="950" dirty="0">
+                <a:solidFill>
+                  <a:srgbClr val="C0C8D8"/>
+                </a:solidFill>
+              </a:rPr>
+              <a:t>On-demand explanations for every parameter, constraint, derivative type, and result</a:t>
+            </a:r>
+            <a:endParaRPr lang="en-US" sz="950" dirty="0"/>
+          </a:p>
+        </p:txBody>
+      </p:sp>
+      <p:sp>
+        <p:nvSpPr>
+          <p:cNvPr id="16" name="Shape 14"/>
+          <p:cNvSpPr/>
+          <p:nvPr/>
+        </p:nvSpPr>
+        <p:spPr>
+          <a:xfrm>
+            <a:off x="365760" y="2834640"/>
+            <a:ext cx="8412480" cy="1580000"/>
+          </a:xfrm>
+          <a:prstGeom prst="rect">
+            <a:avLst/>
+          </a:prstGeom>
+          <a:solidFill>
+            <a:srgbClr val="0D1A2E"/>
+          </a:solidFill>
+          <a:ln w="12700">
+            <a:solidFill>
+              <a:srgbClr val="1A6BBF"/>
+            </a:solidFill>
+            <a:prstDash val="solid"/>
+          </a:ln>
+        </p:spPr>
+        <p:txBody>
+          <a:bodyPr/>
+          <a:p/>
+        </p:txBody>
+      </p:sp>
+      <p:sp>
+        <p:nvSpPr>
+          <p:cNvPr id="17" name="Text 15"/>
+          <p:cNvSpPr/>
+          <p:nvPr/>
+        </p:nvSpPr>
+        <p:spPr>
+          <a:xfrm>
+            <a:off x="548640" y="2880360"/>
+            <a:ext cx="8046720" cy="320040"/>
+          </a:xfrm>
+          <a:prstGeom prst="rect">
+            <a:avLst/>
+          </a:prstGeom>
+          <a:noFill/>
+          <a:ln/>
+        </p:spPr>
+        <p:txBody>
+          <a:bodyPr wrap="square" rtlCol="0" anchor="ctr"/>
+          <a:lstStyle/>
+          <a:p>
+            <a:pPr indent="0" marL="0">
+              <a:buNone/>
+            </a:pPr>
+            <a:r>
+              <a:rPr lang="en-US" sz="1100" b="1" dirty="0">
+                <a:solidFill>
+                  <a:srgbClr val="4A9EFF"/>
+                </a:solidFill>
+              </a:rPr>
+              <a:t>Portfolio perspectives (0–3)</a:t>
+            </a:r>
+            <a:endParaRPr lang="en-US" sz="1100" dirty="0"/>
+          </a:p>
+        </p:txBody>
+      </p:sp>
+      <p:sp>
+        <p:nvSpPr>
+          <p:cNvPr id="18" name="Shape 16"/>
+          <p:cNvSpPr/>
+          <p:nvPr/>
+        </p:nvSpPr>
+        <p:spPr>
+          <a:xfrm>
+            <a:off x="548640" y="3564864"/>
+            <a:ext cx="502920" cy="182880"/>
+          </a:xfrm>
+          <a:prstGeom prst="roundRect">
+            <a:avLst>
+              <a:gd name="adj" fmla="val 18750"/>
+            </a:avLst>
+          </a:prstGeom>
+          <a:solidFill>
+            <a:srgbClr val="1A6BBF"/>
+          </a:solidFill>
+          <a:ln w="12700">
+            <a:solidFill>
+              <a:srgbClr val="1A6BBF"/>
+            </a:solidFill>
+            <a:prstDash val="solid"/>
+          </a:ln>
+        </p:spPr>
+        <p:txBody>
+          <a:bodyPr/>
+          <a:p/>
+        </p:txBody>
+      </p:sp>
+      <p:sp>
+        <p:nvSpPr>
+          <p:cNvPr id="19" name="Text 17"/>
+          <p:cNvSpPr/>
+          <p:nvPr/>
+        </p:nvSpPr>
+        <p:spPr>
+          <a:xfrm>
+            <a:off x="548640" y="3564864"/>
+            <a:ext cx="502920" cy="182880"/>
+          </a:xfrm>
+          <a:prstGeom prst="rect">
+            <a:avLst/>
+          </a:prstGeom>
+          <a:noFill/>
+          <a:ln/>
+        </p:spPr>
+        <p:txBody>
+          <a:bodyPr wrap="square" lIns="0" tIns="0" rIns="0" bIns="0" rtlCol="0" anchor="ctr"/>
+          <a:lstStyle/>
+          <a:p>
+            <a:pPr algn="ctr" indent="0" marL="0">
+              <a:buNone/>
+            </a:pPr>
+            <a:r>
+              <a:rPr lang="en-US" sz="1100" b="1" dirty="0">
+                <a:solidFill>
+                  <a:srgbClr val="FFFFFF"/>
+                </a:solidFill>
+              </a:rPr>
+              <a:t>1</a:t>
+            </a:r>
+            <a:endParaRPr lang="en-US" sz="1100" dirty="0"/>
+          </a:p>
+        </p:txBody>
+      </p:sp>
+      <p:sp>
+        <p:nvSpPr>
+          <p:cNvPr id="20" name="Text 18"/>
+          <p:cNvSpPr/>
+          <p:nvPr/>
+        </p:nvSpPr>
+        <p:spPr>
+          <a:xfrm>
+            <a:off x="1143000" y="3510000"/>
+            <a:ext cx="2194560" cy="292608"/>
+          </a:xfrm>
+          <a:prstGeom prst="rect">
+            <a:avLst/>
+          </a:prstGeom>
+          <a:noFill/>
+          <a:ln/>
+        </p:spPr>
+        <p:txBody>
+          <a:bodyPr wrap="square" lIns="0" tIns="0" rIns="0" bIns="0" rtlCol="0" anchor="ctr"/>
+          <a:lstStyle/>
+          <a:p>
+            <a:pPr indent="0" marL="0">
+              <a:buNone/>
+            </a:pPr>
+            <a:r>
+              <a:rPr lang="en-US" sz="950" b="1" dirty="0">
+                <a:solidFill>
+                  <a:srgbClr val="10B981"/>
+                </a:solidFill>
+              </a:rPr>
+              <a:t>Portfolio (1) — No derivative:</a:t>
+            </a:r>
+            <a:endParaRPr lang="en-US" sz="950" dirty="0"/>
+          </a:p>
+        </p:txBody>
+      </p:sp>
+      <p:sp>
+        <p:nvSpPr>
+          <p:cNvPr id="21" name="Text 19"/>
+          <p:cNvSpPr/>
+          <p:nvPr/>
+        </p:nvSpPr>
+        <p:spPr>
+          <a:xfrm>
+            <a:off x="3383280" y="3510000"/>
+            <a:ext cx="5212080" cy="292608"/>
+          </a:xfrm>
+          <a:prstGeom prst="rect">
+            <a:avLst/>
+          </a:prstGeom>
+          <a:noFill/>
+          <a:ln/>
+        </p:spPr>
+        <p:txBody>
+          <a:bodyPr wrap="square" lIns="0" tIns="0" rIns="0" bIns="0" rtlCol="0" anchor="ctr"/>
+          <a:lstStyle/>
+          <a:p>
+            <a:pPr indent="0" marL="0">
+              <a:buNone/>
+            </a:pPr>
+            <a:r>
+              <a:rPr lang="en-US" sz="900" dirty="0">
+                <a:solidFill>
+                  <a:srgbClr val="C0C8D8"/>
+                </a:solidFill>
+              </a:rPr>
+              <a:t>Equivalent to MV optimum — confirms MVT/MAT equivalence. Most classical optimisers stop here.</a:t>
+            </a:r>
+            <a:endParaRPr lang="en-US" sz="900" dirty="0"/>
+          </a:p>
+        </p:txBody>
+      </p:sp>
+      <p:sp>
+        <p:nvSpPr>
+          <p:cNvPr id="22" name="Shape 20"/>
+          <p:cNvSpPr/>
+          <p:nvPr/>
+        </p:nvSpPr>
+        <p:spPr>
+          <a:xfrm>
+            <a:off x="548640" y="3864864"/>
+            <a:ext cx="502920" cy="182880"/>
+          </a:xfrm>
+          <a:prstGeom prst="roundRect">
+            <a:avLst>
+              <a:gd name="adj" fmla="val 18750"/>
+            </a:avLst>
+          </a:prstGeom>
+          <a:solidFill>
+            <a:srgbClr val="1A6BBF"/>
+          </a:solidFill>
+          <a:ln w="12700">
+            <a:solidFill>
+              <a:srgbClr val="1A6BBF"/>
+            </a:solidFill>
+            <a:prstDash val="solid"/>
+          </a:ln>
+        </p:spPr>
+        <p:txBody>
+          <a:bodyPr/>
+          <a:p/>
+        </p:txBody>
+      </p:sp>
+      <p:sp>
+        <p:nvSpPr>
+          <p:cNvPr id="23" name="Text 21"/>
+          <p:cNvSpPr/>
+          <p:nvPr/>
+        </p:nvSpPr>
+        <p:spPr>
+          <a:xfrm>
+            <a:off x="548640" y="3864864"/>
+            <a:ext cx="502920" cy="182880"/>
+          </a:xfrm>
+          <a:prstGeom prst="rect">
+            <a:avLst/>
+          </a:prstGeom>
+          <a:noFill/>
+          <a:ln/>
+        </p:spPr>
+        <p:txBody>
+          <a:bodyPr wrap="square" lIns="0" tIns="0" rIns="0" bIns="0" rtlCol="0" anchor="ctr"/>
+          <a:lstStyle/>
+          <a:p>
+            <a:pPr algn="ctr" indent="0" marL="0">
+              <a:buNone/>
+            </a:pPr>
+            <a:r>
+              <a:rPr lang="en-US" sz="1100" b="1" dirty="0">
+                <a:solidFill>
+                  <a:srgbClr val="FFFFFF"/>
+                </a:solidFill>
+              </a:rPr>
+              <a:t>2</a:t>
+            </a:r>
+            <a:endParaRPr lang="en-US" sz="1100" dirty="0"/>
+          </a:p>
+        </p:txBody>
+      </p:sp>
+      <p:sp>
+        <p:nvSpPr>
+          <p:cNvPr id="24" name="Text 22"/>
+          <p:cNvSpPr/>
+          <p:nvPr/>
+        </p:nvSpPr>
+        <p:spPr>
+          <a:xfrm>
+            <a:off x="1143000" y="3810000"/>
+            <a:ext cx="2194560" cy="292608"/>
+          </a:xfrm>
+          <a:prstGeom prst="rect">
+            <a:avLst/>
+          </a:prstGeom>
+          <a:noFill/>
+          <a:ln/>
+        </p:spPr>
+        <p:txBody>
+          <a:bodyPr wrap="square" lIns="0" tIns="0" rIns="0" bIns="0" rtlCol="0" anchor="ctr"/>
+          <a:lstStyle/>
+          <a:p>
+            <a:pPr indent="0" marL="0">
+              <a:buNone/>
+            </a:pPr>
+            <a:r>
+              <a:rPr lang="en-US" sz="950" b="1" dirty="0">
+                <a:solidFill>
+                  <a:srgbClr val="F59E0B"/>
+                </a:solidFill>
+              </a:rPr>
+              <a:t>Portfolio (2) — With derivative:</a:t>
+            </a:r>
+            <a:endParaRPr lang="en-US" sz="950" dirty="0"/>
+          </a:p>
+        </p:txBody>
+      </p:sp>
+      <p:sp>
+        <p:nvSpPr>
+          <p:cNvPr id="25" name="Text 23"/>
+          <p:cNvSpPr/>
+          <p:nvPr/>
+        </p:nvSpPr>
+        <p:spPr>
+          <a:xfrm>
+            <a:off x="3383280" y="3810000"/>
+            <a:ext cx="5212080" cy="292608"/>
+          </a:xfrm>
+          <a:prstGeom prst="rect">
+            <a:avLst/>
+          </a:prstGeom>
+          <a:noFill/>
+          <a:ln/>
+        </p:spPr>
+        <p:txBody>
+          <a:bodyPr wrap="square" lIns="0" tIns="0" rIns="0" bIns="0" rtlCol="0" anchor="ctr"/>
+          <a:lstStyle/>
+          <a:p>
+            <a:pPr indent="0" marL="0">
+              <a:buNone/>
+            </a:pPr>
+            <a:r>
+              <a:rPr lang="en-US" sz="900" dirty="0">
+                <a:solidFill>
+                  <a:srgbClr val="C0C8D8"/>
+                </a:solidFill>
+              </a:rPr>
+              <a:t>Same implied λ and downside constraint (H,α or H,α,L) — shows return uplift from derivatives.</a:t>
+            </a:r>
+            <a:endParaRPr lang="en-US" sz="900" dirty="0"/>
+          </a:p>
+        </p:txBody>
+      </p:sp>
+      <p:sp>
+        <p:nvSpPr>
+          <p:cNvPr id="26" name="Shape 24"/>
+          <p:cNvSpPr/>
+          <p:nvPr/>
+        </p:nvSpPr>
+        <p:spPr>
+          <a:xfrm>
+            <a:off x="548640" y="4164864"/>
+            <a:ext cx="502920" cy="182880"/>
+          </a:xfrm>
+          <a:prstGeom prst="roundRect">
+            <a:avLst>
+              <a:gd name="adj" fmla="val 18750"/>
+            </a:avLst>
+          </a:prstGeom>
+          <a:solidFill>
+            <a:srgbClr val="1A6BBF"/>
+          </a:solidFill>
+          <a:ln w="12700">
+            <a:solidFill>
+              <a:srgbClr val="1A6BBF"/>
+            </a:solidFill>
+            <a:prstDash val="solid"/>
+          </a:ln>
+        </p:spPr>
+        <p:txBody>
+          <a:bodyPr/>
+          <a:p/>
+        </p:txBody>
+      </p:sp>
+      <p:sp>
+        <p:nvSpPr>
+          <p:cNvPr id="27" name="Text 25"/>
+          <p:cNvSpPr/>
+          <p:nvPr/>
+        </p:nvSpPr>
+        <p:spPr>
+          <a:xfrm>
+            <a:off x="548640" y="4164864"/>
+            <a:ext cx="502920" cy="182880"/>
+          </a:xfrm>
+          <a:prstGeom prst="rect">
+            <a:avLst/>
+          </a:prstGeom>
+          <a:noFill/>
+          <a:ln/>
+        </p:spPr>
+        <p:txBody>
+          <a:bodyPr wrap="square" lIns="0" tIns="0" rIns="0" bIns="0" rtlCol="0" anchor="ctr"/>
+          <a:lstStyle/>
+          <a:p>
+            <a:pPr algn="ctr" indent="0" marL="0">
+              <a:buNone/>
+            </a:pPr>
+            <a:r>
+              <a:rPr lang="en-US" sz="1100" b="1" dirty="0">
+                <a:solidFill>
+                  <a:srgbClr val="FFFFFF"/>
+                </a:solidFill>
+              </a:rPr>
+              <a:t>3</a:t>
+            </a:r>
+            <a:endParaRPr lang="en-US" sz="1100" dirty="0"/>
+          </a:p>
+        </p:txBody>
+      </p:sp>
+      <p:sp>
+        <p:nvSpPr>
+          <p:cNvPr id="28" name="Text 26"/>
+          <p:cNvSpPr/>
+          <p:nvPr/>
+        </p:nvSpPr>
+        <p:spPr>
+          <a:xfrm>
+            <a:off x="1143000" y="4110000"/>
+            <a:ext cx="2194560" cy="292608"/>
+          </a:xfrm>
+          <a:prstGeom prst="rect">
+            <a:avLst/>
+          </a:prstGeom>
+          <a:noFill/>
+          <a:ln/>
+        </p:spPr>
+        <p:txBody>
+          <a:bodyPr wrap="square" lIns="0" tIns="0" rIns="0" bIns="0" rtlCol="0" anchor="ctr"/>
+          <a:lstStyle/>
+          <a:p>
+            <a:pPr indent="0" marL="0">
+              <a:buNone/>
+            </a:pPr>
+            <a:r>
+              <a:rPr lang="en-US" sz="950" b="1" dirty="0">
+                <a:solidFill>
+                  <a:srgbClr val="E76F51"/>
+                </a:solidFill>
+              </a:rPr>
+              <a:t>Portfolio (3) — Same risk as (1):</a:t>
+            </a:r>
+            <a:endParaRPr lang="en-US" sz="950" dirty="0"/>
+          </a:p>
+        </p:txBody>
+      </p:sp>
+      <p:sp>
+        <p:nvSpPr>
+          <p:cNvPr id="29" name="Text 27"/>
+          <p:cNvSpPr/>
+          <p:nvPr/>
+        </p:nvSpPr>
+        <p:spPr>
+          <a:xfrm>
+            <a:off x="3383280" y="4110000"/>
+            <a:ext cx="5212080" cy="292608"/>
+          </a:xfrm>
+          <a:prstGeom prst="rect">
+            <a:avLst/>
+          </a:prstGeom>
+          <a:noFill/>
+          <a:ln/>
+        </p:spPr>
+        <p:txBody>
+          <a:bodyPr wrap="square" lIns="0" tIns="0" rIns="0" bIns="0" rtlCol="0" anchor="ctr"/>
+          <a:lstStyle/>
+          <a:p>
+            <a:pPr indent="0" marL="0">
+              <a:buNone/>
+            </a:pPr>
+            <a:r>
+              <a:rPr lang="en-US" sz="900" dirty="0">
+                <a:solidFill>
+                  <a:srgbClr val="C0C8D8"/>
+                </a:solidFill>
+              </a:rPr>
+              <a:t>Interpolated at P(1) std dev — direct comparison of return gain at equivalent risk (indicative).</a:t>
+            </a:r>
+            <a:endParaRPr lang="en-US" sz="900" dirty="0"/>
+          </a:p>
+        </p:txBody>
+      </p:sp>
+      <p:sp>
+        <p:nvSpPr>
+          <p:cNvPr id="30" name="Text 28"/>
+          <p:cNvSpPr/>
+          <p:nvPr/>
+        </p:nvSpPr>
+        <p:spPr>
+          <a:xfrm>
+            <a:off x="8046720" y="4754880"/>
+            <a:ext cx="914400" cy="274320"/>
+          </a:xfrm>
+          <a:prstGeom prst="rect">
+            <a:avLst/>
+          </a:prstGeom>
+          <a:noFill/>
+          <a:ln/>
+        </p:spPr>
+        <p:txBody>
+          <a:bodyPr wrap="square" rtlCol="0" anchor="ctr"/>
+          <a:lstStyle/>
+          <a:p>
+            <a:pPr algn="r" indent="0" marL="0">
+              <a:buNone/>
+            </a:pPr>
+            <a:r>
+              <a:rPr lang="en-US" sz="900" dirty="0">
+                <a:solidFill>
+                  <a:srgbClr val="556A8A"/>
+                </a:solidFill>
+              </a:rPr>
+              <a:t>4 / 19</a:t>
+            </a:r>
+            <a:endParaRPr lang="en-US" sz="900" dirty="0"/>
+          </a:p>
+        </p:txBody>
+      </p:sp>
+      <p:sp>
+        <p:nvSpPr>
+          <p:cNvPr id="31" name="Text 29"/>
+          <p:cNvSpPr/>
+          <p:nvPr/>
+        </p:nvSpPr>
+        <p:spPr>
+          <a:xfrm>
+            <a:off x="365760" y="4754880"/>
+            <a:ext cx="6400800" cy="274320"/>
+          </a:xfrm>
+          <a:prstGeom prst="rect">
+            <a:avLst/>
+          </a:prstGeom>
+          <a:noFill/>
+          <a:ln/>
+        </p:spPr>
+        <p:txBody>
+          <a:bodyPr wrap="square" rtlCol="0" anchor="ctr"/>
+          <a:lstStyle/>
+          <a:p>
+            <a:pPr algn="l" indent="0" marL="0">
+              <a:buNone/>
+            </a:pPr>
+            <a:r>
+              <a:rPr lang="en-US" sz="900" dirty="0">
+                <a:solidFill>
+                  <a:srgbClr val="556A8A"/>
+                </a:solidFill>
+              </a:rPr>
+              <a:t>Beyond Mean-Variance Portfolio Optimiser — User Guide</a:t>
+            </a:r>
+            <a:endParaRPr lang="en-US" sz="900" dirty="0"/>
+          </a:p>
+        </p:txBody>
+      </p:sp>
+      <p:sp>
+        <p:nvSpPr>
+          <p:cNvPr id="50" name="P0 badge"/>
           <p:cNvSpPr/>
           <p:nvPr/>
         </p:nvSpPr>
@@ -9683,6 +10679,37 @@
             <a:off x="548640" y="3264864"/>
             <a:ext cx="502920" cy="182880"/>
           </a:xfrm>
+          <a:prstGeom prst="roundRect">
+            <a:avLst>
+              <a:gd name="adj" fmla="val 18750"/>
+            </a:avLst>
+          </a:prstGeom>
+          <a:solidFill>
+            <a:srgbClr val="1A6BBF"/>
+          </a:solidFill>
+          <a:ln w="12700">
+            <a:solidFill>
+              <a:srgbClr val="1A6BBF"/>
+            </a:solidFill>
+            <a:prstDash val="solid"/>
+          </a:ln>
+        </p:spPr>
+        <p:txBody>
+          <a:bodyPr/>
+          <a:p/>
+        </p:txBody>
+      </p:sp>
+      <p:sp>
+        <p:nvSpPr>
+          <p:cNvPr id="51" name="P0 num"/>
+          <p:cNvSpPr/>
+          <p:nvPr/>
+        </p:nvSpPr>
+        <p:spPr>
+          <a:xfrm>
+            <a:off x="548640" y="3264864"/>
+            <a:ext cx="502920" cy="182880"/>
+          </a:xfrm>
           <a:prstGeom prst="rect">
             <a:avLst/>
           </a:prstGeom>
@@ -9780,6 +10807,78 @@
           </a:p>
         </p:txBody>
       </p:sp>
+      <p:pic>
+        <p:nvPicPr>
+          <p:cNvPr id="54" name="Picture 53" descr="trending_4a9eff_0.png"/>
+          <p:cNvPicPr>
+            <a:picLocks noChangeAspect="1"/>
+          </p:cNvPicPr>
+          <p:nvPr/>
+        </p:nvPicPr>
+        <p:blipFill>
+          <a:blip r:embed="rId3"/>
+          <a:stretch>
+            <a:fillRect/>
+          </a:stretch>
+        </p:blipFill>
+        <p:spPr>
+          <a:xfrm>
+            <a:off x="1577340" y="1097280"/>
+            <a:ext cx="228600" cy="228600"/>
+          </a:xfrm>
+          <a:prstGeom prst="rect">
+            <a:avLst/>
+          </a:prstGeom>
+        </p:spPr>
+      </p:pic>
+      <p:pic>
+        <p:nvPicPr>
+          <p:cNvPr id="55" name="Picture 54" descr="layers_4a9eff_0.png"/>
+          <p:cNvPicPr>
+            <a:picLocks noChangeAspect="1"/>
+          </p:cNvPicPr>
+          <p:nvPr/>
+        </p:nvPicPr>
+        <p:blipFill>
+          <a:blip r:embed="rId4"/>
+          <a:stretch>
+            <a:fillRect/>
+          </a:stretch>
+        </p:blipFill>
+        <p:spPr>
+          <a:xfrm>
+            <a:off x="4411980" y="1097280"/>
+            <a:ext cx="228600" cy="228600"/>
+          </a:xfrm>
+          <a:prstGeom prst="rect">
+            <a:avLst/>
+          </a:prstGeom>
+        </p:spPr>
+      </p:pic>
+      <p:pic>
+        <p:nvPicPr>
+          <p:cNvPr id="56" name="Picture 55" descr="sparkle_4a9eff_1.png"/>
+          <p:cNvPicPr>
+            <a:picLocks noChangeAspect="1"/>
+          </p:cNvPicPr>
+          <p:nvPr/>
+        </p:nvPicPr>
+        <p:blipFill>
+          <a:blip r:embed="rId5"/>
+          <a:stretch>
+            <a:fillRect/>
+          </a:stretch>
+        </p:blipFill>
+        <p:spPr>
+          <a:xfrm>
+            <a:off x="7246620" y="1097280"/>
+            <a:ext cx="228600" cy="228600"/>
+          </a:xfrm>
+          <a:prstGeom prst="rect">
+            <a:avLst/>
+          </a:prstGeom>
+        </p:spPr>
+      </p:pic>
     </p:spTree>
   </p:cSld>
   <p:clrMapOvr>
@@ -9788,7 +10887,7 @@
 </p:sld>
 </file>
 
-<file path=ppt/slides/slide4.xml><?xml version="1.0" encoding="utf-8"?>
+<file path=ppt/slides/slide5.xml><?xml version="1.0" encoding="utf-8"?>
 <p:sld xmlns:a="http://schemas.openxmlformats.org/drawingml/2006/main" xmlns:r="http://schemas.openxmlformats.org/officeDocument/2006/relationships" xmlns:p="http://schemas.openxmlformats.org/presentationml/2006/main">
   <p:cSld name="Slide 3">
     <p:bg>
@@ -10378,7 +11477,7 @@
                   <a:srgbClr val="556A8A"/>
                 </a:solidFill>
               </a:rPr>
-              <a:t>5 / 18</a:t>
+              <a:t>5 / 19</a:t>
             </a:r>
             <a:endParaRPr lang="en-US" sz="900" dirty="0"/>
           </a:p>
@@ -10422,28 +11521,61 @@
       </p:sp>
       <p:pic>
         <p:nvPicPr>
-          <p:cNvPr id="22" name="Picture 21" descr="slide3step1.png"/>
+          <p:cNvPr id="22" name="Picture 21" descr="step1_data.png"/>
           <p:cNvPicPr>
             <a:picLocks noChangeAspect="1"/>
           </p:cNvPicPr>
           <p:nvPr/>
         </p:nvPicPr>
         <p:blipFill>
-          <a:blip r:embed="rId3"/>
+          <a:blip r:embed="rId4"/>
           <a:stretch>
             <a:fillRect/>
           </a:stretch>
         </p:blipFill>
         <p:spPr>
           <a:xfrm>
-            <a:off x="1077954" y="749808"/>
-            <a:ext cx="2233211" cy="3657600"/>
+            <a:off x="1077954" y="1243743"/>
+            <a:ext cx="2233211" cy="2669730"/>
           </a:xfrm>
           <a:prstGeom prst="rect">
             <a:avLst/>
           </a:prstGeom>
         </p:spPr>
       </p:pic>
+      <p:sp>
+        <p:nvSpPr>
+          <p:cNvPr id="23" name="TextBox 22"/>
+          <p:cNvSpPr txBox="1"/>
+          <p:nvPr/>
+        </p:nvSpPr>
+        <p:spPr>
+          <a:xfrm>
+            <a:off x="4434840" y="4206240"/>
+            <a:ext cx="4206240" cy="548640"/>
+          </a:xfrm>
+          <a:prstGeom prst="rect">
+            <a:avLst/>
+          </a:prstGeom>
+          <a:noFill/>
+        </p:spPr>
+        <p:txBody>
+          <a:bodyPr wrap="square">
+            <a:spAutoFit/>
+          </a:bodyPr>
+          <a:lstStyle/>
+          <a:p>
+            <a:r>
+              <a:rPr sz="950" b="1">
+                <a:solidFill>
+                  <a:srgbClr val="F59E0B"/>
+                </a:solidFill>
+              </a:rPr>
+              <a:t>Important: with Live market data or CSV, click ‘Fetch data’ to load it before running the optimiser — it will not run on un-fetched tickers.</a:t>
+            </a:r>
+          </a:p>
+        </p:txBody>
+      </p:sp>
     </p:spTree>
   </p:cSld>
   <p:clrMapOvr>
@@ -10452,7 +11584,7 @@
 </p:sld>
 </file>
 
-<file path=ppt/slides/slide5.xml><?xml version="1.0" encoding="utf-8"?>
+<file path=ppt/slides/slide6.xml><?xml version="1.0" encoding="utf-8"?>
 <p:sld xmlns:a="http://schemas.openxmlformats.org/drawingml/2006/main" xmlns:r="http://schemas.openxmlformats.org/officeDocument/2006/relationships" xmlns:p="http://schemas.openxmlformats.org/presentationml/2006/main">
   <p:cSld name="Slide 4">
     <p:bg>
@@ -11115,7 +12247,7 @@
                   <a:srgbClr val="556A8A"/>
                 </a:solidFill>
               </a:rPr>
-              <a:t>6 / 18</a:t>
+              <a:t>6 / 19</a:t>
             </a:r>
             <a:endParaRPr lang="en-US" sz="900" dirty="0"/>
           </a:p>
@@ -11159,22 +12291,22 @@
       </p:sp>
       <p:pic>
         <p:nvPicPr>
-          <p:cNvPr id="21" name="Picture 20" descr="slide4step2.png"/>
+          <p:cNvPr id="23" name="Picture 22" descr="step2_derivative_a.png"/>
           <p:cNvPicPr>
             <a:picLocks noChangeAspect="1"/>
           </p:cNvPicPr>
           <p:nvPr/>
         </p:nvPicPr>
         <p:blipFill>
-          <a:blip r:embed="rId3"/>
+          <a:blip r:embed="rId5"/>
           <a:stretch>
             <a:fillRect/>
           </a:stretch>
         </p:blipFill>
         <p:spPr>
           <a:xfrm>
-            <a:off x="365760" y="1004326"/>
-            <a:ext cx="2175497" cy="3148563"/>
+            <a:off x="396882" y="1004326"/>
+            <a:ext cx="2113252" cy="3148563"/>
           </a:xfrm>
           <a:prstGeom prst="rect">
             <a:avLst/>
@@ -11183,22 +12315,22 @@
       </p:pic>
       <p:pic>
         <p:nvPicPr>
-          <p:cNvPr id="22" name="Picture 21" descr="slide4step2bis.png"/>
+          <p:cNvPr id="24" name="Picture 23" descr="step2_derivative_b.png"/>
           <p:cNvPicPr>
             <a:picLocks noChangeAspect="1"/>
           </p:cNvPicPr>
           <p:nvPr/>
         </p:nvPicPr>
         <p:blipFill>
-          <a:blip r:embed="rId4"/>
+          <a:blip r:embed="rId6"/>
           <a:stretch>
             <a:fillRect/>
           </a:stretch>
         </p:blipFill>
         <p:spPr>
           <a:xfrm>
-            <a:off x="2678417" y="1004326"/>
-            <a:ext cx="1344942" cy="3148563"/>
+            <a:off x="2806612" y="1004326"/>
+            <a:ext cx="1088552" cy="3148562"/>
           </a:xfrm>
           <a:prstGeom prst="rect">
             <a:avLst/>
@@ -11213,7 +12345,7 @@
 </p:sld>
 </file>
 
-<file path=ppt/slides/slide6.xml><?xml version="1.0" encoding="utf-8"?>
+<file path=ppt/slides/slide7.xml><?xml version="1.0" encoding="utf-8"?>
 <p:sld xmlns:a="http://schemas.openxmlformats.org/drawingml/2006/main" xmlns:r="http://schemas.openxmlformats.org/officeDocument/2006/relationships" xmlns:p="http://schemas.openxmlformats.org/presentationml/2006/main">
   <p:cSld name="Slide 5">
     <p:bg>
@@ -11738,7 +12870,7 @@
                   <a:srgbClr val="556A8A"/>
                 </a:solidFill>
               </a:rPr>
-              <a:t>7 / 18</a:t>
+              <a:t>7 / 19</a:t>
             </a:r>
             <a:endParaRPr lang="en-US" sz="900" dirty="0"/>
           </a:p>
@@ -11780,30 +12912,6 @@
           </a:p>
         </p:txBody>
       </p:sp>
-      <p:pic>
-        <p:nvPicPr>
-          <p:cNvPr id="20" name="Picture 19" descr="Slide5step3.png"/>
-          <p:cNvPicPr>
-            <a:picLocks noChangeAspect="1"/>
-          </p:cNvPicPr>
-          <p:nvPr/>
-        </p:nvPicPr>
-        <p:blipFill>
-          <a:blip r:embed="rId3"/>
-          <a:stretch>
-            <a:fillRect/>
-          </a:stretch>
-        </p:blipFill>
-        <p:spPr>
-          <a:xfrm>
-            <a:off x="1246830" y="749808"/>
-            <a:ext cx="1895459" cy="3816418"/>
-          </a:xfrm>
-          <a:prstGeom prst="rect">
-            <a:avLst/>
-          </a:prstGeom>
-        </p:spPr>
-      </p:pic>
       <p:sp>
         <p:nvSpPr>
           <p:cNvPr id="60" name="Rig box"/>
@@ -11941,6 +13049,30 @@
           </a:p>
         </p:txBody>
       </p:sp>
+      <p:pic>
+        <p:nvPicPr>
+          <p:cNvPr id="64" name="Picture 63" descr="(step3_constraint.png"/>
+          <p:cNvPicPr>
+            <a:picLocks noChangeAspect="1"/>
+          </p:cNvPicPr>
+          <p:nvPr/>
+        </p:nvPicPr>
+        <p:blipFill>
+          <a:blip r:embed="rId4"/>
+          <a:stretch>
+            <a:fillRect/>
+          </a:stretch>
+        </p:blipFill>
+        <p:spPr>
+          <a:xfrm>
+            <a:off x="1380806" y="749808"/>
+            <a:ext cx="1627506" cy="3816418"/>
+          </a:xfrm>
+          <a:prstGeom prst="rect">
+            <a:avLst/>
+          </a:prstGeom>
+        </p:spPr>
+      </p:pic>
     </p:spTree>
   </p:cSld>
   <p:clrMapOvr>
@@ -11949,7 +13081,7 @@
 </p:sld>
 </file>
 
-<file path=ppt/slides/slide7.xml><?xml version="1.0" encoding="utf-8"?>
+<file path=ppt/slides/slide8.xml><?xml version="1.0" encoding="utf-8"?>
 <p:sld xmlns:a="http://schemas.openxmlformats.org/drawingml/2006/main" xmlns:r="http://schemas.openxmlformats.org/officeDocument/2006/relationships" xmlns:p="http://schemas.openxmlformats.org/presentationml/2006/main">
   <p:cSld name="Slide 6">
     <p:bg>
@@ -12142,8 +13274,8 @@
         </p:nvSpPr>
         <p:spPr>
           <a:xfrm>
-            <a:off x="4434840" y="877824"/>
-            <a:ext cx="4206240" cy="292608"/>
+            <a:off x="4690872" y="877824"/>
+            <a:ext cx="3950208" cy="292608"/>
           </a:xfrm>
           <a:prstGeom prst="rect">
             <a:avLst/>
@@ -12164,7 +13296,7 @@
                   <a:srgbClr val="F59E0B"/>
                 </a:solidFill>
               </a:rPr>
-              <a:t>⚡  Fast  (m=21, m'=15)</a:t>
+              <a:t>Fast  (m=21, m'=15)</a:t>
             </a:r>
             <a:endParaRPr lang="en-US" sz="1050" dirty="0"/>
           </a:p>
@@ -12178,8 +13310,8 @@
         </p:nvSpPr>
         <p:spPr>
           <a:xfrm>
-            <a:off x="4434840" y="1188720"/>
-            <a:ext cx="4206240" cy="228600"/>
+            <a:off x="4690872" y="1188720"/>
+            <a:ext cx="3950208" cy="228600"/>
           </a:xfrm>
           <a:prstGeom prst="rect">
             <a:avLst/>
@@ -12200,7 +13332,7 @@
                   <a:srgbClr val="556A8A"/>
                 </a:solidFill>
               </a:rPr>
-              <a:t>⏱ ~1–2 min (or more depending on the portfolio size)</a:t>
+              <a:t>~1–2 min (or more depending on the portfolio size)</a:t>
             </a:r>
             <a:endParaRPr lang="en-US" sz="950" dirty="0"/>
           </a:p>
@@ -12279,8 +13411,8 @@
         </p:nvSpPr>
         <p:spPr>
           <a:xfrm>
-            <a:off x="4434840" y="2048256"/>
-            <a:ext cx="4206240" cy="292608"/>
+            <a:off x="4690872" y="2048256"/>
+            <a:ext cx="3950208" cy="292608"/>
           </a:xfrm>
           <a:prstGeom prst="rect">
             <a:avLst/>
@@ -12301,7 +13433,7 @@
                   <a:srgbClr val="4A9EFF"/>
                 </a:solidFill>
               </a:rPr>
-              <a:t>⚖️  Standard  (m=35, m'=50)</a:t>
+              <a:t>Standard  (m=35, m'=50)</a:t>
             </a:r>
             <a:endParaRPr lang="en-US" sz="1050" dirty="0"/>
           </a:p>
@@ -12315,8 +13447,8 @@
         </p:nvSpPr>
         <p:spPr>
           <a:xfrm>
-            <a:off x="4434840" y="2359152"/>
-            <a:ext cx="4206240" cy="228600"/>
+            <a:off x="4690872" y="2359152"/>
+            <a:ext cx="3950208" cy="228600"/>
           </a:xfrm>
           <a:prstGeom prst="rect">
             <a:avLst/>
@@ -12337,7 +13469,7 @@
                   <a:srgbClr val="556A8A"/>
                 </a:solidFill>
               </a:rPr>
-              <a:t>⏱ ~5–15 min (or more depending on the portfolio size)</a:t>
+              <a:t>~5–15 min (or more depending on the portfolio size)</a:t>
             </a:r>
             <a:endParaRPr lang="en-US" sz="950" dirty="0"/>
           </a:p>
@@ -12416,8 +13548,8 @@
         </p:nvSpPr>
         <p:spPr>
           <a:xfrm>
-            <a:off x="4434840" y="3218688"/>
-            <a:ext cx="4206240" cy="292608"/>
+            <a:off x="4690872" y="3218688"/>
+            <a:ext cx="3950208" cy="292608"/>
           </a:xfrm>
           <a:prstGeom prst="rect">
             <a:avLst/>
@@ -12438,7 +13570,7 @@
                   <a:srgbClr val="10B981"/>
                 </a:solidFill>
               </a:rPr>
-              <a:t>🎯  High precision  (m=51, m'=99)</a:t>
+              <a:t>High precision  (m=51, m'=99)</a:t>
             </a:r>
             <a:endParaRPr lang="en-US" sz="1050" dirty="0"/>
           </a:p>
@@ -12452,8 +13584,8 @@
         </p:nvSpPr>
         <p:spPr>
           <a:xfrm>
-            <a:off x="4434840" y="3529584"/>
-            <a:ext cx="4206240" cy="228600"/>
+            <a:off x="4690872" y="3529584"/>
+            <a:ext cx="3950208" cy="228600"/>
           </a:xfrm>
           <a:prstGeom prst="rect">
             <a:avLst/>
@@ -12474,7 +13606,7 @@
                   <a:srgbClr val="556A8A"/>
                 </a:solidFill>
               </a:rPr>
-              <a:t>⏱ 1–2 hrs (or more depending on the portfolio size)</a:t>
+              <a:t>1–2 hrs (or more depending on the portfolio size)</a:t>
             </a:r>
             <a:endParaRPr lang="en-US" sz="950" dirty="0"/>
           </a:p>
@@ -12546,7 +13678,7 @@
                   <a:srgbClr val="556A8A"/>
                 </a:solidFill>
               </a:rPr>
-              <a:t>8 / 18</a:t>
+              <a:t>8 / 19</a:t>
             </a:r>
             <a:endParaRPr lang="en-US" sz="900" dirty="0"/>
           </a:p>
@@ -12588,30 +13720,6 @@
           </a:p>
         </p:txBody>
       </p:sp>
-      <p:pic>
-        <p:nvPicPr>
-          <p:cNvPr id="24" name="Picture 23" descr="slide6step4.png"/>
-          <p:cNvPicPr>
-            <a:picLocks noChangeAspect="1"/>
-          </p:cNvPicPr>
-          <p:nvPr/>
-        </p:nvPicPr>
-        <p:blipFill>
-          <a:blip r:embed="rId3"/>
-          <a:stretch>
-            <a:fillRect/>
-          </a:stretch>
-        </p:blipFill>
-        <p:spPr>
-          <a:xfrm>
-            <a:off x="1186915" y="749808"/>
-            <a:ext cx="2015289" cy="2286000"/>
-          </a:xfrm>
-          <a:prstGeom prst="rect">
-            <a:avLst/>
-          </a:prstGeom>
-        </p:spPr>
-      </p:pic>
       <p:sp>
         <p:nvSpPr>
           <p:cNvPr id="40" name="Also box"/>
@@ -12692,8 +13800,8 @@
         </p:nvSpPr>
         <p:spPr>
           <a:xfrm>
-            <a:off x="640080" y="3610000"/>
-            <a:ext cx="3154240" cy="490000"/>
+            <a:off x="896112" y="3610000"/>
+            <a:ext cx="2898208" cy="490000"/>
           </a:xfrm>
           <a:prstGeom prst="rect">
             <a:avLst/>
@@ -12714,7 +13822,7 @@
                   <a:srgbClr val="F5B342"/>
                 </a:solidFill>
               </a:rPr>
-              <a:t xml:space="preserve">🚀 Turbo — 4th resolution: </a:t>
+              <a:t xml:space="preserve">Turbo — 4th resolution: </a:t>
             </a:r>
             <a:r>
               <a:rPr lang="en-US" sz="950" dirty="0">
@@ -12772,6 +13880,198 @@
           </a:p>
         </p:txBody>
       </p:sp>
+      <p:pic>
+        <p:nvPicPr>
+          <p:cNvPr id="44" name="Picture 43" descr="step4_resolution.png"/>
+          <p:cNvPicPr>
+            <a:picLocks noChangeAspect="1"/>
+          </p:cNvPicPr>
+          <p:nvPr/>
+        </p:nvPicPr>
+        <p:blipFill>
+          <a:blip r:embed="rId4"/>
+          <a:stretch>
+            <a:fillRect/>
+          </a:stretch>
+        </p:blipFill>
+        <p:spPr>
+          <a:xfrm>
+            <a:off x="1200794" y="749808"/>
+            <a:ext cx="1987531" cy="2286000"/>
+          </a:xfrm>
+          <a:prstGeom prst="rect">
+            <a:avLst/>
+          </a:prstGeom>
+        </p:spPr>
+      </p:pic>
+      <p:pic>
+        <p:nvPicPr>
+          <p:cNvPr id="45" name="Picture 44" descr="zap_f5b942_0.png"/>
+          <p:cNvPicPr>
+            <a:picLocks noChangeAspect="1"/>
+          </p:cNvPicPr>
+          <p:nvPr/>
+        </p:nvPicPr>
+        <p:blipFill>
+          <a:blip r:embed="rId5"/>
+          <a:stretch>
+            <a:fillRect/>
+          </a:stretch>
+        </p:blipFill>
+        <p:spPr>
+          <a:xfrm>
+            <a:off x="4434840" y="905256"/>
+            <a:ext cx="182880" cy="182880"/>
+          </a:xfrm>
+          <a:prstGeom prst="rect">
+            <a:avLst/>
+          </a:prstGeom>
+        </p:spPr>
+      </p:pic>
+      <p:pic>
+        <p:nvPicPr>
+          <p:cNvPr id="46" name="Picture 45" descr="clock_8a97ad_0.png"/>
+          <p:cNvPicPr>
+            <a:picLocks noChangeAspect="1"/>
+          </p:cNvPicPr>
+          <p:nvPr/>
+        </p:nvPicPr>
+        <p:blipFill>
+          <a:blip r:embed="rId6"/>
+          <a:stretch>
+            <a:fillRect/>
+          </a:stretch>
+        </p:blipFill>
+        <p:spPr>
+          <a:xfrm>
+            <a:off x="4434840" y="1216152"/>
+            <a:ext cx="182880" cy="182880"/>
+          </a:xfrm>
+          <a:prstGeom prst="rect">
+            <a:avLst/>
+          </a:prstGeom>
+        </p:spPr>
+      </p:pic>
+      <p:pic>
+        <p:nvPicPr>
+          <p:cNvPr id="47" name="Picture 46" descr="sliders_4a9eff_0.png"/>
+          <p:cNvPicPr>
+            <a:picLocks noChangeAspect="1"/>
+          </p:cNvPicPr>
+          <p:nvPr/>
+        </p:nvPicPr>
+        <p:blipFill>
+          <a:blip r:embed="rId7"/>
+          <a:stretch>
+            <a:fillRect/>
+          </a:stretch>
+        </p:blipFill>
+        <p:spPr>
+          <a:xfrm>
+            <a:off x="4434840" y="2075688"/>
+            <a:ext cx="182880" cy="182880"/>
+          </a:xfrm>
+          <a:prstGeom prst="rect">
+            <a:avLst/>
+          </a:prstGeom>
+        </p:spPr>
+      </p:pic>
+      <p:pic>
+        <p:nvPicPr>
+          <p:cNvPr id="48" name="Picture 47" descr="clock_8a97ad_0.png"/>
+          <p:cNvPicPr>
+            <a:picLocks noChangeAspect="1"/>
+          </p:cNvPicPr>
+          <p:nvPr/>
+        </p:nvPicPr>
+        <p:blipFill>
+          <a:blip r:embed="rId6"/>
+          <a:stretch>
+            <a:fillRect/>
+          </a:stretch>
+        </p:blipFill>
+        <p:spPr>
+          <a:xfrm>
+            <a:off x="4434840" y="2386584"/>
+            <a:ext cx="182880" cy="182880"/>
+          </a:xfrm>
+          <a:prstGeom prst="rect">
+            <a:avLst/>
+          </a:prstGeom>
+        </p:spPr>
+      </p:pic>
+      <p:pic>
+        <p:nvPicPr>
+          <p:cNvPr id="49" name="Picture 48" descr="target_26a641_0.png"/>
+          <p:cNvPicPr>
+            <a:picLocks noChangeAspect="1"/>
+          </p:cNvPicPr>
+          <p:nvPr/>
+        </p:nvPicPr>
+        <p:blipFill>
+          <a:blip r:embed="rId8"/>
+          <a:stretch>
+            <a:fillRect/>
+          </a:stretch>
+        </p:blipFill>
+        <p:spPr>
+          <a:xfrm>
+            <a:off x="4434840" y="3246120"/>
+            <a:ext cx="182880" cy="182880"/>
+          </a:xfrm>
+          <a:prstGeom prst="rect">
+            <a:avLst/>
+          </a:prstGeom>
+        </p:spPr>
+      </p:pic>
+      <p:pic>
+        <p:nvPicPr>
+          <p:cNvPr id="50" name="Picture 49" descr="clock_8a97ad_0.png"/>
+          <p:cNvPicPr>
+            <a:picLocks noChangeAspect="1"/>
+          </p:cNvPicPr>
+          <p:nvPr/>
+        </p:nvPicPr>
+        <p:blipFill>
+          <a:blip r:embed="rId6"/>
+          <a:stretch>
+            <a:fillRect/>
+          </a:stretch>
+        </p:blipFill>
+        <p:spPr>
+          <a:xfrm>
+            <a:off x="4434840" y="3557016"/>
+            <a:ext cx="182880" cy="182880"/>
+          </a:xfrm>
+          <a:prstGeom prst="rect">
+            <a:avLst/>
+          </a:prstGeom>
+        </p:spPr>
+      </p:pic>
+      <p:pic>
+        <p:nvPicPr>
+          <p:cNvPr id="51" name="Picture 50" descr="ffwd_4a9eff_0.png"/>
+          <p:cNvPicPr>
+            <a:picLocks noChangeAspect="1"/>
+          </p:cNvPicPr>
+          <p:nvPr/>
+        </p:nvPicPr>
+        <p:blipFill>
+          <a:blip r:embed="rId9"/>
+          <a:stretch>
+            <a:fillRect/>
+          </a:stretch>
+        </p:blipFill>
+        <p:spPr>
+          <a:xfrm>
+            <a:off x="640080" y="3637432"/>
+            <a:ext cx="182880" cy="182880"/>
+          </a:xfrm>
+          <a:prstGeom prst="rect">
+            <a:avLst/>
+          </a:prstGeom>
+        </p:spPr>
+      </p:pic>
     </p:spTree>
   </p:cSld>
   <p:clrMapOvr>
@@ -12780,7 +14080,7 @@
 </p:sld>
 </file>
 
-<file path=ppt/slides/slide8.xml><?xml version="1.0" encoding="utf-8"?>
+<file path=ppt/slides/slide9.xml><?xml version="1.0" encoding="utf-8"?>
 <p:sld xmlns:a="http://schemas.openxmlformats.org/drawingml/2006/main" xmlns:r="http://schemas.openxmlformats.org/officeDocument/2006/relationships" xmlns:p="http://schemas.openxmlformats.org/presentationml/2006/main">
   <p:cSld name="Slide 7">
     <p:bg>
@@ -13219,7 +14519,7 @@
                   <a:srgbClr val="556A8A"/>
                 </a:solidFill>
               </a:rPr>
-              <a:t>9 / 18</a:t>
+              <a:t>9 / 19</a:t>
             </a:r>
             <a:endParaRPr lang="en-US" sz="900" dirty="0"/>
           </a:p>
@@ -13263,1029 +14563,28 @@
       </p:sp>
       <p:pic>
         <p:nvPicPr>
-          <p:cNvPr id="16" name="Picture 15" descr="Slide7step5.png"/>
+          <p:cNvPr id="16" name="Picture 15" descr="image.png"/>
           <p:cNvPicPr>
             <a:picLocks noChangeAspect="1"/>
           </p:cNvPicPr>
           <p:nvPr/>
         </p:nvPicPr>
         <p:blipFill>
-          <a:blip r:embed="rId3"/>
+          <a:blip r:embed="rId4"/>
           <a:stretch>
             <a:fillRect/>
           </a:stretch>
         </p:blipFill>
         <p:spPr>
           <a:xfrm>
-            <a:off x="646064" y="749808"/>
-            <a:ext cx="7851871" cy="2011680"/>
+            <a:off x="3264408" y="1417320"/>
+            <a:ext cx="2615184" cy="633984"/>
           </a:xfrm>
           <a:prstGeom prst="rect">
             <a:avLst/>
           </a:prstGeom>
         </p:spPr>
       </p:pic>
-    </p:spTree>
-  </p:cSld>
-  <p:clrMapOvr>
-    <a:masterClrMapping/>
-  </p:clrMapOvr>
-</p:sld>
-</file>
-
-<file path=ppt/slides/slide9.xml><?xml version="1.0" encoding="utf-8"?>
-<p:sld xmlns:a="http://schemas.openxmlformats.org/drawingml/2006/main" xmlns:r="http://schemas.openxmlformats.org/officeDocument/2006/relationships" xmlns:p="http://schemas.openxmlformats.org/presentationml/2006/main">
-  <p:cSld name="Slide 8">
-    <p:bg>
-      <p:bgPr>
-        <a:solidFill>
-          <a:srgbClr val="020C1B"/>
-        </a:solidFill>
-      </p:bgPr>
-    </p:bg>
-    <p:spTree>
-      <p:nvGrpSpPr>
-        <p:cNvPr id="1" name=""/>
-        <p:cNvGrpSpPr/>
-        <p:nvPr/>
-      </p:nvGrpSpPr>
-      <p:grpSpPr>
-        <a:xfrm>
-          <a:off x="0" y="0"/>
-          <a:ext cx="0" cy="0"/>
-          <a:chOff x="0" y="0"/>
-          <a:chExt cx="0" cy="0"/>
-        </a:xfrm>
-      </p:grpSpPr>
-      <p:sp>
-        <p:nvSpPr>
-          <p:cNvPr id="2" name="Shape 0"/>
-          <p:cNvSpPr/>
-          <p:nvPr/>
-        </p:nvSpPr>
-        <p:spPr>
-          <a:xfrm>
-            <a:off x="0" y="0"/>
-            <a:ext cx="9144000" cy="54864"/>
-          </a:xfrm>
-          <a:prstGeom prst="rect">
-            <a:avLst/>
-          </a:prstGeom>
-          <a:solidFill>
-            <a:srgbClr val="1A6BBF"/>
-          </a:solidFill>
-          <a:ln w="12700">
-            <a:solidFill>
-              <a:srgbClr val="1A6BBF"/>
-            </a:solidFill>
-            <a:prstDash val="solid"/>
-          </a:ln>
-        </p:spPr>
-        <p:txBody>
-          <a:bodyPr/>
-          <a:p/>
-        </p:txBody>
-      </p:sp>
-      <p:sp>
-        <p:nvSpPr>
-          <p:cNvPr id="3" name="Text 1"/>
-          <p:cNvSpPr/>
-          <p:nvPr/>
-        </p:nvSpPr>
-        <p:spPr>
-          <a:xfrm>
-            <a:off x="365760" y="164592"/>
-            <a:ext cx="8229600" cy="457200"/>
-          </a:xfrm>
-          <a:prstGeom prst="rect">
-            <a:avLst/>
-          </a:prstGeom>
-          <a:noFill/>
-          <a:ln/>
-        </p:spPr>
-        <p:txBody>
-          <a:bodyPr wrap="square" rtlCol="0" anchor="ctr"/>
-          <a:lstStyle/>
-          <a:p>
-            <a:pPr indent="0" marL="0">
-              <a:buNone/>
-            </a:pPr>
-            <a:r>
-              <a:rPr lang="en-US" sz="2200" b="1" dirty="0">
-                <a:solidFill>
-                  <a:srgbClr val="FFFFFF"/>
-                </a:solidFill>
-              </a:rPr>
-              <a:t>Reading the Chart</a:t>
-            </a:r>
-            <a:endParaRPr lang="en-US" sz="2200" dirty="0"/>
-          </a:p>
-        </p:txBody>
-      </p:sp>
-      <p:sp>
-        <p:nvSpPr>
-          <p:cNvPr id="6" name="Text 4"/>
-          <p:cNvSpPr/>
-          <p:nvPr/>
-        </p:nvSpPr>
-        <p:spPr>
-          <a:xfrm>
-            <a:off x="5669280" y="749808"/>
-            <a:ext cx="3200400" cy="320040"/>
-          </a:xfrm>
-          <a:prstGeom prst="rect">
-            <a:avLst/>
-          </a:prstGeom>
-          <a:noFill/>
-          <a:ln/>
-        </p:spPr>
-        <p:txBody>
-          <a:bodyPr wrap="square" rtlCol="0" anchor="ctr"/>
-          <a:lstStyle/>
-          <a:p>
-            <a:pPr indent="0" marL="0">
-              <a:buNone/>
-            </a:pPr>
-            <a:r>
-              <a:rPr lang="en-US" sz="1100" b="1" dirty="0">
-                <a:solidFill>
-                  <a:srgbClr val="4A9EFF"/>
-                </a:solidFill>
-              </a:rPr>
-              <a:t>Chart legend</a:t>
-            </a:r>
-            <a:endParaRPr lang="en-US" sz="1100" dirty="0"/>
-          </a:p>
-        </p:txBody>
-      </p:sp>
-      <p:sp>
-        <p:nvSpPr>
-          <p:cNvPr id="7" name="Shape 5"/>
-          <p:cNvSpPr/>
-          <p:nvPr/>
-        </p:nvSpPr>
-        <p:spPr>
-          <a:xfrm>
-            <a:off x="5669280" y="1115568"/>
-            <a:ext cx="164592" cy="201168"/>
-          </a:xfrm>
-          <a:prstGeom prst="rect">
-            <a:avLst/>
-          </a:prstGeom>
-          <a:solidFill>
-            <a:srgbClr val="7C3AED"/>
-          </a:solidFill>
-          <a:ln w="12700">
-            <a:solidFill>
-              <a:srgbClr val="7C3AED"/>
-            </a:solidFill>
-            <a:prstDash val="solid"/>
-          </a:ln>
-        </p:spPr>
-        <p:txBody>
-          <a:bodyPr/>
-          <a:p/>
-        </p:txBody>
-      </p:sp>
-      <p:sp>
-        <p:nvSpPr>
-          <p:cNvPr id="8" name="Text 6"/>
-          <p:cNvSpPr/>
-          <p:nvPr/>
-        </p:nvSpPr>
-        <p:spPr>
-          <a:xfrm>
-            <a:off x="5897880" y="1115568"/>
-            <a:ext cx="2926080" cy="201168"/>
-          </a:xfrm>
-          <a:prstGeom prst="rect">
-            <a:avLst/>
-          </a:prstGeom>
-          <a:noFill/>
-          <a:ln/>
-        </p:spPr>
-        <p:txBody>
-          <a:bodyPr wrap="square" lIns="0" tIns="0" rIns="0" bIns="0" rtlCol="0" anchor="ctr"/>
-          <a:lstStyle/>
-          <a:p>
-            <a:pPr indent="0" marL="0">
-              <a:buNone/>
-            </a:pPr>
-            <a:r>
-              <a:rPr lang="en-US" sz="900" b="1" dirty="0">
-                <a:solidFill>
-                  <a:srgbClr val="FFFFFF"/>
-                </a:solidFill>
-              </a:rPr>
-              <a:t>Purple dashed</a:t>
-            </a:r>
-            <a:endParaRPr lang="en-US" sz="900" dirty="0"/>
-          </a:p>
-        </p:txBody>
-      </p:sp>
-      <p:sp>
-        <p:nvSpPr>
-          <p:cNvPr id="9" name="Text 7"/>
-          <p:cNvSpPr/>
-          <p:nvPr/>
-        </p:nvSpPr>
-        <p:spPr>
-          <a:xfrm>
-            <a:off x="5897880" y="1298448"/>
-            <a:ext cx="2926080" cy="182880"/>
-          </a:xfrm>
-          <a:prstGeom prst="rect">
-            <a:avLst/>
-          </a:prstGeom>
-          <a:noFill/>
-          <a:ln/>
-        </p:spPr>
-        <p:txBody>
-          <a:bodyPr wrap="square" lIns="0" tIns="0" rIns="0" bIns="0" rtlCol="0" anchor="ctr"/>
-          <a:lstStyle/>
-          <a:p>
-            <a:pPr indent="0" marL="0">
-              <a:buNone/>
-            </a:pPr>
-            <a:r>
-              <a:rPr lang="en-US" sz="850" dirty="0">
-                <a:solidFill>
-                  <a:srgbClr val="556A8A"/>
-                </a:solidFill>
-              </a:rPr>
-              <a:t>Mean-variance efficient frontier (Markowitz)</a:t>
-            </a:r>
-            <a:endParaRPr lang="en-US" sz="850" dirty="0"/>
-          </a:p>
-        </p:txBody>
-      </p:sp>
-      <p:sp>
-        <p:nvSpPr>
-          <p:cNvPr id="10" name="Shape 8"/>
-          <p:cNvSpPr/>
-          <p:nvPr/>
-        </p:nvSpPr>
-        <p:spPr>
-          <a:xfrm>
-            <a:off x="5669280" y="1463040"/>
-            <a:ext cx="164592" cy="201168"/>
-          </a:xfrm>
-          <a:prstGeom prst="rect">
-            <a:avLst/>
-          </a:prstGeom>
-          <a:solidFill>
-            <a:srgbClr val="4A9EFF"/>
-          </a:solidFill>
-          <a:ln w="12700">
-            <a:solidFill>
-              <a:srgbClr val="4A9EFF"/>
-            </a:solidFill>
-            <a:prstDash val="solid"/>
-          </a:ln>
-        </p:spPr>
-        <p:txBody>
-          <a:bodyPr/>
-          <a:p/>
-        </p:txBody>
-      </p:sp>
-      <p:sp>
-        <p:nvSpPr>
-          <p:cNvPr id="11" name="Text 9"/>
-          <p:cNvSpPr/>
-          <p:nvPr/>
-        </p:nvSpPr>
-        <p:spPr>
-          <a:xfrm>
-            <a:off x="5897880" y="1463040"/>
-            <a:ext cx="2926080" cy="201168"/>
-          </a:xfrm>
-          <a:prstGeom prst="rect">
-            <a:avLst/>
-          </a:prstGeom>
-          <a:noFill/>
-          <a:ln/>
-        </p:spPr>
-        <p:txBody>
-          <a:bodyPr wrap="square" lIns="0" tIns="0" rIns="0" bIns="0" rtlCol="0" anchor="ctr"/>
-          <a:lstStyle/>
-          <a:p>
-            <a:pPr indent="0" marL="0">
-              <a:buNone/>
-            </a:pPr>
-            <a:r>
-              <a:rPr lang="en-US" sz="900" b="1" dirty="0">
-                <a:solidFill>
-                  <a:srgbClr val="FFFFFF"/>
-                </a:solidFill>
-              </a:rPr>
-              <a:t>Blue dots</a:t>
-            </a:r>
-            <a:endParaRPr lang="en-US" sz="900" dirty="0"/>
-          </a:p>
-        </p:txBody>
-      </p:sp>
-      <p:sp>
-        <p:nvSpPr>
-          <p:cNvPr id="12" name="Text 10"/>
-          <p:cNvSpPr/>
-          <p:nvPr/>
-        </p:nvSpPr>
-        <p:spPr>
-          <a:xfrm>
-            <a:off x="5897880" y="1645920"/>
-            <a:ext cx="2926080" cy="182880"/>
-          </a:xfrm>
-          <a:prstGeom prst="rect">
-            <a:avLst/>
-          </a:prstGeom>
-          <a:noFill/>
-          <a:ln/>
-        </p:spPr>
-        <p:txBody>
-          <a:bodyPr wrap="square" lIns="0" tIns="0" rIns="0" bIns="0" rtlCol="0" anchor="ctr"/>
-          <a:lstStyle/>
-          <a:p>
-            <a:pPr indent="0" marL="0">
-              <a:buNone/>
-            </a:pPr>
-            <a:r>
-              <a:rPr lang="en-US" sz="850" dirty="0">
-                <a:solidFill>
-                  <a:srgbClr val="556A8A"/>
-                </a:solidFill>
-              </a:rPr>
-              <a:t>Behavioural efficient frontier — no derivative</a:t>
-            </a:r>
-            <a:endParaRPr lang="en-US" sz="850" dirty="0"/>
-          </a:p>
-        </p:txBody>
-      </p:sp>
-      <p:sp>
-        <p:nvSpPr>
-          <p:cNvPr id="13" name="Shape 11"/>
-          <p:cNvSpPr/>
-          <p:nvPr/>
-        </p:nvSpPr>
-        <p:spPr>
-          <a:xfrm>
-            <a:off x="5669280" y="1810512"/>
-            <a:ext cx="164592" cy="201168"/>
-          </a:xfrm>
-          <a:prstGeom prst="rect">
-            <a:avLst/>
-          </a:prstGeom>
-          <a:solidFill>
-            <a:srgbClr val="F59E0B"/>
-          </a:solidFill>
-          <a:ln w="12700">
-            <a:solidFill>
-              <a:srgbClr val="F59E0B"/>
-            </a:solidFill>
-            <a:prstDash val="solid"/>
-          </a:ln>
-        </p:spPr>
-        <p:txBody>
-          <a:bodyPr/>
-          <a:p/>
-        </p:txBody>
-      </p:sp>
-      <p:sp>
-        <p:nvSpPr>
-          <p:cNvPr id="14" name="Text 12"/>
-          <p:cNvSpPr/>
-          <p:nvPr/>
-        </p:nvSpPr>
-        <p:spPr>
-          <a:xfrm>
-            <a:off x="5897880" y="1810512"/>
-            <a:ext cx="2926080" cy="201168"/>
-          </a:xfrm>
-          <a:prstGeom prst="rect">
-            <a:avLst/>
-          </a:prstGeom>
-          <a:noFill/>
-          <a:ln/>
-        </p:spPr>
-        <p:txBody>
-          <a:bodyPr wrap="square" lIns="0" tIns="0" rIns="0" bIns="0" rtlCol="0" anchor="ctr"/>
-          <a:lstStyle/>
-          <a:p>
-            <a:pPr indent="0" marL="0">
-              <a:buNone/>
-            </a:pPr>
-            <a:r>
-              <a:rPr lang="en-US" sz="900" b="1" dirty="0">
-                <a:solidFill>
-                  <a:srgbClr val="FFFFFF"/>
-                </a:solidFill>
-              </a:rPr>
-              <a:t>Gold squares</a:t>
-            </a:r>
-            <a:endParaRPr lang="en-US" sz="900" dirty="0"/>
-          </a:p>
-        </p:txBody>
-      </p:sp>
-      <p:sp>
-        <p:nvSpPr>
-          <p:cNvPr id="15" name="Text 13"/>
-          <p:cNvSpPr/>
-          <p:nvPr/>
-        </p:nvSpPr>
-        <p:spPr>
-          <a:xfrm>
-            <a:off x="5897880" y="1993392"/>
-            <a:ext cx="2926080" cy="182880"/>
-          </a:xfrm>
-          <a:prstGeom prst="rect">
-            <a:avLst/>
-          </a:prstGeom>
-          <a:noFill/>
-          <a:ln/>
-        </p:spPr>
-        <p:txBody>
-          <a:bodyPr wrap="square" lIns="0" tIns="0" rIns="0" bIns="0" rtlCol="0" anchor="ctr"/>
-          <a:lstStyle/>
-          <a:p>
-            <a:pPr indent="0" marL="0">
-              <a:buNone/>
-            </a:pPr>
-            <a:r>
-              <a:rPr lang="en-US" sz="850" dirty="0">
-                <a:solidFill>
-                  <a:srgbClr val="556A8A"/>
-                </a:solidFill>
-              </a:rPr>
-              <a:t>Behavioural optimum — derivative frontier</a:t>
-            </a:r>
-            <a:endParaRPr lang="en-US" sz="850" dirty="0"/>
-          </a:p>
-        </p:txBody>
-      </p:sp>
-      <p:sp>
-        <p:nvSpPr>
-          <p:cNvPr id="16" name="Shape 14"/>
-          <p:cNvSpPr/>
-          <p:nvPr/>
-        </p:nvSpPr>
-        <p:spPr>
-          <a:xfrm>
-            <a:off x="5669280" y="2157984"/>
-            <a:ext cx="164592" cy="201168"/>
-          </a:xfrm>
-          <a:prstGeom prst="rect">
-            <a:avLst/>
-          </a:prstGeom>
-          <a:solidFill>
-            <a:srgbClr val="10B981"/>
-          </a:solidFill>
-          <a:ln w="12700">
-            <a:solidFill>
-              <a:srgbClr val="10B981"/>
-            </a:solidFill>
-            <a:prstDash val="solid"/>
-          </a:ln>
-        </p:spPr>
-        <p:txBody>
-          <a:bodyPr/>
-          <a:p/>
-        </p:txBody>
-      </p:sp>
-      <p:sp>
-        <p:nvSpPr>
-          <p:cNvPr id="17" name="Text 15"/>
-          <p:cNvSpPr/>
-          <p:nvPr/>
-        </p:nvSpPr>
-        <p:spPr>
-          <a:xfrm>
-            <a:off x="5897880" y="2157984"/>
-            <a:ext cx="2926080" cy="201168"/>
-          </a:xfrm>
-          <a:prstGeom prst="rect">
-            <a:avLst/>
-          </a:prstGeom>
-          <a:noFill/>
-          <a:ln/>
-        </p:spPr>
-        <p:txBody>
-          <a:bodyPr wrap="square" lIns="0" tIns="0" rIns="0" bIns="0" rtlCol="0" anchor="ctr"/>
-          <a:lstStyle/>
-          <a:p>
-            <a:pPr indent="0" marL="0">
-              <a:buNone/>
-            </a:pPr>
-            <a:r>
-              <a:rPr lang="en-US" sz="900" b="1" dirty="0">
-                <a:solidFill>
-                  <a:srgbClr val="FFFFFF"/>
-                </a:solidFill>
-              </a:rPr>
-              <a:t>Green diamond</a:t>
-            </a:r>
-            <a:endParaRPr lang="en-US" sz="900" dirty="0"/>
-          </a:p>
-        </p:txBody>
-      </p:sp>
-      <p:sp>
-        <p:nvSpPr>
-          <p:cNvPr id="18" name="Text 16"/>
-          <p:cNvSpPr/>
-          <p:nvPr/>
-        </p:nvSpPr>
-        <p:spPr>
-          <a:xfrm>
-            <a:off x="5897880" y="2340864"/>
-            <a:ext cx="2926080" cy="182880"/>
-          </a:xfrm>
-          <a:prstGeom prst="rect">
-            <a:avLst/>
-          </a:prstGeom>
-          <a:noFill/>
-          <a:ln/>
-        </p:spPr>
-        <p:txBody>
-          <a:bodyPr wrap="square" lIns="0" tIns="0" rIns="0" bIns="0" rtlCol="0" anchor="ctr"/>
-          <a:lstStyle/>
-          <a:p>
-            <a:pPr indent="0" marL="0">
-              <a:buNone/>
-            </a:pPr>
-            <a:r>
-              <a:rPr lang="en-US" sz="850" dirty="0">
-                <a:solidFill>
-                  <a:srgbClr val="556A8A"/>
-                </a:solidFill>
-              </a:rPr>
-              <a:t>Portfolio (1) — no derivative optimum</a:t>
-            </a:r>
-            <a:endParaRPr lang="en-US" sz="850" dirty="0"/>
-          </a:p>
-        </p:txBody>
-      </p:sp>
-      <p:sp>
-        <p:nvSpPr>
-          <p:cNvPr id="19" name="Shape 17"/>
-          <p:cNvSpPr/>
-          <p:nvPr/>
-        </p:nvSpPr>
-        <p:spPr>
-          <a:xfrm>
-            <a:off x="5669280" y="2505456"/>
-            <a:ext cx="164592" cy="201168"/>
-          </a:xfrm>
-          <a:prstGeom prst="rect">
-            <a:avLst/>
-          </a:prstGeom>
-          <a:solidFill>
-            <a:srgbClr val="F59E0B"/>
-          </a:solidFill>
-          <a:ln w="12700">
-            <a:solidFill>
-              <a:srgbClr val="F59E0B"/>
-            </a:solidFill>
-            <a:prstDash val="solid"/>
-          </a:ln>
-        </p:spPr>
-        <p:txBody>
-          <a:bodyPr/>
-          <a:p/>
-        </p:txBody>
-      </p:sp>
-      <p:sp>
-        <p:nvSpPr>
-          <p:cNvPr id="20" name="Text 18"/>
-          <p:cNvSpPr/>
-          <p:nvPr/>
-        </p:nvSpPr>
-        <p:spPr>
-          <a:xfrm>
-            <a:off x="5897880" y="2505456"/>
-            <a:ext cx="2926080" cy="201168"/>
-          </a:xfrm>
-          <a:prstGeom prst="rect">
-            <a:avLst/>
-          </a:prstGeom>
-          <a:noFill/>
-          <a:ln/>
-        </p:spPr>
-        <p:txBody>
-          <a:bodyPr wrap="square" lIns="0" tIns="0" rIns="0" bIns="0" rtlCol="0" anchor="ctr"/>
-          <a:lstStyle/>
-          <a:p>
-            <a:pPr indent="0" marL="0">
-              <a:buNone/>
-            </a:pPr>
-            <a:r>
-              <a:rPr lang="en-US" sz="900" b="1" dirty="0">
-                <a:solidFill>
-                  <a:srgbClr val="FFFFFF"/>
-                </a:solidFill>
-              </a:rPr>
-              <a:t>Orange square</a:t>
-            </a:r>
-            <a:endParaRPr lang="en-US" sz="900" dirty="0"/>
-          </a:p>
-        </p:txBody>
-      </p:sp>
-      <p:sp>
-        <p:nvSpPr>
-          <p:cNvPr id="21" name="Text 19"/>
-          <p:cNvSpPr/>
-          <p:nvPr/>
-        </p:nvSpPr>
-        <p:spPr>
-          <a:xfrm>
-            <a:off x="5897880" y="2688336"/>
-            <a:ext cx="2926080" cy="182880"/>
-          </a:xfrm>
-          <a:prstGeom prst="rect">
-            <a:avLst/>
-          </a:prstGeom>
-          <a:noFill/>
-          <a:ln/>
-        </p:spPr>
-        <p:txBody>
-          <a:bodyPr wrap="square" lIns="0" tIns="0" rIns="0" bIns="0" rtlCol="0" anchor="ctr"/>
-          <a:lstStyle/>
-          <a:p>
-            <a:pPr indent="0" marL="0">
-              <a:buNone/>
-            </a:pPr>
-            <a:r>
-              <a:rPr lang="en-US" sz="850" dirty="0">
-                <a:solidFill>
-                  <a:srgbClr val="556A8A"/>
-                </a:solidFill>
-              </a:rPr>
-              <a:t>Portfolio (2) — with derivative, same λ</a:t>
-            </a:r>
-            <a:endParaRPr lang="en-US" sz="850" dirty="0"/>
-          </a:p>
-        </p:txBody>
-      </p:sp>
-      <p:sp>
-        <p:nvSpPr>
-          <p:cNvPr id="22" name="Shape 20"/>
-          <p:cNvSpPr/>
-          <p:nvPr/>
-        </p:nvSpPr>
-        <p:spPr>
-          <a:xfrm>
-            <a:off x="5669280" y="2852928"/>
-            <a:ext cx="164592" cy="201168"/>
-          </a:xfrm>
-          <a:prstGeom prst="rect">
-            <a:avLst/>
-          </a:prstGeom>
-          <a:solidFill>
-            <a:srgbClr val="E76F51"/>
-          </a:solidFill>
-          <a:ln w="12700">
-            <a:solidFill>
-              <a:srgbClr val="E76F51"/>
-            </a:solidFill>
-            <a:prstDash val="solid"/>
-          </a:ln>
-        </p:spPr>
-        <p:txBody>
-          <a:bodyPr/>
-          <a:p/>
-        </p:txBody>
-      </p:sp>
-      <p:sp>
-        <p:nvSpPr>
-          <p:cNvPr id="23" name="Text 21"/>
-          <p:cNvSpPr/>
-          <p:nvPr/>
-        </p:nvSpPr>
-        <p:spPr>
-          <a:xfrm>
-            <a:off x="5897880" y="2852928"/>
-            <a:ext cx="2926080" cy="201168"/>
-          </a:xfrm>
-          <a:prstGeom prst="rect">
-            <a:avLst/>
-          </a:prstGeom>
-          <a:noFill/>
-          <a:ln/>
-        </p:spPr>
-        <p:txBody>
-          <a:bodyPr wrap="square" lIns="0" tIns="0" rIns="0" bIns="0" rtlCol="0" anchor="ctr"/>
-          <a:lstStyle/>
-          <a:p>
-            <a:pPr indent="0" marL="0">
-              <a:buNone/>
-            </a:pPr>
-            <a:r>
-              <a:rPr lang="en-US" sz="900" b="1" dirty="0">
-                <a:solidFill>
-                  <a:srgbClr val="FFFFFF"/>
-                </a:solidFill>
-              </a:rPr>
-              <a:t>Coral star</a:t>
-            </a:r>
-            <a:endParaRPr lang="en-US" sz="900" dirty="0"/>
-          </a:p>
-        </p:txBody>
-      </p:sp>
-      <p:sp>
-        <p:nvSpPr>
-          <p:cNvPr id="24" name="Text 22"/>
-          <p:cNvSpPr/>
-          <p:nvPr/>
-        </p:nvSpPr>
-        <p:spPr>
-          <a:xfrm>
-            <a:off x="5897880" y="3035808"/>
-            <a:ext cx="2926080" cy="182880"/>
-          </a:xfrm>
-          <a:prstGeom prst="rect">
-            <a:avLst/>
-          </a:prstGeom>
-          <a:noFill/>
-          <a:ln/>
-        </p:spPr>
-        <p:txBody>
-          <a:bodyPr wrap="square" lIns="0" tIns="0" rIns="0" bIns="0" rtlCol="0" anchor="ctr"/>
-          <a:lstStyle/>
-          <a:p>
-            <a:pPr indent="0" marL="0">
-              <a:buNone/>
-            </a:pPr>
-            <a:r>
-              <a:rPr lang="en-US" sz="850" dirty="0">
-                <a:solidFill>
-                  <a:srgbClr val="556A8A"/>
-                </a:solidFill>
-              </a:rPr>
-              <a:t>Portfolio (3) — same variance as P(1)</a:t>
-            </a:r>
-            <a:endParaRPr lang="en-US" sz="850" dirty="0"/>
-          </a:p>
-        </p:txBody>
-      </p:sp>
-      <p:sp>
-        <p:nvSpPr>
-          <p:cNvPr id="25" name="Shape 23"/>
-          <p:cNvSpPr/>
-          <p:nvPr/>
-        </p:nvSpPr>
-        <p:spPr>
-          <a:xfrm>
-            <a:off x="365760" y="4078224"/>
-            <a:ext cx="8412480" cy="658368"/>
-          </a:xfrm>
-          <a:prstGeom prst="rect">
-            <a:avLst/>
-          </a:prstGeom>
-          <a:solidFill>
-            <a:srgbClr val="0D1A2E"/>
-          </a:solidFill>
-          <a:ln w="10160">
-            <a:solidFill>
-              <a:srgbClr val="1A6BBF"/>
-            </a:solidFill>
-            <a:prstDash val="solid"/>
-          </a:ln>
-        </p:spPr>
-        <p:txBody>
-          <a:bodyPr/>
-          <a:p/>
-        </p:txBody>
-      </p:sp>
-      <p:sp>
-        <p:nvSpPr>
-          <p:cNvPr id="26" name="Text 24"/>
-          <p:cNvSpPr/>
-          <p:nvPr/>
-        </p:nvSpPr>
-        <p:spPr>
-          <a:xfrm>
-            <a:off x="502920" y="4078224"/>
-            <a:ext cx="8229600" cy="658368"/>
-          </a:xfrm>
-          <a:prstGeom prst="rect">
-            <a:avLst/>
-          </a:prstGeom>
-          <a:noFill/>
-          <a:ln/>
-        </p:spPr>
-        <p:txBody>
-          <a:bodyPr wrap="square" rtlCol="0" anchor="ctr"/>
-          <a:lstStyle/>
-          <a:p>
-            <a:pPr algn="ctr" indent="0" marL="0">
-              <a:buNone/>
-            </a:pPr>
-            <a:r>
-              <a:rPr lang="en-US" sz="950" dirty="0">
-                <a:solidFill>
-                  <a:srgbClr val="C0C8D8"/>
-                </a:solidFill>
-              </a:rPr>
-              <a:t>X-axis: Portfolio Risk (Standard Deviation %)   |   Y-axis: Expected Return (%)</a:t>
-            </a:r>
-            <a:endParaRPr lang="en-US" sz="950" dirty="0"/>
-          </a:p>
-        </p:txBody>
-      </p:sp>
-      <p:sp>
-        <p:nvSpPr>
-          <p:cNvPr id="27" name="Text 25"/>
-          <p:cNvSpPr/>
-          <p:nvPr/>
-        </p:nvSpPr>
-        <p:spPr>
-          <a:xfrm>
-            <a:off x="8046720" y="4754880"/>
-            <a:ext cx="914400" cy="274320"/>
-          </a:xfrm>
-          <a:prstGeom prst="rect">
-            <a:avLst/>
-          </a:prstGeom>
-          <a:noFill/>
-          <a:ln/>
-        </p:spPr>
-        <p:txBody>
-          <a:bodyPr wrap="square" rtlCol="0" anchor="ctr"/>
-          <a:lstStyle/>
-          <a:p>
-            <a:pPr algn="r" indent="0" marL="0">
-              <a:buNone/>
-            </a:pPr>
-            <a:r>
-              <a:rPr lang="en-US" sz="900" dirty="0">
-                <a:solidFill>
-                  <a:srgbClr val="556A8A"/>
-                </a:solidFill>
-              </a:rPr>
-              <a:t>10 / 18</a:t>
-            </a:r>
-            <a:endParaRPr lang="en-US" sz="900" dirty="0"/>
-          </a:p>
-        </p:txBody>
-      </p:sp>
-      <p:sp>
-        <p:nvSpPr>
-          <p:cNvPr id="28" name="Text 26"/>
-          <p:cNvSpPr/>
-          <p:nvPr/>
-        </p:nvSpPr>
-        <p:spPr>
-          <a:xfrm>
-            <a:off x="365760" y="4754880"/>
-            <a:ext cx="6400800" cy="274320"/>
-          </a:xfrm>
-          <a:prstGeom prst="rect">
-            <a:avLst/>
-          </a:prstGeom>
-          <a:noFill/>
-          <a:ln/>
-        </p:spPr>
-        <p:txBody>
-          <a:bodyPr wrap="square" rtlCol="0" anchor="ctr"/>
-          <a:lstStyle/>
-          <a:p>
-            <a:pPr algn="l" indent="0" marL="0">
-              <a:buNone/>
-            </a:pPr>
-            <a:r>
-              <a:rPr lang="en-US" sz="900" dirty="0">
-                <a:solidFill>
-                  <a:srgbClr val="556A8A"/>
-                </a:solidFill>
-              </a:rPr>
-              <a:t>Beyond Mean-Variance Portfolio Optimiser — User Guide</a:t>
-            </a:r>
-            <a:endParaRPr lang="en-US" sz="900" dirty="0"/>
-          </a:p>
-        </p:txBody>
-      </p:sp>
-      <p:pic>
-        <p:nvPicPr>
-          <p:cNvPr id="29" name="Picture 28" descr="Slide8chart.png"/>
-          <p:cNvPicPr>
-            <a:picLocks noChangeAspect="1"/>
-          </p:cNvPicPr>
-          <p:nvPr/>
-        </p:nvPicPr>
-        <p:blipFill>
-          <a:blip r:embed="rId3"/>
-          <a:stretch>
-            <a:fillRect/>
-          </a:stretch>
-        </p:blipFill>
-        <p:spPr>
-          <a:xfrm>
-            <a:off x="365760" y="1095744"/>
-            <a:ext cx="5120640" cy="2520165"/>
-          </a:xfrm>
-          <a:prstGeom prst="rect">
-            <a:avLst/>
-          </a:prstGeom>
-        </p:spPr>
-      </p:pic>
-      <p:sp>
-        <p:nvSpPr>
-          <p:cNvPr id="30" name="Swatch P0"/>
-          <p:cNvSpPr/>
-          <p:nvPr/>
-        </p:nvSpPr>
-        <p:spPr>
-          <a:xfrm>
-            <a:off x="5669280" y="3200400"/>
-            <a:ext cx="164592" cy="201168"/>
-          </a:xfrm>
-          <a:prstGeom prst="rect">
-            <a:avLst/>
-          </a:prstGeom>
-          <a:solidFill>
-            <a:srgbClr val="A855F7"/>
-          </a:solidFill>
-          <a:ln w="12700">
-            <a:solidFill>
-              <a:srgbClr val="A855F7"/>
-            </a:solidFill>
-            <a:prstDash val="solid"/>
-          </a:ln>
-        </p:spPr>
-        <p:txBody>
-          <a:bodyPr/>
-          <a:p/>
-        </p:txBody>
-      </p:sp>
-      <p:sp>
-        <p:nvSpPr>
-          <p:cNvPr id="31" name="Text P0"/>
-          <p:cNvSpPr/>
-          <p:nvPr/>
-        </p:nvSpPr>
-        <p:spPr>
-          <a:xfrm>
-            <a:off x="5897880" y="3200400"/>
-            <a:ext cx="2926080" cy="201168"/>
-          </a:xfrm>
-          <a:prstGeom prst="rect">
-            <a:avLst/>
-          </a:prstGeom>
-          <a:noFill/>
-          <a:ln/>
-        </p:spPr>
-        <p:txBody>
-          <a:bodyPr wrap="square" lIns="0" tIns="0" rIns="0" bIns="0" rtlCol="0" anchor="ctr"/>
-          <a:lstStyle/>
-          <a:p>
-            <a:pPr indent="0" marL="0">
-              <a:buNone/>
-            </a:pPr>
-            <a:r>
-              <a:rPr lang="en-US" sz="900" b="1" dirty="0">
-                <a:solidFill>
-                  <a:srgbClr val="FFFFFF"/>
-                </a:solidFill>
-              </a:rPr>
-              <a:t>Magenta circle</a:t>
-            </a:r>
-            <a:endParaRPr lang="en-US" sz="900" dirty="0"/>
-          </a:p>
-        </p:txBody>
-      </p:sp>
-      <p:sp>
-        <p:nvSpPr>
-          <p:cNvPr id="32" name="Desc P0"/>
-          <p:cNvSpPr/>
-          <p:nvPr/>
-        </p:nvSpPr>
-        <p:spPr>
-          <a:xfrm>
-            <a:off x="5897880" y="3383280"/>
-            <a:ext cx="2926080" cy="182880"/>
-          </a:xfrm>
-          <a:prstGeom prst="rect">
-            <a:avLst/>
-          </a:prstGeom>
-          <a:noFill/>
-          <a:ln/>
-        </p:spPr>
-        <p:txBody>
-          <a:bodyPr wrap="square" lIns="0" tIns="0" rIns="0" bIns="0" rtlCol="0" anchor="ctr"/>
-          <a:lstStyle/>
-          <a:p>
-            <a:pPr indent="0" marL="0">
-              <a:buNone/>
-            </a:pPr>
-            <a:r>
-              <a:rPr lang="en-US" sz="850" dirty="0">
-                <a:solidFill>
-                  <a:srgbClr val="556A8A"/>
-                </a:solidFill>
-              </a:rPr>
-              <a:t>Portfolio (0) — Markowitz MV optimum</a:t>
-            </a:r>
-            <a:endParaRPr lang="en-US" sz="850" dirty="0"/>
-          </a:p>
-        </p:txBody>
-      </p:sp>
     </p:spTree>
   </p:cSld>
   <p:clrMapOvr>

--- a/userguide.pptx
+++ b/userguide.pptx
@@ -9637,8 +9637,8 @@
         </p:blipFill>
         <p:spPr>
           <a:xfrm>
-            <a:off x="653796" y="3209544"/>
-            <a:ext cx="292608" cy="292608"/>
+            <a:off x="726948" y="3282696"/>
+            <a:ext cx="146304" cy="146304"/>
           </a:xfrm>
           <a:prstGeom prst="rect">
             <a:avLst/>
@@ -9661,8 +9661,8 @@
         </p:blipFill>
         <p:spPr>
           <a:xfrm>
-            <a:off x="653796" y="3547872"/>
-            <a:ext cx="292608" cy="292608"/>
+            <a:off x="726948" y="3621024"/>
+            <a:ext cx="146304" cy="146304"/>
           </a:xfrm>
           <a:prstGeom prst="rect">
             <a:avLst/>
@@ -9685,8 +9685,8 @@
         </p:blipFill>
         <p:spPr>
           <a:xfrm>
-            <a:off x="653796" y="3886200"/>
-            <a:ext cx="292608" cy="292608"/>
+            <a:off x="726948" y="3959352"/>
+            <a:ext cx="146304" cy="146304"/>
           </a:xfrm>
           <a:prstGeom prst="rect">
             <a:avLst/>

--- a/userguide.pptx
+++ b/userguide.pptx
@@ -22,6 +22,9 @@
     <p:sldId id="274" r:id="rId25"/>
     <p:sldId id="270" r:id="rId21"/>
     <p:sldId id="272" r:id="rId23"/>
+    <p:sldId id="275" r:id="rId26"/>
+    <p:sldId id="276" r:id="rId27"/>
+    <p:sldId id="277" r:id="rId28"/>
     <p:sldId id="266" r:id="rId12"/>
     <p:sldId id="267" r:id="rId13"/>
   </p:sldIdLst>
@@ -3026,7 +3029,7 @@
                   <a:srgbClr val="556A8A"/>
                 </a:solidFill>
               </a:rPr>
-              <a:t>10 / 19</a:t>
+              <a:t>10 / 22</a:t>
             </a:r>
             <a:endParaRPr lang="en-US" sz="900" dirty="0"/>
           </a:p>
@@ -3591,7 +3594,7 @@
                   <a:srgbClr val="556A8A"/>
                 </a:solidFill>
               </a:rPr>
-              <a:t>11 / 19</a:t>
+              <a:t>11 / 22</a:t>
             </a:r>
             <a:endParaRPr lang="en-US" sz="900" dirty="0"/>
           </a:p>
@@ -4120,7 +4123,7 @@
                   <a:srgbClr val="556A8A"/>
                 </a:solidFill>
               </a:rPr>
-              <a:t>12 / 19</a:t>
+              <a:t>12 / 22</a:t>
             </a:r>
             <a:endParaRPr lang="en-US" sz="900" dirty="0"/>
           </a:p>
@@ -5119,7 +5122,7 @@
                   <a:srgbClr val="556A8A"/>
                 </a:solidFill>
               </a:rPr>
-              <a:t>13 / 19</a:t>
+              <a:t>13 / 22</a:t>
             </a:r>
             <a:endParaRPr lang="en-US" sz="900" dirty="0"/>
           </a:p>
@@ -5360,7 +5363,7 @@
                   <a:srgbClr val="556A8A"/>
                 </a:solidFill>
               </a:rPr>
-              <a:t>14 / 19</a:t>
+              <a:t>14 / 22</a:t>
             </a:r>
             <a:endParaRPr lang="en-US" sz="900" dirty="0"/>
           </a:p>
@@ -5674,7 +5677,7 @@
                   <a:srgbClr val="556A8A"/>
                 </a:solidFill>
               </a:rPr>
-              <a:t>15 / 19</a:t>
+              <a:t>15 / 22</a:t>
             </a:r>
             <a:endParaRPr lang="en-US" sz="900" dirty="0"/>
           </a:p>
@@ -6721,7 +6724,7 @@
                   <a:srgbClr val="556A8A"/>
                 </a:solidFill>
               </a:rPr>
-              <a:t>16 / 19</a:t>
+              <a:t>16 / 22</a:t>
             </a:r>
             <a:endParaRPr lang="en-US" sz="900" dirty="0"/>
           </a:p>
@@ -6962,7 +6965,7 @@
                   <a:srgbClr val="556A8A"/>
                 </a:solidFill>
               </a:rPr>
-              <a:t>17 / 19</a:t>
+              <a:t>17 / 22</a:t>
             </a:r>
             <a:endParaRPr lang="en-US" sz="900" dirty="0"/>
           </a:p>
@@ -7165,13 +7168,14 @@
 </file>
 
 <file path=ppt/slides/slide18.xml><?xml version="1.0" encoding="utf-8"?>
-<p:sld xmlns:a="http://schemas.openxmlformats.org/drawingml/2006/main" xmlns:r="http://schemas.openxmlformats.org/officeDocument/2006/relationships" xmlns:p="http://schemas.openxmlformats.org/presentationml/2006/main">
-  <p:cSld name="Slide 11">
+<p:sld xmlns:a="http://schemas.openxmlformats.org/drawingml/2006/main" xmlns:p="http://schemas.openxmlformats.org/presentationml/2006/main" xmlns:r="http://schemas.openxmlformats.org/officeDocument/2006/relationships">
+  <p:cSld>
     <p:bg>
       <p:bgPr>
         <a:solidFill>
           <a:srgbClr val="020C1B"/>
         </a:solidFill>
+        <a:effectLst/>
       </p:bgPr>
     </p:bg>
     <p:spTree>
@@ -7180,14 +7184,7 @@
         <p:cNvGrpSpPr/>
         <p:nvPr/>
       </p:nvGrpSpPr>
-      <p:grpSpPr>
-        <a:xfrm>
-          <a:off x="0" y="0"/>
-          <a:ext cx="0" cy="0"/>
-          <a:chOff x="0" y="0"/>
-          <a:chExt cx="0" cy="0"/>
-        </a:xfrm>
-      </p:grpSpPr>
+      <p:grpSpPr/>
       <p:sp>
         <p:nvSpPr>
           <p:cNvPr id="2" name="Shape 0"/>
@@ -7225,8 +7222,8 @@
         </p:nvSpPr>
         <p:spPr>
           <a:xfrm>
-            <a:off x="365760" y="164592"/>
-            <a:ext cx="8229600" cy="457200"/>
+            <a:off x="457200" y="164592"/>
+            <a:ext cx="8229600" cy="502920"/>
           </a:xfrm>
           <a:prstGeom prst="rect">
             <a:avLst/>
@@ -7242,14 +7239,14 @@
               <a:buNone/>
             </a:pPr>
             <a:r>
-              <a:rPr lang="en-US" sz="2200" b="1" dirty="0">
+              <a:rPr lang="en-US" sz="2600" b="1" dirty="0">
                 <a:solidFill>
                   <a:srgbClr val="FFFFFF"/>
                 </a:solidFill>
               </a:rPr>
-              <a:t>About &amp; Glossary Tabs</a:t>
-            </a:r>
-            <a:endParaRPr lang="en-US" sz="2200" dirty="0"/>
+              <a:t>More tools — Profile, Ticker &amp; Live Portfolio</a:t>
+            </a:r>
+            <a:endParaRPr lang="en-US" sz="2600" dirty="0"/>
           </a:p>
         </p:txBody>
       </p:sp>
@@ -7261,8 +7258,8 @@
         </p:nvSpPr>
         <p:spPr>
           <a:xfrm>
-            <a:off x="365760" y="749808"/>
-            <a:ext cx="4023360" cy="3474720"/>
+            <a:off x="365760" y="868680"/>
+            <a:ext cx="2651760" cy="1828800"/>
           </a:xfrm>
           <a:prstGeom prst="rect">
             <a:avLst/>
@@ -7276,6 +7273,13 @@
             </a:solidFill>
             <a:prstDash val="solid"/>
           </a:ln>
+          <a:effectLst>
+            <a:outerShdw sx="100000" sy="100000" kx="0" ky="0" algn="bl" rotWithShape="0" blurRad="101600" dist="38100" dir="8100000">
+              <a:srgbClr val="000000">
+                <a:alpha val="18000"/>
+              </a:srgbClr>
+            </a:outerShdw>
+          </a:effectLst>
         </p:spPr>
         <p:txBody>
           <a:bodyPr/>
@@ -7284,82 +7288,71 @@
       </p:sp>
       <p:sp>
         <p:nvSpPr>
-          <p:cNvPr id="5" name="Text 3"/>
-          <p:cNvSpPr/>
-          <p:nvPr/>
-        </p:nvSpPr>
-        <p:spPr>
-          <a:xfrm>
-            <a:off x="804672" y="822960"/>
-            <a:ext cx="3401568" cy="320040"/>
-          </a:xfrm>
-          <a:prstGeom prst="rect">
-            <a:avLst/>
-          </a:prstGeom>
-          <a:noFill/>
-          <a:ln/>
-        </p:spPr>
-        <p:txBody>
-          <a:bodyPr wrap="square" lIns="0" tIns="0" rIns="0" bIns="0" rtlCol="0" anchor="ctr"/>
-          <a:lstStyle/>
-          <a:p>
-            <a:pPr indent="0" marL="0">
-              <a:buNone/>
-            </a:pPr>
-            <a:r>
-              <a:rPr lang="en-US" sz="1200" b="1" dirty="0">
+          <p:cNvPr id="6" name="Text 4"/>
+          <p:cNvSpPr/>
+          <p:nvPr/>
+        </p:nvSpPr>
+        <p:spPr>
+          <a:xfrm>
+            <a:off x="365760" y="1463040"/>
+            <a:ext cx="2651760" cy="365760"/>
+          </a:xfrm>
+          <a:prstGeom prst="rect">
+            <a:avLst/>
+          </a:prstGeom>
+          <a:noFill/>
+          <a:ln/>
+        </p:spPr>
+        <p:txBody>
+          <a:bodyPr wrap="square" rtlCol="0" anchor="ctr"/>
+          <a:lstStyle/>
+          <a:p>
+            <a:pPr algn="ctr" indent="0" marL="0">
+              <a:buNone/>
+            </a:pPr>
+            <a:r>
+              <a:rPr lang="en-US" sz="1100" b="1" dirty="0">
                 <a:solidFill>
                   <a:srgbClr val="4A9EFF"/>
                 </a:solidFill>
               </a:rPr>
-              <a:t>About Tab</a:t>
-            </a:r>
-            <a:endParaRPr lang="en-US" sz="1200" dirty="0"/>
-          </a:p>
-        </p:txBody>
-      </p:sp>
-      <p:sp>
-        <p:nvSpPr>
-          <p:cNvPr id="8" name="Text 6"/>
-          <p:cNvSpPr/>
-          <p:nvPr/>
-        </p:nvSpPr>
-        <p:spPr>
-          <a:xfrm>
-            <a:off x="548640" y="2880360"/>
-            <a:ext cx="3657600" cy="256032"/>
-          </a:xfrm>
-          <a:prstGeom prst="rect">
-            <a:avLst/>
-          </a:prstGeom>
-          <a:noFill/>
-          <a:ln/>
-        </p:spPr>
-        <p:txBody>
-          <a:bodyPr wrap="square" rtlCol="0" anchor="ctr"/>
-          <a:lstStyle/>
-          <a:p>
-            <a:pPr indent="0" marL="0">
+              <a:t>Risk Profile</a:t>
+            </a:r>
+            <a:endParaRPr lang="en-US" sz="1100" dirty="0"/>
+          </a:p>
+        </p:txBody>
+      </p:sp>
+      <p:sp>
+        <p:nvSpPr>
+          <p:cNvPr id="7" name="Text 5"/>
+          <p:cNvSpPr/>
+          <p:nvPr/>
+        </p:nvSpPr>
+        <p:spPr>
+          <a:xfrm>
+            <a:off x="475488" y="1874520"/>
+            <a:ext cx="2432304" cy="731520"/>
+          </a:xfrm>
+          <a:prstGeom prst="rect">
+            <a:avLst/>
+          </a:prstGeom>
+          <a:noFill/>
+          <a:ln/>
+        </p:spPr>
+        <p:txBody>
+          <a:bodyPr wrap="square" rtlCol="0" anchor="t"/>
+          <a:lstStyle/>
+          <a:p>
+            <a:pPr algn="ctr" indent="0" marL="0">
               <a:buNone/>
             </a:pPr>
             <a:r>
               <a:rPr lang="en-US" sz="950" dirty="0">
                 <a:solidFill>
-                  <a:srgbClr val="4A9EFF"/>
-                </a:solidFill>
-              </a:rPr>
-              <a:t xml:space="preserve">▸  </a:t>
-            </a:r>
-            <a:pPr indent="0" marL="0">
-              <a:buNone/>
-            </a:pPr>
-            <a:r>
-              <a:rPr lang="en-US" sz="950" dirty="0">
-                <a:solidFill>
                   <a:srgbClr val="C0C8D8"/>
                 </a:solidFill>
               </a:rPr>
-              <a:t>Author background &amp; contact</a:t>
+              <a:t>13-question Grable–Lytton scale → your tolerance band and the parameters H, α, L, with a dated history.</a:t>
             </a:r>
             <a:endParaRPr lang="en-US" sz="950" dirty="0"/>
           </a:p>
@@ -7367,155 +7360,14 @@
       </p:sp>
       <p:sp>
         <p:nvSpPr>
-          <p:cNvPr id="9" name="Text 7"/>
-          <p:cNvSpPr/>
-          <p:nvPr/>
-        </p:nvSpPr>
-        <p:spPr>
-          <a:xfrm>
-            <a:off x="548640" y="3182112"/>
-            <a:ext cx="3657600" cy="256032"/>
-          </a:xfrm>
-          <a:prstGeom prst="rect">
-            <a:avLst/>
-          </a:prstGeom>
-          <a:noFill/>
-          <a:ln/>
-        </p:spPr>
-        <p:txBody>
-          <a:bodyPr wrap="square" rtlCol="0" anchor="ctr"/>
-          <a:lstStyle/>
-          <a:p>
-            <a:pPr indent="0" marL="0">
-              <a:buNone/>
-            </a:pPr>
-            <a:r>
-              <a:rPr lang="en-US" sz="950" dirty="0">
-                <a:solidFill>
-                  <a:srgbClr val="4A9EFF"/>
-                </a:solidFill>
-              </a:rPr>
-              <a:t xml:space="preserve">▸  </a:t>
-            </a:r>
-            <a:pPr indent="0" marL="0">
-              <a:buNone/>
-            </a:pPr>
-            <a:r>
-              <a:rPr lang="en-US" sz="950" dirty="0">
-                <a:solidFill>
-                  <a:srgbClr val="C0C8D8"/>
-                </a:solidFill>
-              </a:rPr>
-              <a:t>App description &amp; algorithm</a:t>
-            </a:r>
-            <a:endParaRPr lang="en-US" sz="950" dirty="0"/>
-          </a:p>
-        </p:txBody>
-      </p:sp>
-      <p:sp>
-        <p:nvSpPr>
-          <p:cNvPr id="10" name="Text 8"/>
-          <p:cNvSpPr/>
-          <p:nvPr/>
-        </p:nvSpPr>
-        <p:spPr>
-          <a:xfrm>
-            <a:off x="548640" y="3483864"/>
-            <a:ext cx="3657600" cy="256032"/>
-          </a:xfrm>
-          <a:prstGeom prst="rect">
-            <a:avLst/>
-          </a:prstGeom>
-          <a:noFill/>
-          <a:ln/>
-        </p:spPr>
-        <p:txBody>
-          <a:bodyPr wrap="square" rtlCol="0" anchor="ctr"/>
-          <a:lstStyle/>
-          <a:p>
-            <a:pPr indent="0" marL="0">
-              <a:buNone/>
-            </a:pPr>
-            <a:r>
-              <a:rPr lang="en-US" sz="950" dirty="0">
-                <a:solidFill>
-                  <a:srgbClr val="4A9EFF"/>
-                </a:solidFill>
-              </a:rPr>
-              <a:t xml:space="preserve">▸  </a:t>
-            </a:r>
-            <a:pPr indent="0" marL="0">
-              <a:buNone/>
-            </a:pPr>
-            <a:r>
-              <a:rPr lang="en-US" sz="950" dirty="0">
-                <a:solidFill>
-                  <a:srgbClr val="C0C8D8"/>
-                </a:solidFill>
-              </a:rPr>
-              <a:t>Academic references</a:t>
-            </a:r>
-            <a:endParaRPr lang="en-US" sz="950" dirty="0"/>
-          </a:p>
-        </p:txBody>
-      </p:sp>
-      <p:sp>
-        <p:nvSpPr>
-          <p:cNvPr id="11" name="Text 9"/>
-          <p:cNvSpPr/>
-          <p:nvPr/>
-        </p:nvSpPr>
-        <p:spPr>
-          <a:xfrm>
-            <a:off x="548640" y="3785616"/>
-            <a:ext cx="3657600" cy="256032"/>
-          </a:xfrm>
-          <a:prstGeom prst="rect">
-            <a:avLst/>
-          </a:prstGeom>
-          <a:noFill/>
-          <a:ln/>
-        </p:spPr>
-        <p:txBody>
-          <a:bodyPr wrap="square" rtlCol="0" anchor="ctr"/>
-          <a:lstStyle/>
-          <a:p>
-            <a:pPr indent="0" marL="0">
-              <a:buNone/>
-            </a:pPr>
-            <a:r>
-              <a:rPr lang="en-US" sz="950" dirty="0">
-                <a:solidFill>
-                  <a:srgbClr val="4A9EFF"/>
-                </a:solidFill>
-              </a:rPr>
-              <a:t xml:space="preserve">▸  </a:t>
-            </a:r>
-            <a:pPr indent="0" marL="0">
-              <a:buNone/>
-            </a:pPr>
-            <a:r>
-              <a:rPr lang="en-US" sz="950" dirty="0">
-                <a:solidFill>
-                  <a:srgbClr val="C0C8D8"/>
-                </a:solidFill>
-              </a:rPr>
-              <a:t>Legal disclaimer</a:t>
-            </a:r>
-            <a:endParaRPr lang="en-US" sz="950" dirty="0"/>
-          </a:p>
-        </p:txBody>
-      </p:sp>
-      <p:sp>
-        <p:nvSpPr>
-          <p:cNvPr id="12" name="Shape 10"/>
-          <p:cNvSpPr/>
-          <p:nvPr/>
-        </p:nvSpPr>
-        <p:spPr>
-          <a:xfrm>
-            <a:off x="4754880" y="749808"/>
-            <a:ext cx="4023360" cy="3474720"/>
+          <p:cNvPr id="8" name="Shape 6"/>
+          <p:cNvSpPr/>
+          <p:nvPr/>
+        </p:nvSpPr>
+        <p:spPr>
+          <a:xfrm>
+            <a:off x="3200400" y="868680"/>
+            <a:ext cx="2651760" cy="1828800"/>
           </a:xfrm>
           <a:prstGeom prst="rect">
             <a:avLst/>
@@ -7529,6 +7381,13 @@
             </a:solidFill>
             <a:prstDash val="solid"/>
           </a:ln>
+          <a:effectLst>
+            <a:outerShdw sx="100000" sy="100000" kx="0" ky="0" algn="bl" rotWithShape="0" blurRad="101600" dist="38100" dir="8100000">
+              <a:srgbClr val="000000">
+                <a:alpha val="18000"/>
+              </a:srgbClr>
+            </a:outerShdw>
+          </a:effectLst>
         </p:spPr>
         <p:txBody>
           <a:bodyPr/>
@@ -7537,14 +7396,290 @@
       </p:sp>
       <p:sp>
         <p:nvSpPr>
-          <p:cNvPr id="13" name="Text 11"/>
-          <p:cNvSpPr/>
-          <p:nvPr/>
-        </p:nvSpPr>
-        <p:spPr>
-          <a:xfrm>
-            <a:off x="5193792" y="822960"/>
-            <a:ext cx="3401568" cy="320040"/>
+          <p:cNvPr id="10" name="Text 8"/>
+          <p:cNvSpPr/>
+          <p:nvPr/>
+        </p:nvSpPr>
+        <p:spPr>
+          <a:xfrm>
+            <a:off x="3200400" y="1463040"/>
+            <a:ext cx="2651760" cy="365760"/>
+          </a:xfrm>
+          <a:prstGeom prst="rect">
+            <a:avLst/>
+          </a:prstGeom>
+          <a:noFill/>
+          <a:ln/>
+        </p:spPr>
+        <p:txBody>
+          <a:bodyPr wrap="square" rtlCol="0" anchor="ctr"/>
+          <a:lstStyle/>
+          <a:p>
+            <a:pPr algn="ctr" indent="0" marL="0">
+              <a:buNone/>
+            </a:pPr>
+            <a:r>
+              <a:rPr lang="en-US" sz="1100" b="1" dirty="0">
+                <a:solidFill>
+                  <a:srgbClr val="4A9EFF"/>
+                </a:solidFill>
+              </a:rPr>
+              <a:t>Ticker Analytics</a:t>
+            </a:r>
+            <a:endParaRPr lang="en-US" sz="1100" dirty="0"/>
+          </a:p>
+        </p:txBody>
+      </p:sp>
+      <p:sp>
+        <p:nvSpPr>
+          <p:cNvPr id="11" name="Text 9"/>
+          <p:cNvSpPr/>
+          <p:nvPr/>
+        </p:nvSpPr>
+        <p:spPr>
+          <a:xfrm>
+            <a:off x="3310128" y="1874520"/>
+            <a:ext cx="2432304" cy="731520"/>
+          </a:xfrm>
+          <a:prstGeom prst="rect">
+            <a:avLst/>
+          </a:prstGeom>
+          <a:noFill/>
+          <a:ln/>
+        </p:spPr>
+        <p:txBody>
+          <a:bodyPr wrap="square" rtlCol="0" anchor="t"/>
+          <a:lstStyle/>
+          <a:p>
+            <a:pPr algn="ctr" indent="0" marL="0">
+              <a:buNone/>
+            </a:pPr>
+            <a:r>
+              <a:rPr lang="en-US" sz="950" dirty="0">
+                <a:solidFill>
+                  <a:srgbClr val="C0C8D8"/>
+                </a:solidFill>
+              </a:rPr>
+              <a:t>Key figures and CFA-style ratios for any stock, ETF or index, each with a plain-language explanation.</a:t>
+            </a:r>
+            <a:endParaRPr lang="en-US" sz="950" dirty="0"/>
+          </a:p>
+        </p:txBody>
+      </p:sp>
+      <p:sp>
+        <p:nvSpPr>
+          <p:cNvPr id="12" name="Shape 10"/>
+          <p:cNvSpPr/>
+          <p:nvPr/>
+        </p:nvSpPr>
+        <p:spPr>
+          <a:xfrm>
+            <a:off x="6035040" y="868680"/>
+            <a:ext cx="2651760" cy="1828800"/>
+          </a:xfrm>
+          <a:prstGeom prst="rect">
+            <a:avLst/>
+          </a:prstGeom>
+          <a:solidFill>
+            <a:srgbClr val="0D1A2E"/>
+          </a:solidFill>
+          <a:ln w="12700">
+            <a:solidFill>
+              <a:srgbClr val="1A6BBF"/>
+            </a:solidFill>
+            <a:prstDash val="solid"/>
+          </a:ln>
+          <a:effectLst>
+            <a:outerShdw sx="100000" sy="100000" kx="0" ky="0" algn="bl" rotWithShape="0" blurRad="101600" dist="38100" dir="8100000">
+              <a:srgbClr val="000000">
+                <a:alpha val="18000"/>
+              </a:srgbClr>
+            </a:outerShdw>
+          </a:effectLst>
+        </p:spPr>
+        <p:txBody>
+          <a:bodyPr/>
+          <a:p/>
+        </p:txBody>
+      </p:sp>
+      <p:sp>
+        <p:nvSpPr>
+          <p:cNvPr id="14" name="Text 12"/>
+          <p:cNvSpPr/>
+          <p:nvPr/>
+        </p:nvSpPr>
+        <p:spPr>
+          <a:xfrm>
+            <a:off x="6035040" y="1463040"/>
+            <a:ext cx="2651760" cy="365760"/>
+          </a:xfrm>
+          <a:prstGeom prst="rect">
+            <a:avLst/>
+          </a:prstGeom>
+          <a:noFill/>
+          <a:ln/>
+        </p:spPr>
+        <p:txBody>
+          <a:bodyPr wrap="square" rtlCol="0" anchor="ctr"/>
+          <a:lstStyle/>
+          <a:p>
+            <a:pPr algn="ctr" indent="0" marL="0">
+              <a:buNone/>
+            </a:pPr>
+            <a:r>
+              <a:rPr lang="en-US" sz="1100" b="1" dirty="0">
+                <a:solidFill>
+                  <a:srgbClr val="4A9EFF"/>
+                </a:solidFill>
+              </a:rPr>
+              <a:t>Live Portfolio</a:t>
+            </a:r>
+            <a:endParaRPr lang="en-US" sz="1100" dirty="0"/>
+          </a:p>
+        </p:txBody>
+      </p:sp>
+      <p:sp>
+        <p:nvSpPr>
+          <p:cNvPr id="15" name="Text 13"/>
+          <p:cNvSpPr/>
+          <p:nvPr/>
+        </p:nvSpPr>
+        <p:spPr>
+          <a:xfrm>
+            <a:off x="6144768" y="1874520"/>
+            <a:ext cx="2432304" cy="731520"/>
+          </a:xfrm>
+          <a:prstGeom prst="rect">
+            <a:avLst/>
+          </a:prstGeom>
+          <a:noFill/>
+          <a:ln/>
+        </p:spPr>
+        <p:txBody>
+          <a:bodyPr wrap="square" rtlCol="0" anchor="t"/>
+          <a:lstStyle/>
+          <a:p>
+            <a:pPr algn="ctr" indent="0" marL="0">
+              <a:buNone/>
+            </a:pPr>
+            <a:r>
+              <a:rPr lang="en-US" sz="950" dirty="0">
+                <a:solidFill>
+                  <a:srgbClr val="C0C8D8"/>
+                </a:solidFill>
+              </a:rPr>
+              <a:t>Build and track a real book of securities and derivatives over time, marked to market.</a:t>
+            </a:r>
+            <a:endParaRPr lang="en-US" sz="950" dirty="0"/>
+          </a:p>
+        </p:txBody>
+      </p:sp>
+      <p:sp>
+        <p:nvSpPr>
+          <p:cNvPr id="16" name="Shape 14"/>
+          <p:cNvSpPr/>
+          <p:nvPr/>
+        </p:nvSpPr>
+        <p:spPr>
+          <a:xfrm>
+            <a:off x="365760" y="2834640"/>
+            <a:ext cx="8412480" cy="1508760"/>
+          </a:xfrm>
+          <a:prstGeom prst="rect">
+            <a:avLst/>
+          </a:prstGeom>
+          <a:solidFill>
+            <a:srgbClr val="0D1A2E"/>
+          </a:solidFill>
+          <a:ln w="12700">
+            <a:solidFill>
+              <a:srgbClr val="1A6BBF"/>
+            </a:solidFill>
+            <a:prstDash val="solid"/>
+          </a:ln>
+        </p:spPr>
+        <p:txBody>
+          <a:bodyPr/>
+          <a:p/>
+        </p:txBody>
+      </p:sp>
+      <p:sp>
+        <p:nvSpPr>
+          <p:cNvPr id="17" name="Text 15"/>
+          <p:cNvSpPr/>
+          <p:nvPr/>
+        </p:nvSpPr>
+        <p:spPr>
+          <a:xfrm>
+            <a:off x="548640" y="2880360"/>
+            <a:ext cx="8046720" cy="320040"/>
+          </a:xfrm>
+          <a:prstGeom prst="rect">
+            <a:avLst/>
+          </a:prstGeom>
+          <a:noFill/>
+          <a:ln/>
+        </p:spPr>
+        <p:txBody>
+          <a:bodyPr wrap="square" rtlCol="0" anchor="ctr"/>
+          <a:lstStyle/>
+          <a:p>
+            <a:pPr indent="0" marL="0">
+              <a:buNone/>
+            </a:pPr>
+            <a:r>
+              <a:rPr lang="en-US" sz="1100" b="1" dirty="0">
+                <a:solidFill>
+                  <a:srgbClr val="4A9EFF"/>
+                </a:solidFill>
+              </a:rPr>
+              <a:t>How they fit together</a:t>
+            </a:r>
+            <a:endParaRPr lang="en-US" sz="1100" dirty="0"/>
+          </a:p>
+        </p:txBody>
+      </p:sp>
+      <p:sp>
+        <p:nvSpPr>
+          <p:cNvPr id="18" name="Shape 16"/>
+          <p:cNvSpPr/>
+          <p:nvPr/>
+        </p:nvSpPr>
+        <p:spPr>
+          <a:xfrm>
+            <a:off x="548640" y="3209544"/>
+            <a:ext cx="502920" cy="292608"/>
+          </a:xfrm>
+          <a:prstGeom prst="roundRect">
+            <a:avLst>
+              <a:gd name="adj" fmla="val 18750"/>
+            </a:avLst>
+          </a:prstGeom>
+          <a:solidFill>
+            <a:srgbClr val="1A6BBF"/>
+          </a:solidFill>
+          <a:ln w="12700">
+            <a:solidFill>
+              <a:srgbClr val="1A6BBF"/>
+            </a:solidFill>
+            <a:prstDash val="solid"/>
+          </a:ln>
+        </p:spPr>
+        <p:txBody>
+          <a:bodyPr/>
+          <a:p/>
+        </p:txBody>
+      </p:sp>
+      <p:sp>
+        <p:nvSpPr>
+          <p:cNvPr id="20" name="Text 18"/>
+          <p:cNvSpPr/>
+          <p:nvPr/>
+        </p:nvSpPr>
+        <p:spPr>
+          <a:xfrm>
+            <a:off x="1143000" y="3209544"/>
+            <a:ext cx="2194560" cy="292608"/>
           </a:xfrm>
           <a:prstGeom prst="rect">
             <a:avLst/>
@@ -7560,59 +7695,115 @@
               <a:buNone/>
             </a:pPr>
             <a:r>
-              <a:rPr lang="en-US" sz="1200" b="1" dirty="0">
-                <a:solidFill>
-                  <a:srgbClr val="4A9EFF"/>
-                </a:solidFill>
-              </a:rPr>
-              <a:t>Glossary Tab</a:t>
-            </a:r>
-            <a:endParaRPr lang="en-US" sz="1200" dirty="0"/>
-          </a:p>
-        </p:txBody>
-      </p:sp>
-      <p:sp>
-        <p:nvSpPr>
-          <p:cNvPr id="16" name="Text 14"/>
-          <p:cNvSpPr/>
-          <p:nvPr/>
-        </p:nvSpPr>
-        <p:spPr>
-          <a:xfrm>
-            <a:off x="4937760" y="2880360"/>
-            <a:ext cx="3657600" cy="256032"/>
-          </a:xfrm>
-          <a:prstGeom prst="rect">
-            <a:avLst/>
-          </a:prstGeom>
-          <a:noFill/>
-          <a:ln/>
-        </p:spPr>
-        <p:txBody>
-          <a:bodyPr wrap="square" rtlCol="0" anchor="ctr"/>
-          <a:lstStyle/>
-          <a:p>
-            <a:pPr indent="0" marL="0">
-              <a:buNone/>
-            </a:pPr>
-            <a:r>
-              <a:rPr lang="en-US" sz="950" dirty="0">
-                <a:solidFill>
-                  <a:srgbClr val="4A9EFF"/>
-                </a:solidFill>
-              </a:rPr>
-              <a:t xml:space="preserve">▸  </a:t>
-            </a:r>
-            <a:pPr indent="0" marL="0">
-              <a:buNone/>
-            </a:pPr>
-            <a:r>
-              <a:rPr lang="en-US" sz="950" dirty="0">
+              <a:rPr lang="en-US" sz="950" b="1" dirty="0">
+                <a:solidFill>
+                  <a:srgbClr val="10B981"/>
+                </a:solidFill>
+              </a:rPr>
+              <a:t>Profile first:</a:t>
+            </a:r>
+            <a:endParaRPr lang="en-US" sz="950" dirty="0"/>
+          </a:p>
+        </p:txBody>
+      </p:sp>
+      <p:sp>
+        <p:nvSpPr>
+          <p:cNvPr id="21" name="Text 19"/>
+          <p:cNvSpPr/>
+          <p:nvPr/>
+        </p:nvSpPr>
+        <p:spPr>
+          <a:xfrm>
+            <a:off x="3383280" y="3209544"/>
+            <a:ext cx="5212080" cy="292608"/>
+          </a:xfrm>
+          <a:prstGeom prst="rect">
+            <a:avLst/>
+          </a:prstGeom>
+          <a:noFill/>
+          <a:ln/>
+        </p:spPr>
+        <p:txBody>
+          <a:bodyPr wrap="square" lIns="0" tIns="0" rIns="0" bIns="0" rtlCol="0" anchor="ctr"/>
+          <a:lstStyle/>
+          <a:p>
+            <a:pPr indent="0" marL="0">
+              <a:buNone/>
+            </a:pPr>
+            <a:r>
+              <a:rPr lang="en-US" sz="900" dirty="0">
                 <a:solidFill>
                   <a:srgbClr val="C0C8D8"/>
                 </a:solidFill>
               </a:rPr>
-              <a:t>Click any term for AI explanation</a:t>
+              <a:t>size your risk before optimising.</a:t>
+            </a:r>
+            <a:endParaRPr lang="en-US" sz="900" dirty="0"/>
+          </a:p>
+        </p:txBody>
+      </p:sp>
+      <p:sp>
+        <p:nvSpPr>
+          <p:cNvPr id="22" name="Shape 20"/>
+          <p:cNvSpPr/>
+          <p:nvPr/>
+        </p:nvSpPr>
+        <p:spPr>
+          <a:xfrm>
+            <a:off x="548640" y="3547872"/>
+            <a:ext cx="502920" cy="292608"/>
+          </a:xfrm>
+          <a:prstGeom prst="roundRect">
+            <a:avLst>
+              <a:gd name="adj" fmla="val 18750"/>
+            </a:avLst>
+          </a:prstGeom>
+          <a:solidFill>
+            <a:srgbClr val="1A6BBF"/>
+          </a:solidFill>
+          <a:ln w="12700">
+            <a:solidFill>
+              <a:srgbClr val="1A6BBF"/>
+            </a:solidFill>
+            <a:prstDash val="solid"/>
+          </a:ln>
+        </p:spPr>
+        <p:txBody>
+          <a:bodyPr/>
+          <a:p/>
+        </p:txBody>
+      </p:sp>
+      <p:sp>
+        <p:nvSpPr>
+          <p:cNvPr id="24" name="Text 22"/>
+          <p:cNvSpPr/>
+          <p:nvPr/>
+        </p:nvSpPr>
+        <p:spPr>
+          <a:xfrm>
+            <a:off x="1143000" y="3547872"/>
+            <a:ext cx="2194560" cy="292608"/>
+          </a:xfrm>
+          <a:prstGeom prst="rect">
+            <a:avLst/>
+          </a:prstGeom>
+          <a:noFill/>
+          <a:ln/>
+        </p:spPr>
+        <p:txBody>
+          <a:bodyPr wrap="square" lIns="0" tIns="0" rIns="0" bIns="0" rtlCol="0" anchor="ctr"/>
+          <a:lstStyle/>
+          <a:p>
+            <a:pPr indent="0" marL="0">
+              <a:buNone/>
+            </a:pPr>
+            <a:r>
+              <a:rPr lang="en-US" sz="950" b="1" dirty="0">
+                <a:solidFill>
+                  <a:srgbClr val="F59E0B"/>
+                </a:solidFill>
+              </a:rPr>
+              <a:t>Then build:</a:t>
             </a:r>
             <a:endParaRPr lang="en-US" sz="950" dirty="0"/>
           </a:p>
@@ -7620,46 +7811,102 @@
       </p:sp>
       <p:sp>
         <p:nvSpPr>
-          <p:cNvPr id="17" name="Text 15"/>
-          <p:cNvSpPr/>
-          <p:nvPr/>
-        </p:nvSpPr>
-        <p:spPr>
-          <a:xfrm>
-            <a:off x="4937760" y="3182112"/>
-            <a:ext cx="3657600" cy="256032"/>
-          </a:xfrm>
-          <a:prstGeom prst="rect">
-            <a:avLst/>
-          </a:prstGeom>
-          <a:noFill/>
-          <a:ln/>
-        </p:spPr>
-        <p:txBody>
-          <a:bodyPr wrap="square" rtlCol="0" anchor="ctr"/>
-          <a:lstStyle/>
-          <a:p>
-            <a:pPr indent="0" marL="0">
-              <a:buNone/>
-            </a:pPr>
-            <a:r>
-              <a:rPr lang="en-US" sz="950" dirty="0">
-                <a:solidFill>
-                  <a:srgbClr val="4A9EFF"/>
-                </a:solidFill>
-              </a:rPr>
-              <a:t xml:space="preserve">▸  </a:t>
-            </a:r>
-            <a:pPr indent="0" marL="0">
-              <a:buNone/>
-            </a:pPr>
-            <a:r>
-              <a:rPr lang="en-US" sz="950" dirty="0">
+          <p:cNvPr id="25" name="Text 23"/>
+          <p:cNvSpPr/>
+          <p:nvPr/>
+        </p:nvSpPr>
+        <p:spPr>
+          <a:xfrm>
+            <a:off x="3383280" y="3547872"/>
+            <a:ext cx="5212080" cy="292608"/>
+          </a:xfrm>
+          <a:prstGeom prst="rect">
+            <a:avLst/>
+          </a:prstGeom>
+          <a:noFill/>
+          <a:ln/>
+        </p:spPr>
+        <p:txBody>
+          <a:bodyPr wrap="square" lIns="0" tIns="0" rIns="0" bIns="0" rtlCol="0" anchor="ctr"/>
+          <a:lstStyle/>
+          <a:p>
+            <a:pPr indent="0" marL="0">
+              <a:buNone/>
+            </a:pPr>
+            <a:r>
+              <a:rPr lang="en-US" sz="900" dirty="0">
                 <a:solidFill>
                   <a:srgbClr val="C0C8D8"/>
                 </a:solidFill>
               </a:rPr>
-              <a:t>Covers derivatives, risk, portfolio theory</a:t>
+              <a:t>hold and monitor a real portfolio.</a:t>
+            </a:r>
+            <a:endParaRPr lang="en-US" sz="900" dirty="0"/>
+          </a:p>
+        </p:txBody>
+      </p:sp>
+      <p:sp>
+        <p:nvSpPr>
+          <p:cNvPr id="26" name="Shape 24"/>
+          <p:cNvSpPr/>
+          <p:nvPr/>
+        </p:nvSpPr>
+        <p:spPr>
+          <a:xfrm>
+            <a:off x="548640" y="3886200"/>
+            <a:ext cx="502920" cy="292608"/>
+          </a:xfrm>
+          <a:prstGeom prst="roundRect">
+            <a:avLst>
+              <a:gd name="adj" fmla="val 18750"/>
+            </a:avLst>
+          </a:prstGeom>
+          <a:solidFill>
+            <a:srgbClr val="1A6BBF"/>
+          </a:solidFill>
+          <a:ln w="12700">
+            <a:solidFill>
+              <a:srgbClr val="1A6BBF"/>
+            </a:solidFill>
+            <a:prstDash val="solid"/>
+          </a:ln>
+        </p:spPr>
+        <p:txBody>
+          <a:bodyPr/>
+          <a:p/>
+        </p:txBody>
+      </p:sp>
+      <p:sp>
+        <p:nvSpPr>
+          <p:cNvPr id="28" name="Text 26"/>
+          <p:cNvSpPr/>
+          <p:nvPr/>
+        </p:nvSpPr>
+        <p:spPr>
+          <a:xfrm>
+            <a:off x="1143000" y="3886200"/>
+            <a:ext cx="2194560" cy="292608"/>
+          </a:xfrm>
+          <a:prstGeom prst="rect">
+            <a:avLst/>
+          </a:prstGeom>
+          <a:noFill/>
+          <a:ln/>
+        </p:spPr>
+        <p:txBody>
+          <a:bodyPr wrap="square" lIns="0" tIns="0" rIns="0" bIns="0" rtlCol="0" anchor="ctr"/>
+          <a:lstStyle/>
+          <a:p>
+            <a:pPr indent="0" marL="0">
+              <a:buNone/>
+            </a:pPr>
+            <a:r>
+              <a:rPr lang="en-US" sz="950" b="1" dirty="0">
+                <a:solidFill>
+                  <a:srgbClr val="E76F51"/>
+                </a:solidFill>
+              </a:rPr>
+              <a:t>Tip:</a:t>
             </a:r>
             <a:endParaRPr lang="en-US" sz="950" dirty="0"/>
           </a:p>
@@ -7667,101 +7914,43 @@
       </p:sp>
       <p:sp>
         <p:nvSpPr>
-          <p:cNvPr id="18" name="Text 16"/>
-          <p:cNvSpPr/>
-          <p:nvPr/>
-        </p:nvSpPr>
-        <p:spPr>
-          <a:xfrm>
-            <a:off x="4937760" y="3483864"/>
-            <a:ext cx="3657600" cy="256032"/>
-          </a:xfrm>
-          <a:prstGeom prst="rect">
-            <a:avLst/>
-          </a:prstGeom>
-          <a:noFill/>
-          <a:ln/>
-        </p:spPr>
-        <p:txBody>
-          <a:bodyPr wrap="square" rtlCol="0" anchor="ctr"/>
-          <a:lstStyle/>
-          <a:p>
-            <a:pPr indent="0" marL="0">
-              <a:buNone/>
-            </a:pPr>
-            <a:r>
-              <a:rPr lang="en-US" sz="950" dirty="0">
-                <a:solidFill>
-                  <a:srgbClr val="4A9EFF"/>
-                </a:solidFill>
-              </a:rPr>
-              <a:t xml:space="preserve">▸  </a:t>
-            </a:r>
-            <a:pPr indent="0" marL="0">
-              <a:buNone/>
-            </a:pPr>
-            <a:r>
-              <a:rPr lang="en-US" sz="950" dirty="0">
+          <p:cNvPr id="29" name="Text 27"/>
+          <p:cNvSpPr/>
+          <p:nvPr/>
+        </p:nvSpPr>
+        <p:spPr>
+          <a:xfrm>
+            <a:off x="3383280" y="3886200"/>
+            <a:ext cx="5212080" cy="292608"/>
+          </a:xfrm>
+          <a:prstGeom prst="rect">
+            <a:avLst/>
+          </a:prstGeom>
+          <a:noFill/>
+          <a:ln/>
+        </p:spPr>
+        <p:txBody>
+          <a:bodyPr wrap="square" lIns="0" tIns="0" rIns="0" bIns="0" rtlCol="0" anchor="ctr"/>
+          <a:lstStyle/>
+          <a:p>
+            <a:pPr indent="0" marL="0">
+              <a:buNone/>
+            </a:pPr>
+            <a:r>
+              <a:rPr lang="en-US" sz="900" dirty="0">
                 <a:solidFill>
                   <a:srgbClr val="C0C8D8"/>
                 </a:solidFill>
               </a:rPr>
-              <a:t>Ask your own questions</a:t>
-            </a:r>
-            <a:endParaRPr lang="en-US" sz="950" dirty="0"/>
-          </a:p>
-        </p:txBody>
-      </p:sp>
-      <p:sp>
-        <p:nvSpPr>
-          <p:cNvPr id="19" name="Text 17"/>
-          <p:cNvSpPr/>
-          <p:nvPr/>
-        </p:nvSpPr>
-        <p:spPr>
-          <a:xfrm>
-            <a:off x="4937760" y="3785616"/>
-            <a:ext cx="3657600" cy="256032"/>
-          </a:xfrm>
-          <a:prstGeom prst="rect">
-            <a:avLst/>
-          </a:prstGeom>
-          <a:noFill/>
-          <a:ln/>
-        </p:spPr>
-        <p:txBody>
-          <a:bodyPr wrap="square" rtlCol="0" anchor="ctr"/>
-          <a:lstStyle/>
-          <a:p>
-            <a:pPr indent="0" marL="0">
-              <a:buNone/>
-            </a:pPr>
-            <a:r>
-              <a:rPr lang="en-US" sz="950" dirty="0">
-                <a:solidFill>
-                  <a:srgbClr val="4A9EFF"/>
-                </a:solidFill>
-              </a:rPr>
-              <a:t xml:space="preserve">▸  </a:t>
-            </a:r>
-            <a:pPr indent="0" marL="0">
-              <a:buNone/>
-            </a:pPr>
-            <a:r>
-              <a:rPr lang="en-US" sz="950" dirty="0">
-                <a:solidFill>
-                  <a:srgbClr val="C0C8D8"/>
-                </a:solidFill>
-              </a:rPr>
-              <a:t>Tailored to behavioural portfolio context</a:t>
-            </a:r>
-            <a:endParaRPr lang="en-US" sz="950" dirty="0"/>
-          </a:p>
-        </p:txBody>
-      </p:sp>
-      <p:sp>
-        <p:nvSpPr>
-          <p:cNvPr id="20" name="Text 18"/>
+              <a:t>the Live Portfolio is detailed next.</a:t>
+            </a:r>
+            <a:endParaRPr lang="en-US" sz="900" dirty="0"/>
+          </a:p>
+        </p:txBody>
+      </p:sp>
+      <p:sp>
+        <p:nvSpPr>
+          <p:cNvPr id="30" name="Text 28"/>
           <p:cNvSpPr/>
           <p:nvPr/>
         </p:nvSpPr>
@@ -7789,7 +7978,7 @@
                   <a:srgbClr val="556A8A"/>
                 </a:solidFill>
               </a:rPr>
-              <a:t>18 / 19</a:t>
+              <a:t>18 / 22</a:t>
             </a:r>
             <a:endParaRPr lang="en-US" sz="900" dirty="0"/>
           </a:p>
@@ -7797,7 +7986,7 @@
       </p:sp>
       <p:sp>
         <p:nvSpPr>
-          <p:cNvPr id="21" name="Text 19"/>
+          <p:cNvPr id="31" name="Text 29"/>
           <p:cNvSpPr/>
           <p:nvPr/>
         </p:nvSpPr>
@@ -7833,7 +8022,79 @@
       </p:sp>
       <p:pic>
         <p:nvPicPr>
-          <p:cNvPr id="24" name="Picture 23" descr="about.png"/>
+          <p:cNvPr id="32" name="Picture 31" descr="grid_4a9eff_0.png"/>
+          <p:cNvPicPr>
+            <a:picLocks noChangeAspect="1"/>
+          </p:cNvPicPr>
+          <p:nvPr/>
+        </p:nvPicPr>
+        <p:blipFill>
+          <a:blip r:embed="rId2"/>
+          <a:stretch>
+            <a:fillRect/>
+          </a:stretch>
+        </p:blipFill>
+        <p:spPr>
+          <a:xfrm>
+            <a:off x="1577340" y="1097280"/>
+            <a:ext cx="228600" cy="228600"/>
+          </a:xfrm>
+          <a:prstGeom prst="rect">
+            <a:avLst/>
+          </a:prstGeom>
+        </p:spPr>
+      </p:pic>
+      <p:pic>
+        <p:nvPicPr>
+          <p:cNvPr id="33" name="Picture 32" descr="layers_f5b942_0.png"/>
+          <p:cNvPicPr>
+            <a:picLocks noChangeAspect="1"/>
+          </p:cNvPicPr>
+          <p:nvPr/>
+        </p:nvPicPr>
+        <p:blipFill>
+          <a:blip r:embed="rId3"/>
+          <a:stretch>
+            <a:fillRect/>
+          </a:stretch>
+        </p:blipFill>
+        <p:spPr>
+          <a:xfrm>
+            <a:off x="4411980" y="1097280"/>
+            <a:ext cx="228600" cy="228600"/>
+          </a:xfrm>
+          <a:prstGeom prst="rect">
+            <a:avLst/>
+          </a:prstGeom>
+        </p:spPr>
+      </p:pic>
+      <p:pic>
+        <p:nvPicPr>
+          <p:cNvPr id="34" name="Picture 33" descr="activity_26a641_0.png"/>
+          <p:cNvPicPr>
+            <a:picLocks noChangeAspect="1"/>
+          </p:cNvPicPr>
+          <p:nvPr/>
+        </p:nvPicPr>
+        <p:blipFill>
+          <a:blip r:embed="rId4"/>
+          <a:stretch>
+            <a:fillRect/>
+          </a:stretch>
+        </p:blipFill>
+        <p:spPr>
+          <a:xfrm>
+            <a:off x="7246620" y="1097280"/>
+            <a:ext cx="228600" cy="228600"/>
+          </a:xfrm>
+          <a:prstGeom prst="rect">
+            <a:avLst/>
+          </a:prstGeom>
+        </p:spPr>
+      </p:pic>
+      <p:pic>
+        <p:nvPicPr>
+          <p:cNvPr id="35" name="Picture 34" descr="info_ffffff_0.png"/>
           <p:cNvPicPr>
             <a:picLocks noChangeAspect="1"/>
           </p:cNvPicPr>
@@ -7847,8 +8108,8 @@
         </p:blipFill>
         <p:spPr>
           <a:xfrm>
-            <a:off x="774945" y="1402439"/>
-            <a:ext cx="3204989" cy="1218482"/>
+            <a:off x="726948" y="3282696"/>
+            <a:ext cx="146304" cy="146304"/>
           </a:xfrm>
           <a:prstGeom prst="rect">
             <a:avLst/>
@@ -7857,7 +8118,7 @@
       </p:pic>
       <p:pic>
         <p:nvPicPr>
-          <p:cNvPr id="25" name="Picture 24" descr="glossary.png"/>
+          <p:cNvPr id="36" name="Picture 35" descr="book_ffffff_0.png"/>
           <p:cNvPicPr>
             <a:picLocks noChangeAspect="1"/>
           </p:cNvPicPr>
@@ -7871,8 +8132,8 @@
         </p:blipFill>
         <p:spPr>
           <a:xfrm>
-            <a:off x="4981315" y="1247534"/>
-            <a:ext cx="3570489" cy="1528292"/>
+            <a:off x="726948" y="3621024"/>
+            <a:ext cx="146304" cy="146304"/>
           </a:xfrm>
           <a:prstGeom prst="rect">
             <a:avLst/>
@@ -7881,7 +8142,7 @@
       </p:pic>
       <p:pic>
         <p:nvPicPr>
-          <p:cNvPr id="26" name="Picture 25" descr="info_4a9eff_0.png"/>
+          <p:cNvPr id="37" name="Picture 36" descr="bulb_ffffff_0.png"/>
           <p:cNvPicPr>
             <a:picLocks noChangeAspect="1"/>
           </p:cNvPicPr>
@@ -7895,32 +8156,8 @@
         </p:blipFill>
         <p:spPr>
           <a:xfrm>
-            <a:off x="548640" y="850392"/>
-            <a:ext cx="182880" cy="182880"/>
-          </a:xfrm>
-          <a:prstGeom prst="rect">
-            <a:avLst/>
-          </a:prstGeom>
-        </p:spPr>
-      </p:pic>
-      <p:pic>
-        <p:nvPicPr>
-          <p:cNvPr id="27" name="Picture 26" descr="book_4a9eff_0.png"/>
-          <p:cNvPicPr>
-            <a:picLocks noChangeAspect="1"/>
-          </p:cNvPicPr>
-          <p:nvPr/>
-        </p:nvPicPr>
-        <p:blipFill>
-          <a:blip r:embed="rId8"/>
-          <a:stretch>
-            <a:fillRect/>
-          </a:stretch>
-        </p:blipFill>
-        <p:spPr>
-          <a:xfrm>
-            <a:off x="4937760" y="850392"/>
-            <a:ext cx="182880" cy="182880"/>
+            <a:off x="726948" y="3959352"/>
+            <a:ext cx="146304" cy="146304"/>
           </a:xfrm>
           <a:prstGeom prst="rect">
             <a:avLst/>
@@ -7936,13 +8173,14 @@
 </file>
 
 <file path=ppt/slides/slide19.xml><?xml version="1.0" encoding="utf-8"?>
-<p:sld xmlns:a="http://schemas.openxmlformats.org/drawingml/2006/main" xmlns:r="http://schemas.openxmlformats.org/officeDocument/2006/relationships" xmlns:p="http://schemas.openxmlformats.org/presentationml/2006/main">
-  <p:cSld name="Slide 12">
+<p:sld xmlns:a="http://schemas.openxmlformats.org/drawingml/2006/main" xmlns:p="http://schemas.openxmlformats.org/presentationml/2006/main" xmlns:r="http://schemas.openxmlformats.org/officeDocument/2006/relationships">
+  <p:cSld>
     <p:bg>
       <p:bgPr>
         <a:solidFill>
           <a:srgbClr val="020C1B"/>
         </a:solidFill>
+        <a:effectLst/>
       </p:bgPr>
     </p:bg>
     <p:spTree>
@@ -7951,14 +8189,7 @@
         <p:cNvGrpSpPr/>
         <p:nvPr/>
       </p:nvGrpSpPr>
-      <p:grpSpPr>
-        <a:xfrm>
-          <a:off x="0" y="0"/>
-          <a:ext cx="0" cy="0"/>
-          <a:chOff x="0" y="0"/>
-          <a:chExt cx="0" cy="0"/>
-        </a:xfrm>
-      </p:grpSpPr>
+      <p:grpSpPr/>
       <p:sp>
         <p:nvSpPr>
           <p:cNvPr id="2" name="Shape 0"/>
@@ -7996,8 +8227,8 @@
         </p:nvSpPr>
         <p:spPr>
           <a:xfrm>
-            <a:off x="365760" y="164592"/>
-            <a:ext cx="8229600" cy="457200"/>
+            <a:off x="457200" y="164592"/>
+            <a:ext cx="8229600" cy="502920"/>
           </a:xfrm>
           <a:prstGeom prst="rect">
             <a:avLst/>
@@ -8013,14 +8244,14 @@
               <a:buNone/>
             </a:pPr>
             <a:r>
-              <a:rPr lang="en-US" sz="2200" b="1" dirty="0">
+              <a:rPr lang="en-US" sz="2600" b="1" dirty="0">
                 <a:solidFill>
                   <a:srgbClr val="FFFFFF"/>
                 </a:solidFill>
               </a:rPr>
-              <a:t>Disclaimer &amp; Contact</a:t>
-            </a:r>
-            <a:endParaRPr lang="en-US" sz="2200" dirty="0"/>
+              <a:t>Live Portfolio — build &amp; track</a:t>
+            </a:r>
+            <a:endParaRPr lang="en-US" sz="2600" dirty="0"/>
           </a:p>
         </p:txBody>
       </p:sp>
@@ -8032,109 +8263,8 @@
         </p:nvSpPr>
         <p:spPr>
           <a:xfrm>
-            <a:off x="365760" y="777240"/>
-            <a:ext cx="8412480" cy="1920240"/>
-          </a:xfrm>
-          <a:prstGeom prst="rect">
-            <a:avLst/>
-          </a:prstGeom>
-          <a:solidFill>
-            <a:srgbClr val="1A1200"/>
-          </a:solidFill>
-          <a:ln w="19050">
-            <a:solidFill>
-              <a:srgbClr val="F59E0B"/>
-            </a:solidFill>
-            <a:prstDash val="solid"/>
-          </a:ln>
-        </p:spPr>
-        <p:txBody>
-          <a:bodyPr/>
-          <a:p/>
-        </p:txBody>
-      </p:sp>
-      <p:sp>
-        <p:nvSpPr>
-          <p:cNvPr id="5" name="Text 3"/>
-          <p:cNvSpPr/>
-          <p:nvPr/>
-        </p:nvSpPr>
-        <p:spPr>
-          <a:xfrm>
-            <a:off x="548640" y="841248"/>
-            <a:ext cx="8046720" cy="320040"/>
-          </a:xfrm>
-          <a:prstGeom prst="rect">
-            <a:avLst/>
-          </a:prstGeom>
-          <a:noFill/>
-          <a:ln/>
-        </p:spPr>
-        <p:txBody>
-          <a:bodyPr wrap="square" lIns="0" tIns="0" rIns="0" bIns="0" rtlCol="0" anchor="ctr"/>
-          <a:lstStyle/>
-          <a:p>
-            <a:pPr indent="0" marL="0">
-              <a:buNone/>
-            </a:pPr>
-            <a:r>
-              <a:rPr lang="en-US" sz="1100" b="1" dirty="0">
-                <a:solidFill>
-                  <a:srgbClr val="F59E0B"/>
-                </a:solidFill>
-              </a:rPr>
-              <a:t>⚠️  Legal Disclaimer</a:t>
-            </a:r>
-            <a:endParaRPr lang="en-US" sz="1100" dirty="0"/>
-          </a:p>
-        </p:txBody>
-      </p:sp>
-      <p:sp>
-        <p:nvSpPr>
-          <p:cNvPr id="6" name="Text 4"/>
-          <p:cNvSpPr/>
-          <p:nvPr/>
-        </p:nvSpPr>
-        <p:spPr>
-          <a:xfrm>
-            <a:off x="548640" y="1188720"/>
-            <a:ext cx="8046720" cy="1371600"/>
-          </a:xfrm>
-          <a:prstGeom prst="rect">
-            <a:avLst/>
-          </a:prstGeom>
-          <a:noFill/>
-          <a:ln/>
-        </p:spPr>
-        <p:txBody>
-          <a:bodyPr wrap="square" lIns="0" tIns="0" rIns="0" bIns="0" rtlCol="0" anchor="ctr"/>
-          <a:lstStyle/>
-          <a:p>
-            <a:pPr indent="0" marL="0">
-              <a:buNone/>
-            </a:pPr>
-            <a:r>
-              <a:rPr lang="en-US" sz="950" dirty="0">
-                <a:solidFill>
-                  <a:srgbClr val="C0C8D8"/>
-                </a:solidFill>
-              </a:rPr>
-              <a:t>This application is based on the mental accounts portfolio optimisation framework of Das &amp; Statman (2009) and Das, Markowitz, Scheid &amp; Statman (2010), as extended in Jeddou (2012). It is provided for educational and research purposes only and does not constitute financial advice, investment recommendations, or a solicitation to buy or sell any financial instrument. Results are purely illustrative and should not be used as the basis for any investment decision.</a:t>
-            </a:r>
-            <a:endParaRPr lang="en-US" sz="950" dirty="0"/>
-          </a:p>
-        </p:txBody>
-      </p:sp>
-      <p:sp>
-        <p:nvSpPr>
-          <p:cNvPr id="7" name="Shape 5"/>
-          <p:cNvSpPr/>
-          <p:nvPr/>
-        </p:nvSpPr>
-        <p:spPr>
-          <a:xfrm>
-            <a:off x="365760" y="2834640"/>
-            <a:ext cx="8412480" cy="1234440"/>
+            <a:off x="365760" y="868680"/>
+            <a:ext cx="2651760" cy="1828800"/>
           </a:xfrm>
           <a:prstGeom prst="rect">
             <a:avLst/>
@@ -8148,6 +8278,13 @@
             </a:solidFill>
             <a:prstDash val="solid"/>
           </a:ln>
+          <a:effectLst>
+            <a:outerShdw sx="100000" sy="100000" kx="0" ky="0" algn="bl" rotWithShape="0" blurRad="101600" dist="38100" dir="8100000">
+              <a:srgbClr val="000000">
+                <a:alpha val="18000"/>
+              </a:srgbClr>
+            </a:outerShdw>
+          </a:effectLst>
         </p:spPr>
         <p:txBody>
           <a:bodyPr/>
@@ -8156,14 +8293,398 @@
       </p:sp>
       <p:sp>
         <p:nvSpPr>
-          <p:cNvPr id="8" name="Text 6"/>
-          <p:cNvSpPr/>
-          <p:nvPr/>
-        </p:nvSpPr>
-        <p:spPr>
-          <a:xfrm>
-            <a:off x="548640" y="2889504"/>
-            <a:ext cx="8046720" cy="274320"/>
+          <p:cNvPr id="6" name="Text 4"/>
+          <p:cNvSpPr/>
+          <p:nvPr/>
+        </p:nvSpPr>
+        <p:spPr>
+          <a:xfrm>
+            <a:off x="365760" y="1463040"/>
+            <a:ext cx="2651760" cy="365760"/>
+          </a:xfrm>
+          <a:prstGeom prst="rect">
+            <a:avLst/>
+          </a:prstGeom>
+          <a:noFill/>
+          <a:ln/>
+        </p:spPr>
+        <p:txBody>
+          <a:bodyPr wrap="square" rtlCol="0" anchor="ctr"/>
+          <a:lstStyle/>
+          <a:p>
+            <a:pPr algn="ctr" indent="0" marL="0">
+              <a:buNone/>
+            </a:pPr>
+            <a:r>
+              <a:rPr lang="en-US" sz="1100" b="1" dirty="0">
+                <a:solidFill>
+                  <a:srgbClr val="4A9EFF"/>
+                </a:solidFill>
+              </a:rPr>
+              <a:t>Holdings + derivatives</a:t>
+            </a:r>
+            <a:endParaRPr lang="en-US" sz="1100" dirty="0"/>
+          </a:p>
+        </p:txBody>
+      </p:sp>
+      <p:sp>
+        <p:nvSpPr>
+          <p:cNvPr id="7" name="Text 5"/>
+          <p:cNvSpPr/>
+          <p:nvPr/>
+        </p:nvSpPr>
+        <p:spPr>
+          <a:xfrm>
+            <a:off x="475488" y="1874520"/>
+            <a:ext cx="2432304" cy="731520"/>
+          </a:xfrm>
+          <a:prstGeom prst="rect">
+            <a:avLst/>
+          </a:prstGeom>
+          <a:noFill/>
+          <a:ln/>
+        </p:spPr>
+        <p:txBody>
+          <a:bodyPr wrap="square" rtlCol="0" anchor="t"/>
+          <a:lstStyle/>
+          <a:p>
+            <a:pPr algn="ctr" indent="0" marL="0">
+              <a:buNone/>
+            </a:pPr>
+            <a:r>
+              <a:rPr lang="en-US" sz="950" dirty="0">
+                <a:solidFill>
+                  <a:srgbClr val="C0C8D8"/>
+                </a:solidFill>
+              </a:rPr>
+              <a:t>Add securities and option / structured-product positions (puts, calls, collars, spreads, CGN); each row is held from its entry date.</a:t>
+            </a:r>
+            <a:endParaRPr lang="en-US" sz="950" dirty="0"/>
+          </a:p>
+        </p:txBody>
+      </p:sp>
+      <p:sp>
+        <p:nvSpPr>
+          <p:cNvPr id="8" name="Shape 6"/>
+          <p:cNvSpPr/>
+          <p:nvPr/>
+        </p:nvSpPr>
+        <p:spPr>
+          <a:xfrm>
+            <a:off x="3200400" y="868680"/>
+            <a:ext cx="2651760" cy="1828800"/>
+          </a:xfrm>
+          <a:prstGeom prst="rect">
+            <a:avLst/>
+          </a:prstGeom>
+          <a:solidFill>
+            <a:srgbClr val="0D1A2E"/>
+          </a:solidFill>
+          <a:ln w="12700">
+            <a:solidFill>
+              <a:srgbClr val="1A6BBF"/>
+            </a:solidFill>
+            <a:prstDash val="solid"/>
+          </a:ln>
+          <a:effectLst>
+            <a:outerShdw sx="100000" sy="100000" kx="0" ky="0" algn="bl" rotWithShape="0" blurRad="101600" dist="38100" dir="8100000">
+              <a:srgbClr val="000000">
+                <a:alpha val="18000"/>
+              </a:srgbClr>
+            </a:outerShdw>
+          </a:effectLst>
+        </p:spPr>
+        <p:txBody>
+          <a:bodyPr/>
+          <a:p/>
+        </p:txBody>
+      </p:sp>
+      <p:sp>
+        <p:nvSpPr>
+          <p:cNvPr id="10" name="Text 8"/>
+          <p:cNvSpPr/>
+          <p:nvPr/>
+        </p:nvSpPr>
+        <p:spPr>
+          <a:xfrm>
+            <a:off x="3200400" y="1463040"/>
+            <a:ext cx="2651760" cy="365760"/>
+          </a:xfrm>
+          <a:prstGeom prst="rect">
+            <a:avLst/>
+          </a:prstGeom>
+          <a:noFill/>
+          <a:ln/>
+        </p:spPr>
+        <p:txBody>
+          <a:bodyPr wrap="square" rtlCol="0" anchor="ctr"/>
+          <a:lstStyle/>
+          <a:p>
+            <a:pPr algn="ctr" indent="0" marL="0">
+              <a:buNone/>
+            </a:pPr>
+            <a:r>
+              <a:rPr lang="en-US" sz="1100" b="1" dirty="0">
+                <a:solidFill>
+                  <a:srgbClr val="4A9EFF"/>
+                </a:solidFill>
+              </a:rPr>
+              <a:t>Marked to market</a:t>
+            </a:r>
+            <a:endParaRPr lang="en-US" sz="1100" dirty="0"/>
+          </a:p>
+        </p:txBody>
+      </p:sp>
+      <p:sp>
+        <p:nvSpPr>
+          <p:cNvPr id="11" name="Text 9"/>
+          <p:cNvSpPr/>
+          <p:nvPr/>
+        </p:nvSpPr>
+        <p:spPr>
+          <a:xfrm>
+            <a:off x="3310128" y="1874520"/>
+            <a:ext cx="2432304" cy="731520"/>
+          </a:xfrm>
+          <a:prstGeom prst="rect">
+            <a:avLst/>
+          </a:prstGeom>
+          <a:noFill/>
+          <a:ln/>
+        </p:spPr>
+        <p:txBody>
+          <a:bodyPr wrap="square" rtlCol="0" anchor="t"/>
+          <a:lstStyle/>
+          <a:p>
+            <a:pPr algn="ctr" indent="0" marL="0">
+              <a:buNone/>
+            </a:pPr>
+            <a:r>
+              <a:rPr lang="en-US" sz="950" dirty="0">
+                <a:solidFill>
+                  <a:srgbClr val="C0C8D8"/>
+                </a:solidFill>
+              </a:rPr>
+              <a:t>Derivatives are priced with real expiry on their underlying — the same engine as the Backtest.</a:t>
+            </a:r>
+            <a:endParaRPr lang="en-US" sz="950" dirty="0"/>
+          </a:p>
+        </p:txBody>
+      </p:sp>
+      <p:sp>
+        <p:nvSpPr>
+          <p:cNvPr id="12" name="Shape 10"/>
+          <p:cNvSpPr/>
+          <p:nvPr/>
+        </p:nvSpPr>
+        <p:spPr>
+          <a:xfrm>
+            <a:off x="6035040" y="868680"/>
+            <a:ext cx="2651760" cy="1828800"/>
+          </a:xfrm>
+          <a:prstGeom prst="rect">
+            <a:avLst/>
+          </a:prstGeom>
+          <a:solidFill>
+            <a:srgbClr val="0D1A2E"/>
+          </a:solidFill>
+          <a:ln w="12700">
+            <a:solidFill>
+              <a:srgbClr val="1A6BBF"/>
+            </a:solidFill>
+            <a:prstDash val="solid"/>
+          </a:ln>
+          <a:effectLst>
+            <a:outerShdw sx="100000" sy="100000" kx="0" ky="0" algn="bl" rotWithShape="0" blurRad="101600" dist="38100" dir="8100000">
+              <a:srgbClr val="000000">
+                <a:alpha val="18000"/>
+              </a:srgbClr>
+            </a:outerShdw>
+          </a:effectLst>
+        </p:spPr>
+        <p:txBody>
+          <a:bodyPr/>
+          <a:p/>
+        </p:txBody>
+      </p:sp>
+      <p:sp>
+        <p:nvSpPr>
+          <p:cNvPr id="14" name="Text 12"/>
+          <p:cNvSpPr/>
+          <p:nvPr/>
+        </p:nvSpPr>
+        <p:spPr>
+          <a:xfrm>
+            <a:off x="6035040" y="1463040"/>
+            <a:ext cx="2651760" cy="365760"/>
+          </a:xfrm>
+          <a:prstGeom prst="rect">
+            <a:avLst/>
+          </a:prstGeom>
+          <a:noFill/>
+          <a:ln/>
+        </p:spPr>
+        <p:txBody>
+          <a:bodyPr wrap="square" rtlCol="0" anchor="ctr"/>
+          <a:lstStyle/>
+          <a:p>
+            <a:pPr algn="ctr" indent="0" marL="0">
+              <a:buNone/>
+            </a:pPr>
+            <a:r>
+              <a:rPr lang="en-US" sz="1100" b="1" dirty="0">
+                <a:solidFill>
+                  <a:srgbClr val="4A9EFF"/>
+                </a:solidFill>
+              </a:rPr>
+              <a:t>Realised analytics</a:t>
+            </a:r>
+            <a:endParaRPr lang="en-US" sz="1100" dirty="0"/>
+          </a:p>
+        </p:txBody>
+      </p:sp>
+      <p:sp>
+        <p:nvSpPr>
+          <p:cNvPr id="15" name="Text 13"/>
+          <p:cNvSpPr/>
+          <p:nvPr/>
+        </p:nvSpPr>
+        <p:spPr>
+          <a:xfrm>
+            <a:off x="6144768" y="1874520"/>
+            <a:ext cx="2432304" cy="731520"/>
+          </a:xfrm>
+          <a:prstGeom prst="rect">
+            <a:avLst/>
+          </a:prstGeom>
+          <a:noFill/>
+          <a:ln/>
+        </p:spPr>
+        <p:txBody>
+          <a:bodyPr wrap="square" rtlCol="0" anchor="t"/>
+          <a:lstStyle/>
+          <a:p>
+            <a:pPr algn="ctr" indent="0" marL="0">
+              <a:buNone/>
+            </a:pPr>
+            <a:r>
+              <a:rPr lang="en-US" sz="950" dirty="0">
+                <a:solidFill>
+                  <a:srgbClr val="C0C8D8"/>
+                </a:solidFill>
+              </a:rPr>
+              <a:t>Return, volatility, Sharpe, drawdown, daily VaR/CVaR, and CAPM alpha, beta and R² vs your benchmark.</a:t>
+            </a:r>
+            <a:endParaRPr lang="en-US" sz="950" dirty="0"/>
+          </a:p>
+        </p:txBody>
+      </p:sp>
+      <p:sp>
+        <p:nvSpPr>
+          <p:cNvPr id="16" name="Shape 14"/>
+          <p:cNvSpPr/>
+          <p:nvPr/>
+        </p:nvSpPr>
+        <p:spPr>
+          <a:xfrm>
+            <a:off x="365760" y="2834640"/>
+            <a:ext cx="8412480" cy="1508760"/>
+          </a:xfrm>
+          <a:prstGeom prst="rect">
+            <a:avLst/>
+          </a:prstGeom>
+          <a:solidFill>
+            <a:srgbClr val="0D1A2E"/>
+          </a:solidFill>
+          <a:ln w="12700">
+            <a:solidFill>
+              <a:srgbClr val="1A6BBF"/>
+            </a:solidFill>
+            <a:prstDash val="solid"/>
+          </a:ln>
+        </p:spPr>
+        <p:txBody>
+          <a:bodyPr/>
+          <a:p/>
+        </p:txBody>
+      </p:sp>
+      <p:sp>
+        <p:nvSpPr>
+          <p:cNvPr id="17" name="Text 15"/>
+          <p:cNvSpPr/>
+          <p:nvPr/>
+        </p:nvSpPr>
+        <p:spPr>
+          <a:xfrm>
+            <a:off x="548640" y="2880360"/>
+            <a:ext cx="8046720" cy="320040"/>
+          </a:xfrm>
+          <a:prstGeom prst="rect">
+            <a:avLst/>
+          </a:prstGeom>
+          <a:noFill/>
+          <a:ln/>
+        </p:spPr>
+        <p:txBody>
+          <a:bodyPr wrap="square" rtlCol="0" anchor="ctr"/>
+          <a:lstStyle/>
+          <a:p>
+            <a:pPr indent="0" marL="0">
+              <a:buNone/>
+            </a:pPr>
+            <a:r>
+              <a:rPr lang="en-US" sz="1100" b="1" dirty="0">
+                <a:solidFill>
+                  <a:srgbClr val="4A9EFF"/>
+                </a:solidFill>
+              </a:rPr>
+              <a:t>Setting it up</a:t>
+            </a:r>
+            <a:endParaRPr lang="en-US" sz="1100" dirty="0"/>
+          </a:p>
+        </p:txBody>
+      </p:sp>
+      <p:sp>
+        <p:nvSpPr>
+          <p:cNvPr id="18" name="Shape 16"/>
+          <p:cNvSpPr/>
+          <p:nvPr/>
+        </p:nvSpPr>
+        <p:spPr>
+          <a:xfrm>
+            <a:off x="548640" y="3209544"/>
+            <a:ext cx="502920" cy="292608"/>
+          </a:xfrm>
+          <a:prstGeom prst="roundRect">
+            <a:avLst>
+              <a:gd name="adj" fmla="val 18750"/>
+            </a:avLst>
+          </a:prstGeom>
+          <a:solidFill>
+            <a:srgbClr val="1A6BBF"/>
+          </a:solidFill>
+          <a:ln w="12700">
+            <a:solidFill>
+              <a:srgbClr val="1A6BBF"/>
+            </a:solidFill>
+            <a:prstDash val="solid"/>
+          </a:ln>
+        </p:spPr>
+        <p:txBody>
+          <a:bodyPr/>
+          <a:p/>
+        </p:txBody>
+      </p:sp>
+      <p:sp>
+        <p:nvSpPr>
+          <p:cNvPr id="20" name="Text 18"/>
+          <p:cNvSpPr/>
+          <p:nvPr/>
+        </p:nvSpPr>
+        <p:spPr>
+          <a:xfrm>
+            <a:off x="1143000" y="3209544"/>
+            <a:ext cx="2194560" cy="292608"/>
           </a:xfrm>
           <a:prstGeom prst="rect">
             <a:avLst/>
@@ -8179,221 +8700,262 @@
               <a:buNone/>
             </a:pPr>
             <a:r>
-              <a:rPr lang="en-US" sz="1000" b="1" dirty="0">
-                <a:solidFill>
-                  <a:srgbClr val="4A9EFF"/>
-                </a:solidFill>
-              </a:rPr>
-              <a:t>Academic References</a:t>
-            </a:r>
-            <a:endParaRPr lang="en-US" sz="1000" dirty="0"/>
-          </a:p>
-        </p:txBody>
-      </p:sp>
-      <p:sp>
-        <p:nvSpPr>
-          <p:cNvPr id="9" name="Text 7"/>
-          <p:cNvSpPr/>
-          <p:nvPr/>
-        </p:nvSpPr>
-        <p:spPr>
-          <a:xfrm>
-            <a:off x="548640" y="3200400"/>
-            <a:ext cx="8046720" cy="256032"/>
-          </a:xfrm>
-          <a:prstGeom prst="rect">
-            <a:avLst/>
-          </a:prstGeom>
-          <a:noFill/>
-          <a:ln/>
-        </p:spPr>
-        <p:txBody>
-          <a:bodyPr wrap="square" rtlCol="0" anchor="ctr"/>
-          <a:lstStyle/>
-          <a:p>
-            <a:pPr indent="0" marL="0">
-              <a:buNone/>
-            </a:pPr>
-            <a:r>
-              <a:rPr lang="en-US" sz="850" b="1" dirty="0">
-                <a:solidFill>
-                  <a:srgbClr val="4A9EFF"/>
-                </a:solidFill>
-              </a:rPr>
-              <a:t xml:space="preserve">▸  </a:t>
-            </a:r>
-            <a:pPr indent="0" marL="0">
-              <a:buNone/>
-            </a:pPr>
-            <a:r>
-              <a:rPr lang="en-US" sz="850" dirty="0">
+              <a:rPr lang="en-US" sz="950" b="1" dirty="0">
+                <a:solidFill>
+                  <a:srgbClr val="10B981"/>
+                </a:solidFill>
+              </a:rPr>
+              <a:t>Total 100%:</a:t>
+            </a:r>
+            <a:endParaRPr lang="en-US" sz="950" dirty="0"/>
+          </a:p>
+        </p:txBody>
+      </p:sp>
+      <p:sp>
+        <p:nvSpPr>
+          <p:cNvPr id="21" name="Text 19"/>
+          <p:cNvSpPr/>
+          <p:nvPr/>
+        </p:nvSpPr>
+        <p:spPr>
+          <a:xfrm>
+            <a:off x="3383280" y="3209544"/>
+            <a:ext cx="5212080" cy="292608"/>
+          </a:xfrm>
+          <a:prstGeom prst="rect">
+            <a:avLst/>
+          </a:prstGeom>
+          <a:noFill/>
+          <a:ln/>
+        </p:spPr>
+        <p:txBody>
+          <a:bodyPr wrap="square" lIns="0" tIns="0" rIns="0" bIns="0" rtlCol="0" anchor="ctr"/>
+          <a:lstStyle/>
+          <a:p>
+            <a:pPr indent="0" marL="0">
+              <a:buNone/>
+            </a:pPr>
+            <a:r>
+              <a:rPr lang="en-US" sz="900" dirty="0">
                 <a:solidFill>
                   <a:srgbClr val="C0C8D8"/>
                 </a:solidFill>
               </a:rPr>
-              <a:t>Das, S. &amp; Statman, M. (2009) — Beyond Mean-Variance: Portfolios with Derivatives and Non-Normal Returns in Mental Accounts</a:t>
-            </a:r>
-            <a:endParaRPr lang="en-US" sz="850" dirty="0"/>
-          </a:p>
-        </p:txBody>
-      </p:sp>
-      <p:sp>
-        <p:nvSpPr>
-          <p:cNvPr id="10" name="Text 8"/>
-          <p:cNvSpPr/>
-          <p:nvPr/>
-        </p:nvSpPr>
-        <p:spPr>
-          <a:xfrm>
-            <a:off x="548640" y="3474720"/>
-            <a:ext cx="8046720" cy="256032"/>
-          </a:xfrm>
-          <a:prstGeom prst="rect">
-            <a:avLst/>
-          </a:prstGeom>
-          <a:noFill/>
-          <a:ln/>
-        </p:spPr>
-        <p:txBody>
-          <a:bodyPr wrap="square" rtlCol="0" anchor="ctr"/>
-          <a:lstStyle/>
-          <a:p>
-            <a:pPr indent="0" marL="0">
-              <a:buNone/>
-            </a:pPr>
-            <a:r>
-              <a:rPr lang="en-US" sz="850" b="1" dirty="0">
-                <a:solidFill>
-                  <a:srgbClr val="4A9EFF"/>
-                </a:solidFill>
-              </a:rPr>
-              <a:t xml:space="preserve">▸  </a:t>
-            </a:r>
-            <a:pPr indent="0" marL="0">
-              <a:buNone/>
-            </a:pPr>
-            <a:r>
-              <a:rPr lang="en-US" sz="850" dirty="0">
+              <a:t>securities + derivatives must sum to 100%.</a:t>
+            </a:r>
+            <a:endParaRPr lang="en-US" sz="900" dirty="0"/>
+          </a:p>
+        </p:txBody>
+      </p:sp>
+      <p:sp>
+        <p:nvSpPr>
+          <p:cNvPr id="22" name="Shape 20"/>
+          <p:cNvSpPr/>
+          <p:nvPr/>
+        </p:nvSpPr>
+        <p:spPr>
+          <a:xfrm>
+            <a:off x="548640" y="3547872"/>
+            <a:ext cx="502920" cy="292608"/>
+          </a:xfrm>
+          <a:prstGeom prst="roundRect">
+            <a:avLst>
+              <a:gd name="adj" fmla="val 18750"/>
+            </a:avLst>
+          </a:prstGeom>
+          <a:solidFill>
+            <a:srgbClr val="1A6BBF"/>
+          </a:solidFill>
+          <a:ln w="12700">
+            <a:solidFill>
+              <a:srgbClr val="1A6BBF"/>
+            </a:solidFill>
+            <a:prstDash val="solid"/>
+          </a:ln>
+        </p:spPr>
+        <p:txBody>
+          <a:bodyPr/>
+          <a:p/>
+        </p:txBody>
+      </p:sp>
+      <p:sp>
+        <p:nvSpPr>
+          <p:cNvPr id="24" name="Text 22"/>
+          <p:cNvSpPr/>
+          <p:nvPr/>
+        </p:nvSpPr>
+        <p:spPr>
+          <a:xfrm>
+            <a:off x="1143000" y="3547872"/>
+            <a:ext cx="2194560" cy="292608"/>
+          </a:xfrm>
+          <a:prstGeom prst="rect">
+            <a:avLst/>
+          </a:prstGeom>
+          <a:noFill/>
+          <a:ln/>
+        </p:spPr>
+        <p:txBody>
+          <a:bodyPr wrap="square" lIns="0" tIns="0" rIns="0" bIns="0" rtlCol="0" anchor="ctr"/>
+          <a:lstStyle/>
+          <a:p>
+            <a:pPr indent="0" marL="0">
+              <a:buNone/>
+            </a:pPr>
+            <a:r>
+              <a:rPr lang="en-US" sz="950" b="1" dirty="0">
+                <a:solidFill>
+                  <a:srgbClr val="F59E0B"/>
+                </a:solidFill>
+              </a:rPr>
+              <a:t>Inception:</a:t>
+            </a:r>
+            <a:endParaRPr lang="en-US" sz="950" dirty="0"/>
+          </a:p>
+        </p:txBody>
+      </p:sp>
+      <p:sp>
+        <p:nvSpPr>
+          <p:cNvPr id="25" name="Text 23"/>
+          <p:cNvSpPr/>
+          <p:nvPr/>
+        </p:nvSpPr>
+        <p:spPr>
+          <a:xfrm>
+            <a:off x="3383280" y="3547872"/>
+            <a:ext cx="5212080" cy="292608"/>
+          </a:xfrm>
+          <a:prstGeom prst="rect">
+            <a:avLst/>
+          </a:prstGeom>
+          <a:noFill/>
+          <a:ln/>
+        </p:spPr>
+        <p:txBody>
+          <a:bodyPr wrap="square" lIns="0" tIns="0" rIns="0" bIns="0" rtlCol="0" anchor="ctr"/>
+          <a:lstStyle/>
+          <a:p>
+            <a:pPr indent="0" marL="0">
+              <a:buNone/>
+            </a:pPr>
+            <a:r>
+              <a:rPr lang="en-US" sz="900" dirty="0">
                 <a:solidFill>
                   <a:srgbClr val="C0C8D8"/>
                 </a:solidFill>
               </a:rPr>
-              <a:t>Das, S., Markowitz, H., Scheid, J. &amp; Statman, M. (2010) — Portfolio Optimization with Mental Accounts, JFQA Vol.45 No.2</a:t>
-            </a:r>
-            <a:endParaRPr lang="en-US" sz="850" dirty="0"/>
-          </a:p>
-        </p:txBody>
-      </p:sp>
-      <p:sp>
-        <p:nvSpPr>
-          <p:cNvPr id="11" name="Text 9"/>
-          <p:cNvSpPr/>
-          <p:nvPr/>
-        </p:nvSpPr>
-        <p:spPr>
-          <a:xfrm>
-            <a:off x="548640" y="3749040"/>
-            <a:ext cx="8046720" cy="256032"/>
-          </a:xfrm>
-          <a:prstGeom prst="rect">
-            <a:avLst/>
-          </a:prstGeom>
-          <a:noFill/>
-          <a:ln/>
-        </p:spPr>
-        <p:txBody>
-          <a:bodyPr wrap="square" rtlCol="0" anchor="ctr"/>
-          <a:lstStyle/>
-          <a:p>
-            <a:pPr indent="0" marL="0">
-              <a:buNone/>
-            </a:pPr>
-            <a:r>
-              <a:rPr lang="en-US" sz="850" b="1" dirty="0">
-                <a:solidFill>
-                  <a:srgbClr val="4A9EFF"/>
-                </a:solidFill>
-              </a:rPr>
-              <a:t xml:space="preserve">▸  </a:t>
-            </a:r>
-            <a:pPr indent="0" marL="0">
-              <a:buNone/>
-            </a:pPr>
-            <a:r>
-              <a:rPr lang="en-US" sz="850" dirty="0">
+              <a:t>earliest entry date; positions accumulate.</a:t>
+            </a:r>
+            <a:endParaRPr lang="en-US" sz="900" dirty="0"/>
+          </a:p>
+        </p:txBody>
+      </p:sp>
+      <p:sp>
+        <p:nvSpPr>
+          <p:cNvPr id="26" name="Shape 24"/>
+          <p:cNvSpPr/>
+          <p:nvPr/>
+        </p:nvSpPr>
+        <p:spPr>
+          <a:xfrm>
+            <a:off x="548640" y="3886200"/>
+            <a:ext cx="502920" cy="292608"/>
+          </a:xfrm>
+          <a:prstGeom prst="roundRect">
+            <a:avLst>
+              <a:gd name="adj" fmla="val 18750"/>
+            </a:avLst>
+          </a:prstGeom>
+          <a:solidFill>
+            <a:srgbClr val="1A6BBF"/>
+          </a:solidFill>
+          <a:ln w="12700">
+            <a:solidFill>
+              <a:srgbClr val="1A6BBF"/>
+            </a:solidFill>
+            <a:prstDash val="solid"/>
+          </a:ln>
+        </p:spPr>
+        <p:txBody>
+          <a:bodyPr/>
+          <a:p/>
+        </p:txBody>
+      </p:sp>
+      <p:sp>
+        <p:nvSpPr>
+          <p:cNvPr id="28" name="Text 26"/>
+          <p:cNvSpPr/>
+          <p:nvPr/>
+        </p:nvSpPr>
+        <p:spPr>
+          <a:xfrm>
+            <a:off x="1143000" y="3886200"/>
+            <a:ext cx="2194560" cy="292608"/>
+          </a:xfrm>
+          <a:prstGeom prst="rect">
+            <a:avLst/>
+          </a:prstGeom>
+          <a:noFill/>
+          <a:ln/>
+        </p:spPr>
+        <p:txBody>
+          <a:bodyPr wrap="square" lIns="0" tIns="0" rIns="0" bIns="0" rtlCol="0" anchor="ctr"/>
+          <a:lstStyle/>
+          <a:p>
+            <a:pPr indent="0" marL="0">
+              <a:buNone/>
+            </a:pPr>
+            <a:r>
+              <a:rPr lang="en-US" sz="950" b="1" dirty="0">
+                <a:solidFill>
+                  <a:srgbClr val="E76F51"/>
+                </a:solidFill>
+              </a:rPr>
+              <a:t>View range:</a:t>
+            </a:r>
+            <a:endParaRPr lang="en-US" sz="950" dirty="0"/>
+          </a:p>
+        </p:txBody>
+      </p:sp>
+      <p:sp>
+        <p:nvSpPr>
+          <p:cNvPr id="29" name="Text 27"/>
+          <p:cNvSpPr/>
+          <p:nvPr/>
+        </p:nvSpPr>
+        <p:spPr>
+          <a:xfrm>
+            <a:off x="3383280" y="3886200"/>
+            <a:ext cx="5212080" cy="292608"/>
+          </a:xfrm>
+          <a:prstGeom prst="rect">
+            <a:avLst/>
+          </a:prstGeom>
+          <a:noFill/>
+          <a:ln/>
+        </p:spPr>
+        <p:txBody>
+          <a:bodyPr wrap="square" lIns="0" tIns="0" rIns="0" bIns="0" rtlCol="0" anchor="ctr"/>
+          <a:lstStyle/>
+          <a:p>
+            <a:pPr indent="0" marL="0">
+              <a:buNone/>
+            </a:pPr>
+            <a:r>
+              <a:rPr lang="en-US" sz="900" dirty="0">
                 <a:solidFill>
                   <a:srgbClr val="C0C8D8"/>
                 </a:solidFill>
               </a:rPr>
-              <a:t>Jeddou, S. (2012) — Beyond Mean-Variance: Options and Structured Products in Behavioral Portfolios, MSc Finance, USI Lugano</a:t>
-            </a:r>
-            <a:endParaRPr lang="en-US" sz="850" dirty="0"/>
-          </a:p>
-        </p:txBody>
-      </p:sp>
-      <p:sp>
-        <p:nvSpPr>
-          <p:cNvPr id="12" name="Text 10"/>
-          <p:cNvSpPr/>
-          <p:nvPr/>
-        </p:nvSpPr>
-        <p:spPr>
-          <a:xfrm>
-            <a:off x="365760" y="4526280"/>
-            <a:ext cx="8412480" cy="320040"/>
-          </a:xfrm>
-          <a:prstGeom prst="rect">
-            <a:avLst/>
-          </a:prstGeom>
-          <a:noFill/>
-          <a:ln/>
-        </p:spPr>
-        <p:txBody>
-          <a:bodyPr wrap="square" rtlCol="0" anchor="ctr"/>
-          <a:lstStyle/>
-          <a:p>
-            <a:pPr algn="ctr" indent="0" marL="0">
-              <a:buNone/>
-            </a:pPr>
-            <a:r>
-              <a:rPr lang="en-US" sz="950" dirty="0">
-                <a:solidFill>
-                  <a:srgbClr val="4A9EFF"/>
-                </a:solidFill>
-              </a:rPr>
-              <a:t xml:space="preserve">🔗  </a:t>
-            </a:r>
-            <a:pPr algn="ctr" indent="0" marL="0">
-              <a:buNone/>
-            </a:pPr>
-            <a:r>
-              <a:rPr lang="en-US" sz="950" dirty="0">
-                <a:solidFill>
-                  <a:srgbClr val="4A9EFF"/>
-                </a:solidFill>
-                <a:hlinkClick r:id="rId4"/>
-              </a:rPr>
-              <a:t>sami-jeddou-behavioral-portfolio-optimizer.streamlit.app</a:t>
-            </a:r>
-            <a:pPr algn="ctr" indent="0" marL="0">
-              <a:buNone/>
-            </a:pPr>
-            <a:r>
-              <a:rPr lang="en-US" sz="950" dirty="0">
-                <a:solidFill>
-                  <a:srgbClr val="556A8A"/>
-                </a:solidFill>
-                <a:hlinkClick r:id="rId3"/>
-              </a:rPr>
-              <a:t xml:space="preserve">   |   🔗  LinkedIn</a:t>
-            </a:r>
-            <a:endParaRPr lang="en-US" sz="950" dirty="0"/>
-          </a:p>
-        </p:txBody>
-      </p:sp>
-      <p:sp>
-        <p:nvSpPr>
-          <p:cNvPr id="13" name="Text 11"/>
+              <a:t>narrow the analytics to any date window.</a:t>
+            </a:r>
+            <a:endParaRPr lang="en-US" sz="900" dirty="0"/>
+          </a:p>
+        </p:txBody>
+      </p:sp>
+      <p:sp>
+        <p:nvSpPr>
+          <p:cNvPr id="30" name="Text 28"/>
           <p:cNvSpPr/>
           <p:nvPr/>
         </p:nvSpPr>
@@ -8421,7 +8983,7 @@
                   <a:srgbClr val="556A8A"/>
                 </a:solidFill>
               </a:rPr>
-              <a:t>19 / 19</a:t>
+              <a:t>19 / 22</a:t>
             </a:r>
             <a:endParaRPr lang="en-US" sz="900" dirty="0"/>
           </a:p>
@@ -8429,7 +8991,7 @@
       </p:sp>
       <p:sp>
         <p:nvSpPr>
-          <p:cNvPr id="14" name="Text 12"/>
+          <p:cNvPr id="31" name="Text 29"/>
           <p:cNvSpPr/>
           <p:nvPr/>
         </p:nvSpPr>
@@ -8463,6 +9025,150 @@
           </a:p>
         </p:txBody>
       </p:sp>
+      <p:pic>
+        <p:nvPicPr>
+          <p:cNvPr id="32" name="Picture 31" descr="grid_4a9eff_0.png"/>
+          <p:cNvPicPr>
+            <a:picLocks noChangeAspect="1"/>
+          </p:cNvPicPr>
+          <p:nvPr/>
+        </p:nvPicPr>
+        <p:blipFill>
+          <a:blip r:embed="rId2"/>
+          <a:stretch>
+            <a:fillRect/>
+          </a:stretch>
+        </p:blipFill>
+        <p:spPr>
+          <a:xfrm>
+            <a:off x="1577340" y="1097280"/>
+            <a:ext cx="228600" cy="228600"/>
+          </a:xfrm>
+          <a:prstGeom prst="rect">
+            <a:avLst/>
+          </a:prstGeom>
+        </p:spPr>
+      </p:pic>
+      <p:pic>
+        <p:nvPicPr>
+          <p:cNvPr id="33" name="Picture 32" descr="layers_f5b942_0.png"/>
+          <p:cNvPicPr>
+            <a:picLocks noChangeAspect="1"/>
+          </p:cNvPicPr>
+          <p:nvPr/>
+        </p:nvPicPr>
+        <p:blipFill>
+          <a:blip r:embed="rId3"/>
+          <a:stretch>
+            <a:fillRect/>
+          </a:stretch>
+        </p:blipFill>
+        <p:spPr>
+          <a:xfrm>
+            <a:off x="4411980" y="1097280"/>
+            <a:ext cx="228600" cy="228600"/>
+          </a:xfrm>
+          <a:prstGeom prst="rect">
+            <a:avLst/>
+          </a:prstGeom>
+        </p:spPr>
+      </p:pic>
+      <p:pic>
+        <p:nvPicPr>
+          <p:cNvPr id="34" name="Picture 33" descr="activity_26a641_0.png"/>
+          <p:cNvPicPr>
+            <a:picLocks noChangeAspect="1"/>
+          </p:cNvPicPr>
+          <p:nvPr/>
+        </p:nvPicPr>
+        <p:blipFill>
+          <a:blip r:embed="rId4"/>
+          <a:stretch>
+            <a:fillRect/>
+          </a:stretch>
+        </p:blipFill>
+        <p:spPr>
+          <a:xfrm>
+            <a:off x="7246620" y="1097280"/>
+            <a:ext cx="228600" cy="228600"/>
+          </a:xfrm>
+          <a:prstGeom prst="rect">
+            <a:avLst/>
+          </a:prstGeom>
+        </p:spPr>
+      </p:pic>
+      <p:pic>
+        <p:nvPicPr>
+          <p:cNvPr id="35" name="Picture 34" descr="info_ffffff_0.png"/>
+          <p:cNvPicPr>
+            <a:picLocks noChangeAspect="1"/>
+          </p:cNvPicPr>
+          <p:nvPr/>
+        </p:nvPicPr>
+        <p:blipFill>
+          <a:blip r:embed="rId5"/>
+          <a:stretch>
+            <a:fillRect/>
+          </a:stretch>
+        </p:blipFill>
+        <p:spPr>
+          <a:xfrm>
+            <a:off x="726948" y="3282696"/>
+            <a:ext cx="146304" cy="146304"/>
+          </a:xfrm>
+          <a:prstGeom prst="rect">
+            <a:avLst/>
+          </a:prstGeom>
+        </p:spPr>
+      </p:pic>
+      <p:pic>
+        <p:nvPicPr>
+          <p:cNvPr id="36" name="Picture 35" descr="book_ffffff_0.png"/>
+          <p:cNvPicPr>
+            <a:picLocks noChangeAspect="1"/>
+          </p:cNvPicPr>
+          <p:nvPr/>
+        </p:nvPicPr>
+        <p:blipFill>
+          <a:blip r:embed="rId6"/>
+          <a:stretch>
+            <a:fillRect/>
+          </a:stretch>
+        </p:blipFill>
+        <p:spPr>
+          <a:xfrm>
+            <a:off x="726948" y="3621024"/>
+            <a:ext cx="146304" cy="146304"/>
+          </a:xfrm>
+          <a:prstGeom prst="rect">
+            <a:avLst/>
+          </a:prstGeom>
+        </p:spPr>
+      </p:pic>
+      <p:pic>
+        <p:nvPicPr>
+          <p:cNvPr id="37" name="Picture 36" descr="bulb_ffffff_0.png"/>
+          <p:cNvPicPr>
+            <a:picLocks noChangeAspect="1"/>
+          </p:cNvPicPr>
+          <p:nvPr/>
+        </p:nvPicPr>
+        <p:blipFill>
+          <a:blip r:embed="rId7"/>
+          <a:stretch>
+            <a:fillRect/>
+          </a:stretch>
+        </p:blipFill>
+        <p:spPr>
+          <a:xfrm>
+            <a:off x="726948" y="3959352"/>
+            <a:ext cx="146304" cy="146304"/>
+          </a:xfrm>
+          <a:prstGeom prst="rect">
+            <a:avLst/>
+          </a:prstGeom>
+        </p:spPr>
+      </p:pic>
     </p:spTree>
   </p:cSld>
   <p:clrMapOvr>
@@ -8583,7 +9289,7 @@
                   <a:srgbClr val="556A8A"/>
                 </a:solidFill>
               </a:rPr>
-              <a:t>2 / 19</a:t>
+              <a:t>2 / 22</a:t>
             </a:r>
             <a:endParaRPr lang="en-US" sz="900" dirty="0"/>
           </a:p>
@@ -8653,7 +9359,7 @@
                   <a:srgbClr val="C0C8D8"/>
                 </a:solidFill>
               </a:rPr>
-              <a:t>The landing screen — your starting point: the three tools across the top, with the reference shelf (About · Glossary · User Guide) below.</a:t>
+              <a:t>The landing screen — your starting point: the six tools, with the reference shelf (About · Glossary · User Guide) below.</a:t>
             </a:r>
           </a:p>
         </p:txBody>
@@ -8661,6 +9367,915 @@
       <p:pic>
         <p:nvPicPr>
           <p:cNvPr id="33" name="Picture 32" descr="home.png"/>
+          <p:cNvPicPr>
+            <a:picLocks noChangeAspect="1"/>
+          </p:cNvPicPr>
+          <p:nvPr/>
+        </p:nvPicPr>
+        <p:blipFill>
+          <a:blip r:embed="rId4"/>
+          <a:stretch>
+            <a:fillRect/>
+          </a:stretch>
+        </p:blipFill>
+        <p:spPr>
+          <a:xfrm>
+            <a:off x="1399032" y="1457185"/>
+            <a:ext cx="6355080" cy="2937789"/>
+          </a:xfrm>
+          <a:prstGeom prst="rect">
+            <a:avLst/>
+          </a:prstGeom>
+        </p:spPr>
+      </p:pic>
+    </p:spTree>
+  </p:cSld>
+  <p:clrMapOvr>
+    <a:masterClrMapping/>
+  </p:clrMapOvr>
+</p:sld>
+</file>
+
+<file path=ppt/slides/slide20.xml><?xml version="1.0" encoding="utf-8"?>
+<p:sld xmlns:a="http://schemas.openxmlformats.org/drawingml/2006/main" xmlns:p="http://schemas.openxmlformats.org/presentationml/2006/main" xmlns:r="http://schemas.openxmlformats.org/officeDocument/2006/relationships">
+  <p:cSld>
+    <p:bg>
+      <p:bgPr>
+        <a:solidFill>
+          <a:srgbClr val="020C1B"/>
+        </a:solidFill>
+        <a:effectLst/>
+      </p:bgPr>
+    </p:bg>
+    <p:spTree>
+      <p:nvGrpSpPr>
+        <p:cNvPr id="1" name=""/>
+        <p:cNvGrpSpPr/>
+        <p:nvPr/>
+      </p:nvGrpSpPr>
+      <p:grpSpPr/>
+      <p:sp>
+        <p:nvSpPr>
+          <p:cNvPr id="2" name="Shape 0"/>
+          <p:cNvSpPr/>
+          <p:nvPr/>
+        </p:nvSpPr>
+        <p:spPr>
+          <a:xfrm>
+            <a:off x="0" y="0"/>
+            <a:ext cx="9144000" cy="54864"/>
+          </a:xfrm>
+          <a:prstGeom prst="rect">
+            <a:avLst/>
+          </a:prstGeom>
+          <a:solidFill>
+            <a:srgbClr val="1A6BBF"/>
+          </a:solidFill>
+          <a:ln w="12700">
+            <a:solidFill>
+              <a:srgbClr val="1A6BBF"/>
+            </a:solidFill>
+            <a:prstDash val="solid"/>
+          </a:ln>
+        </p:spPr>
+        <p:txBody>
+          <a:bodyPr/>
+          <a:p/>
+        </p:txBody>
+      </p:sp>
+      <p:sp>
+        <p:nvSpPr>
+          <p:cNvPr id="3" name="Text 1"/>
+          <p:cNvSpPr/>
+          <p:nvPr/>
+        </p:nvSpPr>
+        <p:spPr>
+          <a:xfrm>
+            <a:off x="457200" y="164592"/>
+            <a:ext cx="8229600" cy="502920"/>
+          </a:xfrm>
+          <a:prstGeom prst="rect">
+            <a:avLst/>
+          </a:prstGeom>
+          <a:noFill/>
+          <a:ln/>
+        </p:spPr>
+        <p:txBody>
+          <a:bodyPr wrap="square" rtlCol="0" anchor="ctr"/>
+          <a:lstStyle/>
+          <a:p>
+            <a:pPr indent="0" marL="0">
+              <a:buNone/>
+            </a:pPr>
+            <a:r>
+              <a:rPr lang="en-US" sz="2600" b="1" dirty="0">
+                <a:solidFill>
+                  <a:srgbClr val="FFFFFF"/>
+                </a:solidFill>
+              </a:rPr>
+              <a:t>Live Portfolio — monitor &amp; stress</a:t>
+            </a:r>
+            <a:endParaRPr lang="en-US" sz="2600" dirty="0"/>
+          </a:p>
+        </p:txBody>
+      </p:sp>
+      <p:sp>
+        <p:nvSpPr>
+          <p:cNvPr id="4" name="Shape 2"/>
+          <p:cNvSpPr/>
+          <p:nvPr/>
+        </p:nvSpPr>
+        <p:spPr>
+          <a:xfrm>
+            <a:off x="365760" y="868680"/>
+            <a:ext cx="2651760" cy="1828800"/>
+          </a:xfrm>
+          <a:prstGeom prst="rect">
+            <a:avLst/>
+          </a:prstGeom>
+          <a:solidFill>
+            <a:srgbClr val="0D1A2E"/>
+          </a:solidFill>
+          <a:ln w="12700">
+            <a:solidFill>
+              <a:srgbClr val="1A6BBF"/>
+            </a:solidFill>
+            <a:prstDash val="solid"/>
+          </a:ln>
+          <a:effectLst>
+            <a:outerShdw sx="100000" sy="100000" kx="0" ky="0" algn="bl" rotWithShape="0" blurRad="101600" dist="38100" dir="8100000">
+              <a:srgbClr val="000000">
+                <a:alpha val="18000"/>
+              </a:srgbClr>
+            </a:outerShdw>
+          </a:effectLst>
+        </p:spPr>
+        <p:txBody>
+          <a:bodyPr/>
+          <a:p/>
+        </p:txBody>
+      </p:sp>
+      <p:sp>
+        <p:nvSpPr>
+          <p:cNvPr id="6" name="Text 4"/>
+          <p:cNvSpPr/>
+          <p:nvPr/>
+        </p:nvSpPr>
+        <p:spPr>
+          <a:xfrm>
+            <a:off x="365760" y="1463040"/>
+            <a:ext cx="2651760" cy="365760"/>
+          </a:xfrm>
+          <a:prstGeom prst="rect">
+            <a:avLst/>
+          </a:prstGeom>
+          <a:noFill/>
+          <a:ln/>
+        </p:spPr>
+        <p:txBody>
+          <a:bodyPr wrap="square" rtlCol="0" anchor="ctr"/>
+          <a:lstStyle/>
+          <a:p>
+            <a:pPr algn="ctr" indent="0" marL="0">
+              <a:buNone/>
+            </a:pPr>
+            <a:r>
+              <a:rPr lang="en-US" sz="1100" b="1" dirty="0">
+                <a:solidFill>
+                  <a:srgbClr val="4A9EFF"/>
+                </a:solidFill>
+              </a:rPr>
+              <a:t>Risk vs tolerance</a:t>
+            </a:r>
+            <a:endParaRPr lang="en-US" sz="1100" dirty="0"/>
+          </a:p>
+        </p:txBody>
+      </p:sp>
+      <p:sp>
+        <p:nvSpPr>
+          <p:cNvPr id="7" name="Text 5"/>
+          <p:cNvSpPr/>
+          <p:nvPr/>
+        </p:nvSpPr>
+        <p:spPr>
+          <a:xfrm>
+            <a:off x="475488" y="1874520"/>
+            <a:ext cx="2432304" cy="731520"/>
+          </a:xfrm>
+          <a:prstGeom prst="rect">
+            <a:avLst/>
+          </a:prstGeom>
+          <a:noFill/>
+          <a:ln/>
+        </p:spPr>
+        <p:txBody>
+          <a:bodyPr wrap="square" rtlCol="0" anchor="t"/>
+          <a:lstStyle/>
+          <a:p>
+            <a:pPr algn="ctr" indent="0" marL="0">
+              <a:buNone/>
+            </a:pPr>
+            <a:r>
+              <a:rPr lang="en-US" sz="950" dirty="0">
+                <a:solidFill>
+                  <a:srgbClr val="C0C8D8"/>
+                </a:solidFill>
+              </a:rPr>
+              <a:t>Monitor against your limit with VaR (breaches ≤ α) or ES (tail ≥ L); a time-varying mode uses a dated tolerance timeline.</a:t>
+            </a:r>
+            <a:endParaRPr lang="en-US" sz="950" dirty="0"/>
+          </a:p>
+        </p:txBody>
+      </p:sp>
+      <p:sp>
+        <p:nvSpPr>
+          <p:cNvPr id="8" name="Shape 6"/>
+          <p:cNvSpPr/>
+          <p:nvPr/>
+        </p:nvSpPr>
+        <p:spPr>
+          <a:xfrm>
+            <a:off x="3200400" y="868680"/>
+            <a:ext cx="2651760" cy="1828800"/>
+          </a:xfrm>
+          <a:prstGeom prst="rect">
+            <a:avLst/>
+          </a:prstGeom>
+          <a:solidFill>
+            <a:srgbClr val="0D1A2E"/>
+          </a:solidFill>
+          <a:ln w="12700">
+            <a:solidFill>
+              <a:srgbClr val="1A6BBF"/>
+            </a:solidFill>
+            <a:prstDash val="solid"/>
+          </a:ln>
+          <a:effectLst>
+            <a:outerShdw sx="100000" sy="100000" kx="0" ky="0" algn="bl" rotWithShape="0" blurRad="101600" dist="38100" dir="8100000">
+              <a:srgbClr val="000000">
+                <a:alpha val="18000"/>
+              </a:srgbClr>
+            </a:outerShdw>
+          </a:effectLst>
+        </p:spPr>
+        <p:txBody>
+          <a:bodyPr/>
+          <a:p/>
+        </p:txBody>
+      </p:sp>
+      <p:sp>
+        <p:nvSpPr>
+          <p:cNvPr id="10" name="Text 8"/>
+          <p:cNvSpPr/>
+          <p:nvPr/>
+        </p:nvSpPr>
+        <p:spPr>
+          <a:xfrm>
+            <a:off x="3200400" y="1463040"/>
+            <a:ext cx="2651760" cy="365760"/>
+          </a:xfrm>
+          <a:prstGeom prst="rect">
+            <a:avLst/>
+          </a:prstGeom>
+          <a:noFill/>
+          <a:ln/>
+        </p:spPr>
+        <p:txBody>
+          <a:bodyPr wrap="square" rtlCol="0" anchor="ctr"/>
+          <a:lstStyle/>
+          <a:p>
+            <a:pPr algn="ctr" indent="0" marL="0">
+              <a:buNone/>
+            </a:pPr>
+            <a:r>
+              <a:rPr lang="en-US" sz="1100" b="1" dirty="0">
+                <a:solidFill>
+                  <a:srgbClr val="4A9EFF"/>
+                </a:solidFill>
+              </a:rPr>
+              <a:t>Stress testing</a:t>
+            </a:r>
+            <a:endParaRPr lang="en-US" sz="1100" dirty="0"/>
+          </a:p>
+        </p:txBody>
+      </p:sp>
+      <p:sp>
+        <p:nvSpPr>
+          <p:cNvPr id="11" name="Text 9"/>
+          <p:cNvSpPr/>
+          <p:nvPr/>
+        </p:nvSpPr>
+        <p:spPr>
+          <a:xfrm>
+            <a:off x="3310128" y="1874520"/>
+            <a:ext cx="2432304" cy="731520"/>
+          </a:xfrm>
+          <a:prstGeom prst="rect">
+            <a:avLst/>
+          </a:prstGeom>
+          <a:noFill/>
+          <a:ln/>
+        </p:spPr>
+        <p:txBody>
+          <a:bodyPr wrap="square" rtlCol="0" anchor="t"/>
+          <a:lstStyle/>
+          <a:p>
+            <a:pPr algn="ctr" indent="0" marL="0">
+              <a:buNone/>
+            </a:pPr>
+            <a:r>
+              <a:rPr lang="en-US" sz="950" dirty="0">
+                <a:solidFill>
+                  <a:srgbClr val="C0C8D8"/>
+                </a:solidFill>
+              </a:rPr>
+              <a:t>Historical crises (2008–2022) projected forward, custom β-shock paths, and a parametric (vol×, corr→1) stress — with charts.</a:t>
+            </a:r>
+            <a:endParaRPr lang="en-US" sz="950" dirty="0"/>
+          </a:p>
+        </p:txBody>
+      </p:sp>
+      <p:sp>
+        <p:nvSpPr>
+          <p:cNvPr id="12" name="Shape 10"/>
+          <p:cNvSpPr/>
+          <p:nvPr/>
+        </p:nvSpPr>
+        <p:spPr>
+          <a:xfrm>
+            <a:off x="6035040" y="868680"/>
+            <a:ext cx="2651760" cy="1828800"/>
+          </a:xfrm>
+          <a:prstGeom prst="rect">
+            <a:avLst/>
+          </a:prstGeom>
+          <a:solidFill>
+            <a:srgbClr val="0D1A2E"/>
+          </a:solidFill>
+          <a:ln w="12700">
+            <a:solidFill>
+              <a:srgbClr val="1A6BBF"/>
+            </a:solidFill>
+            <a:prstDash val="solid"/>
+          </a:ln>
+          <a:effectLst>
+            <a:outerShdw sx="100000" sy="100000" kx="0" ky="0" algn="bl" rotWithShape="0" blurRad="101600" dist="38100" dir="8100000">
+              <a:srgbClr val="000000">
+                <a:alpha val="18000"/>
+              </a:srgbClr>
+            </a:outerShdw>
+          </a:effectLst>
+        </p:spPr>
+        <p:txBody>
+          <a:bodyPr/>
+          <a:p/>
+        </p:txBody>
+      </p:sp>
+      <p:sp>
+        <p:nvSpPr>
+          <p:cNvPr id="14" name="Text 12"/>
+          <p:cNvSpPr/>
+          <p:nvPr/>
+        </p:nvSpPr>
+        <p:spPr>
+          <a:xfrm>
+            <a:off x="6035040" y="1463040"/>
+            <a:ext cx="2651760" cy="365760"/>
+          </a:xfrm>
+          <a:prstGeom prst="rect">
+            <a:avLst/>
+          </a:prstGeom>
+          <a:noFill/>
+          <a:ln/>
+        </p:spPr>
+        <p:txBody>
+          <a:bodyPr wrap="square" rtlCol="0" anchor="ctr"/>
+          <a:lstStyle/>
+          <a:p>
+            <a:pPr algn="ctr" indent="0" marL="0">
+              <a:buNone/>
+            </a:pPr>
+            <a:r>
+              <a:rPr lang="en-US" sz="1100" b="1" dirty="0">
+                <a:solidFill>
+                  <a:srgbClr val="4A9EFF"/>
+                </a:solidFill>
+              </a:rPr>
+              <a:t>Save to your Drive</a:t>
+            </a:r>
+            <a:endParaRPr lang="en-US" sz="1100" dirty="0"/>
+          </a:p>
+        </p:txBody>
+      </p:sp>
+      <p:sp>
+        <p:nvSpPr>
+          <p:cNvPr id="15" name="Text 13"/>
+          <p:cNvSpPr/>
+          <p:nvPr/>
+        </p:nvSpPr>
+        <p:spPr>
+          <a:xfrm>
+            <a:off x="6144768" y="1874520"/>
+            <a:ext cx="2432304" cy="731520"/>
+          </a:xfrm>
+          <a:prstGeom prst="rect">
+            <a:avLst/>
+          </a:prstGeom>
+          <a:noFill/>
+          <a:ln/>
+        </p:spPr>
+        <p:txBody>
+          <a:bodyPr wrap="square" rtlCol="0" anchor="t"/>
+          <a:lstStyle/>
+          <a:p>
+            <a:pPr algn="ctr" indent="0" marL="0">
+              <a:buNone/>
+            </a:pPr>
+            <a:r>
+              <a:rPr lang="en-US" sz="950" dirty="0">
+                <a:solidFill>
+                  <a:srgbClr val="C0C8D8"/>
+                </a:solidFill>
+              </a:rPr>
+              <a:t>Sign in with Google to store portfolios in your own Drive (drive.file), or export a portable JSON file.</a:t>
+            </a:r>
+            <a:endParaRPr lang="en-US" sz="950" dirty="0"/>
+          </a:p>
+        </p:txBody>
+      </p:sp>
+      <p:sp>
+        <p:nvSpPr>
+          <p:cNvPr id="16" name="Shape 14"/>
+          <p:cNvSpPr/>
+          <p:nvPr/>
+        </p:nvSpPr>
+        <p:spPr>
+          <a:xfrm>
+            <a:off x="365760" y="2834640"/>
+            <a:ext cx="8412480" cy="1508760"/>
+          </a:xfrm>
+          <a:prstGeom prst="rect">
+            <a:avLst/>
+          </a:prstGeom>
+          <a:solidFill>
+            <a:srgbClr val="0D1A2E"/>
+          </a:solidFill>
+          <a:ln w="12700">
+            <a:solidFill>
+              <a:srgbClr val="1A6BBF"/>
+            </a:solidFill>
+            <a:prstDash val="solid"/>
+          </a:ln>
+        </p:spPr>
+        <p:txBody>
+          <a:bodyPr/>
+          <a:p/>
+        </p:txBody>
+      </p:sp>
+      <p:sp>
+        <p:nvSpPr>
+          <p:cNvPr id="17" name="Text 15"/>
+          <p:cNvSpPr/>
+          <p:nvPr/>
+        </p:nvSpPr>
+        <p:spPr>
+          <a:xfrm>
+            <a:off x="548640" y="2880360"/>
+            <a:ext cx="8046720" cy="320040"/>
+          </a:xfrm>
+          <a:prstGeom prst="rect">
+            <a:avLst/>
+          </a:prstGeom>
+          <a:noFill/>
+          <a:ln/>
+        </p:spPr>
+        <p:txBody>
+          <a:bodyPr wrap="square" rtlCol="0" anchor="ctr"/>
+          <a:lstStyle/>
+          <a:p>
+            <a:pPr indent="0" marL="0">
+              <a:buNone/>
+            </a:pPr>
+            <a:r>
+              <a:rPr lang="en-US" sz="1100" b="1" dirty="0">
+                <a:solidFill>
+                  <a:srgbClr val="4A9EFF"/>
+                </a:solidFill>
+              </a:rPr>
+              <a:t>Saving &amp; privacy</a:t>
+            </a:r>
+            <a:endParaRPr lang="en-US" sz="1100" dirty="0"/>
+          </a:p>
+        </p:txBody>
+      </p:sp>
+      <p:sp>
+        <p:nvSpPr>
+          <p:cNvPr id="18" name="Shape 16"/>
+          <p:cNvSpPr/>
+          <p:nvPr/>
+        </p:nvSpPr>
+        <p:spPr>
+          <a:xfrm>
+            <a:off x="548640" y="3209544"/>
+            <a:ext cx="502920" cy="292608"/>
+          </a:xfrm>
+          <a:prstGeom prst="roundRect">
+            <a:avLst>
+              <a:gd name="adj" fmla="val 18750"/>
+            </a:avLst>
+          </a:prstGeom>
+          <a:solidFill>
+            <a:srgbClr val="1A6BBF"/>
+          </a:solidFill>
+          <a:ln w="12700">
+            <a:solidFill>
+              <a:srgbClr val="1A6BBF"/>
+            </a:solidFill>
+            <a:prstDash val="solid"/>
+          </a:ln>
+        </p:spPr>
+        <p:txBody>
+          <a:bodyPr/>
+          <a:p/>
+        </p:txBody>
+      </p:sp>
+      <p:sp>
+        <p:nvSpPr>
+          <p:cNvPr id="20" name="Text 18"/>
+          <p:cNvSpPr/>
+          <p:nvPr/>
+        </p:nvSpPr>
+        <p:spPr>
+          <a:xfrm>
+            <a:off x="1143000" y="3209544"/>
+            <a:ext cx="2194560" cy="292608"/>
+          </a:xfrm>
+          <a:prstGeom prst="rect">
+            <a:avLst/>
+          </a:prstGeom>
+          <a:noFill/>
+          <a:ln/>
+        </p:spPr>
+        <p:txBody>
+          <a:bodyPr wrap="square" lIns="0" tIns="0" rIns="0" bIns="0" rtlCol="0" anchor="ctr"/>
+          <a:lstStyle/>
+          <a:p>
+            <a:pPr indent="0" marL="0">
+              <a:buNone/>
+            </a:pPr>
+            <a:r>
+              <a:rPr lang="en-US" sz="950" b="1" dirty="0">
+                <a:solidFill>
+                  <a:srgbClr val="10B981"/>
+                </a:solidFill>
+              </a:rPr>
+              <a:t>Bundled:</a:t>
+            </a:r>
+            <a:endParaRPr lang="en-US" sz="950" dirty="0"/>
+          </a:p>
+        </p:txBody>
+      </p:sp>
+      <p:sp>
+        <p:nvSpPr>
+          <p:cNvPr id="21" name="Text 19"/>
+          <p:cNvSpPr/>
+          <p:nvPr/>
+        </p:nvSpPr>
+        <p:spPr>
+          <a:xfrm>
+            <a:off x="3383280" y="3209544"/>
+            <a:ext cx="5212080" cy="292608"/>
+          </a:xfrm>
+          <a:prstGeom prst="rect">
+            <a:avLst/>
+          </a:prstGeom>
+          <a:noFill/>
+          <a:ln/>
+        </p:spPr>
+        <p:txBody>
+          <a:bodyPr wrap="square" lIns="0" tIns="0" rIns="0" bIns="0" rtlCol="0" anchor="ctr"/>
+          <a:lstStyle/>
+          <a:p>
+            <a:pPr indent="0" marL="0">
+              <a:buNone/>
+            </a:pPr>
+            <a:r>
+              <a:rPr lang="en-US" sz="900" dirty="0">
+                <a:solidFill>
+                  <a:srgbClr val="C0C8D8"/>
+                </a:solidFill>
+              </a:rPr>
+              <a:t>holdings, benchmark, risk settings, profile &amp; timeline.</a:t>
+            </a:r>
+            <a:endParaRPr lang="en-US" sz="900" dirty="0"/>
+          </a:p>
+        </p:txBody>
+      </p:sp>
+      <p:sp>
+        <p:nvSpPr>
+          <p:cNvPr id="22" name="Shape 20"/>
+          <p:cNvSpPr/>
+          <p:nvPr/>
+        </p:nvSpPr>
+        <p:spPr>
+          <a:xfrm>
+            <a:off x="548640" y="3547872"/>
+            <a:ext cx="502920" cy="292608"/>
+          </a:xfrm>
+          <a:prstGeom prst="roundRect">
+            <a:avLst>
+              <a:gd name="adj" fmla="val 18750"/>
+            </a:avLst>
+          </a:prstGeom>
+          <a:solidFill>
+            <a:srgbClr val="1A6BBF"/>
+          </a:solidFill>
+          <a:ln w="12700">
+            <a:solidFill>
+              <a:srgbClr val="1A6BBF"/>
+            </a:solidFill>
+            <a:prstDash val="solid"/>
+          </a:ln>
+        </p:spPr>
+        <p:txBody>
+          <a:bodyPr/>
+          <a:p/>
+        </p:txBody>
+      </p:sp>
+      <p:sp>
+        <p:nvSpPr>
+          <p:cNvPr id="24" name="Text 22"/>
+          <p:cNvSpPr/>
+          <p:nvPr/>
+        </p:nvSpPr>
+        <p:spPr>
+          <a:xfrm>
+            <a:off x="1143000" y="3547872"/>
+            <a:ext cx="2194560" cy="292608"/>
+          </a:xfrm>
+          <a:prstGeom prst="rect">
+            <a:avLst/>
+          </a:prstGeom>
+          <a:noFill/>
+          <a:ln/>
+        </p:spPr>
+        <p:txBody>
+          <a:bodyPr wrap="square" lIns="0" tIns="0" rIns="0" bIns="0" rtlCol="0" anchor="ctr"/>
+          <a:lstStyle/>
+          <a:p>
+            <a:pPr indent="0" marL="0">
+              <a:buNone/>
+            </a:pPr>
+            <a:r>
+              <a:rPr lang="en-US" sz="950" b="1" dirty="0">
+                <a:solidFill>
+                  <a:srgbClr val="F59E0B"/>
+                </a:solidFill>
+              </a:rPr>
+              <a:t>Privacy:</a:t>
+            </a:r>
+            <a:endParaRPr lang="en-US" sz="950" dirty="0"/>
+          </a:p>
+        </p:txBody>
+      </p:sp>
+      <p:sp>
+        <p:nvSpPr>
+          <p:cNvPr id="25" name="Text 23"/>
+          <p:cNvSpPr/>
+          <p:nvPr/>
+        </p:nvSpPr>
+        <p:spPr>
+          <a:xfrm>
+            <a:off x="3383280" y="3547872"/>
+            <a:ext cx="5212080" cy="292608"/>
+          </a:xfrm>
+          <a:prstGeom prst="rect">
+            <a:avLst/>
+          </a:prstGeom>
+          <a:noFill/>
+          <a:ln/>
+        </p:spPr>
+        <p:txBody>
+          <a:bodyPr wrap="square" lIns="0" tIns="0" rIns="0" bIns="0" rtlCol="0" anchor="ctr"/>
+          <a:lstStyle/>
+          <a:p>
+            <a:pPr indent="0" marL="0">
+              <a:buNone/>
+            </a:pPr>
+            <a:r>
+              <a:rPr lang="en-US" sz="900" dirty="0">
+                <a:solidFill>
+                  <a:srgbClr val="C0C8D8"/>
+                </a:solidFill>
+              </a:rPr>
+              <a:t>the app only touches files it created.</a:t>
+            </a:r>
+            <a:endParaRPr lang="en-US" sz="900" dirty="0"/>
+          </a:p>
+        </p:txBody>
+      </p:sp>
+      <p:sp>
+        <p:nvSpPr>
+          <p:cNvPr id="26" name="Shape 24"/>
+          <p:cNvSpPr/>
+          <p:nvPr/>
+        </p:nvSpPr>
+        <p:spPr>
+          <a:xfrm>
+            <a:off x="548640" y="3886200"/>
+            <a:ext cx="502920" cy="292608"/>
+          </a:xfrm>
+          <a:prstGeom prst="roundRect">
+            <a:avLst>
+              <a:gd name="adj" fmla="val 18750"/>
+            </a:avLst>
+          </a:prstGeom>
+          <a:solidFill>
+            <a:srgbClr val="1A6BBF"/>
+          </a:solidFill>
+          <a:ln w="12700">
+            <a:solidFill>
+              <a:srgbClr val="1A6BBF"/>
+            </a:solidFill>
+            <a:prstDash val="solid"/>
+          </a:ln>
+        </p:spPr>
+        <p:txBody>
+          <a:bodyPr/>
+          <a:p/>
+        </p:txBody>
+      </p:sp>
+      <p:sp>
+        <p:nvSpPr>
+          <p:cNvPr id="28" name="Text 26"/>
+          <p:cNvSpPr/>
+          <p:nvPr/>
+        </p:nvSpPr>
+        <p:spPr>
+          <a:xfrm>
+            <a:off x="1143000" y="3886200"/>
+            <a:ext cx="2194560" cy="292608"/>
+          </a:xfrm>
+          <a:prstGeom prst="rect">
+            <a:avLst/>
+          </a:prstGeom>
+          <a:noFill/>
+          <a:ln/>
+        </p:spPr>
+        <p:txBody>
+          <a:bodyPr wrap="square" lIns="0" tIns="0" rIns="0" bIns="0" rtlCol="0" anchor="ctr"/>
+          <a:lstStyle/>
+          <a:p>
+            <a:pPr indent="0" marL="0">
+              <a:buNone/>
+            </a:pPr>
+            <a:r>
+              <a:rPr lang="en-US" sz="950" b="1" dirty="0">
+                <a:solidFill>
+                  <a:srgbClr val="E76F51"/>
+                </a:solidFill>
+              </a:rPr>
+              <a:t>Tip:</a:t>
+            </a:r>
+            <a:endParaRPr lang="en-US" sz="950" dirty="0"/>
+          </a:p>
+        </p:txBody>
+      </p:sp>
+      <p:sp>
+        <p:nvSpPr>
+          <p:cNvPr id="29" name="Text 27"/>
+          <p:cNvSpPr/>
+          <p:nvPr/>
+        </p:nvSpPr>
+        <p:spPr>
+          <a:xfrm>
+            <a:off x="3383280" y="3886200"/>
+            <a:ext cx="5212080" cy="292608"/>
+          </a:xfrm>
+          <a:prstGeom prst="rect">
+            <a:avLst/>
+          </a:prstGeom>
+          <a:noFill/>
+          <a:ln/>
+        </p:spPr>
+        <p:txBody>
+          <a:bodyPr wrap="square" lIns="0" tIns="0" rIns="0" bIns="0" rtlCol="0" anchor="ctr"/>
+          <a:lstStyle/>
+          <a:p>
+            <a:pPr indent="0" marL="0">
+              <a:buNone/>
+            </a:pPr>
+            <a:r>
+              <a:rPr lang="en-US" sz="900" dirty="0">
+                <a:solidFill>
+                  <a:srgbClr val="C0C8D8"/>
+                </a:solidFill>
+              </a:rPr>
+              <a:t>sign in first, then load your saved portfolio.</a:t>
+            </a:r>
+            <a:endParaRPr lang="en-US" sz="900" dirty="0"/>
+          </a:p>
+        </p:txBody>
+      </p:sp>
+      <p:sp>
+        <p:nvSpPr>
+          <p:cNvPr id="30" name="Text 28"/>
+          <p:cNvSpPr/>
+          <p:nvPr/>
+        </p:nvSpPr>
+        <p:spPr>
+          <a:xfrm>
+            <a:off x="8046720" y="4754880"/>
+            <a:ext cx="914400" cy="274320"/>
+          </a:xfrm>
+          <a:prstGeom prst="rect">
+            <a:avLst/>
+          </a:prstGeom>
+          <a:noFill/>
+          <a:ln/>
+        </p:spPr>
+        <p:txBody>
+          <a:bodyPr wrap="square" rtlCol="0" anchor="ctr"/>
+          <a:lstStyle/>
+          <a:p>
+            <a:pPr algn="r" indent="0" marL="0">
+              <a:buNone/>
+            </a:pPr>
+            <a:r>
+              <a:rPr lang="en-US" sz="900" dirty="0">
+                <a:solidFill>
+                  <a:srgbClr val="556A8A"/>
+                </a:solidFill>
+              </a:rPr>
+              <a:t>20 / 22</a:t>
+            </a:r>
+            <a:endParaRPr lang="en-US" sz="900" dirty="0"/>
+          </a:p>
+        </p:txBody>
+      </p:sp>
+      <p:sp>
+        <p:nvSpPr>
+          <p:cNvPr id="31" name="Text 29"/>
+          <p:cNvSpPr/>
+          <p:nvPr/>
+        </p:nvSpPr>
+        <p:spPr>
+          <a:xfrm>
+            <a:off x="365760" y="4754880"/>
+            <a:ext cx="6400800" cy="274320"/>
+          </a:xfrm>
+          <a:prstGeom prst="rect">
+            <a:avLst/>
+          </a:prstGeom>
+          <a:noFill/>
+          <a:ln/>
+        </p:spPr>
+        <p:txBody>
+          <a:bodyPr wrap="square" rtlCol="0" anchor="ctr"/>
+          <a:lstStyle/>
+          <a:p>
+            <a:pPr algn="l" indent="0" marL="0">
+              <a:buNone/>
+            </a:pPr>
+            <a:r>
+              <a:rPr lang="en-US" sz="900" dirty="0">
+                <a:solidFill>
+                  <a:srgbClr val="556A8A"/>
+                </a:solidFill>
+              </a:rPr>
+              <a:t>Beyond Mean-Variance Portfolio Optimiser — User Guide</a:t>
+            </a:r>
+            <a:endParaRPr lang="en-US" sz="900" dirty="0"/>
+          </a:p>
+        </p:txBody>
+      </p:sp>
+      <p:pic>
+        <p:nvPicPr>
+          <p:cNvPr id="32" name="Picture 31" descr="grid_4a9eff_0.png"/>
+          <p:cNvPicPr>
+            <a:picLocks noChangeAspect="1"/>
+          </p:cNvPicPr>
+          <p:nvPr/>
+        </p:nvPicPr>
+        <p:blipFill>
+          <a:blip r:embed="rId2"/>
+          <a:stretch>
+            <a:fillRect/>
+          </a:stretch>
+        </p:blipFill>
+        <p:spPr>
+          <a:xfrm>
+            <a:off x="1577340" y="1097280"/>
+            <a:ext cx="228600" cy="228600"/>
+          </a:xfrm>
+          <a:prstGeom prst="rect">
+            <a:avLst/>
+          </a:prstGeom>
+        </p:spPr>
+      </p:pic>
+      <p:pic>
+        <p:nvPicPr>
+          <p:cNvPr id="33" name="Picture 32" descr="layers_f5b942_0.png"/>
           <p:cNvPicPr>
             <a:picLocks noChangeAspect="1"/>
           </p:cNvPicPr>
@@ -8674,14 +10289,1417 @@
         </p:blipFill>
         <p:spPr>
           <a:xfrm>
-            <a:off x="1399032" y="1457185"/>
-            <a:ext cx="6355080" cy="2937789"/>
+            <a:off x="4411980" y="1097280"/>
+            <a:ext cx="228600" cy="228600"/>
           </a:xfrm>
           <a:prstGeom prst="rect">
             <a:avLst/>
           </a:prstGeom>
         </p:spPr>
       </p:pic>
+      <p:pic>
+        <p:nvPicPr>
+          <p:cNvPr id="34" name="Picture 33" descr="activity_26a641_0.png"/>
+          <p:cNvPicPr>
+            <a:picLocks noChangeAspect="1"/>
+          </p:cNvPicPr>
+          <p:nvPr/>
+        </p:nvPicPr>
+        <p:blipFill>
+          <a:blip r:embed="rId4"/>
+          <a:stretch>
+            <a:fillRect/>
+          </a:stretch>
+        </p:blipFill>
+        <p:spPr>
+          <a:xfrm>
+            <a:off x="7246620" y="1097280"/>
+            <a:ext cx="228600" cy="228600"/>
+          </a:xfrm>
+          <a:prstGeom prst="rect">
+            <a:avLst/>
+          </a:prstGeom>
+        </p:spPr>
+      </p:pic>
+      <p:pic>
+        <p:nvPicPr>
+          <p:cNvPr id="35" name="Picture 34" descr="info_ffffff_0.png"/>
+          <p:cNvPicPr>
+            <a:picLocks noChangeAspect="1"/>
+          </p:cNvPicPr>
+          <p:nvPr/>
+        </p:nvPicPr>
+        <p:blipFill>
+          <a:blip r:embed="rId5"/>
+          <a:stretch>
+            <a:fillRect/>
+          </a:stretch>
+        </p:blipFill>
+        <p:spPr>
+          <a:xfrm>
+            <a:off x="726948" y="3282696"/>
+            <a:ext cx="146304" cy="146304"/>
+          </a:xfrm>
+          <a:prstGeom prst="rect">
+            <a:avLst/>
+          </a:prstGeom>
+        </p:spPr>
+      </p:pic>
+      <p:pic>
+        <p:nvPicPr>
+          <p:cNvPr id="36" name="Picture 35" descr="book_ffffff_0.png"/>
+          <p:cNvPicPr>
+            <a:picLocks noChangeAspect="1"/>
+          </p:cNvPicPr>
+          <p:nvPr/>
+        </p:nvPicPr>
+        <p:blipFill>
+          <a:blip r:embed="rId6"/>
+          <a:stretch>
+            <a:fillRect/>
+          </a:stretch>
+        </p:blipFill>
+        <p:spPr>
+          <a:xfrm>
+            <a:off x="726948" y="3621024"/>
+            <a:ext cx="146304" cy="146304"/>
+          </a:xfrm>
+          <a:prstGeom prst="rect">
+            <a:avLst/>
+          </a:prstGeom>
+        </p:spPr>
+      </p:pic>
+      <p:pic>
+        <p:nvPicPr>
+          <p:cNvPr id="37" name="Picture 36" descr="bulb_ffffff_0.png"/>
+          <p:cNvPicPr>
+            <a:picLocks noChangeAspect="1"/>
+          </p:cNvPicPr>
+          <p:nvPr/>
+        </p:nvPicPr>
+        <p:blipFill>
+          <a:blip r:embed="rId7"/>
+          <a:stretch>
+            <a:fillRect/>
+          </a:stretch>
+        </p:blipFill>
+        <p:spPr>
+          <a:xfrm>
+            <a:off x="726948" y="3959352"/>
+            <a:ext cx="146304" cy="146304"/>
+          </a:xfrm>
+          <a:prstGeom prst="rect">
+            <a:avLst/>
+          </a:prstGeom>
+        </p:spPr>
+      </p:pic>
+    </p:spTree>
+  </p:cSld>
+  <p:clrMapOvr>
+    <a:masterClrMapping/>
+  </p:clrMapOvr>
+</p:sld>
+</file>
+
+<file path=ppt/slides/slide21.xml><?xml version="1.0" encoding="utf-8"?>
+<p:sld xmlns:a="http://schemas.openxmlformats.org/drawingml/2006/main" xmlns:r="http://schemas.openxmlformats.org/officeDocument/2006/relationships" xmlns:p="http://schemas.openxmlformats.org/presentationml/2006/main">
+  <p:cSld name="Slide 11">
+    <p:bg>
+      <p:bgPr>
+        <a:solidFill>
+          <a:srgbClr val="020C1B"/>
+        </a:solidFill>
+      </p:bgPr>
+    </p:bg>
+    <p:spTree>
+      <p:nvGrpSpPr>
+        <p:cNvPr id="1" name=""/>
+        <p:cNvGrpSpPr/>
+        <p:nvPr/>
+      </p:nvGrpSpPr>
+      <p:grpSpPr>
+        <a:xfrm>
+          <a:off x="0" y="0"/>
+          <a:ext cx="0" cy="0"/>
+          <a:chOff x="0" y="0"/>
+          <a:chExt cx="0" cy="0"/>
+        </a:xfrm>
+      </p:grpSpPr>
+      <p:sp>
+        <p:nvSpPr>
+          <p:cNvPr id="2" name="Shape 0"/>
+          <p:cNvSpPr/>
+          <p:nvPr/>
+        </p:nvSpPr>
+        <p:spPr>
+          <a:xfrm>
+            <a:off x="0" y="0"/>
+            <a:ext cx="9144000" cy="54864"/>
+          </a:xfrm>
+          <a:prstGeom prst="rect">
+            <a:avLst/>
+          </a:prstGeom>
+          <a:solidFill>
+            <a:srgbClr val="1A6BBF"/>
+          </a:solidFill>
+          <a:ln w="12700">
+            <a:solidFill>
+              <a:srgbClr val="1A6BBF"/>
+            </a:solidFill>
+            <a:prstDash val="solid"/>
+          </a:ln>
+        </p:spPr>
+        <p:txBody>
+          <a:bodyPr/>
+          <a:p/>
+        </p:txBody>
+      </p:sp>
+      <p:sp>
+        <p:nvSpPr>
+          <p:cNvPr id="3" name="Text 1"/>
+          <p:cNvSpPr/>
+          <p:nvPr/>
+        </p:nvSpPr>
+        <p:spPr>
+          <a:xfrm>
+            <a:off x="365760" y="164592"/>
+            <a:ext cx="8229600" cy="457200"/>
+          </a:xfrm>
+          <a:prstGeom prst="rect">
+            <a:avLst/>
+          </a:prstGeom>
+          <a:noFill/>
+          <a:ln/>
+        </p:spPr>
+        <p:txBody>
+          <a:bodyPr wrap="square" rtlCol="0" anchor="ctr"/>
+          <a:lstStyle/>
+          <a:p>
+            <a:pPr indent="0" marL="0">
+              <a:buNone/>
+            </a:pPr>
+            <a:r>
+              <a:rPr lang="en-US" sz="2200" b="1" dirty="0">
+                <a:solidFill>
+                  <a:srgbClr val="FFFFFF"/>
+                </a:solidFill>
+              </a:rPr>
+              <a:t>About &amp; Glossary Tabs</a:t>
+            </a:r>
+            <a:endParaRPr lang="en-US" sz="2200" dirty="0"/>
+          </a:p>
+        </p:txBody>
+      </p:sp>
+      <p:sp>
+        <p:nvSpPr>
+          <p:cNvPr id="4" name="Shape 2"/>
+          <p:cNvSpPr/>
+          <p:nvPr/>
+        </p:nvSpPr>
+        <p:spPr>
+          <a:xfrm>
+            <a:off x="365760" y="749808"/>
+            <a:ext cx="4023360" cy="3474720"/>
+          </a:xfrm>
+          <a:prstGeom prst="rect">
+            <a:avLst/>
+          </a:prstGeom>
+          <a:solidFill>
+            <a:srgbClr val="0D1A2E"/>
+          </a:solidFill>
+          <a:ln w="12700">
+            <a:solidFill>
+              <a:srgbClr val="1A6BBF"/>
+            </a:solidFill>
+            <a:prstDash val="solid"/>
+          </a:ln>
+        </p:spPr>
+        <p:txBody>
+          <a:bodyPr/>
+          <a:p/>
+        </p:txBody>
+      </p:sp>
+      <p:sp>
+        <p:nvSpPr>
+          <p:cNvPr id="5" name="Text 3"/>
+          <p:cNvSpPr/>
+          <p:nvPr/>
+        </p:nvSpPr>
+        <p:spPr>
+          <a:xfrm>
+            <a:off x="804672" y="822960"/>
+            <a:ext cx="3401568" cy="320040"/>
+          </a:xfrm>
+          <a:prstGeom prst="rect">
+            <a:avLst/>
+          </a:prstGeom>
+          <a:noFill/>
+          <a:ln/>
+        </p:spPr>
+        <p:txBody>
+          <a:bodyPr wrap="square" lIns="0" tIns="0" rIns="0" bIns="0" rtlCol="0" anchor="ctr"/>
+          <a:lstStyle/>
+          <a:p>
+            <a:pPr indent="0" marL="0">
+              <a:buNone/>
+            </a:pPr>
+            <a:r>
+              <a:rPr lang="en-US" sz="1200" b="1" dirty="0">
+                <a:solidFill>
+                  <a:srgbClr val="4A9EFF"/>
+                </a:solidFill>
+              </a:rPr>
+              <a:t>About Tab</a:t>
+            </a:r>
+            <a:endParaRPr lang="en-US" sz="1200" dirty="0"/>
+          </a:p>
+        </p:txBody>
+      </p:sp>
+      <p:sp>
+        <p:nvSpPr>
+          <p:cNvPr id="8" name="Text 6"/>
+          <p:cNvSpPr/>
+          <p:nvPr/>
+        </p:nvSpPr>
+        <p:spPr>
+          <a:xfrm>
+            <a:off x="548640" y="2880360"/>
+            <a:ext cx="3657600" cy="256032"/>
+          </a:xfrm>
+          <a:prstGeom prst="rect">
+            <a:avLst/>
+          </a:prstGeom>
+          <a:noFill/>
+          <a:ln/>
+        </p:spPr>
+        <p:txBody>
+          <a:bodyPr wrap="square" rtlCol="0" anchor="ctr"/>
+          <a:lstStyle/>
+          <a:p>
+            <a:pPr indent="0" marL="0">
+              <a:buNone/>
+            </a:pPr>
+            <a:r>
+              <a:rPr lang="en-US" sz="950" dirty="0">
+                <a:solidFill>
+                  <a:srgbClr val="4A9EFF"/>
+                </a:solidFill>
+              </a:rPr>
+              <a:t xml:space="preserve">▸  </a:t>
+            </a:r>
+            <a:pPr indent="0" marL="0">
+              <a:buNone/>
+            </a:pPr>
+            <a:r>
+              <a:rPr lang="en-US" sz="950" dirty="0">
+                <a:solidFill>
+                  <a:srgbClr val="C0C8D8"/>
+                </a:solidFill>
+              </a:rPr>
+              <a:t>Author background &amp; contact</a:t>
+            </a:r>
+            <a:endParaRPr lang="en-US" sz="950" dirty="0"/>
+          </a:p>
+        </p:txBody>
+      </p:sp>
+      <p:sp>
+        <p:nvSpPr>
+          <p:cNvPr id="9" name="Text 7"/>
+          <p:cNvSpPr/>
+          <p:nvPr/>
+        </p:nvSpPr>
+        <p:spPr>
+          <a:xfrm>
+            <a:off x="548640" y="3182112"/>
+            <a:ext cx="3657600" cy="256032"/>
+          </a:xfrm>
+          <a:prstGeom prst="rect">
+            <a:avLst/>
+          </a:prstGeom>
+          <a:noFill/>
+          <a:ln/>
+        </p:spPr>
+        <p:txBody>
+          <a:bodyPr wrap="square" rtlCol="0" anchor="ctr"/>
+          <a:lstStyle/>
+          <a:p>
+            <a:pPr indent="0" marL="0">
+              <a:buNone/>
+            </a:pPr>
+            <a:r>
+              <a:rPr lang="en-US" sz="950" dirty="0">
+                <a:solidFill>
+                  <a:srgbClr val="4A9EFF"/>
+                </a:solidFill>
+              </a:rPr>
+              <a:t xml:space="preserve">▸  </a:t>
+            </a:r>
+            <a:pPr indent="0" marL="0">
+              <a:buNone/>
+            </a:pPr>
+            <a:r>
+              <a:rPr lang="en-US" sz="950" dirty="0">
+                <a:solidFill>
+                  <a:srgbClr val="C0C8D8"/>
+                </a:solidFill>
+              </a:rPr>
+              <a:t>App description &amp; algorithm</a:t>
+            </a:r>
+            <a:endParaRPr lang="en-US" sz="950" dirty="0"/>
+          </a:p>
+        </p:txBody>
+      </p:sp>
+      <p:sp>
+        <p:nvSpPr>
+          <p:cNvPr id="10" name="Text 8"/>
+          <p:cNvSpPr/>
+          <p:nvPr/>
+        </p:nvSpPr>
+        <p:spPr>
+          <a:xfrm>
+            <a:off x="548640" y="3483864"/>
+            <a:ext cx="3657600" cy="256032"/>
+          </a:xfrm>
+          <a:prstGeom prst="rect">
+            <a:avLst/>
+          </a:prstGeom>
+          <a:noFill/>
+          <a:ln/>
+        </p:spPr>
+        <p:txBody>
+          <a:bodyPr wrap="square" rtlCol="0" anchor="ctr"/>
+          <a:lstStyle/>
+          <a:p>
+            <a:pPr indent="0" marL="0">
+              <a:buNone/>
+            </a:pPr>
+            <a:r>
+              <a:rPr lang="en-US" sz="950" dirty="0">
+                <a:solidFill>
+                  <a:srgbClr val="4A9EFF"/>
+                </a:solidFill>
+              </a:rPr>
+              <a:t xml:space="preserve">▸  </a:t>
+            </a:r>
+            <a:pPr indent="0" marL="0">
+              <a:buNone/>
+            </a:pPr>
+            <a:r>
+              <a:rPr lang="en-US" sz="950" dirty="0">
+                <a:solidFill>
+                  <a:srgbClr val="C0C8D8"/>
+                </a:solidFill>
+              </a:rPr>
+              <a:t>Academic references</a:t>
+            </a:r>
+            <a:endParaRPr lang="en-US" sz="950" dirty="0"/>
+          </a:p>
+        </p:txBody>
+      </p:sp>
+      <p:sp>
+        <p:nvSpPr>
+          <p:cNvPr id="11" name="Text 9"/>
+          <p:cNvSpPr/>
+          <p:nvPr/>
+        </p:nvSpPr>
+        <p:spPr>
+          <a:xfrm>
+            <a:off x="548640" y="3785616"/>
+            <a:ext cx="3657600" cy="256032"/>
+          </a:xfrm>
+          <a:prstGeom prst="rect">
+            <a:avLst/>
+          </a:prstGeom>
+          <a:noFill/>
+          <a:ln/>
+        </p:spPr>
+        <p:txBody>
+          <a:bodyPr wrap="square" rtlCol="0" anchor="ctr"/>
+          <a:lstStyle/>
+          <a:p>
+            <a:pPr indent="0" marL="0">
+              <a:buNone/>
+            </a:pPr>
+            <a:r>
+              <a:rPr lang="en-US" sz="950" dirty="0">
+                <a:solidFill>
+                  <a:srgbClr val="4A9EFF"/>
+                </a:solidFill>
+              </a:rPr>
+              <a:t xml:space="preserve">▸  </a:t>
+            </a:r>
+            <a:pPr indent="0" marL="0">
+              <a:buNone/>
+            </a:pPr>
+            <a:r>
+              <a:rPr lang="en-US" sz="950" dirty="0">
+                <a:solidFill>
+                  <a:srgbClr val="C0C8D8"/>
+                </a:solidFill>
+              </a:rPr>
+              <a:t>Legal disclaimer</a:t>
+            </a:r>
+            <a:endParaRPr lang="en-US" sz="950" dirty="0"/>
+          </a:p>
+        </p:txBody>
+      </p:sp>
+      <p:sp>
+        <p:nvSpPr>
+          <p:cNvPr id="12" name="Shape 10"/>
+          <p:cNvSpPr/>
+          <p:nvPr/>
+        </p:nvSpPr>
+        <p:spPr>
+          <a:xfrm>
+            <a:off x="4754880" y="749808"/>
+            <a:ext cx="4023360" cy="3474720"/>
+          </a:xfrm>
+          <a:prstGeom prst="rect">
+            <a:avLst/>
+          </a:prstGeom>
+          <a:solidFill>
+            <a:srgbClr val="0D1A2E"/>
+          </a:solidFill>
+          <a:ln w="12700">
+            <a:solidFill>
+              <a:srgbClr val="1A6BBF"/>
+            </a:solidFill>
+            <a:prstDash val="solid"/>
+          </a:ln>
+        </p:spPr>
+        <p:txBody>
+          <a:bodyPr/>
+          <a:p/>
+        </p:txBody>
+      </p:sp>
+      <p:sp>
+        <p:nvSpPr>
+          <p:cNvPr id="13" name="Text 11"/>
+          <p:cNvSpPr/>
+          <p:nvPr/>
+        </p:nvSpPr>
+        <p:spPr>
+          <a:xfrm>
+            <a:off x="5193792" y="822960"/>
+            <a:ext cx="3401568" cy="320040"/>
+          </a:xfrm>
+          <a:prstGeom prst="rect">
+            <a:avLst/>
+          </a:prstGeom>
+          <a:noFill/>
+          <a:ln/>
+        </p:spPr>
+        <p:txBody>
+          <a:bodyPr wrap="square" lIns="0" tIns="0" rIns="0" bIns="0" rtlCol="0" anchor="ctr"/>
+          <a:lstStyle/>
+          <a:p>
+            <a:pPr indent="0" marL="0">
+              <a:buNone/>
+            </a:pPr>
+            <a:r>
+              <a:rPr lang="en-US" sz="1200" b="1" dirty="0">
+                <a:solidFill>
+                  <a:srgbClr val="4A9EFF"/>
+                </a:solidFill>
+              </a:rPr>
+              <a:t>Glossary Tab</a:t>
+            </a:r>
+            <a:endParaRPr lang="en-US" sz="1200" dirty="0"/>
+          </a:p>
+        </p:txBody>
+      </p:sp>
+      <p:sp>
+        <p:nvSpPr>
+          <p:cNvPr id="16" name="Text 14"/>
+          <p:cNvSpPr/>
+          <p:nvPr/>
+        </p:nvSpPr>
+        <p:spPr>
+          <a:xfrm>
+            <a:off x="4937760" y="2880360"/>
+            <a:ext cx="3657600" cy="256032"/>
+          </a:xfrm>
+          <a:prstGeom prst="rect">
+            <a:avLst/>
+          </a:prstGeom>
+          <a:noFill/>
+          <a:ln/>
+        </p:spPr>
+        <p:txBody>
+          <a:bodyPr wrap="square" rtlCol="0" anchor="ctr"/>
+          <a:lstStyle/>
+          <a:p>
+            <a:pPr indent="0" marL="0">
+              <a:buNone/>
+            </a:pPr>
+            <a:r>
+              <a:rPr lang="en-US" sz="950" dirty="0">
+                <a:solidFill>
+                  <a:srgbClr val="4A9EFF"/>
+                </a:solidFill>
+              </a:rPr>
+              <a:t xml:space="preserve">▸  </a:t>
+            </a:r>
+            <a:pPr indent="0" marL="0">
+              <a:buNone/>
+            </a:pPr>
+            <a:r>
+              <a:rPr lang="en-US" sz="950" dirty="0">
+                <a:solidFill>
+                  <a:srgbClr val="C0C8D8"/>
+                </a:solidFill>
+              </a:rPr>
+              <a:t>Click any term for AI explanation</a:t>
+            </a:r>
+            <a:endParaRPr lang="en-US" sz="950" dirty="0"/>
+          </a:p>
+        </p:txBody>
+      </p:sp>
+      <p:sp>
+        <p:nvSpPr>
+          <p:cNvPr id="17" name="Text 15"/>
+          <p:cNvSpPr/>
+          <p:nvPr/>
+        </p:nvSpPr>
+        <p:spPr>
+          <a:xfrm>
+            <a:off x="4937760" y="3182112"/>
+            <a:ext cx="3657600" cy="256032"/>
+          </a:xfrm>
+          <a:prstGeom prst="rect">
+            <a:avLst/>
+          </a:prstGeom>
+          <a:noFill/>
+          <a:ln/>
+        </p:spPr>
+        <p:txBody>
+          <a:bodyPr wrap="square" rtlCol="0" anchor="ctr"/>
+          <a:lstStyle/>
+          <a:p>
+            <a:pPr indent="0" marL="0">
+              <a:buNone/>
+            </a:pPr>
+            <a:r>
+              <a:rPr lang="en-US" sz="950" dirty="0">
+                <a:solidFill>
+                  <a:srgbClr val="4A9EFF"/>
+                </a:solidFill>
+              </a:rPr>
+              <a:t xml:space="preserve">▸  </a:t>
+            </a:r>
+            <a:pPr indent="0" marL="0">
+              <a:buNone/>
+            </a:pPr>
+            <a:r>
+              <a:rPr lang="en-US" sz="950" dirty="0">
+                <a:solidFill>
+                  <a:srgbClr val="C0C8D8"/>
+                </a:solidFill>
+              </a:rPr>
+              <a:t>Covers derivatives, risk, portfolio theory</a:t>
+            </a:r>
+            <a:endParaRPr lang="en-US" sz="950" dirty="0"/>
+          </a:p>
+        </p:txBody>
+      </p:sp>
+      <p:sp>
+        <p:nvSpPr>
+          <p:cNvPr id="18" name="Text 16"/>
+          <p:cNvSpPr/>
+          <p:nvPr/>
+        </p:nvSpPr>
+        <p:spPr>
+          <a:xfrm>
+            <a:off x="4937760" y="3483864"/>
+            <a:ext cx="3657600" cy="256032"/>
+          </a:xfrm>
+          <a:prstGeom prst="rect">
+            <a:avLst/>
+          </a:prstGeom>
+          <a:noFill/>
+          <a:ln/>
+        </p:spPr>
+        <p:txBody>
+          <a:bodyPr wrap="square" rtlCol="0" anchor="ctr"/>
+          <a:lstStyle/>
+          <a:p>
+            <a:pPr indent="0" marL="0">
+              <a:buNone/>
+            </a:pPr>
+            <a:r>
+              <a:rPr lang="en-US" sz="950" dirty="0">
+                <a:solidFill>
+                  <a:srgbClr val="4A9EFF"/>
+                </a:solidFill>
+              </a:rPr>
+              <a:t xml:space="preserve">▸  </a:t>
+            </a:r>
+            <a:pPr indent="0" marL="0">
+              <a:buNone/>
+            </a:pPr>
+            <a:r>
+              <a:rPr lang="en-US" sz="950" dirty="0">
+                <a:solidFill>
+                  <a:srgbClr val="C0C8D8"/>
+                </a:solidFill>
+              </a:rPr>
+              <a:t>Ask your own questions</a:t>
+            </a:r>
+            <a:endParaRPr lang="en-US" sz="950" dirty="0"/>
+          </a:p>
+        </p:txBody>
+      </p:sp>
+      <p:sp>
+        <p:nvSpPr>
+          <p:cNvPr id="19" name="Text 17"/>
+          <p:cNvSpPr/>
+          <p:nvPr/>
+        </p:nvSpPr>
+        <p:spPr>
+          <a:xfrm>
+            <a:off x="4937760" y="3785616"/>
+            <a:ext cx="3657600" cy="256032"/>
+          </a:xfrm>
+          <a:prstGeom prst="rect">
+            <a:avLst/>
+          </a:prstGeom>
+          <a:noFill/>
+          <a:ln/>
+        </p:spPr>
+        <p:txBody>
+          <a:bodyPr wrap="square" rtlCol="0" anchor="ctr"/>
+          <a:lstStyle/>
+          <a:p>
+            <a:pPr indent="0" marL="0">
+              <a:buNone/>
+            </a:pPr>
+            <a:r>
+              <a:rPr lang="en-US" sz="950" dirty="0">
+                <a:solidFill>
+                  <a:srgbClr val="4A9EFF"/>
+                </a:solidFill>
+              </a:rPr>
+              <a:t xml:space="preserve">▸  </a:t>
+            </a:r>
+            <a:pPr indent="0" marL="0">
+              <a:buNone/>
+            </a:pPr>
+            <a:r>
+              <a:rPr lang="en-US" sz="950" dirty="0">
+                <a:solidFill>
+                  <a:srgbClr val="C0C8D8"/>
+                </a:solidFill>
+              </a:rPr>
+              <a:t>Tailored to behavioural portfolio context</a:t>
+            </a:r>
+            <a:endParaRPr lang="en-US" sz="950" dirty="0"/>
+          </a:p>
+        </p:txBody>
+      </p:sp>
+      <p:sp>
+        <p:nvSpPr>
+          <p:cNvPr id="20" name="Text 18"/>
+          <p:cNvSpPr/>
+          <p:nvPr/>
+        </p:nvSpPr>
+        <p:spPr>
+          <a:xfrm>
+            <a:off x="8046720" y="4754880"/>
+            <a:ext cx="914400" cy="274320"/>
+          </a:xfrm>
+          <a:prstGeom prst="rect">
+            <a:avLst/>
+          </a:prstGeom>
+          <a:noFill/>
+          <a:ln/>
+        </p:spPr>
+        <p:txBody>
+          <a:bodyPr wrap="square" rtlCol="0" anchor="ctr"/>
+          <a:lstStyle/>
+          <a:p>
+            <a:pPr algn="r" indent="0" marL="0">
+              <a:buNone/>
+            </a:pPr>
+            <a:r>
+              <a:rPr lang="en-US" sz="900" dirty="0">
+                <a:solidFill>
+                  <a:srgbClr val="556A8A"/>
+                </a:solidFill>
+              </a:rPr>
+              <a:t>21 / 22</a:t>
+            </a:r>
+            <a:endParaRPr lang="en-US" sz="900" dirty="0"/>
+          </a:p>
+        </p:txBody>
+      </p:sp>
+      <p:sp>
+        <p:nvSpPr>
+          <p:cNvPr id="21" name="Text 19"/>
+          <p:cNvSpPr/>
+          <p:nvPr/>
+        </p:nvSpPr>
+        <p:spPr>
+          <a:xfrm>
+            <a:off x="365760" y="4754880"/>
+            <a:ext cx="6400800" cy="274320"/>
+          </a:xfrm>
+          <a:prstGeom prst="rect">
+            <a:avLst/>
+          </a:prstGeom>
+          <a:noFill/>
+          <a:ln/>
+        </p:spPr>
+        <p:txBody>
+          <a:bodyPr wrap="square" rtlCol="0" anchor="ctr"/>
+          <a:lstStyle/>
+          <a:p>
+            <a:pPr algn="l" indent="0" marL="0">
+              <a:buNone/>
+            </a:pPr>
+            <a:r>
+              <a:rPr lang="en-US" sz="900" dirty="0">
+                <a:solidFill>
+                  <a:srgbClr val="556A8A"/>
+                </a:solidFill>
+              </a:rPr>
+              <a:t>Beyond Mean-Variance Portfolio Optimiser — User Guide</a:t>
+            </a:r>
+            <a:endParaRPr lang="en-US" sz="900" dirty="0"/>
+          </a:p>
+        </p:txBody>
+      </p:sp>
+      <p:pic>
+        <p:nvPicPr>
+          <p:cNvPr id="24" name="Picture 23" descr="about.png"/>
+          <p:cNvPicPr>
+            <a:picLocks noChangeAspect="1"/>
+          </p:cNvPicPr>
+          <p:nvPr/>
+        </p:nvPicPr>
+        <p:blipFill>
+          <a:blip r:embed="rId5"/>
+          <a:stretch>
+            <a:fillRect/>
+          </a:stretch>
+        </p:blipFill>
+        <p:spPr>
+          <a:xfrm>
+            <a:off x="774945" y="1402439"/>
+            <a:ext cx="3204989" cy="1218482"/>
+          </a:xfrm>
+          <a:prstGeom prst="rect">
+            <a:avLst/>
+          </a:prstGeom>
+        </p:spPr>
+      </p:pic>
+      <p:pic>
+        <p:nvPicPr>
+          <p:cNvPr id="25" name="Picture 24" descr="glossary.png"/>
+          <p:cNvPicPr>
+            <a:picLocks noChangeAspect="1"/>
+          </p:cNvPicPr>
+          <p:nvPr/>
+        </p:nvPicPr>
+        <p:blipFill>
+          <a:blip r:embed="rId6"/>
+          <a:stretch>
+            <a:fillRect/>
+          </a:stretch>
+        </p:blipFill>
+        <p:spPr>
+          <a:xfrm>
+            <a:off x="4981315" y="1247534"/>
+            <a:ext cx="3570489" cy="1528292"/>
+          </a:xfrm>
+          <a:prstGeom prst="rect">
+            <a:avLst/>
+          </a:prstGeom>
+        </p:spPr>
+      </p:pic>
+      <p:pic>
+        <p:nvPicPr>
+          <p:cNvPr id="26" name="Picture 25" descr="info_4a9eff_0.png"/>
+          <p:cNvPicPr>
+            <a:picLocks noChangeAspect="1"/>
+          </p:cNvPicPr>
+          <p:nvPr/>
+        </p:nvPicPr>
+        <p:blipFill>
+          <a:blip r:embed="rId7"/>
+          <a:stretch>
+            <a:fillRect/>
+          </a:stretch>
+        </p:blipFill>
+        <p:spPr>
+          <a:xfrm>
+            <a:off x="548640" y="850392"/>
+            <a:ext cx="182880" cy="182880"/>
+          </a:xfrm>
+          <a:prstGeom prst="rect">
+            <a:avLst/>
+          </a:prstGeom>
+        </p:spPr>
+      </p:pic>
+      <p:pic>
+        <p:nvPicPr>
+          <p:cNvPr id="27" name="Picture 26" descr="book_4a9eff_0.png"/>
+          <p:cNvPicPr>
+            <a:picLocks noChangeAspect="1"/>
+          </p:cNvPicPr>
+          <p:nvPr/>
+        </p:nvPicPr>
+        <p:blipFill>
+          <a:blip r:embed="rId8"/>
+          <a:stretch>
+            <a:fillRect/>
+          </a:stretch>
+        </p:blipFill>
+        <p:spPr>
+          <a:xfrm>
+            <a:off x="4937760" y="850392"/>
+            <a:ext cx="182880" cy="182880"/>
+          </a:xfrm>
+          <a:prstGeom prst="rect">
+            <a:avLst/>
+          </a:prstGeom>
+        </p:spPr>
+      </p:pic>
+    </p:spTree>
+  </p:cSld>
+  <p:clrMapOvr>
+    <a:masterClrMapping/>
+  </p:clrMapOvr>
+</p:sld>
+</file>
+
+<file path=ppt/slides/slide22.xml><?xml version="1.0" encoding="utf-8"?>
+<p:sld xmlns:a="http://schemas.openxmlformats.org/drawingml/2006/main" xmlns:r="http://schemas.openxmlformats.org/officeDocument/2006/relationships" xmlns:p="http://schemas.openxmlformats.org/presentationml/2006/main">
+  <p:cSld name="Slide 12">
+    <p:bg>
+      <p:bgPr>
+        <a:solidFill>
+          <a:srgbClr val="020C1B"/>
+        </a:solidFill>
+      </p:bgPr>
+    </p:bg>
+    <p:spTree>
+      <p:nvGrpSpPr>
+        <p:cNvPr id="1" name=""/>
+        <p:cNvGrpSpPr/>
+        <p:nvPr/>
+      </p:nvGrpSpPr>
+      <p:grpSpPr>
+        <a:xfrm>
+          <a:off x="0" y="0"/>
+          <a:ext cx="0" cy="0"/>
+          <a:chOff x="0" y="0"/>
+          <a:chExt cx="0" cy="0"/>
+        </a:xfrm>
+      </p:grpSpPr>
+      <p:sp>
+        <p:nvSpPr>
+          <p:cNvPr id="2" name="Shape 0"/>
+          <p:cNvSpPr/>
+          <p:nvPr/>
+        </p:nvSpPr>
+        <p:spPr>
+          <a:xfrm>
+            <a:off x="0" y="0"/>
+            <a:ext cx="9144000" cy="54864"/>
+          </a:xfrm>
+          <a:prstGeom prst="rect">
+            <a:avLst/>
+          </a:prstGeom>
+          <a:solidFill>
+            <a:srgbClr val="1A6BBF"/>
+          </a:solidFill>
+          <a:ln w="12700">
+            <a:solidFill>
+              <a:srgbClr val="1A6BBF"/>
+            </a:solidFill>
+            <a:prstDash val="solid"/>
+          </a:ln>
+        </p:spPr>
+        <p:txBody>
+          <a:bodyPr/>
+          <a:p/>
+        </p:txBody>
+      </p:sp>
+      <p:sp>
+        <p:nvSpPr>
+          <p:cNvPr id="3" name="Text 1"/>
+          <p:cNvSpPr/>
+          <p:nvPr/>
+        </p:nvSpPr>
+        <p:spPr>
+          <a:xfrm>
+            <a:off x="365760" y="164592"/>
+            <a:ext cx="8229600" cy="457200"/>
+          </a:xfrm>
+          <a:prstGeom prst="rect">
+            <a:avLst/>
+          </a:prstGeom>
+          <a:noFill/>
+          <a:ln/>
+        </p:spPr>
+        <p:txBody>
+          <a:bodyPr wrap="square" rtlCol="0" anchor="ctr"/>
+          <a:lstStyle/>
+          <a:p>
+            <a:pPr indent="0" marL="0">
+              <a:buNone/>
+            </a:pPr>
+            <a:r>
+              <a:rPr lang="en-US" sz="2200" b="1" dirty="0">
+                <a:solidFill>
+                  <a:srgbClr val="FFFFFF"/>
+                </a:solidFill>
+              </a:rPr>
+              <a:t>Disclaimer &amp; Contact</a:t>
+            </a:r>
+            <a:endParaRPr lang="en-US" sz="2200" dirty="0"/>
+          </a:p>
+        </p:txBody>
+      </p:sp>
+      <p:sp>
+        <p:nvSpPr>
+          <p:cNvPr id="4" name="Shape 2"/>
+          <p:cNvSpPr/>
+          <p:nvPr/>
+        </p:nvSpPr>
+        <p:spPr>
+          <a:xfrm>
+            <a:off x="365760" y="777240"/>
+            <a:ext cx="8412480" cy="1920240"/>
+          </a:xfrm>
+          <a:prstGeom prst="rect">
+            <a:avLst/>
+          </a:prstGeom>
+          <a:solidFill>
+            <a:srgbClr val="1A1200"/>
+          </a:solidFill>
+          <a:ln w="19050">
+            <a:solidFill>
+              <a:srgbClr val="F59E0B"/>
+            </a:solidFill>
+            <a:prstDash val="solid"/>
+          </a:ln>
+        </p:spPr>
+        <p:txBody>
+          <a:bodyPr/>
+          <a:p/>
+        </p:txBody>
+      </p:sp>
+      <p:sp>
+        <p:nvSpPr>
+          <p:cNvPr id="5" name="Text 3"/>
+          <p:cNvSpPr/>
+          <p:nvPr/>
+        </p:nvSpPr>
+        <p:spPr>
+          <a:xfrm>
+            <a:off x="548640" y="841248"/>
+            <a:ext cx="8046720" cy="320040"/>
+          </a:xfrm>
+          <a:prstGeom prst="rect">
+            <a:avLst/>
+          </a:prstGeom>
+          <a:noFill/>
+          <a:ln/>
+        </p:spPr>
+        <p:txBody>
+          <a:bodyPr wrap="square" lIns="0" tIns="0" rIns="0" bIns="0" rtlCol="0" anchor="ctr"/>
+          <a:lstStyle/>
+          <a:p>
+            <a:pPr indent="0" marL="0">
+              <a:buNone/>
+            </a:pPr>
+            <a:r>
+              <a:rPr lang="en-US" sz="1100" b="1" dirty="0">
+                <a:solidFill>
+                  <a:srgbClr val="F59E0B"/>
+                </a:solidFill>
+              </a:rPr>
+              <a:t>⚠️  Legal Disclaimer</a:t>
+            </a:r>
+            <a:endParaRPr lang="en-US" sz="1100" dirty="0"/>
+          </a:p>
+        </p:txBody>
+      </p:sp>
+      <p:sp>
+        <p:nvSpPr>
+          <p:cNvPr id="6" name="Text 4"/>
+          <p:cNvSpPr/>
+          <p:nvPr/>
+        </p:nvSpPr>
+        <p:spPr>
+          <a:xfrm>
+            <a:off x="548640" y="1188720"/>
+            <a:ext cx="8046720" cy="1371600"/>
+          </a:xfrm>
+          <a:prstGeom prst="rect">
+            <a:avLst/>
+          </a:prstGeom>
+          <a:noFill/>
+          <a:ln/>
+        </p:spPr>
+        <p:txBody>
+          <a:bodyPr wrap="square" lIns="0" tIns="0" rIns="0" bIns="0" rtlCol="0" anchor="ctr"/>
+          <a:lstStyle/>
+          <a:p>
+            <a:pPr indent="0" marL="0">
+              <a:buNone/>
+            </a:pPr>
+            <a:r>
+              <a:rPr lang="en-US" sz="950" dirty="0">
+                <a:solidFill>
+                  <a:srgbClr val="C0C8D8"/>
+                </a:solidFill>
+              </a:rPr>
+              <a:t>This application is based on the mental accounts portfolio optimisation framework of Das &amp; Statman (2009) and Das, Markowitz, Scheid &amp; Statman (2010), as extended in Jeddou (2012). It is provided for educational and research purposes only and does not constitute financial advice, investment recommendations, or a solicitation to buy or sell any financial instrument. Results are purely illustrative and should not be used as the basis for any investment decision.</a:t>
+            </a:r>
+            <a:endParaRPr lang="en-US" sz="950" dirty="0"/>
+          </a:p>
+        </p:txBody>
+      </p:sp>
+      <p:sp>
+        <p:nvSpPr>
+          <p:cNvPr id="7" name="Shape 5"/>
+          <p:cNvSpPr/>
+          <p:nvPr/>
+        </p:nvSpPr>
+        <p:spPr>
+          <a:xfrm>
+            <a:off x="365760" y="2834640"/>
+            <a:ext cx="8412480" cy="1234440"/>
+          </a:xfrm>
+          <a:prstGeom prst="rect">
+            <a:avLst/>
+          </a:prstGeom>
+          <a:solidFill>
+            <a:srgbClr val="0D1A2E"/>
+          </a:solidFill>
+          <a:ln w="12700">
+            <a:solidFill>
+              <a:srgbClr val="1A6BBF"/>
+            </a:solidFill>
+            <a:prstDash val="solid"/>
+          </a:ln>
+        </p:spPr>
+        <p:txBody>
+          <a:bodyPr/>
+          <a:p/>
+        </p:txBody>
+      </p:sp>
+      <p:sp>
+        <p:nvSpPr>
+          <p:cNvPr id="8" name="Text 6"/>
+          <p:cNvSpPr/>
+          <p:nvPr/>
+        </p:nvSpPr>
+        <p:spPr>
+          <a:xfrm>
+            <a:off x="548640" y="2889504"/>
+            <a:ext cx="8046720" cy="274320"/>
+          </a:xfrm>
+          <a:prstGeom prst="rect">
+            <a:avLst/>
+          </a:prstGeom>
+          <a:noFill/>
+          <a:ln/>
+        </p:spPr>
+        <p:txBody>
+          <a:bodyPr wrap="square" lIns="0" tIns="0" rIns="0" bIns="0" rtlCol="0" anchor="ctr"/>
+          <a:lstStyle/>
+          <a:p>
+            <a:pPr indent="0" marL="0">
+              <a:buNone/>
+            </a:pPr>
+            <a:r>
+              <a:rPr lang="en-US" sz="1000" b="1" dirty="0">
+                <a:solidFill>
+                  <a:srgbClr val="4A9EFF"/>
+                </a:solidFill>
+              </a:rPr>
+              <a:t>Academic References</a:t>
+            </a:r>
+            <a:endParaRPr lang="en-US" sz="1000" dirty="0"/>
+          </a:p>
+        </p:txBody>
+      </p:sp>
+      <p:sp>
+        <p:nvSpPr>
+          <p:cNvPr id="9" name="Text 7"/>
+          <p:cNvSpPr/>
+          <p:nvPr/>
+        </p:nvSpPr>
+        <p:spPr>
+          <a:xfrm>
+            <a:off x="548640" y="3200400"/>
+            <a:ext cx="8046720" cy="256032"/>
+          </a:xfrm>
+          <a:prstGeom prst="rect">
+            <a:avLst/>
+          </a:prstGeom>
+          <a:noFill/>
+          <a:ln/>
+        </p:spPr>
+        <p:txBody>
+          <a:bodyPr wrap="square" rtlCol="0" anchor="ctr"/>
+          <a:lstStyle/>
+          <a:p>
+            <a:pPr indent="0" marL="0">
+              <a:buNone/>
+            </a:pPr>
+            <a:r>
+              <a:rPr lang="en-US" sz="850" b="1" dirty="0">
+                <a:solidFill>
+                  <a:srgbClr val="4A9EFF"/>
+                </a:solidFill>
+              </a:rPr>
+              <a:t xml:space="preserve">▸  </a:t>
+            </a:r>
+            <a:pPr indent="0" marL="0">
+              <a:buNone/>
+            </a:pPr>
+            <a:r>
+              <a:rPr lang="en-US" sz="850" dirty="0">
+                <a:solidFill>
+                  <a:srgbClr val="C0C8D8"/>
+                </a:solidFill>
+              </a:rPr>
+              <a:t>Das, S. &amp; Statman, M. (2009) — Beyond Mean-Variance: Portfolios with Derivatives and Non-Normal Returns in Mental Accounts</a:t>
+            </a:r>
+            <a:endParaRPr lang="en-US" sz="850" dirty="0"/>
+          </a:p>
+        </p:txBody>
+      </p:sp>
+      <p:sp>
+        <p:nvSpPr>
+          <p:cNvPr id="10" name="Text 8"/>
+          <p:cNvSpPr/>
+          <p:nvPr/>
+        </p:nvSpPr>
+        <p:spPr>
+          <a:xfrm>
+            <a:off x="548640" y="3474720"/>
+            <a:ext cx="8046720" cy="256032"/>
+          </a:xfrm>
+          <a:prstGeom prst="rect">
+            <a:avLst/>
+          </a:prstGeom>
+          <a:noFill/>
+          <a:ln/>
+        </p:spPr>
+        <p:txBody>
+          <a:bodyPr wrap="square" rtlCol="0" anchor="ctr"/>
+          <a:lstStyle/>
+          <a:p>
+            <a:pPr indent="0" marL="0">
+              <a:buNone/>
+            </a:pPr>
+            <a:r>
+              <a:rPr lang="en-US" sz="850" b="1" dirty="0">
+                <a:solidFill>
+                  <a:srgbClr val="4A9EFF"/>
+                </a:solidFill>
+              </a:rPr>
+              <a:t xml:space="preserve">▸  </a:t>
+            </a:r>
+            <a:pPr indent="0" marL="0">
+              <a:buNone/>
+            </a:pPr>
+            <a:r>
+              <a:rPr lang="en-US" sz="850" dirty="0">
+                <a:solidFill>
+                  <a:srgbClr val="C0C8D8"/>
+                </a:solidFill>
+              </a:rPr>
+              <a:t>Das, S., Markowitz, H., Scheid, J. &amp; Statman, M. (2010) — Portfolio Optimization with Mental Accounts, JFQA Vol.45 No.2</a:t>
+            </a:r>
+            <a:endParaRPr lang="en-US" sz="850" dirty="0"/>
+          </a:p>
+        </p:txBody>
+      </p:sp>
+      <p:sp>
+        <p:nvSpPr>
+          <p:cNvPr id="11" name="Text 9"/>
+          <p:cNvSpPr/>
+          <p:nvPr/>
+        </p:nvSpPr>
+        <p:spPr>
+          <a:xfrm>
+            <a:off x="548640" y="3749040"/>
+            <a:ext cx="8046720" cy="256032"/>
+          </a:xfrm>
+          <a:prstGeom prst="rect">
+            <a:avLst/>
+          </a:prstGeom>
+          <a:noFill/>
+          <a:ln/>
+        </p:spPr>
+        <p:txBody>
+          <a:bodyPr wrap="square" rtlCol="0" anchor="ctr"/>
+          <a:lstStyle/>
+          <a:p>
+            <a:pPr indent="0" marL="0">
+              <a:buNone/>
+            </a:pPr>
+            <a:r>
+              <a:rPr lang="en-US" sz="850" b="1" dirty="0">
+                <a:solidFill>
+                  <a:srgbClr val="4A9EFF"/>
+                </a:solidFill>
+              </a:rPr>
+              <a:t xml:space="preserve">▸  </a:t>
+            </a:r>
+            <a:pPr indent="0" marL="0">
+              <a:buNone/>
+            </a:pPr>
+            <a:r>
+              <a:rPr lang="en-US" sz="850" dirty="0">
+                <a:solidFill>
+                  <a:srgbClr val="C0C8D8"/>
+                </a:solidFill>
+              </a:rPr>
+              <a:t>Jeddou, S. (2012) — Beyond Mean-Variance: Options and Structured Products in Behavioral Portfolios, MSc Finance, USI Lugano</a:t>
+            </a:r>
+            <a:endParaRPr lang="en-US" sz="850" dirty="0"/>
+          </a:p>
+        </p:txBody>
+      </p:sp>
+      <p:sp>
+        <p:nvSpPr>
+          <p:cNvPr id="12" name="Text 10"/>
+          <p:cNvSpPr/>
+          <p:nvPr/>
+        </p:nvSpPr>
+        <p:spPr>
+          <a:xfrm>
+            <a:off x="365760" y="4526280"/>
+            <a:ext cx="8412480" cy="320040"/>
+          </a:xfrm>
+          <a:prstGeom prst="rect">
+            <a:avLst/>
+          </a:prstGeom>
+          <a:noFill/>
+          <a:ln/>
+        </p:spPr>
+        <p:txBody>
+          <a:bodyPr wrap="square" rtlCol="0" anchor="ctr"/>
+          <a:lstStyle/>
+          <a:p>
+            <a:pPr algn="ctr" indent="0" marL="0">
+              <a:buNone/>
+            </a:pPr>
+            <a:r>
+              <a:rPr lang="en-US" sz="950" dirty="0">
+                <a:solidFill>
+                  <a:srgbClr val="4A9EFF"/>
+                </a:solidFill>
+              </a:rPr>
+              <a:t xml:space="preserve">🔗  </a:t>
+            </a:r>
+            <a:pPr algn="ctr" indent="0" marL="0">
+              <a:buNone/>
+            </a:pPr>
+            <a:r>
+              <a:rPr lang="en-US" sz="950" dirty="0">
+                <a:solidFill>
+                  <a:srgbClr val="4A9EFF"/>
+                </a:solidFill>
+                <a:hlinkClick r:id="rId4"/>
+              </a:rPr>
+              <a:t>sami-jeddou-behavioral-portfolio-optimizer.streamlit.app</a:t>
+            </a:r>
+            <a:pPr algn="ctr" indent="0" marL="0">
+              <a:buNone/>
+            </a:pPr>
+            <a:r>
+              <a:rPr lang="en-US" sz="950" dirty="0">
+                <a:solidFill>
+                  <a:srgbClr val="556A8A"/>
+                </a:solidFill>
+                <a:hlinkClick r:id="rId3"/>
+              </a:rPr>
+              <a:t xml:space="preserve">   |   🔗  LinkedIn</a:t>
+            </a:r>
+            <a:endParaRPr lang="en-US" sz="950" dirty="0"/>
+          </a:p>
+        </p:txBody>
+      </p:sp>
+      <p:sp>
+        <p:nvSpPr>
+          <p:cNvPr id="13" name="Text 11"/>
+          <p:cNvSpPr/>
+          <p:nvPr/>
+        </p:nvSpPr>
+        <p:spPr>
+          <a:xfrm>
+            <a:off x="8046720" y="4754880"/>
+            <a:ext cx="914400" cy="274320"/>
+          </a:xfrm>
+          <a:prstGeom prst="rect">
+            <a:avLst/>
+          </a:prstGeom>
+          <a:noFill/>
+          <a:ln/>
+        </p:spPr>
+        <p:txBody>
+          <a:bodyPr wrap="square" rtlCol="0" anchor="ctr"/>
+          <a:lstStyle/>
+          <a:p>
+            <a:pPr algn="r" indent="0" marL="0">
+              <a:buNone/>
+            </a:pPr>
+            <a:r>
+              <a:rPr lang="en-US" sz="900" dirty="0">
+                <a:solidFill>
+                  <a:srgbClr val="556A8A"/>
+                </a:solidFill>
+              </a:rPr>
+              <a:t>22 / 22</a:t>
+            </a:r>
+            <a:endParaRPr lang="en-US" sz="900" dirty="0"/>
+          </a:p>
+        </p:txBody>
+      </p:sp>
+      <p:sp>
+        <p:nvSpPr>
+          <p:cNvPr id="14" name="Text 12"/>
+          <p:cNvSpPr/>
+          <p:nvPr/>
+        </p:nvSpPr>
+        <p:spPr>
+          <a:xfrm>
+            <a:off x="365760" y="4754880"/>
+            <a:ext cx="6400800" cy="274320"/>
+          </a:xfrm>
+          <a:prstGeom prst="rect">
+            <a:avLst/>
+          </a:prstGeom>
+          <a:noFill/>
+          <a:ln/>
+        </p:spPr>
+        <p:txBody>
+          <a:bodyPr wrap="square" rtlCol="0" anchor="ctr"/>
+          <a:lstStyle/>
+          <a:p>
+            <a:pPr algn="l" indent="0" marL="0">
+              <a:buNone/>
+            </a:pPr>
+            <a:r>
+              <a:rPr lang="en-US" sz="900" dirty="0">
+                <a:solidFill>
+                  <a:srgbClr val="556A8A"/>
+                </a:solidFill>
+              </a:rPr>
+              <a:t>Beyond Mean-Variance Portfolio Optimiser — User Guide</a:t>
+            </a:r>
+            <a:endParaRPr lang="en-US" sz="900" dirty="0"/>
+          </a:p>
+        </p:txBody>
+      </p:sp>
     </p:spTree>
   </p:cSld>
   <p:clrMapOvr>
@@ -9507,7 +12525,7 @@
                   <a:srgbClr val="556A8A"/>
                 </a:solidFill>
               </a:rPr>
-              <a:t>3 / 19</a:t>
+              <a:t>3 / 22</a:t>
             </a:r>
             <a:endParaRPr lang="en-US" sz="900" dirty="0"/>
           </a:p>
@@ -10626,7 +13644,7 @@
                   <a:srgbClr val="556A8A"/>
                 </a:solidFill>
               </a:rPr>
-              <a:t>4 / 19</a:t>
+              <a:t>4 / 22</a:t>
             </a:r>
             <a:endParaRPr lang="en-US" sz="900" dirty="0"/>
           </a:p>
@@ -11477,7 +14495,7 @@
                   <a:srgbClr val="556A8A"/>
                 </a:solidFill>
               </a:rPr>
-              <a:t>5 / 19</a:t>
+              <a:t>5 / 22</a:t>
             </a:r>
             <a:endParaRPr lang="en-US" sz="900" dirty="0"/>
           </a:p>
@@ -12247,7 +15265,7 @@
                   <a:srgbClr val="556A8A"/>
                 </a:solidFill>
               </a:rPr>
-              <a:t>6 / 19</a:t>
+              <a:t>6 / 22</a:t>
             </a:r>
             <a:endParaRPr lang="en-US" sz="900" dirty="0"/>
           </a:p>
@@ -12870,7 +15888,7 @@
                   <a:srgbClr val="556A8A"/>
                 </a:solidFill>
               </a:rPr>
-              <a:t>7 / 19</a:t>
+              <a:t>7 / 22</a:t>
             </a:r>
             <a:endParaRPr lang="en-US" sz="900" dirty="0"/>
           </a:p>
@@ -13678,7 +16696,7 @@
                   <a:srgbClr val="556A8A"/>
                 </a:solidFill>
               </a:rPr>
-              <a:t>8 / 19</a:t>
+              <a:t>8 / 22</a:t>
             </a:r>
             <a:endParaRPr lang="en-US" sz="900" dirty="0"/>
           </a:p>
@@ -14519,7 +17537,7 @@
                   <a:srgbClr val="556A8A"/>
                 </a:solidFill>
               </a:rPr>
-              <a:t>9 / 19</a:t>
+              <a:t>9 / 22</a:t>
             </a:r>
             <a:endParaRPr lang="en-US" sz="900" dirty="0"/>
           </a:p>
